--- a/docs/Inferenza di una rete neurale nel kernel Linux con eBPF XDP.pptx
+++ b/docs/Inferenza di una rete neurale nel kernel Linux con eBPF XDP.pptx
@@ -231,19 +231,19 @@
                 <c:formatCode>General</c:formatCode>
                 <c:ptCount val="5"/>
                 <c:pt idx="0">
-                  <c:v>30</c:v>
+                  <c:v>17</c:v>
                 </c:pt>
                 <c:pt idx="1">
-                  <c:v>59</c:v>
+                  <c:v>36</c:v>
                 </c:pt>
                 <c:pt idx="2">
-                  <c:v>79</c:v>
+                  <c:v>42</c:v>
                 </c:pt>
                 <c:pt idx="3">
-                  <c:v>271</c:v>
+                  <c:v>173</c:v>
                 </c:pt>
                 <c:pt idx="4">
-                  <c:v>428</c:v>
+                  <c:v>258</c:v>
                 </c:pt>
               </c:numCache>
             </c:numRef>
@@ -2110,12 +2110,20 @@
             <c:idx val="1"/>
             <c:spPr>
               <a:solidFill>
+                <a:srgbClr val="F2B134"/>
+              </a:solidFill>
+            </c:spPr>
+          </c:dPt>
+          <c:dPt>
+            <c:idx val="2"/>
+            <c:spPr>
+              <a:solidFill>
                 <a:srgbClr val="E07A2D"/>
               </a:solidFill>
             </c:spPr>
           </c:dPt>
           <c:dPt>
-            <c:idx val="2"/>
+            <c:idx val="3"/>
             <c:spPr>
               <a:solidFill>
                 <a:srgbClr val="2E9C6E"/>
@@ -2124,38 +2132,45 @@
           </c:dPt>
           <c:cat>
             <c:strRef>
-              <c:f>Sheet1!$A$2:$A$4</c:f>
+              <c:f>Sheet1!$A$2:$A$5</c:f>
               <c:strCache>
-                <c:ptCount val="3"/>
+                <c:ptCount val="4"/>
                 <c:pt idx="0">
-                  <c:v>P1 / P1.5
-compilate sul nodo</c:v>
+                  <c:v>P1 con BCC
+(compila sul nodo)</c:v>
                 </c:pt>
                 <c:pt idx="1">
-                  <c:v>P1 / P1.5
-precompilate (AOT)</c:v>
+                  <c:v>P1 AOT: genera,
+compila e carica</c:v>
                 </c:pt>
                 <c:pt idx="2">
-                  <c:v>P2 / P3
-scrivere la tabella</c:v>
+                  <c:v>P1 AOT:
+carica sul nodo</c:v>
+                </c:pt>
+                <c:pt idx="3">
+                  <c:v>P2 / P3:
+scrive la tabella</c:v>
                 </c:pt>
               </c:strCache>
             </c:strRef>
           </c:cat>
           <c:val>
             <c:numRef>
-              <c:f>Sheet1!$B$2:$B$4</c:f>
+              <c:f>Sheet1!$B$2:$B$5</c:f>
               <c:numCache>
                 <c:formatCode>General</c:formatCode>
-                <c:ptCount val="3"/>
+                <c:ptCount val="4"/>
                 <c:pt idx="0">
                   <c:v>741</c:v>
                 </c:pt>
                 <c:pt idx="1">
-                  <c:v>10</c:v>
+                  <c:v>90</c:v>
                 </c:pt>
                 <c:pt idx="2">
-                  <c:v>7</c:v>
+                  <c:v>6</c:v>
+                </c:pt>
+                <c:pt idx="3">
+                  <c:v>5</c:v>
                 </c:pt>
               </c:numCache>
             </c:numRef>
@@ -2186,7 +2201,7 @@
           <c:showBubbleSize val="0"/>
           <c:showLeaderLines val="1"/>
         </c:dLbls>
-        <c:gapWidth val="55"/>
+        <c:gapWidth val="45"/>
         <c:axId val="-2068027336"/>
         <c:axId val="-2113994440"/>
       </c:barChart>
@@ -2388,19 +2403,19 @@
                 <c:formatCode>General</c:formatCode>
                 <c:ptCount val="5"/>
                 <c:pt idx="0">
-                  <c:v>57.0</c:v>
+                  <c:v>40.0</c:v>
                 </c:pt>
                 <c:pt idx="1">
-                  <c:v>55.0</c:v>
+                  <c:v>39.0</c:v>
                 </c:pt>
                 <c:pt idx="2">
-                  <c:v>60.0</c:v>
+                  <c:v>37.0</c:v>
                 </c:pt>
                 <c:pt idx="3">
-                  <c:v>56.0</c:v>
+                  <c:v>32.0</c:v>
                 </c:pt>
                 <c:pt idx="4">
-                  <c:v>59.0</c:v>
+                  <c:v>37.0</c:v>
                 </c:pt>
               </c:numCache>
             </c:numRef>
@@ -2472,19 +2487,19 @@
                 <c:formatCode>General</c:formatCode>
                 <c:ptCount val="5"/>
                 <c:pt idx="0">
-                  <c:v>64.0</c:v>
+                  <c:v>39.0</c:v>
                 </c:pt>
                 <c:pt idx="1">
-                  <c:v>65.0</c:v>
+                  <c:v>43.0</c:v>
                 </c:pt>
                 <c:pt idx="2">
-                  <c:v>67.0</c:v>
+                  <c:v>48.0</c:v>
                 </c:pt>
                 <c:pt idx="3">
-                  <c:v>65.0</c:v>
+                  <c:v>38.0</c:v>
                 </c:pt>
                 <c:pt idx="4">
-                  <c:v>67.0</c:v>
+                  <c:v>44.0</c:v>
                 </c:pt>
               </c:numCache>
             </c:numRef>
@@ -2556,19 +2571,19 @@
                 <c:formatCode>General</c:formatCode>
                 <c:ptCount val="5"/>
                 <c:pt idx="0">
-                  <c:v>269.0</c:v>
+                  <c:v>156.0</c:v>
                 </c:pt>
                 <c:pt idx="1">
-                  <c:v>265.0</c:v>
+                  <c:v>156.0</c:v>
                 </c:pt>
                 <c:pt idx="2">
-                  <c:v>269.0</c:v>
+                  <c:v>168.0</c:v>
                 </c:pt>
                 <c:pt idx="3">
-                  <c:v>265.0</c:v>
+                  <c:v>153.0</c:v>
                 </c:pt>
                 <c:pt idx="4">
-                  <c:v>266.0</c:v>
+                  <c:v>152.0</c:v>
                 </c:pt>
               </c:numCache>
             </c:numRef>
@@ -2640,19 +2655,19 @@
                 <c:formatCode>General</c:formatCode>
                 <c:ptCount val="5"/>
                 <c:pt idx="0">
-                  <c:v>448.0</c:v>
+                  <c:v>255.0</c:v>
                 </c:pt>
                 <c:pt idx="1">
-                  <c:v>429.0</c:v>
+                  <c:v>265.0</c:v>
                 </c:pt>
                 <c:pt idx="2">
-                  <c:v>430.0</c:v>
+                  <c:v>272.0</c:v>
                 </c:pt>
                 <c:pt idx="3">
-                  <c:v>422.0</c:v>
+                  <c:v>259.0</c:v>
                 </c:pt>
                 <c:pt idx="4">
-                  <c:v>422.0</c:v>
+                  <c:v>264.0</c:v>
                 </c:pt>
               </c:numCache>
             </c:numRef>
@@ -2726,7 +2741,7 @@
       <c:valAx>
         <c:axId val="2140495176"/>
         <c:scaling>
-          <c:max val="600.0"/>
+          <c:max val="350.0"/>
           <c:min val="0.0"/>
         </c:scaling>
         <c:delete val="0"/>
@@ -2901,16 +2916,16 @@
                 <c:formatCode>General</c:formatCode>
                 <c:ptCount val="4"/>
                 <c:pt idx="0">
-                  <c:v>41.0</c:v>
+                  <c:v>24.0</c:v>
                 </c:pt>
                 <c:pt idx="1">
-                  <c:v>59.0</c:v>
+                  <c:v>35.0</c:v>
                 </c:pt>
                 <c:pt idx="2">
-                  <c:v>81.0</c:v>
+                  <c:v>49.0</c:v>
                 </c:pt>
                 <c:pt idx="3">
-                  <c:v>109.0</c:v>
+                  <c:v>58.0</c:v>
                 </c:pt>
               </c:numCache>
             </c:numRef>
@@ -2979,16 +2994,16 @@
                 <c:formatCode>General</c:formatCode>
                 <c:ptCount val="4"/>
                 <c:pt idx="0">
-                  <c:v>50.0</c:v>
+                  <c:v>39.0</c:v>
                 </c:pt>
                 <c:pt idx="1">
-                  <c:v>67.0</c:v>
+                  <c:v>41.0</c:v>
                 </c:pt>
                 <c:pt idx="2">
-                  <c:v>88.0</c:v>
+                  <c:v>49.0</c:v>
                 </c:pt>
                 <c:pt idx="3">
-                  <c:v>122.0</c:v>
+                  <c:v>63.0</c:v>
                 </c:pt>
               </c:numCache>
             </c:numRef>
@@ -3057,16 +3072,16 @@
                 <c:formatCode>General</c:formatCode>
                 <c:ptCount val="4"/>
                 <c:pt idx="0">
-                  <c:v>250.0</c:v>
+                  <c:v>153.0</c:v>
                 </c:pt>
                 <c:pt idx="1">
-                  <c:v>271.0</c:v>
+                  <c:v>159.0</c:v>
                 </c:pt>
                 <c:pt idx="2">
-                  <c:v>286.0</c:v>
+                  <c:v>163.0</c:v>
                 </c:pt>
                 <c:pt idx="3">
-                  <c:v>314.0</c:v>
+                  <c:v>172.0</c:v>
                 </c:pt>
               </c:numCache>
             </c:numRef>
@@ -3135,16 +3150,16 @@
                 <c:formatCode>General</c:formatCode>
                 <c:ptCount val="4"/>
                 <c:pt idx="0">
-                  <c:v>401.0</c:v>
+                  <c:v>239.0</c:v>
                 </c:pt>
                 <c:pt idx="1">
-                  <c:v>438.0</c:v>
+                  <c:v>255.0</c:v>
                 </c:pt>
                 <c:pt idx="2">
-                  <c:v>573.0</c:v>
+                  <c:v>286.0</c:v>
                 </c:pt>
                 <c:pt idx="3">
-                  <c:v>530.0</c:v>
+                  <c:v>298.0</c:v>
                 </c:pt>
               </c:numCache>
             </c:numRef>
@@ -3218,7 +3233,7 @@
       <c:valAx>
         <c:axId val="2140495176"/>
         <c:scaling>
-          <c:max val="600.0"/>
+          <c:max val="350.0"/>
           <c:min val="0.0"/>
         </c:scaling>
         <c:delete val="0"/>
@@ -3726,22 +3741,22 @@
                 <c:formatCode>General</c:formatCode>
                 <c:ptCount val="6"/>
                 <c:pt idx="0">
-                  <c:v>53.0</c:v>
+                  <c:v>37.0</c:v>
                 </c:pt>
                 <c:pt idx="1">
-                  <c:v>60.0</c:v>
+                  <c:v>35.0</c:v>
                 </c:pt>
                 <c:pt idx="2">
-                  <c:v>60.0</c:v>
+                  <c:v>46.0</c:v>
                 </c:pt>
                 <c:pt idx="3">
-                  <c:v>70.0</c:v>
+                  <c:v>44.0</c:v>
                 </c:pt>
                 <c:pt idx="4">
-                  <c:v>75.0</c:v>
+                  <c:v>45.0</c:v>
                 </c:pt>
                 <c:pt idx="5">
-                  <c:v>80.0</c:v>
+                  <c:v>49.0</c:v>
                 </c:pt>
               </c:numCache>
             </c:numRef>
@@ -3816,22 +3831,22 @@
                 <c:formatCode>General</c:formatCode>
                 <c:ptCount val="6"/>
                 <c:pt idx="0">
-                  <c:v>61.0</c:v>
+                  <c:v>37.0</c:v>
                 </c:pt>
                 <c:pt idx="1">
-                  <c:v>69.0</c:v>
+                  <c:v>43.0</c:v>
                 </c:pt>
                 <c:pt idx="2">
-                  <c:v>40.0</c:v>
+                  <c:v>46.0</c:v>
                 </c:pt>
                 <c:pt idx="3">
-                  <c:v>79.0</c:v>
+                  <c:v>47.0</c:v>
                 </c:pt>
                 <c:pt idx="4">
-                  <c:v>85.0</c:v>
+                  <c:v>50.0</c:v>
                 </c:pt>
                 <c:pt idx="5">
-                  <c:v>88.0</c:v>
+                  <c:v>52.0</c:v>
                 </c:pt>
               </c:numCache>
             </c:numRef>
@@ -3906,22 +3921,22 @@
                 <c:formatCode>General</c:formatCode>
                 <c:ptCount val="6"/>
                 <c:pt idx="0">
-                  <c:v>131.0</c:v>
+                  <c:v>142.0</c:v>
                 </c:pt>
                 <c:pt idx="1">
-                  <c:v>270.0</c:v>
+                  <c:v>162.0</c:v>
                 </c:pt>
                 <c:pt idx="2">
-                  <c:v>305.0</c:v>
+                  <c:v>176.0</c:v>
                 </c:pt>
                 <c:pt idx="3">
-                  <c:v>333.0</c:v>
+                  <c:v>197.0</c:v>
                 </c:pt>
                 <c:pt idx="4">
-                  <c:v>384.0</c:v>
+                  <c:v>229.0</c:v>
                 </c:pt>
                 <c:pt idx="5">
-                  <c:v>421.0</c:v>
+                  <c:v>278.0</c:v>
                 </c:pt>
               </c:numCache>
             </c:numRef>
@@ -3996,22 +4011,22 @@
                 <c:formatCode>General</c:formatCode>
                 <c:ptCount val="6"/>
                 <c:pt idx="0">
-                  <c:v>347.0</c:v>
+                  <c:v>204.0</c:v>
                 </c:pt>
                 <c:pt idx="1">
-                  <c:v>438.0</c:v>
+                  <c:v>254.0</c:v>
                 </c:pt>
                 <c:pt idx="2">
-                  <c:v>492.0</c:v>
+                  <c:v>292.0</c:v>
                 </c:pt>
                 <c:pt idx="3">
-                  <c:v>572.0</c:v>
+                  <c:v>323.0</c:v>
                 </c:pt>
                 <c:pt idx="4">
-                  <c:v>630.0</c:v>
+                  <c:v>398.0</c:v>
                 </c:pt>
                 <c:pt idx="5">
-                  <c:v>699.0</c:v>
+                  <c:v>413.0</c:v>
                 </c:pt>
               </c:numCache>
             </c:numRef>
@@ -4085,7 +4100,7 @@
       <c:valAx>
         <c:axId val="2140495176"/>
         <c:scaling>
-          <c:max val="750.0"/>
+          <c:max val="450.0"/>
           <c:min val="0.0"/>
         </c:scaling>
         <c:delete val="0"/>
@@ -4263,19 +4278,19 @@
                 <c:formatCode>General</c:formatCode>
                 <c:ptCount val="5"/>
                 <c:pt idx="0">
-                  <c:v>81.0</c:v>
+                  <c:v>48.0</c:v>
                 </c:pt>
                 <c:pt idx="1">
-                  <c:v>73.0</c:v>
+                  <c:v>49.0</c:v>
                 </c:pt>
                 <c:pt idx="2">
-                  <c:v>70.0</c:v>
+                  <c:v>41.0</c:v>
                 </c:pt>
                 <c:pt idx="3">
-                  <c:v>90.0</c:v>
+                  <c:v>53.0</c:v>
                 </c:pt>
                 <c:pt idx="4">
-                  <c:v>85.0</c:v>
+                  <c:v>59.0</c:v>
                 </c:pt>
               </c:numCache>
             </c:numRef>
@@ -4347,19 +4362,19 @@
                 <c:formatCode>General</c:formatCode>
                 <c:ptCount val="5"/>
                 <c:pt idx="0">
-                  <c:v>86.0</c:v>
+                  <c:v>54.0</c:v>
                 </c:pt>
                 <c:pt idx="1">
-                  <c:v>85.0</c:v>
+                  <c:v>52.0</c:v>
                 </c:pt>
                 <c:pt idx="2">
-                  <c:v>80.0</c:v>
+                  <c:v>51.0</c:v>
                 </c:pt>
                 <c:pt idx="3">
-                  <c:v>98.0</c:v>
+                  <c:v>62.0</c:v>
                 </c:pt>
                 <c:pt idx="4">
-                  <c:v>95.0</c:v>
+                  <c:v>54.0</c:v>
                 </c:pt>
               </c:numCache>
             </c:numRef>
@@ -4431,19 +4446,19 @@
                 <c:formatCode>General</c:formatCode>
                 <c:ptCount val="5"/>
                 <c:pt idx="0">
-                  <c:v>279.0</c:v>
+                  <c:v>138.0</c:v>
                 </c:pt>
                 <c:pt idx="1">
-                  <c:v>271.0</c:v>
+                  <c:v>166.0</c:v>
                 </c:pt>
                 <c:pt idx="2">
-                  <c:v>294.0</c:v>
+                  <c:v>175.0</c:v>
                 </c:pt>
                 <c:pt idx="3">
-                  <c:v>369.0</c:v>
+                  <c:v>230.0</c:v>
                 </c:pt>
                 <c:pt idx="4">
-                  <c:v>382.0</c:v>
+                  <c:v>235.0</c:v>
                 </c:pt>
               </c:numCache>
             </c:numRef>
@@ -4515,19 +4530,19 @@
                 <c:formatCode>General</c:formatCode>
                 <c:ptCount val="5"/>
                 <c:pt idx="0">
-                  <c:v>392.0</c:v>
+                  <c:v>232.0</c:v>
                 </c:pt>
                 <c:pt idx="1">
-                  <c:v>448.0</c:v>
+                  <c:v>275.0</c:v>
                 </c:pt>
                 <c:pt idx="2">
-                  <c:v>511.0</c:v>
+                  <c:v>288.0</c:v>
                 </c:pt>
                 <c:pt idx="3">
-                  <c:v>608.0</c:v>
+                  <c:v>368.0</c:v>
                 </c:pt>
                 <c:pt idx="4">
-                  <c:v>661.0</c:v>
+                  <c:v>406.0</c:v>
                 </c:pt>
               </c:numCache>
             </c:numRef>
@@ -4601,7 +4616,7 @@
       <c:valAx>
         <c:axId val="2140495176"/>
         <c:scaling>
-          <c:max val="700.0"/>
+          <c:max val="450.0"/>
           <c:min val="0.0"/>
         </c:scaling>
         <c:delete val="0"/>
@@ -4779,19 +4794,19 @@
                 <c:formatCode>General</c:formatCode>
                 <c:ptCount val="5"/>
                 <c:pt idx="0">
-                  <c:v>60.0</c:v>
+                  <c:v>35.0</c:v>
                 </c:pt>
                 <c:pt idx="1">
-                  <c:v>51.0</c:v>
+                  <c:v>29.0</c:v>
                 </c:pt>
                 <c:pt idx="2">
-                  <c:v>44.0</c:v>
+                  <c:v>25.0</c:v>
                 </c:pt>
                 <c:pt idx="3">
-                  <c:v>36.0</c:v>
+                  <c:v>20.0</c:v>
                 </c:pt>
                 <c:pt idx="4">
-                  <c:v>31.0</c:v>
+                  <c:v>18.0</c:v>
                 </c:pt>
               </c:numCache>
             </c:numRef>
@@ -4863,19 +4878,19 @@
                 <c:formatCode>General</c:formatCode>
                 <c:ptCount val="5"/>
                 <c:pt idx="0">
-                  <c:v>68.0</c:v>
+                  <c:v>45.0</c:v>
                 </c:pt>
                 <c:pt idx="1">
-                  <c:v>61.0</c:v>
+                  <c:v>42.0</c:v>
                 </c:pt>
                 <c:pt idx="2">
-                  <c:v>53.0</c:v>
+                  <c:v>30.0</c:v>
                 </c:pt>
                 <c:pt idx="3">
-                  <c:v>43.0</c:v>
+                  <c:v>29.0</c:v>
                 </c:pt>
                 <c:pt idx="4">
-                  <c:v>40.0</c:v>
+                  <c:v>23.0</c:v>
                 </c:pt>
               </c:numCache>
             </c:numRef>
@@ -4947,19 +4962,19 @@
                 <c:formatCode>General</c:formatCode>
                 <c:ptCount val="5"/>
                 <c:pt idx="0">
-                  <c:v>274.0</c:v>
+                  <c:v>163.0</c:v>
                 </c:pt>
                 <c:pt idx="1">
-                  <c:v>264.0</c:v>
+                  <c:v>156.0</c:v>
                 </c:pt>
                 <c:pt idx="2">
-                  <c:v>269.0</c:v>
+                  <c:v>156.0</c:v>
                 </c:pt>
                 <c:pt idx="3">
-                  <c:v>269.0</c:v>
+                  <c:v>158.0</c:v>
                 </c:pt>
                 <c:pt idx="4">
-                  <c:v>268.0</c:v>
+                  <c:v>164.0</c:v>
                 </c:pt>
               </c:numCache>
             </c:numRef>
@@ -5031,19 +5046,19 @@
                 <c:formatCode>General</c:formatCode>
                 <c:ptCount val="5"/>
                 <c:pt idx="0">
-                  <c:v>432.0</c:v>
+                  <c:v>264.0</c:v>
                 </c:pt>
                 <c:pt idx="1">
-                  <c:v>444.0</c:v>
+                  <c:v>266.0</c:v>
                 </c:pt>
                 <c:pt idx="2">
-                  <c:v>433.0</c:v>
+                  <c:v>248.0</c:v>
                 </c:pt>
                 <c:pt idx="3">
-                  <c:v>439.0</c:v>
+                  <c:v>251.0</c:v>
                 </c:pt>
                 <c:pt idx="4">
-                  <c:v>427.0</c:v>
+                  <c:v>242.0</c:v>
                 </c:pt>
               </c:numCache>
             </c:numRef>
@@ -5117,7 +5132,7 @@
       <c:valAx>
         <c:axId val="2140495176"/>
         <c:scaling>
-          <c:max val="500.0"/>
+          <c:max val="300.0"/>
           <c:min val="0.0"/>
         </c:scaling>
         <c:delete val="0"/>
@@ -9166,7 +9181,7 @@
                 </a:solidFill>
                 <a:latin typeface="Calibri"/>
               </a:rPr>
-              <a:t> P3 paga: 347 → 699 ns da 1 a 6 strati, perché ogni strato è un salto fra programmi (da 2 a 7).</a:t>
+              <a:t> P3 paga: 204 → 413 ns da 1 a 6 strati, perché ogni strato è un salto fra programmi (da 2 a 7).</a:t>
             </a:r>
           </a:p>
         </p:txBody>
@@ -9590,7 +9605,7 @@
                 </a:solidFill>
                 <a:latin typeface="Calibri"/>
               </a:rPr>
-              <a:t>Da 1 a 5 strati, a pesi fermi: P2 279 → 382 ns, P3 392 → 661 ns.</a:t>
+              <a:t>Da 1 a 5 strati, a pesi fermi: P2 138 → 235 ns, P3 232 → 406 ns.</a:t>
             </a:r>
           </a:p>
         </p:txBody>
@@ -9760,7 +9775,7 @@
                 </a:solidFill>
                 <a:latin typeface="Calibri"/>
               </a:rPr>
-              <a:t>70–98 ns senza un andamento: srotolano tutto in una funzione sola.</a:t>
+              <a:t>41–62 ns senza un andamento: srotolano tutto in una funzione sola.</a:t>
             </a:r>
           </a:p>
         </p:txBody>
@@ -9996,7 +10011,7 @@
                 </a:solidFill>
                 <a:latin typeface="Calibri"/>
               </a:rPr>
-              <a:t>Contando le moltiplicazioni dalla forma del modello, per P3 la retta spiega il 9 % dei punti; contando quelle eseguite, il 91 %</a:t>
+              <a:t>Contando le moltiplicazioni dalla forma del modello, per P3 la retta spiega l'11 % dei punti; contando quelle eseguite, il 92 %  ·  rimisura del 23/09</a:t>
             </a:r>
           </a:p>
         </p:txBody>
@@ -10132,7 +10147,7 @@
                           </a:solidFill>
                           <a:latin typeface="Calibri"/>
                         </a:rPr>
-                        <a:t>0,32</a:t>
+                        <a:t>0,17</a:t>
                       </a:r>
                     </a:p>
                   </a:txBody>
@@ -10180,7 +10195,7 @@
                           </a:solidFill>
                           <a:latin typeface="Calibri"/>
                         </a:rPr>
-                        <a:t>0,35</a:t>
+                        <a:t>0,23</a:t>
                       </a:r>
                     </a:p>
                   </a:txBody>
@@ -10228,7 +10243,7 @@
                           </a:solidFill>
                           <a:latin typeface="Calibri"/>
                         </a:rPr>
-                        <a:t>0,81</a:t>
+                        <a:t>0,45</a:t>
                       </a:r>
                     </a:p>
                   </a:txBody>
@@ -10276,7 +10291,7 @@
                           </a:solidFill>
                           <a:latin typeface="Calibri"/>
                         </a:rPr>
-                        <a:t>1,46</a:t>
+                        <a:t>0,91</a:t>
                       </a:r>
                     </a:p>
                   </a:txBody>
@@ -10392,7 +10407,7 @@
                 </a:solidFill>
                 <a:latin typeface="Calibri"/>
               </a:rPr>
-              <a:t>0,32 ns</a:t>
+              <a:t>0,17 ns</a:t>
             </a:r>
             <a:r>
               <a:rPr sz="1500" b="0" i="0">
@@ -10410,7 +10425,7 @@
                 </a:solidFill>
                 <a:latin typeface="Calibri"/>
               </a:rPr>
-              <a:t>1,46 ns</a:t>
+              <a:t>0,91 ns</a:t>
             </a:r>
             <a:r>
               <a:rPr sz="1500" b="0" i="0">
@@ -10843,7 +10858,7 @@
                 </a:solidFill>
                 <a:latin typeface="Calibri"/>
               </a:rPr>
-              <a:t>1 071 → 224 istruzioni, 68 → 40 ns. Il compilatore vede lo zero e cancella la moltiplicazione.</a:t>
+              <a:t>1 028 → 223 istruzioni, 45 → 23 ns. Il compilatore vede lo zero e cancella la moltiplicazione.</a:t>
             </a:r>
           </a:p>
         </p:txBody>
@@ -21222,7 +21237,7 @@
                           </a:solidFill>
                           <a:latin typeface="Calibri"/>
                         </a:rPr>
-                        <a:t>9–10 ms con l'oggetto precompilato</a:t>
+                        <a:t>5–8 ms sul nodo; &lt; 0,15 s anche compilando</a:t>
                       </a:r>
                     </a:p>
                   </a:txBody>
@@ -21245,7 +21260,7 @@
                           </a:solidFill>
                           <a:latin typeface="Calibri"/>
                         </a:rPr>
-                        <a:t>il compilatore non gira più sul nodo</a:t>
+                        <a:t>l'1,5 s era BCC, non il compilatore</a:t>
                       </a:r>
                     </a:p>
                   </a:txBody>
@@ -26482,7 +26497,7 @@
                 </a:solidFill>
                 <a:latin typeface="Calibri"/>
               </a:rPr>
-              <a:t>La configurabilità si paga per pacchetto: 59 → 428 ns</a:t>
+              <a:t>La configurabilità si paga per pacchetto: 36 → 258 ns</a:t>
             </a:r>
           </a:p>
         </p:txBody>
@@ -26566,7 +26581,7 @@
                 </a:solidFill>
                 <a:latin typeface="Calibri"/>
               </a:rPr>
-              <a:t>Stesso modello, 319 pesi  ·  minimo su 7 prove  ·  BPF_PROG_TEST_RUN</a:t>
+              <a:t>Stesso modello, 319 pesi  ·  minimo su 7 prove  ·  BPF_PROG_TEST_RUN  ·  rimisura del 23/09, P1 come oggetto AOT</a:t>
             </a:r>
           </a:p>
         </p:txBody>
@@ -26744,7 +26759,7 @@
                           </a:solidFill>
                           <a:latin typeface="Calibri"/>
                         </a:rPr>
-                        <a:t>614</a:t>
+                        <a:t>618</a:t>
                       </a:r>
                     </a:p>
                   </a:txBody>
@@ -26838,7 +26853,7 @@
                           </a:solidFill>
                           <a:latin typeface="Calibri"/>
                         </a:rPr>
-                        <a:t>1 071</a:t>
+                        <a:t>1 028</a:t>
                       </a:r>
                     </a:p>
                   </a:txBody>
@@ -27142,7 +27157,7 @@
                 </a:solidFill>
                 <a:latin typeface="Calibri"/>
               </a:rPr>
-              <a:t>. Il salto grande non è fra P1 e P1.5 (20 ns), ma quando anche la </a:t>
+              <a:t>. Il salto grande non è fra P1 e P1.5 (6 ns), ma quando anche la </a:t>
             </a:r>
             <a:r>
               <a:rPr sz="1500" b="1" i="0">
@@ -27367,7 +27382,7 @@
                 </a:solidFill>
                 <a:latin typeface="Calibri"/>
               </a:rPr>
-              <a:t>Quello che si perde per pacchetto, si guadagna nel cambiare modello</a:t>
+              <a:t>Cambiare modello non separa più le pipeline</a:t>
             </a:r>
           </a:p>
         </p:txBody>
@@ -27451,7 +27466,7 @@
                 </a:solidFill>
                 <a:latin typeface="Calibri"/>
               </a:rPr>
-              <a:t>Aggiornamento: tempo per installare un modello nuovo su un nodo già in servizio (scala logaritmica)</a:t>
+              <a:t>Tempo per installare un modello nuovo su un nodo già in servizio (scala logaritmica)  ·  rimisura del 23/09</a:t>
             </a:r>
           </a:p>
         </p:txBody>
@@ -27639,7 +27654,7 @@
                 </a:solidFill>
                 <a:latin typeface="Calibri"/>
               </a:rPr>
-              <a:t>Il compilatore gira </a:t>
+              <a:t>Sul nodo si carica un file pronto: </a:t>
             </a:r>
             <a:r>
               <a:rPr sz="1400" b="1" i="0">
@@ -27648,7 +27663,7 @@
                 </a:solidFill>
                 <a:latin typeface="Calibri"/>
               </a:rPr>
-              <a:t>prima</a:t>
+              <a:t>5–8 ms</a:t>
             </a:r>
             <a:r>
               <a:rPr sz="1400" b="0" i="0">
@@ -27657,7 +27672,7 @@
                 </a:solidFill>
                 <a:latin typeface="Calibri"/>
               </a:rPr>
-              <a:t>, su un'altra macchina. Sul nodo si carica un file pronto: </a:t>
+              <a:t>, come P2 e P3. Anche compilando, </a:t>
             </a:r>
             <a:r>
               <a:rPr sz="1400" b="1" i="0">
@@ -27666,7 +27681,7 @@
                 </a:solidFill>
                 <a:latin typeface="Calibri"/>
               </a:rPr>
-              <a:t>9–10 ms</a:t>
+              <a:t>meno di 0,15 s</a:t>
             </a:r>
             <a:r>
               <a:rPr sz="1400" b="0" i="0">
@@ -27675,7 +27690,25 @@
                 </a:solidFill>
                 <a:latin typeface="Calibri"/>
               </a:rPr>
-              <a:t> invece di 741. Stesso costo per pacchetto (46 contro 44 ns).</a:t>
+              <a:t>: il vecchio «1,5 s» era </a:t>
+            </a:r>
+            <a:r>
+              <a:rPr sz="1400" b="1" i="0">
+                <a:solidFill>
+                  <a:srgbClr val="222B36"/>
+                </a:solidFill>
+                <a:latin typeface="Calibri"/>
+              </a:rPr>
+              <a:t>BCC</a:t>
+            </a:r>
+            <a:r>
+              <a:rPr sz="1400" b="0" i="0">
+                <a:solidFill>
+                  <a:srgbClr val="222B36"/>
+                </a:solidFill>
+                <a:latin typeface="Calibri"/>
+              </a:rPr>
+              <a:t>, che rilegge gli header del kernel a ogni compilazione.</a:t>
             </a:r>
           </a:p>
         </p:txBody>
@@ -27863,7 +27896,7 @@
                 </a:solidFill>
                 <a:latin typeface="Calibri"/>
               </a:rPr>
-              <a:t>, senza compilare niente da nessuna parte. P1 richiede comunque una compilazione (~1 s) per ogni modello, altrove.</a:t>
+              <a:t>: nessun compilatore, da nessuna parte. P1 ne vuole uno per ogni modello nuovo, su qualche macchina.</a:t>
             </a:r>
           </a:p>
         </p:txBody>
@@ -27949,7 +27982,7 @@
                 </a:solidFill>
                 <a:latin typeface="Calibri"/>
               </a:rPr>
-              <a:t>Se il modello cambia raramente, compilare prima è gratis per il nodo. Se deve cambiare spesso e ovunque, i </a:t>
+              <a:t>Il tempo per cambiare modello è ormai pari. Quello che separa le pipeline è il </a:t>
             </a:r>
             <a:r>
               <a:rPr sz="1600" b="1" i="0">
@@ -27958,7 +27991,7 @@
                 </a:solidFill>
                 <a:latin typeface="Calibri"/>
               </a:rPr>
-              <a:t>~200–300 ns</a:t>
+              <a:t>costo per pacchetto</a:t>
             </a:r>
             <a:r>
               <a:rPr sz="1600" b="0" i="0">
@@ -27967,7 +28000,7 @@
                 </a:solidFill>
                 <a:latin typeface="Calibri"/>
               </a:rPr>
-              <a:t> per pacchetto di P2/P3 comprano il non dover ricompilare mai.</a:t>
+              <a:t>: ~50 ns di rete con i pesi compilati, ~220–380 ns con i pesi da tabella.</a:t>
             </a:r>
           </a:p>
         </p:txBody>
@@ -28535,7 +28568,7 @@
                           </a:solidFill>
                           <a:latin typeface="Calibri"/>
                         </a:rPr>
-                        <a:t>271 ns</a:t>
+                        <a:t>180 ns</a:t>
                       </a:r>
                     </a:p>
                   </a:txBody>
@@ -28558,7 +28591,7 @@
                           </a:solidFill>
                           <a:latin typeface="Calibri"/>
                         </a:rPr>
-                        <a:t>448 ns</a:t>
+                        <a:t>278 ns</a:t>
                       </a:r>
                     </a:p>
                   </a:txBody>
@@ -28581,7 +28614,7 @@
                           </a:solidFill>
                           <a:latin typeface="Calibri"/>
                         </a:rPr>
-                        <a:t>+65 %</a:t>
+                        <a:t>+54 %</a:t>
                       </a:r>
                     </a:p>
                   </a:txBody>
@@ -29137,7 +29170,7 @@
                 </a:solidFill>
                 <a:latin typeface="Calibri"/>
               </a:rPr>
-              <a:t>BPF_PROG_TEST_RUN, minimo su 7 prove  ·  P1 misurata con il build BCC, che costa quanto l'AOT</a:t>
+              <a:t>BPF_PROG_TEST_RUN, minimo su 7 prove  ·  rimisura del 23/09, P1 come oggetto AOT  ·  cifre assolute ~40 % sotto la sessione precedente, rapporti invariati</a:t>
             </a:r>
           </a:p>
         </p:txBody>
@@ -29275,7 +29308,7 @@
                 </a:solidFill>
                 <a:latin typeface="Calibri"/>
               </a:rPr>
-              <a:t>: P1 41 → 109 ns, P3 401 → 530 ns. Un neurone in più è lavoro vero, a ogni pacchetto.</a:t>
+              <a:t>: P1 24 → 58 ns, P3 239 → 298 ns. Un neurone in più è lavoro vero, a ogni pacchetto.</a:t>
             </a:r>
           </a:p>
         </p:txBody>

--- a/docs/Inferenza di una rete neurale nel kernel Linux con eBPF XDP.pptx
+++ b/docs/Inferenza di una rete neurale nel kernel Linux con eBPF XDP.pptx
@@ -9,10 +9,10 @@
     <p:sldId id="257" r:id="rId3"/>
     <p:sldId id="258" r:id="rId4"/>
     <p:sldId id="259" r:id="rId5"/>
-    <p:sldId id="260" r:id="rId6"/>
-    <p:sldId id="261" r:id="rId7"/>
-    <p:sldId id="262" r:id="rId8"/>
-    <p:sldId id="263" r:id="rId9"/>
+    <p:sldId id="280" r:id="rId6"/>
+    <p:sldId id="260" r:id="rId7"/>
+    <p:sldId id="261" r:id="rId8"/>
+    <p:sldId id="262" r:id="rId9"/>
     <p:sldId id="264" r:id="rId10"/>
     <p:sldId id="265" r:id="rId11"/>
     <p:sldId id="266" r:id="rId12"/>
@@ -149,11 +149,78 @@
 <pc:chgInfo xmlns:a="http://schemas.openxmlformats.org/drawingml/2006/main" xmlns:r="http://schemas.openxmlformats.org/officeDocument/2006/relationships" xmlns:ac="http://schemas.microsoft.com/office/drawing/2013/main/command" xmlns:pc="http://schemas.microsoft.com/office/powerpoint/2013/main/command">
   <pc:docChgLst>
     <pc:chgData name="Ettore Cantile" userId="2f5e44afd0b03182" providerId="LiveId" clId="{E1385F0F-24B1-4705-8EF7-8D82C33CA9CE}"/>
-    <pc:docChg chg="delSld">
-      <pc:chgData name="Ettore Cantile" userId="2f5e44afd0b03182" providerId="LiveId" clId="{E1385F0F-24B1-4705-8EF7-8D82C33CA9CE}" dt="2026-09-23T14:04:40.049" v="1" actId="47"/>
+    <pc:docChg chg="custSel addSld delSld modSld">
+      <pc:chgData name="Ettore Cantile" userId="2f5e44afd0b03182" providerId="LiveId" clId="{E1385F0F-24B1-4705-8EF7-8D82C33CA9CE}" dt="2026-09-24T16:05:47.995" v="75"/>
       <pc:docMkLst>
         <pc:docMk/>
       </pc:docMkLst>
+      <pc:sldChg chg="modSp mod">
+        <pc:chgData name="Ettore Cantile" userId="2f5e44afd0b03182" providerId="LiveId" clId="{E1385F0F-24B1-4705-8EF7-8D82C33CA9CE}" dt="2026-09-24T16:05:13.005" v="54" actId="20577"/>
+        <pc:sldMkLst>
+          <pc:docMk/>
+          <pc:sldMk cId="0" sldId="260"/>
+        </pc:sldMkLst>
+        <pc:spChg chg="mod">
+          <ac:chgData name="Ettore Cantile" userId="2f5e44afd0b03182" providerId="LiveId" clId="{E1385F0F-24B1-4705-8EF7-8D82C33CA9CE}" dt="2026-09-24T16:05:13.005" v="54" actId="20577"/>
+          <ac:spMkLst>
+            <pc:docMk/>
+            <pc:sldMk cId="0" sldId="260"/>
+            <ac:spMk id="5" creationId="{00000000-0000-0000-0000-000000000000}"/>
+          </ac:spMkLst>
+        </pc:spChg>
+      </pc:sldChg>
+      <pc:sldChg chg="modSp mod">
+        <pc:chgData name="Ettore Cantile" userId="2f5e44afd0b03182" providerId="LiveId" clId="{E1385F0F-24B1-4705-8EF7-8D82C33CA9CE}" dt="2026-09-24T16:05:13.089" v="55" actId="20577"/>
+        <pc:sldMkLst>
+          <pc:docMk/>
+          <pc:sldMk cId="0" sldId="261"/>
+        </pc:sldMkLst>
+        <pc:spChg chg="mod">
+          <ac:chgData name="Ettore Cantile" userId="2f5e44afd0b03182" providerId="LiveId" clId="{E1385F0F-24B1-4705-8EF7-8D82C33CA9CE}" dt="2026-09-24T16:05:13.089" v="55" actId="20577"/>
+          <ac:spMkLst>
+            <pc:docMk/>
+            <pc:sldMk cId="0" sldId="261"/>
+            <ac:spMk id="5" creationId="{00000000-0000-0000-0000-000000000000}"/>
+          </ac:spMkLst>
+        </pc:spChg>
+      </pc:sldChg>
+      <pc:sldChg chg="modSp mod">
+        <pc:chgData name="Ettore Cantile" userId="2f5e44afd0b03182" providerId="LiveId" clId="{E1385F0F-24B1-4705-8EF7-8D82C33CA9CE}" dt="2026-09-24T16:05:13.136" v="56" actId="20577"/>
+        <pc:sldMkLst>
+          <pc:docMk/>
+          <pc:sldMk cId="0" sldId="262"/>
+        </pc:sldMkLst>
+        <pc:spChg chg="mod">
+          <ac:chgData name="Ettore Cantile" userId="2f5e44afd0b03182" providerId="LiveId" clId="{E1385F0F-24B1-4705-8EF7-8D82C33CA9CE}" dt="2026-09-24T16:05:13.136" v="56" actId="20577"/>
+          <ac:spMkLst>
+            <pc:docMk/>
+            <pc:sldMk cId="0" sldId="262"/>
+            <ac:spMk id="5" creationId="{00000000-0000-0000-0000-000000000000}"/>
+          </ac:spMkLst>
+        </pc:spChg>
+      </pc:sldChg>
+      <pc:sldChg chg="del">
+        <pc:chgData name="Ettore Cantile" userId="2f5e44afd0b03182" providerId="LiveId" clId="{E1385F0F-24B1-4705-8EF7-8D82C33CA9CE}" dt="2026-09-24T16:05:12.626" v="52" actId="2696"/>
+        <pc:sldMkLst>
+          <pc:docMk/>
+          <pc:sldMk cId="0" sldId="263"/>
+        </pc:sldMkLst>
+      </pc:sldChg>
+      <pc:sldChg chg="modSp mod">
+        <pc:chgData name="Ettore Cantile" userId="2f5e44afd0b03182" providerId="LiveId" clId="{E1385F0F-24B1-4705-8EF7-8D82C33CA9CE}" dt="2026-09-24T15:41:16.588" v="3" actId="947"/>
+        <pc:sldMkLst>
+          <pc:docMk/>
+          <pc:sldMk cId="0" sldId="271"/>
+        </pc:sldMkLst>
+        <pc:spChg chg="mod">
+          <ac:chgData name="Ettore Cantile" userId="2f5e44afd0b03182" providerId="LiveId" clId="{E1385F0F-24B1-4705-8EF7-8D82C33CA9CE}" dt="2026-09-24T15:41:16.588" v="3" actId="947"/>
+          <ac:spMkLst>
+            <pc:docMk/>
+            <pc:sldMk cId="0" sldId="271"/>
+            <ac:spMk id="18" creationId="{00000000-0000-0000-0000-000000000000}"/>
+          </ac:spMkLst>
+        </pc:spChg>
+      </pc:sldChg>
       <pc:sldChg chg="del">
         <pc:chgData name="Ettore Cantile" userId="2f5e44afd0b03182" providerId="LiveId" clId="{E1385F0F-24B1-4705-8EF7-8D82C33CA9CE}" dt="2026-09-23T14:04:15.896" v="0" actId="47"/>
         <pc:sldMkLst>
@@ -161,12 +228,231 @@
           <pc:sldMk cId="0" sldId="274"/>
         </pc:sldMkLst>
       </pc:sldChg>
-      <pc:sldChg chg="del">
-        <pc:chgData name="Ettore Cantile" userId="2f5e44afd0b03182" providerId="LiveId" clId="{E1385F0F-24B1-4705-8EF7-8D82C33CA9CE}" dt="2026-09-23T14:04:40.049" v="1" actId="47"/>
+      <pc:sldChg chg="modSp mod">
+        <pc:chgData name="Ettore Cantile" userId="2f5e44afd0b03182" providerId="LiveId" clId="{E1385F0F-24B1-4705-8EF7-8D82C33CA9CE}" dt="2026-09-24T16:05:14.113" v="57" actId="20577"/>
         <pc:sldMkLst>
           <pc:docMk/>
-          <pc:sldMk cId="0" sldId="280"/>
+          <pc:sldMk cId="0" sldId="275"/>
         </pc:sldMkLst>
+        <pc:spChg chg="mod">
+          <ac:chgData name="Ettore Cantile" userId="2f5e44afd0b03182" providerId="LiveId" clId="{E1385F0F-24B1-4705-8EF7-8D82C33CA9CE}" dt="2026-09-24T16:05:14.113" v="57" actId="20577"/>
+          <ac:spMkLst>
+            <pc:docMk/>
+            <pc:sldMk cId="0" sldId="275"/>
+            <ac:spMk id="5" creationId="{00000000-0000-0000-0000-000000000000}"/>
+          </ac:spMkLst>
+        </pc:spChg>
+      </pc:sldChg>
+      <pc:sldChg chg="modSp mod">
+        <pc:chgData name="Ettore Cantile" userId="2f5e44afd0b03182" providerId="LiveId" clId="{E1385F0F-24B1-4705-8EF7-8D82C33CA9CE}" dt="2026-09-24T16:05:14.217" v="58" actId="20577"/>
+        <pc:sldMkLst>
+          <pc:docMk/>
+          <pc:sldMk cId="0" sldId="276"/>
+        </pc:sldMkLst>
+        <pc:spChg chg="mod">
+          <ac:chgData name="Ettore Cantile" userId="2f5e44afd0b03182" providerId="LiveId" clId="{E1385F0F-24B1-4705-8EF7-8D82C33CA9CE}" dt="2026-09-24T16:05:14.217" v="58" actId="20577"/>
+          <ac:spMkLst>
+            <pc:docMk/>
+            <pc:sldMk cId="0" sldId="276"/>
+            <ac:spMk id="5" creationId="{00000000-0000-0000-0000-000000000000}"/>
+          </ac:spMkLst>
+        </pc:spChg>
+      </pc:sldChg>
+      <pc:sldChg chg="modSp mod">
+        <pc:chgData name="Ettore Cantile" userId="2f5e44afd0b03182" providerId="LiveId" clId="{E1385F0F-24B1-4705-8EF7-8D82C33CA9CE}" dt="2026-09-24T16:05:14.332" v="59" actId="20577"/>
+        <pc:sldMkLst>
+          <pc:docMk/>
+          <pc:sldMk cId="0" sldId="277"/>
+        </pc:sldMkLst>
+        <pc:spChg chg="mod">
+          <ac:chgData name="Ettore Cantile" userId="2f5e44afd0b03182" providerId="LiveId" clId="{E1385F0F-24B1-4705-8EF7-8D82C33CA9CE}" dt="2026-09-24T16:05:14.332" v="59" actId="20577"/>
+          <ac:spMkLst>
+            <pc:docMk/>
+            <pc:sldMk cId="0" sldId="277"/>
+            <ac:spMk id="5" creationId="{00000000-0000-0000-0000-000000000000}"/>
+          </ac:spMkLst>
+        </pc:spChg>
+      </pc:sldChg>
+      <pc:sldChg chg="modSp mod">
+        <pc:chgData name="Ettore Cantile" userId="2f5e44afd0b03182" providerId="LiveId" clId="{E1385F0F-24B1-4705-8EF7-8D82C33CA9CE}" dt="2026-09-24T16:05:14.406" v="60" actId="20577"/>
+        <pc:sldMkLst>
+          <pc:docMk/>
+          <pc:sldMk cId="0" sldId="278"/>
+        </pc:sldMkLst>
+        <pc:spChg chg="mod">
+          <ac:chgData name="Ettore Cantile" userId="2f5e44afd0b03182" providerId="LiveId" clId="{E1385F0F-24B1-4705-8EF7-8D82C33CA9CE}" dt="2026-09-24T16:05:14.406" v="60" actId="20577"/>
+          <ac:spMkLst>
+            <pc:docMk/>
+            <pc:sldMk cId="0" sldId="278"/>
+            <ac:spMk id="5" creationId="{00000000-0000-0000-0000-000000000000}"/>
+          </ac:spMkLst>
+        </pc:spChg>
+      </pc:sldChg>
+      <pc:sldChg chg="modSp mod">
+        <pc:chgData name="Ettore Cantile" userId="2f5e44afd0b03182" providerId="LiveId" clId="{E1385F0F-24B1-4705-8EF7-8D82C33CA9CE}" dt="2026-09-24T16:05:14.466" v="61" actId="20577"/>
+        <pc:sldMkLst>
+          <pc:docMk/>
+          <pc:sldMk cId="0" sldId="279"/>
+        </pc:sldMkLst>
+        <pc:spChg chg="mod">
+          <ac:chgData name="Ettore Cantile" userId="2f5e44afd0b03182" providerId="LiveId" clId="{E1385F0F-24B1-4705-8EF7-8D82C33CA9CE}" dt="2026-09-24T16:05:14.466" v="61" actId="20577"/>
+          <ac:spMkLst>
+            <pc:docMk/>
+            <pc:sldMk cId="0" sldId="279"/>
+            <ac:spMk id="5" creationId="{00000000-0000-0000-0000-000000000000}"/>
+          </ac:spMkLst>
+        </pc:spChg>
+        <pc:spChg chg="mod">
+          <ac:chgData name="Ettore Cantile" userId="2f5e44afd0b03182" providerId="LiveId" clId="{E1385F0F-24B1-4705-8EF7-8D82C33CA9CE}" dt="2026-09-24T15:41:16.831" v="6" actId="20577"/>
+          <ac:spMkLst>
+            <pc:docMk/>
+            <pc:sldMk cId="0" sldId="279"/>
+            <ac:spMk id="14" creationId="{00000000-0000-0000-0000-000000000000}"/>
+          </ac:spMkLst>
+        </pc:spChg>
+        <pc:spChg chg="mod">
+          <ac:chgData name="Ettore Cantile" userId="2f5e44afd0b03182" providerId="LiveId" clId="{E1385F0F-24B1-4705-8EF7-8D82C33CA9CE}" dt="2026-09-24T15:41:16.770" v="5" actId="947"/>
+          <ac:spMkLst>
+            <pc:docMk/>
+            <pc:sldMk cId="0" sldId="279"/>
+            <ac:spMk id="22" creationId="{00000000-0000-0000-0000-000000000000}"/>
+          </ac:spMkLst>
+        </pc:spChg>
+      </pc:sldChg>
+      <pc:sldChg chg="modSp add del mod">
+        <pc:chgData name="Ettore Cantile" userId="2f5e44afd0b03182" providerId="LiveId" clId="{E1385F0F-24B1-4705-8EF7-8D82C33CA9CE}" dt="2026-09-24T16:05:47.995" v="75"/>
+        <pc:sldMkLst>
+          <pc:docMk/>
+          <pc:sldMk cId="4050059398" sldId="280"/>
+        </pc:sldMkLst>
+        <pc:spChg chg="mod">
+          <ac:chgData name="Ettore Cantile" userId="2f5e44afd0b03182" providerId="LiveId" clId="{E1385F0F-24B1-4705-8EF7-8D82C33CA9CE}" dt="2026-09-24T16:04:51.379" v="11" actId="947"/>
+          <ac:spMkLst>
+            <pc:docMk/>
+            <pc:sldMk cId="4050059398" sldId="280"/>
+            <ac:spMk id="3" creationId="{00000000-0000-0000-0000-000000000000}"/>
+          </ac:spMkLst>
+        </pc:spChg>
+        <pc:spChg chg="mod">
+          <ac:chgData name="Ettore Cantile" userId="2f5e44afd0b03182" providerId="LiveId" clId="{E1385F0F-24B1-4705-8EF7-8D82C33CA9CE}" dt="2026-09-24T16:04:51.396" v="14" actId="947"/>
+          <ac:spMkLst>
+            <pc:docMk/>
+            <pc:sldMk cId="4050059398" sldId="280"/>
+            <ac:spMk id="4" creationId="{00000000-0000-0000-0000-000000000000}"/>
+          </ac:spMkLst>
+        </pc:spChg>
+        <pc:spChg chg="mod">
+          <ac:chgData name="Ettore Cantile" userId="2f5e44afd0b03182" providerId="LiveId" clId="{E1385F0F-24B1-4705-8EF7-8D82C33CA9CE}" dt="2026-09-24T16:05:12.951" v="53" actId="20577"/>
+          <ac:spMkLst>
+            <pc:docMk/>
+            <pc:sldMk cId="4050059398" sldId="280"/>
+            <ac:spMk id="5" creationId="{00000000-0000-0000-0000-000000000000}"/>
+          </ac:spMkLst>
+        </pc:spChg>
+        <pc:spChg chg="mod">
+          <ac:chgData name="Ettore Cantile" userId="2f5e44afd0b03182" providerId="LiveId" clId="{E1385F0F-24B1-4705-8EF7-8D82C33CA9CE}" dt="2026-09-24T16:04:51.544" v="39" actId="947"/>
+          <ac:spMkLst>
+            <pc:docMk/>
+            <pc:sldMk cId="4050059398" sldId="280"/>
+            <ac:spMk id="6" creationId="{00000000-0000-0000-0000-000000000000}"/>
+          </ac:spMkLst>
+        </pc:spChg>
+        <pc:spChg chg="mod">
+          <ac:chgData name="Ettore Cantile" userId="2f5e44afd0b03182" providerId="LiveId" clId="{E1385F0F-24B1-4705-8EF7-8D82C33CA9CE}" dt="2026-09-24T16:05:32.922" v="63"/>
+          <ac:spMkLst>
+            <pc:docMk/>
+            <pc:sldMk cId="4050059398" sldId="280"/>
+            <ac:spMk id="7" creationId="{00000000-0000-0000-0000-000000000000}"/>
+          </ac:spMkLst>
+        </pc:spChg>
+        <pc:spChg chg="mod">
+          <ac:chgData name="Ettore Cantile" userId="2f5e44afd0b03182" providerId="LiveId" clId="{E1385F0F-24B1-4705-8EF7-8D82C33CA9CE}" dt="2026-09-24T16:04:51.414" v="17" actId="947"/>
+          <ac:spMkLst>
+            <pc:docMk/>
+            <pc:sldMk cId="4050059398" sldId="280"/>
+            <ac:spMk id="9" creationId="{00000000-0000-0000-0000-000000000000}"/>
+          </ac:spMkLst>
+        </pc:spChg>
+        <pc:spChg chg="mod">
+          <ac:chgData name="Ettore Cantile" userId="2f5e44afd0b03182" providerId="LiveId" clId="{E1385F0F-24B1-4705-8EF7-8D82C33CA9CE}" dt="2026-09-24T16:05:12.523" v="41"/>
+          <ac:spMkLst>
+            <pc:docMk/>
+            <pc:sldMk cId="4050059398" sldId="280"/>
+            <ac:spMk id="10" creationId="{00000000-0000-0000-0000-000000000000}"/>
+          </ac:spMkLst>
+        </pc:spChg>
+        <pc:spChg chg="mod">
+          <ac:chgData name="Ettore Cantile" userId="2f5e44afd0b03182" providerId="LiveId" clId="{E1385F0F-24B1-4705-8EF7-8D82C33CA9CE}" dt="2026-09-24T16:05:12.541" v="45"/>
+          <ac:spMkLst>
+            <pc:docMk/>
+            <pc:sldMk cId="4050059398" sldId="280"/>
+            <ac:spMk id="11" creationId="{00000000-0000-0000-0000-000000000000}"/>
+          </ac:spMkLst>
+        </pc:spChg>
+        <pc:spChg chg="mod">
+          <ac:chgData name="Ettore Cantile" userId="2f5e44afd0b03182" providerId="LiveId" clId="{E1385F0F-24B1-4705-8EF7-8D82C33CA9CE}" dt="2026-09-24T16:05:12.559" v="49"/>
+          <ac:spMkLst>
+            <pc:docMk/>
+            <pc:sldMk cId="4050059398" sldId="280"/>
+            <ac:spMk id="12" creationId="{00000000-0000-0000-0000-000000000000}"/>
+          </ac:spMkLst>
+        </pc:spChg>
+        <pc:spChg chg="mod">
+          <ac:chgData name="Ettore Cantile" userId="2f5e44afd0b03182" providerId="LiveId" clId="{E1385F0F-24B1-4705-8EF7-8D82C33CA9CE}" dt="2026-09-24T16:05:32.933" v="65"/>
+          <ac:spMkLst>
+            <pc:docMk/>
+            <pc:sldMk cId="4050059398" sldId="280"/>
+            <ac:spMk id="13" creationId="{00000000-0000-0000-0000-000000000000}"/>
+          </ac:spMkLst>
+        </pc:spChg>
+        <pc:spChg chg="mod">
+          <ac:chgData name="Ettore Cantile" userId="2f5e44afd0b03182" providerId="LiveId" clId="{E1385F0F-24B1-4705-8EF7-8D82C33CA9CE}" dt="2026-09-24T16:04:51.431" v="20" actId="947"/>
+          <ac:spMkLst>
+            <pc:docMk/>
+            <pc:sldMk cId="4050059398" sldId="280"/>
+            <ac:spMk id="15" creationId="{00000000-0000-0000-0000-000000000000}"/>
+          </ac:spMkLst>
+        </pc:spChg>
+        <pc:spChg chg="mod">
+          <ac:chgData name="Ettore Cantile" userId="2f5e44afd0b03182" providerId="LiveId" clId="{E1385F0F-24B1-4705-8EF7-8D82C33CA9CE}" dt="2026-09-24T16:05:12.534" v="43"/>
+          <ac:spMkLst>
+            <pc:docMk/>
+            <pc:sldMk cId="4050059398" sldId="280"/>
+            <ac:spMk id="16" creationId="{00000000-0000-0000-0000-000000000000}"/>
+          </ac:spMkLst>
+        </pc:spChg>
+        <pc:spChg chg="mod">
+          <ac:chgData name="Ettore Cantile" userId="2f5e44afd0b03182" providerId="LiveId" clId="{E1385F0F-24B1-4705-8EF7-8D82C33CA9CE}" dt="2026-09-24T16:05:12.542" v="47"/>
+          <ac:spMkLst>
+            <pc:docMk/>
+            <pc:sldMk cId="4050059398" sldId="280"/>
+            <ac:spMk id="17" creationId="{00000000-0000-0000-0000-000000000000}"/>
+          </ac:spMkLst>
+        </pc:spChg>
+        <pc:spChg chg="mod">
+          <ac:chgData name="Ettore Cantile" userId="2f5e44afd0b03182" providerId="LiveId" clId="{E1385F0F-24B1-4705-8EF7-8D82C33CA9CE}" dt="2026-09-24T16:05:12.561" v="51"/>
+          <ac:spMkLst>
+            <pc:docMk/>
+            <pc:sldMk cId="4050059398" sldId="280"/>
+            <ac:spMk id="18" creationId="{00000000-0000-0000-0000-000000000000}"/>
+          </ac:spMkLst>
+        </pc:spChg>
+        <pc:spChg chg="mod">
+          <ac:chgData name="Ettore Cantile" userId="2f5e44afd0b03182" providerId="LiveId" clId="{E1385F0F-24B1-4705-8EF7-8D82C33CA9CE}" dt="2026-09-24T16:05:32.939" v="67"/>
+          <ac:spMkLst>
+            <pc:docMk/>
+            <pc:sldMk cId="4050059398" sldId="280"/>
+            <ac:spMk id="19" creationId="{00000000-0000-0000-0000-000000000000}"/>
+          </ac:spMkLst>
+        </pc:spChg>
+        <pc:spChg chg="mod">
+          <ac:chgData name="Ettore Cantile" userId="2f5e44afd0b03182" providerId="LiveId" clId="{E1385F0F-24B1-4705-8EF7-8D82C33CA9CE}" dt="2026-09-24T16:05:47.995" v="75"/>
+          <ac:spMkLst>
+            <pc:docMk/>
+            <pc:sldMk cId="4050059398" sldId="280"/>
+            <ac:spMk id="20" creationId="{00000000-0000-0000-0000-000000000000}"/>
+          </ac:spMkLst>
+        </pc:spChg>
       </pc:sldChg>
     </pc:docChg>
   </pc:docChgLst>
@@ -6327,7 +6613,7 @@
           <a:p>
             <a:fld id="{5BCAD085-E8A6-8845-BD4E-CB4CCA059FC4}" type="datetimeFigureOut">
               <a:rPr lang="en-US" smtClean="0"/>
-              <a:t>9/23/2026</a:t>
+              <a:t>9/24/2026</a:t>
             </a:fld>
             <a:endParaRPr lang="en-US"/>
           </a:p>
@@ -6495,7 +6781,7 @@
           <a:p>
             <a:fld id="{5BCAD085-E8A6-8845-BD4E-CB4CCA059FC4}" type="datetimeFigureOut">
               <a:rPr lang="en-US" smtClean="0"/>
-              <a:t>9/23/2026</a:t>
+              <a:t>9/24/2026</a:t>
             </a:fld>
             <a:endParaRPr lang="en-US"/>
           </a:p>
@@ -6673,7 +6959,7 @@
           <a:p>
             <a:fld id="{5BCAD085-E8A6-8845-BD4E-CB4CCA059FC4}" type="datetimeFigureOut">
               <a:rPr lang="en-US" smtClean="0"/>
-              <a:t>9/23/2026</a:t>
+              <a:t>9/24/2026</a:t>
             </a:fld>
             <a:endParaRPr lang="en-US"/>
           </a:p>
@@ -6841,7 +7127,7 @@
           <a:p>
             <a:fld id="{5BCAD085-E8A6-8845-BD4E-CB4CCA059FC4}" type="datetimeFigureOut">
               <a:rPr lang="en-US" smtClean="0"/>
-              <a:t>9/23/2026</a:t>
+              <a:t>9/24/2026</a:t>
             </a:fld>
             <a:endParaRPr lang="en-US"/>
           </a:p>
@@ -7086,7 +7372,7 @@
           <a:p>
             <a:fld id="{5BCAD085-E8A6-8845-BD4E-CB4CCA059FC4}" type="datetimeFigureOut">
               <a:rPr lang="en-US" smtClean="0"/>
-              <a:t>9/23/2026</a:t>
+              <a:t>9/24/2026</a:t>
             </a:fld>
             <a:endParaRPr lang="en-US"/>
           </a:p>
@@ -7371,7 +7657,7 @@
           <a:p>
             <a:fld id="{5BCAD085-E8A6-8845-BD4E-CB4CCA059FC4}" type="datetimeFigureOut">
               <a:rPr lang="en-US" smtClean="0"/>
-              <a:t>9/23/2026</a:t>
+              <a:t>9/24/2026</a:t>
             </a:fld>
             <a:endParaRPr lang="en-US"/>
           </a:p>
@@ -7790,7 +8076,7 @@
           <a:p>
             <a:fld id="{5BCAD085-E8A6-8845-BD4E-CB4CCA059FC4}" type="datetimeFigureOut">
               <a:rPr lang="en-US" smtClean="0"/>
-              <a:t>9/23/2026</a:t>
+              <a:t>9/24/2026</a:t>
             </a:fld>
             <a:endParaRPr lang="en-US"/>
           </a:p>
@@ -7907,7 +8193,7 @@
           <a:p>
             <a:fld id="{5BCAD085-E8A6-8845-BD4E-CB4CCA059FC4}" type="datetimeFigureOut">
               <a:rPr lang="en-US" smtClean="0"/>
-              <a:t>9/23/2026</a:t>
+              <a:t>9/24/2026</a:t>
             </a:fld>
             <a:endParaRPr lang="en-US"/>
           </a:p>
@@ -8002,7 +8288,7 @@
           <a:p>
             <a:fld id="{5BCAD085-E8A6-8845-BD4E-CB4CCA059FC4}" type="datetimeFigureOut">
               <a:rPr lang="en-US" smtClean="0"/>
-              <a:t>9/23/2026</a:t>
+              <a:t>9/24/2026</a:t>
             </a:fld>
             <a:endParaRPr lang="en-US"/>
           </a:p>
@@ -8277,7 +8563,7 @@
           <a:p>
             <a:fld id="{5BCAD085-E8A6-8845-BD4E-CB4CCA059FC4}" type="datetimeFigureOut">
               <a:rPr lang="en-US" smtClean="0"/>
-              <a:t>9/23/2026</a:t>
+              <a:t>9/24/2026</a:t>
             </a:fld>
             <a:endParaRPr lang="en-US"/>
           </a:p>
@@ -8529,7 +8815,7 @@
           <a:p>
             <a:fld id="{5BCAD085-E8A6-8845-BD4E-CB4CCA059FC4}" type="datetimeFigureOut">
               <a:rPr lang="en-US" smtClean="0"/>
-              <a:t>9/23/2026</a:t>
+              <a:t>9/24/2026</a:t>
             </a:fld>
             <a:endParaRPr lang="en-US"/>
           </a:p>
@@ -8740,7 +9026,7 @@
           <a:p>
             <a:fld id="{5BCAD085-E8A6-8845-BD4E-CB4CCA059FC4}" type="datetimeFigureOut">
               <a:rPr lang="en-US" smtClean="0"/>
-              <a:t>9/23/2026</a:t>
+              <a:t>9/24/2026</a:t>
             </a:fld>
             <a:endParaRPr lang="en-US"/>
           </a:p>
@@ -15500,7 +15786,7 @@
         <p:spPr>
           <a:xfrm>
             <a:off x="6492240" y="2423160"/>
-            <a:ext cx="4937760" cy="1828800"/>
+            <a:ext cx="4937760" cy="1487010"/>
           </a:xfrm>
           <a:prstGeom prst="rect">
             <a:avLst/>
@@ -15613,32 +15899,38 @@
               <a:t>class_action</a:t>
             </a:r>
             <a:r>
-              <a:rPr sz="1400" b="0" i="0">
+              <a:rPr lang="it-IT" sz="1400" b="0" i="0">
                 <a:solidFill>
                   <a:srgbClr val="222B36"/>
                 </a:solidFill>
                 <a:latin typeface="Calibri"/>
               </a:rPr>
-              <a:t>. Un secondo modello con semantica diversa viene </a:t>
-            </a:r>
-            <a:r>
-              <a:rPr sz="1400" b="1" i="0">
+              <a:t> per (modello, classe): modelli con semantiche diverse </a:t>
+            </a:r>
+            <a:r>
+              <a:rPr lang="it-IT" sz="1400" b="1" i="0">
                 <a:solidFill>
                   <a:srgbClr val="222B36"/>
                 </a:solidFill>
                 <a:latin typeface="Calibri"/>
               </a:rPr>
-              <a:t>rifiutato</a:t>
-            </a:r>
-            <a:r>
-              <a:rPr sz="1400" b="0" i="0">
+              <a:t>convivono</a:t>
+            </a:r>
+            <a:r>
+              <a:rPr lang="it-IT" sz="1400" b="0" i="0">
                 <a:solidFill>
                   <a:srgbClr val="222B36"/>
                 </a:solidFill>
                 <a:latin typeface="Calibri"/>
               </a:rPr>
-              <a:t>.</a:t>
-            </a:r>
+              <a:t> nello stesso programma.</a:t>
+            </a:r>
+            <a:endParaRPr sz="1400" b="0" i="0">
+              <a:solidFill>
+                <a:srgbClr val="222B36"/>
+              </a:solidFill>
+              <a:latin typeface="Calibri"/>
+            </a:endParaRPr>
           </a:p>
         </p:txBody>
       </p:sp>
@@ -20329,7 +20621,7 @@
         <p:spPr>
           <a:xfrm>
             <a:off x="11292840" y="6446520"/>
-            <a:ext cx="457200" cy="274320"/>
+            <a:ext cx="457200" cy="176908"/>
           </a:xfrm>
           <a:prstGeom prst="rect">
             <a:avLst/>
@@ -20351,14 +20643,20 @@
               </a:spcAft>
             </a:pPr>
             <a:r>
-              <a:rPr sz="1100" b="0" i="0">
+              <a:rPr lang="it-IT" sz="1100" b="0" i="0">
                 <a:solidFill>
                   <a:srgbClr val="6B7C93"/>
                 </a:solidFill>
                 <a:latin typeface="Calibri"/>
               </a:rPr>
-              <a:t>20</a:t>
-            </a:r>
+              <a:t>19</a:t>
+            </a:r>
+            <a:endParaRPr sz="1100" b="0" i="0">
+              <a:solidFill>
+                <a:srgbClr val="6B7C93"/>
+              </a:solidFill>
+              <a:latin typeface="Calibri"/>
+            </a:endParaRPr>
           </a:p>
         </p:txBody>
       </p:sp>
@@ -23860,7 +24158,7 @@
         <p:spPr>
           <a:xfrm>
             <a:off x="11292840" y="6446520"/>
-            <a:ext cx="457200" cy="274320"/>
+            <a:ext cx="457200" cy="176908"/>
           </a:xfrm>
           <a:prstGeom prst="rect">
             <a:avLst/>
@@ -23882,14 +24180,20 @@
               </a:spcAft>
             </a:pPr>
             <a:r>
-              <a:rPr sz="1100" b="0" i="0">
+              <a:rPr lang="it-IT" sz="1100" b="0" i="0">
                 <a:solidFill>
                   <a:srgbClr val="6B7C93"/>
                 </a:solidFill>
                 <a:latin typeface="Calibri"/>
               </a:rPr>
-              <a:t>21</a:t>
-            </a:r>
+              <a:t>20</a:t>
+            </a:r>
+            <a:endParaRPr sz="1100" b="0" i="0">
+              <a:solidFill>
+                <a:srgbClr val="6B7C93"/>
+              </a:solidFill>
+              <a:latin typeface="Calibri"/>
+            </a:endParaRPr>
           </a:p>
         </p:txBody>
       </p:sp>
@@ -25269,7 +25573,7 @@
         <p:spPr>
           <a:xfrm>
             <a:off x="11292840" y="6446520"/>
-            <a:ext cx="457200" cy="274320"/>
+            <a:ext cx="457200" cy="176908"/>
           </a:xfrm>
           <a:prstGeom prst="rect">
             <a:avLst/>
@@ -25291,14 +25595,20 @@
               </a:spcAft>
             </a:pPr>
             <a:r>
-              <a:rPr sz="1100" b="0" i="0">
+              <a:rPr lang="it-IT" sz="1100" b="0" i="0">
                 <a:solidFill>
                   <a:srgbClr val="6B7C93"/>
                 </a:solidFill>
                 <a:latin typeface="Calibri"/>
               </a:rPr>
-              <a:t>22</a:t>
-            </a:r>
+              <a:t>21</a:t>
+            </a:r>
+            <a:endParaRPr sz="1100" b="0" i="0">
+              <a:solidFill>
+                <a:srgbClr val="6B7C93"/>
+              </a:solidFill>
+              <a:latin typeface="Calibri"/>
+            </a:endParaRPr>
           </a:p>
         </p:txBody>
       </p:sp>
@@ -26126,7 +26436,7 @@
         <p:spPr>
           <a:xfrm>
             <a:off x="11292840" y="6446520"/>
-            <a:ext cx="457200" cy="274320"/>
+            <a:ext cx="457200" cy="176908"/>
           </a:xfrm>
           <a:prstGeom prst="rect">
             <a:avLst/>
@@ -26148,14 +26458,20 @@
               </a:spcAft>
             </a:pPr>
             <a:r>
-              <a:rPr sz="1100" b="0" i="0">
+              <a:rPr lang="it-IT" sz="1100" b="0" i="0">
                 <a:solidFill>
                   <a:srgbClr val="6B7C93"/>
                 </a:solidFill>
                 <a:latin typeface="Calibri"/>
               </a:rPr>
-              <a:t>23</a:t>
-            </a:r>
+              <a:t>22</a:t>
+            </a:r>
+            <a:endParaRPr sz="1100" b="0" i="0">
+              <a:solidFill>
+                <a:srgbClr val="6B7C93"/>
+              </a:solidFill>
+              <a:latin typeface="Calibri"/>
+            </a:endParaRPr>
           </a:p>
         </p:txBody>
       </p:sp>
@@ -26701,7 +27017,7 @@
         <p:spPr>
           <a:xfrm>
             <a:off x="11292840" y="6446520"/>
-            <a:ext cx="457200" cy="274320"/>
+            <a:ext cx="457200" cy="176908"/>
           </a:xfrm>
           <a:prstGeom prst="rect">
             <a:avLst/>
@@ -26723,14 +27039,20 @@
               </a:spcAft>
             </a:pPr>
             <a:r>
-              <a:rPr sz="1100" b="0" i="0">
+              <a:rPr lang="it-IT" sz="1100" b="0" i="0">
                 <a:solidFill>
                   <a:srgbClr val="6B7C93"/>
                 </a:solidFill>
                 <a:latin typeface="Calibri"/>
               </a:rPr>
-              <a:t>24</a:t>
-            </a:r>
+              <a:t>23</a:t>
+            </a:r>
+            <a:endParaRPr sz="1100" b="0" i="0">
+              <a:solidFill>
+                <a:srgbClr val="6B7C93"/>
+              </a:solidFill>
+              <a:latin typeface="Calibri"/>
+            </a:endParaRPr>
           </a:p>
         </p:txBody>
       </p:sp>
@@ -27127,7 +27449,7 @@
         <p:spPr>
           <a:xfrm>
             <a:off x="6492240" y="2176272"/>
-            <a:ext cx="5029200" cy="1481328"/>
+            <a:ext cx="5029200" cy="528093"/>
           </a:xfrm>
           <a:prstGeom prst="rect">
             <a:avLst/>
@@ -27155,7 +27477,25 @@
                 </a:solidFill>
                 <a:latin typeface="Calibri"/>
               </a:rPr>
-              <a:t>Consegna 29/29, semantica 72/72, modelli generati 62/62, P1 statica = P1.5 </a:t>
+              <a:t>Consegna 29/29, semantica 72/72, </a:t>
+            </a:r>
+            <a:r>
+              <a:rPr lang="it-IT" sz="1600" b="0" i="0">
+                <a:solidFill>
+                  <a:srgbClr val="222B36"/>
+                </a:solidFill>
+                <a:latin typeface="Calibri"/>
+              </a:rPr>
+              <a:t>modelli generati 63/63</a:t>
+            </a:r>
+            <a:r>
+              <a:rPr sz="1600" b="0" i="0">
+                <a:solidFill>
+                  <a:srgbClr val="222B36"/>
+                </a:solidFill>
+                <a:latin typeface="Calibri"/>
+              </a:rPr>
+              <a:t>, P1 statica = P1.5 </a:t>
             </a:r>
             <a:r>
               <a:rPr sz="1600" b="1" i="0">
@@ -27511,7 +27851,7 @@
         <p:spPr>
           <a:xfrm>
             <a:off x="6492240" y="4507992"/>
-            <a:ext cx="5029200" cy="1481328"/>
+            <a:ext cx="5029200" cy="528093"/>
           </a:xfrm>
           <a:prstGeom prst="rect">
             <a:avLst/>
@@ -27533,32 +27873,128 @@
               </a:spcAft>
             </a:pPr>
             <a:r>
-              <a:rPr sz="1600" b="0" i="0">
+              <a:rPr sz="1600" b="0" i="0" dirty="0" err="1">
                 <a:solidFill>
                   <a:srgbClr val="222B36"/>
                 </a:solidFill>
                 <a:latin typeface="Calibri"/>
               </a:rPr>
-              <a:t>Alterandola le decisioni cambiano; giusta, coincidono. E un secondo modello incompatibile viene </a:t>
-            </a:r>
-            <a:r>
-              <a:rPr sz="1600" b="1" i="0">
+              <a:t>Alterandola</a:t>
+            </a:r>
+            <a:r>
+              <a:rPr sz="1600" b="0" i="0" dirty="0">
                 <a:solidFill>
                   <a:srgbClr val="222B36"/>
                 </a:solidFill>
                 <a:latin typeface="Calibri"/>
               </a:rPr>
-              <a:t>rifiutato</a:t>
-            </a:r>
-            <a:r>
-              <a:rPr sz="1600" b="0" i="0">
+              <a:t> le </a:t>
+            </a:r>
+            <a:r>
+              <a:rPr sz="1600" b="0" i="0" dirty="0" err="1">
                 <a:solidFill>
                   <a:srgbClr val="222B36"/>
                 </a:solidFill>
                 <a:latin typeface="Calibri"/>
               </a:rPr>
-              <a:t>.</a:t>
-            </a:r>
+              <a:t>decisioni</a:t>
+            </a:r>
+            <a:r>
+              <a:rPr sz="1600" b="0" i="0" dirty="0">
+                <a:solidFill>
+                  <a:srgbClr val="222B36"/>
+                </a:solidFill>
+                <a:latin typeface="Calibri"/>
+              </a:rPr>
+              <a:t> </a:t>
+            </a:r>
+            <a:r>
+              <a:rPr sz="1600" b="0" i="0" dirty="0" err="1">
+                <a:solidFill>
+                  <a:srgbClr val="222B36"/>
+                </a:solidFill>
+                <a:latin typeface="Calibri"/>
+              </a:rPr>
+              <a:t>cambiano</a:t>
+            </a:r>
+            <a:r>
+              <a:rPr sz="1600" b="0" i="0" dirty="0">
+                <a:solidFill>
+                  <a:srgbClr val="222B36"/>
+                </a:solidFill>
+                <a:latin typeface="Calibri"/>
+              </a:rPr>
+              <a:t>; </a:t>
+            </a:r>
+            <a:r>
+              <a:rPr sz="1600" b="0" i="0" dirty="0" err="1">
+                <a:solidFill>
+                  <a:srgbClr val="222B36"/>
+                </a:solidFill>
+                <a:latin typeface="Calibri"/>
+              </a:rPr>
+              <a:t>giusta</a:t>
+            </a:r>
+            <a:r>
+              <a:rPr sz="1600" b="0" i="0" dirty="0">
+                <a:solidFill>
+                  <a:srgbClr val="222B36"/>
+                </a:solidFill>
+                <a:latin typeface="Calibri"/>
+              </a:rPr>
+              <a:t>, </a:t>
+            </a:r>
+            <a:r>
+              <a:rPr sz="1600" b="0" i="0" dirty="0" err="1">
+                <a:solidFill>
+                  <a:srgbClr val="222B36"/>
+                </a:solidFill>
+                <a:latin typeface="Calibri"/>
+              </a:rPr>
+              <a:t>coincidono</a:t>
+            </a:r>
+            <a:r>
+              <a:rPr sz="1600" b="0" i="0" dirty="0">
+                <a:solidFill>
+                  <a:srgbClr val="222B36"/>
+                </a:solidFill>
+                <a:latin typeface="Calibri"/>
+              </a:rPr>
+              <a:t>. </a:t>
+            </a:r>
+            <a:r>
+              <a:rPr lang="it-IT" sz="1600" b="0" i="0" dirty="0">
+                <a:solidFill>
+                  <a:srgbClr val="222B36"/>
+                </a:solidFill>
+                <a:latin typeface="Calibri"/>
+              </a:rPr>
+              <a:t>E modelli con semantiche diverse ora </a:t>
+            </a:r>
+            <a:r>
+              <a:rPr lang="it-IT" sz="1600" b="1" i="0" dirty="0">
+                <a:solidFill>
+                  <a:srgbClr val="222B36"/>
+                </a:solidFill>
+                <a:latin typeface="Calibri"/>
+              </a:rPr>
+              <a:t>convivono</a:t>
+            </a:r>
+            <a:r>
+              <a:rPr lang="it-IT" sz="1600" b="0" i="0" dirty="0">
+                <a:solidFill>
+                  <a:srgbClr val="222B36"/>
+                </a:solidFill>
+                <a:latin typeface="Calibri"/>
+              </a:rPr>
+              <a:t> (53/53).</a:t>
+            </a:r>
+            <a:endParaRPr sz="1600" b="0" i="0" dirty="0">
+              <a:solidFill>
+                <a:srgbClr val="222B36"/>
+              </a:solidFill>
+              <a:latin typeface="Calibri"/>
+            </a:endParaRPr>
           </a:p>
         </p:txBody>
       </p:sp>
@@ -29941,7 +30377,7 @@
         <p:spPr>
           <a:xfrm>
             <a:off x="548640" y="384048"/>
-            <a:ext cx="10972800" cy="274320"/>
+            <a:ext cx="10972800" cy="193002"/>
           </a:xfrm>
           <a:prstGeom prst="rect">
             <a:avLst/>
@@ -29963,14 +30399,20 @@
               </a:spcAft>
             </a:pPr>
             <a:r>
-              <a:rPr sz="1200" b="1" i="0">
+              <a:rPr lang="it-IT" sz="1200" b="1" i="0">
                 <a:solidFill>
                   <a:srgbClr val="E07A2D"/>
                 </a:solidFill>
                 <a:latin typeface="Calibri"/>
               </a:rPr>
-              <a:t>COME SI MISURA</a:t>
-            </a:r>
+              <a:t>P2 E P3 · UN PROGRAMMA, TANTI MODELLI</a:t>
+            </a:r>
+            <a:endParaRPr sz="1200" b="1" i="0">
+              <a:solidFill>
+                <a:srgbClr val="E07A2D"/>
+              </a:solidFill>
+              <a:latin typeface="Calibri"/>
+            </a:endParaRPr>
           </a:p>
         </p:txBody>
       </p:sp>
@@ -29983,7 +30425,7 @@
         <p:spPr>
           <a:xfrm>
             <a:off x="548640" y="658368"/>
-            <a:ext cx="11064240" cy="822960"/>
+            <a:ext cx="11064240" cy="461665"/>
           </a:xfrm>
           <a:prstGeom prst="rect">
             <a:avLst/>
@@ -30005,14 +30447,20 @@
               </a:spcAft>
             </a:pPr>
             <a:r>
-              <a:rPr sz="3000" b="1" i="0">
+              <a:rPr lang="it-IT" sz="3000" b="1" i="0">
                 <a:solidFill>
                   <a:srgbClr val="1F3A5F"/>
                 </a:solidFill>
                 <a:latin typeface="Calibri"/>
               </a:rPr>
-              <a:t>Tre misure, tre domande diverse</a:t>
-            </a:r>
+              <a:t>Ogni modello porta il proprio significato delle classi</a:t>
+            </a:r>
+            <a:endParaRPr sz="3000" b="1" i="0">
+              <a:solidFill>
+                <a:srgbClr val="1F3A5F"/>
+              </a:solidFill>
+              <a:latin typeface="Calibri"/>
+            </a:endParaRPr>
           </a:p>
         </p:txBody>
       </p:sp>
@@ -30025,7 +30473,7 @@
         <p:spPr>
           <a:xfrm>
             <a:off x="11292840" y="6446520"/>
-            <a:ext cx="457200" cy="274320"/>
+            <a:ext cx="457200" cy="176908"/>
           </a:xfrm>
           <a:prstGeom prst="rect">
             <a:avLst/>
@@ -30047,7 +30495,7 @@
               </a:spcAft>
             </a:pPr>
             <a:r>
-              <a:rPr sz="1100" b="0" i="0">
+              <a:rPr lang="it-IT" sz="1100" b="0" i="0">
                 <a:solidFill>
                   <a:srgbClr val="6B7C93"/>
                 </a:solidFill>
@@ -30055,6 +30503,12 @@
               </a:rPr>
               <a:t>5</a:t>
             </a:r>
+            <a:endParaRPr sz="1100" b="0" i="0">
+              <a:solidFill>
+                <a:srgbClr val="6B7C93"/>
+              </a:solidFill>
+              <a:latin typeface="Calibri"/>
+            </a:endParaRPr>
           </a:p>
         </p:txBody>
       </p:sp>
@@ -30067,7 +30521,7 @@
         <p:spPr>
           <a:xfrm>
             <a:off x="548640" y="6446520"/>
-            <a:ext cx="10424160" cy="274320"/>
+            <a:ext cx="10424160" cy="176908"/>
           </a:xfrm>
           <a:prstGeom prst="rect">
             <a:avLst/>
@@ -30089,14 +30543,20 @@
               </a:spcAft>
             </a:pPr>
             <a:r>
-              <a:rPr sz="1100" b="0" i="1">
+              <a:rPr lang="it-IT" sz="1100" i="1">
                 <a:solidFill>
                   <a:srgbClr val="6B7C93"/>
                 </a:solidFill>
                 <a:latin typeface="Calibri"/>
               </a:rPr>
-              <a:t>Non vanno moltiplicate fra loro: rispondono a domande diverse</a:t>
-            </a:r>
+              <a:t>Test: 53/53 su P2 e P3, con controllo negativo  ·  misure del 24/09  ·  quaderno di settembre, § 3.4</a:t>
+            </a:r>
+            <a:endParaRPr sz="1100" i="1">
+              <a:solidFill>
+                <a:srgbClr val="6B7C93"/>
+              </a:solidFill>
+              <a:latin typeface="Calibri"/>
+            </a:endParaRPr>
           </a:p>
         </p:txBody>
       </p:sp>
@@ -30108,8 +30568,8 @@
         </p:nvSpPr>
         <p:spPr>
           <a:xfrm>
-            <a:off x="548640" y="1645920"/>
-            <a:ext cx="3520440" cy="4023360"/>
+            <a:off x="548640" y="1600200"/>
+            <a:ext cx="5394960" cy="3149600"/>
           </a:xfrm>
           <a:prstGeom prst="roundRect">
             <a:avLst>
@@ -30148,14 +30608,58 @@
       </p:sp>
       <p:sp>
         <p:nvSpPr>
-          <p:cNvPr id="8" name="TextBox 7"/>
+          <p:cNvPr id="8" name="Rectangle 7"/>
+          <p:cNvSpPr/>
+          <p:nvPr/>
+        </p:nvSpPr>
+        <p:spPr>
+          <a:xfrm>
+            <a:off x="548640" y="1600200"/>
+            <a:ext cx="5394960" cy="91440"/>
+          </a:xfrm>
+          <a:prstGeom prst="rect">
+            <a:avLst/>
+          </a:prstGeom>
+          <a:solidFill>
+            <a:srgbClr val="E07A2D"/>
+          </a:solidFill>
+          <a:ln>
+            <a:noFill/>
+          </a:ln>
+          <a:effectLst/>
+        </p:spPr>
+        <p:style>
+          <a:lnRef idx="1">
+            <a:schemeClr val="accent1"/>
+          </a:lnRef>
+          <a:fillRef idx="3">
+            <a:schemeClr val="accent1"/>
+          </a:fillRef>
+          <a:effectRef idx="2">
+            <a:schemeClr val="accent1"/>
+          </a:effectRef>
+          <a:fontRef idx="minor">
+            <a:schemeClr val="lt1"/>
+          </a:fontRef>
+        </p:style>
+        <p:txBody>
+          <a:bodyPr rtlCol="0" anchor="ctr"/>
+          <a:lstStyle/>
+          <a:p>
+            <a:endParaRPr/>
+          </a:p>
+        </p:txBody>
+      </p:sp>
+      <p:sp>
+        <p:nvSpPr>
+          <p:cNvPr id="9" name="TextBox 8"/>
           <p:cNvSpPr txBox="1"/>
           <p:nvPr/>
         </p:nvSpPr>
         <p:spPr>
           <a:xfrm>
-            <a:off x="822960" y="1783080"/>
-            <a:ext cx="914400" cy="822960"/>
+            <a:off x="868680" y="1874519"/>
+            <a:ext cx="4846320" cy="353815"/>
           </a:xfrm>
           <a:prstGeom prst="rect">
             <a:avLst/>
@@ -30177,27 +30681,146 @@
               </a:spcAft>
             </a:pPr>
             <a:r>
-              <a:rPr sz="4800" b="1" i="0">
-                <a:solidFill>
-                  <a:srgbClr val="1F3A5F"/>
-                </a:solidFill>
-                <a:latin typeface="Calibri"/>
-              </a:rPr>
-              <a:t>1</a:t>
-            </a:r>
-          </a:p>
-        </p:txBody>
-      </p:sp>
-      <p:sp>
-        <p:nvSpPr>
-          <p:cNvPr id="9" name="TextBox 8"/>
+              <a:rPr lang="it-IT" sz="2200" b="1" i="0">
+                <a:solidFill>
+                  <a:srgbClr val="E07A2D"/>
+                </a:solidFill>
+                <a:latin typeface="Calibri"/>
+              </a:rPr>
+              <a:t>Prima: una tabella per tutti</a:t>
+            </a:r>
+            <a:endParaRPr sz="2200" b="1" i="0">
+              <a:solidFill>
+                <a:srgbClr val="E07A2D"/>
+              </a:solidFill>
+              <a:latin typeface="Calibri"/>
+            </a:endParaRPr>
+          </a:p>
+        </p:txBody>
+      </p:sp>
+      <p:sp>
+        <p:nvSpPr>
+          <p:cNvPr id="10" name="Rounded Rectangle 9"/>
+          <p:cNvSpPr/>
+          <p:nvPr/>
+        </p:nvSpPr>
+        <p:spPr>
+          <a:xfrm>
+            <a:off x="868680" y="2468880"/>
+            <a:ext cx="4754880" cy="914400"/>
+          </a:xfrm>
+          <a:prstGeom prst="roundRect">
+            <a:avLst>
+              <a:gd name="adj" fmla="val 6000"/>
+            </a:avLst>
+          </a:prstGeom>
+          <a:solidFill>
+            <a:srgbClr val="1E2733"/>
+          </a:solidFill>
+          <a:ln>
+            <a:noFill/>
+          </a:ln>
+          <a:effectLst/>
+        </p:spPr>
+        <p:style>
+          <a:lnRef idx="1">
+            <a:schemeClr val="accent1"/>
+          </a:lnRef>
+          <a:fillRef idx="3">
+            <a:schemeClr val="accent1"/>
+          </a:fillRef>
+          <a:effectRef idx="2">
+            <a:schemeClr val="accent1"/>
+          </a:effectRef>
+          <a:fontRef idx="minor">
+            <a:schemeClr val="lt1"/>
+          </a:fontRef>
+        </p:style>
+        <p:txBody>
+          <a:bodyPr rtlCol="0" anchor="ctr"/>
+          <a:lstStyle/>
+          <a:p>
+            <a:endParaRPr/>
+          </a:p>
+        </p:txBody>
+      </p:sp>
+      <p:sp>
+        <p:nvSpPr>
+          <p:cNvPr id="11" name="TextBox 10"/>
           <p:cNvSpPr txBox="1"/>
           <p:nvPr/>
         </p:nvSpPr>
         <p:spPr>
           <a:xfrm>
-            <a:off x="822960" y="2651760"/>
-            <a:ext cx="3017520" cy="457200"/>
+            <a:off x="1097280" y="2606039"/>
+            <a:ext cx="4480560" cy="711200"/>
+          </a:xfrm>
+          <a:prstGeom prst="rect">
+            <a:avLst/>
+          </a:prstGeom>
+          <a:noFill/>
+        </p:spPr>
+        <p:txBody>
+          <a:bodyPr wrap="square" lIns="0" tIns="0" rIns="0" bIns="0" anchor="t">
+            <a:spAutoFit/>
+          </a:bodyPr>
+          <a:lstStyle/>
+          <a:p>
+            <a:pPr algn="l">
+              <a:lnSpc>
+                <a:spcPct val="110000"/>
+              </a:lnSpc>
+              <a:spcAft>
+                <a:spcPts val="0"/>
+              </a:spcAft>
+            </a:pPr>
+            <a:r>
+              <a:rPr lang="it-IT" sz="1500" i="0">
+                <a:solidFill>
+                  <a:srgbClr val="E8ECF1"/>
+                </a:solidFill>
+                <a:latin typeface="Consolas"/>
+              </a:rPr>
+              <a:t>act = class_action[classe];</a:t>
+            </a:r>
+          </a:p>
+          <a:p>
+            <a:pPr algn="l">
+              <a:lnSpc>
+                <a:spcPct val="110000"/>
+              </a:lnSpc>
+              <a:spcAft>
+                <a:spcPts val="0"/>
+              </a:spcAft>
+            </a:pPr>
+            <a:r>
+              <a:rPr lang="it-IT" sz="1500" i="0">
+                <a:solidFill>
+                  <a:srgbClr val="E8ECF1"/>
+                </a:solidFill>
+                <a:latin typeface="Consolas"/>
+              </a:rPr>
+              <a:t>// la stessa per ogni modello</a:t>
+            </a:r>
+            <a:endParaRPr sz="1500" i="0">
+              <a:solidFill>
+                <a:srgbClr val="E8ECF1"/>
+              </a:solidFill>
+              <a:latin typeface="Consolas"/>
+            </a:endParaRPr>
+          </a:p>
+        </p:txBody>
+      </p:sp>
+      <p:sp>
+        <p:nvSpPr>
+          <p:cNvPr id="12" name="TextBox 11"/>
+          <p:cNvSpPr txBox="1"/>
+          <p:nvPr/>
+        </p:nvSpPr>
+        <p:spPr>
+          <a:xfrm>
+            <a:off x="868680" y="3606800"/>
+            <a:ext cx="4846320" cy="798937"/>
           </a:xfrm>
           <a:prstGeom prst="rect">
             <a:avLst/>
@@ -30219,27 +30842,141 @@
               </a:spcAft>
             </a:pPr>
             <a:r>
-              <a:rPr sz="2000" b="1" i="0">
-                <a:solidFill>
-                  <a:srgbClr val="1F3A5F"/>
-                </a:solidFill>
-                <a:latin typeface="Calibri"/>
-              </a:rPr>
-              <a:t>Il programma da solo</a:t>
-            </a:r>
-          </a:p>
-        </p:txBody>
-      </p:sp>
-      <p:sp>
-        <p:nvSpPr>
-          <p:cNvPr id="10" name="TextBox 9"/>
+              <a:rPr lang="it-IT" sz="1600" i="0">
+                <a:solidFill>
+                  <a:srgbClr val="222B36"/>
+                </a:solidFill>
+                <a:latin typeface="Calibri"/>
+              </a:rPr>
+              <a:t>Un secondo modello che dava alle classi un altro significato veniva </a:t>
+            </a:r>
+            <a:r>
+              <a:rPr lang="it-IT" sz="1600" b="1" i="0">
+                <a:solidFill>
+                  <a:srgbClr val="222B36"/>
+                </a:solidFill>
+                <a:latin typeface="Calibri"/>
+              </a:rPr>
+              <a:t>rifiutato</a:t>
+            </a:r>
+            <a:r>
+              <a:rPr lang="it-IT" sz="1600" i="0">
+                <a:solidFill>
+                  <a:srgbClr val="222B36"/>
+                </a:solidFill>
+                <a:latin typeface="Calibri"/>
+              </a:rPr>
+              <a:t>: un programma solo, ma per modelli con le stesse classi.</a:t>
+            </a:r>
+            <a:endParaRPr sz="1600" i="0">
+              <a:solidFill>
+                <a:srgbClr val="222B36"/>
+              </a:solidFill>
+              <a:latin typeface="Calibri"/>
+            </a:endParaRPr>
+          </a:p>
+        </p:txBody>
+      </p:sp>
+      <p:sp>
+        <p:nvSpPr>
+          <p:cNvPr id="13" name="Rounded Rectangle 12"/>
+          <p:cNvSpPr/>
+          <p:nvPr/>
+        </p:nvSpPr>
+        <p:spPr>
+          <a:xfrm>
+            <a:off x="6217920" y="1600200"/>
+            <a:ext cx="5394960" cy="3149600"/>
+          </a:xfrm>
+          <a:prstGeom prst="roundRect">
+            <a:avLst>
+              <a:gd name="adj" fmla="val 6000"/>
+            </a:avLst>
+          </a:prstGeom>
+          <a:solidFill>
+            <a:srgbClr val="F3F5F8"/>
+          </a:solidFill>
+          <a:ln>
+            <a:noFill/>
+          </a:ln>
+          <a:effectLst/>
+        </p:spPr>
+        <p:style>
+          <a:lnRef idx="1">
+            <a:schemeClr val="accent1"/>
+          </a:lnRef>
+          <a:fillRef idx="3">
+            <a:schemeClr val="accent1"/>
+          </a:fillRef>
+          <a:effectRef idx="2">
+            <a:schemeClr val="accent1"/>
+          </a:effectRef>
+          <a:fontRef idx="minor">
+            <a:schemeClr val="lt1"/>
+          </a:fontRef>
+        </p:style>
+        <p:txBody>
+          <a:bodyPr rtlCol="0" anchor="ctr"/>
+          <a:lstStyle/>
+          <a:p>
+            <a:endParaRPr/>
+          </a:p>
+        </p:txBody>
+      </p:sp>
+      <p:sp>
+        <p:nvSpPr>
+          <p:cNvPr id="14" name="Rectangle 13"/>
+          <p:cNvSpPr/>
+          <p:nvPr/>
+        </p:nvSpPr>
+        <p:spPr>
+          <a:xfrm>
+            <a:off x="6217920" y="1600200"/>
+            <a:ext cx="5394960" cy="91440"/>
+          </a:xfrm>
+          <a:prstGeom prst="rect">
+            <a:avLst/>
+          </a:prstGeom>
+          <a:solidFill>
+            <a:srgbClr val="2E9C6E"/>
+          </a:solidFill>
+          <a:ln>
+            <a:noFill/>
+          </a:ln>
+          <a:effectLst/>
+        </p:spPr>
+        <p:style>
+          <a:lnRef idx="1">
+            <a:schemeClr val="accent1"/>
+          </a:lnRef>
+          <a:fillRef idx="3">
+            <a:schemeClr val="accent1"/>
+          </a:fillRef>
+          <a:effectRef idx="2">
+            <a:schemeClr val="accent1"/>
+          </a:effectRef>
+          <a:fontRef idx="minor">
+            <a:schemeClr val="lt1"/>
+          </a:fontRef>
+        </p:style>
+        <p:txBody>
+          <a:bodyPr rtlCol="0" anchor="ctr"/>
+          <a:lstStyle/>
+          <a:p>
+            <a:endParaRPr/>
+          </a:p>
+        </p:txBody>
+      </p:sp>
+      <p:sp>
+        <p:nvSpPr>
+          <p:cNvPr id="15" name="TextBox 14"/>
           <p:cNvSpPr txBox="1"/>
           <p:nvPr/>
         </p:nvSpPr>
         <p:spPr>
           <a:xfrm>
-            <a:off x="822960" y="3154680"/>
-            <a:ext cx="3017520" cy="1463040"/>
+            <a:off x="6537960" y="1874519"/>
+            <a:ext cx="4846320" cy="353815"/>
           </a:xfrm>
           <a:prstGeom prst="rect">
             <a:avLst/>
@@ -30261,27 +30998,33 @@
               </a:spcAft>
             </a:pPr>
             <a:r>
-              <a:rPr sz="1500" b="0" i="0">
-                <a:solidFill>
-                  <a:srgbClr val="222B36"/>
-                </a:solidFill>
-                <a:latin typeface="Calibri"/>
-              </a:rPr>
-              <a:t>Il kernel esegue il programma su un pacchetto preparato, in un ciclo. Niente schede, niente code.</a:t>
-            </a:r>
-          </a:p>
-        </p:txBody>
-      </p:sp>
-      <p:sp>
-        <p:nvSpPr>
-          <p:cNvPr id="11" name="Rounded Rectangle 10"/>
+              <a:rPr lang="it-IT" sz="2200" b="1" i="0">
+                <a:solidFill>
+                  <a:srgbClr val="2E9C6E"/>
+                </a:solidFill>
+                <a:latin typeface="Calibri"/>
+              </a:rPr>
+              <a:t>Ora: una per modello</a:t>
+            </a:r>
+            <a:endParaRPr sz="2200" b="1" i="0">
+              <a:solidFill>
+                <a:srgbClr val="2E9C6E"/>
+              </a:solidFill>
+              <a:latin typeface="Calibri"/>
+            </a:endParaRPr>
+          </a:p>
+        </p:txBody>
+      </p:sp>
+      <p:sp>
+        <p:nvSpPr>
+          <p:cNvPr id="16" name="Rounded Rectangle 15"/>
           <p:cNvSpPr/>
           <p:nvPr/>
         </p:nvSpPr>
         <p:spPr>
           <a:xfrm>
-            <a:off x="822960" y="4709160"/>
-            <a:ext cx="2971800" cy="731520"/>
+            <a:off x="6537960" y="2468880"/>
+            <a:ext cx="4754880" cy="914400"/>
           </a:xfrm>
           <a:prstGeom prst="roundRect">
             <a:avLst>
@@ -30289,12 +31032,10 @@
             </a:avLst>
           </a:prstGeom>
           <a:solidFill>
-            <a:srgbClr val="FFFFFF"/>
+            <a:srgbClr val="1E2733"/>
           </a:solidFill>
-          <a:ln w="15875">
-            <a:solidFill>
-              <a:srgbClr val="1F3A5F"/>
-            </a:solidFill>
+          <a:ln>
+            <a:noFill/>
           </a:ln>
           <a:effectLst/>
         </p:spPr>
@@ -30322,14 +31063,14 @@
       </p:sp>
       <p:sp>
         <p:nvSpPr>
-          <p:cNvPr id="12" name="TextBox 11"/>
+          <p:cNvPr id="17" name="TextBox 16"/>
           <p:cNvSpPr txBox="1"/>
           <p:nvPr/>
         </p:nvSpPr>
         <p:spPr>
           <a:xfrm>
-            <a:off x="960120" y="4709160"/>
-            <a:ext cx="2743200" cy="731520"/>
+            <a:off x="6766560" y="2606039"/>
+            <a:ext cx="4480560" cy="711200"/>
           </a:xfrm>
           <a:prstGeom prst="rect">
             <a:avLst/>
@@ -30337,7 +31078,7 @@
           <a:noFill/>
         </p:spPr>
         <p:txBody>
-          <a:bodyPr wrap="square" lIns="0" tIns="0" rIns="0" bIns="0" anchor="ctr">
+          <a:bodyPr wrap="square" lIns="0" tIns="0" rIns="0" bIns="0" anchor="t">
             <a:spAutoFit/>
           </a:bodyPr>
           <a:lstStyle/>
@@ -30351,91 +31092,52 @@
               </a:spcAft>
             </a:pPr>
             <a:r>
-              <a:rPr sz="1500" b="0" i="0">
-                <a:solidFill>
-                  <a:srgbClr val="1F3A5F"/>
-                </a:solidFill>
-                <a:latin typeface="Calibri"/>
-              </a:rPr>
-              <a:t>Quanto costa il </a:t>
-            </a:r>
-            <a:r>
-              <a:rPr sz="1500" b="1" i="0">
-                <a:solidFill>
-                  <a:srgbClr val="1F3A5F"/>
-                </a:solidFill>
-                <a:latin typeface="Calibri"/>
-              </a:rPr>
-              <a:t>calcolo</a:t>
-            </a:r>
-            <a:r>
-              <a:rPr sz="1500" b="0" i="0">
-                <a:solidFill>
-                  <a:srgbClr val="1F3A5F"/>
-                </a:solidFill>
-                <a:latin typeface="Calibri"/>
-              </a:rPr>
-              <a:t>?</a:t>
-            </a:r>
-          </a:p>
-        </p:txBody>
-      </p:sp>
-      <p:sp>
-        <p:nvSpPr>
-          <p:cNvPr id="13" name="Rounded Rectangle 12"/>
-          <p:cNvSpPr/>
-          <p:nvPr/>
-        </p:nvSpPr>
-        <p:spPr>
-          <a:xfrm>
-            <a:off x="4297679" y="1645920"/>
-            <a:ext cx="3520440" cy="4023360"/>
-          </a:xfrm>
-          <a:prstGeom prst="roundRect">
-            <a:avLst>
-              <a:gd name="adj" fmla="val 6000"/>
-            </a:avLst>
-          </a:prstGeom>
-          <a:solidFill>
-            <a:srgbClr val="F3F5F8"/>
-          </a:solidFill>
-          <a:ln>
-            <a:noFill/>
-          </a:ln>
-          <a:effectLst/>
-        </p:spPr>
-        <p:style>
-          <a:lnRef idx="1">
-            <a:schemeClr val="accent1"/>
-          </a:lnRef>
-          <a:fillRef idx="3">
-            <a:schemeClr val="accent1"/>
-          </a:fillRef>
-          <a:effectRef idx="2">
-            <a:schemeClr val="accent1"/>
-          </a:effectRef>
-          <a:fontRef idx="minor">
-            <a:schemeClr val="lt1"/>
-          </a:fontRef>
-        </p:style>
-        <p:txBody>
-          <a:bodyPr rtlCol="0" anchor="ctr"/>
-          <a:lstStyle/>
-          <a:p>
-            <a:endParaRPr/>
-          </a:p>
-        </p:txBody>
-      </p:sp>
-      <p:sp>
-        <p:nvSpPr>
-          <p:cNvPr id="14" name="TextBox 13"/>
+              <a:rPr lang="it-IT" sz="1500" i="0">
+                <a:solidFill>
+                  <a:srgbClr val="E8ECF1"/>
+                </a:solidFill>
+                <a:latin typeface="Consolas"/>
+              </a:rPr>
+              <a:t>act = class_action[model_id][classe];</a:t>
+            </a:r>
+          </a:p>
+          <a:p>
+            <a:pPr algn="l">
+              <a:lnSpc>
+                <a:spcPct val="110000"/>
+              </a:lnSpc>
+              <a:spcAft>
+                <a:spcPts val="0"/>
+              </a:spcAft>
+            </a:pPr>
+            <a:r>
+              <a:rPr lang="it-IT" sz="1500" i="0">
+                <a:solidFill>
+                  <a:srgbClr val="E8ECF1"/>
+                </a:solidFill>
+                <a:latin typeface="Consolas"/>
+              </a:rPr>
+              <a:t>// righe proprie per ogni modello</a:t>
+            </a:r>
+            <a:endParaRPr sz="1500" i="0">
+              <a:solidFill>
+                <a:srgbClr val="E8ECF1"/>
+              </a:solidFill>
+              <a:latin typeface="Consolas"/>
+            </a:endParaRPr>
+          </a:p>
+        </p:txBody>
+      </p:sp>
+      <p:sp>
+        <p:nvSpPr>
+          <p:cNvPr id="18" name="TextBox 17"/>
           <p:cNvSpPr txBox="1"/>
           <p:nvPr/>
         </p:nvSpPr>
         <p:spPr>
           <a:xfrm>
-            <a:off x="4571999" y="1783080"/>
-            <a:ext cx="914400" cy="822960"/>
+            <a:off x="6537960" y="3606800"/>
+            <a:ext cx="4846320" cy="798937"/>
           </a:xfrm>
           <a:prstGeom prst="rect">
             <a:avLst/>
@@ -30457,111 +31159,51 @@
               </a:spcAft>
             </a:pPr>
             <a:r>
-              <a:rPr sz="4800" b="1" i="0">
-                <a:solidFill>
-                  <a:srgbClr val="E07A2D"/>
-                </a:solidFill>
-                <a:latin typeface="Calibri"/>
-              </a:rPr>
-              <a:t>2</a:t>
-            </a:r>
-          </a:p>
-        </p:txBody>
-      </p:sp>
-      <p:sp>
-        <p:nvSpPr>
-          <p:cNvPr id="15" name="TextBox 14"/>
-          <p:cNvSpPr txBox="1"/>
-          <p:nvPr/>
-        </p:nvSpPr>
-        <p:spPr>
-          <a:xfrm>
-            <a:off x="4571999" y="2651760"/>
-            <a:ext cx="3017520" cy="457200"/>
-          </a:xfrm>
-          <a:prstGeom prst="rect">
-            <a:avLst/>
-          </a:prstGeom>
-          <a:noFill/>
-        </p:spPr>
-        <p:txBody>
-          <a:bodyPr wrap="square" lIns="0" tIns="0" rIns="0" bIns="0" anchor="t">
-            <a:spAutoFit/>
-          </a:bodyPr>
-          <a:lstStyle/>
-          <a:p>
-            <a:pPr algn="l">
-              <a:lnSpc>
-                <a:spcPct val="110000"/>
-              </a:lnSpc>
-              <a:spcAft>
-                <a:spcPts val="600"/>
-              </a:spcAft>
-            </a:pPr>
-            <a:r>
-              <a:rPr sz="2000" b="1" i="0">
-                <a:solidFill>
-                  <a:srgbClr val="1F3A5F"/>
-                </a:solidFill>
-                <a:latin typeface="Calibri"/>
-              </a:rPr>
-              <a:t>Tre orologi nel nodo</a:t>
-            </a:r>
-          </a:p>
-        </p:txBody>
-      </p:sp>
-      <p:sp>
-        <p:nvSpPr>
-          <p:cNvPr id="16" name="TextBox 15"/>
-          <p:cNvSpPr txBox="1"/>
-          <p:nvPr/>
-        </p:nvSpPr>
-        <p:spPr>
-          <a:xfrm>
-            <a:off x="4571999" y="3154680"/>
-            <a:ext cx="3017520" cy="1463040"/>
-          </a:xfrm>
-          <a:prstGeom prst="rect">
-            <a:avLst/>
-          </a:prstGeom>
-          <a:noFill/>
-        </p:spPr>
-        <p:txBody>
-          <a:bodyPr wrap="square" lIns="0" tIns="0" rIns="0" bIns="0" anchor="t">
-            <a:spAutoFit/>
-          </a:bodyPr>
-          <a:lstStyle/>
-          <a:p>
-            <a:pPr algn="l">
-              <a:lnSpc>
-                <a:spcPct val="110000"/>
-              </a:lnSpc>
-              <a:spcAft>
-                <a:spcPts val="600"/>
-              </a:spcAft>
-            </a:pPr>
-            <a:r>
-              <a:rPr sz="1500" b="0" i="0">
+              <a:rPr lang="it-IT" sz="1600" i="0">
                 <a:solidFill>
                   <a:srgbClr val="222B36"/>
                 </a:solidFill>
                 <a:latin typeface="Calibri"/>
               </a:rPr>
-              <a:t>Tre marcature di tempo: all'ingresso del programma (T1), prima di inoltrare (T2), all'arrivo dall'altra parte (T3).</a:t>
-            </a:r>
-          </a:p>
-        </p:txBody>
-      </p:sp>
-      <p:sp>
-        <p:nvSpPr>
-          <p:cNvPr id="17" name="Rounded Rectangle 16"/>
+              <a:t>Modello A: la classe 0 inoltra, la 1 scarta; modello B l'opposto. </a:t>
+            </a:r>
+            <a:r>
+              <a:rPr lang="it-IT" sz="1600" b="1" i="0">
+                <a:solidFill>
+                  <a:srgbClr val="222B36"/>
+                </a:solidFill>
+                <a:latin typeface="Calibri"/>
+              </a:rPr>
+              <a:t>Convivono</a:t>
+            </a:r>
+            <a:r>
+              <a:rPr lang="it-IT" sz="1600" i="0">
+                <a:solidFill>
+                  <a:srgbClr val="222B36"/>
+                </a:solidFill>
+                <a:latin typeface="Calibri"/>
+              </a:rPr>
+              <a:t> nello stesso programma, e ricaricarne uno non tocca gli altri.</a:t>
+            </a:r>
+            <a:endParaRPr sz="1600" i="0">
+              <a:solidFill>
+                <a:srgbClr val="222B36"/>
+              </a:solidFill>
+              <a:latin typeface="Calibri"/>
+            </a:endParaRPr>
+          </a:p>
+        </p:txBody>
+      </p:sp>
+      <p:sp>
+        <p:nvSpPr>
+          <p:cNvPr id="19" name="Rounded Rectangle 18"/>
           <p:cNvSpPr/>
           <p:nvPr/>
         </p:nvSpPr>
         <p:spPr>
           <a:xfrm>
-            <a:off x="4571999" y="4709160"/>
-            <a:ext cx="2971800" cy="731520"/>
+            <a:off x="548640" y="5080000"/>
+            <a:ext cx="11094415" cy="731520"/>
           </a:xfrm>
           <a:prstGeom prst="roundRect">
             <a:avLst>
@@ -30569,12 +31211,10 @@
             </a:avLst>
           </a:prstGeom>
           <a:solidFill>
-            <a:srgbClr val="FFFFFF"/>
+            <a:srgbClr val="1F3A5F"/>
           </a:solidFill>
-          <a:ln w="15875">
-            <a:solidFill>
-              <a:srgbClr val="E07A2D"/>
-            </a:solidFill>
+          <a:ln>
+            <a:noFill/>
           </a:ln>
           <a:effectLst/>
         </p:spPr>
@@ -30602,14 +31242,14 @@
       </p:sp>
       <p:sp>
         <p:nvSpPr>
-          <p:cNvPr id="18" name="TextBox 17"/>
+          <p:cNvPr id="20" name="TextBox 19"/>
           <p:cNvSpPr txBox="1"/>
           <p:nvPr/>
         </p:nvSpPr>
         <p:spPr>
           <a:xfrm>
-            <a:off x="4709159" y="4709160"/>
-            <a:ext cx="2743200" cy="731520"/>
+            <a:off x="822960" y="5079999"/>
+            <a:ext cx="10545775" cy="731520"/>
           </a:xfrm>
           <a:prstGeom prst="rect">
             <a:avLst/>
@@ -30618,329 +31258,69 @@
         </p:spPr>
         <p:txBody>
           <a:bodyPr wrap="square" lIns="0" tIns="0" rIns="0" bIns="0" anchor="ctr">
-            <a:spAutoFit/>
+            <a:noAutofit/>
           </a:bodyPr>
           <a:lstStyle/>
           <a:p>
             <a:pPr algn="l">
               <a:lnSpc>
-                <a:spcPct val="110000"/>
+                <a:spcPct val="105000"/>
               </a:lnSpc>
               <a:spcAft>
                 <a:spcPts val="0"/>
               </a:spcAft>
             </a:pPr>
             <a:r>
-              <a:rPr sz="1500" b="0" i="0">
-                <a:solidFill>
-                  <a:srgbClr val="E07A2D"/>
-                </a:solidFill>
-                <a:latin typeface="Calibri"/>
-              </a:rPr>
-              <a:t>Quanta parte del tempo è la </a:t>
-            </a:r>
-            <a:r>
-              <a:rPr sz="1500" b="1" i="0">
-                <a:solidFill>
-                  <a:srgbClr val="E07A2D"/>
-                </a:solidFill>
-                <a:latin typeface="Calibri"/>
-              </a:rPr>
-              <a:t>rete neurale</a:t>
-            </a:r>
-            <a:r>
-              <a:rPr sz="1500" b="0" i="0">
-                <a:solidFill>
-                  <a:srgbClr val="E07A2D"/>
-                </a:solidFill>
-                <a:latin typeface="Calibri"/>
-              </a:rPr>
-              <a:t>?</a:t>
-            </a:r>
-          </a:p>
-        </p:txBody>
-      </p:sp>
-      <p:sp>
-        <p:nvSpPr>
-          <p:cNvPr id="19" name="Rounded Rectangle 18"/>
-          <p:cNvSpPr/>
-          <p:nvPr/>
-        </p:nvSpPr>
-        <p:spPr>
-          <a:xfrm>
-            <a:off x="8046718" y="1645920"/>
-            <a:ext cx="3520440" cy="4023360"/>
-          </a:xfrm>
-          <a:prstGeom prst="roundRect">
-            <a:avLst>
-              <a:gd name="adj" fmla="val 6000"/>
-            </a:avLst>
-          </a:prstGeom>
-          <a:solidFill>
-            <a:srgbClr val="F3F5F8"/>
-          </a:solidFill>
-          <a:ln>
-            <a:noFill/>
-          </a:ln>
-          <a:effectLst/>
-        </p:spPr>
-        <p:style>
-          <a:lnRef idx="1">
-            <a:schemeClr val="accent1"/>
-          </a:lnRef>
-          <a:fillRef idx="3">
-            <a:schemeClr val="accent1"/>
-          </a:fillRef>
-          <a:effectRef idx="2">
-            <a:schemeClr val="accent1"/>
-          </a:effectRef>
-          <a:fontRef idx="minor">
-            <a:schemeClr val="lt1"/>
-          </a:fontRef>
-        </p:style>
-        <p:txBody>
-          <a:bodyPr rtlCol="0" anchor="ctr"/>
-          <a:lstStyle/>
-          <a:p>
-            <a:endParaRPr/>
-          </a:p>
-        </p:txBody>
-      </p:sp>
-      <p:sp>
-        <p:nvSpPr>
-          <p:cNvPr id="20" name="TextBox 19"/>
-          <p:cNvSpPr txBox="1"/>
-          <p:nvPr/>
-        </p:nvSpPr>
-        <p:spPr>
-          <a:xfrm>
-            <a:off x="8321038" y="1783080"/>
-            <a:ext cx="914400" cy="822960"/>
-          </a:xfrm>
-          <a:prstGeom prst="rect">
-            <a:avLst/>
-          </a:prstGeom>
-          <a:noFill/>
-        </p:spPr>
-        <p:txBody>
-          <a:bodyPr wrap="square" lIns="0" tIns="0" rIns="0" bIns="0" anchor="t">
-            <a:spAutoFit/>
-          </a:bodyPr>
-          <a:lstStyle/>
-          <a:p>
-            <a:pPr algn="l">
-              <a:lnSpc>
-                <a:spcPct val="110000"/>
-              </a:lnSpc>
-              <a:spcAft>
-                <a:spcPts val="600"/>
-              </a:spcAft>
-            </a:pPr>
-            <a:r>
-              <a:rPr sz="4800" b="1" i="0">
-                <a:solidFill>
-                  <a:srgbClr val="2E9C6E"/>
-                </a:solidFill>
-                <a:latin typeface="Calibri"/>
-              </a:rPr>
-              <a:t>3</a:t>
-            </a:r>
-          </a:p>
-        </p:txBody>
-      </p:sp>
-      <p:sp>
-        <p:nvSpPr>
-          <p:cNvPr id="21" name="TextBox 20"/>
-          <p:cNvSpPr txBox="1"/>
-          <p:nvPr/>
-        </p:nvSpPr>
-        <p:spPr>
-          <a:xfrm>
-            <a:off x="8321038" y="2651760"/>
-            <a:ext cx="3017520" cy="457200"/>
-          </a:xfrm>
-          <a:prstGeom prst="rect">
-            <a:avLst/>
-          </a:prstGeom>
-          <a:noFill/>
-        </p:spPr>
-        <p:txBody>
-          <a:bodyPr wrap="square" lIns="0" tIns="0" rIns="0" bIns="0" anchor="t">
-            <a:spAutoFit/>
-          </a:bodyPr>
-          <a:lstStyle/>
-          <a:p>
-            <a:pPr algn="l">
-              <a:lnSpc>
-                <a:spcPct val="110000"/>
-              </a:lnSpc>
-              <a:spcAft>
-                <a:spcPts val="600"/>
-              </a:spcAft>
-            </a:pPr>
-            <a:r>
-              <a:rPr sz="2000" b="1" i="0">
-                <a:solidFill>
-                  <a:srgbClr val="1F3A5F"/>
-                </a:solidFill>
-                <a:latin typeface="Calibri"/>
-              </a:rPr>
-              <a:t>Il nodo sotto traffico</a:t>
-            </a:r>
-          </a:p>
-        </p:txBody>
-      </p:sp>
-      <p:sp>
-        <p:nvSpPr>
-          <p:cNvPr id="22" name="TextBox 21"/>
-          <p:cNvSpPr txBox="1"/>
-          <p:nvPr/>
-        </p:nvSpPr>
-        <p:spPr>
-          <a:xfrm>
-            <a:off x="8321038" y="3154680"/>
-            <a:ext cx="3017520" cy="1463040"/>
-          </a:xfrm>
-          <a:prstGeom prst="rect">
-            <a:avLst/>
-          </a:prstGeom>
-          <a:noFill/>
-        </p:spPr>
-        <p:txBody>
-          <a:bodyPr wrap="square" lIns="0" tIns="0" rIns="0" bIns="0" anchor="t">
-            <a:spAutoFit/>
-          </a:bodyPr>
-          <a:lstStyle/>
-          <a:p>
-            <a:pPr algn="l">
-              <a:lnSpc>
-                <a:spcPct val="110000"/>
-              </a:lnSpc>
-              <a:spcAft>
-                <a:spcPts val="600"/>
-              </a:spcAft>
-            </a:pPr>
-            <a:r>
-              <a:rPr sz="1500" b="0" i="0">
-                <a:solidFill>
-                  <a:srgbClr val="222B36"/>
-                </a:solidFill>
-                <a:latin typeface="Calibri"/>
-              </a:rPr>
-              <a:t>Un generatore spinge più pacchetti di quanti il nodo ne regga, per minuti, e si contano quelli elaborati.</a:t>
-            </a:r>
-          </a:p>
-        </p:txBody>
-      </p:sp>
-      <p:sp>
-        <p:nvSpPr>
-          <p:cNvPr id="23" name="Rounded Rectangle 22"/>
-          <p:cNvSpPr/>
-          <p:nvPr/>
-        </p:nvSpPr>
-        <p:spPr>
-          <a:xfrm>
-            <a:off x="8321038" y="4709160"/>
-            <a:ext cx="2971800" cy="731520"/>
-          </a:xfrm>
-          <a:prstGeom prst="roundRect">
-            <a:avLst>
-              <a:gd name="adj" fmla="val 6000"/>
-            </a:avLst>
-          </a:prstGeom>
-          <a:solidFill>
-            <a:srgbClr val="FFFFFF"/>
-          </a:solidFill>
-          <a:ln w="15875">
-            <a:solidFill>
-              <a:srgbClr val="2E9C6E"/>
-            </a:solidFill>
-          </a:ln>
-          <a:effectLst/>
-        </p:spPr>
-        <p:style>
-          <a:lnRef idx="1">
-            <a:schemeClr val="accent1"/>
-          </a:lnRef>
-          <a:fillRef idx="3">
-            <a:schemeClr val="accent1"/>
-          </a:fillRef>
-          <a:effectRef idx="2">
-            <a:schemeClr val="accent1"/>
-          </a:effectRef>
-          <a:fontRef idx="minor">
-            <a:schemeClr val="lt1"/>
-          </a:fontRef>
-        </p:style>
-        <p:txBody>
-          <a:bodyPr rtlCol="0" anchor="ctr"/>
-          <a:lstStyle/>
-          <a:p>
-            <a:endParaRPr/>
-          </a:p>
-        </p:txBody>
-      </p:sp>
-      <p:sp>
-        <p:nvSpPr>
-          <p:cNvPr id="24" name="TextBox 23"/>
-          <p:cNvSpPr txBox="1"/>
-          <p:nvPr/>
-        </p:nvSpPr>
-        <p:spPr>
-          <a:xfrm>
-            <a:off x="8458198" y="4709160"/>
-            <a:ext cx="2743200" cy="731520"/>
-          </a:xfrm>
-          <a:prstGeom prst="rect">
-            <a:avLst/>
-          </a:prstGeom>
-          <a:noFill/>
-        </p:spPr>
-        <p:txBody>
-          <a:bodyPr wrap="square" lIns="0" tIns="0" rIns="0" bIns="0" anchor="ctr">
-            <a:spAutoFit/>
-          </a:bodyPr>
-          <a:lstStyle/>
-          <a:p>
-            <a:pPr algn="l">
-              <a:lnSpc>
-                <a:spcPct val="110000"/>
-              </a:lnSpc>
-              <a:spcAft>
-                <a:spcPts val="0"/>
-              </a:spcAft>
-            </a:pPr>
-            <a:r>
-              <a:rPr sz="1500" b="0" i="0">
-                <a:solidFill>
-                  <a:srgbClr val="2E9C6E"/>
-                </a:solidFill>
-                <a:latin typeface="Calibri"/>
-              </a:rPr>
-              <a:t>Quanti pacchetti regge </a:t>
-            </a:r>
-            <a:r>
-              <a:rPr sz="1500" b="1" i="0">
-                <a:solidFill>
-                  <a:srgbClr val="2E9C6E"/>
-                </a:solidFill>
-                <a:latin typeface="Calibri"/>
-              </a:rPr>
-              <a:t>davvero</a:t>
-            </a:r>
-            <a:r>
-              <a:rPr sz="1500" b="0" i="0">
-                <a:solidFill>
-                  <a:srgbClr val="2E9C6E"/>
-                </a:solidFill>
-                <a:latin typeface="Calibri"/>
-              </a:rPr>
-              <a:t> il nodo?</a:t>
-            </a:r>
+              <a:rPr lang="it-IT" sz="1600" b="1" i="0">
+                <a:solidFill>
+                  <a:srgbClr val="FFFFFF"/>
+                </a:solidFill>
+                <a:latin typeface="Calibri"/>
+              </a:rPr>
+              <a:t>Stesse letture di tabella</a:t>
+            </a:r>
+            <a:r>
+              <a:rPr lang="it-IT" sz="1600" i="0">
+                <a:solidFill>
+                  <a:srgbClr val="FFFFFF"/>
+                </a:solidFill>
+                <a:latin typeface="Calibri"/>
+              </a:rPr>
+              <a:t>, latenza entro il rumore, nessuna crescita da 1 a 8 modelli. Il prezzo è in memoria: </a:t>
+            </a:r>
+            <a:r>
+              <a:rPr lang="it-IT" sz="1600" b="1" i="0">
+                <a:solidFill>
+                  <a:srgbClr val="FFFFFF"/>
+                </a:solidFill>
+                <a:latin typeface="Calibri"/>
+              </a:rPr>
+              <a:t>128 KiB</a:t>
+            </a:r>
+            <a:r>
+              <a:rPr lang="it-IT" sz="1600" i="0">
+                <a:solidFill>
+                  <a:srgbClr val="FFFFFF"/>
+                </a:solidFill>
+                <a:latin typeface="Calibri"/>
+              </a:rPr>
+              <a:t> di tabella per pipeline.</a:t>
+            </a:r>
+            <a:endParaRPr sz="1600" i="0">
+              <a:solidFill>
+                <a:srgbClr val="FFFFFF"/>
+              </a:solidFill>
+              <a:latin typeface="Calibri"/>
+            </a:endParaRPr>
           </a:p>
         </p:txBody>
       </p:sp>
     </p:spTree>
+    <p:extLst>
+      <p:ext uri="{BB962C8B-B14F-4D97-AF65-F5344CB8AC3E}">
+        <p14:creationId xmlns:p14="http://schemas.microsoft.com/office/powerpoint/2010/main" val="4050059398"/>
+      </p:ext>
+    </p:extLst>
   </p:cSld>
   <p:clrMapOvr>
     <a:masterClrMapping/>
@@ -31054,7 +31434,7 @@
                 </a:solidFill>
                 <a:latin typeface="Calibri"/>
               </a:rPr>
-              <a:t>PRIMO RISULTATO · IL PROGRAMMA DA SOLO</a:t>
+              <a:t>COME SI MISURA</a:t>
             </a:r>
           </a:p>
         </p:txBody>
@@ -31096,7 +31476,7 @@
                 </a:solidFill>
                 <a:latin typeface="Calibri"/>
               </a:rPr>
-              <a:t>La configurabilità si paga per pacchetto: 36 → 258 ns</a:t>
+              <a:t>Tre misure, tre domande diverse</a:t>
             </a:r>
           </a:p>
         </p:txBody>
@@ -31110,7 +31490,7 @@
         <p:spPr>
           <a:xfrm>
             <a:off x="11292840" y="6446520"/>
-            <a:ext cx="457200" cy="274320"/>
+            <a:ext cx="457200" cy="176908"/>
           </a:xfrm>
           <a:prstGeom prst="rect">
             <a:avLst/>
@@ -31132,7 +31512,7 @@
               </a:spcAft>
             </a:pPr>
             <a:r>
-              <a:rPr sz="1100" b="0" i="0">
+              <a:rPr lang="it-IT" sz="1100" b="0" i="0">
                 <a:solidFill>
                   <a:srgbClr val="6B7C93"/>
                 </a:solidFill>
@@ -31140,6 +31520,1103 @@
               </a:rPr>
               <a:t>6</a:t>
             </a:r>
+            <a:endParaRPr sz="1100" b="0" i="0">
+              <a:solidFill>
+                <a:srgbClr val="6B7C93"/>
+              </a:solidFill>
+              <a:latin typeface="Calibri"/>
+            </a:endParaRPr>
+          </a:p>
+        </p:txBody>
+      </p:sp>
+      <p:sp>
+        <p:nvSpPr>
+          <p:cNvPr id="6" name="TextBox 5"/>
+          <p:cNvSpPr txBox="1"/>
+          <p:nvPr/>
+        </p:nvSpPr>
+        <p:spPr>
+          <a:xfrm>
+            <a:off x="548640" y="6446520"/>
+            <a:ext cx="10424160" cy="274320"/>
+          </a:xfrm>
+          <a:prstGeom prst="rect">
+            <a:avLst/>
+          </a:prstGeom>
+          <a:noFill/>
+        </p:spPr>
+        <p:txBody>
+          <a:bodyPr wrap="square" lIns="0" tIns="0" rIns="0" bIns="0" anchor="t">
+            <a:spAutoFit/>
+          </a:bodyPr>
+          <a:lstStyle/>
+          <a:p>
+            <a:pPr algn="l">
+              <a:lnSpc>
+                <a:spcPct val="110000"/>
+              </a:lnSpc>
+              <a:spcAft>
+                <a:spcPts val="600"/>
+              </a:spcAft>
+            </a:pPr>
+            <a:r>
+              <a:rPr sz="1100" b="0" i="1">
+                <a:solidFill>
+                  <a:srgbClr val="6B7C93"/>
+                </a:solidFill>
+                <a:latin typeface="Calibri"/>
+              </a:rPr>
+              <a:t>Non vanno moltiplicate fra loro: rispondono a domande diverse</a:t>
+            </a:r>
+          </a:p>
+        </p:txBody>
+      </p:sp>
+      <p:sp>
+        <p:nvSpPr>
+          <p:cNvPr id="7" name="Rounded Rectangle 6"/>
+          <p:cNvSpPr/>
+          <p:nvPr/>
+        </p:nvSpPr>
+        <p:spPr>
+          <a:xfrm>
+            <a:off x="548640" y="1645920"/>
+            <a:ext cx="3520440" cy="4023360"/>
+          </a:xfrm>
+          <a:prstGeom prst="roundRect">
+            <a:avLst>
+              <a:gd name="adj" fmla="val 6000"/>
+            </a:avLst>
+          </a:prstGeom>
+          <a:solidFill>
+            <a:srgbClr val="F3F5F8"/>
+          </a:solidFill>
+          <a:ln>
+            <a:noFill/>
+          </a:ln>
+          <a:effectLst/>
+        </p:spPr>
+        <p:style>
+          <a:lnRef idx="1">
+            <a:schemeClr val="accent1"/>
+          </a:lnRef>
+          <a:fillRef idx="3">
+            <a:schemeClr val="accent1"/>
+          </a:fillRef>
+          <a:effectRef idx="2">
+            <a:schemeClr val="accent1"/>
+          </a:effectRef>
+          <a:fontRef idx="minor">
+            <a:schemeClr val="lt1"/>
+          </a:fontRef>
+        </p:style>
+        <p:txBody>
+          <a:bodyPr rtlCol="0" anchor="ctr"/>
+          <a:lstStyle/>
+          <a:p>
+            <a:endParaRPr/>
+          </a:p>
+        </p:txBody>
+      </p:sp>
+      <p:sp>
+        <p:nvSpPr>
+          <p:cNvPr id="8" name="TextBox 7"/>
+          <p:cNvSpPr txBox="1"/>
+          <p:nvPr/>
+        </p:nvSpPr>
+        <p:spPr>
+          <a:xfrm>
+            <a:off x="822960" y="1783080"/>
+            <a:ext cx="914400" cy="822960"/>
+          </a:xfrm>
+          <a:prstGeom prst="rect">
+            <a:avLst/>
+          </a:prstGeom>
+          <a:noFill/>
+        </p:spPr>
+        <p:txBody>
+          <a:bodyPr wrap="square" lIns="0" tIns="0" rIns="0" bIns="0" anchor="t">
+            <a:spAutoFit/>
+          </a:bodyPr>
+          <a:lstStyle/>
+          <a:p>
+            <a:pPr algn="l">
+              <a:lnSpc>
+                <a:spcPct val="110000"/>
+              </a:lnSpc>
+              <a:spcAft>
+                <a:spcPts val="600"/>
+              </a:spcAft>
+            </a:pPr>
+            <a:r>
+              <a:rPr sz="4800" b="1" i="0">
+                <a:solidFill>
+                  <a:srgbClr val="1F3A5F"/>
+                </a:solidFill>
+                <a:latin typeface="Calibri"/>
+              </a:rPr>
+              <a:t>1</a:t>
+            </a:r>
+          </a:p>
+        </p:txBody>
+      </p:sp>
+      <p:sp>
+        <p:nvSpPr>
+          <p:cNvPr id="9" name="TextBox 8"/>
+          <p:cNvSpPr txBox="1"/>
+          <p:nvPr/>
+        </p:nvSpPr>
+        <p:spPr>
+          <a:xfrm>
+            <a:off x="822960" y="2651760"/>
+            <a:ext cx="3017520" cy="457200"/>
+          </a:xfrm>
+          <a:prstGeom prst="rect">
+            <a:avLst/>
+          </a:prstGeom>
+          <a:noFill/>
+        </p:spPr>
+        <p:txBody>
+          <a:bodyPr wrap="square" lIns="0" tIns="0" rIns="0" bIns="0" anchor="t">
+            <a:spAutoFit/>
+          </a:bodyPr>
+          <a:lstStyle/>
+          <a:p>
+            <a:pPr algn="l">
+              <a:lnSpc>
+                <a:spcPct val="110000"/>
+              </a:lnSpc>
+              <a:spcAft>
+                <a:spcPts val="600"/>
+              </a:spcAft>
+            </a:pPr>
+            <a:r>
+              <a:rPr sz="2000" b="1" i="0">
+                <a:solidFill>
+                  <a:srgbClr val="1F3A5F"/>
+                </a:solidFill>
+                <a:latin typeface="Calibri"/>
+              </a:rPr>
+              <a:t>Il programma da solo</a:t>
+            </a:r>
+          </a:p>
+        </p:txBody>
+      </p:sp>
+      <p:sp>
+        <p:nvSpPr>
+          <p:cNvPr id="10" name="TextBox 9"/>
+          <p:cNvSpPr txBox="1"/>
+          <p:nvPr/>
+        </p:nvSpPr>
+        <p:spPr>
+          <a:xfrm>
+            <a:off x="822960" y="3154680"/>
+            <a:ext cx="3017520" cy="1463040"/>
+          </a:xfrm>
+          <a:prstGeom prst="rect">
+            <a:avLst/>
+          </a:prstGeom>
+          <a:noFill/>
+        </p:spPr>
+        <p:txBody>
+          <a:bodyPr wrap="square" lIns="0" tIns="0" rIns="0" bIns="0" anchor="t">
+            <a:spAutoFit/>
+          </a:bodyPr>
+          <a:lstStyle/>
+          <a:p>
+            <a:pPr algn="l">
+              <a:lnSpc>
+                <a:spcPct val="110000"/>
+              </a:lnSpc>
+              <a:spcAft>
+                <a:spcPts val="600"/>
+              </a:spcAft>
+            </a:pPr>
+            <a:r>
+              <a:rPr sz="1500" b="0" i="0">
+                <a:solidFill>
+                  <a:srgbClr val="222B36"/>
+                </a:solidFill>
+                <a:latin typeface="Calibri"/>
+              </a:rPr>
+              <a:t>Il kernel esegue il programma su un pacchetto preparato, in un ciclo. Niente schede, niente code.</a:t>
+            </a:r>
+          </a:p>
+        </p:txBody>
+      </p:sp>
+      <p:sp>
+        <p:nvSpPr>
+          <p:cNvPr id="11" name="Rounded Rectangle 10"/>
+          <p:cNvSpPr/>
+          <p:nvPr/>
+        </p:nvSpPr>
+        <p:spPr>
+          <a:xfrm>
+            <a:off x="822960" y="4709160"/>
+            <a:ext cx="2971800" cy="731520"/>
+          </a:xfrm>
+          <a:prstGeom prst="roundRect">
+            <a:avLst>
+              <a:gd name="adj" fmla="val 6000"/>
+            </a:avLst>
+          </a:prstGeom>
+          <a:solidFill>
+            <a:srgbClr val="FFFFFF"/>
+          </a:solidFill>
+          <a:ln w="15875">
+            <a:solidFill>
+              <a:srgbClr val="1F3A5F"/>
+            </a:solidFill>
+          </a:ln>
+          <a:effectLst/>
+        </p:spPr>
+        <p:style>
+          <a:lnRef idx="1">
+            <a:schemeClr val="accent1"/>
+          </a:lnRef>
+          <a:fillRef idx="3">
+            <a:schemeClr val="accent1"/>
+          </a:fillRef>
+          <a:effectRef idx="2">
+            <a:schemeClr val="accent1"/>
+          </a:effectRef>
+          <a:fontRef idx="minor">
+            <a:schemeClr val="lt1"/>
+          </a:fontRef>
+        </p:style>
+        <p:txBody>
+          <a:bodyPr rtlCol="0" anchor="ctr"/>
+          <a:lstStyle/>
+          <a:p>
+            <a:endParaRPr/>
+          </a:p>
+        </p:txBody>
+      </p:sp>
+      <p:sp>
+        <p:nvSpPr>
+          <p:cNvPr id="12" name="TextBox 11"/>
+          <p:cNvSpPr txBox="1"/>
+          <p:nvPr/>
+        </p:nvSpPr>
+        <p:spPr>
+          <a:xfrm>
+            <a:off x="960120" y="4709160"/>
+            <a:ext cx="2743200" cy="731520"/>
+          </a:xfrm>
+          <a:prstGeom prst="rect">
+            <a:avLst/>
+          </a:prstGeom>
+          <a:noFill/>
+        </p:spPr>
+        <p:txBody>
+          <a:bodyPr wrap="square" lIns="0" tIns="0" rIns="0" bIns="0" anchor="ctr">
+            <a:spAutoFit/>
+          </a:bodyPr>
+          <a:lstStyle/>
+          <a:p>
+            <a:pPr algn="l">
+              <a:lnSpc>
+                <a:spcPct val="110000"/>
+              </a:lnSpc>
+              <a:spcAft>
+                <a:spcPts val="0"/>
+              </a:spcAft>
+            </a:pPr>
+            <a:r>
+              <a:rPr sz="1500" b="0" i="0">
+                <a:solidFill>
+                  <a:srgbClr val="1F3A5F"/>
+                </a:solidFill>
+                <a:latin typeface="Calibri"/>
+              </a:rPr>
+              <a:t>Quanto costa il </a:t>
+            </a:r>
+            <a:r>
+              <a:rPr sz="1500" b="1" i="0">
+                <a:solidFill>
+                  <a:srgbClr val="1F3A5F"/>
+                </a:solidFill>
+                <a:latin typeface="Calibri"/>
+              </a:rPr>
+              <a:t>calcolo</a:t>
+            </a:r>
+            <a:r>
+              <a:rPr sz="1500" b="0" i="0">
+                <a:solidFill>
+                  <a:srgbClr val="1F3A5F"/>
+                </a:solidFill>
+                <a:latin typeface="Calibri"/>
+              </a:rPr>
+              <a:t>?</a:t>
+            </a:r>
+          </a:p>
+        </p:txBody>
+      </p:sp>
+      <p:sp>
+        <p:nvSpPr>
+          <p:cNvPr id="13" name="Rounded Rectangle 12"/>
+          <p:cNvSpPr/>
+          <p:nvPr/>
+        </p:nvSpPr>
+        <p:spPr>
+          <a:xfrm>
+            <a:off x="4297679" y="1645920"/>
+            <a:ext cx="3520440" cy="4023360"/>
+          </a:xfrm>
+          <a:prstGeom prst="roundRect">
+            <a:avLst>
+              <a:gd name="adj" fmla="val 6000"/>
+            </a:avLst>
+          </a:prstGeom>
+          <a:solidFill>
+            <a:srgbClr val="F3F5F8"/>
+          </a:solidFill>
+          <a:ln>
+            <a:noFill/>
+          </a:ln>
+          <a:effectLst/>
+        </p:spPr>
+        <p:style>
+          <a:lnRef idx="1">
+            <a:schemeClr val="accent1"/>
+          </a:lnRef>
+          <a:fillRef idx="3">
+            <a:schemeClr val="accent1"/>
+          </a:fillRef>
+          <a:effectRef idx="2">
+            <a:schemeClr val="accent1"/>
+          </a:effectRef>
+          <a:fontRef idx="minor">
+            <a:schemeClr val="lt1"/>
+          </a:fontRef>
+        </p:style>
+        <p:txBody>
+          <a:bodyPr rtlCol="0" anchor="ctr"/>
+          <a:lstStyle/>
+          <a:p>
+            <a:endParaRPr/>
+          </a:p>
+        </p:txBody>
+      </p:sp>
+      <p:sp>
+        <p:nvSpPr>
+          <p:cNvPr id="14" name="TextBox 13"/>
+          <p:cNvSpPr txBox="1"/>
+          <p:nvPr/>
+        </p:nvSpPr>
+        <p:spPr>
+          <a:xfrm>
+            <a:off x="4571999" y="1783080"/>
+            <a:ext cx="914400" cy="822960"/>
+          </a:xfrm>
+          <a:prstGeom prst="rect">
+            <a:avLst/>
+          </a:prstGeom>
+          <a:noFill/>
+        </p:spPr>
+        <p:txBody>
+          <a:bodyPr wrap="square" lIns="0" tIns="0" rIns="0" bIns="0" anchor="t">
+            <a:spAutoFit/>
+          </a:bodyPr>
+          <a:lstStyle/>
+          <a:p>
+            <a:pPr algn="l">
+              <a:lnSpc>
+                <a:spcPct val="110000"/>
+              </a:lnSpc>
+              <a:spcAft>
+                <a:spcPts val="600"/>
+              </a:spcAft>
+            </a:pPr>
+            <a:r>
+              <a:rPr sz="4800" b="1" i="0">
+                <a:solidFill>
+                  <a:srgbClr val="E07A2D"/>
+                </a:solidFill>
+                <a:latin typeface="Calibri"/>
+              </a:rPr>
+              <a:t>2</a:t>
+            </a:r>
+          </a:p>
+        </p:txBody>
+      </p:sp>
+      <p:sp>
+        <p:nvSpPr>
+          <p:cNvPr id="15" name="TextBox 14"/>
+          <p:cNvSpPr txBox="1"/>
+          <p:nvPr/>
+        </p:nvSpPr>
+        <p:spPr>
+          <a:xfrm>
+            <a:off x="4571999" y="2651760"/>
+            <a:ext cx="3017520" cy="457200"/>
+          </a:xfrm>
+          <a:prstGeom prst="rect">
+            <a:avLst/>
+          </a:prstGeom>
+          <a:noFill/>
+        </p:spPr>
+        <p:txBody>
+          <a:bodyPr wrap="square" lIns="0" tIns="0" rIns="0" bIns="0" anchor="t">
+            <a:spAutoFit/>
+          </a:bodyPr>
+          <a:lstStyle/>
+          <a:p>
+            <a:pPr algn="l">
+              <a:lnSpc>
+                <a:spcPct val="110000"/>
+              </a:lnSpc>
+              <a:spcAft>
+                <a:spcPts val="600"/>
+              </a:spcAft>
+            </a:pPr>
+            <a:r>
+              <a:rPr sz="2000" b="1" i="0">
+                <a:solidFill>
+                  <a:srgbClr val="1F3A5F"/>
+                </a:solidFill>
+                <a:latin typeface="Calibri"/>
+              </a:rPr>
+              <a:t>Tre orologi nel nodo</a:t>
+            </a:r>
+          </a:p>
+        </p:txBody>
+      </p:sp>
+      <p:sp>
+        <p:nvSpPr>
+          <p:cNvPr id="16" name="TextBox 15"/>
+          <p:cNvSpPr txBox="1"/>
+          <p:nvPr/>
+        </p:nvSpPr>
+        <p:spPr>
+          <a:xfrm>
+            <a:off x="4571999" y="3154680"/>
+            <a:ext cx="3017520" cy="1463040"/>
+          </a:xfrm>
+          <a:prstGeom prst="rect">
+            <a:avLst/>
+          </a:prstGeom>
+          <a:noFill/>
+        </p:spPr>
+        <p:txBody>
+          <a:bodyPr wrap="square" lIns="0" tIns="0" rIns="0" bIns="0" anchor="t">
+            <a:spAutoFit/>
+          </a:bodyPr>
+          <a:lstStyle/>
+          <a:p>
+            <a:pPr algn="l">
+              <a:lnSpc>
+                <a:spcPct val="110000"/>
+              </a:lnSpc>
+              <a:spcAft>
+                <a:spcPts val="600"/>
+              </a:spcAft>
+            </a:pPr>
+            <a:r>
+              <a:rPr sz="1500" b="0" i="0">
+                <a:solidFill>
+                  <a:srgbClr val="222B36"/>
+                </a:solidFill>
+                <a:latin typeface="Calibri"/>
+              </a:rPr>
+              <a:t>Tre marcature di tempo: all'ingresso del programma (T1), prima di inoltrare (T2), all'arrivo dall'altra parte (T3).</a:t>
+            </a:r>
+          </a:p>
+        </p:txBody>
+      </p:sp>
+      <p:sp>
+        <p:nvSpPr>
+          <p:cNvPr id="17" name="Rounded Rectangle 16"/>
+          <p:cNvSpPr/>
+          <p:nvPr/>
+        </p:nvSpPr>
+        <p:spPr>
+          <a:xfrm>
+            <a:off x="4571999" y="4709160"/>
+            <a:ext cx="2971800" cy="731520"/>
+          </a:xfrm>
+          <a:prstGeom prst="roundRect">
+            <a:avLst>
+              <a:gd name="adj" fmla="val 6000"/>
+            </a:avLst>
+          </a:prstGeom>
+          <a:solidFill>
+            <a:srgbClr val="FFFFFF"/>
+          </a:solidFill>
+          <a:ln w="15875">
+            <a:solidFill>
+              <a:srgbClr val="E07A2D"/>
+            </a:solidFill>
+          </a:ln>
+          <a:effectLst/>
+        </p:spPr>
+        <p:style>
+          <a:lnRef idx="1">
+            <a:schemeClr val="accent1"/>
+          </a:lnRef>
+          <a:fillRef idx="3">
+            <a:schemeClr val="accent1"/>
+          </a:fillRef>
+          <a:effectRef idx="2">
+            <a:schemeClr val="accent1"/>
+          </a:effectRef>
+          <a:fontRef idx="minor">
+            <a:schemeClr val="lt1"/>
+          </a:fontRef>
+        </p:style>
+        <p:txBody>
+          <a:bodyPr rtlCol="0" anchor="ctr"/>
+          <a:lstStyle/>
+          <a:p>
+            <a:endParaRPr/>
+          </a:p>
+        </p:txBody>
+      </p:sp>
+      <p:sp>
+        <p:nvSpPr>
+          <p:cNvPr id="18" name="TextBox 17"/>
+          <p:cNvSpPr txBox="1"/>
+          <p:nvPr/>
+        </p:nvSpPr>
+        <p:spPr>
+          <a:xfrm>
+            <a:off x="4709159" y="4709160"/>
+            <a:ext cx="2743200" cy="731520"/>
+          </a:xfrm>
+          <a:prstGeom prst="rect">
+            <a:avLst/>
+          </a:prstGeom>
+          <a:noFill/>
+        </p:spPr>
+        <p:txBody>
+          <a:bodyPr wrap="square" lIns="0" tIns="0" rIns="0" bIns="0" anchor="ctr">
+            <a:spAutoFit/>
+          </a:bodyPr>
+          <a:lstStyle/>
+          <a:p>
+            <a:pPr algn="l">
+              <a:lnSpc>
+                <a:spcPct val="110000"/>
+              </a:lnSpc>
+              <a:spcAft>
+                <a:spcPts val="0"/>
+              </a:spcAft>
+            </a:pPr>
+            <a:r>
+              <a:rPr sz="1500" b="0" i="0">
+                <a:solidFill>
+                  <a:srgbClr val="E07A2D"/>
+                </a:solidFill>
+                <a:latin typeface="Calibri"/>
+              </a:rPr>
+              <a:t>Quanta parte del tempo è la </a:t>
+            </a:r>
+            <a:r>
+              <a:rPr sz="1500" b="1" i="0">
+                <a:solidFill>
+                  <a:srgbClr val="E07A2D"/>
+                </a:solidFill>
+                <a:latin typeface="Calibri"/>
+              </a:rPr>
+              <a:t>rete neurale</a:t>
+            </a:r>
+            <a:r>
+              <a:rPr sz="1500" b="0" i="0">
+                <a:solidFill>
+                  <a:srgbClr val="E07A2D"/>
+                </a:solidFill>
+                <a:latin typeface="Calibri"/>
+              </a:rPr>
+              <a:t>?</a:t>
+            </a:r>
+          </a:p>
+        </p:txBody>
+      </p:sp>
+      <p:sp>
+        <p:nvSpPr>
+          <p:cNvPr id="19" name="Rounded Rectangle 18"/>
+          <p:cNvSpPr/>
+          <p:nvPr/>
+        </p:nvSpPr>
+        <p:spPr>
+          <a:xfrm>
+            <a:off x="8046718" y="1645920"/>
+            <a:ext cx="3520440" cy="4023360"/>
+          </a:xfrm>
+          <a:prstGeom prst="roundRect">
+            <a:avLst>
+              <a:gd name="adj" fmla="val 6000"/>
+            </a:avLst>
+          </a:prstGeom>
+          <a:solidFill>
+            <a:srgbClr val="F3F5F8"/>
+          </a:solidFill>
+          <a:ln>
+            <a:noFill/>
+          </a:ln>
+          <a:effectLst/>
+        </p:spPr>
+        <p:style>
+          <a:lnRef idx="1">
+            <a:schemeClr val="accent1"/>
+          </a:lnRef>
+          <a:fillRef idx="3">
+            <a:schemeClr val="accent1"/>
+          </a:fillRef>
+          <a:effectRef idx="2">
+            <a:schemeClr val="accent1"/>
+          </a:effectRef>
+          <a:fontRef idx="minor">
+            <a:schemeClr val="lt1"/>
+          </a:fontRef>
+        </p:style>
+        <p:txBody>
+          <a:bodyPr rtlCol="0" anchor="ctr"/>
+          <a:lstStyle/>
+          <a:p>
+            <a:endParaRPr/>
+          </a:p>
+        </p:txBody>
+      </p:sp>
+      <p:sp>
+        <p:nvSpPr>
+          <p:cNvPr id="20" name="TextBox 19"/>
+          <p:cNvSpPr txBox="1"/>
+          <p:nvPr/>
+        </p:nvSpPr>
+        <p:spPr>
+          <a:xfrm>
+            <a:off x="8321038" y="1783080"/>
+            <a:ext cx="914400" cy="822960"/>
+          </a:xfrm>
+          <a:prstGeom prst="rect">
+            <a:avLst/>
+          </a:prstGeom>
+          <a:noFill/>
+        </p:spPr>
+        <p:txBody>
+          <a:bodyPr wrap="square" lIns="0" tIns="0" rIns="0" bIns="0" anchor="t">
+            <a:spAutoFit/>
+          </a:bodyPr>
+          <a:lstStyle/>
+          <a:p>
+            <a:pPr algn="l">
+              <a:lnSpc>
+                <a:spcPct val="110000"/>
+              </a:lnSpc>
+              <a:spcAft>
+                <a:spcPts val="600"/>
+              </a:spcAft>
+            </a:pPr>
+            <a:r>
+              <a:rPr sz="4800" b="1" i="0">
+                <a:solidFill>
+                  <a:srgbClr val="2E9C6E"/>
+                </a:solidFill>
+                <a:latin typeface="Calibri"/>
+              </a:rPr>
+              <a:t>3</a:t>
+            </a:r>
+          </a:p>
+        </p:txBody>
+      </p:sp>
+      <p:sp>
+        <p:nvSpPr>
+          <p:cNvPr id="21" name="TextBox 20"/>
+          <p:cNvSpPr txBox="1"/>
+          <p:nvPr/>
+        </p:nvSpPr>
+        <p:spPr>
+          <a:xfrm>
+            <a:off x="8321038" y="2651760"/>
+            <a:ext cx="3017520" cy="457200"/>
+          </a:xfrm>
+          <a:prstGeom prst="rect">
+            <a:avLst/>
+          </a:prstGeom>
+          <a:noFill/>
+        </p:spPr>
+        <p:txBody>
+          <a:bodyPr wrap="square" lIns="0" tIns="0" rIns="0" bIns="0" anchor="t">
+            <a:spAutoFit/>
+          </a:bodyPr>
+          <a:lstStyle/>
+          <a:p>
+            <a:pPr algn="l">
+              <a:lnSpc>
+                <a:spcPct val="110000"/>
+              </a:lnSpc>
+              <a:spcAft>
+                <a:spcPts val="600"/>
+              </a:spcAft>
+            </a:pPr>
+            <a:r>
+              <a:rPr sz="2000" b="1" i="0">
+                <a:solidFill>
+                  <a:srgbClr val="1F3A5F"/>
+                </a:solidFill>
+                <a:latin typeface="Calibri"/>
+              </a:rPr>
+              <a:t>Il nodo sotto traffico</a:t>
+            </a:r>
+          </a:p>
+        </p:txBody>
+      </p:sp>
+      <p:sp>
+        <p:nvSpPr>
+          <p:cNvPr id="22" name="TextBox 21"/>
+          <p:cNvSpPr txBox="1"/>
+          <p:nvPr/>
+        </p:nvSpPr>
+        <p:spPr>
+          <a:xfrm>
+            <a:off x="8321038" y="3154680"/>
+            <a:ext cx="3017520" cy="1463040"/>
+          </a:xfrm>
+          <a:prstGeom prst="rect">
+            <a:avLst/>
+          </a:prstGeom>
+          <a:noFill/>
+        </p:spPr>
+        <p:txBody>
+          <a:bodyPr wrap="square" lIns="0" tIns="0" rIns="0" bIns="0" anchor="t">
+            <a:spAutoFit/>
+          </a:bodyPr>
+          <a:lstStyle/>
+          <a:p>
+            <a:pPr algn="l">
+              <a:lnSpc>
+                <a:spcPct val="110000"/>
+              </a:lnSpc>
+              <a:spcAft>
+                <a:spcPts val="600"/>
+              </a:spcAft>
+            </a:pPr>
+            <a:r>
+              <a:rPr sz="1500" b="0" i="0">
+                <a:solidFill>
+                  <a:srgbClr val="222B36"/>
+                </a:solidFill>
+                <a:latin typeface="Calibri"/>
+              </a:rPr>
+              <a:t>Un generatore spinge più pacchetti di quanti il nodo ne regga, per minuti, e si contano quelli elaborati.</a:t>
+            </a:r>
+          </a:p>
+        </p:txBody>
+      </p:sp>
+      <p:sp>
+        <p:nvSpPr>
+          <p:cNvPr id="23" name="Rounded Rectangle 22"/>
+          <p:cNvSpPr/>
+          <p:nvPr/>
+        </p:nvSpPr>
+        <p:spPr>
+          <a:xfrm>
+            <a:off x="8321038" y="4709160"/>
+            <a:ext cx="2971800" cy="731520"/>
+          </a:xfrm>
+          <a:prstGeom prst="roundRect">
+            <a:avLst>
+              <a:gd name="adj" fmla="val 6000"/>
+            </a:avLst>
+          </a:prstGeom>
+          <a:solidFill>
+            <a:srgbClr val="FFFFFF"/>
+          </a:solidFill>
+          <a:ln w="15875">
+            <a:solidFill>
+              <a:srgbClr val="2E9C6E"/>
+            </a:solidFill>
+          </a:ln>
+          <a:effectLst/>
+        </p:spPr>
+        <p:style>
+          <a:lnRef idx="1">
+            <a:schemeClr val="accent1"/>
+          </a:lnRef>
+          <a:fillRef idx="3">
+            <a:schemeClr val="accent1"/>
+          </a:fillRef>
+          <a:effectRef idx="2">
+            <a:schemeClr val="accent1"/>
+          </a:effectRef>
+          <a:fontRef idx="minor">
+            <a:schemeClr val="lt1"/>
+          </a:fontRef>
+        </p:style>
+        <p:txBody>
+          <a:bodyPr rtlCol="0" anchor="ctr"/>
+          <a:lstStyle/>
+          <a:p>
+            <a:endParaRPr/>
+          </a:p>
+        </p:txBody>
+      </p:sp>
+      <p:sp>
+        <p:nvSpPr>
+          <p:cNvPr id="24" name="TextBox 23"/>
+          <p:cNvSpPr txBox="1"/>
+          <p:nvPr/>
+        </p:nvSpPr>
+        <p:spPr>
+          <a:xfrm>
+            <a:off x="8458198" y="4709160"/>
+            <a:ext cx="2743200" cy="731520"/>
+          </a:xfrm>
+          <a:prstGeom prst="rect">
+            <a:avLst/>
+          </a:prstGeom>
+          <a:noFill/>
+        </p:spPr>
+        <p:txBody>
+          <a:bodyPr wrap="square" lIns="0" tIns="0" rIns="0" bIns="0" anchor="ctr">
+            <a:spAutoFit/>
+          </a:bodyPr>
+          <a:lstStyle/>
+          <a:p>
+            <a:pPr algn="l">
+              <a:lnSpc>
+                <a:spcPct val="110000"/>
+              </a:lnSpc>
+              <a:spcAft>
+                <a:spcPts val="0"/>
+              </a:spcAft>
+            </a:pPr>
+            <a:r>
+              <a:rPr sz="1500" b="0" i="0">
+                <a:solidFill>
+                  <a:srgbClr val="2E9C6E"/>
+                </a:solidFill>
+                <a:latin typeface="Calibri"/>
+              </a:rPr>
+              <a:t>Quanti pacchetti regge </a:t>
+            </a:r>
+            <a:r>
+              <a:rPr sz="1500" b="1" i="0">
+                <a:solidFill>
+                  <a:srgbClr val="2E9C6E"/>
+                </a:solidFill>
+                <a:latin typeface="Calibri"/>
+              </a:rPr>
+              <a:t>davvero</a:t>
+            </a:r>
+            <a:r>
+              <a:rPr sz="1500" b="0" i="0">
+                <a:solidFill>
+                  <a:srgbClr val="2E9C6E"/>
+                </a:solidFill>
+                <a:latin typeface="Calibri"/>
+              </a:rPr>
+              <a:t> il nodo?</a:t>
+            </a:r>
+          </a:p>
+        </p:txBody>
+      </p:sp>
+    </p:spTree>
+  </p:cSld>
+  <p:clrMapOvr>
+    <a:masterClrMapping/>
+  </p:clrMapOvr>
+</p:sld>
+</file>
+
+<file path=ppt/slides/slide7.xml><?xml version="1.0" encoding="utf-8"?>
+<p:sld xmlns:a="http://schemas.openxmlformats.org/drawingml/2006/main" xmlns:r="http://schemas.openxmlformats.org/officeDocument/2006/relationships" xmlns:p="http://schemas.openxmlformats.org/presentationml/2006/main">
+  <p:cSld>
+    <p:bg>
+      <p:bgPr>
+        <a:solidFill>
+          <a:srgbClr val="FFFFFF"/>
+        </a:solidFill>
+        <a:effectLst/>
+      </p:bgPr>
+    </p:bg>
+    <p:spTree>
+      <p:nvGrpSpPr>
+        <p:cNvPr id="1" name=""/>
+        <p:cNvGrpSpPr/>
+        <p:nvPr/>
+      </p:nvGrpSpPr>
+      <p:grpSpPr>
+        <a:xfrm>
+          <a:off x="0" y="0"/>
+          <a:ext cx="0" cy="0"/>
+          <a:chOff x="0" y="0"/>
+          <a:chExt cx="0" cy="0"/>
+        </a:xfrm>
+      </p:grpSpPr>
+      <p:sp>
+        <p:nvSpPr>
+          <p:cNvPr id="2" name="Rectangle 1"/>
+          <p:cNvSpPr/>
+          <p:nvPr/>
+        </p:nvSpPr>
+        <p:spPr>
+          <a:xfrm>
+            <a:off x="0" y="0"/>
+            <a:ext cx="12191695" cy="109728"/>
+          </a:xfrm>
+          <a:prstGeom prst="rect">
+            <a:avLst/>
+          </a:prstGeom>
+          <a:solidFill>
+            <a:srgbClr val="1F3A5F"/>
+          </a:solidFill>
+          <a:ln>
+            <a:noFill/>
+          </a:ln>
+          <a:effectLst/>
+        </p:spPr>
+        <p:style>
+          <a:lnRef idx="1">
+            <a:schemeClr val="accent1"/>
+          </a:lnRef>
+          <a:fillRef idx="3">
+            <a:schemeClr val="accent1"/>
+          </a:fillRef>
+          <a:effectRef idx="2">
+            <a:schemeClr val="accent1"/>
+          </a:effectRef>
+          <a:fontRef idx="minor">
+            <a:schemeClr val="lt1"/>
+          </a:fontRef>
+        </p:style>
+        <p:txBody>
+          <a:bodyPr rtlCol="0" anchor="ctr"/>
+          <a:lstStyle/>
+          <a:p>
+            <a:endParaRPr/>
+          </a:p>
+        </p:txBody>
+      </p:sp>
+      <p:sp>
+        <p:nvSpPr>
+          <p:cNvPr id="3" name="TextBox 2"/>
+          <p:cNvSpPr txBox="1"/>
+          <p:nvPr/>
+        </p:nvSpPr>
+        <p:spPr>
+          <a:xfrm>
+            <a:off x="548640" y="384048"/>
+            <a:ext cx="10972800" cy="274320"/>
+          </a:xfrm>
+          <a:prstGeom prst="rect">
+            <a:avLst/>
+          </a:prstGeom>
+          <a:noFill/>
+        </p:spPr>
+        <p:txBody>
+          <a:bodyPr wrap="square" lIns="0" tIns="0" rIns="0" bIns="0" anchor="t">
+            <a:spAutoFit/>
+          </a:bodyPr>
+          <a:lstStyle/>
+          <a:p>
+            <a:pPr algn="l">
+              <a:lnSpc>
+                <a:spcPct val="110000"/>
+              </a:lnSpc>
+              <a:spcAft>
+                <a:spcPts val="600"/>
+              </a:spcAft>
+            </a:pPr>
+            <a:r>
+              <a:rPr sz="1200" b="1" i="0">
+                <a:solidFill>
+                  <a:srgbClr val="E07A2D"/>
+                </a:solidFill>
+                <a:latin typeface="Calibri"/>
+              </a:rPr>
+              <a:t>PRIMO RISULTATO · IL PROGRAMMA DA SOLO</a:t>
+            </a:r>
+          </a:p>
+        </p:txBody>
+      </p:sp>
+      <p:sp>
+        <p:nvSpPr>
+          <p:cNvPr id="4" name="TextBox 3"/>
+          <p:cNvSpPr txBox="1"/>
+          <p:nvPr/>
+        </p:nvSpPr>
+        <p:spPr>
+          <a:xfrm>
+            <a:off x="548640" y="658368"/>
+            <a:ext cx="11064240" cy="822960"/>
+          </a:xfrm>
+          <a:prstGeom prst="rect">
+            <a:avLst/>
+          </a:prstGeom>
+          <a:noFill/>
+        </p:spPr>
+        <p:txBody>
+          <a:bodyPr wrap="square" lIns="0" tIns="0" rIns="0" bIns="0" anchor="t">
+            <a:spAutoFit/>
+          </a:bodyPr>
+          <a:lstStyle/>
+          <a:p>
+            <a:pPr algn="l">
+              <a:lnSpc>
+                <a:spcPct val="100000"/>
+              </a:lnSpc>
+              <a:spcAft>
+                <a:spcPts val="600"/>
+              </a:spcAft>
+            </a:pPr>
+            <a:r>
+              <a:rPr sz="3000" b="1" i="0">
+                <a:solidFill>
+                  <a:srgbClr val="1F3A5F"/>
+                </a:solidFill>
+                <a:latin typeface="Calibri"/>
+              </a:rPr>
+              <a:t>La configurabilità si paga per pacchetto: 36 → 258 ns</a:t>
+            </a:r>
+          </a:p>
+        </p:txBody>
+      </p:sp>
+      <p:sp>
+        <p:nvSpPr>
+          <p:cNvPr id="5" name="TextBox 4"/>
+          <p:cNvSpPr txBox="1"/>
+          <p:nvPr/>
+        </p:nvSpPr>
+        <p:spPr>
+          <a:xfrm>
+            <a:off x="11292840" y="6446520"/>
+            <a:ext cx="457200" cy="176908"/>
+          </a:xfrm>
+          <a:prstGeom prst="rect">
+            <a:avLst/>
+          </a:prstGeom>
+          <a:noFill/>
+        </p:spPr>
+        <p:txBody>
+          <a:bodyPr wrap="square" lIns="0" tIns="0" rIns="0" bIns="0" anchor="t">
+            <a:spAutoFit/>
+          </a:bodyPr>
+          <a:lstStyle/>
+          <a:p>
+            <a:pPr algn="r">
+              <a:lnSpc>
+                <a:spcPct val="110000"/>
+              </a:lnSpc>
+              <a:spcAft>
+                <a:spcPts val="600"/>
+              </a:spcAft>
+            </a:pPr>
+            <a:r>
+              <a:rPr lang="it-IT" sz="1100" b="0" i="0">
+                <a:solidFill>
+                  <a:srgbClr val="6B7C93"/>
+                </a:solidFill>
+                <a:latin typeface="Calibri"/>
+              </a:rPr>
+              <a:t>7</a:t>
+            </a:r>
+            <a:endParaRPr sz="1100" b="0" i="0">
+              <a:solidFill>
+                <a:srgbClr val="6B7C93"/>
+              </a:solidFill>
+              <a:latin typeface="Calibri"/>
+            </a:endParaRPr>
           </a:p>
         </p:txBody>
       </p:sp>
@@ -31724,7 +33201,7 @@
                     <a:p>
                       <a:pPr algn="r"/>
                       <a:r>
-                        <a:rPr sz="1500" b="0" i="0">
+                        <a:rPr sz="1500" b="0" i="0" dirty="0">
                           <a:solidFill>
                             <a:srgbClr val="222B36"/>
                           </a:solidFill>
@@ -31992,917 +33469,6 @@
                 <a:latin typeface="Calibri"/>
               </a:rPr>
               <a:t>. Fra P1 e P1.5 quasi niente.</a:t>
-            </a:r>
-          </a:p>
-        </p:txBody>
-      </p:sp>
-    </p:spTree>
-  </p:cSld>
-  <p:clrMapOvr>
-    <a:masterClrMapping/>
-  </p:clrMapOvr>
-</p:sld>
-</file>
-
-<file path=ppt/slides/slide7.xml><?xml version="1.0" encoding="utf-8"?>
-<p:sld xmlns:a="http://schemas.openxmlformats.org/drawingml/2006/main" xmlns:r="http://schemas.openxmlformats.org/officeDocument/2006/relationships" xmlns:p="http://schemas.openxmlformats.org/presentationml/2006/main">
-  <p:cSld>
-    <p:bg>
-      <p:bgPr>
-        <a:solidFill>
-          <a:srgbClr val="FFFFFF"/>
-        </a:solidFill>
-        <a:effectLst/>
-      </p:bgPr>
-    </p:bg>
-    <p:spTree>
-      <p:nvGrpSpPr>
-        <p:cNvPr id="1" name=""/>
-        <p:cNvGrpSpPr/>
-        <p:nvPr/>
-      </p:nvGrpSpPr>
-      <p:grpSpPr>
-        <a:xfrm>
-          <a:off x="0" y="0"/>
-          <a:ext cx="0" cy="0"/>
-          <a:chOff x="0" y="0"/>
-          <a:chExt cx="0" cy="0"/>
-        </a:xfrm>
-      </p:grpSpPr>
-      <p:sp>
-        <p:nvSpPr>
-          <p:cNvPr id="2" name="Rectangle 1"/>
-          <p:cNvSpPr/>
-          <p:nvPr/>
-        </p:nvSpPr>
-        <p:spPr>
-          <a:xfrm>
-            <a:off x="0" y="0"/>
-            <a:ext cx="12191695" cy="109728"/>
-          </a:xfrm>
-          <a:prstGeom prst="rect">
-            <a:avLst/>
-          </a:prstGeom>
-          <a:solidFill>
-            <a:srgbClr val="1F3A5F"/>
-          </a:solidFill>
-          <a:ln>
-            <a:noFill/>
-          </a:ln>
-          <a:effectLst/>
-        </p:spPr>
-        <p:style>
-          <a:lnRef idx="1">
-            <a:schemeClr val="accent1"/>
-          </a:lnRef>
-          <a:fillRef idx="3">
-            <a:schemeClr val="accent1"/>
-          </a:fillRef>
-          <a:effectRef idx="2">
-            <a:schemeClr val="accent1"/>
-          </a:effectRef>
-          <a:fontRef idx="minor">
-            <a:schemeClr val="lt1"/>
-          </a:fontRef>
-        </p:style>
-        <p:txBody>
-          <a:bodyPr rtlCol="0" anchor="ctr"/>
-          <a:lstStyle/>
-          <a:p>
-            <a:endParaRPr/>
-          </a:p>
-        </p:txBody>
-      </p:sp>
-      <p:sp>
-        <p:nvSpPr>
-          <p:cNvPr id="3" name="TextBox 2"/>
-          <p:cNvSpPr txBox="1"/>
-          <p:nvPr/>
-        </p:nvSpPr>
-        <p:spPr>
-          <a:xfrm>
-            <a:off x="548640" y="384048"/>
-            <a:ext cx="10972800" cy="274320"/>
-          </a:xfrm>
-          <a:prstGeom prst="rect">
-            <a:avLst/>
-          </a:prstGeom>
-          <a:noFill/>
-        </p:spPr>
-        <p:txBody>
-          <a:bodyPr wrap="square" lIns="0" tIns="0" rIns="0" bIns="0" anchor="t">
-            <a:spAutoFit/>
-          </a:bodyPr>
-          <a:lstStyle/>
-          <a:p>
-            <a:pPr algn="l">
-              <a:lnSpc>
-                <a:spcPct val="110000"/>
-              </a:lnSpc>
-              <a:spcAft>
-                <a:spcPts val="600"/>
-              </a:spcAft>
-            </a:pPr>
-            <a:r>
-              <a:rPr sz="1200" b="1" i="0">
-                <a:solidFill>
-                  <a:srgbClr val="E07A2D"/>
-                </a:solidFill>
-                <a:latin typeface="Calibri"/>
-              </a:rPr>
-              <a:t>IL COMPROMESSO</a:t>
-            </a:r>
-          </a:p>
-        </p:txBody>
-      </p:sp>
-      <p:sp>
-        <p:nvSpPr>
-          <p:cNvPr id="4" name="TextBox 3"/>
-          <p:cNvSpPr txBox="1"/>
-          <p:nvPr/>
-        </p:nvSpPr>
-        <p:spPr>
-          <a:xfrm>
-            <a:off x="548640" y="658368"/>
-            <a:ext cx="11064240" cy="822960"/>
-          </a:xfrm>
-          <a:prstGeom prst="rect">
-            <a:avLst/>
-          </a:prstGeom>
-          <a:noFill/>
-        </p:spPr>
-        <p:txBody>
-          <a:bodyPr wrap="square" lIns="0" tIns="0" rIns="0" bIns="0" anchor="t">
-            <a:spAutoFit/>
-          </a:bodyPr>
-          <a:lstStyle/>
-          <a:p>
-            <a:pPr algn="l">
-              <a:lnSpc>
-                <a:spcPct val="100000"/>
-              </a:lnSpc>
-              <a:spcAft>
-                <a:spcPts val="600"/>
-              </a:spcAft>
-            </a:pPr>
-            <a:r>
-              <a:rPr sz="3000" b="1" i="0">
-                <a:solidFill>
-                  <a:srgbClr val="1F3A5F"/>
-                </a:solidFill>
-                <a:latin typeface="Calibri"/>
-              </a:rPr>
-              <a:t>Cambiare modello non separa più le pipeline</a:t>
-            </a:r>
-          </a:p>
-        </p:txBody>
-      </p:sp>
-      <p:sp>
-        <p:nvSpPr>
-          <p:cNvPr id="5" name="TextBox 4"/>
-          <p:cNvSpPr txBox="1"/>
-          <p:nvPr/>
-        </p:nvSpPr>
-        <p:spPr>
-          <a:xfrm>
-            <a:off x="11292840" y="6446520"/>
-            <a:ext cx="457200" cy="274320"/>
-          </a:xfrm>
-          <a:prstGeom prst="rect">
-            <a:avLst/>
-          </a:prstGeom>
-          <a:noFill/>
-        </p:spPr>
-        <p:txBody>
-          <a:bodyPr wrap="square" lIns="0" tIns="0" rIns="0" bIns="0" anchor="t">
-            <a:spAutoFit/>
-          </a:bodyPr>
-          <a:lstStyle/>
-          <a:p>
-            <a:pPr algn="r">
-              <a:lnSpc>
-                <a:spcPct val="110000"/>
-              </a:lnSpc>
-              <a:spcAft>
-                <a:spcPts val="600"/>
-              </a:spcAft>
-            </a:pPr>
-            <a:r>
-              <a:rPr sz="1100" b="0" i="0">
-                <a:solidFill>
-                  <a:srgbClr val="6B7C93"/>
-                </a:solidFill>
-                <a:latin typeface="Calibri"/>
-              </a:rPr>
-              <a:t>7</a:t>
-            </a:r>
-          </a:p>
-        </p:txBody>
-      </p:sp>
-      <p:sp>
-        <p:nvSpPr>
-          <p:cNvPr id="6" name="TextBox 5"/>
-          <p:cNvSpPr txBox="1"/>
-          <p:nvPr/>
-        </p:nvSpPr>
-        <p:spPr>
-          <a:xfrm>
-            <a:off x="548640" y="6446520"/>
-            <a:ext cx="10424160" cy="274320"/>
-          </a:xfrm>
-          <a:prstGeom prst="rect">
-            <a:avLst/>
-          </a:prstGeom>
-          <a:noFill/>
-        </p:spPr>
-        <p:txBody>
-          <a:bodyPr wrap="square" lIns="0" tIns="0" rIns="0" bIns="0" anchor="t">
-            <a:spAutoFit/>
-          </a:bodyPr>
-          <a:lstStyle/>
-          <a:p>
-            <a:pPr algn="l">
-              <a:lnSpc>
-                <a:spcPct val="110000"/>
-              </a:lnSpc>
-              <a:spcAft>
-                <a:spcPts val="600"/>
-              </a:spcAft>
-            </a:pPr>
-            <a:r>
-              <a:rPr sz="1100" b="0" i="1">
-                <a:solidFill>
-                  <a:srgbClr val="6B7C93"/>
-                </a:solidFill>
-                <a:latin typeface="Calibri"/>
-              </a:rPr>
-              <a:t>Tempo per installare un modello nuovo su un nodo già in servizio (scala logaritmica)  ·  rimisura del 23/09</a:t>
-            </a:r>
-          </a:p>
-        </p:txBody>
-      </p:sp>
-      <p:graphicFrame>
-        <p:nvGraphicFramePr>
-          <p:cNvPr id="7" name="Chart 6"/>
-          <p:cNvGraphicFramePr>
-            <a:graphicFrameLocks noGrp="1"/>
-          </p:cNvGraphicFramePr>
-          <p:nvPr/>
-        </p:nvGraphicFramePr>
-        <p:xfrm>
-          <a:off x="457200" y="1600200"/>
-          <a:ext cx="5669280" cy="3840480"/>
-        </p:xfrm>
-        <a:graphic>
-          <a:graphicData uri="http://schemas.openxmlformats.org/drawingml/2006/chart">
-            <c:chart xmlns:c="http://schemas.openxmlformats.org/drawingml/2006/chart" xmlns:r="http://schemas.openxmlformats.org/officeDocument/2006/relationships" r:id="rId2"/>
-          </a:graphicData>
-        </a:graphic>
-      </p:graphicFrame>
-      <p:sp>
-        <p:nvSpPr>
-          <p:cNvPr id="8" name="Rounded Rectangle 7"/>
-          <p:cNvSpPr/>
-          <p:nvPr/>
-        </p:nvSpPr>
-        <p:spPr>
-          <a:xfrm>
-            <a:off x="6400800" y="1645920"/>
-            <a:ext cx="5303520" cy="1737360"/>
-          </a:xfrm>
-          <a:prstGeom prst="roundRect">
-            <a:avLst>
-              <a:gd name="adj" fmla="val 6000"/>
-            </a:avLst>
-          </a:prstGeom>
-          <a:solidFill>
-            <a:srgbClr val="F3F5F8"/>
-          </a:solidFill>
-          <a:ln>
-            <a:noFill/>
-          </a:ln>
-          <a:effectLst/>
-        </p:spPr>
-        <p:style>
-          <a:lnRef idx="1">
-            <a:schemeClr val="accent1"/>
-          </a:lnRef>
-          <a:fillRef idx="3">
-            <a:schemeClr val="accent1"/>
-          </a:fillRef>
-          <a:effectRef idx="2">
-            <a:schemeClr val="accent1"/>
-          </a:effectRef>
-          <a:fontRef idx="minor">
-            <a:schemeClr val="lt1"/>
-          </a:fontRef>
-        </p:style>
-        <p:txBody>
-          <a:bodyPr rtlCol="0" anchor="ctr"/>
-          <a:lstStyle/>
-          <a:p>
-            <a:endParaRPr/>
-          </a:p>
-        </p:txBody>
-      </p:sp>
-      <p:sp>
-        <p:nvSpPr>
-          <p:cNvPr id="9" name="Rectangle 8"/>
-          <p:cNvSpPr/>
-          <p:nvPr/>
-        </p:nvSpPr>
-        <p:spPr>
-          <a:xfrm>
-            <a:off x="6400800" y="1645920"/>
-            <a:ext cx="82296" cy="1737360"/>
-          </a:xfrm>
-          <a:prstGeom prst="rect">
-            <a:avLst/>
-          </a:prstGeom>
-          <a:solidFill>
-            <a:srgbClr val="E07A2D"/>
-          </a:solidFill>
-          <a:ln>
-            <a:noFill/>
-          </a:ln>
-          <a:effectLst/>
-        </p:spPr>
-        <p:style>
-          <a:lnRef idx="1">
-            <a:schemeClr val="accent1"/>
-          </a:lnRef>
-          <a:fillRef idx="3">
-            <a:schemeClr val="accent1"/>
-          </a:fillRef>
-          <a:effectRef idx="2">
-            <a:schemeClr val="accent1"/>
-          </a:effectRef>
-          <a:fontRef idx="minor">
-            <a:schemeClr val="lt1"/>
-          </a:fontRef>
-        </p:style>
-        <p:txBody>
-          <a:bodyPr rtlCol="0" anchor="ctr"/>
-          <a:lstStyle/>
-          <a:p>
-            <a:endParaRPr/>
-          </a:p>
-        </p:txBody>
-      </p:sp>
-      <p:sp>
-        <p:nvSpPr>
-          <p:cNvPr id="10" name="TextBox 9"/>
-          <p:cNvSpPr txBox="1"/>
-          <p:nvPr/>
-        </p:nvSpPr>
-        <p:spPr>
-          <a:xfrm>
-            <a:off x="6675120" y="1810512"/>
-            <a:ext cx="4892040" cy="457200"/>
-          </a:xfrm>
-          <a:prstGeom prst="rect">
-            <a:avLst/>
-          </a:prstGeom>
-          <a:noFill/>
-        </p:spPr>
-        <p:txBody>
-          <a:bodyPr wrap="square" lIns="0" tIns="0" rIns="0" bIns="0" anchor="t">
-            <a:spAutoFit/>
-          </a:bodyPr>
-          <a:lstStyle/>
-          <a:p>
-            <a:pPr algn="l">
-              <a:lnSpc>
-                <a:spcPct val="110000"/>
-              </a:lnSpc>
-              <a:spcAft>
-                <a:spcPts val="600"/>
-              </a:spcAft>
-            </a:pPr>
-            <a:r>
-              <a:rPr sz="1700" b="1" i="0">
-                <a:solidFill>
-                  <a:srgbClr val="E07A2D"/>
-                </a:solidFill>
-                <a:latin typeface="Calibri"/>
-              </a:rPr>
-              <a:t>Con l'oggetto precompilato (AOT)</a:t>
-            </a:r>
-          </a:p>
-        </p:txBody>
-      </p:sp>
-      <p:sp>
-        <p:nvSpPr>
-          <p:cNvPr id="11" name="TextBox 10"/>
-          <p:cNvSpPr txBox="1"/>
-          <p:nvPr/>
-        </p:nvSpPr>
-        <p:spPr>
-          <a:xfrm>
-            <a:off x="6675120" y="2221992"/>
-            <a:ext cx="4892040" cy="1115568"/>
-          </a:xfrm>
-          <a:prstGeom prst="rect">
-            <a:avLst/>
-          </a:prstGeom>
-          <a:noFill/>
-        </p:spPr>
-        <p:txBody>
-          <a:bodyPr wrap="square" lIns="0" tIns="0" rIns="0" bIns="0" anchor="t">
-            <a:spAutoFit/>
-          </a:bodyPr>
-          <a:lstStyle/>
-          <a:p>
-            <a:pPr algn="l">
-              <a:lnSpc>
-                <a:spcPct val="110000"/>
-              </a:lnSpc>
-              <a:spcAft>
-                <a:spcPts val="600"/>
-              </a:spcAft>
-            </a:pPr>
-            <a:r>
-              <a:rPr sz="1400" b="0" i="0">
-                <a:solidFill>
-                  <a:srgbClr val="222B36"/>
-                </a:solidFill>
-                <a:latin typeface="Calibri"/>
-              </a:rPr>
-              <a:t>Sul nodo si carica un file pronto: </a:t>
-            </a:r>
-            <a:r>
-              <a:rPr sz="1400" b="1" i="0">
-                <a:solidFill>
-                  <a:srgbClr val="222B36"/>
-                </a:solidFill>
-                <a:latin typeface="Calibri"/>
-              </a:rPr>
-              <a:t>5–8 ms</a:t>
-            </a:r>
-            <a:r>
-              <a:rPr sz="1400" b="0" i="0">
-                <a:solidFill>
-                  <a:srgbClr val="222B36"/>
-                </a:solidFill>
-                <a:latin typeface="Calibri"/>
-              </a:rPr>
-              <a:t>, come P2 e P3. Anche compilando, </a:t>
-            </a:r>
-            <a:r>
-              <a:rPr sz="1400" b="1" i="0">
-                <a:solidFill>
-                  <a:srgbClr val="222B36"/>
-                </a:solidFill>
-                <a:latin typeface="Calibri"/>
-              </a:rPr>
-              <a:t>meno di 0,15 s</a:t>
-            </a:r>
-            <a:r>
-              <a:rPr sz="1400" b="0" i="0">
-                <a:solidFill>
-                  <a:srgbClr val="222B36"/>
-                </a:solidFill>
-                <a:latin typeface="Calibri"/>
-              </a:rPr>
-              <a:t>. Compilando sul nodo con </a:t>
-            </a:r>
-            <a:r>
-              <a:rPr sz="1400" b="1" i="0">
-                <a:solidFill>
-                  <a:srgbClr val="222B36"/>
-                </a:solidFill>
-                <a:latin typeface="Calibri"/>
-              </a:rPr>
-              <a:t>BCC</a:t>
-            </a:r>
-            <a:r>
-              <a:rPr sz="1400" b="0" i="0">
-                <a:solidFill>
-                  <a:srgbClr val="222B36"/>
-                </a:solidFill>
-                <a:latin typeface="Calibri"/>
-              </a:rPr>
-              <a:t> servirebbero ~0,7 s, perché BCC rilegge gli header del kernel a ogni compilazione.</a:t>
-            </a:r>
-          </a:p>
-        </p:txBody>
-      </p:sp>
-      <p:sp>
-        <p:nvSpPr>
-          <p:cNvPr id="12" name="Rounded Rectangle 11"/>
-          <p:cNvSpPr/>
-          <p:nvPr/>
-        </p:nvSpPr>
-        <p:spPr>
-          <a:xfrm>
-            <a:off x="6400800" y="3566160"/>
-            <a:ext cx="5303520" cy="1737360"/>
-          </a:xfrm>
-          <a:prstGeom prst="roundRect">
-            <a:avLst>
-              <a:gd name="adj" fmla="val 6000"/>
-            </a:avLst>
-          </a:prstGeom>
-          <a:solidFill>
-            <a:srgbClr val="F3F5F8"/>
-          </a:solidFill>
-          <a:ln>
-            <a:noFill/>
-          </a:ln>
-          <a:effectLst/>
-        </p:spPr>
-        <p:style>
-          <a:lnRef idx="1">
-            <a:schemeClr val="accent1"/>
-          </a:lnRef>
-          <a:fillRef idx="3">
-            <a:schemeClr val="accent1"/>
-          </a:fillRef>
-          <a:effectRef idx="2">
-            <a:schemeClr val="accent1"/>
-          </a:effectRef>
-          <a:fontRef idx="minor">
-            <a:schemeClr val="lt1"/>
-          </a:fontRef>
-        </p:style>
-        <p:txBody>
-          <a:bodyPr rtlCol="0" anchor="ctr"/>
-          <a:lstStyle/>
-          <a:p>
-            <a:endParaRPr/>
-          </a:p>
-        </p:txBody>
-      </p:sp>
-      <p:sp>
-        <p:nvSpPr>
-          <p:cNvPr id="13" name="Rectangle 12"/>
-          <p:cNvSpPr/>
-          <p:nvPr/>
-        </p:nvSpPr>
-        <p:spPr>
-          <a:xfrm>
-            <a:off x="6400800" y="3566160"/>
-            <a:ext cx="82296" cy="1737360"/>
-          </a:xfrm>
-          <a:prstGeom prst="rect">
-            <a:avLst/>
-          </a:prstGeom>
-          <a:solidFill>
-            <a:srgbClr val="2E9C6E"/>
-          </a:solidFill>
-          <a:ln>
-            <a:noFill/>
-          </a:ln>
-          <a:effectLst/>
-        </p:spPr>
-        <p:style>
-          <a:lnRef idx="1">
-            <a:schemeClr val="accent1"/>
-          </a:lnRef>
-          <a:fillRef idx="3">
-            <a:schemeClr val="accent1"/>
-          </a:fillRef>
-          <a:effectRef idx="2">
-            <a:schemeClr val="accent1"/>
-          </a:effectRef>
-          <a:fontRef idx="minor">
-            <a:schemeClr val="lt1"/>
-          </a:fontRef>
-        </p:style>
-        <p:txBody>
-          <a:bodyPr rtlCol="0" anchor="ctr"/>
-          <a:lstStyle/>
-          <a:p>
-            <a:endParaRPr/>
-          </a:p>
-        </p:txBody>
-      </p:sp>
-      <p:sp>
-        <p:nvSpPr>
-          <p:cNvPr id="14" name="TextBox 13"/>
-          <p:cNvSpPr txBox="1"/>
-          <p:nvPr/>
-        </p:nvSpPr>
-        <p:spPr>
-          <a:xfrm>
-            <a:off x="6675120" y="3730752"/>
-            <a:ext cx="4892040" cy="457200"/>
-          </a:xfrm>
-          <a:prstGeom prst="rect">
-            <a:avLst/>
-          </a:prstGeom>
-          <a:noFill/>
-        </p:spPr>
-        <p:txBody>
-          <a:bodyPr wrap="square" lIns="0" tIns="0" rIns="0" bIns="0" anchor="t">
-            <a:spAutoFit/>
-          </a:bodyPr>
-          <a:lstStyle/>
-          <a:p>
-            <a:pPr algn="l">
-              <a:lnSpc>
-                <a:spcPct val="110000"/>
-              </a:lnSpc>
-              <a:spcAft>
-                <a:spcPts val="600"/>
-              </a:spcAft>
-            </a:pPr>
-            <a:r>
-              <a:rPr sz="1700" b="1" i="0">
-                <a:solidFill>
-                  <a:srgbClr val="2E9C6E"/>
-                </a:solidFill>
-                <a:latin typeface="Calibri"/>
-              </a:rPr>
-              <a:t>Il vantaggio che resta a P2 e P3</a:t>
-            </a:r>
-          </a:p>
-        </p:txBody>
-      </p:sp>
-      <p:sp>
-        <p:nvSpPr>
-          <p:cNvPr id="15" name="TextBox 14"/>
-          <p:cNvSpPr txBox="1"/>
-          <p:nvPr/>
-        </p:nvSpPr>
-        <p:spPr>
-          <a:xfrm>
-            <a:off x="6675120" y="4142232"/>
-            <a:ext cx="4892040" cy="1115568"/>
-          </a:xfrm>
-          <a:prstGeom prst="rect">
-            <a:avLst/>
-          </a:prstGeom>
-          <a:noFill/>
-        </p:spPr>
-        <p:txBody>
-          <a:bodyPr wrap="square" lIns="0" tIns="0" rIns="0" bIns="0" anchor="t">
-            <a:spAutoFit/>
-          </a:bodyPr>
-          <a:lstStyle/>
-          <a:p>
-            <a:pPr algn="l">
-              <a:lnSpc>
-                <a:spcPct val="110000"/>
-              </a:lnSpc>
-              <a:spcAft>
-                <a:spcPts val="600"/>
-              </a:spcAft>
-            </a:pPr>
-            <a:r>
-              <a:rPr sz="1400" b="0" i="0">
-                <a:solidFill>
-                  <a:srgbClr val="222B36"/>
-                </a:solidFill>
-                <a:latin typeface="Calibri"/>
-              </a:rPr>
-              <a:t>Un modello nuovo si installa </a:t>
-            </a:r>
-            <a:r>
-              <a:rPr sz="1400" b="1" i="0">
-                <a:solidFill>
-                  <a:srgbClr val="222B36"/>
-                </a:solidFill>
-                <a:latin typeface="Calibri"/>
-              </a:rPr>
-              <a:t>scrivendo una tabella</a:t>
-            </a:r>
-            <a:r>
-              <a:rPr sz="1400" b="0" i="0">
-                <a:solidFill>
-                  <a:srgbClr val="222B36"/>
-                </a:solidFill>
-                <a:latin typeface="Calibri"/>
-              </a:rPr>
-              <a:t>: nessun compilatore, da nessuna parte. P1 ne vuole uno per ogni modello nuovo, su qualche macchina.</a:t>
-            </a:r>
-          </a:p>
-        </p:txBody>
-      </p:sp>
-      <p:sp>
-        <p:nvSpPr>
-          <p:cNvPr id="16" name="Rounded Rectangle 15"/>
-          <p:cNvSpPr/>
-          <p:nvPr/>
-        </p:nvSpPr>
-        <p:spPr>
-          <a:xfrm>
-            <a:off x="548640" y="5577840"/>
-            <a:ext cx="11094415" cy="777240"/>
-          </a:xfrm>
-          <a:prstGeom prst="roundRect">
-            <a:avLst>
-              <a:gd name="adj" fmla="val 6000"/>
-            </a:avLst>
-          </a:prstGeom>
-          <a:solidFill>
-            <a:srgbClr val="FFF4DE"/>
-          </a:solidFill>
-          <a:ln>
-            <a:noFill/>
-          </a:ln>
-          <a:effectLst/>
-        </p:spPr>
-        <p:style>
-          <a:lnRef idx="1">
-            <a:schemeClr val="accent1"/>
-          </a:lnRef>
-          <a:fillRef idx="3">
-            <a:schemeClr val="accent1"/>
-          </a:fillRef>
-          <a:effectRef idx="2">
-            <a:schemeClr val="accent1"/>
-          </a:effectRef>
-          <a:fontRef idx="minor">
-            <a:schemeClr val="lt1"/>
-          </a:fontRef>
-        </p:style>
-        <p:txBody>
-          <a:bodyPr rtlCol="0" anchor="ctr"/>
-          <a:lstStyle/>
-          <a:p>
-            <a:endParaRPr/>
-          </a:p>
-        </p:txBody>
-      </p:sp>
-      <p:sp>
-        <p:nvSpPr>
-          <p:cNvPr id="17" name="Rectangle 16"/>
-          <p:cNvSpPr/>
-          <p:nvPr/>
-        </p:nvSpPr>
-        <p:spPr>
-          <a:xfrm>
-            <a:off x="548640" y="5577840"/>
-            <a:ext cx="82296" cy="777240"/>
-          </a:xfrm>
-          <a:prstGeom prst="rect">
-            <a:avLst/>
-          </a:prstGeom>
-          <a:solidFill>
-            <a:srgbClr val="F2B134"/>
-          </a:solidFill>
-          <a:ln>
-            <a:noFill/>
-          </a:ln>
-          <a:effectLst/>
-        </p:spPr>
-        <p:style>
-          <a:lnRef idx="1">
-            <a:schemeClr val="accent1"/>
-          </a:lnRef>
-          <a:fillRef idx="3">
-            <a:schemeClr val="accent1"/>
-          </a:fillRef>
-          <a:effectRef idx="2">
-            <a:schemeClr val="accent1"/>
-          </a:effectRef>
-          <a:fontRef idx="minor">
-            <a:schemeClr val="lt1"/>
-          </a:fontRef>
-        </p:style>
-        <p:txBody>
-          <a:bodyPr rtlCol="0" anchor="ctr"/>
-          <a:lstStyle/>
-          <a:p>
-            <a:endParaRPr/>
-          </a:p>
-        </p:txBody>
-      </p:sp>
-      <p:sp>
-        <p:nvSpPr>
-          <p:cNvPr id="18" name="TextBox 17"/>
-          <p:cNvSpPr txBox="1"/>
-          <p:nvPr/>
-        </p:nvSpPr>
-        <p:spPr>
-          <a:xfrm>
-            <a:off x="822960" y="5650992"/>
-            <a:ext cx="1097280" cy="274320"/>
-          </a:xfrm>
-          <a:prstGeom prst="rect">
-            <a:avLst/>
-          </a:prstGeom>
-          <a:noFill/>
-        </p:spPr>
-        <p:txBody>
-          <a:bodyPr wrap="square" lIns="0" tIns="0" rIns="0" bIns="0" anchor="t">
-            <a:spAutoFit/>
-          </a:bodyPr>
-          <a:lstStyle/>
-          <a:p>
-            <a:pPr algn="l">
-              <a:lnSpc>
-                <a:spcPct val="110000"/>
-              </a:lnSpc>
-              <a:spcAft>
-                <a:spcPts val="600"/>
-              </a:spcAft>
-            </a:pPr>
-            <a:r>
-              <a:rPr sz="1100" b="1" i="0">
-                <a:solidFill>
-                  <a:srgbClr val="B57A00"/>
-                </a:solidFill>
-                <a:latin typeface="Calibri"/>
-              </a:rPr>
-              <a:t>QUINDI</a:t>
-            </a:r>
-          </a:p>
-        </p:txBody>
-      </p:sp>
-      <p:sp>
-        <p:nvSpPr>
-          <p:cNvPr id="19" name="TextBox 18"/>
-          <p:cNvSpPr txBox="1"/>
-          <p:nvPr/>
-        </p:nvSpPr>
-        <p:spPr>
-          <a:xfrm>
-            <a:off x="1783080" y="5577840"/>
-            <a:ext cx="9677095" cy="777240"/>
-          </a:xfrm>
-          <a:prstGeom prst="rect">
-            <a:avLst/>
-          </a:prstGeom>
-          <a:noFill/>
-        </p:spPr>
-        <p:txBody>
-          <a:bodyPr wrap="square" lIns="0" tIns="0" rIns="0" bIns="0" anchor="ctr">
-            <a:spAutoFit/>
-          </a:bodyPr>
-          <a:lstStyle/>
-          <a:p>
-            <a:pPr algn="l">
-              <a:lnSpc>
-                <a:spcPct val="105000"/>
-              </a:lnSpc>
-              <a:spcAft>
-                <a:spcPts val="0"/>
-              </a:spcAft>
-            </a:pPr>
-            <a:r>
-              <a:rPr sz="1500" b="0" i="0">
-                <a:solidFill>
-                  <a:srgbClr val="222B36"/>
-                </a:solidFill>
-                <a:latin typeface="Calibri"/>
-              </a:rPr>
-              <a:t>Il tempo per cambiare modello </a:t>
-            </a:r>
-            <a:r>
-              <a:rPr sz="1500" b="1" i="0">
-                <a:solidFill>
-                  <a:srgbClr val="222B36"/>
-                </a:solidFill>
-                <a:latin typeface="Calibri"/>
-              </a:rPr>
-              <a:t>non è più un criterio di scelta</a:t>
-            </a:r>
-            <a:r>
-              <a:rPr sz="1500" b="0" i="0">
-                <a:solidFill>
-                  <a:srgbClr val="222B36"/>
-                </a:solidFill>
-                <a:latin typeface="Calibri"/>
-              </a:rPr>
-              <a:t>: millisecondi per tutte. Si sceglie sul </a:t>
-            </a:r>
-            <a:r>
-              <a:rPr sz="1500" b="1" i="0">
-                <a:solidFill>
-                  <a:srgbClr val="222B36"/>
-                </a:solidFill>
-                <a:latin typeface="Calibri"/>
-              </a:rPr>
-              <a:t>costo per pacchetto</a:t>
-            </a:r>
-            <a:r>
-              <a:rPr sz="1500" b="0" i="0">
-                <a:solidFill>
-                  <a:srgbClr val="222B36"/>
-                </a:solidFill>
-                <a:latin typeface="Calibri"/>
-              </a:rPr>
-              <a:t> (~50 ns di rete con i pesi compilati, ~220–380 con quelli da tabella) e su </a:t>
-            </a:r>
-            <a:r>
-              <a:rPr sz="1500" b="1" i="0">
-                <a:solidFill>
-                  <a:srgbClr val="222B36"/>
-                </a:solidFill>
-                <a:latin typeface="Calibri"/>
-              </a:rPr>
-              <a:t>dove serve un compilatore</a:t>
-            </a:r>
-            <a:r>
-              <a:rPr sz="1500" b="0" i="0">
-                <a:solidFill>
-                  <a:srgbClr val="222B36"/>
-                </a:solidFill>
-                <a:latin typeface="Calibri"/>
-              </a:rPr>
-              <a:t>.</a:t>
             </a:r>
           </a:p>
         </p:txBody>
@@ -33021,7 +33587,7 @@
                 </a:solidFill>
                 <a:latin typeface="Calibri"/>
               </a:rPr>
-              <a:t>COME CRESCE IL COSTO DEL MODELLO</a:t>
+              <a:t>IL COMPROMESSO</a:t>
             </a:r>
           </a:p>
         </p:txBody>
@@ -33063,7 +33629,7 @@
                 </a:solidFill>
                 <a:latin typeface="Calibri"/>
               </a:rPr>
-              <a:t>Meno istruzioni, e più lenta</a:t>
+              <a:t>Cambiare modello non separa più le pipeline</a:t>
             </a:r>
           </a:p>
         </p:txBody>
@@ -33077,7 +33643,7 @@
         <p:spPr>
           <a:xfrm>
             <a:off x="11292840" y="6446520"/>
-            <a:ext cx="457200" cy="274320"/>
+            <a:ext cx="457200" cy="176908"/>
           </a:xfrm>
           <a:prstGeom prst="rect">
             <a:avLst/>
@@ -33099,7 +33665,7 @@
               </a:spcAft>
             </a:pPr>
             <a:r>
-              <a:rPr sz="1100" b="0" i="0">
+              <a:rPr lang="it-IT" sz="1100" b="0" i="0">
                 <a:solidFill>
                   <a:srgbClr val="6B7C93"/>
                 </a:solidFill>
@@ -33107,6 +33673,12 @@
               </a:rPr>
               <a:t>8</a:t>
             </a:r>
+            <a:endParaRPr sz="1100" b="0" i="0">
+              <a:solidFill>
+                <a:srgbClr val="6B7C93"/>
+              </a:solidFill>
+              <a:latin typeface="Calibri"/>
+            </a:endParaRPr>
           </a:p>
         </p:txBody>
       </p:sp>
@@ -33147,21 +33719,129 @@
                 </a:solidFill>
                 <a:latin typeface="Calibri"/>
               </a:rPr>
-              <a:t>In P3 ogni strato è un programma a sé: allargare costa dentro un programma, approfondire fra un programma e l'altro</a:t>
-            </a:r>
-          </a:p>
-        </p:txBody>
-      </p:sp>
-      <p:sp>
-        <p:nvSpPr>
-          <p:cNvPr id="7" name="TextBox 6"/>
+              <a:t>Tempo per installare un modello nuovo su un nodo già in servizio (scala logaritmica)  ·  rimisura del 23/09</a:t>
+            </a:r>
+          </a:p>
+        </p:txBody>
+      </p:sp>
+      <p:graphicFrame>
+        <p:nvGraphicFramePr>
+          <p:cNvPr id="7" name="Chart 6"/>
+          <p:cNvGraphicFramePr>
+            <a:graphicFrameLocks noGrp="1"/>
+          </p:cNvGraphicFramePr>
+          <p:nvPr/>
+        </p:nvGraphicFramePr>
+        <p:xfrm>
+          <a:off x="457200" y="1600200"/>
+          <a:ext cx="5669280" cy="3840480"/>
+        </p:xfrm>
+        <a:graphic>
+          <a:graphicData uri="http://schemas.openxmlformats.org/drawingml/2006/chart">
+            <c:chart xmlns:c="http://schemas.openxmlformats.org/drawingml/2006/chart" xmlns:r="http://schemas.openxmlformats.org/officeDocument/2006/relationships" r:id="rId2"/>
+          </a:graphicData>
+        </a:graphic>
+      </p:graphicFrame>
+      <p:sp>
+        <p:nvSpPr>
+          <p:cNvPr id="8" name="Rounded Rectangle 7"/>
+          <p:cNvSpPr/>
+          <p:nvPr/>
+        </p:nvSpPr>
+        <p:spPr>
+          <a:xfrm>
+            <a:off x="6400800" y="1645920"/>
+            <a:ext cx="5303520" cy="1737360"/>
+          </a:xfrm>
+          <a:prstGeom prst="roundRect">
+            <a:avLst>
+              <a:gd name="adj" fmla="val 6000"/>
+            </a:avLst>
+          </a:prstGeom>
+          <a:solidFill>
+            <a:srgbClr val="F3F5F8"/>
+          </a:solidFill>
+          <a:ln>
+            <a:noFill/>
+          </a:ln>
+          <a:effectLst/>
+        </p:spPr>
+        <p:style>
+          <a:lnRef idx="1">
+            <a:schemeClr val="accent1"/>
+          </a:lnRef>
+          <a:fillRef idx="3">
+            <a:schemeClr val="accent1"/>
+          </a:fillRef>
+          <a:effectRef idx="2">
+            <a:schemeClr val="accent1"/>
+          </a:effectRef>
+          <a:fontRef idx="minor">
+            <a:schemeClr val="lt1"/>
+          </a:fontRef>
+        </p:style>
+        <p:txBody>
+          <a:bodyPr rtlCol="0" anchor="ctr"/>
+          <a:lstStyle/>
+          <a:p>
+            <a:endParaRPr/>
+          </a:p>
+        </p:txBody>
+      </p:sp>
+      <p:sp>
+        <p:nvSpPr>
+          <p:cNvPr id="9" name="Rectangle 8"/>
+          <p:cNvSpPr/>
+          <p:nvPr/>
+        </p:nvSpPr>
+        <p:spPr>
+          <a:xfrm>
+            <a:off x="6400800" y="1645920"/>
+            <a:ext cx="82296" cy="1737360"/>
+          </a:xfrm>
+          <a:prstGeom prst="rect">
+            <a:avLst/>
+          </a:prstGeom>
+          <a:solidFill>
+            <a:srgbClr val="E07A2D"/>
+          </a:solidFill>
+          <a:ln>
+            <a:noFill/>
+          </a:ln>
+          <a:effectLst/>
+        </p:spPr>
+        <p:style>
+          <a:lnRef idx="1">
+            <a:schemeClr val="accent1"/>
+          </a:lnRef>
+          <a:fillRef idx="3">
+            <a:schemeClr val="accent1"/>
+          </a:fillRef>
+          <a:effectRef idx="2">
+            <a:schemeClr val="accent1"/>
+          </a:effectRef>
+          <a:fontRef idx="minor">
+            <a:schemeClr val="lt1"/>
+          </a:fontRef>
+        </p:style>
+        <p:txBody>
+          <a:bodyPr rtlCol="0" anchor="ctr"/>
+          <a:lstStyle/>
+          <a:p>
+            <a:endParaRPr/>
+          </a:p>
+        </p:txBody>
+      </p:sp>
+      <p:sp>
+        <p:nvSpPr>
+          <p:cNvPr id="10" name="TextBox 9"/>
           <p:cNvSpPr txBox="1"/>
           <p:nvPr/>
         </p:nvSpPr>
         <p:spPr>
           <a:xfrm>
-            <a:off x="548640" y="1508760"/>
-            <a:ext cx="10972800" cy="548640"/>
+            <a:off x="6675120" y="1810512"/>
+            <a:ext cx="4892040" cy="457200"/>
           </a:xfrm>
           <a:prstGeom prst="rect">
             <a:avLst/>
@@ -33183,687 +33863,14 @@
               </a:spcAft>
             </a:pPr>
             <a:r>
-              <a:rPr sz="1800" b="0" i="0">
-                <a:solidFill>
-                  <a:srgbClr val="222B36"/>
-                </a:solidFill>
-                <a:latin typeface="Calibri"/>
-              </a:rPr>
-              <a:t>A parità di pesi, P3 ha un programma </a:t>
-            </a:r>
-            <a:r>
-              <a:rPr sz="1800" b="1" i="0">
-                <a:solidFill>
-                  <a:srgbClr val="222B36"/>
-                </a:solidFill>
-                <a:latin typeface="Calibri"/>
-              </a:rPr>
-              <a:t>più piccolo</a:t>
-            </a:r>
-            <a:r>
-              <a:rPr sz="1800" b="0" i="0">
-                <a:solidFill>
-                  <a:srgbClr val="222B36"/>
-                </a:solidFill>
-                <a:latin typeface="Calibri"/>
-              </a:rPr>
-              <a:t> di P2 ma è </a:t>
-            </a:r>
-            <a:r>
-              <a:rPr sz="1800" b="1" i="0">
-                <a:solidFill>
-                  <a:srgbClr val="222B36"/>
-                </a:solidFill>
-                <a:latin typeface="Calibri"/>
-              </a:rPr>
-              <a:t>più lento</a:t>
-            </a:r>
-            <a:r>
-              <a:rPr sz="1800" b="0" i="0">
-                <a:solidFill>
-                  <a:srgbClr val="222B36"/>
-                </a:solidFill>
-                <a:latin typeface="Calibri"/>
-              </a:rPr>
-              <a:t>.</a:t>
-            </a:r>
-          </a:p>
-        </p:txBody>
-      </p:sp>
-      <p:graphicFrame>
-        <p:nvGraphicFramePr>
-          <p:cNvPr id="8" name="Table 7"/>
-          <p:cNvGraphicFramePr>
-            <a:graphicFrameLocks noGrp="1"/>
-          </p:cNvGraphicFramePr>
-          <p:nvPr/>
-        </p:nvGraphicFramePr>
-        <p:xfrm>
-          <a:off x="1463040" y="2194560"/>
-          <a:ext cx="9235437" cy="2834640"/>
-        </p:xfrm>
-        <a:graphic>
-          <a:graphicData uri="http://schemas.openxmlformats.org/drawingml/2006/table">
-            <a:tbl>
-              <a:tblPr>
-                <a:tableStyleId>{2D5ABB26-0587-4C30-8999-92F81FD0307C}</a:tableStyleId>
-              </a:tblPr>
-              <a:tblGrid>
-                <a:gridCol w="3140049">
-                  <a:extLst>
-                    <a:ext uri="{9D8B030D-6E8A-4147-A177-3AD203B41FA5}">
-                      <a16:colId xmlns:a16="http://schemas.microsoft.com/office/drawing/2014/main" val="20000"/>
-                    </a:ext>
-                  </a:extLst>
-                </a:gridCol>
-                <a:gridCol w="2031796">
-                  <a:extLst>
-                    <a:ext uri="{9D8B030D-6E8A-4147-A177-3AD203B41FA5}">
-                      <a16:colId xmlns:a16="http://schemas.microsoft.com/office/drawing/2014/main" val="20001"/>
-                    </a:ext>
-                  </a:extLst>
-                </a:gridCol>
-                <a:gridCol w="2031796">
-                  <a:extLst>
-                    <a:ext uri="{9D8B030D-6E8A-4147-A177-3AD203B41FA5}">
-                      <a16:colId xmlns:a16="http://schemas.microsoft.com/office/drawing/2014/main" val="20002"/>
-                    </a:ext>
-                  </a:extLst>
-                </a:gridCol>
-                <a:gridCol w="2031796">
-                  <a:extLst>
-                    <a:ext uri="{9D8B030D-6E8A-4147-A177-3AD203B41FA5}">
-                      <a16:colId xmlns:a16="http://schemas.microsoft.com/office/drawing/2014/main" val="20003"/>
-                    </a:ext>
-                  </a:extLst>
-                </a:gridCol>
-              </a:tblGrid>
-              <a:tr h="566928">
-                <a:tc>
-                  <a:txBody>
-                    <a:bodyPr/>
-                    <a:lstStyle/>
-                    <a:p>
-                      <a:pPr algn="l"/>
-                      <a:r>
-                        <a:rPr sz="1800" b="1" i="0">
-                          <a:solidFill>
-                            <a:srgbClr val="FFFFFF"/>
-                          </a:solidFill>
-                          <a:latin typeface="Calibri"/>
-                        </a:rPr>
-                        <a:t>A parità di pesi</a:t>
-                      </a:r>
-                    </a:p>
-                  </a:txBody>
-                  <a:tcPr marT="27432" marB="27432" anchor="ctr">
-                    <a:solidFill>
-                      <a:srgbClr val="1F3A5F"/>
-                    </a:solidFill>
-                  </a:tcPr>
-                </a:tc>
-                <a:tc>
-                  <a:txBody>
-                    <a:bodyPr/>
-                    <a:lstStyle/>
-                    <a:p>
-                      <a:pPr algn="r"/>
-                      <a:r>
-                        <a:rPr sz="1800" b="1" i="0">
-                          <a:solidFill>
-                            <a:srgbClr val="FFFFFF"/>
-                          </a:solidFill>
-                          <a:latin typeface="Calibri"/>
-                        </a:rPr>
-                        <a:t>P2  template</a:t>
-                      </a:r>
-                    </a:p>
-                  </a:txBody>
-                  <a:tcPr marT="27432" marB="27432" anchor="ctr">
-                    <a:solidFill>
-                      <a:srgbClr val="1F3A5F"/>
-                    </a:solidFill>
-                  </a:tcPr>
-                </a:tc>
-                <a:tc>
-                  <a:txBody>
-                    <a:bodyPr/>
-                    <a:lstStyle/>
-                    <a:p>
-                      <a:pPr algn="r"/>
-                      <a:r>
-                        <a:rPr sz="1800" b="1" i="0">
-                          <a:solidFill>
-                            <a:srgbClr val="FFFFFF"/>
-                          </a:solidFill>
-                          <a:latin typeface="Calibri"/>
-                        </a:rPr>
-                        <a:t>P3  modular</a:t>
-                      </a:r>
-                    </a:p>
-                  </a:txBody>
-                  <a:tcPr marT="27432" marB="27432" anchor="ctr">
-                    <a:solidFill>
-                      <a:srgbClr val="1F3A5F"/>
-                    </a:solidFill>
-                  </a:tcPr>
-                </a:tc>
-                <a:tc>
-                  <a:txBody>
-                    <a:bodyPr/>
-                    <a:lstStyle/>
-                    <a:p>
-                      <a:pPr algn="r"/>
-                      <a:r>
-                        <a:rPr sz="1800" b="1" i="0">
-                          <a:solidFill>
-                            <a:srgbClr val="FFFFFF"/>
-                          </a:solidFill>
-                          <a:latin typeface="Calibri"/>
-                        </a:rPr>
-                        <a:t>Differenza</a:t>
-                      </a:r>
-                    </a:p>
-                  </a:txBody>
-                  <a:tcPr marT="27432" marB="27432" anchor="ctr">
-                    <a:solidFill>
-                      <a:srgbClr val="1F3A5F"/>
-                    </a:solidFill>
-                  </a:tcPr>
-                </a:tc>
-                <a:extLst>
-                  <a:ext uri="{0D108BD9-81ED-4DB2-BD59-A6C34878D82A}">
-                    <a16:rowId xmlns:a16="http://schemas.microsoft.com/office/drawing/2014/main" val="10000"/>
-                  </a:ext>
-                </a:extLst>
-              </a:tr>
-              <a:tr h="566928">
-                <a:tc>
-                  <a:txBody>
-                    <a:bodyPr/>
-                    <a:lstStyle/>
-                    <a:p>
-                      <a:pPr algn="l"/>
-                      <a:r>
-                        <a:rPr sz="1800" b="1" i="0">
-                          <a:solidFill>
-                            <a:srgbClr val="222B36"/>
-                          </a:solidFill>
-                          <a:latin typeface="Calibri"/>
-                        </a:rPr>
-                        <a:t>Istruzioni del programma</a:t>
-                      </a:r>
-                    </a:p>
-                  </a:txBody>
-                  <a:tcPr marT="27432" marB="27432" anchor="ctr">
-                    <a:solidFill>
-                      <a:srgbClr val="FFFFFF"/>
-                    </a:solidFill>
-                  </a:tcPr>
-                </a:tc>
-                <a:tc>
-                  <a:txBody>
-                    <a:bodyPr/>
-                    <a:lstStyle/>
-                    <a:p>
-                      <a:pPr algn="r"/>
-                      <a:r>
-                        <a:rPr sz="1800" b="0" i="0">
-                          <a:solidFill>
-                            <a:srgbClr val="222B36"/>
-                          </a:solidFill>
-                          <a:latin typeface="Calibri"/>
-                        </a:rPr>
-                        <a:t>14 985</a:t>
-                      </a:r>
-                    </a:p>
-                  </a:txBody>
-                  <a:tcPr marT="27432" marB="27432" anchor="ctr">
-                    <a:solidFill>
-                      <a:srgbClr val="FFFFFF"/>
-                    </a:solidFill>
-                  </a:tcPr>
-                </a:tc>
-                <a:tc>
-                  <a:txBody>
-                    <a:bodyPr/>
-                    <a:lstStyle/>
-                    <a:p>
-                      <a:pPr algn="r"/>
-                      <a:r>
-                        <a:rPr sz="1800" b="0" i="0">
-                          <a:solidFill>
-                            <a:srgbClr val="222B36"/>
-                          </a:solidFill>
-                          <a:latin typeface="Calibri"/>
-                        </a:rPr>
-                        <a:t>12 349</a:t>
-                      </a:r>
-                    </a:p>
-                  </a:txBody>
-                  <a:tcPr marT="27432" marB="27432" anchor="ctr">
-                    <a:solidFill>
-                      <a:srgbClr val="FFFFFF"/>
-                    </a:solidFill>
-                  </a:tcPr>
-                </a:tc>
-                <a:tc>
-                  <a:txBody>
-                    <a:bodyPr/>
-                    <a:lstStyle/>
-                    <a:p>
-                      <a:pPr algn="r"/>
-                      <a:r>
-                        <a:rPr sz="1800" b="0" i="0">
-                          <a:solidFill>
-                            <a:srgbClr val="222B36"/>
-                          </a:solidFill>
-                          <a:latin typeface="Calibri"/>
-                        </a:rPr>
-                        <a:t>−18 %</a:t>
-                      </a:r>
-                    </a:p>
-                  </a:txBody>
-                  <a:tcPr marT="27432" marB="27432" anchor="ctr">
-                    <a:solidFill>
-                      <a:srgbClr val="FFFFFF"/>
-                    </a:solidFill>
-                  </a:tcPr>
-                </a:tc>
-                <a:extLst>
-                  <a:ext uri="{0D108BD9-81ED-4DB2-BD59-A6C34878D82A}">
-                    <a16:rowId xmlns:a16="http://schemas.microsoft.com/office/drawing/2014/main" val="10001"/>
-                  </a:ext>
-                </a:extLst>
-              </a:tr>
-              <a:tr h="566928">
-                <a:tc>
-                  <a:txBody>
-                    <a:bodyPr/>
-                    <a:lstStyle/>
-                    <a:p>
-                      <a:pPr algn="l"/>
-                      <a:r>
-                        <a:rPr sz="1800" b="1" i="0">
-                          <a:solidFill>
-                            <a:srgbClr val="222B36"/>
-                          </a:solidFill>
-                          <a:latin typeface="Calibri"/>
-                        </a:rPr>
-                        <a:t>Latenza per pacchetto</a:t>
-                      </a:r>
-                    </a:p>
-                  </a:txBody>
-                  <a:tcPr marT="27432" marB="27432" anchor="ctr">
-                    <a:solidFill>
-                      <a:srgbClr val="F3F5F8"/>
-                    </a:solidFill>
-                  </a:tcPr>
-                </a:tc>
-                <a:tc>
-                  <a:txBody>
-                    <a:bodyPr/>
-                    <a:lstStyle/>
-                    <a:p>
-                      <a:pPr algn="r"/>
-                      <a:r>
-                        <a:rPr sz="1800" b="0" i="0">
-                          <a:solidFill>
-                            <a:srgbClr val="222B36"/>
-                          </a:solidFill>
-                          <a:latin typeface="Calibri"/>
-                        </a:rPr>
-                        <a:t>180 ns</a:t>
-                      </a:r>
-                    </a:p>
-                  </a:txBody>
-                  <a:tcPr marT="27432" marB="27432" anchor="ctr">
-                    <a:solidFill>
-                      <a:srgbClr val="F3F5F8"/>
-                    </a:solidFill>
-                  </a:tcPr>
-                </a:tc>
-                <a:tc>
-                  <a:txBody>
-                    <a:bodyPr/>
-                    <a:lstStyle/>
-                    <a:p>
-                      <a:pPr algn="r"/>
-                      <a:r>
-                        <a:rPr sz="1800" b="0" i="0">
-                          <a:solidFill>
-                            <a:srgbClr val="222B36"/>
-                          </a:solidFill>
-                          <a:latin typeface="Calibri"/>
-                        </a:rPr>
-                        <a:t>278 ns</a:t>
-                      </a:r>
-                    </a:p>
-                  </a:txBody>
-                  <a:tcPr marT="27432" marB="27432" anchor="ctr">
-                    <a:solidFill>
-                      <a:srgbClr val="F3F5F8"/>
-                    </a:solidFill>
-                  </a:tcPr>
-                </a:tc>
-                <a:tc>
-                  <a:txBody>
-                    <a:bodyPr/>
-                    <a:lstStyle/>
-                    <a:p>
-                      <a:pPr algn="r"/>
-                      <a:r>
-                        <a:rPr sz="1800" b="0" i="0">
-                          <a:solidFill>
-                            <a:srgbClr val="222B36"/>
-                          </a:solidFill>
-                          <a:latin typeface="Calibri"/>
-                        </a:rPr>
-                        <a:t>+54 %</a:t>
-                      </a:r>
-                    </a:p>
-                  </a:txBody>
-                  <a:tcPr marT="27432" marB="27432" anchor="ctr">
-                    <a:solidFill>
-                      <a:srgbClr val="F3F5F8"/>
-                    </a:solidFill>
-                  </a:tcPr>
-                </a:tc>
-                <a:extLst>
-                  <a:ext uri="{0D108BD9-81ED-4DB2-BD59-A6C34878D82A}">
-                    <a16:rowId xmlns:a16="http://schemas.microsoft.com/office/drawing/2014/main" val="10002"/>
-                  </a:ext>
-                </a:extLst>
-              </a:tr>
-              <a:tr h="566928">
-                <a:tc>
-                  <a:txBody>
-                    <a:bodyPr/>
-                    <a:lstStyle/>
-                    <a:p>
-                      <a:pPr algn="l"/>
-                      <a:r>
-                        <a:rPr sz="1800" b="1" i="0">
-                          <a:solidFill>
-                            <a:srgbClr val="222B36"/>
-                          </a:solidFill>
-                          <a:latin typeface="Calibri"/>
-                        </a:rPr>
-                        <a:t>Salti fra programmi</a:t>
-                      </a:r>
-                    </a:p>
-                  </a:txBody>
-                  <a:tcPr marT="27432" marB="27432" anchor="ctr">
-                    <a:solidFill>
-                      <a:srgbClr val="FFFFFF"/>
-                    </a:solidFill>
-                  </a:tcPr>
-                </a:tc>
-                <a:tc>
-                  <a:txBody>
-                    <a:bodyPr/>
-                    <a:lstStyle/>
-                    <a:p>
-                      <a:pPr algn="r"/>
-                      <a:r>
-                        <a:rPr sz="1800" b="0" i="0">
-                          <a:solidFill>
-                            <a:srgbClr val="222B36"/>
-                          </a:solidFill>
-                          <a:latin typeface="Calibri"/>
-                        </a:rPr>
-                        <a:t>1</a:t>
-                      </a:r>
-                    </a:p>
-                  </a:txBody>
-                  <a:tcPr marT="27432" marB="27432" anchor="ctr">
-                    <a:solidFill>
-                      <a:srgbClr val="FFFFFF"/>
-                    </a:solidFill>
-                  </a:tcPr>
-                </a:tc>
-                <a:tc>
-                  <a:txBody>
-                    <a:bodyPr/>
-                    <a:lstStyle/>
-                    <a:p>
-                      <a:pPr algn="r"/>
-                      <a:r>
-                        <a:rPr sz="1800" b="0" i="0">
-                          <a:solidFill>
-                            <a:srgbClr val="222B36"/>
-                          </a:solidFill>
-                          <a:latin typeface="Calibri"/>
-                        </a:rPr>
-                        <a:t>3</a:t>
-                      </a:r>
-                    </a:p>
-                  </a:txBody>
-                  <a:tcPr marT="27432" marB="27432" anchor="ctr">
-                    <a:solidFill>
-                      <a:srgbClr val="FFFFFF"/>
-                    </a:solidFill>
-                  </a:tcPr>
-                </a:tc>
-                <a:tc>
-                  <a:txBody>
-                    <a:bodyPr/>
-                    <a:lstStyle/>
-                    <a:p>
-                      <a:pPr algn="r"/>
-                      <a:r>
-                        <a:rPr sz="1800" b="0" i="0">
-                          <a:solidFill>
-                            <a:srgbClr val="222B36"/>
-                          </a:solidFill>
-                          <a:latin typeface="Calibri"/>
-                        </a:rPr>
-                        <a:t>×3</a:t>
-                      </a:r>
-                    </a:p>
-                  </a:txBody>
-                  <a:tcPr marT="27432" marB="27432" anchor="ctr">
-                    <a:solidFill>
-                      <a:srgbClr val="FFFFFF"/>
-                    </a:solidFill>
-                  </a:tcPr>
-                </a:tc>
-                <a:extLst>
-                  <a:ext uri="{0D108BD9-81ED-4DB2-BD59-A6C34878D82A}">
-                    <a16:rowId xmlns:a16="http://schemas.microsoft.com/office/drawing/2014/main" val="10003"/>
-                  </a:ext>
-                </a:extLst>
-              </a:tr>
-              <a:tr h="566928">
-                <a:tc>
-                  <a:txBody>
-                    <a:bodyPr/>
-                    <a:lstStyle/>
-                    <a:p>
-                      <a:pPr algn="l"/>
-                      <a:r>
-                        <a:rPr sz="1800" b="1" i="0">
-                          <a:solidFill>
-                            <a:srgbClr val="222B36"/>
-                          </a:solidFill>
-                          <a:latin typeface="Calibri"/>
-                        </a:rPr>
-                        <a:t>Letture di tabella</a:t>
-                      </a:r>
-                    </a:p>
-                  </a:txBody>
-                  <a:tcPr marT="27432" marB="27432" anchor="ctr">
-                    <a:solidFill>
-                      <a:srgbClr val="F3F5F8"/>
-                    </a:solidFill>
-                  </a:tcPr>
-                </a:tc>
-                <a:tc>
-                  <a:txBody>
-                    <a:bodyPr/>
-                    <a:lstStyle/>
-                    <a:p>
-                      <a:pPr algn="r"/>
-                      <a:r>
-                        <a:rPr sz="1800" b="0" i="0">
-                          <a:solidFill>
-                            <a:srgbClr val="222B36"/>
-                          </a:solidFill>
-                          <a:latin typeface="Calibri"/>
-                        </a:rPr>
-                        <a:t>11</a:t>
-                      </a:r>
-                    </a:p>
-                  </a:txBody>
-                  <a:tcPr marT="27432" marB="27432" anchor="ctr">
-                    <a:solidFill>
-                      <a:srgbClr val="F3F5F8"/>
-                    </a:solidFill>
-                  </a:tcPr>
-                </a:tc>
-                <a:tc>
-                  <a:txBody>
-                    <a:bodyPr/>
-                    <a:lstStyle/>
-                    <a:p>
-                      <a:pPr algn="r"/>
-                      <a:r>
-                        <a:rPr sz="1800" b="0" i="0">
-                          <a:solidFill>
-                            <a:srgbClr val="222B36"/>
-                          </a:solidFill>
-                          <a:latin typeface="Calibri"/>
-                        </a:rPr>
-                        <a:t>29</a:t>
-                      </a:r>
-                    </a:p>
-                  </a:txBody>
-                  <a:tcPr marT="27432" marB="27432" anchor="ctr">
-                    <a:solidFill>
-                      <a:srgbClr val="F3F5F8"/>
-                    </a:solidFill>
-                  </a:tcPr>
-                </a:tc>
-                <a:tc>
-                  <a:txBody>
-                    <a:bodyPr/>
-                    <a:lstStyle/>
-                    <a:p>
-                      <a:pPr algn="r"/>
-                      <a:r>
-                        <a:rPr sz="1800" b="0" i="0">
-                          <a:solidFill>
-                            <a:srgbClr val="222B36"/>
-                          </a:solidFill>
-                          <a:latin typeface="Calibri"/>
-                        </a:rPr>
-                        <a:t>×2,6</a:t>
-                      </a:r>
-                    </a:p>
-                  </a:txBody>
-                  <a:tcPr marT="27432" marB="27432" anchor="ctr">
-                    <a:solidFill>
-                      <a:srgbClr val="F3F5F8"/>
-                    </a:solidFill>
-                  </a:tcPr>
-                </a:tc>
-                <a:extLst>
-                  <a:ext uri="{0D108BD9-81ED-4DB2-BD59-A6C34878D82A}">
-                    <a16:rowId xmlns:a16="http://schemas.microsoft.com/office/drawing/2014/main" val="10004"/>
-                  </a:ext>
-                </a:extLst>
-              </a:tr>
-            </a:tbl>
-          </a:graphicData>
-        </a:graphic>
-      </p:graphicFrame>
-      <p:sp>
-        <p:nvSpPr>
-          <p:cNvPr id="9" name="Rounded Rectangle 8"/>
-          <p:cNvSpPr/>
-          <p:nvPr/>
-        </p:nvSpPr>
-        <p:spPr>
-          <a:xfrm>
-            <a:off x="548640" y="5257800"/>
-            <a:ext cx="11094415" cy="868680"/>
-          </a:xfrm>
-          <a:prstGeom prst="roundRect">
-            <a:avLst>
-              <a:gd name="adj" fmla="val 6000"/>
-            </a:avLst>
-          </a:prstGeom>
-          <a:solidFill>
-            <a:srgbClr val="FFF4DE"/>
-          </a:solidFill>
-          <a:ln>
-            <a:noFill/>
-          </a:ln>
-          <a:effectLst/>
-        </p:spPr>
-        <p:style>
-          <a:lnRef idx="1">
-            <a:schemeClr val="accent1"/>
-          </a:lnRef>
-          <a:fillRef idx="3">
-            <a:schemeClr val="accent1"/>
-          </a:fillRef>
-          <a:effectRef idx="2">
-            <a:schemeClr val="accent1"/>
-          </a:effectRef>
-          <a:fontRef idx="minor">
-            <a:schemeClr val="lt1"/>
-          </a:fontRef>
-        </p:style>
-        <p:txBody>
-          <a:bodyPr rtlCol="0" anchor="ctr"/>
-          <a:lstStyle/>
-          <a:p>
-            <a:endParaRPr/>
-          </a:p>
-        </p:txBody>
-      </p:sp>
-      <p:sp>
-        <p:nvSpPr>
-          <p:cNvPr id="10" name="Rectangle 9"/>
-          <p:cNvSpPr/>
-          <p:nvPr/>
-        </p:nvSpPr>
-        <p:spPr>
-          <a:xfrm>
-            <a:off x="548640" y="5257800"/>
-            <a:ext cx="82296" cy="868680"/>
-          </a:xfrm>
-          <a:prstGeom prst="rect">
-            <a:avLst/>
-          </a:prstGeom>
-          <a:solidFill>
-            <a:srgbClr val="F2B134"/>
-          </a:solidFill>
-          <a:ln>
-            <a:noFill/>
-          </a:ln>
-          <a:effectLst/>
-        </p:spPr>
-        <p:style>
-          <a:lnRef idx="1">
-            <a:schemeClr val="accent1"/>
-          </a:lnRef>
-          <a:fillRef idx="3">
-            <a:schemeClr val="accent1"/>
-          </a:fillRef>
-          <a:effectRef idx="2">
-            <a:schemeClr val="accent1"/>
-          </a:effectRef>
-          <a:fontRef idx="minor">
-            <a:schemeClr val="lt1"/>
-          </a:fontRef>
-        </p:style>
-        <p:txBody>
-          <a:bodyPr rtlCol="0" anchor="ctr"/>
-          <a:lstStyle/>
-          <a:p>
-            <a:endParaRPr/>
+              <a:rPr sz="1700" b="1" i="0">
+                <a:solidFill>
+                  <a:srgbClr val="E07A2D"/>
+                </a:solidFill>
+                <a:latin typeface="Calibri"/>
+              </a:rPr>
+              <a:t>Con l'oggetto precompilato (AOT)</a:t>
+            </a:r>
           </a:p>
         </p:txBody>
       </p:sp>
@@ -33875,8 +33882,8 @@
         </p:nvSpPr>
         <p:spPr>
           <a:xfrm>
-            <a:off x="822960" y="5330952"/>
-            <a:ext cx="1097280" cy="274320"/>
+            <a:off x="6675120" y="2221992"/>
+            <a:ext cx="4892040" cy="1115568"/>
           </a:xfrm>
           <a:prstGeom prst="rect">
             <a:avLst/>
@@ -33898,6 +33905,384 @@
               </a:spcAft>
             </a:pPr>
             <a:r>
+              <a:rPr sz="1400" b="0" i="0">
+                <a:solidFill>
+                  <a:srgbClr val="222B36"/>
+                </a:solidFill>
+                <a:latin typeface="Calibri"/>
+              </a:rPr>
+              <a:t>Sul nodo si carica un file pronto: </a:t>
+            </a:r>
+            <a:r>
+              <a:rPr sz="1400" b="1" i="0">
+                <a:solidFill>
+                  <a:srgbClr val="222B36"/>
+                </a:solidFill>
+                <a:latin typeface="Calibri"/>
+              </a:rPr>
+              <a:t>5–8 ms</a:t>
+            </a:r>
+            <a:r>
+              <a:rPr sz="1400" b="0" i="0">
+                <a:solidFill>
+                  <a:srgbClr val="222B36"/>
+                </a:solidFill>
+                <a:latin typeface="Calibri"/>
+              </a:rPr>
+              <a:t>, come P2 e P3. Anche compilando, </a:t>
+            </a:r>
+            <a:r>
+              <a:rPr sz="1400" b="1" i="0">
+                <a:solidFill>
+                  <a:srgbClr val="222B36"/>
+                </a:solidFill>
+                <a:latin typeface="Calibri"/>
+              </a:rPr>
+              <a:t>meno di 0,15 s</a:t>
+            </a:r>
+            <a:r>
+              <a:rPr sz="1400" b="0" i="0">
+                <a:solidFill>
+                  <a:srgbClr val="222B36"/>
+                </a:solidFill>
+                <a:latin typeface="Calibri"/>
+              </a:rPr>
+              <a:t>. Compilando sul nodo con </a:t>
+            </a:r>
+            <a:r>
+              <a:rPr sz="1400" b="1" i="0">
+                <a:solidFill>
+                  <a:srgbClr val="222B36"/>
+                </a:solidFill>
+                <a:latin typeface="Calibri"/>
+              </a:rPr>
+              <a:t>BCC</a:t>
+            </a:r>
+            <a:r>
+              <a:rPr sz="1400" b="0" i="0">
+                <a:solidFill>
+                  <a:srgbClr val="222B36"/>
+                </a:solidFill>
+                <a:latin typeface="Calibri"/>
+              </a:rPr>
+              <a:t> servirebbero ~0,7 s, perché BCC rilegge gli header del kernel a ogni compilazione.</a:t>
+            </a:r>
+          </a:p>
+        </p:txBody>
+      </p:sp>
+      <p:sp>
+        <p:nvSpPr>
+          <p:cNvPr id="12" name="Rounded Rectangle 11"/>
+          <p:cNvSpPr/>
+          <p:nvPr/>
+        </p:nvSpPr>
+        <p:spPr>
+          <a:xfrm>
+            <a:off x="6400800" y="3566160"/>
+            <a:ext cx="5303520" cy="1737360"/>
+          </a:xfrm>
+          <a:prstGeom prst="roundRect">
+            <a:avLst>
+              <a:gd name="adj" fmla="val 6000"/>
+            </a:avLst>
+          </a:prstGeom>
+          <a:solidFill>
+            <a:srgbClr val="F3F5F8"/>
+          </a:solidFill>
+          <a:ln>
+            <a:noFill/>
+          </a:ln>
+          <a:effectLst/>
+        </p:spPr>
+        <p:style>
+          <a:lnRef idx="1">
+            <a:schemeClr val="accent1"/>
+          </a:lnRef>
+          <a:fillRef idx="3">
+            <a:schemeClr val="accent1"/>
+          </a:fillRef>
+          <a:effectRef idx="2">
+            <a:schemeClr val="accent1"/>
+          </a:effectRef>
+          <a:fontRef idx="minor">
+            <a:schemeClr val="lt1"/>
+          </a:fontRef>
+        </p:style>
+        <p:txBody>
+          <a:bodyPr rtlCol="0" anchor="ctr"/>
+          <a:lstStyle/>
+          <a:p>
+            <a:endParaRPr/>
+          </a:p>
+        </p:txBody>
+      </p:sp>
+      <p:sp>
+        <p:nvSpPr>
+          <p:cNvPr id="13" name="Rectangle 12"/>
+          <p:cNvSpPr/>
+          <p:nvPr/>
+        </p:nvSpPr>
+        <p:spPr>
+          <a:xfrm>
+            <a:off x="6400800" y="3566160"/>
+            <a:ext cx="82296" cy="1737360"/>
+          </a:xfrm>
+          <a:prstGeom prst="rect">
+            <a:avLst/>
+          </a:prstGeom>
+          <a:solidFill>
+            <a:srgbClr val="2E9C6E"/>
+          </a:solidFill>
+          <a:ln>
+            <a:noFill/>
+          </a:ln>
+          <a:effectLst/>
+        </p:spPr>
+        <p:style>
+          <a:lnRef idx="1">
+            <a:schemeClr val="accent1"/>
+          </a:lnRef>
+          <a:fillRef idx="3">
+            <a:schemeClr val="accent1"/>
+          </a:fillRef>
+          <a:effectRef idx="2">
+            <a:schemeClr val="accent1"/>
+          </a:effectRef>
+          <a:fontRef idx="minor">
+            <a:schemeClr val="lt1"/>
+          </a:fontRef>
+        </p:style>
+        <p:txBody>
+          <a:bodyPr rtlCol="0" anchor="ctr"/>
+          <a:lstStyle/>
+          <a:p>
+            <a:endParaRPr/>
+          </a:p>
+        </p:txBody>
+      </p:sp>
+      <p:sp>
+        <p:nvSpPr>
+          <p:cNvPr id="14" name="TextBox 13"/>
+          <p:cNvSpPr txBox="1"/>
+          <p:nvPr/>
+        </p:nvSpPr>
+        <p:spPr>
+          <a:xfrm>
+            <a:off x="6675120" y="3730752"/>
+            <a:ext cx="4892040" cy="457200"/>
+          </a:xfrm>
+          <a:prstGeom prst="rect">
+            <a:avLst/>
+          </a:prstGeom>
+          <a:noFill/>
+        </p:spPr>
+        <p:txBody>
+          <a:bodyPr wrap="square" lIns="0" tIns="0" rIns="0" bIns="0" anchor="t">
+            <a:spAutoFit/>
+          </a:bodyPr>
+          <a:lstStyle/>
+          <a:p>
+            <a:pPr algn="l">
+              <a:lnSpc>
+                <a:spcPct val="110000"/>
+              </a:lnSpc>
+              <a:spcAft>
+                <a:spcPts val="600"/>
+              </a:spcAft>
+            </a:pPr>
+            <a:r>
+              <a:rPr sz="1700" b="1" i="0">
+                <a:solidFill>
+                  <a:srgbClr val="2E9C6E"/>
+                </a:solidFill>
+                <a:latin typeface="Calibri"/>
+              </a:rPr>
+              <a:t>Il vantaggio che resta a P2 e P3</a:t>
+            </a:r>
+          </a:p>
+        </p:txBody>
+      </p:sp>
+      <p:sp>
+        <p:nvSpPr>
+          <p:cNvPr id="15" name="TextBox 14"/>
+          <p:cNvSpPr txBox="1"/>
+          <p:nvPr/>
+        </p:nvSpPr>
+        <p:spPr>
+          <a:xfrm>
+            <a:off x="6675120" y="4142232"/>
+            <a:ext cx="4892040" cy="1115568"/>
+          </a:xfrm>
+          <a:prstGeom prst="rect">
+            <a:avLst/>
+          </a:prstGeom>
+          <a:noFill/>
+        </p:spPr>
+        <p:txBody>
+          <a:bodyPr wrap="square" lIns="0" tIns="0" rIns="0" bIns="0" anchor="t">
+            <a:spAutoFit/>
+          </a:bodyPr>
+          <a:lstStyle/>
+          <a:p>
+            <a:pPr algn="l">
+              <a:lnSpc>
+                <a:spcPct val="110000"/>
+              </a:lnSpc>
+              <a:spcAft>
+                <a:spcPts val="600"/>
+              </a:spcAft>
+            </a:pPr>
+            <a:r>
+              <a:rPr sz="1400" b="0" i="0">
+                <a:solidFill>
+                  <a:srgbClr val="222B36"/>
+                </a:solidFill>
+                <a:latin typeface="Calibri"/>
+              </a:rPr>
+              <a:t>Un modello nuovo si installa </a:t>
+            </a:r>
+            <a:r>
+              <a:rPr sz="1400" b="1" i="0">
+                <a:solidFill>
+                  <a:srgbClr val="222B36"/>
+                </a:solidFill>
+                <a:latin typeface="Calibri"/>
+              </a:rPr>
+              <a:t>scrivendo una tabella</a:t>
+            </a:r>
+            <a:r>
+              <a:rPr sz="1400" b="0" i="0">
+                <a:solidFill>
+                  <a:srgbClr val="222B36"/>
+                </a:solidFill>
+                <a:latin typeface="Calibri"/>
+              </a:rPr>
+              <a:t>: nessun compilatore, da nessuna parte. P1 ne vuole uno per ogni modello nuovo, su qualche macchina.</a:t>
+            </a:r>
+          </a:p>
+        </p:txBody>
+      </p:sp>
+      <p:sp>
+        <p:nvSpPr>
+          <p:cNvPr id="16" name="Rounded Rectangle 15"/>
+          <p:cNvSpPr/>
+          <p:nvPr/>
+        </p:nvSpPr>
+        <p:spPr>
+          <a:xfrm>
+            <a:off x="548640" y="5577840"/>
+            <a:ext cx="11094415" cy="777240"/>
+          </a:xfrm>
+          <a:prstGeom prst="roundRect">
+            <a:avLst>
+              <a:gd name="adj" fmla="val 6000"/>
+            </a:avLst>
+          </a:prstGeom>
+          <a:solidFill>
+            <a:srgbClr val="FFF4DE"/>
+          </a:solidFill>
+          <a:ln>
+            <a:noFill/>
+          </a:ln>
+          <a:effectLst/>
+        </p:spPr>
+        <p:style>
+          <a:lnRef idx="1">
+            <a:schemeClr val="accent1"/>
+          </a:lnRef>
+          <a:fillRef idx="3">
+            <a:schemeClr val="accent1"/>
+          </a:fillRef>
+          <a:effectRef idx="2">
+            <a:schemeClr val="accent1"/>
+          </a:effectRef>
+          <a:fontRef idx="minor">
+            <a:schemeClr val="lt1"/>
+          </a:fontRef>
+        </p:style>
+        <p:txBody>
+          <a:bodyPr rtlCol="0" anchor="ctr"/>
+          <a:lstStyle/>
+          <a:p>
+            <a:endParaRPr/>
+          </a:p>
+        </p:txBody>
+      </p:sp>
+      <p:sp>
+        <p:nvSpPr>
+          <p:cNvPr id="17" name="Rectangle 16"/>
+          <p:cNvSpPr/>
+          <p:nvPr/>
+        </p:nvSpPr>
+        <p:spPr>
+          <a:xfrm>
+            <a:off x="548640" y="5577840"/>
+            <a:ext cx="82296" cy="777240"/>
+          </a:xfrm>
+          <a:prstGeom prst="rect">
+            <a:avLst/>
+          </a:prstGeom>
+          <a:solidFill>
+            <a:srgbClr val="F2B134"/>
+          </a:solidFill>
+          <a:ln>
+            <a:noFill/>
+          </a:ln>
+          <a:effectLst/>
+        </p:spPr>
+        <p:style>
+          <a:lnRef idx="1">
+            <a:schemeClr val="accent1"/>
+          </a:lnRef>
+          <a:fillRef idx="3">
+            <a:schemeClr val="accent1"/>
+          </a:fillRef>
+          <a:effectRef idx="2">
+            <a:schemeClr val="accent1"/>
+          </a:effectRef>
+          <a:fontRef idx="minor">
+            <a:schemeClr val="lt1"/>
+          </a:fontRef>
+        </p:style>
+        <p:txBody>
+          <a:bodyPr rtlCol="0" anchor="ctr"/>
+          <a:lstStyle/>
+          <a:p>
+            <a:endParaRPr/>
+          </a:p>
+        </p:txBody>
+      </p:sp>
+      <p:sp>
+        <p:nvSpPr>
+          <p:cNvPr id="18" name="TextBox 17"/>
+          <p:cNvSpPr txBox="1"/>
+          <p:nvPr/>
+        </p:nvSpPr>
+        <p:spPr>
+          <a:xfrm>
+            <a:off x="822960" y="5650992"/>
+            <a:ext cx="1097280" cy="274320"/>
+          </a:xfrm>
+          <a:prstGeom prst="rect">
+            <a:avLst/>
+          </a:prstGeom>
+          <a:noFill/>
+        </p:spPr>
+        <p:txBody>
+          <a:bodyPr wrap="square" lIns="0" tIns="0" rIns="0" bIns="0" anchor="t">
+            <a:spAutoFit/>
+          </a:bodyPr>
+          <a:lstStyle/>
+          <a:p>
+            <a:pPr algn="l">
+              <a:lnSpc>
+                <a:spcPct val="110000"/>
+              </a:lnSpc>
+              <a:spcAft>
+                <a:spcPts val="600"/>
+              </a:spcAft>
+            </a:pPr>
+            <a:r>
               <a:rPr sz="1100" b="1" i="0">
                 <a:solidFill>
                   <a:srgbClr val="B57A00"/>
@@ -33911,14 +34296,14 @@
       </p:sp>
       <p:sp>
         <p:nvSpPr>
-          <p:cNvPr id="12" name="TextBox 11"/>
+          <p:cNvPr id="19" name="TextBox 18"/>
           <p:cNvSpPr txBox="1"/>
           <p:nvPr/>
         </p:nvSpPr>
         <p:spPr>
           <a:xfrm>
-            <a:off x="1783080" y="5257800"/>
-            <a:ext cx="9677095" cy="868680"/>
+            <a:off x="1783080" y="5577840"/>
+            <a:ext cx="9677095" cy="777240"/>
           </a:xfrm>
           <a:prstGeom prst="rect">
             <a:avLst/>
@@ -33940,49 +34325,67 @@
               </a:spcAft>
             </a:pPr>
             <a:r>
-              <a:rPr sz="1600" b="0" i="0">
+              <a:rPr sz="1500" b="0" i="0">
                 <a:solidFill>
                   <a:srgbClr val="222B36"/>
                 </a:solidFill>
                 <a:latin typeface="Calibri"/>
               </a:rPr>
-              <a:t>Le </a:t>
-            </a:r>
-            <a:r>
-              <a:rPr sz="1600" b="1" i="0">
+              <a:t>Il tempo per cambiare modello </a:t>
+            </a:r>
+            <a:r>
+              <a:rPr sz="1500" b="1" i="0">
                 <a:solidFill>
                   <a:srgbClr val="222B36"/>
                 </a:solidFill>
                 <a:latin typeface="Calibri"/>
               </a:rPr>
-              <a:t>istruzioni</a:t>
-            </a:r>
-            <a:r>
-              <a:rPr sz="1600" b="0" i="0">
+              <a:t>non è più un criterio di scelta</a:t>
+            </a:r>
+            <a:r>
+              <a:rPr sz="1500" b="0" i="0">
                 <a:solidFill>
                   <a:srgbClr val="222B36"/>
                 </a:solidFill>
                 <a:latin typeface="Calibri"/>
               </a:rPr>
-              <a:t> dicono quanto è grande il programma, non quanto lavora per pacchetto. Per confrontare le pipeline si guarda la </a:t>
-            </a:r>
-            <a:r>
-              <a:rPr sz="1600" b="1" i="0">
+              <a:t>: millisecondi per tutte. Si sceglie sul </a:t>
+            </a:r>
+            <a:r>
+              <a:rPr sz="1500" b="1" i="0">
                 <a:solidFill>
                   <a:srgbClr val="222B36"/>
                 </a:solidFill>
                 <a:latin typeface="Calibri"/>
               </a:rPr>
-              <a:t>latenza</a:t>
-            </a:r>
-            <a:r>
-              <a:rPr sz="1600" b="0" i="0">
+              <a:t>costo per pacchetto</a:t>
+            </a:r>
+            <a:r>
+              <a:rPr sz="1500" b="0" i="0">
                 <a:solidFill>
                   <a:srgbClr val="222B36"/>
                 </a:solidFill>
                 <a:latin typeface="Calibri"/>
               </a:rPr>
-              <a:t>; letture di tabella e salti fra programmi spiegano la differenza.</a:t>
+              <a:t> (~50 ns di rete con i pesi compilati, ~220–380 con quelli da tabella) e su </a:t>
+            </a:r>
+            <a:r>
+              <a:rPr sz="1500" b="1" i="0">
+                <a:solidFill>
+                  <a:srgbClr val="222B36"/>
+                </a:solidFill>
+                <a:latin typeface="Calibri"/>
+              </a:rPr>
+              <a:t>dove serve un compilatore</a:t>
+            </a:r>
+            <a:r>
+              <a:rPr sz="1500" b="0" i="0">
+                <a:solidFill>
+                  <a:srgbClr val="222B36"/>
+                </a:solidFill>
+                <a:latin typeface="Calibri"/>
+              </a:rPr>
+              <a:t>.</a:t>
             </a:r>
           </a:p>
         </p:txBody>

--- a/docs/Inferenza di una rete neurale nel kernel Linux con eBPF XDP.pptx
+++ b/docs/Inferenza di una rete neurale nel kernel Linux con eBPF XDP.pptx
@@ -4,6 +4,9 @@
   <p:sldMasterIdLst>
     <p:sldMasterId id="2147483648" r:id="rId1"/>
   </p:sldMasterIdLst>
+  <p:notesMasterIdLst>
+    <p:notesMasterId r:id="rId25"/>
+  </p:notesMasterIdLst>
   <p:sldIdLst>
     <p:sldId id="256" r:id="rId2"/>
     <p:sldId id="257" r:id="rId3"/>
@@ -149,11 +152,49 @@
 <pc:chgInfo xmlns:a="http://schemas.openxmlformats.org/drawingml/2006/main" xmlns:r="http://schemas.openxmlformats.org/officeDocument/2006/relationships" xmlns:ac="http://schemas.microsoft.com/office/drawing/2013/main/command" xmlns:pc="http://schemas.microsoft.com/office/powerpoint/2013/main/command">
   <pc:docChgLst>
     <pc:chgData name="Ettore Cantile" userId="2f5e44afd0b03182" providerId="LiveId" clId="{E1385F0F-24B1-4705-8EF7-8D82C33CA9CE}"/>
-    <pc:docChg chg="custSel addSld delSld modSld">
-      <pc:chgData name="Ettore Cantile" userId="2f5e44afd0b03182" providerId="LiveId" clId="{E1385F0F-24B1-4705-8EF7-8D82C33CA9CE}" dt="2026-09-24T16:05:47.995" v="75"/>
+    <pc:docChg chg="undo redo custSel addSld delSld modSld">
+      <pc:chgData name="Ettore Cantile" userId="2f5e44afd0b03182" providerId="LiveId" clId="{E1385F0F-24B1-4705-8EF7-8D82C33CA9CE}" dt="2026-09-25T14:25:17.961" v="311" actId="20577"/>
       <pc:docMkLst>
         <pc:docMk/>
       </pc:docMkLst>
+      <pc:sldChg chg="modSp mod">
+        <pc:chgData name="Ettore Cantile" userId="2f5e44afd0b03182" providerId="LiveId" clId="{E1385F0F-24B1-4705-8EF7-8D82C33CA9CE}" dt="2026-09-25T12:03:07.871" v="123" actId="20577"/>
+        <pc:sldMkLst>
+          <pc:docMk/>
+          <pc:sldMk cId="0" sldId="257"/>
+        </pc:sldMkLst>
+        <pc:spChg chg="mod">
+          <ac:chgData name="Ettore Cantile" userId="2f5e44afd0b03182" providerId="LiveId" clId="{E1385F0F-24B1-4705-8EF7-8D82C33CA9CE}" dt="2026-09-25T08:43:50.886" v="79" actId="20577"/>
+          <ac:spMkLst>
+            <pc:docMk/>
+            <pc:sldMk cId="0" sldId="257"/>
+            <ac:spMk id="7" creationId="{00000000-0000-0000-0000-000000000000}"/>
+          </ac:spMkLst>
+        </pc:spChg>
+        <pc:spChg chg="mod">
+          <ac:chgData name="Ettore Cantile" userId="2f5e44afd0b03182" providerId="LiveId" clId="{E1385F0F-24B1-4705-8EF7-8D82C33CA9CE}" dt="2026-09-25T12:03:07.871" v="123" actId="20577"/>
+          <ac:spMkLst>
+            <pc:docMk/>
+            <pc:sldMk cId="0" sldId="257"/>
+            <ac:spMk id="33" creationId="{00000000-0000-0000-0000-000000000000}"/>
+          </ac:spMkLst>
+        </pc:spChg>
+      </pc:sldChg>
+      <pc:sldChg chg="modSp mod">
+        <pc:chgData name="Ettore Cantile" userId="2f5e44afd0b03182" providerId="LiveId" clId="{E1385F0F-24B1-4705-8EF7-8D82C33CA9CE}" dt="2026-09-25T14:24:40.828" v="303" actId="207"/>
+        <pc:sldMkLst>
+          <pc:docMk/>
+          <pc:sldMk cId="0" sldId="258"/>
+        </pc:sldMkLst>
+        <pc:graphicFrameChg chg="modGraphic">
+          <ac:chgData name="Ettore Cantile" userId="2f5e44afd0b03182" providerId="LiveId" clId="{E1385F0F-24B1-4705-8EF7-8D82C33CA9CE}" dt="2026-09-25T14:24:40.828" v="303" actId="207"/>
+          <ac:graphicFrameMkLst>
+            <pc:docMk/>
+            <pc:sldMk cId="0" sldId="258"/>
+            <ac:graphicFrameMk id="8" creationId="{00000000-0000-0000-0000-000000000000}"/>
+          </ac:graphicFrameMkLst>
+        </pc:graphicFrameChg>
+      </pc:sldChg>
       <pc:sldChg chg="modSp mod">
         <pc:chgData name="Ettore Cantile" userId="2f5e44afd0b03182" providerId="LiveId" clId="{E1385F0F-24B1-4705-8EF7-8D82C33CA9CE}" dt="2026-09-24T16:05:13.005" v="54" actId="20577"/>
         <pc:sldMkLst>
@@ -170,7 +211,7 @@
         </pc:spChg>
       </pc:sldChg>
       <pc:sldChg chg="modSp mod">
-        <pc:chgData name="Ettore Cantile" userId="2f5e44afd0b03182" providerId="LiveId" clId="{E1385F0F-24B1-4705-8EF7-8D82C33CA9CE}" dt="2026-09-24T16:05:13.089" v="55" actId="20577"/>
+        <pc:chgData name="Ettore Cantile" userId="2f5e44afd0b03182" providerId="LiveId" clId="{E1385F0F-24B1-4705-8EF7-8D82C33CA9CE}" dt="2026-09-25T09:10:24.986" v="80" actId="20577"/>
         <pc:sldMkLst>
           <pc:docMk/>
           <pc:sldMk cId="0" sldId="261"/>
@@ -183,9 +224,17 @@
             <ac:spMk id="5" creationId="{00000000-0000-0000-0000-000000000000}"/>
           </ac:spMkLst>
         </pc:spChg>
+        <pc:spChg chg="mod">
+          <ac:chgData name="Ettore Cantile" userId="2f5e44afd0b03182" providerId="LiveId" clId="{E1385F0F-24B1-4705-8EF7-8D82C33CA9CE}" dt="2026-09-25T09:10:24.986" v="80" actId="20577"/>
+          <ac:spMkLst>
+            <pc:docMk/>
+            <pc:sldMk cId="0" sldId="261"/>
+            <ac:spMk id="6" creationId="{00000000-0000-0000-0000-000000000000}"/>
+          </ac:spMkLst>
+        </pc:spChg>
       </pc:sldChg>
       <pc:sldChg chg="modSp mod">
-        <pc:chgData name="Ettore Cantile" userId="2f5e44afd0b03182" providerId="LiveId" clId="{E1385F0F-24B1-4705-8EF7-8D82C33CA9CE}" dt="2026-09-24T16:05:13.136" v="56" actId="20577"/>
+        <pc:chgData name="Ettore Cantile" userId="2f5e44afd0b03182" providerId="LiveId" clId="{E1385F0F-24B1-4705-8EF7-8D82C33CA9CE}" dt="2026-09-25T09:10:36.050" v="83" actId="20577"/>
         <pc:sldMkLst>
           <pc:docMk/>
           <pc:sldMk cId="0" sldId="262"/>
@@ -198,6 +247,14 @@
             <ac:spMk id="5" creationId="{00000000-0000-0000-0000-000000000000}"/>
           </ac:spMkLst>
         </pc:spChg>
+        <pc:spChg chg="mod">
+          <ac:chgData name="Ettore Cantile" userId="2f5e44afd0b03182" providerId="LiveId" clId="{E1385F0F-24B1-4705-8EF7-8D82C33CA9CE}" dt="2026-09-25T09:10:36.050" v="83" actId="20577"/>
+          <ac:spMkLst>
+            <pc:docMk/>
+            <pc:sldMk cId="0" sldId="262"/>
+            <ac:spMk id="6" creationId="{00000000-0000-0000-0000-000000000000}"/>
+          </ac:spMkLst>
+        </pc:spChg>
       </pc:sldChg>
       <pc:sldChg chg="del">
         <pc:chgData name="Ettore Cantile" userId="2f5e44afd0b03182" providerId="LiveId" clId="{E1385F0F-24B1-4705-8EF7-8D82C33CA9CE}" dt="2026-09-24T16:05:12.626" v="52" actId="2696"/>
@@ -205,6 +262,51 @@
           <pc:docMk/>
           <pc:sldMk cId="0" sldId="263"/>
         </pc:sldMkLst>
+      </pc:sldChg>
+      <pc:sldChg chg="modSp mod">
+        <pc:chgData name="Ettore Cantile" userId="2f5e44afd0b03182" providerId="LiveId" clId="{E1385F0F-24B1-4705-8EF7-8D82C33CA9CE}" dt="2026-09-25T09:20:14.077" v="90" actId="113"/>
+        <pc:sldMkLst>
+          <pc:docMk/>
+          <pc:sldMk cId="0" sldId="264"/>
+        </pc:sldMkLst>
+        <pc:spChg chg="mod">
+          <ac:chgData name="Ettore Cantile" userId="2f5e44afd0b03182" providerId="LiveId" clId="{E1385F0F-24B1-4705-8EF7-8D82C33CA9CE}" dt="2026-09-25T09:20:14.077" v="90" actId="113"/>
+          <ac:spMkLst>
+            <pc:docMk/>
+            <pc:sldMk cId="0" sldId="264"/>
+            <ac:spMk id="9" creationId="{00000000-0000-0000-0000-000000000000}"/>
+          </ac:spMkLst>
+        </pc:spChg>
+      </pc:sldChg>
+      <pc:sldChg chg="mod">
+        <pc:chgData name="Ettore Cantile" userId="2f5e44afd0b03182" providerId="LiveId" clId="{E1385F0F-24B1-4705-8EF7-8D82C33CA9CE}" dt="2026-09-25T14:24:43.718" v="310" actId="27918"/>
+        <pc:sldMkLst>
+          <pc:docMk/>
+          <pc:sldMk cId="0" sldId="265"/>
+        </pc:sldMkLst>
+      </pc:sldChg>
+      <pc:sldChg chg="modSp mod">
+        <pc:chgData name="Ettore Cantile" userId="2f5e44afd0b03182" providerId="LiveId" clId="{E1385F0F-24B1-4705-8EF7-8D82C33CA9CE}" dt="2026-09-25T14:25:17.961" v="311" actId="20577"/>
+        <pc:sldMkLst>
+          <pc:docMk/>
+          <pc:sldMk cId="0" sldId="269"/>
+        </pc:sldMkLst>
+        <pc:spChg chg="mod">
+          <ac:chgData name="Ettore Cantile" userId="2f5e44afd0b03182" providerId="LiveId" clId="{E1385F0F-24B1-4705-8EF7-8D82C33CA9CE}" dt="2026-09-25T14:24:40.852" v="304" actId="20577"/>
+          <ac:spMkLst>
+            <pc:docMk/>
+            <pc:sldMk cId="0" sldId="269"/>
+            <ac:spMk id="8" creationId="{00000000-0000-0000-0000-000000000000}"/>
+          </ac:spMkLst>
+        </pc:spChg>
+        <pc:spChg chg="mod">
+          <ac:chgData name="Ettore Cantile" userId="2f5e44afd0b03182" providerId="LiveId" clId="{E1385F0F-24B1-4705-8EF7-8D82C33CA9CE}" dt="2026-09-25T14:25:17.961" v="311" actId="20577"/>
+          <ac:spMkLst>
+            <pc:docMk/>
+            <pc:sldMk cId="0" sldId="269"/>
+            <ac:spMk id="9" creationId="{00000000-0000-0000-0000-000000000000}"/>
+          </ac:spMkLst>
+        </pc:spChg>
       </pc:sldChg>
       <pc:sldChg chg="modSp mod">
         <pc:chgData name="Ettore Cantile" userId="2f5e44afd0b03182" providerId="LiveId" clId="{E1385F0F-24B1-4705-8EF7-8D82C33CA9CE}" dt="2026-09-24T15:41:16.588" v="3" actId="947"/>
@@ -3827,14 +3929,14 @@
               <c:strCache>
                 <c:ptCount val="1"/>
                 <c:pt idx="0">
-                  <c:v>P2</c:v>
+                  <c:v>P1 statica</c:v>
                 </c:pt>
               </c:strCache>
             </c:strRef>
           </c:tx>
           <c:spPr>
             <a:solidFill>
-              <a:srgbClr val="2E9C8F"/>
+              <a:srgbClr val="C8551E"/>
             </a:solidFill>
             <a:ln>
               <a:noFill/>
@@ -3842,9 +3944,10 @@
           </c:spPr>
           <c:invertIfNegative val="1"/>
           <c:cat>
-            <c:strRef>
+            <c:numRef>
               <c:f>Sheet1!$A$2:$A$7</c:f>
-              <c:strCache>
+              <c:numCache>
+                <c:formatCode>General</c:formatCode>
                 <c:ptCount val="6"/>
                 <c:pt idx="0">
                   <c:v>1</c:v>
@@ -3864,8 +3967,8 @@
                 <c:pt idx="5">
                   <c:v>6</c:v>
                 </c:pt>
-              </c:strCache>
-            </c:strRef>
+              </c:numCache>
+            </c:numRef>
           </c:cat>
           <c:val>
             <c:numRef>
@@ -3874,22 +3977,22 @@
                 <c:formatCode>General</c:formatCode>
                 <c:ptCount val="6"/>
                 <c:pt idx="0">
-                  <c:v>14668</c:v>
+                  <c:v>573</c:v>
                 </c:pt>
                 <c:pt idx="1">
-                  <c:v>14985</c:v>
+                  <c:v>618</c:v>
                 </c:pt>
                 <c:pt idx="2">
-                  <c:v>16663</c:v>
+                  <c:v>633</c:v>
                 </c:pt>
                 <c:pt idx="3">
-                  <c:v>16867</c:v>
+                  <c:v>719</c:v>
                 </c:pt>
                 <c:pt idx="4">
-                  <c:v>17828</c:v>
+                  <c:v>784</c:v>
                 </c:pt>
                 <c:pt idx="5">
-                  <c:v>18801</c:v>
+                  <c:v>853</c:v>
                 </c:pt>
               </c:numCache>
             </c:numRef>
@@ -3921,14 +4024,14 @@
               <c:strCache>
                 <c:ptCount val="1"/>
                 <c:pt idx="0">
-                  <c:v>P3</c:v>
+                  <c:v>P1.5</c:v>
                 </c:pt>
               </c:strCache>
             </c:strRef>
           </c:tx>
           <c:spPr>
             <a:solidFill>
-              <a:srgbClr val="1F5F8B"/>
+              <a:srgbClr val="F09A3E"/>
             </a:solidFill>
             <a:ln>
               <a:noFill/>
@@ -3936,9 +4039,10 @@
           </c:spPr>
           <c:invertIfNegative val="1"/>
           <c:cat>
-            <c:strRef>
+            <c:numRef>
               <c:f>Sheet1!$A$2:$A$7</c:f>
-              <c:strCache>
+              <c:numCache>
+                <c:formatCode>General</c:formatCode>
                 <c:ptCount val="6"/>
                 <c:pt idx="0">
                   <c:v>1</c:v>
@@ -3958,8 +4062,8 @@
                 <c:pt idx="5">
                   <c:v>6</c:v>
                 </c:pt>
-              </c:strCache>
-            </c:strRef>
+              </c:numCache>
+            </c:numRef>
           </c:cat>
           <c:val>
             <c:numRef>
@@ -3968,22 +4072,22 @@
                 <c:formatCode>General</c:formatCode>
                 <c:ptCount val="6"/>
                 <c:pt idx="0">
-                  <c:v>12349</c:v>
+                  <c:v>973</c:v>
                 </c:pt>
                 <c:pt idx="1">
-                  <c:v>12349</c:v>
+                  <c:v>1028</c:v>
                 </c:pt>
                 <c:pt idx="2">
-                  <c:v>12349</c:v>
+                  <c:v>1044</c:v>
                 </c:pt>
                 <c:pt idx="3">
-                  <c:v>12349</c:v>
+                  <c:v>1119</c:v>
                 </c:pt>
                 <c:pt idx="4">
-                  <c:v>12349</c:v>
+                  <c:v>1192</c:v>
                 </c:pt>
                 <c:pt idx="5">
-                  <c:v>12349</c:v>
+                  <c:v>1310</c:v>
                 </c:pt>
               </c:numCache>
             </c:numRef>
@@ -4003,6 +4107,166 @@
             </c:ext>
             <c:ext xmlns:c16="http://schemas.microsoft.com/office/drawing/2014/chart" uri="{C3380CC4-5D6E-409C-BE32-E72D297353CC}">
               <c16:uniqueId val="{00000001-3ADE-4412-B047-C29A6E8602E7}"/>
+            </c:ext>
+          </c:extLst>
+        </c:ser>
+        <c:ser>
+          <c:idx val="2"/>
+          <c:order val="2"/>
+          <c:tx>
+            <c:strRef>
+              <c:f>Sheet1!$D$1</c:f>
+              <c:strCache>
+                <c:ptCount val="1"/>
+                <c:pt idx="0">
+                  <c:v>P2</c:v>
+                </c:pt>
+              </c:strCache>
+            </c:strRef>
+          </c:tx>
+          <c:spPr>
+            <a:solidFill>
+              <a:srgbClr val="2E9C8F"/>
+            </a:solidFill>
+          </c:spPr>
+          <c:invertIfNegative val="0"/>
+          <c:cat>
+            <c:numRef>
+              <c:f>Sheet1!$A$2:$A$7</c:f>
+              <c:numCache>
+                <c:formatCode>General</c:formatCode>
+                <c:ptCount val="6"/>
+                <c:pt idx="0">
+                  <c:v>1</c:v>
+                </c:pt>
+                <c:pt idx="1">
+                  <c:v>2</c:v>
+                </c:pt>
+                <c:pt idx="2">
+                  <c:v>3</c:v>
+                </c:pt>
+                <c:pt idx="3">
+                  <c:v>4</c:v>
+                </c:pt>
+                <c:pt idx="4">
+                  <c:v>5</c:v>
+                </c:pt>
+                <c:pt idx="5">
+                  <c:v>6</c:v>
+                </c:pt>
+              </c:numCache>
+            </c:numRef>
+          </c:cat>
+          <c:val>
+            <c:numRef>
+              <c:f>Sheet1!$D$2:$D$7</c:f>
+              <c:numCache>
+                <c:formatCode>General</c:formatCode>
+                <c:ptCount val="6"/>
+                <c:pt idx="0">
+                  <c:v>14668</c:v>
+                </c:pt>
+                <c:pt idx="1">
+                  <c:v>14985</c:v>
+                </c:pt>
+                <c:pt idx="2">
+                  <c:v>16663</c:v>
+                </c:pt>
+                <c:pt idx="3">
+                  <c:v>16867</c:v>
+                </c:pt>
+                <c:pt idx="4">
+                  <c:v>17828</c:v>
+                </c:pt>
+                <c:pt idx="5">
+                  <c:v>18801</c:v>
+                </c:pt>
+              </c:numCache>
+            </c:numRef>
+          </c:val>
+          <c:extLst>
+            <c:ext xmlns:c16="http://schemas.microsoft.com/office/drawing/2014/chart" uri="{C3380CC4-5D6E-409C-BE32-E72D297353CC}">
+              <c16:uniqueId val="{00000000-A63F-4696-84CE-A75DF0F08176}"/>
+            </c:ext>
+          </c:extLst>
+        </c:ser>
+        <c:ser>
+          <c:idx val="3"/>
+          <c:order val="3"/>
+          <c:tx>
+            <c:strRef>
+              <c:f>Sheet1!$E$1</c:f>
+              <c:strCache>
+                <c:ptCount val="1"/>
+                <c:pt idx="0">
+                  <c:v>P3</c:v>
+                </c:pt>
+              </c:strCache>
+            </c:strRef>
+          </c:tx>
+          <c:spPr>
+            <a:solidFill>
+              <a:srgbClr val="1F5F8B"/>
+            </a:solidFill>
+          </c:spPr>
+          <c:invertIfNegative val="0"/>
+          <c:cat>
+            <c:numRef>
+              <c:f>Sheet1!$A$2:$A$7</c:f>
+              <c:numCache>
+                <c:formatCode>General</c:formatCode>
+                <c:ptCount val="6"/>
+                <c:pt idx="0">
+                  <c:v>1</c:v>
+                </c:pt>
+                <c:pt idx="1">
+                  <c:v>2</c:v>
+                </c:pt>
+                <c:pt idx="2">
+                  <c:v>3</c:v>
+                </c:pt>
+                <c:pt idx="3">
+                  <c:v>4</c:v>
+                </c:pt>
+                <c:pt idx="4">
+                  <c:v>5</c:v>
+                </c:pt>
+                <c:pt idx="5">
+                  <c:v>6</c:v>
+                </c:pt>
+              </c:numCache>
+            </c:numRef>
+          </c:cat>
+          <c:val>
+            <c:numRef>
+              <c:f>Sheet1!$E$2:$E$7</c:f>
+              <c:numCache>
+                <c:formatCode>General</c:formatCode>
+                <c:ptCount val="6"/>
+                <c:pt idx="0">
+                  <c:v>12349</c:v>
+                </c:pt>
+                <c:pt idx="1">
+                  <c:v>12349</c:v>
+                </c:pt>
+                <c:pt idx="2">
+                  <c:v>12349</c:v>
+                </c:pt>
+                <c:pt idx="3">
+                  <c:v>12349</c:v>
+                </c:pt>
+                <c:pt idx="4">
+                  <c:v>12349</c:v>
+                </c:pt>
+                <c:pt idx="5">
+                  <c:v>12349</c:v>
+                </c:pt>
+              </c:numCache>
+            </c:numRef>
+          </c:val>
+          <c:extLst>
+            <c:ext xmlns:c16="http://schemas.microsoft.com/office/drawing/2014/chart" uri="{C3380CC4-5D6E-409C-BE32-E72D297353CC}">
+              <c16:uniqueId val="{00000001-A63F-4696-84CE-A75DF0F08176}"/>
             </c:ext>
           </c:extLst>
         </c:ser>
@@ -4081,8 +4345,10 @@
       <c:valAx>
         <c:axId val="-2113994440"/>
         <c:scaling>
+          <c:logBase val="10"/>
           <c:orientation val="minMax"/>
-          <c:min val="0"/>
+          <c:max val="30000"/>
+          <c:min val="300"/>
         </c:scaling>
         <c:delete val="0"/>
         <c:axPos val="l"/>
@@ -4102,13 +4368,13 @@
               <a:lstStyle/>
               <a:p>
                 <a:r>
-                  <a:rPr lang="it-IT" sz="1100" b="0">
+                  <a:rPr lang="en-US" sz="1100" b="0">
                     <a:solidFill>
                       <a:srgbClr val="6B7C93"/>
                     </a:solidFill>
                     <a:latin typeface="Calibri"/>
                   </a:rPr>
-                  <a:t>istruzioni</a:t>
+                  <a:t>istruzioni (scala logaritmica)</a:t>
                 </a:r>
               </a:p>
             </c:rich>
@@ -6434,6 +6700,439 @@
 </c:chartSpace>
 </file>
 
+<file path=ppt/notesMasters/notesMaster1.xml><?xml version="1.0" encoding="utf-8"?>
+<p:notesMaster xmlns:a="http://schemas.openxmlformats.org/drawingml/2006/main" xmlns:r="http://schemas.openxmlformats.org/officeDocument/2006/relationships" xmlns:p="http://schemas.openxmlformats.org/presentationml/2006/main">
+  <p:cSld>
+    <p:bg>
+      <p:bgRef idx="1001">
+        <a:schemeClr val="bg1"/>
+      </p:bgRef>
+    </p:bg>
+    <p:spTree>
+      <p:nvGrpSpPr>
+        <p:cNvPr id="1" name=""/>
+        <p:cNvGrpSpPr/>
+        <p:nvPr/>
+      </p:nvGrpSpPr>
+      <p:grpSpPr>
+        <a:xfrm>
+          <a:off x="0" y="0"/>
+          <a:ext cx="0" cy="0"/>
+          <a:chOff x="0" y="0"/>
+          <a:chExt cx="0" cy="0"/>
+        </a:xfrm>
+      </p:grpSpPr>
+      <p:sp>
+        <p:nvSpPr>
+          <p:cNvPr id="2" name="Segnaposto intestazione 1"/>
+          <p:cNvSpPr>
+            <a:spLocks noGrp="1"/>
+          </p:cNvSpPr>
+          <p:nvPr>
+            <p:ph type="hdr" sz="quarter"/>
+          </p:nvPr>
+        </p:nvSpPr>
+        <p:spPr>
+          <a:xfrm>
+            <a:off x="0" y="0"/>
+            <a:ext cx="2971800" cy="458788"/>
+          </a:xfrm>
+          <a:prstGeom prst="rect">
+            <a:avLst/>
+          </a:prstGeom>
+        </p:spPr>
+        <p:txBody>
+          <a:bodyPr vert="horz" lIns="91440" tIns="45720" rIns="91440" bIns="45720" rtlCol="0"/>
+          <a:lstStyle>
+            <a:lvl1pPr algn="l">
+              <a:defRPr sz="1200"/>
+            </a:lvl1pPr>
+          </a:lstStyle>
+          <a:p>
+            <a:endParaRPr lang="it-IT"/>
+          </a:p>
+        </p:txBody>
+      </p:sp>
+      <p:sp>
+        <p:nvSpPr>
+          <p:cNvPr id="3" name="Segnaposto data 2"/>
+          <p:cNvSpPr>
+            <a:spLocks noGrp="1"/>
+          </p:cNvSpPr>
+          <p:nvPr>
+            <p:ph type="dt" idx="1"/>
+          </p:nvPr>
+        </p:nvSpPr>
+        <p:spPr>
+          <a:xfrm>
+            <a:off x="3884613" y="0"/>
+            <a:ext cx="2971800" cy="458788"/>
+          </a:xfrm>
+          <a:prstGeom prst="rect">
+            <a:avLst/>
+          </a:prstGeom>
+        </p:spPr>
+        <p:txBody>
+          <a:bodyPr vert="horz" lIns="91440" tIns="45720" rIns="91440" bIns="45720" rtlCol="0"/>
+          <a:lstStyle>
+            <a:lvl1pPr algn="r">
+              <a:defRPr sz="1200"/>
+            </a:lvl1pPr>
+          </a:lstStyle>
+          <a:p>
+            <a:fld id="{EC3879A1-F61F-48C8-BDB5-E7C8A8D88EAE}" type="datetimeFigureOut">
+              <a:rPr lang="it-IT" smtClean="0"/>
+              <a:t>25/09/2026</a:t>
+            </a:fld>
+            <a:endParaRPr lang="it-IT"/>
+          </a:p>
+        </p:txBody>
+      </p:sp>
+      <p:sp>
+        <p:nvSpPr>
+          <p:cNvPr id="4" name="Segnaposto immagine diapositiva 3"/>
+          <p:cNvSpPr>
+            <a:spLocks noGrp="1" noRot="1" noChangeAspect="1"/>
+          </p:cNvSpPr>
+          <p:nvPr>
+            <p:ph type="sldImg" idx="2"/>
+          </p:nvPr>
+        </p:nvSpPr>
+        <p:spPr>
+          <a:xfrm>
+            <a:off x="685800" y="1143000"/>
+            <a:ext cx="5486400" cy="3086100"/>
+          </a:xfrm>
+          <a:prstGeom prst="rect">
+            <a:avLst/>
+          </a:prstGeom>
+          <a:noFill/>
+          <a:ln w="12700">
+            <a:solidFill>
+              <a:prstClr val="black"/>
+            </a:solidFill>
+          </a:ln>
+        </p:spPr>
+        <p:txBody>
+          <a:bodyPr vert="horz" lIns="91440" tIns="45720" rIns="91440" bIns="45720" rtlCol="0" anchor="ctr"/>
+          <a:lstStyle/>
+          <a:p>
+            <a:endParaRPr lang="it-IT"/>
+          </a:p>
+        </p:txBody>
+      </p:sp>
+      <p:sp>
+        <p:nvSpPr>
+          <p:cNvPr id="5" name="Segnaposto note 4"/>
+          <p:cNvSpPr>
+            <a:spLocks noGrp="1"/>
+          </p:cNvSpPr>
+          <p:nvPr>
+            <p:ph type="body" sz="quarter" idx="3"/>
+          </p:nvPr>
+        </p:nvSpPr>
+        <p:spPr>
+          <a:xfrm>
+            <a:off x="685800" y="4400550"/>
+            <a:ext cx="5486400" cy="3600450"/>
+          </a:xfrm>
+          <a:prstGeom prst="rect">
+            <a:avLst/>
+          </a:prstGeom>
+        </p:spPr>
+        <p:txBody>
+          <a:bodyPr vert="horz" lIns="91440" tIns="45720" rIns="91440" bIns="45720" rtlCol="0"/>
+          <a:lstStyle/>
+          <a:p>
+            <a:pPr lvl="0"/>
+            <a:r>
+              <a:rPr lang="it-IT"/>
+              <a:t>Fare clic per modificare gli stili del testo dello schema</a:t>
+            </a:r>
+          </a:p>
+          <a:p>
+            <a:pPr lvl="1"/>
+            <a:r>
+              <a:rPr lang="it-IT"/>
+              <a:t>Secondo livello</a:t>
+            </a:r>
+          </a:p>
+          <a:p>
+            <a:pPr lvl="2"/>
+            <a:r>
+              <a:rPr lang="it-IT"/>
+              <a:t>Terzo livello</a:t>
+            </a:r>
+          </a:p>
+          <a:p>
+            <a:pPr lvl="3"/>
+            <a:r>
+              <a:rPr lang="it-IT"/>
+              <a:t>Quarto livello</a:t>
+            </a:r>
+          </a:p>
+          <a:p>
+            <a:pPr lvl="4"/>
+            <a:r>
+              <a:rPr lang="it-IT"/>
+              <a:t>Quinto livello</a:t>
+            </a:r>
+          </a:p>
+        </p:txBody>
+      </p:sp>
+      <p:sp>
+        <p:nvSpPr>
+          <p:cNvPr id="6" name="Segnaposto piè di pagina 5"/>
+          <p:cNvSpPr>
+            <a:spLocks noGrp="1"/>
+          </p:cNvSpPr>
+          <p:nvPr>
+            <p:ph type="ftr" sz="quarter" idx="4"/>
+          </p:nvPr>
+        </p:nvSpPr>
+        <p:spPr>
+          <a:xfrm>
+            <a:off x="0" y="8685213"/>
+            <a:ext cx="2971800" cy="458787"/>
+          </a:xfrm>
+          <a:prstGeom prst="rect">
+            <a:avLst/>
+          </a:prstGeom>
+        </p:spPr>
+        <p:txBody>
+          <a:bodyPr vert="horz" lIns="91440" tIns="45720" rIns="91440" bIns="45720" rtlCol="0" anchor="b"/>
+          <a:lstStyle>
+            <a:lvl1pPr algn="l">
+              <a:defRPr sz="1200"/>
+            </a:lvl1pPr>
+          </a:lstStyle>
+          <a:p>
+            <a:endParaRPr lang="it-IT"/>
+          </a:p>
+        </p:txBody>
+      </p:sp>
+      <p:sp>
+        <p:nvSpPr>
+          <p:cNvPr id="7" name="Segnaposto numero diapositiva 6"/>
+          <p:cNvSpPr>
+            <a:spLocks noGrp="1"/>
+          </p:cNvSpPr>
+          <p:nvPr>
+            <p:ph type="sldNum" sz="quarter" idx="5"/>
+          </p:nvPr>
+        </p:nvSpPr>
+        <p:spPr>
+          <a:xfrm>
+            <a:off x="3884613" y="8685213"/>
+            <a:ext cx="2971800" cy="458787"/>
+          </a:xfrm>
+          <a:prstGeom prst="rect">
+            <a:avLst/>
+          </a:prstGeom>
+        </p:spPr>
+        <p:txBody>
+          <a:bodyPr vert="horz" lIns="91440" tIns="45720" rIns="91440" bIns="45720" rtlCol="0" anchor="b"/>
+          <a:lstStyle>
+            <a:lvl1pPr algn="r">
+              <a:defRPr sz="1200"/>
+            </a:lvl1pPr>
+          </a:lstStyle>
+          <a:p>
+            <a:fld id="{1FE7E320-C24E-445B-B52B-8A723E9346E3}" type="slidenum">
+              <a:rPr lang="it-IT" smtClean="0"/>
+              <a:t>‹N›</a:t>
+            </a:fld>
+            <a:endParaRPr lang="it-IT"/>
+          </a:p>
+        </p:txBody>
+      </p:sp>
+    </p:spTree>
+    <p:extLst>
+      <p:ext uri="{BB962C8B-B14F-4D97-AF65-F5344CB8AC3E}">
+        <p14:creationId xmlns:p14="http://schemas.microsoft.com/office/powerpoint/2010/main" val="507035959"/>
+      </p:ext>
+    </p:extLst>
+  </p:cSld>
+  <p:clrMap bg1="lt1" tx1="dk1" bg2="lt2" tx2="dk2" accent1="accent1" accent2="accent2" accent3="accent3" accent4="accent4" accent5="accent5" accent6="accent6" hlink="hlink" folHlink="folHlink"/>
+  <p:notesStyle>
+    <a:lvl1pPr marL="0" algn="l" defTabSz="914400" rtl="0" eaLnBrk="1" latinLnBrk="0" hangingPunct="1">
+      <a:defRPr sz="1200" kern="1200">
+        <a:solidFill>
+          <a:schemeClr val="tx1"/>
+        </a:solidFill>
+        <a:latin typeface="+mn-lt"/>
+        <a:ea typeface="+mn-ea"/>
+        <a:cs typeface="+mn-cs"/>
+      </a:defRPr>
+    </a:lvl1pPr>
+    <a:lvl2pPr marL="457200" algn="l" defTabSz="914400" rtl="0" eaLnBrk="1" latinLnBrk="0" hangingPunct="1">
+      <a:defRPr sz="1200" kern="1200">
+        <a:solidFill>
+          <a:schemeClr val="tx1"/>
+        </a:solidFill>
+        <a:latin typeface="+mn-lt"/>
+        <a:ea typeface="+mn-ea"/>
+        <a:cs typeface="+mn-cs"/>
+      </a:defRPr>
+    </a:lvl2pPr>
+    <a:lvl3pPr marL="914400" algn="l" defTabSz="914400" rtl="0" eaLnBrk="1" latinLnBrk="0" hangingPunct="1">
+      <a:defRPr sz="1200" kern="1200">
+        <a:solidFill>
+          <a:schemeClr val="tx1"/>
+        </a:solidFill>
+        <a:latin typeface="+mn-lt"/>
+        <a:ea typeface="+mn-ea"/>
+        <a:cs typeface="+mn-cs"/>
+      </a:defRPr>
+    </a:lvl3pPr>
+    <a:lvl4pPr marL="1371600" algn="l" defTabSz="914400" rtl="0" eaLnBrk="1" latinLnBrk="0" hangingPunct="1">
+      <a:defRPr sz="1200" kern="1200">
+        <a:solidFill>
+          <a:schemeClr val="tx1"/>
+        </a:solidFill>
+        <a:latin typeface="+mn-lt"/>
+        <a:ea typeface="+mn-ea"/>
+        <a:cs typeface="+mn-cs"/>
+      </a:defRPr>
+    </a:lvl4pPr>
+    <a:lvl5pPr marL="1828800" algn="l" defTabSz="914400" rtl="0" eaLnBrk="1" latinLnBrk="0" hangingPunct="1">
+      <a:defRPr sz="1200" kern="1200">
+        <a:solidFill>
+          <a:schemeClr val="tx1"/>
+        </a:solidFill>
+        <a:latin typeface="+mn-lt"/>
+        <a:ea typeface="+mn-ea"/>
+        <a:cs typeface="+mn-cs"/>
+      </a:defRPr>
+    </a:lvl5pPr>
+    <a:lvl6pPr marL="2286000" algn="l" defTabSz="914400" rtl="0" eaLnBrk="1" latinLnBrk="0" hangingPunct="1">
+      <a:defRPr sz="1200" kern="1200">
+        <a:solidFill>
+          <a:schemeClr val="tx1"/>
+        </a:solidFill>
+        <a:latin typeface="+mn-lt"/>
+        <a:ea typeface="+mn-ea"/>
+        <a:cs typeface="+mn-cs"/>
+      </a:defRPr>
+    </a:lvl6pPr>
+    <a:lvl7pPr marL="2743200" algn="l" defTabSz="914400" rtl="0" eaLnBrk="1" latinLnBrk="0" hangingPunct="1">
+      <a:defRPr sz="1200" kern="1200">
+        <a:solidFill>
+          <a:schemeClr val="tx1"/>
+        </a:solidFill>
+        <a:latin typeface="+mn-lt"/>
+        <a:ea typeface="+mn-ea"/>
+        <a:cs typeface="+mn-cs"/>
+      </a:defRPr>
+    </a:lvl7pPr>
+    <a:lvl8pPr marL="3200400" algn="l" defTabSz="914400" rtl="0" eaLnBrk="1" latinLnBrk="0" hangingPunct="1">
+      <a:defRPr sz="1200" kern="1200">
+        <a:solidFill>
+          <a:schemeClr val="tx1"/>
+        </a:solidFill>
+        <a:latin typeface="+mn-lt"/>
+        <a:ea typeface="+mn-ea"/>
+        <a:cs typeface="+mn-cs"/>
+      </a:defRPr>
+    </a:lvl8pPr>
+    <a:lvl9pPr marL="3657600" algn="l" defTabSz="914400" rtl="0" eaLnBrk="1" latinLnBrk="0" hangingPunct="1">
+      <a:defRPr sz="1200" kern="1200">
+        <a:solidFill>
+          <a:schemeClr val="tx1"/>
+        </a:solidFill>
+        <a:latin typeface="+mn-lt"/>
+        <a:ea typeface="+mn-ea"/>
+        <a:cs typeface="+mn-cs"/>
+      </a:defRPr>
+    </a:lvl9pPr>
+  </p:notesStyle>
+</p:notesMaster>
+</file>
+
+<file path=ppt/notesSlides/notesSlide1.xml><?xml version="1.0" encoding="utf-8"?>
+<p:notes xmlns:a="http://schemas.openxmlformats.org/drawingml/2006/main" xmlns:r="http://schemas.openxmlformats.org/officeDocument/2006/relationships" xmlns:p="http://schemas.openxmlformats.org/presentationml/2006/main">
+  <p:cSld>
+    <p:spTree>
+      <p:nvGrpSpPr>
+        <p:cNvPr id="1" name=""/>
+        <p:cNvGrpSpPr/>
+        <p:nvPr/>
+      </p:nvGrpSpPr>
+      <p:grpSpPr>
+        <a:xfrm>
+          <a:off x="0" y="0"/>
+          <a:ext cx="0" cy="0"/>
+          <a:chOff x="0" y="0"/>
+          <a:chExt cx="0" cy="0"/>
+        </a:xfrm>
+      </p:grpSpPr>
+      <p:sp>
+        <p:nvSpPr>
+          <p:cNvPr id="2" name="Segnaposto immagine diapositiva 1"/>
+          <p:cNvSpPr>
+            <a:spLocks noGrp="1" noRot="1" noChangeAspect="1"/>
+          </p:cNvSpPr>
+          <p:nvPr>
+            <p:ph type="sldImg"/>
+          </p:nvPr>
+        </p:nvSpPr>
+        <p:spPr/>
+      </p:sp>
+      <p:sp>
+        <p:nvSpPr>
+          <p:cNvPr id="3" name="Segnaposto note 2"/>
+          <p:cNvSpPr>
+            <a:spLocks noGrp="1"/>
+          </p:cNvSpPr>
+          <p:nvPr>
+            <p:ph type="body" idx="1"/>
+          </p:nvPr>
+        </p:nvSpPr>
+        <p:spPr/>
+        <p:txBody>
+          <a:bodyPr/>
+          <a:lstStyle/>
+          <a:p>
+            <a:endParaRPr lang="it-IT" dirty="0"/>
+          </a:p>
+        </p:txBody>
+      </p:sp>
+      <p:sp>
+        <p:nvSpPr>
+          <p:cNvPr id="4" name="Segnaposto numero diapositiva 3"/>
+          <p:cNvSpPr>
+            <a:spLocks noGrp="1"/>
+          </p:cNvSpPr>
+          <p:nvPr>
+            <p:ph type="sldNum" sz="quarter" idx="5"/>
+          </p:nvPr>
+        </p:nvSpPr>
+        <p:spPr/>
+        <p:txBody>
+          <a:bodyPr/>
+          <a:lstStyle/>
+          <a:p>
+            <a:fld id="{1FE7E320-C24E-445B-B52B-8A723E9346E3}" type="slidenum">
+              <a:rPr lang="it-IT" smtClean="0"/>
+              <a:t>3</a:t>
+            </a:fld>
+            <a:endParaRPr lang="it-IT"/>
+          </a:p>
+        </p:txBody>
+      </p:sp>
+    </p:spTree>
+    <p:extLst>
+      <p:ext uri="{BB962C8B-B14F-4D97-AF65-F5344CB8AC3E}">
+        <p14:creationId xmlns:p14="http://schemas.microsoft.com/office/powerpoint/2010/main" val="2943669624"/>
+      </p:ext>
+    </p:extLst>
+  </p:cSld>
+  <p:clrMapOvr>
+    <a:masterClrMapping/>
+  </p:clrMapOvr>
+</p:notes>
+</file>
+
 <file path=ppt/slideLayouts/slideLayout1.xml><?xml version="1.0" encoding="utf-8"?>
 <p:sldLayout xmlns:a="http://schemas.openxmlformats.org/drawingml/2006/main" xmlns:r="http://schemas.openxmlformats.org/officeDocument/2006/relationships" xmlns:p="http://schemas.openxmlformats.org/presentationml/2006/main" type="title" preserve="1">
   <p:cSld name="Title Slide">
@@ -6613,7 +7312,7 @@
           <a:p>
             <a:fld id="{5BCAD085-E8A6-8845-BD4E-CB4CCA059FC4}" type="datetimeFigureOut">
               <a:rPr lang="en-US" smtClean="0"/>
-              <a:t>9/24/2026</a:t>
+              <a:t>9/25/2026</a:t>
             </a:fld>
             <a:endParaRPr lang="en-US"/>
           </a:p>
@@ -6781,7 +7480,7 @@
           <a:p>
             <a:fld id="{5BCAD085-E8A6-8845-BD4E-CB4CCA059FC4}" type="datetimeFigureOut">
               <a:rPr lang="en-US" smtClean="0"/>
-              <a:t>9/24/2026</a:t>
+              <a:t>9/25/2026</a:t>
             </a:fld>
             <a:endParaRPr lang="en-US"/>
           </a:p>
@@ -6959,7 +7658,7 @@
           <a:p>
             <a:fld id="{5BCAD085-E8A6-8845-BD4E-CB4CCA059FC4}" type="datetimeFigureOut">
               <a:rPr lang="en-US" smtClean="0"/>
-              <a:t>9/24/2026</a:t>
+              <a:t>9/25/2026</a:t>
             </a:fld>
             <a:endParaRPr lang="en-US"/>
           </a:p>
@@ -7127,7 +7826,7 @@
           <a:p>
             <a:fld id="{5BCAD085-E8A6-8845-BD4E-CB4CCA059FC4}" type="datetimeFigureOut">
               <a:rPr lang="en-US" smtClean="0"/>
-              <a:t>9/24/2026</a:t>
+              <a:t>9/25/2026</a:t>
             </a:fld>
             <a:endParaRPr lang="en-US"/>
           </a:p>
@@ -7372,7 +8071,7 @@
           <a:p>
             <a:fld id="{5BCAD085-E8A6-8845-BD4E-CB4CCA059FC4}" type="datetimeFigureOut">
               <a:rPr lang="en-US" smtClean="0"/>
-              <a:t>9/24/2026</a:t>
+              <a:t>9/25/2026</a:t>
             </a:fld>
             <a:endParaRPr lang="en-US"/>
           </a:p>
@@ -7657,7 +8356,7 @@
           <a:p>
             <a:fld id="{5BCAD085-E8A6-8845-BD4E-CB4CCA059FC4}" type="datetimeFigureOut">
               <a:rPr lang="en-US" smtClean="0"/>
-              <a:t>9/24/2026</a:t>
+              <a:t>9/25/2026</a:t>
             </a:fld>
             <a:endParaRPr lang="en-US"/>
           </a:p>
@@ -8076,7 +8775,7 @@
           <a:p>
             <a:fld id="{5BCAD085-E8A6-8845-BD4E-CB4CCA059FC4}" type="datetimeFigureOut">
               <a:rPr lang="en-US" smtClean="0"/>
-              <a:t>9/24/2026</a:t>
+              <a:t>9/25/2026</a:t>
             </a:fld>
             <a:endParaRPr lang="en-US"/>
           </a:p>
@@ -8193,7 +8892,7 @@
           <a:p>
             <a:fld id="{5BCAD085-E8A6-8845-BD4E-CB4CCA059FC4}" type="datetimeFigureOut">
               <a:rPr lang="en-US" smtClean="0"/>
-              <a:t>9/24/2026</a:t>
+              <a:t>9/25/2026</a:t>
             </a:fld>
             <a:endParaRPr lang="en-US"/>
           </a:p>
@@ -8288,7 +8987,7 @@
           <a:p>
             <a:fld id="{5BCAD085-E8A6-8845-BD4E-CB4CCA059FC4}" type="datetimeFigureOut">
               <a:rPr lang="en-US" smtClean="0"/>
-              <a:t>9/24/2026</a:t>
+              <a:t>9/25/2026</a:t>
             </a:fld>
             <a:endParaRPr lang="en-US"/>
           </a:p>
@@ -8563,7 +9262,7 @@
           <a:p>
             <a:fld id="{5BCAD085-E8A6-8845-BD4E-CB4CCA059FC4}" type="datetimeFigureOut">
               <a:rPr lang="en-US" smtClean="0"/>
-              <a:t>9/24/2026</a:t>
+              <a:t>9/25/2026</a:t>
             </a:fld>
             <a:endParaRPr lang="en-US"/>
           </a:p>
@@ -8815,7 +9514,7 @@
           <a:p>
             <a:fld id="{5BCAD085-E8A6-8845-BD4E-CB4CCA059FC4}" type="datetimeFigureOut">
               <a:rPr lang="en-US" smtClean="0"/>
-              <a:t>9/24/2026</a:t>
+              <a:t>9/25/2026</a:t>
             </a:fld>
             <a:endParaRPr lang="en-US"/>
           </a:p>
@@ -9026,7 +9725,7 @@
           <a:p>
             <a:fld id="{5BCAD085-E8A6-8845-BD4E-CB4CCA059FC4}" type="datetimeFigureOut">
               <a:rPr lang="en-US" smtClean="0"/>
-              <a:t>9/24/2026</a:t>
+              <a:t>9/25/2026</a:t>
             </a:fld>
             <a:endParaRPr lang="en-US"/>
           </a:p>
@@ -9954,7 +10653,13 @@
           <p:cNvGraphicFramePr>
             <a:graphicFrameLocks noGrp="1"/>
           </p:cNvGraphicFramePr>
-          <p:nvPr/>
+          <p:nvPr>
+            <p:extLst>
+              <p:ext uri="{D42A27DB-BD31-4B8C-83A1-F6EECF244321}">
+                <p14:modId xmlns:p14="http://schemas.microsoft.com/office/powerpoint/2010/main" val="3787685855"/>
+              </p:ext>
+            </p:extLst>
+          </p:nvPr>
         </p:nvGraphicFramePr>
         <p:xfrm>
           <a:off x="457200" y="1463040"/>
@@ -11756,49 +12461,310 @@
               </a:spcAft>
             </a:pPr>
             <a:r>
-              <a:rPr sz="1400" b="0" i="0">
+              <a:rPr sz="1400" b="0" i="0" dirty="0" err="1">
                 <a:solidFill>
                   <a:srgbClr val="222B36"/>
                 </a:solidFill>
                 <a:latin typeface="Calibri"/>
               </a:rPr>
-              <a:t>Contando le moltiplicazioni </a:t>
-            </a:r>
-            <a:r>
-              <a:rPr sz="1400" b="1" i="0">
+              <a:t>Contando</a:t>
+            </a:r>
+            <a:r>
+              <a:rPr sz="1400" b="0" i="0" dirty="0">
                 <a:solidFill>
                   <a:srgbClr val="222B36"/>
                 </a:solidFill>
                 <a:latin typeface="Calibri"/>
               </a:rPr>
-              <a:t>davvero eseguite</a:t>
-            </a:r>
-            <a:r>
-              <a:rPr sz="1400" b="0" i="0">
+              <a:t> le </a:t>
+            </a:r>
+            <a:r>
+              <a:rPr sz="1400" b="0" i="0" dirty="0" err="1">
                 <a:solidFill>
                   <a:srgbClr val="222B36"/>
                 </a:solidFill>
                 <a:latin typeface="Calibri"/>
               </a:rPr>
-              <a:t>, quattro esperimenti diversi cadono sulla stessa retta. Un ingresso «a una casella accesa» ne attiva </a:t>
-            </a:r>
-            <a:r>
-              <a:rPr sz="1400" b="1" i="0">
+              <a:t>moltiplicazioni</a:t>
+            </a:r>
+            <a:r>
+              <a:rPr sz="1400" b="0" i="0" dirty="0">
                 <a:solidFill>
                   <a:srgbClr val="222B36"/>
                 </a:solidFill>
                 <a:latin typeface="Calibri"/>
               </a:rPr>
+              <a:t> </a:t>
+            </a:r>
+            <a:r>
+              <a:rPr sz="1400" b="1" i="0" dirty="0" err="1">
+                <a:solidFill>
+                  <a:srgbClr val="222B36"/>
+                </a:solidFill>
+                <a:latin typeface="Calibri"/>
+              </a:rPr>
+              <a:t>davvero</a:t>
+            </a:r>
+            <a:r>
+              <a:rPr sz="1400" b="1" i="0" dirty="0">
+                <a:solidFill>
+                  <a:srgbClr val="222B36"/>
+                </a:solidFill>
+                <a:latin typeface="Calibri"/>
+              </a:rPr>
+              <a:t> </a:t>
+            </a:r>
+            <a:r>
+              <a:rPr sz="1400" b="1" i="0" dirty="0" err="1">
+                <a:solidFill>
+                  <a:srgbClr val="222B36"/>
+                </a:solidFill>
+                <a:latin typeface="Calibri"/>
+              </a:rPr>
+              <a:t>eseguite</a:t>
+            </a:r>
+            <a:r>
+              <a:rPr sz="1400" b="0" i="0" dirty="0">
+                <a:solidFill>
+                  <a:srgbClr val="222B36"/>
+                </a:solidFill>
+                <a:latin typeface="Calibri"/>
+              </a:rPr>
+              <a:t>, quattro </a:t>
+            </a:r>
+            <a:r>
+              <a:rPr sz="1400" b="0" i="0" dirty="0" err="1">
+                <a:solidFill>
+                  <a:srgbClr val="222B36"/>
+                </a:solidFill>
+                <a:latin typeface="Calibri"/>
+              </a:rPr>
+              <a:t>esperimenti</a:t>
+            </a:r>
+            <a:r>
+              <a:rPr sz="1400" b="0" i="0" dirty="0">
+                <a:solidFill>
+                  <a:srgbClr val="222B36"/>
+                </a:solidFill>
+                <a:latin typeface="Calibri"/>
+              </a:rPr>
+              <a:t> </a:t>
+            </a:r>
+            <a:r>
+              <a:rPr sz="1400" b="0" i="0" dirty="0" err="1">
+                <a:solidFill>
+                  <a:srgbClr val="222B36"/>
+                </a:solidFill>
+                <a:latin typeface="Calibri"/>
+              </a:rPr>
+              <a:t>diversi</a:t>
+            </a:r>
+            <a:r>
+              <a:rPr sz="1400" b="0" i="0" dirty="0">
+                <a:solidFill>
+                  <a:srgbClr val="222B36"/>
+                </a:solidFill>
+                <a:latin typeface="Calibri"/>
+              </a:rPr>
+              <a:t> </a:t>
+            </a:r>
+            <a:r>
+              <a:rPr sz="1400" b="0" i="0" dirty="0" err="1">
+                <a:solidFill>
+                  <a:srgbClr val="222B36"/>
+                </a:solidFill>
+                <a:latin typeface="Calibri"/>
+              </a:rPr>
+              <a:t>cadono</a:t>
+            </a:r>
+            <a:r>
+              <a:rPr sz="1400" b="0" i="0" dirty="0">
+                <a:solidFill>
+                  <a:srgbClr val="222B36"/>
+                </a:solidFill>
+                <a:latin typeface="Calibri"/>
+              </a:rPr>
+              <a:t> </a:t>
+            </a:r>
+            <a:r>
+              <a:rPr sz="1400" b="0" i="0" dirty="0" err="1">
+                <a:solidFill>
+                  <a:srgbClr val="222B36"/>
+                </a:solidFill>
+                <a:latin typeface="Calibri"/>
+              </a:rPr>
+              <a:t>sulla</a:t>
+            </a:r>
+            <a:r>
+              <a:rPr sz="1400" b="0" i="0" dirty="0">
+                <a:solidFill>
+                  <a:srgbClr val="222B36"/>
+                </a:solidFill>
+                <a:latin typeface="Calibri"/>
+              </a:rPr>
+              <a:t> </a:t>
+            </a:r>
+            <a:r>
+              <a:rPr sz="1400" b="0" i="0" dirty="0" err="1">
+                <a:solidFill>
+                  <a:srgbClr val="222B36"/>
+                </a:solidFill>
+                <a:latin typeface="Calibri"/>
+              </a:rPr>
+              <a:t>stessa</a:t>
+            </a:r>
+            <a:r>
+              <a:rPr sz="1400" b="0" i="0" dirty="0">
+                <a:solidFill>
+                  <a:srgbClr val="222B36"/>
+                </a:solidFill>
+                <a:latin typeface="Calibri"/>
+              </a:rPr>
+              <a:t> </a:t>
+            </a:r>
+            <a:r>
+              <a:rPr sz="1400" b="0" i="0" dirty="0" err="1">
+                <a:solidFill>
+                  <a:srgbClr val="222B36"/>
+                </a:solidFill>
+                <a:latin typeface="Calibri"/>
+              </a:rPr>
+              <a:t>retta</a:t>
+            </a:r>
+            <a:r>
+              <a:rPr sz="1400" b="0" i="0" dirty="0">
+                <a:solidFill>
+                  <a:srgbClr val="222B36"/>
+                </a:solidFill>
+                <a:latin typeface="Calibri"/>
+              </a:rPr>
+              <a:t>. Un </a:t>
+            </a:r>
+            <a:r>
+              <a:rPr sz="1400" b="0" i="0" dirty="0" err="1">
+                <a:solidFill>
+                  <a:srgbClr val="222B36"/>
+                </a:solidFill>
+                <a:latin typeface="Calibri"/>
+              </a:rPr>
+              <a:t>ingresso</a:t>
+            </a:r>
+            <a:r>
+              <a:rPr sz="1400" b="0" i="0" dirty="0">
+                <a:solidFill>
+                  <a:srgbClr val="222B36"/>
+                </a:solidFill>
+                <a:latin typeface="Calibri"/>
+              </a:rPr>
+              <a:t> «a </a:t>
+            </a:r>
+            <a:r>
+              <a:rPr sz="1400" b="0" i="0" dirty="0" err="1">
+                <a:solidFill>
+                  <a:srgbClr val="222B36"/>
+                </a:solidFill>
+                <a:latin typeface="Calibri"/>
+              </a:rPr>
               <a:t>una</a:t>
             </a:r>
             <a:r>
-              <a:rPr sz="1400" b="0" i="0">
+              <a:rPr sz="1400" b="0" i="0" dirty="0">
                 <a:solidFill>
                   <a:srgbClr val="222B36"/>
                 </a:solidFill>
                 <a:latin typeface="Calibri"/>
               </a:rPr>
-              <a:t> colonna sola.</a:t>
+              <a:t> </a:t>
+            </a:r>
+            <a:r>
+              <a:rPr sz="1400" b="0" i="0" dirty="0" err="1">
+                <a:solidFill>
+                  <a:srgbClr val="222B36"/>
+                </a:solidFill>
+                <a:latin typeface="Calibri"/>
+              </a:rPr>
+              <a:t>casella</a:t>
+            </a:r>
+            <a:r>
+              <a:rPr sz="1400" b="0" i="0" dirty="0">
+                <a:solidFill>
+                  <a:srgbClr val="222B36"/>
+                </a:solidFill>
+                <a:latin typeface="Calibri"/>
+              </a:rPr>
+              <a:t> </a:t>
+            </a:r>
+            <a:r>
+              <a:rPr sz="1400" b="0" i="0" dirty="0" err="1">
+                <a:solidFill>
+                  <a:srgbClr val="222B36"/>
+                </a:solidFill>
+                <a:latin typeface="Calibri"/>
+              </a:rPr>
+              <a:t>accesa</a:t>
+            </a:r>
+            <a:r>
+              <a:rPr sz="1400" b="0" i="0" dirty="0">
+                <a:solidFill>
+                  <a:srgbClr val="222B36"/>
+                </a:solidFill>
+                <a:latin typeface="Calibri"/>
+              </a:rPr>
+              <a:t>» ne </a:t>
+            </a:r>
+            <a:r>
+              <a:rPr sz="1400" b="0" i="0" dirty="0" err="1">
+                <a:solidFill>
+                  <a:srgbClr val="222B36"/>
+                </a:solidFill>
+                <a:latin typeface="Calibri"/>
+              </a:rPr>
+              <a:t>attiva</a:t>
+            </a:r>
+            <a:r>
+              <a:rPr sz="1400" b="0" i="0" dirty="0">
+                <a:solidFill>
+                  <a:srgbClr val="222B36"/>
+                </a:solidFill>
+                <a:latin typeface="Calibri"/>
+              </a:rPr>
+              <a:t> </a:t>
+            </a:r>
+            <a:r>
+              <a:rPr sz="1400" b="1" i="0" dirty="0" err="1">
+                <a:solidFill>
+                  <a:srgbClr val="222B36"/>
+                </a:solidFill>
+                <a:latin typeface="Calibri"/>
+              </a:rPr>
+              <a:t>una</a:t>
+            </a:r>
+            <a:r>
+              <a:rPr sz="1400" b="0" i="0" dirty="0">
+                <a:solidFill>
+                  <a:srgbClr val="222B36"/>
+                </a:solidFill>
+                <a:latin typeface="Calibri"/>
+              </a:rPr>
+              <a:t> </a:t>
+            </a:r>
+            <a:r>
+              <a:rPr sz="1400" b="0" i="0" dirty="0" err="1">
+                <a:solidFill>
+                  <a:srgbClr val="222B36"/>
+                </a:solidFill>
+                <a:latin typeface="Calibri"/>
+              </a:rPr>
+              <a:t>colonna</a:t>
+            </a:r>
+            <a:r>
+              <a:rPr sz="1400" b="0" i="0" dirty="0">
+                <a:solidFill>
+                  <a:srgbClr val="222B36"/>
+                </a:solidFill>
+                <a:latin typeface="Calibri"/>
+              </a:rPr>
+              <a:t> sola.</a:t>
             </a:r>
           </a:p>
         </p:txBody>
@@ -13808,7 +14774,7 @@
         <p:spPr>
           <a:xfrm>
             <a:off x="6675120" y="1600200"/>
-            <a:ext cx="5029200" cy="914400"/>
+            <a:ext cx="5029200" cy="1061381"/>
           </a:xfrm>
           <a:prstGeom prst="rect">
             <a:avLst/>
@@ -13830,14 +14796,20 @@
               </a:spcAft>
             </a:pPr>
             <a:r>
-              <a:rPr sz="6600" b="1" i="0">
+              <a:rPr lang="it-IT" sz="6600" b="1" i="0">
                 <a:solidFill>
                   <a:srgbClr val="2E9C6E"/>
                 </a:solidFill>
                 <a:latin typeface="Calibri"/>
               </a:rPr>
-              <a:t>2 400</a:t>
-            </a:r>
+              <a:t>100 %</a:t>
+            </a:r>
+            <a:endParaRPr sz="6600" b="1" i="0">
+              <a:solidFill>
+                <a:srgbClr val="2E9C6E"/>
+              </a:solidFill>
+              <a:latin typeface="Calibri"/>
+            </a:endParaRPr>
           </a:p>
         </p:txBody>
       </p:sp>
@@ -13850,7 +14822,7 @@
         <p:spPr>
           <a:xfrm>
             <a:off x="6675120" y="2606040"/>
-            <a:ext cx="5029200" cy="914400"/>
+            <a:ext cx="5029200" cy="848950"/>
           </a:xfrm>
           <a:prstGeom prst="rect">
             <a:avLst/>
@@ -13872,14 +14844,20 @@
               </a:spcAft>
             </a:pPr>
             <a:r>
-              <a:rPr sz="1700" b="0" i="0">
+              <a:rPr lang="it-IT" sz="1700" b="0" i="0">
                 <a:solidFill>
                   <a:srgbClr val="222B36"/>
                 </a:solidFill>
                 <a:latin typeface="Calibri"/>
               </a:rPr>
-              <a:t>decisioni identiche fra il riferimento in Python e il programma nel kernel, su tutti e otto i modelli.</a:t>
-            </a:r>
+              <a:t>delle decisioni identiche fra il riferimento in Python e il programma nel kernel, su tutti e otto i modelli (2 400 su 2 400).</a:t>
+            </a:r>
+            <a:endParaRPr sz="1700" b="0" i="0">
+              <a:solidFill>
+                <a:srgbClr val="222B36"/>
+              </a:solidFill>
+              <a:latin typeface="Calibri"/>
+            </a:endParaRPr>
           </a:p>
         </p:txBody>
       </p:sp>
@@ -20924,7 +21902,7 @@
               </a:spcAft>
             </a:pPr>
             <a:r>
-              <a:rPr sz="1600" b="1" i="0">
+              <a:rPr sz="1600" b="1" i="0" dirty="0" err="1">
                 <a:solidFill>
                   <a:srgbClr val="222B36"/>
                 </a:solidFill>
@@ -20932,6 +21910,12 @@
               </a:rPr>
               <a:t>assestamento</a:t>
             </a:r>
+            <a:endParaRPr sz="1600" b="1" i="0" dirty="0">
+              <a:solidFill>
+                <a:srgbClr val="222B36"/>
+              </a:solidFill>
+              <a:latin typeface="Calibri"/>
+            </a:endParaRPr>
           </a:p>
         </p:txBody>
       </p:sp>
@@ -22712,14 +23696,155 @@
               </a:spcAft>
             </a:pPr>
             <a:r>
-              <a:rPr sz="1100" b="0" i="1">
+              <a:rPr sz="1100" b="0" i="1" dirty="0">
                 <a:solidFill>
                   <a:srgbClr val="6B7C93"/>
                 </a:solidFill>
                 <a:latin typeface="Calibri"/>
               </a:rPr>
-              <a:t>Il kernel accetta il programma solo dopo averlo verificato: niente cicli illimitati, niente memoria arbitraria</a:t>
-            </a:r>
+              <a:t>Il kernel </a:t>
+            </a:r>
+            <a:r>
+              <a:rPr sz="1100" b="0" i="1" dirty="0" err="1">
+                <a:solidFill>
+                  <a:srgbClr val="6B7C93"/>
+                </a:solidFill>
+                <a:latin typeface="Calibri"/>
+              </a:rPr>
+              <a:t>accetta</a:t>
+            </a:r>
+            <a:r>
+              <a:rPr sz="1100" b="0" i="1" dirty="0">
+                <a:solidFill>
+                  <a:srgbClr val="6B7C93"/>
+                </a:solidFill>
+                <a:latin typeface="Calibri"/>
+              </a:rPr>
+              <a:t> il </a:t>
+            </a:r>
+            <a:r>
+              <a:rPr sz="1100" b="0" i="1" dirty="0" err="1">
+                <a:solidFill>
+                  <a:srgbClr val="6B7C93"/>
+                </a:solidFill>
+                <a:latin typeface="Calibri"/>
+              </a:rPr>
+              <a:t>programma</a:t>
+            </a:r>
+            <a:r>
+              <a:rPr sz="1100" b="0" i="1" dirty="0">
+                <a:solidFill>
+                  <a:srgbClr val="6B7C93"/>
+                </a:solidFill>
+                <a:latin typeface="Calibri"/>
+              </a:rPr>
+              <a:t> solo dopo </a:t>
+            </a:r>
+            <a:r>
+              <a:rPr sz="1100" b="0" i="1" dirty="0" err="1">
+                <a:solidFill>
+                  <a:srgbClr val="6B7C93"/>
+                </a:solidFill>
+                <a:latin typeface="Calibri"/>
+              </a:rPr>
+              <a:t>averlo</a:t>
+            </a:r>
+            <a:r>
+              <a:rPr sz="1100" b="0" i="1" dirty="0">
+                <a:solidFill>
+                  <a:srgbClr val="6B7C93"/>
+                </a:solidFill>
+                <a:latin typeface="Calibri"/>
+              </a:rPr>
+              <a:t> </a:t>
+            </a:r>
+            <a:r>
+              <a:rPr sz="1100" b="0" i="1" dirty="0" err="1">
+                <a:solidFill>
+                  <a:srgbClr val="6B7C93"/>
+                </a:solidFill>
+                <a:latin typeface="Calibri"/>
+              </a:rPr>
+              <a:t>verificato</a:t>
+            </a:r>
+            <a:r>
+              <a:rPr sz="1100" b="0" i="1" dirty="0">
+                <a:solidFill>
+                  <a:srgbClr val="6B7C93"/>
+                </a:solidFill>
+                <a:latin typeface="Calibri"/>
+              </a:rPr>
+              <a:t>: niente </a:t>
+            </a:r>
+            <a:r>
+              <a:rPr sz="1100" b="0" i="1" dirty="0" err="1">
+                <a:solidFill>
+                  <a:srgbClr val="6B7C93"/>
+                </a:solidFill>
+                <a:latin typeface="Calibri"/>
+              </a:rPr>
+              <a:t>cicli</a:t>
+            </a:r>
+            <a:r>
+              <a:rPr sz="1100" b="0" i="1" dirty="0">
+                <a:solidFill>
+                  <a:srgbClr val="6B7C93"/>
+                </a:solidFill>
+                <a:latin typeface="Calibri"/>
+              </a:rPr>
+              <a:t> </a:t>
+            </a:r>
+            <a:r>
+              <a:rPr sz="1100" b="0" i="1" dirty="0" err="1">
+                <a:solidFill>
+                  <a:srgbClr val="6B7C93"/>
+                </a:solidFill>
+                <a:latin typeface="Calibri"/>
+              </a:rPr>
+              <a:t>illimitati</a:t>
+            </a:r>
+            <a:r>
+              <a:rPr sz="1100" b="0" i="1" dirty="0">
+                <a:solidFill>
+                  <a:srgbClr val="6B7C93"/>
+                </a:solidFill>
+                <a:latin typeface="Calibri"/>
+              </a:rPr>
+              <a:t>, niente </a:t>
+            </a:r>
+            <a:r>
+              <a:rPr sz="1100" b="0" i="1" dirty="0" err="1">
+                <a:solidFill>
+                  <a:srgbClr val="6B7C93"/>
+                </a:solidFill>
+                <a:latin typeface="Calibri"/>
+              </a:rPr>
+              <a:t>memoria</a:t>
+            </a:r>
+            <a:r>
+              <a:rPr sz="1100" b="0" i="1" dirty="0">
+                <a:solidFill>
+                  <a:srgbClr val="6B7C93"/>
+                </a:solidFill>
+                <a:latin typeface="Calibri"/>
+              </a:rPr>
+              <a:t> </a:t>
+            </a:r>
+            <a:r>
+              <a:rPr sz="1100" b="0" i="1" dirty="0" err="1">
+                <a:solidFill>
+                  <a:srgbClr val="6B7C93"/>
+                </a:solidFill>
+                <a:latin typeface="Calibri"/>
+              </a:rPr>
+              <a:t>arbitraria</a:t>
+            </a:r>
+            <a:endParaRPr sz="1100" b="0" i="1" dirty="0">
+              <a:solidFill>
+                <a:srgbClr val="6B7C93"/>
+              </a:solidFill>
+              <a:latin typeface="Calibri"/>
+            </a:endParaRPr>
           </a:p>
         </p:txBody>
       </p:sp>
@@ -22732,7 +23857,7 @@
         <p:spPr>
           <a:xfrm>
             <a:off x="548640" y="1508760"/>
-            <a:ext cx="10972800" cy="822960"/>
+            <a:ext cx="10972800" cy="594137"/>
           </a:xfrm>
           <a:prstGeom prst="rect">
             <a:avLst/>
@@ -22754,7 +23879,7 @@
               </a:spcAft>
             </a:pPr>
             <a:r>
-              <a:rPr sz="1800" b="1" i="0">
+              <a:rPr sz="1800" b="1" i="0" dirty="0">
                 <a:solidFill>
                   <a:srgbClr val="222B36"/>
                 </a:solidFill>
@@ -22763,31 +23888,247 @@
               <a:t>XDP</a:t>
             </a:r>
             <a:r>
-              <a:rPr sz="1800" b="0" i="0">
+              <a:rPr sz="1800" b="0" i="0" dirty="0">
                 <a:solidFill>
                   <a:srgbClr val="222B36"/>
                 </a:solidFill>
                 <a:latin typeface="Calibri"/>
               </a:rPr>
-              <a:t> è il primo punto in cui il kernel vede un pacchetto: prima dello stack di rete, prima di qualunque allocazione. Lì eseguiamo una piccola rete neurale (</a:t>
-            </a:r>
-            <a:r>
-              <a:rPr sz="1800" b="1" i="0">
+              <a:t> è il primo punto in cui il kernel </a:t>
+            </a:r>
+            <a:r>
+              <a:rPr sz="1800" b="0" i="0" dirty="0" err="1">
                 <a:solidFill>
                   <a:srgbClr val="222B36"/>
                 </a:solidFill>
                 <a:latin typeface="Calibri"/>
               </a:rPr>
-              <a:t>319 pesi</a:t>
-            </a:r>
-            <a:r>
-              <a:rPr sz="1800" b="0" i="0">
+              <a:t>vede</a:t>
+            </a:r>
+            <a:r>
+              <a:rPr sz="1800" b="0" i="0" dirty="0">
                 <a:solidFill>
                   <a:srgbClr val="222B36"/>
                 </a:solidFill>
                 <a:latin typeface="Calibri"/>
               </a:rPr>
-              <a:t>), e la decisione nasce in quel punto.</a:t>
+              <a:t> un </a:t>
+            </a:r>
+            <a:r>
+              <a:rPr sz="1800" b="0" i="0" dirty="0" err="1">
+                <a:solidFill>
+                  <a:srgbClr val="222B36"/>
+                </a:solidFill>
+                <a:latin typeface="Calibri"/>
+              </a:rPr>
+              <a:t>pacchetto</a:t>
+            </a:r>
+            <a:r>
+              <a:rPr sz="1800" b="0" i="0" dirty="0">
+                <a:solidFill>
+                  <a:srgbClr val="222B36"/>
+                </a:solidFill>
+                <a:latin typeface="Calibri"/>
+              </a:rPr>
+              <a:t>: prima </a:t>
+            </a:r>
+            <a:r>
+              <a:rPr sz="1800" b="0" i="0" dirty="0" err="1">
+                <a:solidFill>
+                  <a:srgbClr val="222B36"/>
+                </a:solidFill>
+                <a:latin typeface="Calibri"/>
+              </a:rPr>
+              <a:t>dello</a:t>
+            </a:r>
+            <a:r>
+              <a:rPr sz="1800" b="0" i="0" dirty="0">
+                <a:solidFill>
+                  <a:srgbClr val="222B36"/>
+                </a:solidFill>
+                <a:latin typeface="Calibri"/>
+              </a:rPr>
+              <a:t> stack di rete, prima di </a:t>
+            </a:r>
+            <a:r>
+              <a:rPr sz="1800" b="0" i="0" dirty="0" err="1">
+                <a:solidFill>
+                  <a:srgbClr val="222B36"/>
+                </a:solidFill>
+                <a:latin typeface="Calibri"/>
+              </a:rPr>
+              <a:t>qualunque</a:t>
+            </a:r>
+            <a:r>
+              <a:rPr sz="1800" b="0" i="0" dirty="0">
+                <a:solidFill>
+                  <a:srgbClr val="222B36"/>
+                </a:solidFill>
+                <a:latin typeface="Calibri"/>
+              </a:rPr>
+              <a:t> </a:t>
+            </a:r>
+            <a:r>
+              <a:rPr sz="1800" b="0" i="0" dirty="0" err="1">
+                <a:solidFill>
+                  <a:srgbClr val="222B36"/>
+                </a:solidFill>
+                <a:latin typeface="Calibri"/>
+              </a:rPr>
+              <a:t>allocazione</a:t>
+            </a:r>
+            <a:r>
+              <a:rPr sz="1800" b="0" i="0" dirty="0">
+                <a:solidFill>
+                  <a:srgbClr val="222B36"/>
+                </a:solidFill>
+                <a:latin typeface="Calibri"/>
+              </a:rPr>
+              <a:t>. </a:t>
+            </a:r>
+            <a:r>
+              <a:rPr sz="1800" b="0" i="0" dirty="0" err="1">
+                <a:solidFill>
+                  <a:srgbClr val="222B36"/>
+                </a:solidFill>
+                <a:latin typeface="Calibri"/>
+              </a:rPr>
+              <a:t>Lì</a:t>
+            </a:r>
+            <a:r>
+              <a:rPr sz="1800" b="0" i="0" dirty="0">
+                <a:solidFill>
+                  <a:srgbClr val="222B36"/>
+                </a:solidFill>
+                <a:latin typeface="Calibri"/>
+              </a:rPr>
+              <a:t> </a:t>
+            </a:r>
+            <a:r>
+              <a:rPr sz="1800" b="0" i="0" dirty="0" err="1">
+                <a:solidFill>
+                  <a:srgbClr val="222B36"/>
+                </a:solidFill>
+                <a:latin typeface="Calibri"/>
+              </a:rPr>
+              <a:t>eseguiamo</a:t>
+            </a:r>
+            <a:r>
+              <a:rPr sz="1800" b="0" i="0" dirty="0">
+                <a:solidFill>
+                  <a:srgbClr val="222B36"/>
+                </a:solidFill>
+                <a:latin typeface="Calibri"/>
+              </a:rPr>
+              <a:t> </a:t>
+            </a:r>
+            <a:r>
+              <a:rPr sz="1800" b="0" i="0" dirty="0" err="1">
+                <a:solidFill>
+                  <a:srgbClr val="222B36"/>
+                </a:solidFill>
+                <a:latin typeface="Calibri"/>
+              </a:rPr>
+              <a:t>una</a:t>
+            </a:r>
+            <a:r>
+              <a:rPr sz="1800" b="0" i="0" dirty="0">
+                <a:solidFill>
+                  <a:srgbClr val="222B36"/>
+                </a:solidFill>
+                <a:latin typeface="Calibri"/>
+              </a:rPr>
+              <a:t> </a:t>
+            </a:r>
+            <a:r>
+              <a:rPr sz="1800" b="0" i="0" dirty="0" err="1">
+                <a:solidFill>
+                  <a:srgbClr val="222B36"/>
+                </a:solidFill>
+                <a:latin typeface="Calibri"/>
+              </a:rPr>
+              <a:t>piccola</a:t>
+            </a:r>
+            <a:r>
+              <a:rPr sz="1800" b="0" i="0" dirty="0">
+                <a:solidFill>
+                  <a:srgbClr val="222B36"/>
+                </a:solidFill>
+                <a:latin typeface="Calibri"/>
+              </a:rPr>
+              <a:t> rete neural</a:t>
+            </a:r>
+            <a:r>
+              <a:rPr lang="it-IT" sz="1800" b="0" i="0" dirty="0">
+                <a:solidFill>
+                  <a:srgbClr val="222B36"/>
+                </a:solidFill>
+                <a:latin typeface="Calibri"/>
+              </a:rPr>
+              <a:t>e</a:t>
+            </a:r>
+            <a:r>
+              <a:rPr sz="1800" b="0" i="0" dirty="0">
+                <a:solidFill>
+                  <a:srgbClr val="222B36"/>
+                </a:solidFill>
+                <a:latin typeface="Calibri"/>
+              </a:rPr>
+              <a:t>, e la </a:t>
+            </a:r>
+            <a:r>
+              <a:rPr sz="1800" b="0" i="0" dirty="0" err="1">
+                <a:solidFill>
+                  <a:srgbClr val="222B36"/>
+                </a:solidFill>
+                <a:latin typeface="Calibri"/>
+              </a:rPr>
+              <a:t>decisione</a:t>
+            </a:r>
+            <a:r>
+              <a:rPr sz="1800" b="0" i="0" dirty="0">
+                <a:solidFill>
+                  <a:srgbClr val="222B36"/>
+                </a:solidFill>
+                <a:latin typeface="Calibri"/>
+              </a:rPr>
+              <a:t> </a:t>
+            </a:r>
+            <a:r>
+              <a:rPr sz="1800" b="0" i="0" dirty="0" err="1">
+                <a:solidFill>
+                  <a:srgbClr val="222B36"/>
+                </a:solidFill>
+                <a:latin typeface="Calibri"/>
+              </a:rPr>
+              <a:t>nasce</a:t>
+            </a:r>
+            <a:r>
+              <a:rPr sz="1800" b="0" i="0" dirty="0">
+                <a:solidFill>
+                  <a:srgbClr val="222B36"/>
+                </a:solidFill>
+                <a:latin typeface="Calibri"/>
+              </a:rPr>
+              <a:t> in </a:t>
+            </a:r>
+            <a:r>
+              <a:rPr sz="1800" b="0" i="0" dirty="0" err="1">
+                <a:solidFill>
+                  <a:srgbClr val="222B36"/>
+                </a:solidFill>
+                <a:latin typeface="Calibri"/>
+              </a:rPr>
+              <a:t>quel</a:t>
+            </a:r>
+            <a:r>
+              <a:rPr sz="1800" b="0" i="0" dirty="0">
+                <a:solidFill>
+                  <a:srgbClr val="222B36"/>
+                </a:solidFill>
+                <a:latin typeface="Calibri"/>
+              </a:rPr>
+              <a:t> punto.</a:t>
             </a:r>
           </a:p>
         </p:txBody>
@@ -23950,34 +25291,187 @@
               </a:spcAft>
             </a:pPr>
             <a:r>
-              <a:rPr sz="1700" b="0" i="0">
+              <a:rPr sz="1700" b="0" i="0" dirty="0" err="1">
                 <a:solidFill>
                   <a:srgbClr val="FFFFFF"/>
                 </a:solidFill>
                 <a:latin typeface="Calibri"/>
               </a:rPr>
-              <a:t>Tutto questo deve stare in </a:t>
-            </a:r>
-            <a:r>
-              <a:rPr sz="1700" b="1" i="0">
+              <a:t>Tutto</a:t>
+            </a:r>
+            <a:r>
+              <a:rPr sz="1700" b="0" i="0" dirty="0">
                 <a:solidFill>
                   <a:srgbClr val="FFFFFF"/>
                 </a:solidFill>
                 <a:latin typeface="Calibri"/>
               </a:rPr>
-              <a:t>qualche centinaio di nanosecondi</a:t>
-            </a:r>
-            <a:r>
-              <a:rPr sz="1700" b="0" i="0">
+              <a:t> </a:t>
+            </a:r>
+            <a:r>
+              <a:rPr sz="1700" b="0" i="0" dirty="0" err="1">
                 <a:solidFill>
                   <a:srgbClr val="FFFFFF"/>
                 </a:solidFill>
                 <a:latin typeface="Calibri"/>
               </a:rPr>
-              <a:t>, una volta per ogni pacchetto. La domanda della tesi: </a:t>
-            </a:r>
-            <a:r>
-              <a:rPr sz="1700" b="1" i="0">
+              <a:t>questo</a:t>
+            </a:r>
+            <a:r>
+              <a:rPr sz="1700" b="0" i="0" dirty="0">
+                <a:solidFill>
+                  <a:srgbClr val="FFFFFF"/>
+                </a:solidFill>
+                <a:latin typeface="Calibri"/>
+              </a:rPr>
+              <a:t> </a:t>
+            </a:r>
+            <a:r>
+              <a:rPr sz="1700" b="0" i="0" dirty="0" err="1">
+                <a:solidFill>
+                  <a:srgbClr val="FFFFFF"/>
+                </a:solidFill>
+                <a:latin typeface="Calibri"/>
+              </a:rPr>
+              <a:t>deve</a:t>
+            </a:r>
+            <a:r>
+              <a:rPr sz="1700" b="0" i="0" dirty="0">
+                <a:solidFill>
+                  <a:srgbClr val="FFFFFF"/>
+                </a:solidFill>
+                <a:latin typeface="Calibri"/>
+              </a:rPr>
+              <a:t> stare in </a:t>
+            </a:r>
+            <a:r>
+              <a:rPr sz="1700" b="1" i="0" dirty="0" err="1">
+                <a:solidFill>
+                  <a:srgbClr val="FFFFFF"/>
+                </a:solidFill>
+                <a:latin typeface="Calibri"/>
+              </a:rPr>
+              <a:t>qualche</a:t>
+            </a:r>
+            <a:r>
+              <a:rPr sz="1700" b="1" i="0" dirty="0">
+                <a:solidFill>
+                  <a:srgbClr val="FFFFFF"/>
+                </a:solidFill>
+                <a:latin typeface="Calibri"/>
+              </a:rPr>
+              <a:t> </a:t>
+            </a:r>
+            <a:r>
+              <a:rPr sz="1700" b="1" i="0" dirty="0" err="1">
+                <a:solidFill>
+                  <a:srgbClr val="FFFFFF"/>
+                </a:solidFill>
+                <a:latin typeface="Calibri"/>
+              </a:rPr>
+              <a:t>centinaio</a:t>
+            </a:r>
+            <a:r>
+              <a:rPr sz="1700" b="1" i="0" dirty="0">
+                <a:solidFill>
+                  <a:srgbClr val="FFFFFF"/>
+                </a:solidFill>
+                <a:latin typeface="Calibri"/>
+              </a:rPr>
+              <a:t> di </a:t>
+            </a:r>
+            <a:r>
+              <a:rPr sz="1700" b="1" i="0" dirty="0" err="1">
+                <a:solidFill>
+                  <a:srgbClr val="FFFFFF"/>
+                </a:solidFill>
+                <a:latin typeface="Calibri"/>
+              </a:rPr>
+              <a:t>nanosecondi</a:t>
+            </a:r>
+            <a:r>
+              <a:rPr sz="1700" b="0" i="0" dirty="0">
+                <a:solidFill>
+                  <a:srgbClr val="FFFFFF"/>
+                </a:solidFill>
+                <a:latin typeface="Calibri"/>
+              </a:rPr>
+              <a:t>, </a:t>
+            </a:r>
+            <a:r>
+              <a:rPr sz="1700" b="0" i="0" dirty="0" err="1">
+                <a:solidFill>
+                  <a:srgbClr val="FFFFFF"/>
+                </a:solidFill>
+                <a:latin typeface="Calibri"/>
+              </a:rPr>
+              <a:t>una</a:t>
+            </a:r>
+            <a:r>
+              <a:rPr sz="1700" b="0" i="0" dirty="0">
+                <a:solidFill>
+                  <a:srgbClr val="FFFFFF"/>
+                </a:solidFill>
+                <a:latin typeface="Calibri"/>
+              </a:rPr>
+              <a:t> volta per </a:t>
+            </a:r>
+            <a:r>
+              <a:rPr sz="1700" b="0" i="0" dirty="0" err="1">
+                <a:solidFill>
+                  <a:srgbClr val="FFFFFF"/>
+                </a:solidFill>
+                <a:latin typeface="Calibri"/>
+              </a:rPr>
+              <a:t>ogni</a:t>
+            </a:r>
+            <a:r>
+              <a:rPr sz="1700" b="0" i="0" dirty="0">
+                <a:solidFill>
+                  <a:srgbClr val="FFFFFF"/>
+                </a:solidFill>
+                <a:latin typeface="Calibri"/>
+              </a:rPr>
+              <a:t> </a:t>
+            </a:r>
+            <a:r>
+              <a:rPr sz="1700" b="0" i="0" dirty="0" err="1">
+                <a:solidFill>
+                  <a:srgbClr val="FFFFFF"/>
+                </a:solidFill>
+                <a:latin typeface="Calibri"/>
+              </a:rPr>
+              <a:t>pacchetto</a:t>
+            </a:r>
+            <a:r>
+              <a:rPr sz="1700" b="0" i="0" dirty="0">
+                <a:solidFill>
+                  <a:srgbClr val="FFFFFF"/>
+                </a:solidFill>
+                <a:latin typeface="Calibri"/>
+              </a:rPr>
+              <a:t>. La </a:t>
+            </a:r>
+            <a:r>
+              <a:rPr sz="1700" b="0" i="0" dirty="0" err="1">
+                <a:solidFill>
+                  <a:srgbClr val="FFFFFF"/>
+                </a:solidFill>
+                <a:latin typeface="Calibri"/>
+              </a:rPr>
+              <a:t>domanda</a:t>
+            </a:r>
+            <a:r>
+              <a:rPr lang="it-IT" sz="1700" b="0" i="0" dirty="0">
+                <a:solidFill>
+                  <a:srgbClr val="FFFFFF"/>
+                </a:solidFill>
+                <a:latin typeface="Calibri"/>
+              </a:rPr>
+              <a:t> della tesi: </a:t>
+            </a:r>
+            <a:r>
+              <a:rPr lang="it-IT" sz="1700" b="1" i="0" dirty="0">
                 <a:solidFill>
                   <a:srgbClr val="FFFFFF"/>
                 </a:solidFill>
@@ -28309,7 +29803,13 @@
           <p:cNvGraphicFramePr>
             <a:graphicFrameLocks noGrp="1"/>
           </p:cNvGraphicFramePr>
-          <p:nvPr/>
+          <p:nvPr>
+            <p:extLst>
+              <p:ext uri="{D42A27DB-BD31-4B8C-83A1-F6EECF244321}">
+                <p14:modId xmlns:p14="http://schemas.microsoft.com/office/powerpoint/2010/main" val="2304511093"/>
+              </p:ext>
+            </p:extLst>
+          </p:nvPr>
         </p:nvGraphicFramePr>
         <p:xfrm>
           <a:off x="548640" y="2148840"/>
@@ -28336,14 +29836,14 @@
                     </a:ext>
                   </a:extLst>
                 </a:gridCol>
-                <a:gridCol w="1607624">
+                <a:gridCol w="1796756">
                   <a:extLst>
                     <a:ext uri="{9D8B030D-6E8A-4147-A177-3AD203B41FA5}">
                       <a16:colId xmlns:a16="http://schemas.microsoft.com/office/drawing/2014/main" val="20002"/>
                     </a:ext>
                   </a:extLst>
                 </a:gridCol>
-                <a:gridCol w="1796756">
+                <a:gridCol w="1607624">
                   <a:extLst>
                     <a:ext uri="{9D8B030D-6E8A-4147-A177-3AD203B41FA5}">
                       <a16:colId xmlns:a16="http://schemas.microsoft.com/office/drawing/2014/main" val="20003"/>
@@ -28373,7 +29873,7 @@
                     <a:p>
                       <a:pPr algn="l"/>
                       <a:r>
-                        <a:rPr sz="1500" b="1" i="0">
+                        <a:rPr lang="it-IT" sz="1500" b="1" i="0">
                           <a:solidFill>
                             <a:srgbClr val="FFFFFF"/>
                           </a:solidFill>
@@ -28381,6 +29881,12 @@
                         </a:rPr>
                         <a:t>Versione</a:t>
                       </a:r>
+                      <a:endParaRPr sz="1500" b="1" i="0">
+                        <a:solidFill>
+                          <a:srgbClr val="FFFFFF"/>
+                        </a:solidFill>
+                        <a:latin typeface="Calibri"/>
+                      </a:endParaRPr>
                     </a:p>
                   </a:txBody>
                   <a:tcPr marT="27432" marB="27432" anchor="ctr">
@@ -28396,14 +29902,20 @@
                     <a:p>
                       <a:pPr algn="l"/>
                       <a:r>
-                        <a:rPr sz="1500" b="1" i="0">
+                        <a:rPr lang="it-IT" sz="1500" b="1" i="0">
                           <a:solidFill>
                             <a:srgbClr val="FFFFFF"/>
                           </a:solidFill>
                           <a:latin typeface="Calibri"/>
                         </a:rPr>
-                        <a:t>Pesi</a:t>
+                        <a:t>Nodo</a:t>
                       </a:r>
+                      <a:endParaRPr sz="1500" b="1" i="0">
+                        <a:solidFill>
+                          <a:srgbClr val="FFFFFF"/>
+                        </a:solidFill>
+                        <a:latin typeface="Calibri"/>
+                      </a:endParaRPr>
                     </a:p>
                   </a:txBody>
                   <a:tcPr marT="27432" marB="27432" anchor="ctr">
@@ -28419,14 +29931,20 @@
                     <a:p>
                       <a:pPr algn="l"/>
                       <a:r>
-                        <a:rPr sz="1500" b="1" i="0">
+                        <a:rPr lang="it-IT" sz="1500" b="1" i="0">
                           <a:solidFill>
                             <a:srgbClr val="FFFFFF"/>
                           </a:solidFill>
                           <a:latin typeface="Calibri"/>
                         </a:rPr>
-                        <a:t>Nodo</a:t>
+                        <a:t>Porte del nodo</a:t>
                       </a:r>
+                      <a:endParaRPr sz="1500" b="1" i="0">
+                        <a:solidFill>
+                          <a:srgbClr val="FFFFFF"/>
+                        </a:solidFill>
+                        <a:latin typeface="Calibri"/>
+                      </a:endParaRPr>
                     </a:p>
                   </a:txBody>
                   <a:tcPr marT="27432" marB="27432" anchor="ctr">
@@ -28442,14 +29960,20 @@
                     <a:p>
                       <a:pPr algn="l"/>
                       <a:r>
-                        <a:rPr sz="1500" b="1" i="0">
+                        <a:rPr lang="it-IT" sz="1500" b="1" i="0">
                           <a:solidFill>
                             <a:srgbClr val="FFFFFF"/>
                           </a:solidFill>
                           <a:latin typeface="Calibri"/>
                         </a:rPr>
-                        <a:t>Porte del nodo</a:t>
+                        <a:t>Pesi</a:t>
                       </a:r>
+                      <a:endParaRPr sz="1500" b="1" i="0">
+                        <a:solidFill>
+                          <a:srgbClr val="FFFFFF"/>
+                        </a:solidFill>
+                        <a:latin typeface="Calibri"/>
+                      </a:endParaRPr>
                     </a:p>
                   </a:txBody>
                   <a:tcPr marT="27432" marB="27432" anchor="ctr">
@@ -28465,7 +29989,7 @@
                     <a:p>
                       <a:pPr algn="l"/>
                       <a:r>
-                        <a:rPr sz="1500" b="1" i="0">
+                        <a:rPr lang="it-IT" sz="1500" b="1" i="0">
                           <a:solidFill>
                             <a:srgbClr val="FFFFFF"/>
                           </a:solidFill>
@@ -28473,6 +29997,12 @@
                         </a:rPr>
                         <a:t>Forma della rete</a:t>
                       </a:r>
+                      <a:endParaRPr sz="1500" b="1" i="0">
+                        <a:solidFill>
+                          <a:srgbClr val="FFFFFF"/>
+                        </a:solidFill>
+                        <a:latin typeface="Calibri"/>
+                      </a:endParaRPr>
                     </a:p>
                   </a:txBody>
                   <a:tcPr marT="27432" marB="27432" anchor="ctr">
@@ -28488,7 +30018,7 @@
                     <a:p>
                       <a:pPr algn="l"/>
                       <a:r>
-                        <a:rPr sz="1500" b="1" i="0">
+                        <a:rPr lang="it-IT" sz="1500" b="1" i="0">
                           <a:solidFill>
                             <a:srgbClr val="FFFFFF"/>
                           </a:solidFill>
@@ -28496,6 +30026,12 @@
                         </a:rPr>
                         <a:t>Profondità</a:t>
                       </a:r>
+                      <a:endParaRPr sz="1500" b="1" i="0">
+                        <a:solidFill>
+                          <a:srgbClr val="FFFFFF"/>
+                        </a:solidFill>
+                        <a:latin typeface="Calibri"/>
+                      </a:endParaRPr>
                     </a:p>
                   </a:txBody>
                   <a:tcPr marT="27432" marB="27432" anchor="ctr">
@@ -28518,7 +30054,7 @@
                     <a:p>
                       <a:pPr algn="l"/>
                       <a:r>
-                        <a:rPr sz="1500" b="1" i="0">
+                        <a:rPr lang="it-IT" sz="1500" b="1" i="0">
                           <a:solidFill>
                             <a:srgbClr val="222B36"/>
                           </a:solidFill>
@@ -28526,6 +30062,12 @@
                         </a:rPr>
                         <a:t>P1  ·  p1_static</a:t>
                       </a:r>
+                      <a:endParaRPr sz="1500" b="1" i="0">
+                        <a:solidFill>
+                          <a:srgbClr val="222B36"/>
+                        </a:solidFill>
+                        <a:latin typeface="Calibri"/>
+                      </a:endParaRPr>
                     </a:p>
                   </a:txBody>
                   <a:tcPr marT="27432" marB="27432" anchor="ctr">
@@ -28541,14 +30083,20 @@
                     <a:p>
                       <a:pPr algn="l"/>
                       <a:r>
-                        <a:rPr sz="1500" b="0" i="0">
+                        <a:rPr lang="it-IT" sz="1500" b="0" i="0">
                           <a:solidFill>
                             <a:srgbClr val="FFFFFF"/>
                           </a:solidFill>
                           <a:latin typeface="Calibri"/>
                         </a:rPr>
-                        <a:t>compilati</a:t>
+                        <a:t>compilato</a:t>
                       </a:r>
+                      <a:endParaRPr sz="1500" b="0" i="0">
+                        <a:solidFill>
+                          <a:srgbClr val="FFFFFF"/>
+                        </a:solidFill>
+                        <a:latin typeface="Calibri"/>
+                      </a:endParaRPr>
                     </a:p>
                   </a:txBody>
                   <a:tcPr marT="27432" marB="27432" anchor="ctr">
@@ -28564,14 +30112,20 @@
                     <a:p>
                       <a:pPr algn="l"/>
                       <a:r>
-                        <a:rPr sz="1500" b="0" i="0">
+                        <a:rPr lang="it-IT" sz="1500" b="0" i="0">
                           <a:solidFill>
                             <a:srgbClr val="FFFFFF"/>
                           </a:solidFill>
                           <a:latin typeface="Calibri"/>
                         </a:rPr>
-                        <a:t>compilato</a:t>
+                        <a:t>compilabili *</a:t>
                       </a:r>
+                      <a:endParaRPr sz="1500" b="0" i="0">
+                        <a:solidFill>
+                          <a:srgbClr val="FFFFFF"/>
+                        </a:solidFill>
+                        <a:latin typeface="Calibri"/>
+                      </a:endParaRPr>
                     </a:p>
                   </a:txBody>
                   <a:tcPr marT="27432" marB="27432" anchor="ctr">
@@ -28587,14 +30141,20 @@
                     <a:p>
                       <a:pPr algn="l"/>
                       <a:r>
-                        <a:rPr sz="1500" b="0" i="0">
+                        <a:rPr lang="it-IT" sz="1500" b="0" i="0">
                           <a:solidFill>
                             <a:srgbClr val="FFFFFF"/>
                           </a:solidFill>
                           <a:latin typeface="Calibri"/>
                         </a:rPr>
-                        <a:t>compilabili *</a:t>
+                        <a:t>compilati</a:t>
                       </a:r>
+                      <a:endParaRPr sz="1500" b="0" i="0">
+                        <a:solidFill>
+                          <a:srgbClr val="FFFFFF"/>
+                        </a:solidFill>
+                        <a:latin typeface="Calibri"/>
+                      </a:endParaRPr>
                     </a:p>
                   </a:txBody>
                   <a:tcPr marT="27432" marB="27432" anchor="ctr">
@@ -28610,7 +30170,7 @@
                     <a:p>
                       <a:pPr algn="l"/>
                       <a:r>
-                        <a:rPr sz="1500" b="0" i="0">
+                        <a:rPr lang="it-IT" sz="1500" b="0" i="0">
                           <a:solidFill>
                             <a:srgbClr val="FFFFFF"/>
                           </a:solidFill>
@@ -28618,6 +30178,12 @@
                         </a:rPr>
                         <a:t>compilata</a:t>
                       </a:r>
+                      <a:endParaRPr sz="1500" b="0" i="0">
+                        <a:solidFill>
+                          <a:srgbClr val="FFFFFF"/>
+                        </a:solidFill>
+                        <a:latin typeface="Calibri"/>
+                      </a:endParaRPr>
                     </a:p>
                   </a:txBody>
                   <a:tcPr marT="27432" marB="27432" anchor="ctr">
@@ -28633,7 +30199,7 @@
                     <a:p>
                       <a:pPr algn="l"/>
                       <a:r>
-                        <a:rPr sz="1500" b="0" i="0">
+                        <a:rPr lang="it-IT" sz="1500" b="0" i="0">
                           <a:solidFill>
                             <a:srgbClr val="FFFFFF"/>
                           </a:solidFill>
@@ -28641,6 +30207,12 @@
                         </a:rPr>
                         <a:t>compilata</a:t>
                       </a:r>
+                      <a:endParaRPr sz="1500" b="0" i="0">
+                        <a:solidFill>
+                          <a:srgbClr val="FFFFFF"/>
+                        </a:solidFill>
+                        <a:latin typeface="Calibri"/>
+                      </a:endParaRPr>
                     </a:p>
                   </a:txBody>
                   <a:tcPr marT="27432" marB="27432" anchor="ctr">
@@ -28663,7 +30235,7 @@
                     <a:p>
                       <a:pPr algn="l"/>
                       <a:r>
-                        <a:rPr sz="1500" b="1" i="0">
+                        <a:rPr lang="it-IT" sz="1500" b="1" i="0">
                           <a:solidFill>
                             <a:srgbClr val="222B36"/>
                           </a:solidFill>
@@ -28671,6 +30243,12 @@
                         </a:rPr>
                         <a:t>P1.5  ·  hardcoded</a:t>
                       </a:r>
+                      <a:endParaRPr sz="1500" b="1" i="0">
+                        <a:solidFill>
+                          <a:srgbClr val="222B36"/>
+                        </a:solidFill>
+                        <a:latin typeface="Calibri"/>
+                      </a:endParaRPr>
                     </a:p>
                   </a:txBody>
                   <a:tcPr marT="27432" marB="27432" anchor="ctr">
@@ -28686,7 +30264,65 @@
                     <a:p>
                       <a:pPr algn="l"/>
                       <a:r>
-                        <a:rPr sz="1500" b="0" i="0">
+                        <a:rPr lang="it-IT" sz="1500" b="0" i="0">
+                          <a:solidFill>
+                            <a:srgbClr val="FFFFFF"/>
+                          </a:solidFill>
+                          <a:latin typeface="Calibri"/>
+                        </a:rPr>
+                        <a:t>da tabella</a:t>
+                      </a:r>
+                      <a:endParaRPr sz="1500" b="0" i="0">
+                        <a:solidFill>
+                          <a:srgbClr val="FFFFFF"/>
+                        </a:solidFill>
+                        <a:latin typeface="Calibri"/>
+                      </a:endParaRPr>
+                    </a:p>
+                  </a:txBody>
+                  <a:tcPr marT="27432" marB="27432" anchor="ctr">
+                    <a:solidFill>
+                      <a:srgbClr val="2E9C6E"/>
+                    </a:solidFill>
+                  </a:tcPr>
+                </a:tc>
+                <a:tc>
+                  <a:txBody>
+                    <a:bodyPr/>
+                    <a:lstStyle/>
+                    <a:p>
+                      <a:pPr algn="l"/>
+                      <a:r>
+                        <a:rPr lang="it-IT" sz="1500" b="0" i="0">
+                          <a:solidFill>
+                            <a:srgbClr val="FFFFFF"/>
+                          </a:solidFill>
+                          <a:latin typeface="Calibri"/>
+                        </a:rPr>
+                        <a:t>tutte previste</a:t>
+                      </a:r>
+                      <a:endParaRPr sz="1500" b="0" i="0">
+                        <a:solidFill>
+                          <a:srgbClr val="FFFFFF"/>
+                        </a:solidFill>
+                        <a:latin typeface="Calibri"/>
+                      </a:endParaRPr>
+                    </a:p>
+                  </a:txBody>
+                  <a:tcPr marT="27432" marB="27432" anchor="ctr">
+                    <a:solidFill>
+                      <a:srgbClr val="2E9C6E"/>
+                    </a:solidFill>
+                  </a:tcPr>
+                </a:tc>
+                <a:tc>
+                  <a:txBody>
+                    <a:bodyPr/>
+                    <a:lstStyle/>
+                    <a:p>
+                      <a:pPr algn="l"/>
+                      <a:r>
+                        <a:rPr lang="it-IT" sz="1500" b="0" i="0">
                           <a:solidFill>
                             <a:srgbClr val="FFFFFF"/>
                           </a:solidFill>
@@ -28694,6 +30330,12 @@
                         </a:rPr>
                         <a:t>compilati</a:t>
                       </a:r>
+                      <a:endParaRPr sz="1500" b="0" i="0">
+                        <a:solidFill>
+                          <a:srgbClr val="FFFFFF"/>
+                        </a:solidFill>
+                        <a:latin typeface="Calibri"/>
+                      </a:endParaRPr>
                     </a:p>
                   </a:txBody>
                   <a:tcPr marT="27432" marB="27432" anchor="ctr">
@@ -28709,53 +30351,7 @@
                     <a:p>
                       <a:pPr algn="l"/>
                       <a:r>
-                        <a:rPr sz="1500" b="0" i="0">
-                          <a:solidFill>
-                            <a:srgbClr val="FFFFFF"/>
-                          </a:solidFill>
-                          <a:latin typeface="Calibri"/>
-                        </a:rPr>
-                        <a:t>da tabella</a:t>
-                      </a:r>
-                    </a:p>
-                  </a:txBody>
-                  <a:tcPr marT="27432" marB="27432" anchor="ctr">
-                    <a:solidFill>
-                      <a:srgbClr val="2E9C6E"/>
-                    </a:solidFill>
-                  </a:tcPr>
-                </a:tc>
-                <a:tc>
-                  <a:txBody>
-                    <a:bodyPr/>
-                    <a:lstStyle/>
-                    <a:p>
-                      <a:pPr algn="l"/>
-                      <a:r>
-                        <a:rPr sz="1500" b="0" i="0">
-                          <a:solidFill>
-                            <a:srgbClr val="FFFFFF"/>
-                          </a:solidFill>
-                          <a:latin typeface="Calibri"/>
-                        </a:rPr>
-                        <a:t>tutte previste</a:t>
-                      </a:r>
-                    </a:p>
-                  </a:txBody>
-                  <a:tcPr marT="27432" marB="27432" anchor="ctr">
-                    <a:solidFill>
-                      <a:srgbClr val="2E9C6E"/>
-                    </a:solidFill>
-                  </a:tcPr>
-                </a:tc>
-                <a:tc>
-                  <a:txBody>
-                    <a:bodyPr/>
-                    <a:lstStyle/>
-                    <a:p>
-                      <a:pPr algn="l"/>
-                      <a:r>
-                        <a:rPr sz="1500" b="0" i="0">
+                        <a:rPr lang="it-IT" sz="1500" b="0" i="0">
                           <a:solidFill>
                             <a:srgbClr val="FFFFFF"/>
                           </a:solidFill>
@@ -28763,6 +30359,12 @@
                         </a:rPr>
                         <a:t>compilata</a:t>
                       </a:r>
+                      <a:endParaRPr sz="1500" b="0" i="0">
+                        <a:solidFill>
+                          <a:srgbClr val="FFFFFF"/>
+                        </a:solidFill>
+                        <a:latin typeface="Calibri"/>
+                      </a:endParaRPr>
                     </a:p>
                   </a:txBody>
                   <a:tcPr marT="27432" marB="27432" anchor="ctr">
@@ -28778,7 +30380,7 @@
                     <a:p>
                       <a:pPr algn="l"/>
                       <a:r>
-                        <a:rPr sz="1500" b="0" i="0">
+                        <a:rPr lang="it-IT" sz="1500" b="0" i="0">
                           <a:solidFill>
                             <a:srgbClr val="FFFFFF"/>
                           </a:solidFill>
@@ -28786,6 +30388,12 @@
                         </a:rPr>
                         <a:t>compilata</a:t>
                       </a:r>
+                      <a:endParaRPr sz="1500" b="0" i="0">
+                        <a:solidFill>
+                          <a:srgbClr val="FFFFFF"/>
+                        </a:solidFill>
+                        <a:latin typeface="Calibri"/>
+                      </a:endParaRPr>
                     </a:p>
                   </a:txBody>
                   <a:tcPr marT="27432" marB="27432" anchor="ctr">
@@ -28808,7 +30416,7 @@
                     <a:p>
                       <a:pPr algn="l"/>
                       <a:r>
-                        <a:rPr sz="1500" b="1" i="0">
+                        <a:rPr lang="it-IT" sz="1500" b="1" i="0">
                           <a:solidFill>
                             <a:srgbClr val="222B36"/>
                           </a:solidFill>
@@ -28816,6 +30424,12 @@
                         </a:rPr>
                         <a:t>P2  ·  template</a:t>
                       </a:r>
+                      <a:endParaRPr sz="1500" b="1" i="0">
+                        <a:solidFill>
+                          <a:srgbClr val="222B36"/>
+                        </a:solidFill>
+                        <a:latin typeface="Calibri"/>
+                      </a:endParaRPr>
                     </a:p>
                   </a:txBody>
                   <a:tcPr marT="27432" marB="27432" anchor="ctr">
@@ -28831,7 +30445,7 @@
                     <a:p>
                       <a:pPr algn="l"/>
                       <a:r>
-                        <a:rPr sz="1500" b="0" i="0">
+                        <a:rPr lang="it-IT" sz="1500" b="0" i="0">
                           <a:solidFill>
                             <a:srgbClr val="FFFFFF"/>
                           </a:solidFill>
@@ -28839,6 +30453,12 @@
                         </a:rPr>
                         <a:t>da tabella</a:t>
                       </a:r>
+                      <a:endParaRPr sz="1500" b="0" i="0">
+                        <a:solidFill>
+                          <a:srgbClr val="FFFFFF"/>
+                        </a:solidFill>
+                        <a:latin typeface="Calibri"/>
+                      </a:endParaRPr>
                     </a:p>
                   </a:txBody>
                   <a:tcPr marT="27432" marB="27432" anchor="ctr">
@@ -28854,14 +30474,20 @@
                     <a:p>
                       <a:pPr algn="l"/>
                       <a:r>
-                        <a:rPr sz="1500" b="0" i="0">
+                        <a:rPr lang="it-IT" sz="1500" b="0" i="0">
                           <a:solidFill>
                             <a:srgbClr val="FFFFFF"/>
                           </a:solidFill>
                           <a:latin typeface="Calibri"/>
                         </a:rPr>
-                        <a:t>da tabella</a:t>
+                        <a:t>tutte previste</a:t>
                       </a:r>
+                      <a:endParaRPr sz="1500" b="0" i="0">
+                        <a:solidFill>
+                          <a:srgbClr val="FFFFFF"/>
+                        </a:solidFill>
+                        <a:latin typeface="Calibri"/>
+                      </a:endParaRPr>
                     </a:p>
                   </a:txBody>
                   <a:tcPr marT="27432" marB="27432" anchor="ctr">
@@ -28877,14 +30503,20 @@
                     <a:p>
                       <a:pPr algn="l"/>
                       <a:r>
-                        <a:rPr sz="1500" b="0" i="0">
+                        <a:rPr lang="it-IT" sz="1500" b="0" i="0">
                           <a:solidFill>
                             <a:srgbClr val="FFFFFF"/>
                           </a:solidFill>
                           <a:latin typeface="Calibri"/>
                         </a:rPr>
-                        <a:t>tutte previste</a:t>
+                        <a:t>da tabella</a:t>
                       </a:r>
+                      <a:endParaRPr sz="1500" b="0" i="0">
+                        <a:solidFill>
+                          <a:srgbClr val="FFFFFF"/>
+                        </a:solidFill>
+                        <a:latin typeface="Calibri"/>
+                      </a:endParaRPr>
                     </a:p>
                   </a:txBody>
                   <a:tcPr marT="27432" marB="27432" anchor="ctr">
@@ -28900,7 +30532,7 @@
                     <a:p>
                       <a:pPr algn="l"/>
                       <a:r>
-                        <a:rPr sz="1500" b="0" i="0">
+                        <a:rPr lang="it-IT" sz="1500" b="0" i="0">
                           <a:solidFill>
                             <a:srgbClr val="FFFFFF"/>
                           </a:solidFill>
@@ -28908,6 +30540,12 @@
                         </a:rPr>
                         <a:t>entro limiti fissi</a:t>
                       </a:r>
+                      <a:endParaRPr sz="1500" b="0" i="0">
+                        <a:solidFill>
+                          <a:srgbClr val="FFFFFF"/>
+                        </a:solidFill>
+                        <a:latin typeface="Calibri"/>
+                      </a:endParaRPr>
                     </a:p>
                   </a:txBody>
                   <a:tcPr marT="27432" marB="27432" anchor="ctr">
@@ -28923,7 +30561,7 @@
                     <a:p>
                       <a:pPr algn="l"/>
                       <a:r>
-                        <a:rPr sz="1500" b="0" i="0">
+                        <a:rPr lang="it-IT" sz="1500" b="0" i="0">
                           <a:solidFill>
                             <a:srgbClr val="FFFFFF"/>
                           </a:solidFill>
@@ -28931,6 +30569,12 @@
                         </a:rPr>
                         <a:t>compilata</a:t>
                       </a:r>
+                      <a:endParaRPr sz="1500" b="0" i="0">
+                        <a:solidFill>
+                          <a:srgbClr val="FFFFFF"/>
+                        </a:solidFill>
+                        <a:latin typeface="Calibri"/>
+                      </a:endParaRPr>
                     </a:p>
                   </a:txBody>
                   <a:tcPr marT="27432" marB="27432" anchor="ctr">
@@ -28953,7 +30597,7 @@
                     <a:p>
                       <a:pPr algn="l"/>
                       <a:r>
-                        <a:rPr sz="1500" b="1" i="0">
+                        <a:rPr lang="it-IT" sz="1500" b="1" i="0">
                           <a:solidFill>
                             <a:srgbClr val="222B36"/>
                           </a:solidFill>
@@ -28961,6 +30605,12 @@
                         </a:rPr>
                         <a:t>P3  ·  modular</a:t>
                       </a:r>
+                      <a:endParaRPr sz="1500" b="1" i="0">
+                        <a:solidFill>
+                          <a:srgbClr val="222B36"/>
+                        </a:solidFill>
+                        <a:latin typeface="Calibri"/>
+                      </a:endParaRPr>
                     </a:p>
                   </a:txBody>
                   <a:tcPr marT="27432" marB="27432" anchor="ctr">
@@ -28976,7 +30626,7 @@
                     <a:p>
                       <a:pPr algn="l"/>
                       <a:r>
-                        <a:rPr sz="1500" b="0" i="0">
+                        <a:rPr lang="it-IT" sz="1500" b="0" i="0">
                           <a:solidFill>
                             <a:srgbClr val="FFFFFF"/>
                           </a:solidFill>
@@ -28984,6 +30634,12 @@
                         </a:rPr>
                         <a:t>da tabella</a:t>
                       </a:r>
+                      <a:endParaRPr sz="1500" b="0" i="0">
+                        <a:solidFill>
+                          <a:srgbClr val="FFFFFF"/>
+                        </a:solidFill>
+                        <a:latin typeface="Calibri"/>
+                      </a:endParaRPr>
                     </a:p>
                   </a:txBody>
                   <a:tcPr marT="27432" marB="27432" anchor="ctr">
@@ -28999,14 +30655,20 @@
                     <a:p>
                       <a:pPr algn="l"/>
                       <a:r>
-                        <a:rPr sz="1500" b="0" i="0">
+                        <a:rPr lang="it-IT" sz="1500" b="0" i="0">
                           <a:solidFill>
                             <a:srgbClr val="FFFFFF"/>
                           </a:solidFill>
                           <a:latin typeface="Calibri"/>
                         </a:rPr>
-                        <a:t>da tabella</a:t>
+                        <a:t>tutte previste</a:t>
                       </a:r>
+                      <a:endParaRPr sz="1500" b="0" i="0">
+                        <a:solidFill>
+                          <a:srgbClr val="FFFFFF"/>
+                        </a:solidFill>
+                        <a:latin typeface="Calibri"/>
+                      </a:endParaRPr>
                     </a:p>
                   </a:txBody>
                   <a:tcPr marT="27432" marB="27432" anchor="ctr">
@@ -29022,14 +30684,20 @@
                     <a:p>
                       <a:pPr algn="l"/>
                       <a:r>
-                        <a:rPr sz="1500" b="0" i="0">
+                        <a:rPr lang="it-IT" sz="1500" b="0" i="0">
                           <a:solidFill>
                             <a:srgbClr val="FFFFFF"/>
                           </a:solidFill>
                           <a:latin typeface="Calibri"/>
                         </a:rPr>
-                        <a:t>tutte previste</a:t>
+                        <a:t>da tabella</a:t>
                       </a:r>
+                      <a:endParaRPr sz="1500" b="0" i="0">
+                        <a:solidFill>
+                          <a:srgbClr val="FFFFFF"/>
+                        </a:solidFill>
+                        <a:latin typeface="Calibri"/>
+                      </a:endParaRPr>
                     </a:p>
                   </a:txBody>
                   <a:tcPr marT="27432" marB="27432" anchor="ctr">
@@ -29045,7 +30713,7 @@
                     <a:p>
                       <a:pPr algn="l"/>
                       <a:r>
-                        <a:rPr sz="1500" b="0" i="0">
+                        <a:rPr lang="it-IT" sz="1500" b="0" i="0">
                           <a:solidFill>
                             <a:srgbClr val="FFFFFF"/>
                           </a:solidFill>
@@ -29053,6 +30721,12 @@
                         </a:rPr>
                         <a:t>da tabella</a:t>
                       </a:r>
+                      <a:endParaRPr sz="1500" b="0" i="0">
+                        <a:solidFill>
+                          <a:srgbClr val="FFFFFF"/>
+                        </a:solidFill>
+                        <a:latin typeface="Calibri"/>
+                      </a:endParaRPr>
                     </a:p>
                   </a:txBody>
                   <a:tcPr marT="27432" marB="27432" anchor="ctr">
@@ -29068,7 +30742,7 @@
                     <a:p>
                       <a:pPr algn="l"/>
                       <a:r>
-                        <a:rPr sz="1500" b="0" i="0">
+                        <a:rPr lang="it-IT" sz="1500" b="0" i="0">
                           <a:solidFill>
                             <a:srgbClr val="FFFFFF"/>
                           </a:solidFill>
@@ -29076,6 +30750,12 @@
                         </a:rPr>
                         <a:t>da tabella</a:t>
                       </a:r>
+                      <a:endParaRPr sz="1500" b="0" i="0">
+                        <a:solidFill>
+                          <a:srgbClr val="FFFFFF"/>
+                        </a:solidFill>
+                        <a:latin typeface="Calibri"/>
+                      </a:endParaRPr>
                     </a:p>
                   </a:txBody>
                   <a:tcPr marT="27432" marB="27432" anchor="ctr">
@@ -32629,7 +34309,7 @@
         <p:spPr>
           <a:xfrm>
             <a:off x="548640" y="6446520"/>
-            <a:ext cx="10424160" cy="274320"/>
+            <a:ext cx="10424160" cy="176908"/>
           </a:xfrm>
           <a:prstGeom prst="rect">
             <a:avLst/>
@@ -32651,13 +34331,112 @@
               </a:spcAft>
             </a:pPr>
             <a:r>
-              <a:rPr sz="1100" b="0" i="1">
+              <a:rPr sz="1100" b="0" i="1" dirty="0" err="1">
                 <a:solidFill>
                   <a:srgbClr val="6B7C93"/>
                 </a:solidFill>
                 <a:latin typeface="Calibri"/>
               </a:rPr>
-              <a:t>Stesso modello, 319 pesi  ·  minimo su 7 prove  ·  BPF_PROG_TEST_RUN  ·  rimisura del 23/09, P1 come oggetto AOT</a:t>
+              <a:t>Stesso</a:t>
+            </a:r>
+            <a:r>
+              <a:rPr sz="1100" b="0" i="1" dirty="0">
+                <a:solidFill>
+                  <a:srgbClr val="6B7C93"/>
+                </a:solidFill>
+                <a:latin typeface="Calibri"/>
+              </a:rPr>
+              <a:t> </a:t>
+            </a:r>
+            <a:r>
+              <a:rPr sz="1100" b="0" i="1" dirty="0" err="1">
+                <a:solidFill>
+                  <a:srgbClr val="6B7C93"/>
+                </a:solidFill>
+                <a:latin typeface="Calibri"/>
+              </a:rPr>
+              <a:t>modello</a:t>
+            </a:r>
+            <a:r>
+              <a:rPr sz="1100" b="0" i="1" dirty="0">
+                <a:solidFill>
+                  <a:srgbClr val="6B7C93"/>
+                </a:solidFill>
+                <a:latin typeface="Calibri"/>
+              </a:rPr>
+              <a:t>, 319 </a:t>
+            </a:r>
+            <a:r>
+              <a:rPr sz="1100" b="0" i="1" dirty="0" err="1">
+                <a:solidFill>
+                  <a:srgbClr val="6B7C93"/>
+                </a:solidFill>
+                <a:latin typeface="Calibri"/>
+              </a:rPr>
+              <a:t>pesi</a:t>
+            </a:r>
+            <a:r>
+              <a:rPr sz="1100" b="0" i="1" dirty="0">
+                <a:solidFill>
+                  <a:srgbClr val="6B7C93"/>
+                </a:solidFill>
+                <a:latin typeface="Calibri"/>
+              </a:rPr>
+              <a:t>  ·  </a:t>
+            </a:r>
+            <a:r>
+              <a:rPr sz="1100" b="0" i="1" dirty="0" err="1">
+                <a:solidFill>
+                  <a:srgbClr val="6B7C93"/>
+                </a:solidFill>
+                <a:latin typeface="Calibri"/>
+              </a:rPr>
+              <a:t>minimo</a:t>
+            </a:r>
+            <a:r>
+              <a:rPr sz="1100" b="0" i="1" dirty="0">
+                <a:solidFill>
+                  <a:srgbClr val="6B7C93"/>
+                </a:solidFill>
+                <a:latin typeface="Calibri"/>
+              </a:rPr>
+              <a:t> </a:t>
+            </a:r>
+            <a:r>
+              <a:rPr sz="1100" b="0" i="1" dirty="0" err="1">
+                <a:solidFill>
+                  <a:srgbClr val="6B7C93"/>
+                </a:solidFill>
+                <a:latin typeface="Calibri"/>
+              </a:rPr>
+              <a:t>su</a:t>
+            </a:r>
+            <a:r>
+              <a:rPr sz="1100" b="0" i="1" dirty="0">
+                <a:solidFill>
+                  <a:srgbClr val="6B7C93"/>
+                </a:solidFill>
+                <a:latin typeface="Calibri"/>
+              </a:rPr>
+              <a:t> 7 prove  ·  BPF_PROG_TEST_RUN  ·  P1 come </a:t>
+            </a:r>
+            <a:r>
+              <a:rPr sz="1100" b="0" i="1" dirty="0" err="1">
+                <a:solidFill>
+                  <a:srgbClr val="6B7C93"/>
+                </a:solidFill>
+                <a:latin typeface="Calibri"/>
+              </a:rPr>
+              <a:t>oggetto</a:t>
+            </a:r>
+            <a:r>
+              <a:rPr sz="1100" b="0" i="1" dirty="0">
+                <a:solidFill>
+                  <a:srgbClr val="6B7C93"/>
+                </a:solidFill>
+                <a:latin typeface="Calibri"/>
+              </a:rPr>
+              <a:t> AOT</a:t>
             </a:r>
           </a:p>
         </p:txBody>
@@ -33691,7 +35470,7 @@
         <p:spPr>
           <a:xfrm>
             <a:off x="548640" y="6446520"/>
-            <a:ext cx="10424160" cy="274320"/>
+            <a:ext cx="10424160" cy="176908"/>
           </a:xfrm>
           <a:prstGeom prst="rect">
             <a:avLst/>
@@ -33713,13 +35492,139 @@
               </a:spcAft>
             </a:pPr>
             <a:r>
-              <a:rPr sz="1100" b="0" i="1">
+              <a:rPr sz="1100" b="0" i="1" dirty="0">
                 <a:solidFill>
                   <a:srgbClr val="6B7C93"/>
                 </a:solidFill>
                 <a:latin typeface="Calibri"/>
               </a:rPr>
-              <a:t>Tempo per installare un modello nuovo su un nodo già in servizio (scala logaritmica)  ·  rimisura del 23/09</a:t>
+              <a:t>Tempo per </a:t>
+            </a:r>
+            <a:r>
+              <a:rPr sz="1100" b="0" i="1" dirty="0" err="1">
+                <a:solidFill>
+                  <a:srgbClr val="6B7C93"/>
+                </a:solidFill>
+                <a:latin typeface="Calibri"/>
+              </a:rPr>
+              <a:t>installare</a:t>
+            </a:r>
+            <a:r>
+              <a:rPr sz="1100" b="0" i="1" dirty="0">
+                <a:solidFill>
+                  <a:srgbClr val="6B7C93"/>
+                </a:solidFill>
+                <a:latin typeface="Calibri"/>
+              </a:rPr>
+              <a:t> un </a:t>
+            </a:r>
+            <a:r>
+              <a:rPr sz="1100" b="0" i="1" dirty="0" err="1">
+                <a:solidFill>
+                  <a:srgbClr val="6B7C93"/>
+                </a:solidFill>
+                <a:latin typeface="Calibri"/>
+              </a:rPr>
+              <a:t>modello</a:t>
+            </a:r>
+            <a:r>
+              <a:rPr sz="1100" b="0" i="1" dirty="0">
+                <a:solidFill>
+                  <a:srgbClr val="6B7C93"/>
+                </a:solidFill>
+                <a:latin typeface="Calibri"/>
+              </a:rPr>
+              <a:t> nuovo </a:t>
+            </a:r>
+            <a:r>
+              <a:rPr sz="1100" b="0" i="1" dirty="0" err="1">
+                <a:solidFill>
+                  <a:srgbClr val="6B7C93"/>
+                </a:solidFill>
+                <a:latin typeface="Calibri"/>
+              </a:rPr>
+              <a:t>su</a:t>
+            </a:r>
+            <a:r>
+              <a:rPr sz="1100" b="0" i="1" dirty="0">
+                <a:solidFill>
+                  <a:srgbClr val="6B7C93"/>
+                </a:solidFill>
+                <a:latin typeface="Calibri"/>
+              </a:rPr>
+              <a:t> un </a:t>
+            </a:r>
+            <a:r>
+              <a:rPr sz="1100" b="0" i="1" dirty="0" err="1">
+                <a:solidFill>
+                  <a:srgbClr val="6B7C93"/>
+                </a:solidFill>
+                <a:latin typeface="Calibri"/>
+              </a:rPr>
+              <a:t>nodo</a:t>
+            </a:r>
+            <a:r>
+              <a:rPr sz="1100" b="0" i="1" dirty="0">
+                <a:solidFill>
+                  <a:srgbClr val="6B7C93"/>
+                </a:solidFill>
+                <a:latin typeface="Calibri"/>
+              </a:rPr>
+              <a:t> </a:t>
+            </a:r>
+            <a:r>
+              <a:rPr sz="1100" b="0" i="1" dirty="0" err="1">
+                <a:solidFill>
+                  <a:srgbClr val="6B7C93"/>
+                </a:solidFill>
+                <a:latin typeface="Calibri"/>
+              </a:rPr>
+              <a:t>già</a:t>
+            </a:r>
+            <a:r>
+              <a:rPr sz="1100" b="0" i="1" dirty="0">
+                <a:solidFill>
+                  <a:srgbClr val="6B7C93"/>
+                </a:solidFill>
+                <a:latin typeface="Calibri"/>
+              </a:rPr>
+              <a:t> in </a:t>
+            </a:r>
+            <a:r>
+              <a:rPr sz="1100" b="0" i="1" dirty="0" err="1">
+                <a:solidFill>
+                  <a:srgbClr val="6B7C93"/>
+                </a:solidFill>
+                <a:latin typeface="Calibri"/>
+              </a:rPr>
+              <a:t>servizio</a:t>
+            </a:r>
+            <a:r>
+              <a:rPr sz="1100" b="0" i="1" dirty="0">
+                <a:solidFill>
+                  <a:srgbClr val="6B7C93"/>
+                </a:solidFill>
+                <a:latin typeface="Calibri"/>
+              </a:rPr>
+              <a:t> (scala </a:t>
+            </a:r>
+            <a:r>
+              <a:rPr sz="1100" b="0" i="1" dirty="0" err="1">
+                <a:solidFill>
+                  <a:srgbClr val="6B7C93"/>
+                </a:solidFill>
+                <a:latin typeface="Calibri"/>
+              </a:rPr>
+              <a:t>logaritmica</a:t>
+            </a:r>
+            <a:r>
+              <a:rPr sz="1100" b="0" i="1" dirty="0">
+                <a:solidFill>
+                  <a:srgbClr val="6B7C93"/>
+                </a:solidFill>
+                <a:latin typeface="Calibri"/>
+              </a:rPr>
+              <a:t>) </a:t>
             </a:r>
           </a:p>
         </p:txBody>
@@ -34680,7 +36585,7 @@
         <p:spPr>
           <a:xfrm>
             <a:off x="548640" y="4800600"/>
-            <a:ext cx="5394960" cy="731520"/>
+            <a:ext cx="5394960" cy="699102"/>
           </a:xfrm>
           <a:prstGeom prst="rect">
             <a:avLst/>
@@ -34702,23 +36607,47 @@
               </a:spcAft>
             </a:pPr>
             <a:r>
-              <a:rPr sz="1400" b="1" i="0">
+              <a:rPr lang="it-IT" sz="1400" b="1" i="0" dirty="0">
                 <a:solidFill>
                   <a:srgbClr val="222B36"/>
                 </a:solidFill>
                 <a:latin typeface="Calibri"/>
               </a:rPr>
-              <a:t>Da 10 a 100 nodi la latenza non si muove.</a:t>
-            </a:r>
-            <a:r>
-              <a:rPr sz="1400" b="0" i="0">
+              <a:t>L'identità del nodo attiva una colonna sola di pesi. </a:t>
+            </a:r>
+            <a:r>
+              <a:rPr lang="it-IT" sz="1400" b="0" i="0" dirty="0">
                 <a:solidFill>
                   <a:srgbClr val="222B36"/>
                 </a:solidFill>
                 <a:latin typeface="Calibri"/>
               </a:rPr>
-              <a:t> L'identità del nodo entra come una casella sola: il programma ne legge una, qualunque sia la taglia della rete.</a:t>
-            </a:r>
+              <a:t>P1 statica la conosce già alla compilazione e la somma al </a:t>
+            </a:r>
+            <a:r>
+              <a:rPr lang="it-IT" sz="1400" b="0" i="0" dirty="0" err="1">
+                <a:solidFill>
+                  <a:srgbClr val="222B36"/>
+                </a:solidFill>
+                <a:latin typeface="Calibri"/>
+              </a:rPr>
+              <a:t>bias</a:t>
+            </a:r>
+            <a:r>
+              <a:rPr lang="it-IT" sz="1400" b="0" i="0" dirty="0">
+                <a:solidFill>
+                  <a:srgbClr val="222B36"/>
+                </a:solidFill>
+                <a:latin typeface="Calibri"/>
+              </a:rPr>
+              <a:t>; le altre la leggono da tabella. In nessun caso il lavoro per pacchetto dipende dalla taglia della rete.</a:t>
+            </a:r>
+            <a:endParaRPr sz="1400" b="0" i="0" dirty="0">
+              <a:solidFill>
+                <a:srgbClr val="222B36"/>
+              </a:solidFill>
+              <a:latin typeface="Calibri"/>
+            </a:endParaRPr>
           </a:p>
         </p:txBody>
       </p:sp>
@@ -35309,4 +37238,319 @@
   </a:objectDefaults>
   <a:extraClrSchemeLst/>
 </a:theme>
+</file>
+
+<file path=ppt/theme/theme2.xml><?xml version="1.0" encoding="utf-8"?>
+<a:theme xmlns:a="http://schemas.openxmlformats.org/drawingml/2006/main" name="Tema di Office">
+  <a:themeElements>
+    <a:clrScheme name="Office">
+      <a:dk1>
+        <a:sysClr val="windowText" lastClr="000000"/>
+      </a:dk1>
+      <a:lt1>
+        <a:sysClr val="window" lastClr="FFFFFF"/>
+      </a:lt1>
+      <a:dk2>
+        <a:srgbClr val="0E2841"/>
+      </a:dk2>
+      <a:lt2>
+        <a:srgbClr val="E8E8E8"/>
+      </a:lt2>
+      <a:accent1>
+        <a:srgbClr val="156082"/>
+      </a:accent1>
+      <a:accent2>
+        <a:srgbClr val="E97132"/>
+      </a:accent2>
+      <a:accent3>
+        <a:srgbClr val="196B24"/>
+      </a:accent3>
+      <a:accent4>
+        <a:srgbClr val="0F9ED5"/>
+      </a:accent4>
+      <a:accent5>
+        <a:srgbClr val="A02B93"/>
+      </a:accent5>
+      <a:accent6>
+        <a:srgbClr val="4EA72E"/>
+      </a:accent6>
+      <a:hlink>
+        <a:srgbClr val="467886"/>
+      </a:hlink>
+      <a:folHlink>
+        <a:srgbClr val="96607D"/>
+      </a:folHlink>
+    </a:clrScheme>
+    <a:fontScheme name="Office">
+      <a:majorFont>
+        <a:latin typeface="Aptos Display" panose="02110004020202020204"/>
+        <a:ea typeface=""/>
+        <a:cs typeface=""/>
+        <a:font script="Jpan" typeface="游ゴシック Light"/>
+        <a:font script="Hang" typeface="맑은 고딕"/>
+        <a:font script="Hans" typeface="等线 Light"/>
+        <a:font script="Hant" typeface="新細明體"/>
+        <a:font script="Arab" typeface="Times New Roman"/>
+        <a:font script="Hebr" typeface="Times New Roman"/>
+        <a:font script="Thai" typeface="Angsana New"/>
+        <a:font script="Ethi" typeface="Nyala"/>
+        <a:font script="Beng" typeface="Vrinda"/>
+        <a:font script="Gujr" typeface="Shruti"/>
+        <a:font script="Khmr" typeface="MoolBoran"/>
+        <a:font script="Knda" typeface="Tunga"/>
+        <a:font script="Guru" typeface="Raavi"/>
+        <a:font script="Cans" typeface="Euphemia"/>
+        <a:font script="Cher" typeface="Plantagenet Cherokee"/>
+        <a:font script="Yiii" typeface="Microsoft Yi Baiti"/>
+        <a:font script="Tibt" typeface="Microsoft Himalaya"/>
+        <a:font script="Thaa" typeface="MV Boli"/>
+        <a:font script="Deva" typeface="Mangal"/>
+        <a:font script="Telu" typeface="Gautami"/>
+        <a:font script="Taml" typeface="Latha"/>
+        <a:font script="Syrc" typeface="Estrangelo Edessa"/>
+        <a:font script="Orya" typeface="Kalinga"/>
+        <a:font script="Mlym" typeface="Kartika"/>
+        <a:font script="Laoo" typeface="DokChampa"/>
+        <a:font script="Sinh" typeface="Iskoola Pota"/>
+        <a:font script="Mong" typeface="Mongolian Baiti"/>
+        <a:font script="Viet" typeface="Times New Roman"/>
+        <a:font script="Uigh" typeface="Microsoft Uighur"/>
+        <a:font script="Geor" typeface="Sylfaen"/>
+        <a:font script="Armn" typeface="Arial"/>
+        <a:font script="Bugi" typeface="Leelawadee UI"/>
+        <a:font script="Bopo" typeface="Microsoft JhengHei"/>
+        <a:font script="Java" typeface="Javanese Text"/>
+        <a:font script="Lisu" typeface="Segoe UI"/>
+        <a:font script="Mymr" typeface="Myanmar Text"/>
+        <a:font script="Nkoo" typeface="Ebrima"/>
+        <a:font script="Olck" typeface="Nirmala UI"/>
+        <a:font script="Osma" typeface="Ebrima"/>
+        <a:font script="Phag" typeface="Phagspa"/>
+        <a:font script="Syrn" typeface="Estrangelo Edessa"/>
+        <a:font script="Syrj" typeface="Estrangelo Edessa"/>
+        <a:font script="Syre" typeface="Estrangelo Edessa"/>
+        <a:font script="Sora" typeface="Nirmala UI"/>
+        <a:font script="Tale" typeface="Microsoft Tai Le"/>
+        <a:font script="Talu" typeface="Microsoft New Tai Lue"/>
+        <a:font script="Tfng" typeface="Ebrima"/>
+      </a:majorFont>
+      <a:minorFont>
+        <a:latin typeface="Aptos" panose="02110004020202020204"/>
+        <a:ea typeface=""/>
+        <a:cs typeface=""/>
+        <a:font script="Jpan" typeface="游ゴシック"/>
+        <a:font script="Hang" typeface="맑은 고딕"/>
+        <a:font script="Hans" typeface="等线"/>
+        <a:font script="Hant" typeface="新細明體"/>
+        <a:font script="Arab" typeface="Arial"/>
+        <a:font script="Hebr" typeface="Arial"/>
+        <a:font script="Thai" typeface="Cordia New"/>
+        <a:font script="Ethi" typeface="Nyala"/>
+        <a:font script="Beng" typeface="Vrinda"/>
+        <a:font script="Gujr" typeface="Shruti"/>
+        <a:font script="Khmr" typeface="DaunPenh"/>
+        <a:font script="Knda" typeface="Tunga"/>
+        <a:font script="Guru" typeface="Raavi"/>
+        <a:font script="Cans" typeface="Euphemia"/>
+        <a:font script="Cher" typeface="Plantagenet Cherokee"/>
+        <a:font script="Yiii" typeface="Microsoft Yi Baiti"/>
+        <a:font script="Tibt" typeface="Microsoft Himalaya"/>
+        <a:font script="Thaa" typeface="MV Boli"/>
+        <a:font script="Deva" typeface="Mangal"/>
+        <a:font script="Telu" typeface="Gautami"/>
+        <a:font script="Taml" typeface="Latha"/>
+        <a:font script="Syrc" typeface="Estrangelo Edessa"/>
+        <a:font script="Orya" typeface="Kalinga"/>
+        <a:font script="Mlym" typeface="Kartika"/>
+        <a:font script="Laoo" typeface="DokChampa"/>
+        <a:font script="Sinh" typeface="Iskoola Pota"/>
+        <a:font script="Mong" typeface="Mongolian Baiti"/>
+        <a:font script="Viet" typeface="Arial"/>
+        <a:font script="Uigh" typeface="Microsoft Uighur"/>
+        <a:font script="Geor" typeface="Sylfaen"/>
+        <a:font script="Armn" typeface="Arial"/>
+        <a:font script="Bugi" typeface="Leelawadee UI"/>
+        <a:font script="Bopo" typeface="Microsoft JhengHei"/>
+        <a:font script="Java" typeface="Javanese Text"/>
+        <a:font script="Lisu" typeface="Segoe UI"/>
+        <a:font script="Mymr" typeface="Myanmar Text"/>
+        <a:font script="Nkoo" typeface="Ebrima"/>
+        <a:font script="Olck" typeface="Nirmala UI"/>
+        <a:font script="Osma" typeface="Ebrima"/>
+        <a:font script="Phag" typeface="Phagspa"/>
+        <a:font script="Syrn" typeface="Estrangelo Edessa"/>
+        <a:font script="Syrj" typeface="Estrangelo Edessa"/>
+        <a:font script="Syre" typeface="Estrangelo Edessa"/>
+        <a:font script="Sora" typeface="Nirmala UI"/>
+        <a:font script="Tale" typeface="Microsoft Tai Le"/>
+        <a:font script="Talu" typeface="Microsoft New Tai Lue"/>
+        <a:font script="Tfng" typeface="Ebrima"/>
+      </a:minorFont>
+    </a:fontScheme>
+    <a:fmtScheme name="Office">
+      <a:fillStyleLst>
+        <a:solidFill>
+          <a:schemeClr val="phClr"/>
+        </a:solidFill>
+        <a:gradFill rotWithShape="1">
+          <a:gsLst>
+            <a:gs pos="0">
+              <a:schemeClr val="phClr">
+                <a:lumMod val="110000"/>
+                <a:satMod val="105000"/>
+                <a:tint val="67000"/>
+              </a:schemeClr>
+            </a:gs>
+            <a:gs pos="50000">
+              <a:schemeClr val="phClr">
+                <a:lumMod val="105000"/>
+                <a:satMod val="103000"/>
+                <a:tint val="73000"/>
+              </a:schemeClr>
+            </a:gs>
+            <a:gs pos="100000">
+              <a:schemeClr val="phClr">
+                <a:lumMod val="105000"/>
+                <a:satMod val="109000"/>
+                <a:tint val="81000"/>
+              </a:schemeClr>
+            </a:gs>
+          </a:gsLst>
+          <a:lin ang="5400000" scaled="0"/>
+        </a:gradFill>
+        <a:gradFill rotWithShape="1">
+          <a:gsLst>
+            <a:gs pos="0">
+              <a:schemeClr val="phClr">
+                <a:satMod val="103000"/>
+                <a:lumMod val="102000"/>
+                <a:tint val="94000"/>
+              </a:schemeClr>
+            </a:gs>
+            <a:gs pos="50000">
+              <a:schemeClr val="phClr">
+                <a:satMod val="110000"/>
+                <a:lumMod val="100000"/>
+                <a:shade val="100000"/>
+              </a:schemeClr>
+            </a:gs>
+            <a:gs pos="100000">
+              <a:schemeClr val="phClr">
+                <a:lumMod val="99000"/>
+                <a:satMod val="120000"/>
+                <a:shade val="78000"/>
+              </a:schemeClr>
+            </a:gs>
+          </a:gsLst>
+          <a:lin ang="5400000" scaled="0"/>
+        </a:gradFill>
+      </a:fillStyleLst>
+      <a:lnStyleLst>
+        <a:ln w="12700" cap="flat" cmpd="sng" algn="ctr">
+          <a:solidFill>
+            <a:schemeClr val="phClr"/>
+          </a:solidFill>
+          <a:prstDash val="solid"/>
+          <a:miter lim="800000"/>
+        </a:ln>
+        <a:ln w="19050" cap="flat" cmpd="sng" algn="ctr">
+          <a:solidFill>
+            <a:schemeClr val="phClr"/>
+          </a:solidFill>
+          <a:prstDash val="solid"/>
+          <a:miter lim="800000"/>
+        </a:ln>
+        <a:ln w="25400" cap="flat" cmpd="sng" algn="ctr">
+          <a:solidFill>
+            <a:schemeClr val="phClr"/>
+          </a:solidFill>
+          <a:prstDash val="solid"/>
+          <a:miter lim="800000"/>
+        </a:ln>
+      </a:lnStyleLst>
+      <a:effectStyleLst>
+        <a:effectStyle>
+          <a:effectLst/>
+        </a:effectStyle>
+        <a:effectStyle>
+          <a:effectLst/>
+        </a:effectStyle>
+        <a:effectStyle>
+          <a:effectLst>
+            <a:outerShdw blurRad="57150" dist="19050" dir="5400000" algn="ctr" rotWithShape="0">
+              <a:srgbClr val="000000">
+                <a:alpha val="63000"/>
+              </a:srgbClr>
+            </a:outerShdw>
+          </a:effectLst>
+        </a:effectStyle>
+      </a:effectStyleLst>
+      <a:bgFillStyleLst>
+        <a:solidFill>
+          <a:schemeClr val="phClr"/>
+        </a:solidFill>
+        <a:solidFill>
+          <a:schemeClr val="phClr">
+            <a:tint val="95000"/>
+            <a:satMod val="170000"/>
+          </a:schemeClr>
+        </a:solidFill>
+        <a:gradFill rotWithShape="1">
+          <a:gsLst>
+            <a:gs pos="0">
+              <a:schemeClr val="phClr">
+                <a:tint val="93000"/>
+                <a:satMod val="150000"/>
+                <a:shade val="98000"/>
+                <a:lumMod val="102000"/>
+              </a:schemeClr>
+            </a:gs>
+            <a:gs pos="50000">
+              <a:schemeClr val="phClr">
+                <a:tint val="98000"/>
+                <a:satMod val="130000"/>
+                <a:shade val="90000"/>
+                <a:lumMod val="103000"/>
+              </a:schemeClr>
+            </a:gs>
+            <a:gs pos="100000">
+              <a:schemeClr val="phClr">
+                <a:shade val="63000"/>
+                <a:satMod val="120000"/>
+              </a:schemeClr>
+            </a:gs>
+          </a:gsLst>
+          <a:lin ang="5400000" scaled="0"/>
+        </a:gradFill>
+      </a:bgFillStyleLst>
+    </a:fmtScheme>
+  </a:themeElements>
+  <a:objectDefaults>
+    <a:lnDef>
+      <a:spPr/>
+      <a:bodyPr/>
+      <a:lstStyle/>
+      <a:style>
+        <a:lnRef idx="2">
+          <a:schemeClr val="accent1"/>
+        </a:lnRef>
+        <a:fillRef idx="0">
+          <a:schemeClr val="accent1"/>
+        </a:fillRef>
+        <a:effectRef idx="1">
+          <a:schemeClr val="accent1"/>
+        </a:effectRef>
+        <a:fontRef idx="minor">
+          <a:schemeClr val="tx1"/>
+        </a:fontRef>
+      </a:style>
+    </a:lnDef>
+  </a:objectDefaults>
+  <a:extraClrSchemeLst/>
+  <a:extLst>
+    <a:ext uri="{05A4C25C-085E-4340-85A3-A5531E510DB2}">
+      <thm15:themeFamily xmlns:thm15="http://schemas.microsoft.com/office/thememl/2012/main" name="Office Theme" id="{2E142A2C-CD16-42D6-873A-C26D2A0506FA}" vid="{1BDDFF52-6CD6-40A5-AB3C-68EB2F1E4D0A}"/>
+    </a:ext>
+  </a:extLst>
+</a:theme>
 </file>
--- a/docs/Inferenza di una rete neurale nel kernel Linux con eBPF XDP.pptx
+++ b/docs/Inferenza di una rete neurale nel kernel Linux con eBPF XDP.pptx
@@ -5,7 +5,7 @@
     <p:sldMasterId id="2147483648" r:id="rId1"/>
   </p:sldMasterIdLst>
   <p:notesMasterIdLst>
-    <p:notesMasterId r:id="rId25"/>
+    <p:notesMasterId r:id="rId24"/>
   </p:notesMasterIdLst>
   <p:sldIdLst>
     <p:sldId id="256" r:id="rId2"/>
@@ -30,7 +30,6 @@
     <p:sldId id="276" r:id="rId21"/>
     <p:sldId id="277" r:id="rId22"/>
     <p:sldId id="278" r:id="rId23"/>
-    <p:sldId id="279" r:id="rId24"/>
   </p:sldIdLst>
   <p:sldSz cx="12192000" cy="6858000"/>
   <p:notesSz cx="6858000" cy="9144000"/>
@@ -153,10 +152,25 @@
   <pc:docChgLst>
     <pc:chgData name="Ettore Cantile" userId="2f5e44afd0b03182" providerId="LiveId" clId="{E1385F0F-24B1-4705-8EF7-8D82C33CA9CE}"/>
     <pc:docChg chg="undo redo custSel addSld delSld modSld">
-      <pc:chgData name="Ettore Cantile" userId="2f5e44afd0b03182" providerId="LiveId" clId="{E1385F0F-24B1-4705-8EF7-8D82C33CA9CE}" dt="2026-09-25T14:25:17.961" v="311" actId="20577"/>
+      <pc:chgData name="Ettore Cantile" userId="2f5e44afd0b03182" providerId="LiveId" clId="{E1385F0F-24B1-4705-8EF7-8D82C33CA9CE}" dt="2026-09-25T15:17:48.142" v="404" actId="47"/>
       <pc:docMkLst>
         <pc:docMk/>
       </pc:docMkLst>
+      <pc:sldChg chg="modSp mod">
+        <pc:chgData name="Ettore Cantile" userId="2f5e44afd0b03182" providerId="LiveId" clId="{E1385F0F-24B1-4705-8EF7-8D82C33CA9CE}" dt="2026-09-25T15:14:45.321" v="331" actId="20577"/>
+        <pc:sldMkLst>
+          <pc:docMk/>
+          <pc:sldMk cId="0" sldId="256"/>
+        </pc:sldMkLst>
+        <pc:spChg chg="mod">
+          <ac:chgData name="Ettore Cantile" userId="2f5e44afd0b03182" providerId="LiveId" clId="{E1385F0F-24B1-4705-8EF7-8D82C33CA9CE}" dt="2026-09-25T15:14:45.321" v="331" actId="20577"/>
+          <ac:spMkLst>
+            <pc:docMk/>
+            <pc:sldMk cId="0" sldId="256"/>
+            <ac:spMk id="7" creationId="{00000000-0000-0000-0000-000000000000}"/>
+          </ac:spMkLst>
+        </pc:spChg>
+      </pc:sldChg>
       <pc:sldChg chg="modSp mod">
         <pc:chgData name="Ettore Cantile" userId="2f5e44afd0b03182" providerId="LiveId" clId="{E1385F0F-24B1-4705-8EF7-8D82C33CA9CE}" dt="2026-09-25T12:03:07.871" v="123" actId="20577"/>
         <pc:sldMkLst>
@@ -264,11 +278,19 @@
         </pc:sldMkLst>
       </pc:sldChg>
       <pc:sldChg chg="modSp mod">
-        <pc:chgData name="Ettore Cantile" userId="2f5e44afd0b03182" providerId="LiveId" clId="{E1385F0F-24B1-4705-8EF7-8D82C33CA9CE}" dt="2026-09-25T09:20:14.077" v="90" actId="113"/>
+        <pc:chgData name="Ettore Cantile" userId="2f5e44afd0b03182" providerId="LiveId" clId="{E1385F0F-24B1-4705-8EF7-8D82C33CA9CE}" dt="2026-09-25T15:15:50.626" v="378" actId="20577"/>
         <pc:sldMkLst>
           <pc:docMk/>
           <pc:sldMk cId="0" sldId="264"/>
         </pc:sldMkLst>
+        <pc:spChg chg="mod">
+          <ac:chgData name="Ettore Cantile" userId="2f5e44afd0b03182" providerId="LiveId" clId="{E1385F0F-24B1-4705-8EF7-8D82C33CA9CE}" dt="2026-09-25T15:15:50.626" v="378" actId="20577"/>
+          <ac:spMkLst>
+            <pc:docMk/>
+            <pc:sldMk cId="0" sldId="264"/>
+            <ac:spMk id="6" creationId="{00000000-0000-0000-0000-000000000000}"/>
+          </ac:spMkLst>
+        </pc:spChg>
         <pc:spChg chg="mod">
           <ac:chgData name="Ettore Cantile" userId="2f5e44afd0b03182" providerId="LiveId" clId="{E1385F0F-24B1-4705-8EF7-8D82C33CA9CE}" dt="2026-09-25T09:20:14.077" v="90" actId="113"/>
           <ac:spMkLst>
@@ -278,12 +300,43 @@
           </ac:spMkLst>
         </pc:spChg>
       </pc:sldChg>
-      <pc:sldChg chg="mod">
-        <pc:chgData name="Ettore Cantile" userId="2f5e44afd0b03182" providerId="LiveId" clId="{E1385F0F-24B1-4705-8EF7-8D82C33CA9CE}" dt="2026-09-25T14:24:43.718" v="310" actId="27918"/>
+      <pc:sldChg chg="modSp mod">
+        <pc:chgData name="Ettore Cantile" userId="2f5e44afd0b03182" providerId="LiveId" clId="{E1385F0F-24B1-4705-8EF7-8D82C33CA9CE}" dt="2026-09-25T15:10:33.325" v="328" actId="20577"/>
         <pc:sldMkLst>
           <pc:docMk/>
           <pc:sldMk cId="0" sldId="265"/>
         </pc:sldMkLst>
+        <pc:spChg chg="mod">
+          <ac:chgData name="Ettore Cantile" userId="2f5e44afd0b03182" providerId="LiveId" clId="{E1385F0F-24B1-4705-8EF7-8D82C33CA9CE}" dt="2026-09-25T15:10:33.307" v="327" actId="20577"/>
+          <ac:spMkLst>
+            <pc:docMk/>
+            <pc:sldMk cId="0" sldId="265"/>
+            <ac:spMk id="9" creationId="{00000000-0000-0000-0000-000000000000}"/>
+          </ac:spMkLst>
+        </pc:spChg>
+        <pc:spChg chg="mod">
+          <ac:chgData name="Ettore Cantile" userId="2f5e44afd0b03182" providerId="LiveId" clId="{E1385F0F-24B1-4705-8EF7-8D82C33CA9CE}" dt="2026-09-25T15:10:33.325" v="328" actId="20577"/>
+          <ac:spMkLst>
+            <pc:docMk/>
+            <pc:sldMk cId="0" sldId="265"/>
+            <ac:spMk id="14" creationId="{00000000-0000-0000-0000-000000000000}"/>
+          </ac:spMkLst>
+        </pc:spChg>
+      </pc:sldChg>
+      <pc:sldChg chg="modSp mod">
+        <pc:chgData name="Ettore Cantile" userId="2f5e44afd0b03182" providerId="LiveId" clId="{E1385F0F-24B1-4705-8EF7-8D82C33CA9CE}" dt="2026-09-25T15:17:02.618" v="400" actId="20577"/>
+        <pc:sldMkLst>
+          <pc:docMk/>
+          <pc:sldMk cId="0" sldId="267"/>
+        </pc:sldMkLst>
+        <pc:spChg chg="mod">
+          <ac:chgData name="Ettore Cantile" userId="2f5e44afd0b03182" providerId="LiveId" clId="{E1385F0F-24B1-4705-8EF7-8D82C33CA9CE}" dt="2026-09-25T15:17:02.618" v="400" actId="20577"/>
+          <ac:spMkLst>
+            <pc:docMk/>
+            <pc:sldMk cId="0" sldId="267"/>
+            <ac:spMk id="6" creationId="{00000000-0000-0000-0000-000000000000}"/>
+          </ac:spMkLst>
+        </pc:spChg>
       </pc:sldChg>
       <pc:sldChg chg="modSp mod">
         <pc:chgData name="Ettore Cantile" userId="2f5e44afd0b03182" providerId="LiveId" clId="{E1385F0F-24B1-4705-8EF7-8D82C33CA9CE}" dt="2026-09-25T14:25:17.961" v="311" actId="20577"/>
@@ -390,8 +443,8 @@
           </ac:spMkLst>
         </pc:spChg>
       </pc:sldChg>
-      <pc:sldChg chg="modSp mod">
-        <pc:chgData name="Ettore Cantile" userId="2f5e44afd0b03182" providerId="LiveId" clId="{E1385F0F-24B1-4705-8EF7-8D82C33CA9CE}" dt="2026-09-24T16:05:14.466" v="61" actId="20577"/>
+      <pc:sldChg chg="modSp del mod">
+        <pc:chgData name="Ettore Cantile" userId="2f5e44afd0b03182" providerId="LiveId" clId="{E1385F0F-24B1-4705-8EF7-8D82C33CA9CE}" dt="2026-09-25T15:17:48.142" v="404" actId="47"/>
         <pc:sldMkLst>
           <pc:docMk/>
           <pc:sldMk cId="0" sldId="279"/>
@@ -402,6 +455,14 @@
             <pc:docMk/>
             <pc:sldMk cId="0" sldId="279"/>
             <ac:spMk id="5" creationId="{00000000-0000-0000-0000-000000000000}"/>
+          </ac:spMkLst>
+        </pc:spChg>
+        <pc:spChg chg="mod">
+          <ac:chgData name="Ettore Cantile" userId="2f5e44afd0b03182" providerId="LiveId" clId="{E1385F0F-24B1-4705-8EF7-8D82C33CA9CE}" dt="2026-09-25T15:17:38.689" v="403" actId="20577"/>
+          <ac:spMkLst>
+            <pc:docMk/>
+            <pc:sldMk cId="0" sldId="279"/>
+            <ac:spMk id="6" creationId="{00000000-0000-0000-0000-000000000000}"/>
           </ac:spMkLst>
         </pc:spChg>
         <pc:spChg chg="mod">
@@ -422,7 +483,7 @@
         </pc:spChg>
       </pc:sldChg>
       <pc:sldChg chg="modSp add del mod">
-        <pc:chgData name="Ettore Cantile" userId="2f5e44afd0b03182" providerId="LiveId" clId="{E1385F0F-24B1-4705-8EF7-8D82C33CA9CE}" dt="2026-09-24T16:05:47.995" v="75"/>
+        <pc:chgData name="Ettore Cantile" userId="2f5e44afd0b03182" providerId="LiveId" clId="{E1385F0F-24B1-4705-8EF7-8D82C33CA9CE}" dt="2026-09-25T15:15:23.771" v="376" actId="20577"/>
         <pc:sldMkLst>
           <pc:docMk/>
           <pc:sldMk cId="4050059398" sldId="280"/>
@@ -452,7 +513,7 @@
           </ac:spMkLst>
         </pc:spChg>
         <pc:spChg chg="mod">
-          <ac:chgData name="Ettore Cantile" userId="2f5e44afd0b03182" providerId="LiveId" clId="{E1385F0F-24B1-4705-8EF7-8D82C33CA9CE}" dt="2026-09-24T16:04:51.544" v="39" actId="947"/>
+          <ac:chgData name="Ettore Cantile" userId="2f5e44afd0b03182" providerId="LiveId" clId="{E1385F0F-24B1-4705-8EF7-8D82C33CA9CE}" dt="2026-09-25T15:15:23.771" v="376" actId="20577"/>
           <ac:spMkLst>
             <pc:docMk/>
             <pc:sldMk cId="4050059398" sldId="280"/>
@@ -3983,16 +4044,16 @@
                   <c:v>618</c:v>
                 </c:pt>
                 <c:pt idx="2">
-                  <c:v>633</c:v>
+                  <c:v>671</c:v>
                 </c:pt>
                 <c:pt idx="3">
-                  <c:v>719</c:v>
+                  <c:v>740</c:v>
                 </c:pt>
                 <c:pt idx="4">
-                  <c:v>784</c:v>
+                  <c:v>798</c:v>
                 </c:pt>
                 <c:pt idx="5">
-                  <c:v>853</c:v>
+                  <c:v>869</c:v>
                 </c:pt>
               </c:numCache>
             </c:numRef>
@@ -4072,22 +4133,22 @@
                 <c:formatCode>General</c:formatCode>
                 <c:ptCount val="6"/>
                 <c:pt idx="0">
-                  <c:v>973</c:v>
+                  <c:v>974</c:v>
                 </c:pt>
                 <c:pt idx="1">
                   <c:v>1028</c:v>
                 </c:pt>
                 <c:pt idx="2">
-                  <c:v>1044</c:v>
+                  <c:v>1078</c:v>
                 </c:pt>
                 <c:pt idx="3">
-                  <c:v>1119</c:v>
+                  <c:v>1142</c:v>
                 </c:pt>
                 <c:pt idx="4">
-                  <c:v>1192</c:v>
+                  <c:v>1214</c:v>
                 </c:pt>
                 <c:pt idx="5">
-                  <c:v>1310</c:v>
+                  <c:v>1301</c:v>
                 </c:pt>
               </c:numCache>
             </c:numRef>
@@ -4164,22 +4225,22 @@
                 <c:formatCode>General</c:formatCode>
                 <c:ptCount val="6"/>
                 <c:pt idx="0">
-                  <c:v>14668</c:v>
+                  <c:v>14676</c:v>
                 </c:pt>
                 <c:pt idx="1">
-                  <c:v>14985</c:v>
+                  <c:v>14976</c:v>
                 </c:pt>
                 <c:pt idx="2">
-                  <c:v>16663</c:v>
+                  <c:v>16667</c:v>
                 </c:pt>
                 <c:pt idx="3">
-                  <c:v>16867</c:v>
+                  <c:v>16689</c:v>
                 </c:pt>
                 <c:pt idx="4">
-                  <c:v>17828</c:v>
+                  <c:v>17643</c:v>
                 </c:pt>
                 <c:pt idx="5">
-                  <c:v>18801</c:v>
+                  <c:v>18613</c:v>
                 </c:pt>
               </c:numCache>
             </c:numRef>
@@ -4244,22 +4305,22 @@
                 <c:formatCode>General</c:formatCode>
                 <c:ptCount val="6"/>
                 <c:pt idx="0">
-                  <c:v>12349</c:v>
+                  <c:v>12374</c:v>
                 </c:pt>
                 <c:pt idx="1">
-                  <c:v>12349</c:v>
+                  <c:v>12374</c:v>
                 </c:pt>
                 <c:pt idx="2">
-                  <c:v>12349</c:v>
+                  <c:v>12374</c:v>
                 </c:pt>
                 <c:pt idx="3">
-                  <c:v>12349</c:v>
+                  <c:v>12374</c:v>
                 </c:pt>
                 <c:pt idx="4">
-                  <c:v>12349</c:v>
+                  <c:v>12374</c:v>
                 </c:pt>
                 <c:pt idx="5">
-                  <c:v>12349</c:v>
+                  <c:v>12374</c:v>
                 </c:pt>
               </c:numCache>
             </c:numRef>
@@ -10350,7 +10411,7 @@
         <p:spPr>
           <a:xfrm>
             <a:off x="914400" y="5120640"/>
-            <a:ext cx="7315200" cy="822960"/>
+            <a:ext cx="7315200" cy="656718"/>
           </a:xfrm>
           <a:prstGeom prst="rect">
             <a:avLst/>
@@ -10372,7 +10433,7 @@
               </a:spcAft>
             </a:pPr>
             <a:r>
-              <a:rPr sz="2000" b="1" i="0">
+              <a:rPr sz="2000" b="1" i="0" dirty="0">
                 <a:solidFill>
                   <a:srgbClr val="FFFFFF"/>
                 </a:solidFill>
@@ -10391,14 +10452,38 @@
               </a:spcAft>
             </a:pPr>
             <a:r>
-              <a:rPr sz="1500" b="0" i="0">
+              <a:rPr sz="1500" b="0" i="0" dirty="0" err="1">
                 <a:solidFill>
                   <a:srgbClr val="FFFFFF"/>
                 </a:solidFill>
                 <a:latin typeface="Calibri"/>
               </a:rPr>
-              <a:t>settembre 2026  ·  misure aggiornate al 23 settembre</a:t>
-            </a:r>
+              <a:t>settembre</a:t>
+            </a:r>
+            <a:r>
+              <a:rPr sz="1500" b="0" i="0" dirty="0">
+                <a:solidFill>
+                  <a:srgbClr val="FFFFFF"/>
+                </a:solidFill>
+                <a:latin typeface="Calibri"/>
+              </a:rPr>
+              <a:t> 202</a:t>
+            </a:r>
+            <a:r>
+              <a:rPr lang="it-IT" sz="1500" b="0" i="0" dirty="0">
+                <a:solidFill>
+                  <a:srgbClr val="FFFFFF"/>
+                </a:solidFill>
+                <a:latin typeface="Calibri"/>
+              </a:rPr>
+              <a:t>6</a:t>
+            </a:r>
+            <a:endParaRPr sz="1500" b="0" i="0" dirty="0">
+              <a:solidFill>
+                <a:srgbClr val="FFFFFF"/>
+              </a:solidFill>
+              <a:latin typeface="Calibri"/>
+            </a:endParaRPr>
           </a:p>
         </p:txBody>
       </p:sp>
@@ -10656,7 +10741,7 @@
           <p:nvPr>
             <p:extLst>
               <p:ext uri="{D42A27DB-BD31-4B8C-83A1-F6EECF244321}">
-                <p14:modId xmlns:p14="http://schemas.microsoft.com/office/powerpoint/2010/main" val="3787685855"/>
+                <p14:modId xmlns:p14="http://schemas.microsoft.com/office/powerpoint/2010/main" val="3475388094"/>
               </p:ext>
             </p:extLst>
           </p:nvPr>
@@ -10698,7 +10783,7 @@
         <p:spPr>
           <a:xfrm>
             <a:off x="548640" y="4800600"/>
-            <a:ext cx="5394960" cy="731520"/>
+            <a:ext cx="5394960" cy="462114"/>
           </a:xfrm>
           <a:prstGeom prst="rect">
             <a:avLst/>
@@ -10735,7 +10820,61 @@
                 </a:solidFill>
                 <a:latin typeface="Calibri"/>
               </a:rPr>
-              <a:t> P2 ricompila e srotola: 14 668 → 18 801 istruzioni. P3 non si muove: 12 349 a ogni profondità.</a:t>
+              <a:t> P2 ricompila e srotola: </a:t>
+            </a:r>
+            <a:r>
+              <a:rPr lang="it-IT" sz="1400" b="0" i="0">
+                <a:solidFill>
+                  <a:srgbClr val="222B36"/>
+                </a:solidFill>
+                <a:latin typeface="Calibri"/>
+              </a:rPr>
+              <a:t>14 676</a:t>
+            </a:r>
+            <a:r>
+              <a:rPr sz="1400" b="0" i="0">
+                <a:solidFill>
+                  <a:srgbClr val="222B36"/>
+                </a:solidFill>
+                <a:latin typeface="Calibri"/>
+              </a:rPr>
+              <a:t> → </a:t>
+            </a:r>
+            <a:r>
+              <a:rPr lang="it-IT" sz="1400" b="0" i="0">
+                <a:solidFill>
+                  <a:srgbClr val="222B36"/>
+                </a:solidFill>
+                <a:latin typeface="Calibri"/>
+              </a:rPr>
+              <a:t>18 613</a:t>
+            </a:r>
+            <a:r>
+              <a:rPr sz="1400" b="0" i="0">
+                <a:solidFill>
+                  <a:srgbClr val="222B36"/>
+                </a:solidFill>
+                <a:latin typeface="Calibri"/>
+              </a:rPr>
+              <a:t> istruzioni. P3 non si muove: </a:t>
+            </a:r>
+            <a:r>
+              <a:rPr lang="it-IT" sz="1400" b="0" i="0">
+                <a:solidFill>
+                  <a:srgbClr val="222B36"/>
+                </a:solidFill>
+                <a:latin typeface="Calibri"/>
+              </a:rPr>
+              <a:t>12 374</a:t>
+            </a:r>
+            <a:r>
+              <a:rPr sz="1400" b="0" i="0">
+                <a:solidFill>
+                  <a:srgbClr val="222B36"/>
+                </a:solidFill>
+                <a:latin typeface="Calibri"/>
+              </a:rPr>
+              <a:t> a ogni profondità.</a:t>
             </a:r>
           </a:p>
         </p:txBody>
@@ -10931,8 +11070,8 @@
         </p:nvSpPr>
         <p:spPr>
           <a:xfrm>
-            <a:off x="1783080" y="5577840"/>
-            <a:ext cx="9677095" cy="777240"/>
+            <a:off x="1783080" y="5728991"/>
+            <a:ext cx="9677095" cy="474938"/>
           </a:xfrm>
           <a:prstGeom prst="rect">
             <a:avLst/>
@@ -10978,7 +11117,25 @@
                 </a:solidFill>
                 <a:latin typeface="Calibri"/>
               </a:rPr>
-              <a:t> si paga sempre: con P2 in un programma più grande da ricompilare (~830 istruzioni per strato), con P3 in </a:t>
+              <a:t> si paga sempre: con P2 in un programma più grande da ricompilare (</a:t>
+            </a:r>
+            <a:r>
+              <a:rPr lang="it-IT" sz="1500" b="0" i="0">
+                <a:solidFill>
+                  <a:srgbClr val="222B36"/>
+                </a:solidFill>
+                <a:latin typeface="Calibri"/>
+              </a:rPr>
+              <a:t>~790</a:t>
+            </a:r>
+            <a:r>
+              <a:rPr sz="1500" b="0" i="0">
+                <a:solidFill>
+                  <a:srgbClr val="222B36"/>
+                </a:solidFill>
+                <a:latin typeface="Calibri"/>
+              </a:rPr>
+              <a:t> istruzioni per strato), con P3 in </a:t>
             </a:r>
             <a:r>
               <a:rPr sz="1500" b="1" i="0">
@@ -12070,7 +12227,7 @@
         <p:spPr>
           <a:xfrm>
             <a:off x="548640" y="6446520"/>
-            <a:ext cx="10424160" cy="274320"/>
+            <a:ext cx="10424160" cy="176908"/>
           </a:xfrm>
           <a:prstGeom prst="rect">
             <a:avLst/>
@@ -12092,13 +12249,184 @@
               </a:spcAft>
             </a:pPr>
             <a:r>
-              <a:rPr sz="1100" b="0" i="1">
+              <a:rPr sz="1100" b="0" i="1" dirty="0" err="1">
                 <a:solidFill>
                   <a:srgbClr val="6B7C93"/>
                 </a:solidFill>
                 <a:latin typeface="Calibri"/>
               </a:rPr>
-              <a:t>Contando le moltiplicazioni dalla forma del modello, per P3 la retta spiega l'11 % dei punti; contando quelle eseguite, il 92 %  ·  rimisura del 23/09</a:t>
+              <a:t>Contando</a:t>
+            </a:r>
+            <a:r>
+              <a:rPr sz="1100" b="0" i="1" dirty="0">
+                <a:solidFill>
+                  <a:srgbClr val="6B7C93"/>
+                </a:solidFill>
+                <a:latin typeface="Calibri"/>
+              </a:rPr>
+              <a:t> le </a:t>
+            </a:r>
+            <a:r>
+              <a:rPr sz="1100" b="0" i="1" dirty="0" err="1">
+                <a:solidFill>
+                  <a:srgbClr val="6B7C93"/>
+                </a:solidFill>
+                <a:latin typeface="Calibri"/>
+              </a:rPr>
+              <a:t>moltiplicazioni</a:t>
+            </a:r>
+            <a:r>
+              <a:rPr sz="1100" b="0" i="1" dirty="0">
+                <a:solidFill>
+                  <a:srgbClr val="6B7C93"/>
+                </a:solidFill>
+                <a:latin typeface="Calibri"/>
+              </a:rPr>
+              <a:t> </a:t>
+            </a:r>
+            <a:r>
+              <a:rPr sz="1100" b="0" i="1" dirty="0" err="1">
+                <a:solidFill>
+                  <a:srgbClr val="6B7C93"/>
+                </a:solidFill>
+                <a:latin typeface="Calibri"/>
+              </a:rPr>
+              <a:t>dalla</a:t>
+            </a:r>
+            <a:r>
+              <a:rPr sz="1100" b="0" i="1" dirty="0">
+                <a:solidFill>
+                  <a:srgbClr val="6B7C93"/>
+                </a:solidFill>
+                <a:latin typeface="Calibri"/>
+              </a:rPr>
+              <a:t> forma del </a:t>
+            </a:r>
+            <a:r>
+              <a:rPr sz="1100" b="0" i="1" dirty="0" err="1">
+                <a:solidFill>
+                  <a:srgbClr val="6B7C93"/>
+                </a:solidFill>
+                <a:latin typeface="Calibri"/>
+              </a:rPr>
+              <a:t>modello</a:t>
+            </a:r>
+            <a:r>
+              <a:rPr sz="1100" b="0" i="1" dirty="0">
+                <a:solidFill>
+                  <a:srgbClr val="6B7C93"/>
+                </a:solidFill>
+                <a:latin typeface="Calibri"/>
+              </a:rPr>
+              <a:t>, per P3 la </a:t>
+            </a:r>
+            <a:r>
+              <a:rPr sz="1100" b="0" i="1" dirty="0" err="1">
+                <a:solidFill>
+                  <a:srgbClr val="6B7C93"/>
+                </a:solidFill>
+                <a:latin typeface="Calibri"/>
+              </a:rPr>
+              <a:t>retta</a:t>
+            </a:r>
+            <a:r>
+              <a:rPr sz="1100" b="0" i="1" dirty="0">
+                <a:solidFill>
+                  <a:srgbClr val="6B7C93"/>
+                </a:solidFill>
+                <a:latin typeface="Calibri"/>
+              </a:rPr>
+              <a:t> </a:t>
+            </a:r>
+            <a:r>
+              <a:rPr sz="1100" b="0" i="1" dirty="0" err="1">
+                <a:solidFill>
+                  <a:srgbClr val="6B7C93"/>
+                </a:solidFill>
+                <a:latin typeface="Calibri"/>
+              </a:rPr>
+              <a:t>spiega</a:t>
+            </a:r>
+            <a:r>
+              <a:rPr sz="1100" b="0" i="1" dirty="0">
+                <a:solidFill>
+                  <a:srgbClr val="6B7C93"/>
+                </a:solidFill>
+                <a:latin typeface="Calibri"/>
+              </a:rPr>
+              <a:t> l'11 % </a:t>
+            </a:r>
+            <a:r>
+              <a:rPr sz="1100" b="0" i="1" dirty="0" err="1">
+                <a:solidFill>
+                  <a:srgbClr val="6B7C93"/>
+                </a:solidFill>
+                <a:latin typeface="Calibri"/>
+              </a:rPr>
+              <a:t>dei</a:t>
+            </a:r>
+            <a:r>
+              <a:rPr sz="1100" b="0" i="1" dirty="0">
+                <a:solidFill>
+                  <a:srgbClr val="6B7C93"/>
+                </a:solidFill>
+                <a:latin typeface="Calibri"/>
+              </a:rPr>
+              <a:t> </a:t>
+            </a:r>
+            <a:r>
+              <a:rPr sz="1100" b="0" i="1" dirty="0" err="1">
+                <a:solidFill>
+                  <a:srgbClr val="6B7C93"/>
+                </a:solidFill>
+                <a:latin typeface="Calibri"/>
+              </a:rPr>
+              <a:t>punti</a:t>
+            </a:r>
+            <a:r>
+              <a:rPr sz="1100" b="0" i="1" dirty="0">
+                <a:solidFill>
+                  <a:srgbClr val="6B7C93"/>
+                </a:solidFill>
+                <a:latin typeface="Calibri"/>
+              </a:rPr>
+              <a:t>; </a:t>
+            </a:r>
+            <a:r>
+              <a:rPr sz="1100" b="0" i="1" dirty="0" err="1">
+                <a:solidFill>
+                  <a:srgbClr val="6B7C93"/>
+                </a:solidFill>
+                <a:latin typeface="Calibri"/>
+              </a:rPr>
+              <a:t>contando</a:t>
+            </a:r>
+            <a:r>
+              <a:rPr sz="1100" b="0" i="1" dirty="0">
+                <a:solidFill>
+                  <a:srgbClr val="6B7C93"/>
+                </a:solidFill>
+                <a:latin typeface="Calibri"/>
+              </a:rPr>
+              <a:t> quelle </a:t>
+            </a:r>
+            <a:r>
+              <a:rPr sz="1100" b="0" i="1" dirty="0" err="1">
+                <a:solidFill>
+                  <a:srgbClr val="6B7C93"/>
+                </a:solidFill>
+                <a:latin typeface="Calibri"/>
+              </a:rPr>
+              <a:t>eseguite</a:t>
+            </a:r>
+            <a:r>
+              <a:rPr sz="1100" b="0" i="1" dirty="0">
+                <a:solidFill>
+                  <a:srgbClr val="6B7C93"/>
+                </a:solidFill>
+                <a:latin typeface="Calibri"/>
+              </a:rPr>
+              <a:t>, il 92 % </a:t>
             </a:r>
           </a:p>
         </p:txBody>
@@ -28338,1157 +28666,6 @@
               </a:rPr>
               <a:t> a descrivere il costo del nodo: non dipende da taglia del pacchetto, classe decisa, porta d'uscita o TTL. Il traffico in bit al secondo cresce quindi con la taglia del pacchetto.</a:t>
             </a:r>
-          </a:p>
-        </p:txBody>
-      </p:sp>
-    </p:spTree>
-  </p:cSld>
-  <p:clrMapOvr>
-    <a:masterClrMapping/>
-  </p:clrMapOvr>
-</p:sld>
-</file>
-
-<file path=ppt/slides/slide23.xml><?xml version="1.0" encoding="utf-8"?>
-<p:sld xmlns:a="http://schemas.openxmlformats.org/drawingml/2006/main" xmlns:r="http://schemas.openxmlformats.org/officeDocument/2006/relationships" xmlns:p="http://schemas.openxmlformats.org/presentationml/2006/main">
-  <p:cSld>
-    <p:bg>
-      <p:bgPr>
-        <a:solidFill>
-          <a:srgbClr val="FFFFFF"/>
-        </a:solidFill>
-        <a:effectLst/>
-      </p:bgPr>
-    </p:bg>
-    <p:spTree>
-      <p:nvGrpSpPr>
-        <p:cNvPr id="1" name=""/>
-        <p:cNvGrpSpPr/>
-        <p:nvPr/>
-      </p:nvGrpSpPr>
-      <p:grpSpPr>
-        <a:xfrm>
-          <a:off x="0" y="0"/>
-          <a:ext cx="0" cy="0"/>
-          <a:chOff x="0" y="0"/>
-          <a:chExt cx="0" cy="0"/>
-        </a:xfrm>
-      </p:grpSpPr>
-      <p:sp>
-        <p:nvSpPr>
-          <p:cNvPr id="2" name="Rectangle 1"/>
-          <p:cNvSpPr/>
-          <p:nvPr/>
-        </p:nvSpPr>
-        <p:spPr>
-          <a:xfrm>
-            <a:off x="0" y="0"/>
-            <a:ext cx="12191695" cy="109728"/>
-          </a:xfrm>
-          <a:prstGeom prst="rect">
-            <a:avLst/>
-          </a:prstGeom>
-          <a:solidFill>
-            <a:srgbClr val="1F3A5F"/>
-          </a:solidFill>
-          <a:ln>
-            <a:noFill/>
-          </a:ln>
-          <a:effectLst/>
-        </p:spPr>
-        <p:style>
-          <a:lnRef idx="1">
-            <a:schemeClr val="accent1"/>
-          </a:lnRef>
-          <a:fillRef idx="3">
-            <a:schemeClr val="accent1"/>
-          </a:fillRef>
-          <a:effectRef idx="2">
-            <a:schemeClr val="accent1"/>
-          </a:effectRef>
-          <a:fontRef idx="minor">
-            <a:schemeClr val="lt1"/>
-          </a:fontRef>
-        </p:style>
-        <p:txBody>
-          <a:bodyPr rtlCol="0" anchor="ctr"/>
-          <a:lstStyle/>
-          <a:p>
-            <a:endParaRPr/>
-          </a:p>
-        </p:txBody>
-      </p:sp>
-      <p:sp>
-        <p:nvSpPr>
-          <p:cNvPr id="3" name="TextBox 2"/>
-          <p:cNvSpPr txBox="1"/>
-          <p:nvPr/>
-        </p:nvSpPr>
-        <p:spPr>
-          <a:xfrm>
-            <a:off x="548640" y="384048"/>
-            <a:ext cx="10972800" cy="274320"/>
-          </a:xfrm>
-          <a:prstGeom prst="rect">
-            <a:avLst/>
-          </a:prstGeom>
-          <a:noFill/>
-        </p:spPr>
-        <p:txBody>
-          <a:bodyPr wrap="square" lIns="0" tIns="0" rIns="0" bIns="0" anchor="t">
-            <a:spAutoFit/>
-          </a:bodyPr>
-          <a:lstStyle/>
-          <a:p>
-            <a:pPr algn="l">
-              <a:lnSpc>
-                <a:spcPct val="110000"/>
-              </a:lnSpc>
-              <a:spcAft>
-                <a:spcPts val="600"/>
-              </a:spcAft>
-            </a:pPr>
-            <a:r>
-              <a:rPr sz="1200" b="1" i="0">
-                <a:solidFill>
-                  <a:srgbClr val="E07A2D"/>
-                </a:solidFill>
-                <a:latin typeface="Calibri"/>
-              </a:rPr>
-              <a:t>LE ALTRE CORREZIONI DI SETTEMBRE</a:t>
-            </a:r>
-          </a:p>
-        </p:txBody>
-      </p:sp>
-      <p:sp>
-        <p:nvSpPr>
-          <p:cNvPr id="4" name="TextBox 3"/>
-          <p:cNvSpPr txBox="1"/>
-          <p:nvPr/>
-        </p:nvSpPr>
-        <p:spPr>
-          <a:xfrm>
-            <a:off x="548640" y="658368"/>
-            <a:ext cx="11064240" cy="822960"/>
-          </a:xfrm>
-          <a:prstGeom prst="rect">
-            <a:avLst/>
-          </a:prstGeom>
-          <a:noFill/>
-        </p:spPr>
-        <p:txBody>
-          <a:bodyPr wrap="square" lIns="0" tIns="0" rIns="0" bIns="0" anchor="t">
-            <a:spAutoFit/>
-          </a:bodyPr>
-          <a:lstStyle/>
-          <a:p>
-            <a:pPr algn="l">
-              <a:lnSpc>
-                <a:spcPct val="100000"/>
-              </a:lnSpc>
-              <a:spcAft>
-                <a:spcPts val="600"/>
-              </a:spcAft>
-            </a:pPr>
-            <a:r>
-              <a:rPr sz="3000" b="1" i="0">
-                <a:solidFill>
-                  <a:srgbClr val="1F3A5F"/>
-                </a:solidFill>
-                <a:latin typeface="Calibri"/>
-              </a:rPr>
-              <a:t>Quello che non si vedeva dai test</a:t>
-            </a:r>
-          </a:p>
-        </p:txBody>
-      </p:sp>
-      <p:sp>
-        <p:nvSpPr>
-          <p:cNvPr id="5" name="TextBox 4"/>
-          <p:cNvSpPr txBox="1"/>
-          <p:nvPr/>
-        </p:nvSpPr>
-        <p:spPr>
-          <a:xfrm>
-            <a:off x="11292840" y="6446520"/>
-            <a:ext cx="457200" cy="176908"/>
-          </a:xfrm>
-          <a:prstGeom prst="rect">
-            <a:avLst/>
-          </a:prstGeom>
-          <a:noFill/>
-        </p:spPr>
-        <p:txBody>
-          <a:bodyPr wrap="square" lIns="0" tIns="0" rIns="0" bIns="0" anchor="t">
-            <a:spAutoFit/>
-          </a:bodyPr>
-          <a:lstStyle/>
-          <a:p>
-            <a:pPr algn="r">
-              <a:lnSpc>
-                <a:spcPct val="110000"/>
-              </a:lnSpc>
-              <a:spcAft>
-                <a:spcPts val="600"/>
-              </a:spcAft>
-            </a:pPr>
-            <a:r>
-              <a:rPr lang="it-IT" sz="1100" b="0" i="0">
-                <a:solidFill>
-                  <a:srgbClr val="6B7C93"/>
-                </a:solidFill>
-                <a:latin typeface="Calibri"/>
-              </a:rPr>
-              <a:t>23</a:t>
-            </a:r>
-            <a:endParaRPr sz="1100" b="0" i="0">
-              <a:solidFill>
-                <a:srgbClr val="6B7C93"/>
-              </a:solidFill>
-              <a:latin typeface="Calibri"/>
-            </a:endParaRPr>
-          </a:p>
-        </p:txBody>
-      </p:sp>
-      <p:sp>
-        <p:nvSpPr>
-          <p:cNvPr id="6" name="TextBox 5"/>
-          <p:cNvSpPr txBox="1"/>
-          <p:nvPr/>
-        </p:nvSpPr>
-        <p:spPr>
-          <a:xfrm>
-            <a:off x="548640" y="6446520"/>
-            <a:ext cx="10424160" cy="274320"/>
-          </a:xfrm>
-          <a:prstGeom prst="rect">
-            <a:avLst/>
-          </a:prstGeom>
-          <a:noFill/>
-        </p:spPr>
-        <p:txBody>
-          <a:bodyPr wrap="square" lIns="0" tIns="0" rIns="0" bIns="0" anchor="t">
-            <a:spAutoFit/>
-          </a:bodyPr>
-          <a:lstStyle/>
-          <a:p>
-            <a:pPr algn="l">
-              <a:lnSpc>
-                <a:spcPct val="110000"/>
-              </a:lnSpc>
-              <a:spcAft>
-                <a:spcPts val="600"/>
-              </a:spcAft>
-            </a:pPr>
-            <a:r>
-              <a:rPr sz="1100" b="0" i="1">
-                <a:solidFill>
-                  <a:srgbClr val="6B7C93"/>
-                </a:solidFill>
-                <a:latin typeface="Calibri"/>
-              </a:rPr>
-              <a:t>Tutto verificato sul kernel della macchina virtuale  ·  dettagli nel quaderno, capitolo 14</a:t>
-            </a:r>
-          </a:p>
-        </p:txBody>
-      </p:sp>
-      <p:sp>
-        <p:nvSpPr>
-          <p:cNvPr id="7" name="Rounded Rectangle 6"/>
-          <p:cNvSpPr/>
-          <p:nvPr/>
-        </p:nvSpPr>
-        <p:spPr>
-          <a:xfrm>
-            <a:off x="548640" y="1600200"/>
-            <a:ext cx="5440680" cy="2103120"/>
-          </a:xfrm>
-          <a:prstGeom prst="roundRect">
-            <a:avLst>
-              <a:gd name="adj" fmla="val 6000"/>
-            </a:avLst>
-          </a:prstGeom>
-          <a:solidFill>
-            <a:srgbClr val="F3F5F8"/>
-          </a:solidFill>
-          <a:ln>
-            <a:noFill/>
-          </a:ln>
-          <a:effectLst/>
-        </p:spPr>
-        <p:style>
-          <a:lnRef idx="1">
-            <a:schemeClr val="accent1"/>
-          </a:lnRef>
-          <a:fillRef idx="3">
-            <a:schemeClr val="accent1"/>
-          </a:fillRef>
-          <a:effectRef idx="2">
-            <a:schemeClr val="accent1"/>
-          </a:effectRef>
-          <a:fontRef idx="minor">
-            <a:schemeClr val="lt1"/>
-          </a:fontRef>
-        </p:style>
-        <p:txBody>
-          <a:bodyPr rtlCol="0" anchor="ctr"/>
-          <a:lstStyle/>
-          <a:p>
-            <a:endParaRPr/>
-          </a:p>
-        </p:txBody>
-      </p:sp>
-      <p:sp>
-        <p:nvSpPr>
-          <p:cNvPr id="8" name="Rectangle 7"/>
-          <p:cNvSpPr/>
-          <p:nvPr/>
-        </p:nvSpPr>
-        <p:spPr>
-          <a:xfrm>
-            <a:off x="548640" y="1600200"/>
-            <a:ext cx="82296" cy="2103120"/>
-          </a:xfrm>
-          <a:prstGeom prst="rect">
-            <a:avLst/>
-          </a:prstGeom>
-          <a:solidFill>
-            <a:srgbClr val="C0443C"/>
-          </a:solidFill>
-          <a:ln>
-            <a:noFill/>
-          </a:ln>
-          <a:effectLst/>
-        </p:spPr>
-        <p:style>
-          <a:lnRef idx="1">
-            <a:schemeClr val="accent1"/>
-          </a:lnRef>
-          <a:fillRef idx="3">
-            <a:schemeClr val="accent1"/>
-          </a:fillRef>
-          <a:effectRef idx="2">
-            <a:schemeClr val="accent1"/>
-          </a:effectRef>
-          <a:fontRef idx="minor">
-            <a:schemeClr val="lt1"/>
-          </a:fontRef>
-        </p:style>
-        <p:txBody>
-          <a:bodyPr rtlCol="0" anchor="ctr"/>
-          <a:lstStyle/>
-          <a:p>
-            <a:endParaRPr/>
-          </a:p>
-        </p:txBody>
-      </p:sp>
-      <p:sp>
-        <p:nvSpPr>
-          <p:cNvPr id="9" name="TextBox 8"/>
-          <p:cNvSpPr txBox="1"/>
-          <p:nvPr/>
-        </p:nvSpPr>
-        <p:spPr>
-          <a:xfrm>
-            <a:off x="822960" y="1764792"/>
-            <a:ext cx="5029200" cy="457200"/>
-          </a:xfrm>
-          <a:prstGeom prst="rect">
-            <a:avLst/>
-          </a:prstGeom>
-          <a:noFill/>
-        </p:spPr>
-        <p:txBody>
-          <a:bodyPr wrap="square" lIns="0" tIns="0" rIns="0" bIns="0" anchor="t">
-            <a:spAutoFit/>
-          </a:bodyPr>
-          <a:lstStyle/>
-          <a:p>
-            <a:pPr algn="l">
-              <a:lnSpc>
-                <a:spcPct val="110000"/>
-              </a:lnSpc>
-              <a:spcAft>
-                <a:spcPts val="600"/>
-              </a:spcAft>
-            </a:pPr>
-            <a:r>
-              <a:rPr sz="1700" b="1" i="0">
-                <a:solidFill>
-                  <a:srgbClr val="C0443C"/>
-                </a:solidFill>
-                <a:latin typeface="Calibri"/>
-              </a:rPr>
-              <a:t>Il P1 dei nodi non inoltrava</a:t>
-            </a:r>
-          </a:p>
-        </p:txBody>
-      </p:sp>
-      <p:sp>
-        <p:nvSpPr>
-          <p:cNvPr id="10" name="TextBox 9"/>
-          <p:cNvSpPr txBox="1"/>
-          <p:nvPr/>
-        </p:nvSpPr>
-        <p:spPr>
-          <a:xfrm>
-            <a:off x="822960" y="2176272"/>
-            <a:ext cx="5029200" cy="1481328"/>
-          </a:xfrm>
-          <a:prstGeom prst="rect">
-            <a:avLst/>
-          </a:prstGeom>
-          <a:noFill/>
-        </p:spPr>
-        <p:txBody>
-          <a:bodyPr wrap="square" lIns="0" tIns="0" rIns="0" bIns="0" anchor="t">
-            <a:spAutoFit/>
-          </a:bodyPr>
-          <a:lstStyle/>
-          <a:p>
-            <a:pPr algn="l">
-              <a:lnSpc>
-                <a:spcPct val="110000"/>
-              </a:lnSpc>
-              <a:spcAft>
-                <a:spcPts val="600"/>
-              </a:spcAft>
-            </a:pPr>
-            <a:r>
-              <a:rPr sz="1600" b="0" i="0">
-                <a:solidFill>
-                  <a:srgbClr val="222B36"/>
-                </a:solidFill>
-                <a:latin typeface="Calibri"/>
-              </a:rPr>
-              <a:t>L'oggetto precompilato mandava ogni pacchetto a </a:t>
-            </a:r>
-            <a:r>
-              <a:rPr sz="1600" b="1" i="0">
-                <a:solidFill>
-                  <a:srgbClr val="222B36"/>
-                </a:solidFill>
-                <a:latin typeface="Calibri"/>
-              </a:rPr>
-              <a:t>loopback</a:t>
-            </a:r>
-            <a:r>
-              <a:rPr sz="1600" b="0" i="0">
-                <a:solidFill>
-                  <a:srgbClr val="222B36"/>
-                </a:solidFill>
-                <a:latin typeface="Calibri"/>
-              </a:rPr>
-              <a:t>. Corretto: consegna </a:t>
-            </a:r>
-            <a:r>
-              <a:rPr sz="1600" b="1" i="0">
-                <a:solidFill>
-                  <a:srgbClr val="222B36"/>
-                </a:solidFill>
-                <a:latin typeface="Calibri"/>
-              </a:rPr>
-              <a:t>11 su 11</a:t>
-            </a:r>
-            <a:r>
-              <a:rPr sz="1600" b="0" i="0">
-                <a:solidFill>
-                  <a:srgbClr val="222B36"/>
-                </a:solidFill>
-                <a:latin typeface="Calibri"/>
-              </a:rPr>
-              <a:t>.</a:t>
-            </a:r>
-          </a:p>
-        </p:txBody>
-      </p:sp>
-      <p:sp>
-        <p:nvSpPr>
-          <p:cNvPr id="11" name="Rounded Rectangle 10"/>
-          <p:cNvSpPr/>
-          <p:nvPr/>
-        </p:nvSpPr>
-        <p:spPr>
-          <a:xfrm>
-            <a:off x="6217920" y="1600200"/>
-            <a:ext cx="5440680" cy="2103120"/>
-          </a:xfrm>
-          <a:prstGeom prst="roundRect">
-            <a:avLst>
-              <a:gd name="adj" fmla="val 6000"/>
-            </a:avLst>
-          </a:prstGeom>
-          <a:solidFill>
-            <a:srgbClr val="F3F5F8"/>
-          </a:solidFill>
-          <a:ln>
-            <a:noFill/>
-          </a:ln>
-          <a:effectLst/>
-        </p:spPr>
-        <p:style>
-          <a:lnRef idx="1">
-            <a:schemeClr val="accent1"/>
-          </a:lnRef>
-          <a:fillRef idx="3">
-            <a:schemeClr val="accent1"/>
-          </a:fillRef>
-          <a:effectRef idx="2">
-            <a:schemeClr val="accent1"/>
-          </a:effectRef>
-          <a:fontRef idx="minor">
-            <a:schemeClr val="lt1"/>
-          </a:fontRef>
-        </p:style>
-        <p:txBody>
-          <a:bodyPr rtlCol="0" anchor="ctr"/>
-          <a:lstStyle/>
-          <a:p>
-            <a:endParaRPr/>
-          </a:p>
-        </p:txBody>
-      </p:sp>
-      <p:sp>
-        <p:nvSpPr>
-          <p:cNvPr id="12" name="Rectangle 11"/>
-          <p:cNvSpPr/>
-          <p:nvPr/>
-        </p:nvSpPr>
-        <p:spPr>
-          <a:xfrm>
-            <a:off x="6217920" y="1600200"/>
-            <a:ext cx="82296" cy="2103120"/>
-          </a:xfrm>
-          <a:prstGeom prst="rect">
-            <a:avLst/>
-          </a:prstGeom>
-          <a:solidFill>
-            <a:srgbClr val="1F3A5F"/>
-          </a:solidFill>
-          <a:ln>
-            <a:noFill/>
-          </a:ln>
-          <a:effectLst/>
-        </p:spPr>
-        <p:style>
-          <a:lnRef idx="1">
-            <a:schemeClr val="accent1"/>
-          </a:lnRef>
-          <a:fillRef idx="3">
-            <a:schemeClr val="accent1"/>
-          </a:fillRef>
-          <a:effectRef idx="2">
-            <a:schemeClr val="accent1"/>
-          </a:effectRef>
-          <a:fontRef idx="minor">
-            <a:schemeClr val="lt1"/>
-          </a:fontRef>
-        </p:style>
-        <p:txBody>
-          <a:bodyPr rtlCol="0" anchor="ctr"/>
-          <a:lstStyle/>
-          <a:p>
-            <a:endParaRPr/>
-          </a:p>
-        </p:txBody>
-      </p:sp>
-      <p:sp>
-        <p:nvSpPr>
-          <p:cNvPr id="13" name="TextBox 12"/>
-          <p:cNvSpPr txBox="1"/>
-          <p:nvPr/>
-        </p:nvSpPr>
-        <p:spPr>
-          <a:xfrm>
-            <a:off x="6492240" y="1764792"/>
-            <a:ext cx="5029200" cy="457200"/>
-          </a:xfrm>
-          <a:prstGeom prst="rect">
-            <a:avLst/>
-          </a:prstGeom>
-          <a:noFill/>
-        </p:spPr>
-        <p:txBody>
-          <a:bodyPr wrap="square" lIns="0" tIns="0" rIns="0" bIns="0" anchor="t">
-            <a:spAutoFit/>
-          </a:bodyPr>
-          <a:lstStyle/>
-          <a:p>
-            <a:pPr algn="l">
-              <a:lnSpc>
-                <a:spcPct val="110000"/>
-              </a:lnSpc>
-              <a:spcAft>
-                <a:spcPts val="600"/>
-              </a:spcAft>
-            </a:pPr>
-            <a:r>
-              <a:rPr sz="1700" b="1" i="0">
-                <a:solidFill>
-                  <a:srgbClr val="1F3A5F"/>
-                </a:solidFill>
-                <a:latin typeface="Calibri"/>
-              </a:rPr>
-              <a:t>Tutti i test di P1 sull'oggetto vero</a:t>
-            </a:r>
-          </a:p>
-        </p:txBody>
-      </p:sp>
-      <p:sp>
-        <p:nvSpPr>
-          <p:cNvPr id="14" name="TextBox 13"/>
-          <p:cNvSpPr txBox="1"/>
-          <p:nvPr/>
-        </p:nvSpPr>
-        <p:spPr>
-          <a:xfrm>
-            <a:off x="6492240" y="2176272"/>
-            <a:ext cx="5029200" cy="528093"/>
-          </a:xfrm>
-          <a:prstGeom prst="rect">
-            <a:avLst/>
-          </a:prstGeom>
-          <a:noFill/>
-        </p:spPr>
-        <p:txBody>
-          <a:bodyPr wrap="square" lIns="0" tIns="0" rIns="0" bIns="0" anchor="t">
-            <a:spAutoFit/>
-          </a:bodyPr>
-          <a:lstStyle/>
-          <a:p>
-            <a:pPr algn="l">
-              <a:lnSpc>
-                <a:spcPct val="110000"/>
-              </a:lnSpc>
-              <a:spcAft>
-                <a:spcPts val="600"/>
-              </a:spcAft>
-            </a:pPr>
-            <a:r>
-              <a:rPr sz="1600" b="0" i="0">
-                <a:solidFill>
-                  <a:srgbClr val="222B36"/>
-                </a:solidFill>
-                <a:latin typeface="Calibri"/>
-              </a:rPr>
-              <a:t>Consegna 29/29, semantica 72/72, </a:t>
-            </a:r>
-            <a:r>
-              <a:rPr lang="it-IT" sz="1600" b="0" i="0">
-                <a:solidFill>
-                  <a:srgbClr val="222B36"/>
-                </a:solidFill>
-                <a:latin typeface="Calibri"/>
-              </a:rPr>
-              <a:t>modelli generati 63/63</a:t>
-            </a:r>
-            <a:r>
-              <a:rPr sz="1600" b="0" i="0">
-                <a:solidFill>
-                  <a:srgbClr val="222B36"/>
-                </a:solidFill>
-                <a:latin typeface="Calibri"/>
-              </a:rPr>
-              <a:t>, P1 statica = P1.5 </a:t>
-            </a:r>
-            <a:r>
-              <a:rPr sz="1600" b="1" i="0">
-                <a:solidFill>
-                  <a:srgbClr val="222B36"/>
-                </a:solidFill>
-                <a:latin typeface="Calibri"/>
-              </a:rPr>
-              <a:t>80/80</a:t>
-            </a:r>
-            <a:r>
-              <a:rPr sz="1600" b="0" i="0">
-                <a:solidFill>
-                  <a:srgbClr val="222B36"/>
-                </a:solidFill>
-                <a:latin typeface="Calibri"/>
-              </a:rPr>
-              <a:t>.</a:t>
-            </a:r>
-          </a:p>
-        </p:txBody>
-      </p:sp>
-      <p:sp>
-        <p:nvSpPr>
-          <p:cNvPr id="15" name="Rounded Rectangle 14"/>
-          <p:cNvSpPr/>
-          <p:nvPr/>
-        </p:nvSpPr>
-        <p:spPr>
-          <a:xfrm>
-            <a:off x="548640" y="3931920"/>
-            <a:ext cx="5440680" cy="2103120"/>
-          </a:xfrm>
-          <a:prstGeom prst="roundRect">
-            <a:avLst>
-              <a:gd name="adj" fmla="val 6000"/>
-            </a:avLst>
-          </a:prstGeom>
-          <a:solidFill>
-            <a:srgbClr val="F3F5F8"/>
-          </a:solidFill>
-          <a:ln>
-            <a:noFill/>
-          </a:ln>
-          <a:effectLst/>
-        </p:spPr>
-        <p:style>
-          <a:lnRef idx="1">
-            <a:schemeClr val="accent1"/>
-          </a:lnRef>
-          <a:fillRef idx="3">
-            <a:schemeClr val="accent1"/>
-          </a:fillRef>
-          <a:effectRef idx="2">
-            <a:schemeClr val="accent1"/>
-          </a:effectRef>
-          <a:fontRef idx="minor">
-            <a:schemeClr val="lt1"/>
-          </a:fontRef>
-        </p:style>
-        <p:txBody>
-          <a:bodyPr rtlCol="0" anchor="ctr"/>
-          <a:lstStyle/>
-          <a:p>
-            <a:endParaRPr/>
-          </a:p>
-        </p:txBody>
-      </p:sp>
-      <p:sp>
-        <p:nvSpPr>
-          <p:cNvPr id="16" name="Rectangle 15"/>
-          <p:cNvSpPr/>
-          <p:nvPr/>
-        </p:nvSpPr>
-        <p:spPr>
-          <a:xfrm>
-            <a:off x="548640" y="3931920"/>
-            <a:ext cx="82296" cy="2103120"/>
-          </a:xfrm>
-          <a:prstGeom prst="rect">
-            <a:avLst/>
-          </a:prstGeom>
-          <a:solidFill>
-            <a:srgbClr val="2E9C6E"/>
-          </a:solidFill>
-          <a:ln>
-            <a:noFill/>
-          </a:ln>
-          <a:effectLst/>
-        </p:spPr>
-        <p:style>
-          <a:lnRef idx="1">
-            <a:schemeClr val="accent1"/>
-          </a:lnRef>
-          <a:fillRef idx="3">
-            <a:schemeClr val="accent1"/>
-          </a:fillRef>
-          <a:effectRef idx="2">
-            <a:schemeClr val="accent1"/>
-          </a:effectRef>
-          <a:fontRef idx="minor">
-            <a:schemeClr val="lt1"/>
-          </a:fontRef>
-        </p:style>
-        <p:txBody>
-          <a:bodyPr rtlCol="0" anchor="ctr"/>
-          <a:lstStyle/>
-          <a:p>
-            <a:endParaRPr/>
-          </a:p>
-        </p:txBody>
-      </p:sp>
-      <p:sp>
-        <p:nvSpPr>
-          <p:cNvPr id="17" name="TextBox 16"/>
-          <p:cNvSpPr txBox="1"/>
-          <p:nvPr/>
-        </p:nvSpPr>
-        <p:spPr>
-          <a:xfrm>
-            <a:off x="822960" y="4096512"/>
-            <a:ext cx="5029200" cy="457200"/>
-          </a:xfrm>
-          <a:prstGeom prst="rect">
-            <a:avLst/>
-          </a:prstGeom>
-          <a:noFill/>
-        </p:spPr>
-        <p:txBody>
-          <a:bodyPr wrap="square" lIns="0" tIns="0" rIns="0" bIns="0" anchor="t">
-            <a:spAutoFit/>
-          </a:bodyPr>
-          <a:lstStyle/>
-          <a:p>
-            <a:pPr algn="l">
-              <a:lnSpc>
-                <a:spcPct val="110000"/>
-              </a:lnSpc>
-              <a:spcAft>
-                <a:spcPts val="600"/>
-              </a:spcAft>
-            </a:pPr>
-            <a:r>
-              <a:rPr sz="1700" b="1" i="0">
-                <a:solidFill>
-                  <a:srgbClr val="2E9C6E"/>
-                </a:solidFill>
-                <a:latin typeface="Calibri"/>
-              </a:rPr>
-              <a:t>Riferimento = codice generato</a:t>
-            </a:r>
-          </a:p>
-        </p:txBody>
-      </p:sp>
-      <p:sp>
-        <p:nvSpPr>
-          <p:cNvPr id="18" name="TextBox 17"/>
-          <p:cNvSpPr txBox="1"/>
-          <p:nvPr/>
-        </p:nvSpPr>
-        <p:spPr>
-          <a:xfrm>
-            <a:off x="822960" y="4507992"/>
-            <a:ext cx="5029200" cy="1481328"/>
-          </a:xfrm>
-          <a:prstGeom prst="rect">
-            <a:avLst/>
-          </a:prstGeom>
-          <a:noFill/>
-        </p:spPr>
-        <p:txBody>
-          <a:bodyPr wrap="square" lIns="0" tIns="0" rIns="0" bIns="0" anchor="t">
-            <a:spAutoFit/>
-          </a:bodyPr>
-          <a:lstStyle/>
-          <a:p>
-            <a:pPr algn="l">
-              <a:lnSpc>
-                <a:spcPct val="110000"/>
-              </a:lnSpc>
-              <a:spcAft>
-                <a:spcPts val="600"/>
-              </a:spcAft>
-            </a:pPr>
-            <a:r>
-              <a:rPr sz="1600" b="0" i="0">
-                <a:solidFill>
-                  <a:srgbClr val="222B36"/>
-                </a:solidFill>
-                <a:latin typeface="Calibri"/>
-              </a:rPr>
-              <a:t>Python e il C di P1 confrontati numero per numero su </a:t>
-            </a:r>
-            <a:r>
-              <a:rPr sz="1600" b="1" i="0">
-                <a:solidFill>
-                  <a:srgbClr val="222B36"/>
-                </a:solidFill>
-                <a:latin typeface="Calibri"/>
-              </a:rPr>
-              <a:t>8 modelli × 300 ingressi</a:t>
-            </a:r>
-            <a:r>
-              <a:rPr sz="1600" b="0" i="0">
-                <a:solidFill>
-                  <a:srgbClr val="222B36"/>
-                </a:solidFill>
-                <a:latin typeface="Calibri"/>
-              </a:rPr>
-              <a:t>.</a:t>
-            </a:r>
-          </a:p>
-        </p:txBody>
-      </p:sp>
-      <p:sp>
-        <p:nvSpPr>
-          <p:cNvPr id="19" name="Rounded Rectangle 18"/>
-          <p:cNvSpPr/>
-          <p:nvPr/>
-        </p:nvSpPr>
-        <p:spPr>
-          <a:xfrm>
-            <a:off x="6217920" y="3931920"/>
-            <a:ext cx="5440680" cy="2103120"/>
-          </a:xfrm>
-          <a:prstGeom prst="roundRect">
-            <a:avLst>
-              <a:gd name="adj" fmla="val 6000"/>
-            </a:avLst>
-          </a:prstGeom>
-          <a:solidFill>
-            <a:srgbClr val="F3F5F8"/>
-          </a:solidFill>
-          <a:ln>
-            <a:noFill/>
-          </a:ln>
-          <a:effectLst/>
-        </p:spPr>
-        <p:style>
-          <a:lnRef idx="1">
-            <a:schemeClr val="accent1"/>
-          </a:lnRef>
-          <a:fillRef idx="3">
-            <a:schemeClr val="accent1"/>
-          </a:fillRef>
-          <a:effectRef idx="2">
-            <a:schemeClr val="accent1"/>
-          </a:effectRef>
-          <a:fontRef idx="minor">
-            <a:schemeClr val="lt1"/>
-          </a:fontRef>
-        </p:style>
-        <p:txBody>
-          <a:bodyPr rtlCol="0" anchor="ctr"/>
-          <a:lstStyle/>
-          <a:p>
-            <a:endParaRPr/>
-          </a:p>
-        </p:txBody>
-      </p:sp>
-      <p:sp>
-        <p:nvSpPr>
-          <p:cNvPr id="20" name="Rectangle 19"/>
-          <p:cNvSpPr/>
-          <p:nvPr/>
-        </p:nvSpPr>
-        <p:spPr>
-          <a:xfrm>
-            <a:off x="6217920" y="3931920"/>
-            <a:ext cx="82296" cy="2103120"/>
-          </a:xfrm>
-          <a:prstGeom prst="rect">
-            <a:avLst/>
-          </a:prstGeom>
-          <a:solidFill>
-            <a:srgbClr val="E07A2D"/>
-          </a:solidFill>
-          <a:ln>
-            <a:noFill/>
-          </a:ln>
-          <a:effectLst/>
-        </p:spPr>
-        <p:style>
-          <a:lnRef idx="1">
-            <a:schemeClr val="accent1"/>
-          </a:lnRef>
-          <a:fillRef idx="3">
-            <a:schemeClr val="accent1"/>
-          </a:fillRef>
-          <a:effectRef idx="2">
-            <a:schemeClr val="accent1"/>
-          </a:effectRef>
-          <a:fontRef idx="minor">
-            <a:schemeClr val="lt1"/>
-          </a:fontRef>
-        </p:style>
-        <p:txBody>
-          <a:bodyPr rtlCol="0" anchor="ctr"/>
-          <a:lstStyle/>
-          <a:p>
-            <a:endParaRPr/>
-          </a:p>
-        </p:txBody>
-      </p:sp>
-      <p:sp>
-        <p:nvSpPr>
-          <p:cNvPr id="21" name="TextBox 20"/>
-          <p:cNvSpPr txBox="1"/>
-          <p:nvPr/>
-        </p:nvSpPr>
-        <p:spPr>
-          <a:xfrm>
-            <a:off x="6492240" y="4096512"/>
-            <a:ext cx="5029200" cy="457200"/>
-          </a:xfrm>
-          <a:prstGeom prst="rect">
-            <a:avLst/>
-          </a:prstGeom>
-          <a:noFill/>
-        </p:spPr>
-        <p:txBody>
-          <a:bodyPr wrap="square" lIns="0" tIns="0" rIns="0" bIns="0" anchor="t">
-            <a:spAutoFit/>
-          </a:bodyPr>
-          <a:lstStyle/>
-          <a:p>
-            <a:pPr algn="l">
-              <a:lnSpc>
-                <a:spcPct val="110000"/>
-              </a:lnSpc>
-              <a:spcAft>
-                <a:spcPts val="600"/>
-              </a:spcAft>
-            </a:pPr>
-            <a:r>
-              <a:rPr sz="1700" b="1" i="0">
-                <a:solidFill>
-                  <a:srgbClr val="E07A2D"/>
-                </a:solidFill>
-                <a:latin typeface="Calibri"/>
-              </a:rPr>
-              <a:t>La scala letta davvero in P2 e P3</a:t>
-            </a:r>
-          </a:p>
-        </p:txBody>
-      </p:sp>
-      <p:sp>
-        <p:nvSpPr>
-          <p:cNvPr id="22" name="TextBox 21"/>
-          <p:cNvSpPr txBox="1"/>
-          <p:nvPr/>
-        </p:nvSpPr>
-        <p:spPr>
-          <a:xfrm>
-            <a:off x="6492240" y="4507992"/>
-            <a:ext cx="5029200" cy="528093"/>
-          </a:xfrm>
-          <a:prstGeom prst="rect">
-            <a:avLst/>
-          </a:prstGeom>
-          <a:noFill/>
-        </p:spPr>
-        <p:txBody>
-          <a:bodyPr wrap="square" lIns="0" tIns="0" rIns="0" bIns="0" anchor="t">
-            <a:spAutoFit/>
-          </a:bodyPr>
-          <a:lstStyle/>
-          <a:p>
-            <a:pPr algn="l">
-              <a:lnSpc>
-                <a:spcPct val="110000"/>
-              </a:lnSpc>
-              <a:spcAft>
-                <a:spcPts val="600"/>
-              </a:spcAft>
-            </a:pPr>
-            <a:r>
-              <a:rPr sz="1600" b="0" i="0" dirty="0" err="1">
-                <a:solidFill>
-                  <a:srgbClr val="222B36"/>
-                </a:solidFill>
-                <a:latin typeface="Calibri"/>
-              </a:rPr>
-              <a:t>Alterandola</a:t>
-            </a:r>
-            <a:r>
-              <a:rPr sz="1600" b="0" i="0" dirty="0">
-                <a:solidFill>
-                  <a:srgbClr val="222B36"/>
-                </a:solidFill>
-                <a:latin typeface="Calibri"/>
-              </a:rPr>
-              <a:t> le </a:t>
-            </a:r>
-            <a:r>
-              <a:rPr sz="1600" b="0" i="0" dirty="0" err="1">
-                <a:solidFill>
-                  <a:srgbClr val="222B36"/>
-                </a:solidFill>
-                <a:latin typeface="Calibri"/>
-              </a:rPr>
-              <a:t>decisioni</a:t>
-            </a:r>
-            <a:r>
-              <a:rPr sz="1600" b="0" i="0" dirty="0">
-                <a:solidFill>
-                  <a:srgbClr val="222B36"/>
-                </a:solidFill>
-                <a:latin typeface="Calibri"/>
-              </a:rPr>
-              <a:t> </a:t>
-            </a:r>
-            <a:r>
-              <a:rPr sz="1600" b="0" i="0" dirty="0" err="1">
-                <a:solidFill>
-                  <a:srgbClr val="222B36"/>
-                </a:solidFill>
-                <a:latin typeface="Calibri"/>
-              </a:rPr>
-              <a:t>cambiano</a:t>
-            </a:r>
-            <a:r>
-              <a:rPr sz="1600" b="0" i="0" dirty="0">
-                <a:solidFill>
-                  <a:srgbClr val="222B36"/>
-                </a:solidFill>
-                <a:latin typeface="Calibri"/>
-              </a:rPr>
-              <a:t>; </a:t>
-            </a:r>
-            <a:r>
-              <a:rPr sz="1600" b="0" i="0" dirty="0" err="1">
-                <a:solidFill>
-                  <a:srgbClr val="222B36"/>
-                </a:solidFill>
-                <a:latin typeface="Calibri"/>
-              </a:rPr>
-              <a:t>giusta</a:t>
-            </a:r>
-            <a:r>
-              <a:rPr sz="1600" b="0" i="0" dirty="0">
-                <a:solidFill>
-                  <a:srgbClr val="222B36"/>
-                </a:solidFill>
-                <a:latin typeface="Calibri"/>
-              </a:rPr>
-              <a:t>, </a:t>
-            </a:r>
-            <a:r>
-              <a:rPr sz="1600" b="0" i="0" dirty="0" err="1">
-                <a:solidFill>
-                  <a:srgbClr val="222B36"/>
-                </a:solidFill>
-                <a:latin typeface="Calibri"/>
-              </a:rPr>
-              <a:t>coincidono</a:t>
-            </a:r>
-            <a:r>
-              <a:rPr sz="1600" b="0" i="0" dirty="0">
-                <a:solidFill>
-                  <a:srgbClr val="222B36"/>
-                </a:solidFill>
-                <a:latin typeface="Calibri"/>
-              </a:rPr>
-              <a:t>. </a:t>
-            </a:r>
-            <a:r>
-              <a:rPr lang="it-IT" sz="1600" b="0" i="0" dirty="0">
-                <a:solidFill>
-                  <a:srgbClr val="222B36"/>
-                </a:solidFill>
-                <a:latin typeface="Calibri"/>
-              </a:rPr>
-              <a:t>E modelli con semantiche diverse ora </a:t>
-            </a:r>
-            <a:r>
-              <a:rPr lang="it-IT" sz="1600" b="1" i="0" dirty="0">
-                <a:solidFill>
-                  <a:srgbClr val="222B36"/>
-                </a:solidFill>
-                <a:latin typeface="Calibri"/>
-              </a:rPr>
-              <a:t>convivono</a:t>
-            </a:r>
-            <a:r>
-              <a:rPr lang="it-IT" sz="1600" b="0" i="0" dirty="0">
-                <a:solidFill>
-                  <a:srgbClr val="222B36"/>
-                </a:solidFill>
-                <a:latin typeface="Calibri"/>
-              </a:rPr>
-              <a:t> (53/53).</a:t>
-            </a:r>
-            <a:endParaRPr sz="1600" b="0" i="0" dirty="0">
-              <a:solidFill>
-                <a:srgbClr val="222B36"/>
-              </a:solidFill>
-              <a:latin typeface="Calibri"/>
-            </a:endParaRPr>
           </a:p>
         </p:txBody>
       </p:sp>
@@ -32223,15 +31400,15 @@
               </a:spcAft>
             </a:pPr>
             <a:r>
-              <a:rPr lang="it-IT" sz="1100" i="1">
+              <a:rPr lang="it-IT" sz="1100" i="1" dirty="0">
                 <a:solidFill>
                   <a:srgbClr val="6B7C93"/>
                 </a:solidFill>
                 <a:latin typeface="Calibri"/>
               </a:rPr>
-              <a:t>Test: 53/53 su P2 e P3, con controllo negativo  ·  misure del 24/09  ·  quaderno di settembre, § 3.4</a:t>
-            </a:r>
-            <a:endParaRPr sz="1100" i="1">
+              <a:t>Test: 53/53 su P2 e P3, con controllo negativo  · § 3.4</a:t>
+            </a:r>
+            <a:endParaRPr sz="1100" i="1" dirty="0">
               <a:solidFill>
                 <a:srgbClr val="6B7C93"/>
               </a:solidFill>
@@ -36507,7 +35684,7 @@
         <p:spPr>
           <a:xfrm>
             <a:off x="548640" y="6446520"/>
-            <a:ext cx="10424160" cy="274320"/>
+            <a:ext cx="10424160" cy="176908"/>
           </a:xfrm>
           <a:prstGeom prst="rect">
             <a:avLst/>
@@ -36529,14 +35706,191 @@
               </a:spcAft>
             </a:pPr>
             <a:r>
-              <a:rPr sz="1100" b="0" i="1">
+              <a:rPr sz="1100" b="0" i="1" dirty="0">
                 <a:solidFill>
                   <a:srgbClr val="6B7C93"/>
                 </a:solidFill>
                 <a:latin typeface="Calibri"/>
               </a:rPr>
-              <a:t>BPF_PROG_TEST_RUN, minimo su 7 prove  ·  rimisura del 23/09, P1 come oggetto AOT  ·  cifre assolute valide per questa VM, rapporti fra pipeline stabili</a:t>
-            </a:r>
+              <a:t>BPF_PROG_TEST_RUN, </a:t>
+            </a:r>
+            <a:r>
+              <a:rPr sz="1100" b="0" i="1" dirty="0" err="1">
+                <a:solidFill>
+                  <a:srgbClr val="6B7C93"/>
+                </a:solidFill>
+                <a:latin typeface="Calibri"/>
+              </a:rPr>
+              <a:t>minimo</a:t>
+            </a:r>
+            <a:r>
+              <a:rPr sz="1100" b="0" i="1" dirty="0">
+                <a:solidFill>
+                  <a:srgbClr val="6B7C93"/>
+                </a:solidFill>
+                <a:latin typeface="Calibri"/>
+              </a:rPr>
+              <a:t> </a:t>
+            </a:r>
+            <a:r>
+              <a:rPr sz="1100" b="0" i="1" dirty="0" err="1">
+                <a:solidFill>
+                  <a:srgbClr val="6B7C93"/>
+                </a:solidFill>
+                <a:latin typeface="Calibri"/>
+              </a:rPr>
+              <a:t>su</a:t>
+            </a:r>
+            <a:r>
+              <a:rPr sz="1100" b="0" i="1" dirty="0">
+                <a:solidFill>
+                  <a:srgbClr val="6B7C93"/>
+                </a:solidFill>
+                <a:latin typeface="Calibri"/>
+              </a:rPr>
+              <a:t> 7 prove  · P1 come </a:t>
+            </a:r>
+            <a:r>
+              <a:rPr sz="1100" b="0" i="1" dirty="0" err="1">
+                <a:solidFill>
+                  <a:srgbClr val="6B7C93"/>
+                </a:solidFill>
+                <a:latin typeface="Calibri"/>
+              </a:rPr>
+              <a:t>oggetto</a:t>
+            </a:r>
+            <a:r>
+              <a:rPr sz="1100" b="0" i="1" dirty="0">
+                <a:solidFill>
+                  <a:srgbClr val="6B7C93"/>
+                </a:solidFill>
+                <a:latin typeface="Calibri"/>
+              </a:rPr>
+              <a:t> AOT  ·  </a:t>
+            </a:r>
+            <a:r>
+              <a:rPr sz="1100" b="0" i="1" dirty="0" err="1">
+                <a:solidFill>
+                  <a:srgbClr val="6B7C93"/>
+                </a:solidFill>
+                <a:latin typeface="Calibri"/>
+              </a:rPr>
+              <a:t>cifre</a:t>
+            </a:r>
+            <a:r>
+              <a:rPr sz="1100" b="0" i="1" dirty="0">
+                <a:solidFill>
+                  <a:srgbClr val="6B7C93"/>
+                </a:solidFill>
+                <a:latin typeface="Calibri"/>
+              </a:rPr>
+              <a:t> </a:t>
+            </a:r>
+            <a:r>
+              <a:rPr sz="1100" b="0" i="1" dirty="0" err="1">
+                <a:solidFill>
+                  <a:srgbClr val="6B7C93"/>
+                </a:solidFill>
+                <a:latin typeface="Calibri"/>
+              </a:rPr>
+              <a:t>assolute</a:t>
+            </a:r>
+            <a:r>
+              <a:rPr sz="1100" b="0" i="1" dirty="0">
+                <a:solidFill>
+                  <a:srgbClr val="6B7C93"/>
+                </a:solidFill>
+                <a:latin typeface="Calibri"/>
+              </a:rPr>
+              <a:t> </a:t>
+            </a:r>
+            <a:r>
+              <a:rPr sz="1100" b="0" i="1" dirty="0" err="1">
+                <a:solidFill>
+                  <a:srgbClr val="6B7C93"/>
+                </a:solidFill>
+                <a:latin typeface="Calibri"/>
+              </a:rPr>
+              <a:t>valide</a:t>
+            </a:r>
+            <a:r>
+              <a:rPr sz="1100" b="0" i="1" dirty="0">
+                <a:solidFill>
+                  <a:srgbClr val="6B7C93"/>
+                </a:solidFill>
+                <a:latin typeface="Calibri"/>
+              </a:rPr>
+              <a:t> per </a:t>
+            </a:r>
+            <a:r>
+              <a:rPr sz="1100" b="0" i="1" dirty="0" err="1">
+                <a:solidFill>
+                  <a:srgbClr val="6B7C93"/>
+                </a:solidFill>
+                <a:latin typeface="Calibri"/>
+              </a:rPr>
+              <a:t>questa</a:t>
+            </a:r>
+            <a:r>
+              <a:rPr sz="1100" b="0" i="1" dirty="0">
+                <a:solidFill>
+                  <a:srgbClr val="6B7C93"/>
+                </a:solidFill>
+                <a:latin typeface="Calibri"/>
+              </a:rPr>
+              <a:t> VM, </a:t>
+            </a:r>
+            <a:r>
+              <a:rPr sz="1100" b="0" i="1" dirty="0" err="1">
+                <a:solidFill>
+                  <a:srgbClr val="6B7C93"/>
+                </a:solidFill>
+                <a:latin typeface="Calibri"/>
+              </a:rPr>
+              <a:t>rapporti</a:t>
+            </a:r>
+            <a:r>
+              <a:rPr sz="1100" b="0" i="1" dirty="0">
+                <a:solidFill>
+                  <a:srgbClr val="6B7C93"/>
+                </a:solidFill>
+                <a:latin typeface="Calibri"/>
+              </a:rPr>
+              <a:t> </a:t>
+            </a:r>
+            <a:r>
+              <a:rPr sz="1100" b="0" i="1" dirty="0" err="1">
+                <a:solidFill>
+                  <a:srgbClr val="6B7C93"/>
+                </a:solidFill>
+                <a:latin typeface="Calibri"/>
+              </a:rPr>
+              <a:t>fra</a:t>
+            </a:r>
+            <a:r>
+              <a:rPr sz="1100" b="0" i="1" dirty="0">
+                <a:solidFill>
+                  <a:srgbClr val="6B7C93"/>
+                </a:solidFill>
+                <a:latin typeface="Calibri"/>
+              </a:rPr>
+              <a:t> pipeline </a:t>
+            </a:r>
+            <a:r>
+              <a:rPr sz="1100" b="0" i="1" dirty="0" err="1">
+                <a:solidFill>
+                  <a:srgbClr val="6B7C93"/>
+                </a:solidFill>
+                <a:latin typeface="Calibri"/>
+              </a:rPr>
+              <a:t>stabili</a:t>
+            </a:r>
+            <a:endParaRPr sz="1100" b="0" i="1" dirty="0">
+              <a:solidFill>
+                <a:srgbClr val="6B7C93"/>
+              </a:solidFill>
+              <a:latin typeface="Calibri"/>
+            </a:endParaRPr>
           </a:p>
         </p:txBody>
       </p:sp>

--- a/docs/Inferenza di una rete neurale nel kernel Linux con eBPF XDP.pptx
+++ b/docs/Inferenza di una rete neurale nel kernel Linux con eBPF XDP.pptx
@@ -23,6 +23,7 @@
     <p:sldId id="282" r:id="rId31"/>
     <p:sldId id="290" r:id="rId39"/>
     <p:sldId id="291" r:id="rId40"/>
+    <p:sldId id="292" r:id="rId22"/>
     <p:sldId id="261" r:id="rId8"/>
     <p:sldId id="262" r:id="rId9"/>
     <p:sldId id="264" r:id="rId10"/>
@@ -764,19 +765,19 @@
                 <c:formatCode>General</c:formatCode>
                 <c:ptCount val="5"/>
                 <c:pt idx="0">
-                  <c:v>14</c:v>
+                  <c:v>66</c:v>
                 </c:pt>
                 <c:pt idx="1">
-                  <c:v>46</c:v>
+                  <c:v>117</c:v>
                 </c:pt>
                 <c:pt idx="2">
-                  <c:v>52</c:v>
+                  <c:v>124</c:v>
                 </c:pt>
                 <c:pt idx="3">
-                  <c:v>194</c:v>
+                  <c:v>290</c:v>
                 </c:pt>
                 <c:pt idx="4">
-                  <c:v>318</c:v>
+                  <c:v>425</c:v>
                 </c:pt>
               </c:numCache>
             </c:numRef>
@@ -871,6 +872,7 @@
         <c:axId val="-2113994440"/>
         <c:scaling>
           <c:orientation val="minMax"/>
+          <c:min val="0.0"/>
         </c:scaling>
         <c:delete val="0"/>
         <c:axPos val="l"/>
@@ -896,7 +898,7 @@
                     </a:solidFill>
                     <a:latin typeface="Calibri"/>
                   </a:rPr>
-                  <a:t>ns per pacchetto</a:t>
+                  <a:t>ns di CPU per pacchetto</a:t>
                 </a:r>
               </a:p>
             </c:rich>
@@ -935,6 +937,488 @@
     <c:plotVisOnly val="1"/>
     <c:dispBlanksAs val="gap"/>
     <c:showDLblsOverMax val="1"/>
+  </c:chart>
+  <c:txPr>
+    <a:bodyPr/>
+    <a:lstStyle/>
+    <a:p>
+      <a:pPr>
+        <a:defRPr sz="900">
+          <a:solidFill>
+            <a:srgbClr val="4A5568"/>
+          </a:solidFill>
+          <a:latin typeface="Calibri"/>
+        </a:defRPr>
+      </a:pPr>
+      <a:endParaRPr lang="it-IT"/>
+    </a:p>
+  </c:txPr>
+  <c:externalData r:id="rId1">
+    <c:autoUpdate val="0"/>
+  </c:externalData>
+</c:chartSpace>
+</file>
+
+<file path=ppt/charts/chart10.xml><?xml version="1.0" encoding="utf-8"?>
+<c:chartSpace xmlns:c="http://schemas.openxmlformats.org/drawingml/2006/chart" xmlns:a="http://schemas.openxmlformats.org/drawingml/2006/main" xmlns:r="http://schemas.openxmlformats.org/officeDocument/2006/relationships" xmlns:c16r2="http://schemas.microsoft.com/office/drawing/2015/06/chart">
+  <c:date1904 val="0"/>
+  <c:lang val="it-IT"/>
+  <c:roundedCorners val="1"/>
+  <c:style val="2"/>
+  <c:chart>
+    <c:autoTitleDeleted val="1"/>
+    <c:plotArea>
+      <c:layout/>
+      <c:lineChart>
+        <c:grouping val="standard"/>
+        <c:varyColors val="0"/>
+        <c:ser>
+          <c:idx val="0"/>
+          <c:order val="0"/>
+          <c:tx>
+            <c:strRef>
+              <c:f>Sheet1!$B$1</c:f>
+              <c:strCache>
+                <c:ptCount val="1"/>
+                <c:pt idx="0">
+                  <c:v>da solo (BPF_PROG_TEST_RUN)</c:v>
+                </c:pt>
+              </c:strCache>
+            </c:strRef>
+          </c:tx>
+          <c:spPr>
+            <a:ln w="28575">
+              <a:solidFill>
+                <a:srgbClr val="8A96A8"/>
+              </a:solidFill>
+              <a:prstDash val="dash"/>
+            </a:ln>
+          </c:spPr>
+          <c:marker>
+            <c:symbol val="circle"/>
+            <c:size val="6"/>
+            <c:spPr>
+              <a:solidFill>
+                <a:srgbClr val="8A96A8"/>
+              </a:solidFill>
+              <a:ln>
+                <a:solidFill>
+                  <a:srgbClr val="8A96A8"/>
+                </a:solidFill>
+              </a:ln>
+            </c:spPr>
+          </c:marker>
+          <c:cat>
+            <c:strRef>
+              <c:f>Sheet1!$A$2:$A$7</c:f>
+              <c:strCache>
+                <c:ptCount val="6"/>
+                <c:pt idx="0">
+                  <c:v>1</c:v>
+                </c:pt>
+                <c:pt idx="1">
+                  <c:v>2</c:v>
+                </c:pt>
+                <c:pt idx="2">
+                  <c:v>3</c:v>
+                </c:pt>
+                <c:pt idx="3">
+                  <c:v>4</c:v>
+                </c:pt>
+                <c:pt idx="4">
+                  <c:v>5</c:v>
+                </c:pt>
+                <c:pt idx="5">
+                  <c:v>6</c:v>
+                </c:pt>
+              </c:strCache>
+            </c:strRef>
+          </c:cat>
+          <c:val>
+            <c:numRef>
+              <c:f>Sheet1!$B$2:$B$7</c:f>
+              <c:numCache>
+                <c:formatCode>General</c:formatCode>
+                <c:ptCount val="6"/>
+                <c:pt idx="0">
+                  <c:v>246</c:v>
+                </c:pt>
+                <c:pt idx="1">
+                  <c:v>303</c:v>
+                </c:pt>
+                <c:pt idx="2">
+                  <c:v>356</c:v>
+                </c:pt>
+                <c:pt idx="3">
+                  <c:v>408</c:v>
+                </c:pt>
+                <c:pt idx="4">
+                  <c:v>453</c:v>
+                </c:pt>
+                <c:pt idx="5">
+                  <c:v>510</c:v>
+                </c:pt>
+              </c:numCache>
+            </c:numRef>
+          </c:val>
+          <c:smooth val="0"/>
+          <c:extLst>
+            <c:ext xmlns:c16="http://schemas.microsoft.com/office/drawing/2014/chart" uri="{C3380CC4-5D6E-409C-BE32-E72D297353CC}">
+              <c16:uniqueId val="{00000000-A774-4ADD-9089-DB4FCCB8654F}"/>
+            </c:ext>
+          </c:extLst>
+        </c:ser>
+        <c:ser>
+          <c:idx val="1"/>
+          <c:order val="1"/>
+          <c:tx>
+            <c:strRef>
+              <c:f>Sheet1!$C$1</c:f>
+              <c:strCache>
+                <c:ptCount val="1"/>
+                <c:pt idx="0">
+                  <c:v>sotto traffico, minimo</c:v>
+                </c:pt>
+              </c:strCache>
+            </c:strRef>
+          </c:tx>
+          <c:spPr>
+            <a:ln w="28575">
+              <a:solidFill>
+                <a:srgbClr val="8FB4D3"/>
+              </a:solidFill>
+            </a:ln>
+          </c:spPr>
+          <c:marker>
+            <c:symbol val="circle"/>
+            <c:size val="6"/>
+            <c:spPr>
+              <a:solidFill>
+                <a:srgbClr val="8FB4D3"/>
+              </a:solidFill>
+              <a:ln>
+                <a:solidFill>
+                  <a:srgbClr val="8FB4D3"/>
+                </a:solidFill>
+              </a:ln>
+            </c:spPr>
+          </c:marker>
+          <c:cat>
+            <c:strRef>
+              <c:f>Sheet1!$A$2:$A$7</c:f>
+              <c:strCache>
+                <c:ptCount val="6"/>
+                <c:pt idx="0">
+                  <c:v>1</c:v>
+                </c:pt>
+                <c:pt idx="1">
+                  <c:v>2</c:v>
+                </c:pt>
+                <c:pt idx="2">
+                  <c:v>3</c:v>
+                </c:pt>
+                <c:pt idx="3">
+                  <c:v>4</c:v>
+                </c:pt>
+                <c:pt idx="4">
+                  <c:v>5</c:v>
+                </c:pt>
+                <c:pt idx="5">
+                  <c:v>6</c:v>
+                </c:pt>
+              </c:strCache>
+            </c:strRef>
+          </c:cat>
+          <c:val>
+            <c:numRef>
+              <c:f>Sheet1!$C$2:$C$7</c:f>
+              <c:numCache>
+                <c:formatCode>General</c:formatCode>
+                <c:ptCount val="6"/>
+                <c:pt idx="0">
+                  <c:v>262</c:v>
+                </c:pt>
+                <c:pt idx="1">
+                  <c:v>312</c:v>
+                </c:pt>
+                <c:pt idx="2">
+                  <c:v>374</c:v>
+                </c:pt>
+                <c:pt idx="3">
+                  <c:v>408</c:v>
+                </c:pt>
+                <c:pt idx="4">
+                  <c:v>461</c:v>
+                </c:pt>
+                <c:pt idx="5">
+                  <c:v>508</c:v>
+                </c:pt>
+              </c:numCache>
+            </c:numRef>
+          </c:val>
+          <c:smooth val="0"/>
+          <c:extLst>
+            <c:ext xmlns:c16="http://schemas.microsoft.com/office/drawing/2014/chart" uri="{C3380CC4-5D6E-409C-BE32-E72D297353CC}">
+              <c16:uniqueId val="{00000001-A774-4ADD-9089-DB4FCCB8654F}"/>
+            </c:ext>
+          </c:extLst>
+        </c:ser>
+        <c:ser>
+          <c:idx val="2"/>
+          <c:order val="2"/>
+          <c:tx>
+            <c:strRef>
+              <c:f>Sheet1!$D$1</c:f>
+              <c:strCache>
+                <c:ptCount val="1"/>
+                <c:pt idx="0">
+                  <c:v>sotto traffico, media</c:v>
+                </c:pt>
+              </c:strCache>
+            </c:strRef>
+          </c:tx>
+          <c:spPr>
+            <a:ln w="28575">
+              <a:solidFill>
+                <a:srgbClr val="1F5F8B"/>
+              </a:solidFill>
+            </a:ln>
+          </c:spPr>
+          <c:marker>
+            <c:symbol val="circle"/>
+            <c:size val="6"/>
+            <c:spPr>
+              <a:solidFill>
+                <a:srgbClr val="1F5F8B"/>
+              </a:solidFill>
+              <a:ln>
+                <a:solidFill>
+                  <a:srgbClr val="1F5F8B"/>
+                </a:solidFill>
+              </a:ln>
+            </c:spPr>
+          </c:marker>
+          <c:cat>
+            <c:strRef>
+              <c:f>Sheet1!$A$2:$A$7</c:f>
+              <c:strCache>
+                <c:ptCount val="6"/>
+                <c:pt idx="0">
+                  <c:v>1</c:v>
+                </c:pt>
+                <c:pt idx="1">
+                  <c:v>2</c:v>
+                </c:pt>
+                <c:pt idx="2">
+                  <c:v>3</c:v>
+                </c:pt>
+                <c:pt idx="3">
+                  <c:v>4</c:v>
+                </c:pt>
+                <c:pt idx="4">
+                  <c:v>5</c:v>
+                </c:pt>
+                <c:pt idx="5">
+                  <c:v>6</c:v>
+                </c:pt>
+              </c:strCache>
+            </c:strRef>
+          </c:cat>
+          <c:val>
+            <c:numRef>
+              <c:f>Sheet1!$D$2:$D$7</c:f>
+              <c:numCache>
+                <c:formatCode>General</c:formatCode>
+                <c:ptCount val="6"/>
+                <c:pt idx="0">
+                  <c:v>322</c:v>
+                </c:pt>
+                <c:pt idx="1">
+                  <c:v>348</c:v>
+                </c:pt>
+                <c:pt idx="2">
+                  <c:v>436</c:v>
+                </c:pt>
+                <c:pt idx="3">
+                  <c:v>509</c:v>
+                </c:pt>
+                <c:pt idx="4">
+                  <c:v>560</c:v>
+                </c:pt>
+                <c:pt idx="5">
+                  <c:v>610</c:v>
+                </c:pt>
+              </c:numCache>
+            </c:numRef>
+          </c:val>
+          <c:smooth val="0"/>
+          <c:extLst>
+            <c:ext xmlns:c16="http://schemas.microsoft.com/office/drawing/2014/chart" uri="{C3380CC4-5D6E-409C-BE32-E72D297353CC}">
+              <c16:uniqueId val="{00000002-A774-4ADD-9089-DB4FCCB8654F}"/>
+            </c:ext>
+          </c:extLst>
+        </c:ser>
+        <c:dLbls>
+          <c:showLegendKey val="0"/>
+          <c:showVal val="0"/>
+          <c:showCatName val="0"/>
+          <c:showSerName val="0"/>
+          <c:showPercent val="0"/>
+          <c:showBubbleSize val="0"/>
+        </c:dLbls>
+        <c:marker val="1"/>
+        <c:smooth val="0"/>
+        <c:axId val="2118791784"/>
+        <c:axId val="2140495176"/>
+      </c:lineChart>
+      <c:catAx>
+        <c:axId val="2118791784"/>
+        <c:scaling>
+          <c:orientation val="minMax"/>
+        </c:scaling>
+        <c:delete val="0"/>
+        <c:axPos val="b"/>
+        <c:title>
+          <c:tx>
+            <c:rich>
+              <a:bodyPr/>
+              <a:lstStyle/>
+              <a:p>
+                <a:r>
+                  <a:rPr lang="it-IT" sz="1200" b="0">
+                    <a:solidFill>
+                      <a:srgbClr val="6B7C93"/>
+                    </a:solidFill>
+                    <a:latin typeface="Calibri"/>
+                  </a:rPr>
+                  <a:t>strati nascosti (4 neuroni)</a:t>
+                </a:r>
+              </a:p>
+            </c:rich>
+          </c:tx>
+          <c:overlay val="0"/>
+        </c:title>
+        <c:numFmt formatCode="General" sourceLinked="0"/>
+        <c:majorTickMark val="out"/>
+        <c:minorTickMark val="none"/>
+        <c:tickLblPos val="nextTo"/>
+        <c:spPr>
+          <a:ln>
+            <a:solidFill>
+              <a:srgbClr val="C8D0DA"/>
+            </a:solidFill>
+          </a:ln>
+        </c:spPr>
+        <c:txPr>
+          <a:bodyPr/>
+          <a:lstStyle/>
+          <a:p>
+            <a:pPr>
+              <a:defRPr sz="900">
+                <a:solidFill>
+                  <a:srgbClr val="4A5568"/>
+                </a:solidFill>
+                <a:latin typeface="Calibri"/>
+              </a:defRPr>
+            </a:pPr>
+            <a:endParaRPr lang="it-IT"/>
+          </a:p>
+        </c:txPr>
+        <c:crossAx val="2140495176"/>
+        <c:crosses val="autoZero"/>
+        <c:auto val="1"/>
+        <c:lblAlgn val="ctr"/>
+        <c:lblOffset val="100"/>
+        <c:noMultiLvlLbl val="0"/>
+      </c:catAx>
+      <c:valAx>
+        <c:axId val="2140495176"/>
+        <c:scaling>
+          <c:orientation val="minMax"/>
+          <c:max val="700.0"/>
+          <c:min val="0.0"/>
+        </c:scaling>
+        <c:delete val="0"/>
+        <c:axPos val="l"/>
+        <c:majorGridlines>
+          <c:spPr>
+            <a:ln w="7620">
+              <a:solidFill>
+                <a:srgbClr val="E3E7ED"/>
+              </a:solidFill>
+            </a:ln>
+          </c:spPr>
+        </c:majorGridlines>
+        <c:title>
+          <c:tx>
+            <c:rich>
+              <a:bodyPr/>
+              <a:lstStyle/>
+              <a:p>
+                <a:r>
+                  <a:rPr lang="it-IT" sz="1100" b="0">
+                    <a:solidFill>
+                      <a:srgbClr val="6B7C93"/>
+                    </a:solidFill>
+                    <a:latin typeface="Calibri"/>
+                  </a:rPr>
+                  <a:t>ns di rete neurale per pacchetto</a:t>
+                </a:r>
+              </a:p>
+            </c:rich>
+          </c:tx>
+          <c:overlay val="0"/>
+        </c:title>
+        <c:numFmt formatCode="#,##0" sourceLinked="0"/>
+        <c:majorTickMark val="out"/>
+        <c:minorTickMark val="none"/>
+        <c:tickLblPos val="nextTo"/>
+        <c:spPr>
+          <a:ln>
+            <a:noFill/>
+          </a:ln>
+        </c:spPr>
+        <c:txPr>
+          <a:bodyPr/>
+          <a:lstStyle/>
+          <a:p>
+            <a:pPr>
+              <a:defRPr sz="800">
+                <a:solidFill>
+                  <a:srgbClr val="6B7C93"/>
+                </a:solidFill>
+                <a:latin typeface="Calibri"/>
+              </a:defRPr>
+            </a:pPr>
+            <a:endParaRPr lang="it-IT"/>
+          </a:p>
+        </c:txPr>
+        <c:crossAx val="2118791784"/>
+        <c:crosses val="autoZero"/>
+        <c:crossBetween val="between"/>
+      </c:valAx>
+    </c:plotArea>
+    <c:legend>
+      <c:legendPos val="t"/>
+      <c:overlay val="0"/>
+      <c:txPr>
+        <a:bodyPr/>
+        <a:lstStyle/>
+        <a:p>
+          <a:pPr>
+            <a:defRPr sz="900">
+              <a:solidFill>
+                <a:srgbClr val="222B36"/>
+              </a:solidFill>
+            </a:defRPr>
+          </a:pPr>
+          <a:endParaRPr lang="it-IT"/>
+        </a:p>
+      </c:txPr>
+    </c:legend>
+    <c:plotVisOnly val="1"/>
+    <c:dispBlanksAs val="gap"/>
+    <c:showDLblsOverMax val="0"/>
   </c:chart>
   <c:txPr>
     <a:bodyPr/>
@@ -10791,19 +11275,19 @@
                 <c:formatCode>General</c:formatCode>
                 <c:ptCount val="5"/>
                 <c:pt idx="0">
-                  <c:v>40</c:v>
+                  <c:v>49</c:v>
                 </c:pt>
                 <c:pt idx="1">
-                  <c:v>40</c:v>
+                  <c:v>52</c:v>
                 </c:pt>
                 <c:pt idx="2">
-                  <c:v>41</c:v>
+                  <c:v>49</c:v>
                 </c:pt>
                 <c:pt idx="3">
-                  <c:v>42</c:v>
+                  <c:v>48</c:v>
                 </c:pt>
                 <c:pt idx="4">
-                  <c:v>39</c:v>
+                  <c:v>45</c:v>
                 </c:pt>
               </c:numCache>
             </c:numRef>
@@ -10880,19 +11364,19 @@
                 <c:formatCode>General</c:formatCode>
                 <c:ptCount val="5"/>
                 <c:pt idx="0">
-                  <c:v>46</c:v>
+                  <c:v>59</c:v>
                 </c:pt>
                 <c:pt idx="1">
-                  <c:v>45</c:v>
+                  <c:v>57</c:v>
                 </c:pt>
                 <c:pt idx="2">
-                  <c:v>46</c:v>
+                  <c:v>58</c:v>
                 </c:pt>
                 <c:pt idx="3">
-                  <c:v>47</c:v>
+                  <c:v>55</c:v>
                 </c:pt>
                 <c:pt idx="4">
-                  <c:v>46</c:v>
+                  <c:v>55</c:v>
                 </c:pt>
               </c:numCache>
             </c:numRef>
@@ -10969,19 +11453,19 @@
                 <c:formatCode>General</c:formatCode>
                 <c:ptCount val="5"/>
                 <c:pt idx="0">
-                  <c:v>189</c:v>
+                  <c:v>221</c:v>
                 </c:pt>
                 <c:pt idx="1">
-                  <c:v>188</c:v>
+                  <c:v>237</c:v>
                 </c:pt>
                 <c:pt idx="2">
-                  <c:v>192</c:v>
+                  <c:v>235</c:v>
                 </c:pt>
                 <c:pt idx="3">
-                  <c:v>188</c:v>
+                  <c:v>230</c:v>
                 </c:pt>
                 <c:pt idx="4">
-                  <c:v>189</c:v>
+                  <c:v>232</c:v>
                 </c:pt>
               </c:numCache>
             </c:numRef>
@@ -11058,19 +11542,19 @@
                 <c:formatCode>General</c:formatCode>
                 <c:ptCount val="5"/>
                 <c:pt idx="0">
-                  <c:v>310</c:v>
+                  <c:v>351</c:v>
                 </c:pt>
                 <c:pt idx="1">
-                  <c:v>312</c:v>
+                  <c:v>351</c:v>
                 </c:pt>
                 <c:pt idx="2">
-                  <c:v>312</c:v>
+                  <c:v>366</c:v>
                 </c:pt>
                 <c:pt idx="3">
-                  <c:v>317</c:v>
+                  <c:v>364</c:v>
                 </c:pt>
                 <c:pt idx="4">
-                  <c:v>317</c:v>
+                  <c:v>362</c:v>
                 </c:pt>
               </c:numCache>
             </c:numRef>
@@ -11159,6 +11643,7 @@
         <c:axId val="2140495176"/>
         <c:scaling>
           <c:orientation val="minMax"/>
+          <c:min val="0.0"/>
         </c:scaling>
         <c:delete val="0"/>
         <c:axPos val="l"/>
@@ -11184,7 +11669,7 @@
                     </a:solidFill>
                     <a:latin typeface="Calibri"/>
                   </a:rPr>
-                  <a:t>ns per pacchetto</a:t>
+                  <a:t>ns di rete neurale per pacchetto</a:t>
                 </a:r>
               </a:p>
             </c:rich>
@@ -13089,6 +13574,488 @@
 </c:chartSpace>
 </file>
 
+<file path=ppt/charts/chart33.xml><?xml version="1.0" encoding="utf-8"?>
+<c:chartSpace xmlns:c="http://schemas.openxmlformats.org/drawingml/2006/chart" xmlns:a="http://schemas.openxmlformats.org/drawingml/2006/main" xmlns:r="http://schemas.openxmlformats.org/officeDocument/2006/relationships" xmlns:c16r2="http://schemas.microsoft.com/office/drawing/2015/06/chart">
+  <c:date1904 val="0"/>
+  <c:lang val="it-IT"/>
+  <c:roundedCorners val="1"/>
+  <c:style val="2"/>
+  <c:chart>
+    <c:autoTitleDeleted val="1"/>
+    <c:plotArea>
+      <c:layout/>
+      <c:lineChart>
+        <c:grouping val="standard"/>
+        <c:varyColors val="0"/>
+        <c:ser>
+          <c:idx val="0"/>
+          <c:order val="0"/>
+          <c:tx>
+            <c:strRef>
+              <c:f>Sheet1!$B$1</c:f>
+              <c:strCache>
+                <c:ptCount val="1"/>
+                <c:pt idx="0">
+                  <c:v>da solo (BPF_PROG_TEST_RUN)</c:v>
+                </c:pt>
+              </c:strCache>
+            </c:strRef>
+          </c:tx>
+          <c:spPr>
+            <a:ln w="28575">
+              <a:solidFill>
+                <a:srgbClr val="8A96A8"/>
+              </a:solidFill>
+              <a:prstDash val="dash"/>
+            </a:ln>
+          </c:spPr>
+          <c:marker>
+            <c:symbol val="circle"/>
+            <c:size val="6"/>
+            <c:spPr>
+              <a:solidFill>
+                <a:srgbClr val="8A96A8"/>
+              </a:solidFill>
+              <a:ln>
+                <a:solidFill>
+                  <a:srgbClr val="8A96A8"/>
+                </a:solidFill>
+              </a:ln>
+            </c:spPr>
+          </c:marker>
+          <c:cat>
+            <c:strRef>
+              <c:f>Sheet1!$A$2:$A$7</c:f>
+              <c:strCache>
+                <c:ptCount val="6"/>
+                <c:pt idx="0">
+                  <c:v>1</c:v>
+                </c:pt>
+                <c:pt idx="1">
+                  <c:v>2</c:v>
+                </c:pt>
+                <c:pt idx="2">
+                  <c:v>3</c:v>
+                </c:pt>
+                <c:pt idx="3">
+                  <c:v>4</c:v>
+                </c:pt>
+                <c:pt idx="4">
+                  <c:v>5</c:v>
+                </c:pt>
+                <c:pt idx="5">
+                  <c:v>6</c:v>
+                </c:pt>
+              </c:strCache>
+            </c:strRef>
+          </c:cat>
+          <c:val>
+            <c:numRef>
+              <c:f>Sheet1!$B$2:$B$7</c:f>
+              <c:numCache>
+                <c:formatCode>General</c:formatCode>
+                <c:ptCount val="6"/>
+                <c:pt idx="0">
+                  <c:v>157</c:v>
+                </c:pt>
+                <c:pt idx="1">
+                  <c:v>179</c:v>
+                </c:pt>
+                <c:pt idx="2">
+                  <c:v>206</c:v>
+                </c:pt>
+                <c:pt idx="3">
+                  <c:v>227</c:v>
+                </c:pt>
+                <c:pt idx="4">
+                  <c:v>256</c:v>
+                </c:pt>
+                <c:pt idx="5">
+                  <c:v>286</c:v>
+                </c:pt>
+              </c:numCache>
+            </c:numRef>
+          </c:val>
+          <c:smooth val="0"/>
+          <c:extLst>
+            <c:ext xmlns:c16="http://schemas.microsoft.com/office/drawing/2014/chart" uri="{C3380CC4-5D6E-409C-BE32-E72D297353CC}">
+              <c16:uniqueId val="{00000000-CB40-40F4-8AE4-87AB3DBEE21D}"/>
+            </c:ext>
+          </c:extLst>
+        </c:ser>
+        <c:ser>
+          <c:idx val="1"/>
+          <c:order val="1"/>
+          <c:tx>
+            <c:strRef>
+              <c:f>Sheet1!$C$1</c:f>
+              <c:strCache>
+                <c:ptCount val="1"/>
+                <c:pt idx="0">
+                  <c:v>sotto traffico, minimo</c:v>
+                </c:pt>
+              </c:strCache>
+            </c:strRef>
+          </c:tx>
+          <c:spPr>
+            <a:ln w="28575">
+              <a:solidFill>
+                <a:srgbClr val="9CD4CC"/>
+              </a:solidFill>
+            </a:ln>
+          </c:spPr>
+          <c:marker>
+            <c:symbol val="circle"/>
+            <c:size val="6"/>
+            <c:spPr>
+              <a:solidFill>
+                <a:srgbClr val="9CD4CC"/>
+              </a:solidFill>
+              <a:ln>
+                <a:solidFill>
+                  <a:srgbClr val="9CD4CC"/>
+                </a:solidFill>
+              </a:ln>
+            </c:spPr>
+          </c:marker>
+          <c:cat>
+            <c:strRef>
+              <c:f>Sheet1!$A$2:$A$7</c:f>
+              <c:strCache>
+                <c:ptCount val="6"/>
+                <c:pt idx="0">
+                  <c:v>1</c:v>
+                </c:pt>
+                <c:pt idx="1">
+                  <c:v>2</c:v>
+                </c:pt>
+                <c:pt idx="2">
+                  <c:v>3</c:v>
+                </c:pt>
+                <c:pt idx="3">
+                  <c:v>4</c:v>
+                </c:pt>
+                <c:pt idx="4">
+                  <c:v>5</c:v>
+                </c:pt>
+                <c:pt idx="5">
+                  <c:v>6</c:v>
+                </c:pt>
+              </c:strCache>
+            </c:strRef>
+          </c:cat>
+          <c:val>
+            <c:numRef>
+              <c:f>Sheet1!$C$2:$C$7</c:f>
+              <c:numCache>
+                <c:formatCode>General</c:formatCode>
+                <c:ptCount val="6"/>
+                <c:pt idx="0">
+                  <c:v>180</c:v>
+                </c:pt>
+                <c:pt idx="1">
+                  <c:v>196</c:v>
+                </c:pt>
+                <c:pt idx="2">
+                  <c:v>227</c:v>
+                </c:pt>
+                <c:pt idx="3">
+                  <c:v>238</c:v>
+                </c:pt>
+                <c:pt idx="4">
+                  <c:v>272</c:v>
+                </c:pt>
+                <c:pt idx="5">
+                  <c:v>292</c:v>
+                </c:pt>
+              </c:numCache>
+            </c:numRef>
+          </c:val>
+          <c:smooth val="0"/>
+          <c:extLst>
+            <c:ext xmlns:c16="http://schemas.microsoft.com/office/drawing/2014/chart" uri="{C3380CC4-5D6E-409C-BE32-E72D297353CC}">
+              <c16:uniqueId val="{00000001-CB40-40F4-8AE4-87AB3DBEE21D}"/>
+            </c:ext>
+          </c:extLst>
+        </c:ser>
+        <c:ser>
+          <c:idx val="2"/>
+          <c:order val="2"/>
+          <c:tx>
+            <c:strRef>
+              <c:f>Sheet1!$D$1</c:f>
+              <c:strCache>
+                <c:ptCount val="1"/>
+                <c:pt idx="0">
+                  <c:v>sotto traffico, media</c:v>
+                </c:pt>
+              </c:strCache>
+            </c:strRef>
+          </c:tx>
+          <c:spPr>
+            <a:ln w="28575">
+              <a:solidFill>
+                <a:srgbClr val="2E9C8F"/>
+              </a:solidFill>
+            </a:ln>
+          </c:spPr>
+          <c:marker>
+            <c:symbol val="circle"/>
+            <c:size val="6"/>
+            <c:spPr>
+              <a:solidFill>
+                <a:srgbClr val="2E9C8F"/>
+              </a:solidFill>
+              <a:ln>
+                <a:solidFill>
+                  <a:srgbClr val="2E9C8F"/>
+                </a:solidFill>
+              </a:ln>
+            </c:spPr>
+          </c:marker>
+          <c:cat>
+            <c:strRef>
+              <c:f>Sheet1!$A$2:$A$7</c:f>
+              <c:strCache>
+                <c:ptCount val="6"/>
+                <c:pt idx="0">
+                  <c:v>1</c:v>
+                </c:pt>
+                <c:pt idx="1">
+                  <c:v>2</c:v>
+                </c:pt>
+                <c:pt idx="2">
+                  <c:v>3</c:v>
+                </c:pt>
+                <c:pt idx="3">
+                  <c:v>4</c:v>
+                </c:pt>
+                <c:pt idx="4">
+                  <c:v>5</c:v>
+                </c:pt>
+                <c:pt idx="5">
+                  <c:v>6</c:v>
+                </c:pt>
+              </c:strCache>
+            </c:strRef>
+          </c:cat>
+          <c:val>
+            <c:numRef>
+              <c:f>Sheet1!$D$2:$D$7</c:f>
+              <c:numCache>
+                <c:formatCode>General</c:formatCode>
+                <c:ptCount val="6"/>
+                <c:pt idx="0">
+                  <c:v>214</c:v>
+                </c:pt>
+                <c:pt idx="1">
+                  <c:v>252</c:v>
+                </c:pt>
+                <c:pt idx="2">
+                  <c:v>264</c:v>
+                </c:pt>
+                <c:pt idx="3">
+                  <c:v>267</c:v>
+                </c:pt>
+                <c:pt idx="4">
+                  <c:v>324</c:v>
+                </c:pt>
+                <c:pt idx="5">
+                  <c:v>356</c:v>
+                </c:pt>
+              </c:numCache>
+            </c:numRef>
+          </c:val>
+          <c:smooth val="0"/>
+          <c:extLst>
+            <c:ext xmlns:c16="http://schemas.microsoft.com/office/drawing/2014/chart" uri="{C3380CC4-5D6E-409C-BE32-E72D297353CC}">
+              <c16:uniqueId val="{00000002-CB40-40F4-8AE4-87AB3DBEE21D}"/>
+            </c:ext>
+          </c:extLst>
+        </c:ser>
+        <c:dLbls>
+          <c:showLegendKey val="0"/>
+          <c:showVal val="0"/>
+          <c:showCatName val="0"/>
+          <c:showSerName val="0"/>
+          <c:showPercent val="0"/>
+          <c:showBubbleSize val="0"/>
+        </c:dLbls>
+        <c:marker val="1"/>
+        <c:smooth val="0"/>
+        <c:axId val="2118791784"/>
+        <c:axId val="2140495176"/>
+      </c:lineChart>
+      <c:catAx>
+        <c:axId val="2118791784"/>
+        <c:scaling>
+          <c:orientation val="minMax"/>
+        </c:scaling>
+        <c:delete val="0"/>
+        <c:axPos val="b"/>
+        <c:title>
+          <c:tx>
+            <c:rich>
+              <a:bodyPr/>
+              <a:lstStyle/>
+              <a:p>
+                <a:r>
+                  <a:rPr lang="it-IT" sz="1200" b="0">
+                    <a:solidFill>
+                      <a:srgbClr val="6B7C93"/>
+                    </a:solidFill>
+                    <a:latin typeface="Calibri"/>
+                  </a:rPr>
+                  <a:t>strati nascosti (4 neuroni)</a:t>
+                </a:r>
+              </a:p>
+            </c:rich>
+          </c:tx>
+          <c:overlay val="0"/>
+        </c:title>
+        <c:numFmt formatCode="General" sourceLinked="0"/>
+        <c:majorTickMark val="out"/>
+        <c:minorTickMark val="none"/>
+        <c:tickLblPos val="nextTo"/>
+        <c:spPr>
+          <a:ln>
+            <a:solidFill>
+              <a:srgbClr val="C8D0DA"/>
+            </a:solidFill>
+          </a:ln>
+        </c:spPr>
+        <c:txPr>
+          <a:bodyPr/>
+          <a:lstStyle/>
+          <a:p>
+            <a:pPr>
+              <a:defRPr sz="900">
+                <a:solidFill>
+                  <a:srgbClr val="4A5568"/>
+                </a:solidFill>
+                <a:latin typeface="Calibri"/>
+              </a:defRPr>
+            </a:pPr>
+            <a:endParaRPr lang="it-IT"/>
+          </a:p>
+        </c:txPr>
+        <c:crossAx val="2140495176"/>
+        <c:crosses val="autoZero"/>
+        <c:auto val="1"/>
+        <c:lblAlgn val="ctr"/>
+        <c:lblOffset val="100"/>
+        <c:noMultiLvlLbl val="0"/>
+      </c:catAx>
+      <c:valAx>
+        <c:axId val="2140495176"/>
+        <c:scaling>
+          <c:orientation val="minMax"/>
+          <c:max val="400.0"/>
+          <c:min val="0.0"/>
+        </c:scaling>
+        <c:delete val="0"/>
+        <c:axPos val="l"/>
+        <c:majorGridlines>
+          <c:spPr>
+            <a:ln w="7620">
+              <a:solidFill>
+                <a:srgbClr val="E3E7ED"/>
+              </a:solidFill>
+            </a:ln>
+          </c:spPr>
+        </c:majorGridlines>
+        <c:title>
+          <c:tx>
+            <c:rich>
+              <a:bodyPr/>
+              <a:lstStyle/>
+              <a:p>
+                <a:r>
+                  <a:rPr lang="it-IT" sz="1100" b="0">
+                    <a:solidFill>
+                      <a:srgbClr val="6B7C93"/>
+                    </a:solidFill>
+                    <a:latin typeface="Calibri"/>
+                  </a:rPr>
+                  <a:t>ns di rete neurale per pacchetto</a:t>
+                </a:r>
+              </a:p>
+            </c:rich>
+          </c:tx>
+          <c:overlay val="0"/>
+        </c:title>
+        <c:numFmt formatCode="#,##0" sourceLinked="0"/>
+        <c:majorTickMark val="out"/>
+        <c:minorTickMark val="none"/>
+        <c:tickLblPos val="nextTo"/>
+        <c:spPr>
+          <a:ln>
+            <a:noFill/>
+          </a:ln>
+        </c:spPr>
+        <c:txPr>
+          <a:bodyPr/>
+          <a:lstStyle/>
+          <a:p>
+            <a:pPr>
+              <a:defRPr sz="800">
+                <a:solidFill>
+                  <a:srgbClr val="6B7C93"/>
+                </a:solidFill>
+                <a:latin typeface="Calibri"/>
+              </a:defRPr>
+            </a:pPr>
+            <a:endParaRPr lang="it-IT"/>
+          </a:p>
+        </c:txPr>
+        <c:crossAx val="2118791784"/>
+        <c:crosses val="autoZero"/>
+        <c:crossBetween val="between"/>
+      </c:valAx>
+    </c:plotArea>
+    <c:legend>
+      <c:legendPos val="t"/>
+      <c:overlay val="0"/>
+      <c:txPr>
+        <a:bodyPr/>
+        <a:lstStyle/>
+        <a:p>
+          <a:pPr>
+            <a:defRPr sz="900">
+              <a:solidFill>
+                <a:srgbClr val="222B36"/>
+              </a:solidFill>
+            </a:defRPr>
+          </a:pPr>
+          <a:endParaRPr lang="it-IT"/>
+        </a:p>
+      </c:txPr>
+    </c:legend>
+    <c:plotVisOnly val="1"/>
+    <c:dispBlanksAs val="gap"/>
+    <c:showDLblsOverMax val="0"/>
+  </c:chart>
+  <c:txPr>
+    <a:bodyPr/>
+    <a:lstStyle/>
+    <a:p>
+      <a:pPr>
+        <a:defRPr sz="900">
+          <a:solidFill>
+            <a:srgbClr val="4A5568"/>
+          </a:solidFill>
+          <a:latin typeface="Calibri"/>
+        </a:defRPr>
+      </a:pPr>
+      <a:endParaRPr lang="it-IT"/>
+    </a:p>
+  </c:txPr>
+  <c:externalData r:id="rId1">
+    <c:autoUpdate val="0"/>
+  </c:externalData>
+</c:chartSpace>
+</file>
+
 <file path=ppt/charts/chart4.xml><?xml version="1.0" encoding="utf-8"?>
 <c:chartSpace xmlns:c="http://schemas.openxmlformats.org/drawingml/2006/chart" xmlns:a="http://schemas.openxmlformats.org/drawingml/2006/main" xmlns:r="http://schemas.openxmlformats.org/officeDocument/2006/relationships" xmlns:c16r2="http://schemas.microsoft.com/office/drawing/2015/06/chart">
   <c:date1904 val="0"/>
@@ -13164,16 +14131,16 @@
                 <c:formatCode>General</c:formatCode>
                 <c:ptCount val="4"/>
                 <c:pt idx="0">
-                  <c:v>26</c:v>
+                  <c:v>37</c:v>
                 </c:pt>
                 <c:pt idx="1">
-                  <c:v>41</c:v>
+                  <c:v>50</c:v>
                 </c:pt>
                 <c:pt idx="2">
-                  <c:v>52</c:v>
+                  <c:v>58</c:v>
                 </c:pt>
                 <c:pt idx="3">
-                  <c:v>68</c:v>
+                  <c:v>76</c:v>
                 </c:pt>
               </c:numCache>
             </c:numRef>
@@ -13247,16 +14214,16 @@
                 <c:formatCode>General</c:formatCode>
                 <c:ptCount val="4"/>
                 <c:pt idx="0">
-                  <c:v>34</c:v>
+                  <c:v>45</c:v>
                 </c:pt>
                 <c:pt idx="1">
-                  <c:v>46</c:v>
+                  <c:v>57</c:v>
                 </c:pt>
                 <c:pt idx="2">
-                  <c:v>60</c:v>
+                  <c:v>72</c:v>
                 </c:pt>
                 <c:pt idx="3">
-                  <c:v>75</c:v>
+                  <c:v>94</c:v>
                 </c:pt>
               </c:numCache>
             </c:numRef>
@@ -13330,16 +14297,16 @@
                 <c:formatCode>General</c:formatCode>
                 <c:ptCount val="4"/>
                 <c:pt idx="0">
-                  <c:v>178</c:v>
+                  <c:v>215</c:v>
                 </c:pt>
                 <c:pt idx="1">
-                  <c:v>192</c:v>
+                  <c:v>236</c:v>
                 </c:pt>
                 <c:pt idx="2">
-                  <c:v>203</c:v>
+                  <c:v>246</c:v>
                 </c:pt>
                 <c:pt idx="3">
-                  <c:v>216</c:v>
+                  <c:v>248</c:v>
                 </c:pt>
               </c:numCache>
             </c:numRef>
@@ -13413,16 +14380,16 @@
                 <c:formatCode>General</c:formatCode>
                 <c:ptCount val="4"/>
                 <c:pt idx="0">
-                  <c:v>280</c:v>
+                  <c:v>334</c:v>
                 </c:pt>
                 <c:pt idx="1">
-                  <c:v>314</c:v>
+                  <c:v>370</c:v>
                 </c:pt>
                 <c:pt idx="2">
-                  <c:v>343</c:v>
+                  <c:v>390</c:v>
                 </c:pt>
                 <c:pt idx="3">
-                  <c:v>386</c:v>
+                  <c:v>430</c:v>
                 </c:pt>
               </c:numCache>
             </c:numRef>
@@ -13511,6 +14478,7 @@
         <c:axId val="2140495176"/>
         <c:scaling>
           <c:orientation val="minMax"/>
+          <c:min val="0.0"/>
         </c:scaling>
         <c:delete val="0"/>
         <c:axPos val="l"/>
@@ -13536,7 +14504,7 @@
                     </a:solidFill>
                     <a:latin typeface="Calibri"/>
                   </a:rPr>
-                  <a:t>ns per pacchetto</a:t>
+                  <a:t>ns di rete neurale per pacchetto</a:t>
                 </a:r>
               </a:p>
             </c:rich>
@@ -14246,22 +15214,22 @@
                 <c:formatCode>General</c:formatCode>
                 <c:ptCount val="6"/>
                 <c:pt idx="0">
-                  <c:v>33</c:v>
+                  <c:v>42</c:v>
                 </c:pt>
                 <c:pt idx="1">
-                  <c:v>41</c:v>
+                  <c:v>51</c:v>
                 </c:pt>
                 <c:pt idx="2">
-                  <c:v>46</c:v>
+                  <c:v>52</c:v>
                 </c:pt>
                 <c:pt idx="3">
-                  <c:v>50</c:v>
+                  <c:v>56</c:v>
                 </c:pt>
                 <c:pt idx="4">
-                  <c:v>56</c:v>
+                  <c:v>60</c:v>
                 </c:pt>
                 <c:pt idx="5">
-                  <c:v>61</c:v>
+                  <c:v>63</c:v>
                 </c:pt>
               </c:numCache>
             </c:numRef>
@@ -14341,22 +15309,22 @@
                 <c:formatCode>General</c:formatCode>
                 <c:ptCount val="6"/>
                 <c:pt idx="0">
-                  <c:v>40</c:v>
+                  <c:v>49</c:v>
                 </c:pt>
                 <c:pt idx="1">
-                  <c:v>46</c:v>
+                  <c:v>58</c:v>
                 </c:pt>
                 <c:pt idx="2">
-                  <c:v>51</c:v>
+                  <c:v>60</c:v>
                 </c:pt>
                 <c:pt idx="3">
-                  <c:v>57</c:v>
+                  <c:v>65</c:v>
                 </c:pt>
                 <c:pt idx="4">
-                  <c:v>61</c:v>
+                  <c:v>67</c:v>
                 </c:pt>
                 <c:pt idx="5">
-                  <c:v>67</c:v>
+                  <c:v>70</c:v>
                 </c:pt>
               </c:numCache>
             </c:numRef>
@@ -14436,22 +15404,22 @@
                 <c:formatCode>General</c:formatCode>
                 <c:ptCount val="6"/>
                 <c:pt idx="0">
-                  <c:v>171</c:v>
+                  <c:v>204</c:v>
                 </c:pt>
                 <c:pt idx="1">
-                  <c:v>193</c:v>
+                  <c:v>235</c:v>
                 </c:pt>
                 <c:pt idx="2">
-                  <c:v>220</c:v>
+                  <c:v>266</c:v>
                 </c:pt>
                 <c:pt idx="3">
-                  <c:v>241</c:v>
+                  <c:v>274</c:v>
                 </c:pt>
                 <c:pt idx="4">
-                  <c:v>270</c:v>
+                  <c:v>304</c:v>
                 </c:pt>
                 <c:pt idx="5">
-                  <c:v>300</c:v>
+                  <c:v>328</c:v>
                 </c:pt>
               </c:numCache>
             </c:numRef>
@@ -14531,22 +15499,22 @@
                 <c:formatCode>General</c:formatCode>
                 <c:ptCount val="6"/>
                 <c:pt idx="0">
-                  <c:v>260</c:v>
+                  <c:v>292</c:v>
                 </c:pt>
                 <c:pt idx="1">
-                  <c:v>317</c:v>
+                  <c:v>369</c:v>
                 </c:pt>
                 <c:pt idx="2">
-                  <c:v>370</c:v>
+                  <c:v>424</c:v>
                 </c:pt>
                 <c:pt idx="3">
-                  <c:v>422</c:v>
+                  <c:v>470</c:v>
                 </c:pt>
                 <c:pt idx="4">
-                  <c:v>467</c:v>
+                  <c:v>530</c:v>
                 </c:pt>
                 <c:pt idx="5">
-                  <c:v>524</c:v>
+                  <c:v>580</c:v>
                 </c:pt>
               </c:numCache>
             </c:numRef>
@@ -14635,6 +15603,7 @@
         <c:axId val="2140495176"/>
         <c:scaling>
           <c:orientation val="minMax"/>
+          <c:min val="0.0"/>
         </c:scaling>
         <c:delete val="0"/>
         <c:axPos val="l"/>
@@ -14660,7 +15629,7 @@
                     </a:solidFill>
                     <a:latin typeface="Calibri"/>
                   </a:rPr>
-                  <a:t>ns per pacchetto</a:t>
+                  <a:t>ns di rete neurale per pacchetto</a:t>
                 </a:r>
               </a:p>
             </c:rich>
@@ -14817,19 +15786,19 @@
                 <c:formatCode>General</c:formatCode>
                 <c:ptCount val="5"/>
                 <c:pt idx="0">
-                  <c:v>56</c:v>
+                  <c:v>61</c:v>
                 </c:pt>
                 <c:pt idx="1">
-                  <c:v>54</c:v>
+                  <c:v>60</c:v>
                 </c:pt>
                 <c:pt idx="2">
-                  <c:v>57</c:v>
+                  <c:v>59</c:v>
                 </c:pt>
                 <c:pt idx="3">
-                  <c:v>67</c:v>
+                  <c:v>71</c:v>
                 </c:pt>
                 <c:pt idx="4">
-                  <c:v>68</c:v>
+                  <c:v>72</c:v>
                 </c:pt>
               </c:numCache>
             </c:numRef>
@@ -14906,19 +15875,19 @@
                 <c:formatCode>General</c:formatCode>
                 <c:ptCount val="5"/>
                 <c:pt idx="0">
-                  <c:v>62</c:v>
+                  <c:v>71</c:v>
                 </c:pt>
                 <c:pt idx="1">
-                  <c:v>64</c:v>
+                  <c:v>73</c:v>
                 </c:pt>
                 <c:pt idx="2">
-                  <c:v>63</c:v>
+                  <c:v>77</c:v>
                 </c:pt>
                 <c:pt idx="3">
-                  <c:v>72</c:v>
+                  <c:v>85</c:v>
                 </c:pt>
                 <c:pt idx="4">
-                  <c:v>71</c:v>
+                  <c:v>84</c:v>
                 </c:pt>
               </c:numCache>
             </c:numRef>
@@ -14995,19 +15964,19 @@
                 <c:formatCode>General</c:formatCode>
                 <c:ptCount val="5"/>
                 <c:pt idx="0">
-                  <c:v>175</c:v>
+                  <c:v>216</c:v>
                 </c:pt>
                 <c:pt idx="1">
-                  <c:v>190</c:v>
+                  <c:v>236</c:v>
                 </c:pt>
                 <c:pt idx="2">
-                  <c:v>207</c:v>
+                  <c:v>248</c:v>
                 </c:pt>
                 <c:pt idx="3">
-                  <c:v>254</c:v>
+                  <c:v>296</c:v>
                 </c:pt>
                 <c:pt idx="4">
-                  <c:v>268</c:v>
+                  <c:v>304</c:v>
                 </c:pt>
               </c:numCache>
             </c:numRef>
@@ -15084,19 +16053,19 @@
                 <c:formatCode>General</c:formatCode>
                 <c:ptCount val="5"/>
                 <c:pt idx="0">
-                  <c:v>284</c:v>
+                  <c:v>321</c:v>
                 </c:pt>
                 <c:pt idx="1">
-                  <c:v>328</c:v>
+                  <c:v>375</c:v>
                 </c:pt>
                 <c:pt idx="2">
-                  <c:v>358</c:v>
+                  <c:v>419</c:v>
                 </c:pt>
                 <c:pt idx="3">
-                  <c:v>445</c:v>
+                  <c:v>506</c:v>
                 </c:pt>
                 <c:pt idx="4">
-                  <c:v>490</c:v>
+                  <c:v>537</c:v>
                 </c:pt>
               </c:numCache>
             </c:numRef>
@@ -15185,6 +16154,7 @@
         <c:axId val="2140495176"/>
         <c:scaling>
           <c:orientation val="minMax"/>
+          <c:min val="0.0"/>
         </c:scaling>
         <c:delete val="0"/>
         <c:axPos val="l"/>
@@ -15210,7 +16180,7 @@
                     </a:solidFill>
                     <a:latin typeface="Calibri"/>
                   </a:rPr>
-                  <a:t>ns per pacchetto</a:t>
+                  <a:t>ns di rete neurale per pacchetto</a:t>
                 </a:r>
               </a:p>
             </c:rich>
@@ -15339,22 +16309,16 @@
           </c:marker>
           <c:cat>
             <c:strRef>
-              <c:f>Sheet1!$A$2:$A$6</c:f>
+              <c:f>Sheet1!$A$2:$A$4</c:f>
               <c:strCache>
-                <c:ptCount val="5"/>
+                <c:ptCount val="3"/>
                 <c:pt idx="0">
                   <c:v>0 %</c:v>
                 </c:pt>
                 <c:pt idx="1">
-                  <c:v>25 %</c:v>
+                  <c:v>50 %</c:v>
                 </c:pt>
                 <c:pt idx="2">
-                  <c:v>50 %</c:v>
-                </c:pt>
-                <c:pt idx="3">
-                  <c:v>75 %</c:v>
-                </c:pt>
-                <c:pt idx="4">
                   <c:v>90 %</c:v>
                 </c:pt>
               </c:strCache>
@@ -15362,24 +16326,18 @@
           </c:cat>
           <c:val>
             <c:numRef>
-              <c:f>Sheet1!$B$2:$B$6</c:f>
+              <c:f>Sheet1!$B$2:$B$4</c:f>
               <c:numCache>
                 <c:formatCode>General</c:formatCode>
-                <c:ptCount val="5"/>
+                <c:ptCount val="3"/>
                 <c:pt idx="0">
-                  <c:v>40</c:v>
+                  <c:v>44</c:v>
                 </c:pt>
                 <c:pt idx="1">
                   <c:v>36</c:v>
                 </c:pt>
                 <c:pt idx="2">
-                  <c:v>28</c:v>
-                </c:pt>
-                <c:pt idx="3">
-                  <c:v>23</c:v>
-                </c:pt>
-                <c:pt idx="4">
-                  <c:v>19</c:v>
+                  <c:v>27</c:v>
                 </c:pt>
               </c:numCache>
             </c:numRef>
@@ -15428,22 +16386,16 @@
           </c:marker>
           <c:cat>
             <c:strRef>
-              <c:f>Sheet1!$A$2:$A$6</c:f>
+              <c:f>Sheet1!$A$2:$A$4</c:f>
               <c:strCache>
-                <c:ptCount val="5"/>
+                <c:ptCount val="3"/>
                 <c:pt idx="0">
                   <c:v>0 %</c:v>
                 </c:pt>
                 <c:pt idx="1">
-                  <c:v>25 %</c:v>
+                  <c:v>50 %</c:v>
                 </c:pt>
                 <c:pt idx="2">
-                  <c:v>50 %</c:v>
-                </c:pt>
-                <c:pt idx="3">
-                  <c:v>75 %</c:v>
-                </c:pt>
-                <c:pt idx="4">
                   <c:v>90 %</c:v>
                 </c:pt>
               </c:strCache>
@@ -15451,24 +16403,18 @@
           </c:cat>
           <c:val>
             <c:numRef>
-              <c:f>Sheet1!$C$2:$C$6</c:f>
+              <c:f>Sheet1!$C$2:$C$4</c:f>
               <c:numCache>
                 <c:formatCode>General</c:formatCode>
-                <c:ptCount val="5"/>
+                <c:ptCount val="3"/>
                 <c:pt idx="0">
+                  <c:v>52</c:v>
+                </c:pt>
+                <c:pt idx="1">
                   <c:v>45</c:v>
                 </c:pt>
-                <c:pt idx="1">
-                  <c:v>41</c:v>
-                </c:pt>
                 <c:pt idx="2">
-                  <c:v>35</c:v>
-                </c:pt>
-                <c:pt idx="3">
-                  <c:v>31</c:v>
-                </c:pt>
-                <c:pt idx="4">
-                  <c:v>25</c:v>
+                  <c:v>39</c:v>
                 </c:pt>
               </c:numCache>
             </c:numRef>
@@ -15517,22 +16463,16 @@
           </c:marker>
           <c:cat>
             <c:strRef>
-              <c:f>Sheet1!$A$2:$A$6</c:f>
+              <c:f>Sheet1!$A$2:$A$4</c:f>
               <c:strCache>
-                <c:ptCount val="5"/>
+                <c:ptCount val="3"/>
                 <c:pt idx="0">
                   <c:v>0 %</c:v>
                 </c:pt>
                 <c:pt idx="1">
-                  <c:v>25 %</c:v>
+                  <c:v>50 %</c:v>
                 </c:pt>
                 <c:pt idx="2">
-                  <c:v>50 %</c:v>
-                </c:pt>
-                <c:pt idx="3">
-                  <c:v>75 %</c:v>
-                </c:pt>
-                <c:pt idx="4">
                   <c:v>90 %</c:v>
                 </c:pt>
               </c:strCache>
@@ -15540,24 +16480,18 @@
           </c:cat>
           <c:val>
             <c:numRef>
-              <c:f>Sheet1!$D$2:$D$6</c:f>
+              <c:f>Sheet1!$D$2:$D$4</c:f>
               <c:numCache>
                 <c:formatCode>General</c:formatCode>
-                <c:ptCount val="5"/>
+                <c:ptCount val="3"/>
                 <c:pt idx="0">
-                  <c:v>188</c:v>
+                  <c:v>222</c:v>
                 </c:pt>
                 <c:pt idx="1">
-                  <c:v>187</c:v>
+                  <c:v>229</c:v>
                 </c:pt>
                 <c:pt idx="2">
-                  <c:v>187</c:v>
-                </c:pt>
-                <c:pt idx="3">
-                  <c:v>187</c:v>
-                </c:pt>
-                <c:pt idx="4">
-                  <c:v>188</c:v>
+                  <c:v>234</c:v>
                 </c:pt>
               </c:numCache>
             </c:numRef>
@@ -15606,22 +16540,16 @@
           </c:marker>
           <c:cat>
             <c:strRef>
-              <c:f>Sheet1!$A$2:$A$6</c:f>
+              <c:f>Sheet1!$A$2:$A$4</c:f>
               <c:strCache>
-                <c:ptCount val="5"/>
+                <c:ptCount val="3"/>
                 <c:pt idx="0">
                   <c:v>0 %</c:v>
                 </c:pt>
                 <c:pt idx="1">
-                  <c:v>25 %</c:v>
+                  <c:v>50 %</c:v>
                 </c:pt>
                 <c:pt idx="2">
-                  <c:v>50 %</c:v>
-                </c:pt>
-                <c:pt idx="3">
-                  <c:v>75 %</c:v>
-                </c:pt>
-                <c:pt idx="4">
                   <c:v>90 %</c:v>
                 </c:pt>
               </c:strCache>
@@ -15629,24 +16557,18 @@
           </c:cat>
           <c:val>
             <c:numRef>
-              <c:f>Sheet1!$E$2:$E$6</c:f>
+              <c:f>Sheet1!$E$2:$E$4</c:f>
               <c:numCache>
                 <c:formatCode>General</c:formatCode>
-                <c:ptCount val="5"/>
+                <c:ptCount val="3"/>
                 <c:pt idx="0">
-                  <c:v>307</c:v>
+                  <c:v>352</c:v>
                 </c:pt>
                 <c:pt idx="1">
-                  <c:v>310</c:v>
+                  <c:v>356</c:v>
                 </c:pt>
                 <c:pt idx="2">
-                  <c:v>310</c:v>
-                </c:pt>
-                <c:pt idx="3">
-                  <c:v>311</c:v>
-                </c:pt>
-                <c:pt idx="4">
-                  <c:v>310</c:v>
+                  <c:v>367</c:v>
                 </c:pt>
               </c:numCache>
             </c:numRef>
@@ -15735,6 +16657,7 @@
         <c:axId val="2140495176"/>
         <c:scaling>
           <c:orientation val="minMax"/>
+          <c:min val="0.0"/>
         </c:scaling>
         <c:delete val="0"/>
         <c:axPos val="l"/>
@@ -15760,7 +16683,7 @@
                     </a:solidFill>
                     <a:latin typeface="Calibri"/>
                   </a:rPr>
-                  <a:t>ns per pacchetto</a:t>
+                  <a:t>ns di rete neurale per pacchetto</a:t>
                 </a:r>
               </a:p>
             </c:rich>
@@ -23755,6 +24678,566 @@
 </file>
 
 <file path=ppt/slides/slide16.xml><?xml version="1.0" encoding="utf-8"?>
+<p:sld xmlns:a="http://schemas.openxmlformats.org/drawingml/2006/main" xmlns:p="http://schemas.openxmlformats.org/presentationml/2006/main" xmlns:r="http://schemas.openxmlformats.org/officeDocument/2006/relationships">
+  <p:cSld>
+    <p:spTree>
+      <p:nvGrpSpPr>
+        <p:cNvPr id="1" name=""/>
+        <p:cNvGrpSpPr/>
+        <p:nvPr/>
+      </p:nvGrpSpPr>
+      <p:grpSpPr/>
+      <p:sp>
+        <p:nvSpPr>
+          <p:cNvPr id="2" name="Rectangle 1"/>
+          <p:cNvSpPr/>
+          <p:nvPr/>
+        </p:nvSpPr>
+        <p:spPr>
+          <a:xfrm>
+            <a:off x="0" y="0"/>
+            <a:ext cx="12191695" cy="109728"/>
+          </a:xfrm>
+          <a:prstGeom prst="rect">
+            <a:avLst/>
+          </a:prstGeom>
+          <a:solidFill>
+            <a:srgbClr val="1F3A5F"/>
+          </a:solidFill>
+          <a:ln>
+            <a:noFill/>
+          </a:ln>
+          <a:effectLst/>
+        </p:spPr>
+        <p:style>
+          <a:lnRef idx="1">
+            <a:schemeClr val="accent1"/>
+          </a:lnRef>
+          <a:fillRef idx="3">
+            <a:schemeClr val="accent1"/>
+          </a:fillRef>
+          <a:effectRef idx="2">
+            <a:schemeClr val="accent1"/>
+          </a:effectRef>
+          <a:fontRef idx="minor">
+            <a:schemeClr val="lt1"/>
+          </a:fontRef>
+        </p:style>
+        <p:txBody>
+          <a:bodyPr rtlCol="0" anchor="ctr"/>
+          <a:lstStyle/>
+          <a:p>
+            <a:endParaRPr/>
+          </a:p>
+        </p:txBody>
+      </p:sp>
+      <p:sp>
+        <p:nvSpPr>
+          <p:cNvPr id="3" name="TextBox 2"/>
+          <p:cNvSpPr txBox="1"/>
+          <p:nvPr/>
+        </p:nvSpPr>
+        <p:spPr>
+          <a:xfrm>
+            <a:off x="548640" y="384048"/>
+            <a:ext cx="10972800" cy="274320"/>
+          </a:xfrm>
+          <a:prstGeom prst="rect">
+            <a:avLst/>
+          </a:prstGeom>
+          <a:noFill/>
+        </p:spPr>
+        <p:txBody>
+          <a:bodyPr wrap="square" lIns="0" tIns="0" rIns="0" bIns="0" anchor="t">
+            <a:spAutoFit/>
+          </a:bodyPr>
+          <a:lstStyle/>
+          <a:p>
+            <a:pPr algn="l">
+              <a:lnSpc>
+                <a:spcPct val="110000"/>
+              </a:lnSpc>
+              <a:spcAft>
+                <a:spcPts val="600"/>
+              </a:spcAft>
+            </a:pPr>
+            <a:r>
+              <a:rPr sz="1200" b="1" i="0">
+                <a:solidFill>
+                  <a:srgbClr val="E07A2D"/>
+                </a:solidFill>
+                <a:latin typeface="Calibri"/>
+              </a:rPr>
+              <a:t>GLI ASSI SOTTO TRAFFICO · LA SOLA RETE NEURALE · P-CORE</a:t>
+            </a:r>
+          </a:p>
+        </p:txBody>
+      </p:sp>
+      <p:sp>
+        <p:nvSpPr>
+          <p:cNvPr id="4" name="TextBox 3"/>
+          <p:cNvSpPr txBox="1"/>
+          <p:nvPr/>
+        </p:nvSpPr>
+        <p:spPr>
+          <a:xfrm>
+            <a:off x="548640" y="658368"/>
+            <a:ext cx="11064240" cy="822960"/>
+          </a:xfrm>
+          <a:prstGeom prst="rect">
+            <a:avLst/>
+          </a:prstGeom>
+          <a:noFill/>
+        </p:spPr>
+        <p:txBody>
+          <a:bodyPr wrap="square" lIns="0" tIns="0" rIns="0" bIns="0" anchor="t">
+            <a:spAutoFit/>
+          </a:bodyPr>
+          <a:lstStyle/>
+          <a:p>
+            <a:pPr algn="l">
+              <a:lnSpc>
+                <a:spcPct val="100000"/>
+              </a:lnSpc>
+              <a:spcAft>
+                <a:spcPts val="600"/>
+              </a:spcAft>
+            </a:pPr>
+            <a:r>
+              <a:rPr sz="3000" b="1" i="0">
+                <a:solidFill>
+                  <a:srgbClr val="1F3A5F"/>
+                </a:solidFill>
+                <a:latin typeface="Calibri"/>
+              </a:rPr>
+              <a:t>Sul nodo vero la rete neurale costa un po' di più</a:t>
+            </a:r>
+          </a:p>
+        </p:txBody>
+      </p:sp>
+      <p:sp>
+        <p:nvSpPr>
+          <p:cNvPr id="5" name="TextBox 4"/>
+          <p:cNvSpPr txBox="1"/>
+          <p:nvPr/>
+        </p:nvSpPr>
+        <p:spPr>
+          <a:xfrm>
+            <a:off x="11292840" y="6446520"/>
+            <a:ext cx="457200" cy="274320"/>
+          </a:xfrm>
+          <a:prstGeom prst="rect">
+            <a:avLst/>
+          </a:prstGeom>
+          <a:noFill/>
+        </p:spPr>
+        <p:txBody>
+          <a:bodyPr wrap="square" lIns="0" tIns="0" rIns="0" bIns="0" anchor="t">
+            <a:spAutoFit/>
+          </a:bodyPr>
+          <a:lstStyle/>
+          <a:p>
+            <a:pPr algn="r">
+              <a:lnSpc>
+                <a:spcPct val="110000"/>
+              </a:lnSpc>
+              <a:spcAft>
+                <a:spcPts val="600"/>
+              </a:spcAft>
+            </a:pPr>
+            <a:r>
+              <a:rPr sz="1100" b="0" i="0">
+                <a:solidFill>
+                  <a:srgbClr val="6B7C93"/>
+                </a:solidFill>
+                <a:latin typeface="Calibri"/>
+              </a:rPr>
+              <a:t>16</a:t>
+            </a:r>
+          </a:p>
+        </p:txBody>
+      </p:sp>
+      <p:sp>
+        <p:nvSpPr>
+          <p:cNvPr id="6" name="TextBox 5"/>
+          <p:cNvSpPr txBox="1"/>
+          <p:nvPr/>
+        </p:nvSpPr>
+        <p:spPr>
+          <a:xfrm>
+            <a:off x="548640" y="6446520"/>
+            <a:ext cx="10424160" cy="176908"/>
+          </a:xfrm>
+          <a:prstGeom prst="rect">
+            <a:avLst/>
+          </a:prstGeom>
+          <a:noFill/>
+        </p:spPr>
+        <p:txBody>
+          <a:bodyPr wrap="square" lIns="0" tIns="0" rIns="0" bIns="0" anchor="t">
+            <a:spAutoFit/>
+          </a:bodyPr>
+          <a:lstStyle/>
+          <a:p>
+            <a:pPr algn="l">
+              <a:lnSpc>
+                <a:spcPct val="110000"/>
+              </a:lnSpc>
+              <a:spcAft>
+                <a:spcPts val="600"/>
+              </a:spcAft>
+            </a:pPr>
+            <a:r>
+              <a:rPr sz="1100" b="0" i="1" dirty="0">
+                <a:solidFill>
+                  <a:srgbClr val="6B7C93"/>
+                </a:solidFill>
+                <a:latin typeface="Calibri"/>
+              </a:rPr>
+              <a:t>T2−T1, build strumentata (T1 all'ingresso, T2 prima di bpf_redirect), xdp_gen a 0,3 e 0,6 Mpps, baseline sottratta  ·  da solo: minimo su 7 prove  ·  P-core a 3,5 GHz</a:t>
+            </a:r>
+          </a:p>
+        </p:txBody>
+      </p:sp>
+      <p:graphicFrame>
+        <p:nvGraphicFramePr>
+          <p:cNvPr id="7" name="Chart 6"/>
+          <p:cNvGraphicFramePr>
+            <a:graphicFrameLocks noGrp="1"/>
+          </p:cNvGraphicFramePr>
+          <p:nvPr/>
+        </p:nvGraphicFramePr>
+        <p:xfrm>
+          <a:off x="457200" y="1463040"/>
+          <a:ext cx="5669280" cy="3246120"/>
+        </p:xfrm>
+        <a:graphic>
+          <a:graphicData uri="http://schemas.openxmlformats.org/drawingml/2006/chart">
+            <c:chart xmlns:c="http://schemas.openxmlformats.org/drawingml/2006/chart" r:id="rId2"/>
+          </a:graphicData>
+        </a:graphic>
+      </p:graphicFrame>
+      <p:graphicFrame>
+        <p:nvGraphicFramePr>
+          <p:cNvPr id="8" name="Chart 7"/>
+          <p:cNvGraphicFramePr>
+            <a:graphicFrameLocks noGrp="1"/>
+          </p:cNvGraphicFramePr>
+          <p:nvPr/>
+        </p:nvGraphicFramePr>
+        <p:xfrm>
+          <a:off x="6217920" y="1463040"/>
+          <a:ext cx="5669280" cy="3246120"/>
+        </p:xfrm>
+        <a:graphic>
+          <a:graphicData uri="http://schemas.openxmlformats.org/drawingml/2006/chart">
+            <c:chart xmlns:c="http://schemas.openxmlformats.org/drawingml/2006/chart" r:id="rId3"/>
+          </a:graphicData>
+        </a:graphic>
+      </p:graphicFrame>
+      <p:sp>
+        <p:nvSpPr>
+          <p:cNvPr id="9" name="TextBox 8"/>
+          <p:cNvSpPr txBox="1"/>
+          <p:nvPr/>
+        </p:nvSpPr>
+        <p:spPr>
+          <a:xfrm>
+            <a:off x="548640" y="4800600"/>
+            <a:ext cx="5394960" cy="699102"/>
+          </a:xfrm>
+          <a:prstGeom prst="rect">
+            <a:avLst/>
+          </a:prstGeom>
+          <a:noFill/>
+        </p:spPr>
+        <p:txBody>
+          <a:bodyPr wrap="square" lIns="0" tIns="0" rIns="0" bIns="0" anchor="t">
+            <a:spAutoFit/>
+          </a:bodyPr>
+          <a:lstStyle/>
+          <a:p>
+            <a:pPr algn="l">
+              <a:lnSpc>
+                <a:spcPct val="110000"/>
+              </a:lnSpc>
+              <a:spcAft>
+                <a:spcPts val="600"/>
+              </a:spcAft>
+            </a:pPr>
+            <a:r>
+              <a:rPr lang="it-IT" sz="1400" b="1" i="0" dirty="0">
+                <a:solidFill>
+                  <a:srgbClr val="222B36"/>
+                </a:solidFill>
+                <a:latin typeface="Calibri"/>
+              </a:rPr>
+              <a:t>P3, da 1 a 6 strati. </a:t>
+            </a:r>
+            <a:r>
+              <a:rPr lang="it-IT" sz="1400" b="0" i="0" dirty="0">
+                <a:solidFill>
+                  <a:srgbClr val="222B36"/>
+                </a:solidFill>
+                <a:latin typeface="Calibri"/>
+              </a:rPr>
+              <a:t>Da solo 246 → 510 ns; sotto traffico il minimo coincide (262 → 508), la media sta 45–107 ns sopra (322 → 610).</a:t>
+            </a:r>
+          </a:p>
+        </p:txBody>
+      </p:sp>
+      <p:sp>
+        <p:nvSpPr>
+          <p:cNvPr id="10" name="TextBox 9"/>
+          <p:cNvSpPr txBox="1"/>
+          <p:nvPr/>
+        </p:nvSpPr>
+        <p:spPr>
+          <a:xfrm>
+            <a:off x="6309360" y="4800600"/>
+            <a:ext cx="5394960" cy="731520"/>
+          </a:xfrm>
+          <a:prstGeom prst="rect">
+            <a:avLst/>
+          </a:prstGeom>
+          <a:noFill/>
+        </p:spPr>
+        <p:txBody>
+          <a:bodyPr wrap="square" lIns="0" tIns="0" rIns="0" bIns="0" anchor="t">
+            <a:spAutoFit/>
+          </a:bodyPr>
+          <a:lstStyle/>
+          <a:p>
+            <a:pPr algn="l">
+              <a:lnSpc>
+                <a:spcPct val="110000"/>
+              </a:lnSpc>
+              <a:spcAft>
+                <a:spcPts val="600"/>
+              </a:spcAft>
+            </a:pPr>
+            <a:r>
+              <a:rPr sz="1400" b="1" i="0">
+                <a:solidFill>
+                  <a:srgbClr val="222B36"/>
+                </a:solidFill>
+                <a:latin typeface="Calibri"/>
+              </a:rPr>
+              <a:t>P2. </a:t>
+            </a:r>
+            <a:r>
+              <a:rPr sz="1400" b="0" i="0">
+                <a:solidFill>
+                  <a:srgbClr val="222B36"/>
+                </a:solidFill>
+                <a:latin typeface="Calibri"/>
+              </a:rPr>
+              <a:t>Da solo 157 → 286 ns, minimo 180 → 292, media 214 → 356 (+40–73 ns). P1 e P1.5: media +12–34 ns.</a:t>
+            </a:r>
+          </a:p>
+        </p:txBody>
+      </p:sp>
+      <p:sp>
+        <p:nvSpPr>
+          <p:cNvPr id="11" name="Rounded Rectangle 10"/>
+          <p:cNvSpPr/>
+          <p:nvPr/>
+        </p:nvSpPr>
+        <p:spPr>
+          <a:xfrm>
+            <a:off x="548640" y="5577840"/>
+            <a:ext cx="11094415" cy="777240"/>
+          </a:xfrm>
+          <a:prstGeom prst="roundRect">
+            <a:avLst>
+              <a:gd name="adj" fmla="val 6000"/>
+            </a:avLst>
+          </a:prstGeom>
+          <a:solidFill>
+            <a:srgbClr val="FFF4DE"/>
+          </a:solidFill>
+          <a:ln>
+            <a:noFill/>
+          </a:ln>
+          <a:effectLst/>
+        </p:spPr>
+        <p:style>
+          <a:lnRef idx="1">
+            <a:schemeClr val="accent1"/>
+          </a:lnRef>
+          <a:fillRef idx="3">
+            <a:schemeClr val="accent1"/>
+          </a:fillRef>
+          <a:effectRef idx="2">
+            <a:schemeClr val="accent1"/>
+          </a:effectRef>
+          <a:fontRef idx="minor">
+            <a:schemeClr val="lt1"/>
+          </a:fontRef>
+        </p:style>
+        <p:txBody>
+          <a:bodyPr rtlCol="0" anchor="ctr"/>
+          <a:lstStyle/>
+          <a:p>
+            <a:endParaRPr/>
+          </a:p>
+        </p:txBody>
+      </p:sp>
+      <p:sp>
+        <p:nvSpPr>
+          <p:cNvPr id="12" name="Rectangle 11"/>
+          <p:cNvSpPr/>
+          <p:nvPr/>
+        </p:nvSpPr>
+        <p:spPr>
+          <a:xfrm>
+            <a:off x="548640" y="5577840"/>
+            <a:ext cx="82296" cy="777240"/>
+          </a:xfrm>
+          <a:prstGeom prst="rect">
+            <a:avLst/>
+          </a:prstGeom>
+          <a:solidFill>
+            <a:srgbClr val="F2B134"/>
+          </a:solidFill>
+          <a:ln>
+            <a:noFill/>
+          </a:ln>
+          <a:effectLst/>
+        </p:spPr>
+        <p:style>
+          <a:lnRef idx="1">
+            <a:schemeClr val="accent1"/>
+          </a:lnRef>
+          <a:fillRef idx="3">
+            <a:schemeClr val="accent1"/>
+          </a:fillRef>
+          <a:effectRef idx="2">
+            <a:schemeClr val="accent1"/>
+          </a:effectRef>
+          <a:fontRef idx="minor">
+            <a:schemeClr val="lt1"/>
+          </a:fontRef>
+        </p:style>
+        <p:txBody>
+          <a:bodyPr rtlCol="0" anchor="ctr"/>
+          <a:lstStyle/>
+          <a:p>
+            <a:endParaRPr/>
+          </a:p>
+        </p:txBody>
+      </p:sp>
+      <p:sp>
+        <p:nvSpPr>
+          <p:cNvPr id="13" name="TextBox 12"/>
+          <p:cNvSpPr txBox="1"/>
+          <p:nvPr/>
+        </p:nvSpPr>
+        <p:spPr>
+          <a:xfrm>
+            <a:off x="822960" y="5650992"/>
+            <a:ext cx="1097280" cy="274320"/>
+          </a:xfrm>
+          <a:prstGeom prst="rect">
+            <a:avLst/>
+          </a:prstGeom>
+          <a:noFill/>
+        </p:spPr>
+        <p:txBody>
+          <a:bodyPr wrap="square" lIns="0" tIns="0" rIns="0" bIns="0" anchor="t">
+            <a:spAutoFit/>
+          </a:bodyPr>
+          <a:lstStyle/>
+          <a:p>
+            <a:pPr algn="l">
+              <a:lnSpc>
+                <a:spcPct val="110000"/>
+              </a:lnSpc>
+              <a:spcAft>
+                <a:spcPts val="600"/>
+              </a:spcAft>
+            </a:pPr>
+            <a:r>
+              <a:rPr sz="1100" b="1" i="0">
+                <a:solidFill>
+                  <a:srgbClr val="B57A00"/>
+                </a:solidFill>
+                <a:latin typeface="Calibri"/>
+              </a:rPr>
+              <a:t>QUINDI</a:t>
+            </a:r>
+          </a:p>
+        </p:txBody>
+      </p:sp>
+      <p:sp>
+        <p:nvSpPr>
+          <p:cNvPr id="14" name="TextBox 13"/>
+          <p:cNvSpPr txBox="1"/>
+          <p:nvPr/>
+        </p:nvSpPr>
+        <p:spPr>
+          <a:xfrm>
+            <a:off x="1783080" y="5577840"/>
+            <a:ext cx="9677095" cy="777240"/>
+          </a:xfrm>
+          <a:prstGeom prst="rect">
+            <a:avLst/>
+          </a:prstGeom>
+          <a:noFill/>
+        </p:spPr>
+        <p:txBody>
+          <a:bodyPr wrap="square" lIns="0" tIns="0" rIns="0" bIns="0" anchor="ctr">
+            <a:spAutoFit/>
+          </a:bodyPr>
+          <a:lstStyle/>
+          <a:p>
+            <a:pPr algn="l">
+              <a:lnSpc>
+                <a:spcPct val="105000"/>
+              </a:lnSpc>
+              <a:spcAft>
+                <a:spcPts val="0"/>
+              </a:spcAft>
+            </a:pPr>
+            <a:r>
+              <a:rPr sz="1500" b="0" i="0">
+                <a:solidFill>
+                  <a:srgbClr val="222B36"/>
+                </a:solidFill>
+                <a:latin typeface="Calibri"/>
+              </a:rPr>
+              <a:t>Le conclusioni del programma da solo valgono per la rete neurale sul nodo vero: stesse curve, stesso ordine. In servizio ogni pacchetto paga in più cache e predittori non sempre caldi: </a:t>
+            </a:r>
+            <a:r>
+              <a:rPr sz="1500" b="1" i="0">
+                <a:solidFill>
+                  <a:srgbClr val="222B36"/>
+                </a:solidFill>
+                <a:latin typeface="Calibri"/>
+              </a:rPr>
+              <a:t>10–40 ns per P1 e P1.5, 40–110 ns per P2 e P3</a:t>
+            </a:r>
+            <a:r>
+              <a:rPr sz="1500" b="0" i="0">
+                <a:solidFill>
+                  <a:srgbClr val="222B36"/>
+                </a:solidFill>
+                <a:latin typeface="Calibri"/>
+              </a:rPr>
+              <a:t>. Sull'E-core il divario è circa doppio.</a:t>
+            </a:r>
+          </a:p>
+        </p:txBody>
+      </p:sp>
+    </p:spTree>
+  </p:cSld>
+  <p:clrMapOvr>
+    <a:masterClrMapping/>
+  </p:clrMapOvr>
+</p:sld>
+</file>
+
+<file path=ppt/slides/slide17.xml><?xml version="1.0" encoding="utf-8"?>
 <p:sld xmlns:a="http://schemas.openxmlformats.org/drawingml/2006/main" xmlns:r="http://schemas.openxmlformats.org/officeDocument/2006/relationships" xmlns:p="http://schemas.openxmlformats.org/presentationml/2006/main">
   <p:cSld>
     <p:bg>
@@ -23860,7 +25343,7 @@
                 </a:solidFill>
                 <a:latin typeface="Calibri"/>
               </a:rPr>
-              <a:t>IL PROGRAMMA DA SOLO · ISTRUZIONI E LATENZA</a:t>
+              <a:t>LA RETE NEURALE SOTTO TRAFFICO · ISTRUZIONI E LATENZA</a:t>
             </a:r>
           </a:p>
         </p:txBody>
@@ -23902,7 +25385,7 @@
                 </a:solidFill>
                 <a:latin typeface="Calibri"/>
               </a:rPr>
-              <a:t>La configurabilità si paga per pacchetto: 46 → 318 ns</a:t>
+              <a:t>La configurabilità si paga per pacchetto: +51 → +359 ns</a:t>
             </a:r>
           </a:p>
         </p:txBody>
@@ -23944,7 +25427,7 @@
                 </a:solidFill>
                 <a:latin typeface="Calibri"/>
               </a:rPr>
-              <a:t>16</a:t>
+              <a:t>17</a:t>
             </a:r>
           </a:p>
         </p:txBody>
@@ -23986,7 +25469,7 @@
                 </a:solidFill>
                 <a:latin typeface="Calibri"/>
               </a:rPr>
-              <a:t>Stesso modello, 319 pesi  ·  minimo su 7 prove  ·  BPF_PROG_TEST_RUN  ·  P-core a 3,5 GHz</a:t>
+              <a:t>Stesso modello, 319 pesi  ·  tempo di CPU per pacchetto, xdp_gen, nodo saturo, P-core a 3,5 GHz  ·  istruzioni, letture e salti: proprietà del programma</a:t>
             </a:r>
           </a:p>
         </p:txBody>
@@ -24761,7 +26244,7 @@
                 </a:solidFill>
                 <a:latin typeface="Calibri"/>
               </a:rPr>
-              <a:t> (1 → 3), non nell'aritmetica. Rendere configurabile la forma (P2) costa </a:t>
+              <a:t> (1 → 3), non nell'aritmetica. Sopra la baseline, rendere configurabile la forma (P2) costa </a:t>
             </a:r>
             <a:r>
               <a:rPr sz="1500" b="1" i="0">
@@ -24798,1025 +26281,6 @@
                 <a:latin typeface="Calibri"/>
               </a:rPr>
               <a:t>. Fra P1 e P1.5 quasi niente.</a:t>
-            </a:r>
-          </a:p>
-        </p:txBody>
-      </p:sp>
-    </p:spTree>
-  </p:cSld>
-  <p:clrMapOvr>
-    <a:masterClrMapping/>
-  </p:clrMapOvr>
-</p:sld>
-</file>
-
-<file path=ppt/slides/slide17.xml><?xml version="1.0" encoding="utf-8"?>
-<p:sld xmlns:a="http://schemas.openxmlformats.org/drawingml/2006/main" xmlns:r="http://schemas.openxmlformats.org/officeDocument/2006/relationships" xmlns:p="http://schemas.openxmlformats.org/presentationml/2006/main">
-  <p:cSld>
-    <p:bg>
-      <p:bgPr>
-        <a:solidFill>
-          <a:srgbClr val="FFFFFF"/>
-        </a:solidFill>
-        <a:effectLst/>
-      </p:bgPr>
-    </p:bg>
-    <p:spTree>
-      <p:nvGrpSpPr>
-        <p:cNvPr id="1" name=""/>
-        <p:cNvGrpSpPr/>
-        <p:nvPr/>
-      </p:nvGrpSpPr>
-      <p:grpSpPr>
-        <a:xfrm>
-          <a:off x="0" y="0"/>
-          <a:ext cx="0" cy="0"/>
-          <a:chOff x="0" y="0"/>
-          <a:chExt cx="0" cy="0"/>
-        </a:xfrm>
-      </p:grpSpPr>
-      <p:sp>
-        <p:nvSpPr>
-          <p:cNvPr id="2" name="Rectangle 1"/>
-          <p:cNvSpPr/>
-          <p:nvPr/>
-        </p:nvSpPr>
-        <p:spPr>
-          <a:xfrm>
-            <a:off x="0" y="0"/>
-            <a:ext cx="12191695" cy="109728"/>
-          </a:xfrm>
-          <a:prstGeom prst="rect">
-            <a:avLst/>
-          </a:prstGeom>
-          <a:solidFill>
-            <a:srgbClr val="1F3A5F"/>
-          </a:solidFill>
-          <a:ln>
-            <a:noFill/>
-          </a:ln>
-          <a:effectLst/>
-        </p:spPr>
-        <p:style>
-          <a:lnRef idx="1">
-            <a:schemeClr val="accent1"/>
-          </a:lnRef>
-          <a:fillRef idx="3">
-            <a:schemeClr val="accent1"/>
-          </a:fillRef>
-          <a:effectRef idx="2">
-            <a:schemeClr val="accent1"/>
-          </a:effectRef>
-          <a:fontRef idx="minor">
-            <a:schemeClr val="lt1"/>
-          </a:fontRef>
-        </p:style>
-        <p:txBody>
-          <a:bodyPr rtlCol="0" anchor="ctr"/>
-          <a:lstStyle/>
-          <a:p>
-            <a:endParaRPr/>
-          </a:p>
-        </p:txBody>
-      </p:sp>
-      <p:sp>
-        <p:nvSpPr>
-          <p:cNvPr id="3" name="TextBox 2"/>
-          <p:cNvSpPr txBox="1"/>
-          <p:nvPr/>
-        </p:nvSpPr>
-        <p:spPr>
-          <a:xfrm>
-            <a:off x="548640" y="384048"/>
-            <a:ext cx="10972800" cy="274320"/>
-          </a:xfrm>
-          <a:prstGeom prst="rect">
-            <a:avLst/>
-          </a:prstGeom>
-          <a:noFill/>
-        </p:spPr>
-        <p:txBody>
-          <a:bodyPr wrap="square" lIns="0" tIns="0" rIns="0" bIns="0" anchor="t">
-            <a:spAutoFit/>
-          </a:bodyPr>
-          <a:lstStyle/>
-          <a:p>
-            <a:pPr algn="l">
-              <a:lnSpc>
-                <a:spcPct val="110000"/>
-              </a:lnSpc>
-              <a:spcAft>
-                <a:spcPts val="600"/>
-              </a:spcAft>
-            </a:pPr>
-            <a:r>
-              <a:rPr sz="1200" b="1" i="0">
-                <a:solidFill>
-                  <a:srgbClr val="E07A2D"/>
-                </a:solidFill>
-                <a:latin typeface="Calibri"/>
-              </a:rPr>
-              <a:t>IL PROGRAMMA DA SOLO · IL COMPROMESSO</a:t>
-            </a:r>
-          </a:p>
-        </p:txBody>
-      </p:sp>
-      <p:sp>
-        <p:nvSpPr>
-          <p:cNvPr id="4" name="TextBox 3"/>
-          <p:cNvSpPr txBox="1"/>
-          <p:nvPr/>
-        </p:nvSpPr>
-        <p:spPr>
-          <a:xfrm>
-            <a:off x="548640" y="658368"/>
-            <a:ext cx="11064240" cy="822960"/>
-          </a:xfrm>
-          <a:prstGeom prst="rect">
-            <a:avLst/>
-          </a:prstGeom>
-          <a:noFill/>
-        </p:spPr>
-        <p:txBody>
-          <a:bodyPr wrap="square" lIns="0" tIns="0" rIns="0" bIns="0" anchor="t">
-            <a:spAutoFit/>
-          </a:bodyPr>
-          <a:lstStyle/>
-          <a:p>
-            <a:pPr algn="l">
-              <a:lnSpc>
-                <a:spcPct val="100000"/>
-              </a:lnSpc>
-              <a:spcAft>
-                <a:spcPts val="600"/>
-              </a:spcAft>
-            </a:pPr>
-            <a:r>
-              <a:rPr sz="3000" b="1" i="0">
-                <a:solidFill>
-                  <a:srgbClr val="1F3A5F"/>
-                </a:solidFill>
-                <a:latin typeface="Calibri"/>
-              </a:rPr>
-              <a:t>Cambiare modello costa millisecondi a tutte le pipeline</a:t>
-            </a:r>
-          </a:p>
-        </p:txBody>
-      </p:sp>
-      <p:sp>
-        <p:nvSpPr>
-          <p:cNvPr id="5" name="TextBox 4"/>
-          <p:cNvSpPr txBox="1"/>
-          <p:nvPr/>
-        </p:nvSpPr>
-        <p:spPr>
-          <a:xfrm>
-            <a:off x="11292840" y="6446520"/>
-            <a:ext cx="457200" cy="176908"/>
-          </a:xfrm>
-          <a:prstGeom prst="rect">
-            <a:avLst/>
-          </a:prstGeom>
-          <a:noFill/>
-        </p:spPr>
-        <p:txBody>
-          <a:bodyPr wrap="square" lIns="0" tIns="0" rIns="0" bIns="0" anchor="t">
-            <a:spAutoFit/>
-          </a:bodyPr>
-          <a:lstStyle/>
-          <a:p>
-            <a:pPr algn="r">
-              <a:lnSpc>
-                <a:spcPct val="110000"/>
-              </a:lnSpc>
-              <a:spcAft>
-                <a:spcPts val="600"/>
-              </a:spcAft>
-            </a:pPr>
-            <a:r>
-              <a:rPr lang="it-IT" sz="1100" b="0" i="0">
-                <a:solidFill>
-                  <a:srgbClr val="6B7C93"/>
-                </a:solidFill>
-                <a:latin typeface="Calibri"/>
-              </a:rPr>
-              <a:t>17</a:t>
-            </a:r>
-          </a:p>
-        </p:txBody>
-      </p:sp>
-      <p:sp>
-        <p:nvSpPr>
-          <p:cNvPr id="6" name="TextBox 5"/>
-          <p:cNvSpPr txBox="1"/>
-          <p:nvPr/>
-        </p:nvSpPr>
-        <p:spPr>
-          <a:xfrm>
-            <a:off x="548640" y="6446520"/>
-            <a:ext cx="10424160" cy="176908"/>
-          </a:xfrm>
-          <a:prstGeom prst="rect">
-            <a:avLst/>
-          </a:prstGeom>
-          <a:noFill/>
-        </p:spPr>
-        <p:txBody>
-          <a:bodyPr wrap="square" lIns="0" tIns="0" rIns="0" bIns="0" anchor="t">
-            <a:spAutoFit/>
-          </a:bodyPr>
-          <a:lstStyle/>
-          <a:p>
-            <a:pPr algn="l">
-              <a:lnSpc>
-                <a:spcPct val="110000"/>
-              </a:lnSpc>
-              <a:spcAft>
-                <a:spcPts val="600"/>
-              </a:spcAft>
-            </a:pPr>
-            <a:r>
-              <a:rPr sz="1100" b="0" i="1" dirty="0">
-                <a:solidFill>
-                  <a:srgbClr val="6B7C93"/>
-                </a:solidFill>
-                <a:latin typeface="Calibri"/>
-              </a:rPr>
-              <a:t>Tempo per </a:t>
-            </a:r>
-            <a:r>
-              <a:rPr sz="1100" b="0" i="1" dirty="0" err="1">
-                <a:solidFill>
-                  <a:srgbClr val="6B7C93"/>
-                </a:solidFill>
-                <a:latin typeface="Calibri"/>
-              </a:rPr>
-              <a:t>installare</a:t>
-            </a:r>
-            <a:r>
-              <a:rPr sz="1100" b="0" i="1" dirty="0">
-                <a:solidFill>
-                  <a:srgbClr val="6B7C93"/>
-                </a:solidFill>
-                <a:latin typeface="Calibri"/>
-              </a:rPr>
-              <a:t> un </a:t>
-            </a:r>
-            <a:r>
-              <a:rPr sz="1100" b="0" i="1" dirty="0" err="1">
-                <a:solidFill>
-                  <a:srgbClr val="6B7C93"/>
-                </a:solidFill>
-                <a:latin typeface="Calibri"/>
-              </a:rPr>
-              <a:t>modello</a:t>
-            </a:r>
-            <a:r>
-              <a:rPr sz="1100" b="0" i="1" dirty="0">
-                <a:solidFill>
-                  <a:srgbClr val="6B7C93"/>
-                </a:solidFill>
-                <a:latin typeface="Calibri"/>
-              </a:rPr>
-              <a:t> nuovo </a:t>
-            </a:r>
-            <a:r>
-              <a:rPr sz="1100" b="0" i="1" dirty="0" err="1">
-                <a:solidFill>
-                  <a:srgbClr val="6B7C93"/>
-                </a:solidFill>
-                <a:latin typeface="Calibri"/>
-              </a:rPr>
-              <a:t>su</a:t>
-            </a:r>
-            <a:r>
-              <a:rPr sz="1100" b="0" i="1" dirty="0">
-                <a:solidFill>
-                  <a:srgbClr val="6B7C93"/>
-                </a:solidFill>
-                <a:latin typeface="Calibri"/>
-              </a:rPr>
-              <a:t> un </a:t>
-            </a:r>
-            <a:r>
-              <a:rPr sz="1100" b="0" i="1" dirty="0" err="1">
-                <a:solidFill>
-                  <a:srgbClr val="6B7C93"/>
-                </a:solidFill>
-                <a:latin typeface="Calibri"/>
-              </a:rPr>
-              <a:t>nodo</a:t>
-            </a:r>
-            <a:r>
-              <a:rPr sz="1100" b="0" i="1" dirty="0">
-                <a:solidFill>
-                  <a:srgbClr val="6B7C93"/>
-                </a:solidFill>
-                <a:latin typeface="Calibri"/>
-              </a:rPr>
-              <a:t> </a:t>
-            </a:r>
-            <a:r>
-              <a:rPr sz="1100" b="0" i="1" dirty="0" err="1">
-                <a:solidFill>
-                  <a:srgbClr val="6B7C93"/>
-                </a:solidFill>
-                <a:latin typeface="Calibri"/>
-              </a:rPr>
-              <a:t>già</a:t>
-            </a:r>
-            <a:r>
-              <a:rPr sz="1100" b="0" i="1" dirty="0">
-                <a:solidFill>
-                  <a:srgbClr val="6B7C93"/>
-                </a:solidFill>
-                <a:latin typeface="Calibri"/>
-              </a:rPr>
-              <a:t> in </a:t>
-            </a:r>
-            <a:r>
-              <a:rPr sz="1100" b="0" i="1" dirty="0" err="1">
-                <a:solidFill>
-                  <a:srgbClr val="6B7C93"/>
-                </a:solidFill>
-                <a:latin typeface="Calibri"/>
-              </a:rPr>
-              <a:t>servizio</a:t>
-            </a:r>
-            <a:r>
-              <a:rPr sz="1100" b="0" i="1" dirty="0">
-                <a:solidFill>
-                  <a:srgbClr val="6B7C93"/>
-                </a:solidFill>
-                <a:latin typeface="Calibri"/>
-              </a:rPr>
-              <a:t> (scala </a:t>
-            </a:r>
-            <a:r>
-              <a:rPr sz="1100" b="0" i="1" dirty="0" err="1">
-                <a:solidFill>
-                  <a:srgbClr val="6B7C93"/>
-                </a:solidFill>
-                <a:latin typeface="Calibri"/>
-              </a:rPr>
-              <a:t>logaritmica</a:t>
-            </a:r>
-            <a:r>
-              <a:rPr sz="1100" b="0" i="1" dirty="0">
-                <a:solidFill>
-                  <a:srgbClr val="6B7C93"/>
-                </a:solidFill>
-                <a:latin typeface="Calibri"/>
-              </a:rPr>
-              <a:t>) </a:t>
-            </a:r>
-          </a:p>
-        </p:txBody>
-      </p:sp>
-      <p:graphicFrame>
-        <p:nvGraphicFramePr>
-          <p:cNvPr id="7" name="Chart 6"/>
-          <p:cNvGraphicFramePr>
-            <a:graphicFrameLocks noGrp="1"/>
-          </p:cNvGraphicFramePr>
-          <p:nvPr/>
-        </p:nvGraphicFramePr>
-        <p:xfrm>
-          <a:off x="457200" y="1600200"/>
-          <a:ext cx="5669280" cy="3840480"/>
-        </p:xfrm>
-        <a:graphic>
-          <a:graphicData uri="http://schemas.openxmlformats.org/drawingml/2006/chart">
-            <c:chart xmlns:c="http://schemas.openxmlformats.org/drawingml/2006/chart" xmlns:r="http://schemas.openxmlformats.org/officeDocument/2006/relationships" r:id="rId2"/>
-          </a:graphicData>
-        </a:graphic>
-      </p:graphicFrame>
-      <p:sp>
-        <p:nvSpPr>
-          <p:cNvPr id="8" name="Rounded Rectangle 7"/>
-          <p:cNvSpPr/>
-          <p:nvPr/>
-        </p:nvSpPr>
-        <p:spPr>
-          <a:xfrm>
-            <a:off x="6400800" y="1645920"/>
-            <a:ext cx="5303520" cy="1737360"/>
-          </a:xfrm>
-          <a:prstGeom prst="roundRect">
-            <a:avLst>
-              <a:gd name="adj" fmla="val 6000"/>
-            </a:avLst>
-          </a:prstGeom>
-          <a:solidFill>
-            <a:srgbClr val="F3F5F8"/>
-          </a:solidFill>
-          <a:ln>
-            <a:noFill/>
-          </a:ln>
-          <a:effectLst/>
-        </p:spPr>
-        <p:style>
-          <a:lnRef idx="1">
-            <a:schemeClr val="accent1"/>
-          </a:lnRef>
-          <a:fillRef idx="3">
-            <a:schemeClr val="accent1"/>
-          </a:fillRef>
-          <a:effectRef idx="2">
-            <a:schemeClr val="accent1"/>
-          </a:effectRef>
-          <a:fontRef idx="minor">
-            <a:schemeClr val="lt1"/>
-          </a:fontRef>
-        </p:style>
-        <p:txBody>
-          <a:bodyPr rtlCol="0" anchor="ctr"/>
-          <a:lstStyle/>
-          <a:p>
-            <a:endParaRPr/>
-          </a:p>
-        </p:txBody>
-      </p:sp>
-      <p:sp>
-        <p:nvSpPr>
-          <p:cNvPr id="9" name="Rectangle 8"/>
-          <p:cNvSpPr/>
-          <p:nvPr/>
-        </p:nvSpPr>
-        <p:spPr>
-          <a:xfrm>
-            <a:off x="6400800" y="1645920"/>
-            <a:ext cx="82296" cy="1737360"/>
-          </a:xfrm>
-          <a:prstGeom prst="rect">
-            <a:avLst/>
-          </a:prstGeom>
-          <a:solidFill>
-            <a:srgbClr val="E07A2D"/>
-          </a:solidFill>
-          <a:ln>
-            <a:noFill/>
-          </a:ln>
-          <a:effectLst/>
-        </p:spPr>
-        <p:style>
-          <a:lnRef idx="1">
-            <a:schemeClr val="accent1"/>
-          </a:lnRef>
-          <a:fillRef idx="3">
-            <a:schemeClr val="accent1"/>
-          </a:fillRef>
-          <a:effectRef idx="2">
-            <a:schemeClr val="accent1"/>
-          </a:effectRef>
-          <a:fontRef idx="minor">
-            <a:schemeClr val="lt1"/>
-          </a:fontRef>
-        </p:style>
-        <p:txBody>
-          <a:bodyPr rtlCol="0" anchor="ctr"/>
-          <a:lstStyle/>
-          <a:p>
-            <a:endParaRPr/>
-          </a:p>
-        </p:txBody>
-      </p:sp>
-      <p:sp>
-        <p:nvSpPr>
-          <p:cNvPr id="10" name="TextBox 9"/>
-          <p:cNvSpPr txBox="1"/>
-          <p:nvPr/>
-        </p:nvSpPr>
-        <p:spPr>
-          <a:xfrm>
-            <a:off x="6675120" y="1810512"/>
-            <a:ext cx="4892040" cy="457200"/>
-          </a:xfrm>
-          <a:prstGeom prst="rect">
-            <a:avLst/>
-          </a:prstGeom>
-          <a:noFill/>
-        </p:spPr>
-        <p:txBody>
-          <a:bodyPr wrap="square" lIns="0" tIns="0" rIns="0" bIns="0" anchor="t">
-            <a:spAutoFit/>
-          </a:bodyPr>
-          <a:lstStyle/>
-          <a:p>
-            <a:pPr algn="l">
-              <a:lnSpc>
-                <a:spcPct val="110000"/>
-              </a:lnSpc>
-              <a:spcAft>
-                <a:spcPts val="600"/>
-              </a:spcAft>
-            </a:pPr>
-            <a:r>
-              <a:rPr sz="1700" b="1" i="0">
-                <a:solidFill>
-                  <a:srgbClr val="E07A2D"/>
-                </a:solidFill>
-                <a:latin typeface="Calibri"/>
-              </a:rPr>
-              <a:t>Con l'oggetto precompilato (AOT)</a:t>
-            </a:r>
-          </a:p>
-        </p:txBody>
-      </p:sp>
-      <p:sp>
-        <p:nvSpPr>
-          <p:cNvPr id="11" name="TextBox 10"/>
-          <p:cNvSpPr txBox="1"/>
-          <p:nvPr/>
-        </p:nvSpPr>
-        <p:spPr>
-          <a:xfrm>
-            <a:off x="6675120" y="2221992"/>
-            <a:ext cx="4892040" cy="1115568"/>
-          </a:xfrm>
-          <a:prstGeom prst="rect">
-            <a:avLst/>
-          </a:prstGeom>
-          <a:noFill/>
-        </p:spPr>
-        <p:txBody>
-          <a:bodyPr wrap="square" lIns="0" tIns="0" rIns="0" bIns="0" anchor="t">
-            <a:spAutoFit/>
-          </a:bodyPr>
-          <a:lstStyle/>
-          <a:p>
-            <a:pPr algn="l">
-              <a:lnSpc>
-                <a:spcPct val="110000"/>
-              </a:lnSpc>
-              <a:spcAft>
-                <a:spcPts val="600"/>
-              </a:spcAft>
-            </a:pPr>
-            <a:r>
-              <a:rPr sz="1400" b="0" i="0">
-                <a:solidFill>
-                  <a:srgbClr val="222B36"/>
-                </a:solidFill>
-                <a:latin typeface="Calibri"/>
-              </a:rPr>
-              <a:t>Il nodo carica un file pronto: </a:t>
-            </a:r>
-            <a:r>
-              <a:rPr sz="1400" b="1" i="0">
-                <a:solidFill>
-                  <a:srgbClr val="222B36"/>
-                </a:solidFill>
-                <a:latin typeface="Calibri"/>
-              </a:rPr>
-              <a:t>~1 ms</a:t>
-            </a:r>
-            <a:r>
-              <a:rPr sz="1400" b="0" i="0">
-                <a:solidFill>
-                  <a:srgbClr val="222B36"/>
-                </a:solidFill>
-                <a:latin typeface="Calibri"/>
-              </a:rPr>
-              <a:t>. Generarlo e compilarlo con clang, fuori dal nodo, costa </a:t>
-            </a:r>
-            <a:r>
-              <a:rPr sz="1400" b="1" i="0">
-                <a:solidFill>
-                  <a:srgbClr val="222B36"/>
-                </a:solidFill>
-                <a:latin typeface="Calibri"/>
-              </a:rPr>
-              <a:t>~80 ms</a:t>
-            </a:r>
-            <a:r>
-              <a:rPr sz="1400" b="0" i="0">
-                <a:solidFill>
-                  <a:srgbClr val="222B36"/>
-                </a:solidFill>
-                <a:latin typeface="Calibri"/>
-              </a:rPr>
-              <a:t>.</a:t>
-            </a:r>
-          </a:p>
-        </p:txBody>
-      </p:sp>
-      <p:sp>
-        <p:nvSpPr>
-          <p:cNvPr id="12" name="Rounded Rectangle 11"/>
-          <p:cNvSpPr/>
-          <p:nvPr/>
-        </p:nvSpPr>
-        <p:spPr>
-          <a:xfrm>
-            <a:off x="6400800" y="3566160"/>
-            <a:ext cx="5303520" cy="1737360"/>
-          </a:xfrm>
-          <a:prstGeom prst="roundRect">
-            <a:avLst>
-              <a:gd name="adj" fmla="val 6000"/>
-            </a:avLst>
-          </a:prstGeom>
-          <a:solidFill>
-            <a:srgbClr val="F3F5F8"/>
-          </a:solidFill>
-          <a:ln>
-            <a:noFill/>
-          </a:ln>
-          <a:effectLst/>
-        </p:spPr>
-        <p:style>
-          <a:lnRef idx="1">
-            <a:schemeClr val="accent1"/>
-          </a:lnRef>
-          <a:fillRef idx="3">
-            <a:schemeClr val="accent1"/>
-          </a:fillRef>
-          <a:effectRef idx="2">
-            <a:schemeClr val="accent1"/>
-          </a:effectRef>
-          <a:fontRef idx="minor">
-            <a:schemeClr val="lt1"/>
-          </a:fontRef>
-        </p:style>
-        <p:txBody>
-          <a:bodyPr rtlCol="0" anchor="ctr"/>
-          <a:lstStyle/>
-          <a:p>
-            <a:endParaRPr/>
-          </a:p>
-        </p:txBody>
-      </p:sp>
-      <p:sp>
-        <p:nvSpPr>
-          <p:cNvPr id="13" name="Rectangle 12"/>
-          <p:cNvSpPr/>
-          <p:nvPr/>
-        </p:nvSpPr>
-        <p:spPr>
-          <a:xfrm>
-            <a:off x="6400800" y="3566160"/>
-            <a:ext cx="82296" cy="1737360"/>
-          </a:xfrm>
-          <a:prstGeom prst="rect">
-            <a:avLst/>
-          </a:prstGeom>
-          <a:solidFill>
-            <a:srgbClr val="2E9C6E"/>
-          </a:solidFill>
-          <a:ln>
-            <a:noFill/>
-          </a:ln>
-          <a:effectLst/>
-        </p:spPr>
-        <p:style>
-          <a:lnRef idx="1">
-            <a:schemeClr val="accent1"/>
-          </a:lnRef>
-          <a:fillRef idx="3">
-            <a:schemeClr val="accent1"/>
-          </a:fillRef>
-          <a:effectRef idx="2">
-            <a:schemeClr val="accent1"/>
-          </a:effectRef>
-          <a:fontRef idx="minor">
-            <a:schemeClr val="lt1"/>
-          </a:fontRef>
-        </p:style>
-        <p:txBody>
-          <a:bodyPr rtlCol="0" anchor="ctr"/>
-          <a:lstStyle/>
-          <a:p>
-            <a:endParaRPr/>
-          </a:p>
-        </p:txBody>
-      </p:sp>
-      <p:sp>
-        <p:nvSpPr>
-          <p:cNvPr id="14" name="TextBox 13"/>
-          <p:cNvSpPr txBox="1"/>
-          <p:nvPr/>
-        </p:nvSpPr>
-        <p:spPr>
-          <a:xfrm>
-            <a:off x="6675120" y="3730752"/>
-            <a:ext cx="4892040" cy="457200"/>
-          </a:xfrm>
-          <a:prstGeom prst="rect">
-            <a:avLst/>
-          </a:prstGeom>
-          <a:noFill/>
-        </p:spPr>
-        <p:txBody>
-          <a:bodyPr wrap="square" lIns="0" tIns="0" rIns="0" bIns="0" anchor="t">
-            <a:spAutoFit/>
-          </a:bodyPr>
-          <a:lstStyle/>
-          <a:p>
-            <a:pPr algn="l">
-              <a:lnSpc>
-                <a:spcPct val="110000"/>
-              </a:lnSpc>
-              <a:spcAft>
-                <a:spcPts val="600"/>
-              </a:spcAft>
-            </a:pPr>
-            <a:r>
-              <a:rPr sz="1700" b="1" i="0">
-                <a:solidFill>
-                  <a:srgbClr val="2E9C6E"/>
-                </a:solidFill>
-                <a:latin typeface="Calibri"/>
-              </a:rPr>
-              <a:t>Il vantaggio di P2 e P3</a:t>
-            </a:r>
-          </a:p>
-        </p:txBody>
-      </p:sp>
-      <p:sp>
-        <p:nvSpPr>
-          <p:cNvPr id="15" name="TextBox 14"/>
-          <p:cNvSpPr txBox="1"/>
-          <p:nvPr/>
-        </p:nvSpPr>
-        <p:spPr>
-          <a:xfrm>
-            <a:off x="6675120" y="4142232"/>
-            <a:ext cx="4892040" cy="1115568"/>
-          </a:xfrm>
-          <a:prstGeom prst="rect">
-            <a:avLst/>
-          </a:prstGeom>
-          <a:noFill/>
-        </p:spPr>
-        <p:txBody>
-          <a:bodyPr wrap="square" lIns="0" tIns="0" rIns="0" bIns="0" anchor="t">
-            <a:spAutoFit/>
-          </a:bodyPr>
-          <a:lstStyle/>
-          <a:p>
-            <a:pPr algn="l">
-              <a:lnSpc>
-                <a:spcPct val="110000"/>
-              </a:lnSpc>
-              <a:spcAft>
-                <a:spcPts val="600"/>
-              </a:spcAft>
-            </a:pPr>
-            <a:r>
-              <a:rPr sz="1400" b="0" i="0">
-                <a:solidFill>
-                  <a:srgbClr val="222B36"/>
-                </a:solidFill>
-                <a:latin typeface="Calibri"/>
-              </a:rPr>
-              <a:t>Un modello nuovo si installa </a:t>
-            </a:r>
-            <a:r>
-              <a:rPr sz="1400" b="1" i="0">
-                <a:solidFill>
-                  <a:srgbClr val="222B36"/>
-                </a:solidFill>
-                <a:latin typeface="Calibri"/>
-              </a:rPr>
-              <a:t>scrivendo una tabella</a:t>
-            </a:r>
-            <a:r>
-              <a:rPr sz="1400" b="0" i="0">
-                <a:solidFill>
-                  <a:srgbClr val="222B36"/>
-                </a:solidFill>
-                <a:latin typeface="Calibri"/>
-              </a:rPr>
-              <a:t> (~10 ms): nessun compilatore. Il programma generico si compila una volta sola (1,2–1,5 s). P1 vuole un compilatore per ogni modello nuovo, su qualche macchina.</a:t>
-            </a:r>
-          </a:p>
-        </p:txBody>
-      </p:sp>
-      <p:sp>
-        <p:nvSpPr>
-          <p:cNvPr id="16" name="Rounded Rectangle 15"/>
-          <p:cNvSpPr/>
-          <p:nvPr/>
-        </p:nvSpPr>
-        <p:spPr>
-          <a:xfrm>
-            <a:off x="548640" y="5577840"/>
-            <a:ext cx="11094415" cy="777240"/>
-          </a:xfrm>
-          <a:prstGeom prst="roundRect">
-            <a:avLst>
-              <a:gd name="adj" fmla="val 6000"/>
-            </a:avLst>
-          </a:prstGeom>
-          <a:solidFill>
-            <a:srgbClr val="FFF4DE"/>
-          </a:solidFill>
-          <a:ln>
-            <a:noFill/>
-          </a:ln>
-          <a:effectLst/>
-        </p:spPr>
-        <p:style>
-          <a:lnRef idx="1">
-            <a:schemeClr val="accent1"/>
-          </a:lnRef>
-          <a:fillRef idx="3">
-            <a:schemeClr val="accent1"/>
-          </a:fillRef>
-          <a:effectRef idx="2">
-            <a:schemeClr val="accent1"/>
-          </a:effectRef>
-          <a:fontRef idx="minor">
-            <a:schemeClr val="lt1"/>
-          </a:fontRef>
-        </p:style>
-        <p:txBody>
-          <a:bodyPr rtlCol="0" anchor="ctr"/>
-          <a:lstStyle/>
-          <a:p>
-            <a:endParaRPr/>
-          </a:p>
-        </p:txBody>
-      </p:sp>
-      <p:sp>
-        <p:nvSpPr>
-          <p:cNvPr id="17" name="Rectangle 16"/>
-          <p:cNvSpPr/>
-          <p:nvPr/>
-        </p:nvSpPr>
-        <p:spPr>
-          <a:xfrm>
-            <a:off x="548640" y="5577840"/>
-            <a:ext cx="82296" cy="777240"/>
-          </a:xfrm>
-          <a:prstGeom prst="rect">
-            <a:avLst/>
-          </a:prstGeom>
-          <a:solidFill>
-            <a:srgbClr val="F2B134"/>
-          </a:solidFill>
-          <a:ln>
-            <a:noFill/>
-          </a:ln>
-          <a:effectLst/>
-        </p:spPr>
-        <p:style>
-          <a:lnRef idx="1">
-            <a:schemeClr val="accent1"/>
-          </a:lnRef>
-          <a:fillRef idx="3">
-            <a:schemeClr val="accent1"/>
-          </a:fillRef>
-          <a:effectRef idx="2">
-            <a:schemeClr val="accent1"/>
-          </a:effectRef>
-          <a:fontRef idx="minor">
-            <a:schemeClr val="lt1"/>
-          </a:fontRef>
-        </p:style>
-        <p:txBody>
-          <a:bodyPr rtlCol="0" anchor="ctr"/>
-          <a:lstStyle/>
-          <a:p>
-            <a:endParaRPr/>
-          </a:p>
-        </p:txBody>
-      </p:sp>
-      <p:sp>
-        <p:nvSpPr>
-          <p:cNvPr id="18" name="TextBox 17"/>
-          <p:cNvSpPr txBox="1"/>
-          <p:nvPr/>
-        </p:nvSpPr>
-        <p:spPr>
-          <a:xfrm>
-            <a:off x="822960" y="5650992"/>
-            <a:ext cx="1097280" cy="274320"/>
-          </a:xfrm>
-          <a:prstGeom prst="rect">
-            <a:avLst/>
-          </a:prstGeom>
-          <a:noFill/>
-        </p:spPr>
-        <p:txBody>
-          <a:bodyPr wrap="square" lIns="0" tIns="0" rIns="0" bIns="0" anchor="t">
-            <a:spAutoFit/>
-          </a:bodyPr>
-          <a:lstStyle/>
-          <a:p>
-            <a:pPr algn="l">
-              <a:lnSpc>
-                <a:spcPct val="110000"/>
-              </a:lnSpc>
-              <a:spcAft>
-                <a:spcPts val="600"/>
-              </a:spcAft>
-            </a:pPr>
-            <a:r>
-              <a:rPr sz="1100" b="1" i="0">
-                <a:solidFill>
-                  <a:srgbClr val="B57A00"/>
-                </a:solidFill>
-                <a:latin typeface="Calibri"/>
-              </a:rPr>
-              <a:t>QUINDI</a:t>
-            </a:r>
-          </a:p>
-        </p:txBody>
-      </p:sp>
-      <p:sp>
-        <p:nvSpPr>
-          <p:cNvPr id="19" name="TextBox 18"/>
-          <p:cNvSpPr txBox="1"/>
-          <p:nvPr/>
-        </p:nvSpPr>
-        <p:spPr>
-          <a:xfrm>
-            <a:off x="1783080" y="5577840"/>
-            <a:ext cx="9677095" cy="777240"/>
-          </a:xfrm>
-          <a:prstGeom prst="rect">
-            <a:avLst/>
-          </a:prstGeom>
-          <a:noFill/>
-        </p:spPr>
-        <p:txBody>
-          <a:bodyPr wrap="square" lIns="0" tIns="0" rIns="0" bIns="0" anchor="ctr">
-            <a:spAutoFit/>
-          </a:bodyPr>
-          <a:lstStyle/>
-          <a:p>
-            <a:pPr algn="l">
-              <a:lnSpc>
-                <a:spcPct val="105000"/>
-              </a:lnSpc>
-              <a:spcAft>
-                <a:spcPts val="0"/>
-              </a:spcAft>
-            </a:pPr>
-            <a:r>
-              <a:rPr sz="1500" b="0" i="0">
-                <a:solidFill>
-                  <a:srgbClr val="222B36"/>
-                </a:solidFill>
-                <a:latin typeface="Calibri"/>
-              </a:rPr>
-              <a:t>Il tempo per cambiare modello </a:t>
-            </a:r>
-            <a:r>
-              <a:rPr sz="1500" b="1" i="0">
-                <a:solidFill>
-                  <a:srgbClr val="222B36"/>
-                </a:solidFill>
-                <a:latin typeface="Calibri"/>
-              </a:rPr>
-              <a:t>non è un criterio di scelta</a:t>
-            </a:r>
-            <a:r>
-              <a:rPr sz="1500" b="0" i="0">
-                <a:solidFill>
-                  <a:srgbClr val="222B36"/>
-                </a:solidFill>
-                <a:latin typeface="Calibri"/>
-              </a:rPr>
-              <a:t>: millisecondi per tutte. Si sceglie sul </a:t>
-            </a:r>
-            <a:r>
-              <a:rPr sz="1500" b="1" i="0">
-                <a:solidFill>
-                  <a:srgbClr val="222B36"/>
-                </a:solidFill>
-                <a:latin typeface="Calibri"/>
-              </a:rPr>
-              <a:t>costo per pacchetto</a:t>
-            </a:r>
-            <a:r>
-              <a:rPr sz="1500" b="0" i="0">
-                <a:solidFill>
-                  <a:srgbClr val="222B36"/>
-                </a:solidFill>
-                <a:latin typeface="Calibri"/>
-              </a:rPr>
-              <a:t> (~50 ns di rete con i pesi compilati, ~225–360 con quelli da tabella) e su </a:t>
-            </a:r>
-            <a:r>
-              <a:rPr sz="1500" b="1" i="0">
-                <a:solidFill>
-                  <a:srgbClr val="222B36"/>
-                </a:solidFill>
-                <a:latin typeface="Calibri"/>
-              </a:rPr>
-              <a:t>dove serve un compilatore</a:t>
-            </a:r>
-            <a:r>
-              <a:rPr sz="1500" b="0" i="0">
-                <a:solidFill>
-                  <a:srgbClr val="222B36"/>
-                </a:solidFill>
-                <a:latin typeface="Calibri"/>
-              </a:rPr>
-              <a:t>.</a:t>
             </a:r>
           </a:p>
         </p:txBody>
@@ -25935,7 +26399,7 @@
                 </a:solidFill>
                 <a:latin typeface="Calibri"/>
               </a:rPr>
-              <a:t>IL PROGRAMMA DA SOLO · TAGLIA DELLA RETE, LARGHEZZA DEL MODELLO</a:t>
+              <a:t>CAMBIARE MODELLO · IL COMPROMESSO</a:t>
             </a:r>
           </a:p>
         </p:txBody>
@@ -25977,7 +26441,7 @@
                 </a:solidFill>
                 <a:latin typeface="Calibri"/>
               </a:rPr>
-              <a:t>La rete può crescere quanto vuole. Il modello no.</a:t>
+              <a:t>Cambiare modello costa millisecondi a tutte le pipeline</a:t>
             </a:r>
           </a:p>
         </p:txBody>
@@ -25991,7 +26455,7 @@
         <p:spPr>
           <a:xfrm>
             <a:off x="11292840" y="6446520"/>
-            <a:ext cx="457200" cy="274320"/>
+            <a:ext cx="457200" cy="176908"/>
           </a:xfrm>
           <a:prstGeom prst="rect">
             <a:avLst/>
@@ -26013,7 +26477,7 @@
               </a:spcAft>
             </a:pPr>
             <a:r>
-              <a:rPr sz="1100" b="0" i="0">
+              <a:rPr lang="it-IT" sz="1100" b="0" i="0">
                 <a:solidFill>
                   <a:srgbClr val="6B7C93"/>
                 </a:solidFill>
@@ -26061,7 +26525,133 @@
                 </a:solidFill>
                 <a:latin typeface="Calibri"/>
               </a:rPr>
-              <a:t>BPF_PROG_TEST_RUN, minimo su 7 prove  ·  P1 come oggetto AOT  ·  P-core a 3,5 GHz</a:t>
+              <a:t>Tempo per </a:t>
+            </a:r>
+            <a:r>
+              <a:rPr sz="1100" b="0" i="1" dirty="0" err="1">
+                <a:solidFill>
+                  <a:srgbClr val="6B7C93"/>
+                </a:solidFill>
+                <a:latin typeface="Calibri"/>
+              </a:rPr>
+              <a:t>installare</a:t>
+            </a:r>
+            <a:r>
+              <a:rPr sz="1100" b="0" i="1" dirty="0">
+                <a:solidFill>
+                  <a:srgbClr val="6B7C93"/>
+                </a:solidFill>
+                <a:latin typeface="Calibri"/>
+              </a:rPr>
+              <a:t> un </a:t>
+            </a:r>
+            <a:r>
+              <a:rPr sz="1100" b="0" i="1" dirty="0" err="1">
+                <a:solidFill>
+                  <a:srgbClr val="6B7C93"/>
+                </a:solidFill>
+                <a:latin typeface="Calibri"/>
+              </a:rPr>
+              <a:t>modello</a:t>
+            </a:r>
+            <a:r>
+              <a:rPr sz="1100" b="0" i="1" dirty="0">
+                <a:solidFill>
+                  <a:srgbClr val="6B7C93"/>
+                </a:solidFill>
+                <a:latin typeface="Calibri"/>
+              </a:rPr>
+              <a:t> nuovo </a:t>
+            </a:r>
+            <a:r>
+              <a:rPr sz="1100" b="0" i="1" dirty="0" err="1">
+                <a:solidFill>
+                  <a:srgbClr val="6B7C93"/>
+                </a:solidFill>
+                <a:latin typeface="Calibri"/>
+              </a:rPr>
+              <a:t>su</a:t>
+            </a:r>
+            <a:r>
+              <a:rPr sz="1100" b="0" i="1" dirty="0">
+                <a:solidFill>
+                  <a:srgbClr val="6B7C93"/>
+                </a:solidFill>
+                <a:latin typeface="Calibri"/>
+              </a:rPr>
+              <a:t> un </a:t>
+            </a:r>
+            <a:r>
+              <a:rPr sz="1100" b="0" i="1" dirty="0" err="1">
+                <a:solidFill>
+                  <a:srgbClr val="6B7C93"/>
+                </a:solidFill>
+                <a:latin typeface="Calibri"/>
+              </a:rPr>
+              <a:t>nodo</a:t>
+            </a:r>
+            <a:r>
+              <a:rPr sz="1100" b="0" i="1" dirty="0">
+                <a:solidFill>
+                  <a:srgbClr val="6B7C93"/>
+                </a:solidFill>
+                <a:latin typeface="Calibri"/>
+              </a:rPr>
+              <a:t> </a:t>
+            </a:r>
+            <a:r>
+              <a:rPr sz="1100" b="0" i="1" dirty="0" err="1">
+                <a:solidFill>
+                  <a:srgbClr val="6B7C93"/>
+                </a:solidFill>
+                <a:latin typeface="Calibri"/>
+              </a:rPr>
+              <a:t>già</a:t>
+            </a:r>
+            <a:r>
+              <a:rPr sz="1100" b="0" i="1" dirty="0">
+                <a:solidFill>
+                  <a:srgbClr val="6B7C93"/>
+                </a:solidFill>
+                <a:latin typeface="Calibri"/>
+              </a:rPr>
+              <a:t> in </a:t>
+            </a:r>
+            <a:r>
+              <a:rPr sz="1100" b="0" i="1" dirty="0" err="1">
+                <a:solidFill>
+                  <a:srgbClr val="6B7C93"/>
+                </a:solidFill>
+                <a:latin typeface="Calibri"/>
+              </a:rPr>
+              <a:t>servizio</a:t>
+            </a:r>
+            <a:r>
+              <a:rPr sz="1100" b="0" i="1" dirty="0">
+                <a:solidFill>
+                  <a:srgbClr val="6B7C93"/>
+                </a:solidFill>
+                <a:latin typeface="Calibri"/>
+              </a:rPr>
+              <a:t> (scala </a:t>
+            </a:r>
+            <a:r>
+              <a:rPr sz="1100" b="0" i="1" dirty="0" err="1">
+                <a:solidFill>
+                  <a:srgbClr val="6B7C93"/>
+                </a:solidFill>
+                <a:latin typeface="Calibri"/>
+              </a:rPr>
+              <a:t>logaritmica</a:t>
+            </a:r>
+            <a:r>
+              <a:rPr sz="1100" b="0" i="1" dirty="0">
+                <a:solidFill>
+                  <a:srgbClr val="6B7C93"/>
+                </a:solidFill>
+                <a:latin typeface="Calibri"/>
+              </a:rPr>
+              <a:t>) </a:t>
             </a:r>
           </a:p>
         </p:txBody>
@@ -26075,8 +26665,8 @@
           <p:nvPr/>
         </p:nvGraphicFramePr>
         <p:xfrm>
-          <a:off x="457200" y="1463040"/>
-          <a:ext cx="5669280" cy="3246120"/>
+          <a:off x="457200" y="1600200"/>
+          <a:ext cx="5669280" cy="3840480"/>
         </p:xfrm>
         <a:graphic>
           <a:graphicData uri="http://schemas.openxmlformats.org/drawingml/2006/chart">
@@ -26084,34 +26674,106 @@
           </a:graphicData>
         </a:graphic>
       </p:graphicFrame>
-      <p:graphicFrame>
-        <p:nvGraphicFramePr>
-          <p:cNvPr id="8" name="Chart 7"/>
-          <p:cNvGraphicFramePr>
-            <a:graphicFrameLocks noGrp="1"/>
-          </p:cNvGraphicFramePr>
-          <p:nvPr/>
-        </p:nvGraphicFramePr>
-        <p:xfrm>
-          <a:off x="6217920" y="1463040"/>
-          <a:ext cx="5669280" cy="3246120"/>
-        </p:xfrm>
-        <a:graphic>
-          <a:graphicData uri="http://schemas.openxmlformats.org/drawingml/2006/chart">
-            <c:chart xmlns:c="http://schemas.openxmlformats.org/drawingml/2006/chart" xmlns:r="http://schemas.openxmlformats.org/officeDocument/2006/relationships" r:id="rId3"/>
-          </a:graphicData>
-        </a:graphic>
-      </p:graphicFrame>
       <p:sp>
         <p:nvSpPr>
-          <p:cNvPr id="9" name="TextBox 8"/>
+          <p:cNvPr id="8" name="Rounded Rectangle 7"/>
+          <p:cNvSpPr/>
+          <p:nvPr/>
+        </p:nvSpPr>
+        <p:spPr>
+          <a:xfrm>
+            <a:off x="6400800" y="1645920"/>
+            <a:ext cx="5303520" cy="1737360"/>
+          </a:xfrm>
+          <a:prstGeom prst="roundRect">
+            <a:avLst>
+              <a:gd name="adj" fmla="val 6000"/>
+            </a:avLst>
+          </a:prstGeom>
+          <a:solidFill>
+            <a:srgbClr val="F3F5F8"/>
+          </a:solidFill>
+          <a:ln>
+            <a:noFill/>
+          </a:ln>
+          <a:effectLst/>
+        </p:spPr>
+        <p:style>
+          <a:lnRef idx="1">
+            <a:schemeClr val="accent1"/>
+          </a:lnRef>
+          <a:fillRef idx="3">
+            <a:schemeClr val="accent1"/>
+          </a:fillRef>
+          <a:effectRef idx="2">
+            <a:schemeClr val="accent1"/>
+          </a:effectRef>
+          <a:fontRef idx="minor">
+            <a:schemeClr val="lt1"/>
+          </a:fontRef>
+        </p:style>
+        <p:txBody>
+          <a:bodyPr rtlCol="0" anchor="ctr"/>
+          <a:lstStyle/>
+          <a:p>
+            <a:endParaRPr/>
+          </a:p>
+        </p:txBody>
+      </p:sp>
+      <p:sp>
+        <p:nvSpPr>
+          <p:cNvPr id="9" name="Rectangle 8"/>
+          <p:cNvSpPr/>
+          <p:nvPr/>
+        </p:nvSpPr>
+        <p:spPr>
+          <a:xfrm>
+            <a:off x="6400800" y="1645920"/>
+            <a:ext cx="82296" cy="1737360"/>
+          </a:xfrm>
+          <a:prstGeom prst="rect">
+            <a:avLst/>
+          </a:prstGeom>
+          <a:solidFill>
+            <a:srgbClr val="E07A2D"/>
+          </a:solidFill>
+          <a:ln>
+            <a:noFill/>
+          </a:ln>
+          <a:effectLst/>
+        </p:spPr>
+        <p:style>
+          <a:lnRef idx="1">
+            <a:schemeClr val="accent1"/>
+          </a:lnRef>
+          <a:fillRef idx="3">
+            <a:schemeClr val="accent1"/>
+          </a:fillRef>
+          <a:effectRef idx="2">
+            <a:schemeClr val="accent1"/>
+          </a:effectRef>
+          <a:fontRef idx="minor">
+            <a:schemeClr val="lt1"/>
+          </a:fontRef>
+        </p:style>
+        <p:txBody>
+          <a:bodyPr rtlCol="0" anchor="ctr"/>
+          <a:lstStyle/>
+          <a:p>
+            <a:endParaRPr/>
+          </a:p>
+        </p:txBody>
+      </p:sp>
+      <p:sp>
+        <p:nvSpPr>
+          <p:cNvPr id="10" name="TextBox 9"/>
           <p:cNvSpPr txBox="1"/>
           <p:nvPr/>
         </p:nvSpPr>
         <p:spPr>
           <a:xfrm>
-            <a:off x="548640" y="4800600"/>
-            <a:ext cx="5394960" cy="699102"/>
+            <a:off x="6675120" y="1810512"/>
+            <a:ext cx="4892040" cy="457200"/>
           </a:xfrm>
           <a:prstGeom prst="rect">
             <a:avLst/>
@@ -26133,60 +26795,27 @@
               </a:spcAft>
             </a:pPr>
             <a:r>
-              <a:rPr lang="it-IT" sz="1400" b="1" i="0" dirty="0">
-                <a:solidFill>
-                  <a:srgbClr val="222B36"/>
+              <a:rPr sz="1700" b="1" i="0">
+                <a:solidFill>
+                  <a:srgbClr val="E07A2D"/>
                 </a:solidFill>
                 <a:latin typeface="Calibri"/>
               </a:rPr>
-              <a:t>L'identità del nodo attiva una colonna sola di pesi. </a:t>
-            </a:r>
-            <a:r>
-              <a:rPr lang="it-IT" sz="1400" b="0" i="0" dirty="0">
-                <a:solidFill>
-                  <a:srgbClr val="222B36"/>
-                </a:solidFill>
-                <a:latin typeface="Calibri"/>
-              </a:rPr>
-              <a:t>P1 statica la conosce già alla compilazione e la somma al </a:t>
-            </a:r>
-            <a:r>
-              <a:rPr lang="it-IT" sz="1400" b="0" i="0" dirty="0" err="1">
-                <a:solidFill>
-                  <a:srgbClr val="222B36"/>
-                </a:solidFill>
-                <a:latin typeface="Calibri"/>
-              </a:rPr>
-              <a:t>bias</a:t>
-            </a:r>
-            <a:r>
-              <a:rPr lang="it-IT" sz="1400" b="0" i="0" dirty="0">
-                <a:solidFill>
-                  <a:srgbClr val="222B36"/>
-                </a:solidFill>
-                <a:latin typeface="Calibri"/>
-              </a:rPr>
-              <a:t>; le altre la leggono da tabella. In nessun caso il lavoro per pacchetto dipende dalla taglia della rete.</a:t>
-            </a:r>
-            <a:endParaRPr sz="1400" b="0" i="0" dirty="0">
-              <a:solidFill>
-                <a:srgbClr val="222B36"/>
-              </a:solidFill>
-              <a:latin typeface="Calibri"/>
-            </a:endParaRPr>
+              <a:t>Con l'oggetto precompilato (AOT)</a:t>
+            </a:r>
           </a:p>
         </p:txBody>
       </p:sp>
       <p:sp>
         <p:nvSpPr>
-          <p:cNvPr id="10" name="TextBox 9"/>
+          <p:cNvPr id="11" name="TextBox 10"/>
           <p:cNvSpPr txBox="1"/>
           <p:nvPr/>
         </p:nvSpPr>
         <p:spPr>
           <a:xfrm>
-            <a:off x="6309360" y="4800600"/>
-            <a:ext cx="5394960" cy="731520"/>
+            <a:off x="6675120" y="2221992"/>
+            <a:ext cx="4892040" cy="1115568"/>
           </a:xfrm>
           <a:prstGeom prst="rect">
             <a:avLst/>
@@ -26208,13 +26837,22 @@
               </a:spcAft>
             </a:pPr>
             <a:r>
+              <a:rPr sz="1400" b="0" i="0">
+                <a:solidFill>
+                  <a:srgbClr val="222B36"/>
+                </a:solidFill>
+                <a:latin typeface="Calibri"/>
+              </a:rPr>
+              <a:t>Il nodo carica un file pronto: </a:t>
+            </a:r>
+            <a:r>
               <a:rPr sz="1400" b="1" i="0">
                 <a:solidFill>
                   <a:srgbClr val="222B36"/>
                 </a:solidFill>
                 <a:latin typeface="Calibri"/>
               </a:rPr>
-              <a:t>Da 2 a 8 neuroni sale su tutte e quattro</a:t>
+              <a:t>~1 ms</a:t>
             </a:r>
             <a:r>
               <a:rPr sz="1400" b="0" i="0">
@@ -26223,14 +26861,224 @@
                 </a:solidFill>
                 <a:latin typeface="Calibri"/>
               </a:rPr>
-              <a:t>: P1 26 → 68 ns, P3 280 → 386 ns. Un neurone in più è lavoro vero, a ogni pacchetto.</a:t>
+              <a:t>. Generarlo e compilarlo con clang, fuori dal nodo, costa </a:t>
+            </a:r>
+            <a:r>
+              <a:rPr sz="1400" b="1" i="0">
+                <a:solidFill>
+                  <a:srgbClr val="222B36"/>
+                </a:solidFill>
+                <a:latin typeface="Calibri"/>
+              </a:rPr>
+              <a:t>~80 ms</a:t>
+            </a:r>
+            <a:r>
+              <a:rPr sz="1400" b="0" i="0">
+                <a:solidFill>
+                  <a:srgbClr val="222B36"/>
+                </a:solidFill>
+                <a:latin typeface="Calibri"/>
+              </a:rPr>
+              <a:t>.</a:t>
             </a:r>
           </a:p>
         </p:txBody>
       </p:sp>
       <p:sp>
         <p:nvSpPr>
-          <p:cNvPr id="11" name="Rounded Rectangle 10"/>
+          <p:cNvPr id="12" name="Rounded Rectangle 11"/>
+          <p:cNvSpPr/>
+          <p:nvPr/>
+        </p:nvSpPr>
+        <p:spPr>
+          <a:xfrm>
+            <a:off x="6400800" y="3566160"/>
+            <a:ext cx="5303520" cy="1737360"/>
+          </a:xfrm>
+          <a:prstGeom prst="roundRect">
+            <a:avLst>
+              <a:gd name="adj" fmla="val 6000"/>
+            </a:avLst>
+          </a:prstGeom>
+          <a:solidFill>
+            <a:srgbClr val="F3F5F8"/>
+          </a:solidFill>
+          <a:ln>
+            <a:noFill/>
+          </a:ln>
+          <a:effectLst/>
+        </p:spPr>
+        <p:style>
+          <a:lnRef idx="1">
+            <a:schemeClr val="accent1"/>
+          </a:lnRef>
+          <a:fillRef idx="3">
+            <a:schemeClr val="accent1"/>
+          </a:fillRef>
+          <a:effectRef idx="2">
+            <a:schemeClr val="accent1"/>
+          </a:effectRef>
+          <a:fontRef idx="minor">
+            <a:schemeClr val="lt1"/>
+          </a:fontRef>
+        </p:style>
+        <p:txBody>
+          <a:bodyPr rtlCol="0" anchor="ctr"/>
+          <a:lstStyle/>
+          <a:p>
+            <a:endParaRPr/>
+          </a:p>
+        </p:txBody>
+      </p:sp>
+      <p:sp>
+        <p:nvSpPr>
+          <p:cNvPr id="13" name="Rectangle 12"/>
+          <p:cNvSpPr/>
+          <p:nvPr/>
+        </p:nvSpPr>
+        <p:spPr>
+          <a:xfrm>
+            <a:off x="6400800" y="3566160"/>
+            <a:ext cx="82296" cy="1737360"/>
+          </a:xfrm>
+          <a:prstGeom prst="rect">
+            <a:avLst/>
+          </a:prstGeom>
+          <a:solidFill>
+            <a:srgbClr val="2E9C6E"/>
+          </a:solidFill>
+          <a:ln>
+            <a:noFill/>
+          </a:ln>
+          <a:effectLst/>
+        </p:spPr>
+        <p:style>
+          <a:lnRef idx="1">
+            <a:schemeClr val="accent1"/>
+          </a:lnRef>
+          <a:fillRef idx="3">
+            <a:schemeClr val="accent1"/>
+          </a:fillRef>
+          <a:effectRef idx="2">
+            <a:schemeClr val="accent1"/>
+          </a:effectRef>
+          <a:fontRef idx="minor">
+            <a:schemeClr val="lt1"/>
+          </a:fontRef>
+        </p:style>
+        <p:txBody>
+          <a:bodyPr rtlCol="0" anchor="ctr"/>
+          <a:lstStyle/>
+          <a:p>
+            <a:endParaRPr/>
+          </a:p>
+        </p:txBody>
+      </p:sp>
+      <p:sp>
+        <p:nvSpPr>
+          <p:cNvPr id="14" name="TextBox 13"/>
+          <p:cNvSpPr txBox="1"/>
+          <p:nvPr/>
+        </p:nvSpPr>
+        <p:spPr>
+          <a:xfrm>
+            <a:off x="6675120" y="3730752"/>
+            <a:ext cx="4892040" cy="457200"/>
+          </a:xfrm>
+          <a:prstGeom prst="rect">
+            <a:avLst/>
+          </a:prstGeom>
+          <a:noFill/>
+        </p:spPr>
+        <p:txBody>
+          <a:bodyPr wrap="square" lIns="0" tIns="0" rIns="0" bIns="0" anchor="t">
+            <a:spAutoFit/>
+          </a:bodyPr>
+          <a:lstStyle/>
+          <a:p>
+            <a:pPr algn="l">
+              <a:lnSpc>
+                <a:spcPct val="110000"/>
+              </a:lnSpc>
+              <a:spcAft>
+                <a:spcPts val="600"/>
+              </a:spcAft>
+            </a:pPr>
+            <a:r>
+              <a:rPr sz="1700" b="1" i="0">
+                <a:solidFill>
+                  <a:srgbClr val="2E9C6E"/>
+                </a:solidFill>
+                <a:latin typeface="Calibri"/>
+              </a:rPr>
+              <a:t>Il vantaggio di P2 e P3</a:t>
+            </a:r>
+          </a:p>
+        </p:txBody>
+      </p:sp>
+      <p:sp>
+        <p:nvSpPr>
+          <p:cNvPr id="15" name="TextBox 14"/>
+          <p:cNvSpPr txBox="1"/>
+          <p:nvPr/>
+        </p:nvSpPr>
+        <p:spPr>
+          <a:xfrm>
+            <a:off x="6675120" y="4142232"/>
+            <a:ext cx="4892040" cy="1115568"/>
+          </a:xfrm>
+          <a:prstGeom prst="rect">
+            <a:avLst/>
+          </a:prstGeom>
+          <a:noFill/>
+        </p:spPr>
+        <p:txBody>
+          <a:bodyPr wrap="square" lIns="0" tIns="0" rIns="0" bIns="0" anchor="t">
+            <a:spAutoFit/>
+          </a:bodyPr>
+          <a:lstStyle/>
+          <a:p>
+            <a:pPr algn="l">
+              <a:lnSpc>
+                <a:spcPct val="110000"/>
+              </a:lnSpc>
+              <a:spcAft>
+                <a:spcPts val="600"/>
+              </a:spcAft>
+            </a:pPr>
+            <a:r>
+              <a:rPr sz="1400" b="0" i="0">
+                <a:solidFill>
+                  <a:srgbClr val="222B36"/>
+                </a:solidFill>
+                <a:latin typeface="Calibri"/>
+              </a:rPr>
+              <a:t>Un modello nuovo si installa </a:t>
+            </a:r>
+            <a:r>
+              <a:rPr sz="1400" b="1" i="0">
+                <a:solidFill>
+                  <a:srgbClr val="222B36"/>
+                </a:solidFill>
+                <a:latin typeface="Calibri"/>
+              </a:rPr>
+              <a:t>scrivendo una tabella</a:t>
+            </a:r>
+            <a:r>
+              <a:rPr sz="1400" b="0" i="0">
+                <a:solidFill>
+                  <a:srgbClr val="222B36"/>
+                </a:solidFill>
+                <a:latin typeface="Calibri"/>
+              </a:rPr>
+              <a:t> (~10 ms): nessun compilatore. Il programma generico si compila una volta sola (1,2–1,5 s). P1 vuole un compilatore per ogni modello nuovo, su qualche macchina.</a:t>
+            </a:r>
+          </a:p>
+        </p:txBody>
+      </p:sp>
+      <p:sp>
+        <p:nvSpPr>
+          <p:cNvPr id="16" name="Rounded Rectangle 15"/>
           <p:cNvSpPr/>
           <p:nvPr/>
         </p:nvSpPr>
@@ -26276,7 +27124,7 @@
       </p:sp>
       <p:sp>
         <p:nvSpPr>
-          <p:cNvPr id="12" name="Rectangle 11"/>
+          <p:cNvPr id="17" name="Rectangle 16"/>
           <p:cNvSpPr/>
           <p:nvPr/>
         </p:nvSpPr>
@@ -26320,7 +27168,7 @@
       </p:sp>
       <p:sp>
         <p:nvSpPr>
-          <p:cNvPr id="13" name="TextBox 12"/>
+          <p:cNvPr id="18" name="TextBox 17"/>
           <p:cNvSpPr txBox="1"/>
           <p:nvPr/>
         </p:nvSpPr>
@@ -26362,7 +27210,7 @@
       </p:sp>
       <p:sp>
         <p:nvSpPr>
-          <p:cNvPr id="14" name="TextBox 13"/>
+          <p:cNvPr id="19" name="TextBox 18"/>
           <p:cNvSpPr txBox="1"/>
           <p:nvPr/>
         </p:nvSpPr>
@@ -26397,7 +27245,7 @@
                 </a:solidFill>
                 <a:latin typeface="Calibri"/>
               </a:rPr>
-              <a:t>Una </a:t>
+              <a:t>Il tempo per cambiare modello </a:t>
             </a:r>
             <a:r>
               <a:rPr sz="1500" b="1" i="0">
@@ -26406,7 +27254,7 @@
                 </a:solidFill>
                 <a:latin typeface="Calibri"/>
               </a:rPr>
-              <a:t>rete più grande</a:t>
+              <a:t>non è un criterio di scelta</a:t>
             </a:r>
             <a:r>
               <a:rPr sz="1500" b="0" i="0">
@@ -26415,7 +27263,7 @@
                 </a:solidFill>
                 <a:latin typeface="Calibri"/>
               </a:rPr>
-              <a:t> (più nodi) non rallenta nessuna pipeline: basta una riga in più in tabella. Un </a:t>
+              <a:t>: millisecondi per tutte. Si sceglie sul </a:t>
             </a:r>
             <a:r>
               <a:rPr sz="1500" b="1" i="0">
@@ -26424,7 +27272,7 @@
                 </a:solidFill>
                 <a:latin typeface="Calibri"/>
               </a:rPr>
-              <a:t>modello più largo</a:t>
+              <a:t>costo per pacchetto</a:t>
             </a:r>
             <a:r>
               <a:rPr sz="1500" b="0" i="0">
@@ -26433,7 +27281,25 @@
                 </a:solidFill>
                 <a:latin typeface="Calibri"/>
               </a:rPr>
-              <a:t> rallenta tutte, a ogni pacchetto. Si può far crescere la rete; il modello va tenuto piccolo.</a:t>
+              <a:t> (~50 ns di rete con i pesi compilati, ~225–360 con quelli da tabella) e su </a:t>
+            </a:r>
+            <a:r>
+              <a:rPr sz="1500" b="1" i="0">
+                <a:solidFill>
+                  <a:srgbClr val="222B36"/>
+                </a:solidFill>
+                <a:latin typeface="Calibri"/>
+              </a:rPr>
+              <a:t>dove serve un compilatore</a:t>
+            </a:r>
+            <a:r>
+              <a:rPr sz="1500" b="0" i="0">
+                <a:solidFill>
+                  <a:srgbClr val="222B36"/>
+                </a:solidFill>
+                <a:latin typeface="Calibri"/>
+              </a:rPr>
+              <a:t>.</a:t>
             </a:r>
           </a:p>
         </p:txBody>
@@ -26552,7 +27418,7 @@
                 </a:solidFill>
                 <a:latin typeface="Calibri"/>
               </a:rPr>
-              <a:t>IL PROGRAMMA DA SOLO · PROFONDITÀ</a:t>
+              <a:t>LA RETE NEURALE SOTTO TRAFFICO · TAGLIA DELLA RETE, LARGHEZZA DEL MODELLO</a:t>
             </a:r>
           </a:p>
         </p:txBody>
@@ -26594,7 +27460,7 @@
                 </a:solidFill>
                 <a:latin typeface="Calibri"/>
               </a:rPr>
-              <a:t>Uno strato in più: P2 lo paga in spazio, P3 in tempo</a:t>
+              <a:t>La rete può crescere quanto vuole. Il modello no.</a:t>
             </a:r>
           </a:p>
         </p:txBody>
@@ -26650,7 +27516,7 @@
         <p:spPr>
           <a:xfrm>
             <a:off x="548640" y="6446520"/>
-            <a:ext cx="10424160" cy="274320"/>
+            <a:ext cx="10424160" cy="176908"/>
           </a:xfrm>
           <a:prstGeom prst="rect">
             <a:avLst/>
@@ -26672,13 +27538,13 @@
               </a:spcAft>
             </a:pPr>
             <a:r>
-              <a:rPr sz="1100" b="0" i="1">
+              <a:rPr sz="1100" b="0" i="1" dirty="0">
                 <a:solidFill>
                   <a:srgbClr val="6B7C93"/>
                 </a:solidFill>
                 <a:latin typeface="Calibri"/>
               </a:rPr>
-              <a:t>Quattro neuroni per strato, da 1 a 6 strati  ·  il resto del modello fermo</a:t>
+              <a:t>Tempo di CPU meno la baseline, xdp_gen, nodo saturo  ·  a sinistra una rete diversa per ogni punto  ·  P-core a 3,5 GHz</a:t>
             </a:r>
           </a:p>
         </p:txBody>
@@ -26689,13 +27555,7 @@
           <p:cNvGraphicFramePr>
             <a:graphicFrameLocks noGrp="1"/>
           </p:cNvGraphicFramePr>
-          <p:nvPr>
-            <p:extLst>
-              <p:ext uri="{D42A27DB-BD31-4B8C-83A1-F6EECF244321}">
-                <p14:modId xmlns:p14="http://schemas.microsoft.com/office/powerpoint/2010/main" val="3475388094"/>
-              </p:ext>
-            </p:extLst>
-          </p:nvPr>
+          <p:nvPr/>
         </p:nvGraphicFramePr>
         <p:xfrm>
           <a:off x="457200" y="1463040"/>
@@ -26734,7 +27594,7 @@
         <p:spPr>
           <a:xfrm>
             <a:off x="548640" y="4800600"/>
-            <a:ext cx="5394960" cy="462114"/>
+            <a:ext cx="5394960" cy="699102"/>
           </a:xfrm>
           <a:prstGeom prst="rect">
             <a:avLst/>
@@ -26756,23 +27616,47 @@
               </a:spcAft>
             </a:pPr>
             <a:r>
-              <a:rPr sz="1400" b="1" i="0">
+              <a:rPr lang="it-IT" sz="1400" b="1" i="0" dirty="0">
                 <a:solidFill>
                   <a:srgbClr val="222B36"/>
                 </a:solidFill>
                 <a:latin typeface="Calibri"/>
               </a:rPr>
-              <a:t>Dimensione.</a:t>
-            </a:r>
-            <a:r>
-              <a:rPr sz="1400" b="0" i="0">
+              <a:t>L'identità del nodo attiva una colonna sola di pesi. </a:t>
+            </a:r>
+            <a:r>
+              <a:rPr lang="it-IT" sz="1400" b="0" i="0" dirty="0">
                 <a:solidFill>
                   <a:srgbClr val="222B36"/>
                 </a:solidFill>
                 <a:latin typeface="Calibri"/>
               </a:rPr>
-              <a:t> P2 ricompila e srotola: 14 604 → 18 937 istruzioni. P3 non si muove: 12 288 a ogni profondità.</a:t>
-            </a:r>
+              <a:t/>
+            </a:r>
+            <a:r>
+              <a:rPr lang="it-IT" sz="1400" b="0" i="0" dirty="0" err="1">
+                <a:solidFill>
+                  <a:srgbClr val="222B36"/>
+                </a:solidFill>
+                <a:latin typeface="Calibri"/>
+              </a:rPr>
+              <a:t/>
+            </a:r>
+            <a:r>
+              <a:rPr lang="it-IT" sz="1400" b="0" i="0" dirty="0">
+                <a:solidFill>
+                  <a:srgbClr val="222B36"/>
+                </a:solidFill>
+                <a:latin typeface="Calibri"/>
+              </a:rPr>
+              <a:t>P1 statica la conosce già alla compilazione e la somma al bias; le altre la leggono da tabella.</a:t>
+            </a:r>
+            <a:endParaRPr sz="1400" b="0" i="0" dirty="0">
+              <a:solidFill>
+                <a:srgbClr val="222B36"/>
+              </a:solidFill>
+              <a:latin typeface="Calibri"/>
+            </a:endParaRPr>
           </a:p>
         </p:txBody>
       </p:sp>
@@ -26813,7 +27697,7 @@
                 </a:solidFill>
                 <a:latin typeface="Calibri"/>
               </a:rPr>
-              <a:t>Tempo.</a:t>
+              <a:t>Da 2 a 8 neuroni sale su tutte e quattro</a:t>
             </a:r>
             <a:r>
               <a:rPr sz="1400" b="0" i="0">
@@ -26822,7 +27706,7 @@
                 </a:solidFill>
                 <a:latin typeface="Calibri"/>
               </a:rPr>
-              <a:t> P3 paga: 260 → 524 ns da 1 a 6 strati, perché ogni strato è un salto fra programmi (da 2 a 7).</a:t>
+              <a:t>: P1 37 → 76 ns, P3 334 → 430 ns. Un neurone in più è lavoro vero, a ogni pacchetto.</a:t>
             </a:r>
           </a:p>
         </p:txBody>
@@ -26967,8 +27851,8 @@
         </p:nvSpPr>
         <p:spPr>
           <a:xfrm>
-            <a:off x="1783080" y="5728991"/>
-            <a:ext cx="9677095" cy="474938"/>
+            <a:off x="1783080" y="5577840"/>
+            <a:ext cx="9677095" cy="777240"/>
           </a:xfrm>
           <a:prstGeom prst="rect">
             <a:avLst/>
@@ -26996,7 +27880,7 @@
                 </a:solidFill>
                 <a:latin typeface="Calibri"/>
               </a:rPr>
-              <a:t>Un </a:t>
+              <a:t>Una </a:t>
             </a:r>
             <a:r>
               <a:rPr sz="1500" b="1" i="0">
@@ -27005,7 +27889,7 @@
                 </a:solidFill>
                 <a:latin typeface="Calibri"/>
               </a:rPr>
-              <a:t>modello profondo</a:t>
+              <a:t>rete più grande</a:t>
             </a:r>
             <a:r>
               <a:rPr sz="1500" b="0" i="0">
@@ -27014,7 +27898,7 @@
                 </a:solidFill>
                 <a:latin typeface="Calibri"/>
               </a:rPr>
-              <a:t> si paga sempre: con P2 in un programma più grande da ricompilare (~870 istruzioni per strato), con P3 in </a:t>
+              <a:t> (più nodi) non rallenta nessuna pipeline: basta una riga in più in tabella. Un </a:t>
             </a:r>
             <a:r>
               <a:rPr sz="1500" b="1" i="0">
@@ -27023,7 +27907,7 @@
                 </a:solidFill>
                 <a:latin typeface="Calibri"/>
               </a:rPr>
-              <a:t>~53 ns per pacchetto a ogni strato</a:t>
+              <a:t>modello più largo</a:t>
             </a:r>
             <a:r>
               <a:rPr sz="1500" b="0" i="0">
@@ -27032,7 +27916,7 @@
                 </a:solidFill>
                 <a:latin typeface="Calibri"/>
               </a:rPr>
-              <a:t> (~60 sotto traffico). P3 è la più flessibile, ed è quella che la profondità rallenta di più.</a:t>
+              <a:t> rallenta tutte, a ogni pacchetto. Si può far crescere la rete; il modello va tenuto piccolo.</a:t>
             </a:r>
           </a:p>
         </p:txBody>
@@ -28644,7 +29528,7 @@
                 </a:solidFill>
                 <a:latin typeface="Calibri"/>
               </a:rPr>
-              <a:t>IL PROGRAMMA DA SOLO · A PARITÀ DI PESI</a:t>
+              <a:t>LA RETE NEURALE SOTTO TRAFFICO · PROFONDITÀ</a:t>
             </a:r>
           </a:p>
         </p:txBody>
@@ -28686,7 +29570,7 @@
                 </a:solidFill>
                 <a:latin typeface="Calibri"/>
               </a:rPr>
-              <a:t>«Meglio larga o profonda?» dipende da chi la esegue</a:t>
+              <a:t>Uno strato in più: P2 lo paga in spazio, P3 in tempo</a:t>
             </a:r>
           </a:p>
         </p:txBody>
@@ -28770,7 +29654,7 @@
                 </a:solidFill>
                 <a:latin typeface="Calibri"/>
               </a:rPr>
-              <a:t>Cinque forme con circa 592 pesi: uno strato largo, oppure cinque stretti</a:t>
+              <a:t>Quattro neuroni per strato  ·  dimensione: istruzioni del programma caricato  ·  tempo: CPU meno baseline, xdp_gen, P-core a 3,5 GHz</a:t>
             </a:r>
           </a:p>
         </p:txBody>
@@ -28781,11 +29665,17 @@
           <p:cNvGraphicFramePr>
             <a:graphicFrameLocks noGrp="1"/>
           </p:cNvGraphicFramePr>
-          <p:nvPr/>
+          <p:nvPr>
+            <p:extLst>
+              <p:ext uri="{D42A27DB-BD31-4B8C-83A1-F6EECF244321}">
+                <p14:modId xmlns:p14="http://schemas.microsoft.com/office/powerpoint/2010/main" val="3475388094"/>
+              </p:ext>
+            </p:extLst>
+          </p:nvPr>
         </p:nvGraphicFramePr>
         <p:xfrm>
           <a:off x="457200" y="1463040"/>
-          <a:ext cx="6766560" cy="3931920"/>
+          <a:ext cx="5669280" cy="3246120"/>
         </p:xfrm>
         <a:graphic>
           <a:graphicData uri="http://schemas.openxmlformats.org/drawingml/2006/chart">
@@ -28793,93 +29683,72 @@
           </a:graphicData>
         </a:graphic>
       </p:graphicFrame>
+      <p:graphicFrame>
+        <p:nvGraphicFramePr>
+          <p:cNvPr id="8" name="Chart 7"/>
+          <p:cNvGraphicFramePr>
+            <a:graphicFrameLocks noGrp="1"/>
+          </p:cNvGraphicFramePr>
+          <p:nvPr/>
+        </p:nvGraphicFramePr>
+        <p:xfrm>
+          <a:off x="6217920" y="1463040"/>
+          <a:ext cx="5669280" cy="3246120"/>
+        </p:xfrm>
+        <a:graphic>
+          <a:graphicData uri="http://schemas.openxmlformats.org/drawingml/2006/chart">
+            <c:chart xmlns:c="http://schemas.openxmlformats.org/drawingml/2006/chart" xmlns:r="http://schemas.openxmlformats.org/officeDocument/2006/relationships" r:id="rId3"/>
+          </a:graphicData>
+        </a:graphic>
+      </p:graphicFrame>
       <p:sp>
         <p:nvSpPr>
-          <p:cNvPr id="8" name="Rounded Rectangle 7"/>
-          <p:cNvSpPr/>
+          <p:cNvPr id="9" name="TextBox 8"/>
+          <p:cNvSpPr txBox="1"/>
           <p:nvPr/>
         </p:nvSpPr>
         <p:spPr>
           <a:xfrm>
-            <a:off x="7498079" y="1600200"/>
-            <a:ext cx="4206240" cy="1783080"/>
-          </a:xfrm>
-          <a:prstGeom prst="roundRect">
-            <a:avLst>
-              <a:gd name="adj" fmla="val 6000"/>
-            </a:avLst>
-          </a:prstGeom>
-          <a:solidFill>
-            <a:srgbClr val="F3F5F8"/>
-          </a:solidFill>
-          <a:ln>
-            <a:noFill/>
-          </a:ln>
-          <a:effectLst/>
-        </p:spPr>
-        <p:style>
-          <a:lnRef idx="1">
-            <a:schemeClr val="accent1"/>
-          </a:lnRef>
-          <a:fillRef idx="3">
-            <a:schemeClr val="accent1"/>
-          </a:fillRef>
-          <a:effectRef idx="2">
-            <a:schemeClr val="accent1"/>
-          </a:effectRef>
-          <a:fontRef idx="minor">
-            <a:schemeClr val="lt1"/>
-          </a:fontRef>
-        </p:style>
-        <p:txBody>
-          <a:bodyPr rtlCol="0" anchor="ctr"/>
-          <a:lstStyle/>
-          <a:p>
-            <a:endParaRPr/>
-          </a:p>
-        </p:txBody>
-      </p:sp>
-      <p:sp>
-        <p:nvSpPr>
-          <p:cNvPr id="9" name="Rectangle 8"/>
-          <p:cNvSpPr/>
-          <p:nvPr/>
-        </p:nvSpPr>
-        <p:spPr>
-          <a:xfrm>
-            <a:off x="7498079" y="1600200"/>
-            <a:ext cx="82296" cy="1783080"/>
+            <a:off x="548640" y="4800600"/>
+            <a:ext cx="5394960" cy="462114"/>
           </a:xfrm>
           <a:prstGeom prst="rect">
             <a:avLst/>
           </a:prstGeom>
-          <a:solidFill>
-            <a:srgbClr val="2E9C6E"/>
-          </a:solidFill>
-          <a:ln>
-            <a:noFill/>
-          </a:ln>
-          <a:effectLst/>
+          <a:noFill/>
         </p:spPr>
-        <p:style>
-          <a:lnRef idx="1">
-            <a:schemeClr val="accent1"/>
-          </a:lnRef>
-          <a:fillRef idx="3">
-            <a:schemeClr val="accent1"/>
-          </a:fillRef>
-          <a:effectRef idx="2">
-            <a:schemeClr val="accent1"/>
-          </a:effectRef>
-          <a:fontRef idx="minor">
-            <a:schemeClr val="lt1"/>
-          </a:fontRef>
-        </p:style>
         <p:txBody>
-          <a:bodyPr rtlCol="0" anchor="ctr"/>
-          <a:lstStyle/>
-          <a:p>
-            <a:endParaRPr/>
+          <a:bodyPr wrap="square" lIns="0" tIns="0" rIns="0" bIns="0" anchor="t">
+            <a:spAutoFit/>
+          </a:bodyPr>
+          <a:lstStyle/>
+          <a:p>
+            <a:pPr algn="l">
+              <a:lnSpc>
+                <a:spcPct val="110000"/>
+              </a:lnSpc>
+              <a:spcAft>
+                <a:spcPts val="600"/>
+              </a:spcAft>
+            </a:pPr>
+            <a:r>
+              <a:rPr sz="1400" b="1" i="0">
+                <a:solidFill>
+                  <a:srgbClr val="222B36"/>
+                </a:solidFill>
+                <a:latin typeface="Calibri"/>
+              </a:rPr>
+              <a:t>Dimensione.</a:t>
+            </a:r>
+            <a:r>
+              <a:rPr sz="1400" b="0" i="0">
+                <a:solidFill>
+                  <a:srgbClr val="222B36"/>
+                </a:solidFill>
+                <a:latin typeface="Calibri"/>
+              </a:rPr>
+              <a:t> P2 ricompila e srotola: 14 604 → 18 937 istruzioni. P3 non si muove: 12 288 a ogni profondità.</a:t>
+            </a:r>
           </a:p>
         </p:txBody>
       </p:sp>
@@ -28891,8 +29760,8 @@
         </p:nvSpPr>
         <p:spPr>
           <a:xfrm>
-            <a:off x="7772399" y="1764792"/>
-            <a:ext cx="3794760" cy="457200"/>
+            <a:off x="6309360" y="4800600"/>
+            <a:ext cx="5394960" cy="731520"/>
           </a:xfrm>
           <a:prstGeom prst="rect">
             <a:avLst/>
@@ -28914,269 +29783,35 @@
               </a:spcAft>
             </a:pPr>
             <a:r>
-              <a:rPr sz="1700" b="1" i="0">
-                <a:solidFill>
-                  <a:srgbClr val="2E9C6E"/>
+              <a:rPr sz="1400" b="1" i="0">
+                <a:solidFill>
+                  <a:srgbClr val="222B36"/>
                 </a:solidFill>
                 <a:latin typeface="Calibri"/>
               </a:rPr>
-              <a:t>Generiche: la profondità si paga</a:t>
+              <a:t>Tempo.</a:t>
+            </a:r>
+            <a:r>
+              <a:rPr sz="1400" b="0" i="0">
+                <a:solidFill>
+                  <a:srgbClr val="222B36"/>
+                </a:solidFill>
+                <a:latin typeface="Calibri"/>
+              </a:rPr>
+              <a:t> P3 paga: 292 → 580 ns da 1 a 6 strati, ~58 a strato, perché ogni strato è un salto fra programmi (da 2 a 7).</a:t>
             </a:r>
           </a:p>
         </p:txBody>
       </p:sp>
       <p:sp>
         <p:nvSpPr>
-          <p:cNvPr id="11" name="TextBox 10"/>
-          <p:cNvSpPr txBox="1"/>
-          <p:nvPr/>
-        </p:nvSpPr>
-        <p:spPr>
-          <a:xfrm>
-            <a:off x="7772399" y="2176272"/>
-            <a:ext cx="3794760" cy="1161288"/>
-          </a:xfrm>
-          <a:prstGeom prst="rect">
-            <a:avLst/>
-          </a:prstGeom>
-          <a:noFill/>
-        </p:spPr>
-        <p:txBody>
-          <a:bodyPr wrap="square" lIns="0" tIns="0" rIns="0" bIns="0" anchor="t">
-            <a:spAutoFit/>
-          </a:bodyPr>
-          <a:lstStyle/>
-          <a:p>
-            <a:pPr algn="l">
-              <a:lnSpc>
-                <a:spcPct val="110000"/>
-              </a:lnSpc>
-              <a:spcAft>
-                <a:spcPts val="600"/>
-              </a:spcAft>
-            </a:pPr>
-            <a:r>
-              <a:rPr sz="1400" b="0" i="0">
-                <a:solidFill>
-                  <a:srgbClr val="222B36"/>
-                </a:solidFill>
-                <a:latin typeface="Calibri"/>
-              </a:rPr>
-              <a:t>Da 1 a 5 strati, a pesi fermi: </a:t>
-            </a:r>
-            <a:r>
-              <a:rPr sz="1400" b="1" i="0">
-                <a:solidFill>
-                  <a:srgbClr val="222B36"/>
-                </a:solidFill>
-                <a:latin typeface="Calibri"/>
-              </a:rPr>
-              <a:t>P2 175 → 268 ns, P3 284 → 490 ns</a:t>
-            </a:r>
-            <a:r>
-              <a:rPr sz="1400" b="0" i="0">
-                <a:solidFill>
-                  <a:srgbClr val="222B36"/>
-                </a:solidFill>
-                <a:latin typeface="Calibri"/>
-              </a:rPr>
-              <a:t>.</a:t>
-            </a:r>
-          </a:p>
-        </p:txBody>
-      </p:sp>
-      <p:sp>
-        <p:nvSpPr>
-          <p:cNvPr id="12" name="Rounded Rectangle 11"/>
+          <p:cNvPr id="11" name="Rounded Rectangle 10"/>
           <p:cNvSpPr/>
           <p:nvPr/>
         </p:nvSpPr>
         <p:spPr>
           <a:xfrm>
-            <a:off x="7498079" y="3566160"/>
-            <a:ext cx="4206240" cy="1783080"/>
-          </a:xfrm>
-          <a:prstGeom prst="roundRect">
-            <a:avLst>
-              <a:gd name="adj" fmla="val 6000"/>
-            </a:avLst>
-          </a:prstGeom>
-          <a:solidFill>
-            <a:srgbClr val="F3F5F8"/>
-          </a:solidFill>
-          <a:ln>
-            <a:noFill/>
-          </a:ln>
-          <a:effectLst/>
-        </p:spPr>
-        <p:style>
-          <a:lnRef idx="1">
-            <a:schemeClr val="accent1"/>
-          </a:lnRef>
-          <a:fillRef idx="3">
-            <a:schemeClr val="accent1"/>
-          </a:fillRef>
-          <a:effectRef idx="2">
-            <a:schemeClr val="accent1"/>
-          </a:effectRef>
-          <a:fontRef idx="minor">
-            <a:schemeClr val="lt1"/>
-          </a:fontRef>
-        </p:style>
-        <p:txBody>
-          <a:bodyPr rtlCol="0" anchor="ctr"/>
-          <a:lstStyle/>
-          <a:p>
-            <a:endParaRPr/>
-          </a:p>
-        </p:txBody>
-      </p:sp>
-      <p:sp>
-        <p:nvSpPr>
-          <p:cNvPr id="13" name="Rectangle 12"/>
-          <p:cNvSpPr/>
-          <p:nvPr/>
-        </p:nvSpPr>
-        <p:spPr>
-          <a:xfrm>
-            <a:off x="7498079" y="3566160"/>
-            <a:ext cx="82296" cy="1783080"/>
-          </a:xfrm>
-          <a:prstGeom prst="rect">
-            <a:avLst/>
-          </a:prstGeom>
-          <a:solidFill>
-            <a:srgbClr val="E07A2D"/>
-          </a:solidFill>
-          <a:ln>
-            <a:noFill/>
-          </a:ln>
-          <a:effectLst/>
-        </p:spPr>
-        <p:style>
-          <a:lnRef idx="1">
-            <a:schemeClr val="accent1"/>
-          </a:lnRef>
-          <a:fillRef idx="3">
-            <a:schemeClr val="accent1"/>
-          </a:fillRef>
-          <a:effectRef idx="2">
-            <a:schemeClr val="accent1"/>
-          </a:effectRef>
-          <a:fontRef idx="minor">
-            <a:schemeClr val="lt1"/>
-          </a:fontRef>
-        </p:style>
-        <p:txBody>
-          <a:bodyPr rtlCol="0" anchor="ctr"/>
-          <a:lstStyle/>
-          <a:p>
-            <a:endParaRPr/>
-          </a:p>
-        </p:txBody>
-      </p:sp>
-      <p:sp>
-        <p:nvSpPr>
-          <p:cNvPr id="14" name="TextBox 13"/>
-          <p:cNvSpPr txBox="1"/>
-          <p:nvPr/>
-        </p:nvSpPr>
-        <p:spPr>
-          <a:xfrm>
-            <a:off x="7772399" y="3730752"/>
-            <a:ext cx="3794760" cy="457200"/>
-          </a:xfrm>
-          <a:prstGeom prst="rect">
-            <a:avLst/>
-          </a:prstGeom>
-          <a:noFill/>
-        </p:spPr>
-        <p:txBody>
-          <a:bodyPr wrap="square" lIns="0" tIns="0" rIns="0" bIns="0" anchor="t">
-            <a:spAutoFit/>
-          </a:bodyPr>
-          <a:lstStyle/>
-          <a:p>
-            <a:pPr algn="l">
-              <a:lnSpc>
-                <a:spcPct val="110000"/>
-              </a:lnSpc>
-              <a:spcAft>
-                <a:spcPts val="600"/>
-              </a:spcAft>
-            </a:pPr>
-            <a:r>
-              <a:rPr sz="1700" b="1" i="0">
-                <a:solidFill>
-                  <a:srgbClr val="E07A2D"/>
-                </a:solidFill>
-                <a:latin typeface="Calibri"/>
-              </a:rPr>
-              <a:t>Specializzate: quasi indifferenti</a:t>
-            </a:r>
-          </a:p>
-        </p:txBody>
-      </p:sp>
-      <p:sp>
-        <p:nvSpPr>
-          <p:cNvPr id="15" name="TextBox 14"/>
-          <p:cNvSpPr txBox="1"/>
-          <p:nvPr/>
-        </p:nvSpPr>
-        <p:spPr>
-          <a:xfrm>
-            <a:off x="7772399" y="4142232"/>
-            <a:ext cx="3794760" cy="1161288"/>
-          </a:xfrm>
-          <a:prstGeom prst="rect">
-            <a:avLst/>
-          </a:prstGeom>
-          <a:noFill/>
-        </p:spPr>
-        <p:txBody>
-          <a:bodyPr wrap="square" lIns="0" tIns="0" rIns="0" bIns="0" anchor="t">
-            <a:spAutoFit/>
-          </a:bodyPr>
-          <a:lstStyle/>
-          <a:p>
-            <a:pPr algn="l">
-              <a:lnSpc>
-                <a:spcPct val="110000"/>
-              </a:lnSpc>
-              <a:spcAft>
-                <a:spcPts val="600"/>
-              </a:spcAft>
-            </a:pPr>
-            <a:r>
-              <a:rPr sz="1400" b="1" i="0">
-                <a:solidFill>
-                  <a:srgbClr val="222B36"/>
-                </a:solidFill>
-                <a:latin typeface="Calibri"/>
-              </a:rPr>
-              <a:t>54–72 ns</a:t>
-            </a:r>
-            <a:r>
-              <a:rPr sz="1400" b="0" i="0">
-                <a:solidFill>
-                  <a:srgbClr val="222B36"/>
-                </a:solidFill>
-                <a:latin typeface="Calibri"/>
-              </a:rPr>
-              <a:t>: srotolano tutto in una funzione sola, e la forma conta poco.</a:t>
-            </a:r>
-          </a:p>
-        </p:txBody>
-      </p:sp>
-      <p:sp>
-        <p:nvSpPr>
-          <p:cNvPr id="16" name="Rounded Rectangle 15"/>
-          <p:cNvSpPr/>
-          <p:nvPr/>
-        </p:nvSpPr>
-        <p:spPr>
-          <a:xfrm>
-            <a:off x="548640" y="5532120"/>
+            <a:off x="548640" y="5577840"/>
             <a:ext cx="11094415" cy="777240"/>
           </a:xfrm>
           <a:prstGeom prst="roundRect">
@@ -29216,13 +29851,13 @@
       </p:sp>
       <p:sp>
         <p:nvSpPr>
-          <p:cNvPr id="17" name="Rectangle 16"/>
+          <p:cNvPr id="12" name="Rectangle 11"/>
           <p:cNvSpPr/>
           <p:nvPr/>
         </p:nvSpPr>
         <p:spPr>
           <a:xfrm>
-            <a:off x="548640" y="5532120"/>
+            <a:off x="548640" y="5577840"/>
             <a:ext cx="82296" cy="777240"/>
           </a:xfrm>
           <a:prstGeom prst="rect">
@@ -29260,13 +29895,13 @@
       </p:sp>
       <p:sp>
         <p:nvSpPr>
-          <p:cNvPr id="18" name="TextBox 17"/>
+          <p:cNvPr id="13" name="TextBox 12"/>
           <p:cNvSpPr txBox="1"/>
           <p:nvPr/>
         </p:nvSpPr>
         <p:spPr>
           <a:xfrm>
-            <a:off x="822960" y="5605272"/>
+            <a:off x="822960" y="5650992"/>
             <a:ext cx="1097280" cy="274320"/>
           </a:xfrm>
           <a:prstGeom prst="rect">
@@ -29302,14 +29937,14 @@
       </p:sp>
       <p:sp>
         <p:nvSpPr>
-          <p:cNvPr id="19" name="TextBox 18"/>
+          <p:cNvPr id="14" name="TextBox 13"/>
           <p:cNvSpPr txBox="1"/>
           <p:nvPr/>
         </p:nvSpPr>
         <p:spPr>
           <a:xfrm>
-            <a:off x="1783080" y="5532120"/>
-            <a:ext cx="9677095" cy="777240"/>
+            <a:off x="1783080" y="5728991"/>
+            <a:ext cx="9677095" cy="474938"/>
           </a:xfrm>
           <a:prstGeom prst="rect">
             <a:avLst/>
@@ -29337,7 +29972,7 @@
                 </a:solidFill>
                 <a:latin typeface="Calibri"/>
               </a:rPr>
-              <a:t>Con le versioni </a:t>
+              <a:t>Un </a:t>
             </a:r>
             <a:r>
               <a:rPr sz="1500" b="1" i="0">
@@ -29346,7 +29981,7 @@
                 </a:solidFill>
                 <a:latin typeface="Calibri"/>
               </a:rPr>
-              <a:t>specializzate</a:t>
+              <a:t>modello profondo</a:t>
             </a:r>
             <a:r>
               <a:rPr sz="1500" b="0" i="0">
@@ -29355,7 +29990,7 @@
                 </a:solidFill>
                 <a:latin typeface="Calibri"/>
               </a:rPr>
-              <a:t> la forma della rete si sceglie per l'</a:t>
+              <a:t> si paga sempre: con P2 in un programma più grande da ricompilare (~870 istruzioni per strato), con P3 in </a:t>
             </a:r>
             <a:r>
               <a:rPr sz="1500" b="1" i="0">
@@ -29364,7 +29999,7 @@
                 </a:solidFill>
                 <a:latin typeface="Calibri"/>
               </a:rPr>
-              <a:t>accuratezza</a:t>
+              <a:t>~58 ns per pacchetto a ogni strato</a:t>
             </a:r>
             <a:r>
               <a:rPr sz="1500" b="0" i="0">
@@ -29373,43 +30008,7 @@
                 </a:solidFill>
                 <a:latin typeface="Calibri"/>
               </a:rPr>
-              <a:t>. Con le </a:t>
-            </a:r>
-            <a:r>
-              <a:rPr sz="1500" b="1" i="0">
-                <a:solidFill>
-                  <a:srgbClr val="222B36"/>
-                </a:solidFill>
-                <a:latin typeface="Calibri"/>
-              </a:rPr>
-              <a:t>generiche</a:t>
-            </a:r>
-            <a:r>
-              <a:rPr sz="1500" b="0" i="0">
-                <a:solidFill>
-                  <a:srgbClr val="222B36"/>
-                </a:solidFill>
-                <a:latin typeface="Calibri"/>
-              </a:rPr>
-              <a:t>, a parità di pesi, conviene una rete </a:t>
-            </a:r>
-            <a:r>
-              <a:rPr sz="1500" b="1" i="0">
-                <a:solidFill>
-                  <a:srgbClr val="222B36"/>
-                </a:solidFill>
-                <a:latin typeface="Calibri"/>
-              </a:rPr>
-              <a:t>larga e poco profonda</a:t>
-            </a:r>
-            <a:r>
-              <a:rPr sz="1500" b="0" i="0">
-                <a:solidFill>
-                  <a:srgbClr val="222B36"/>
-                </a:solidFill>
-                <a:latin typeface="Calibri"/>
-              </a:rPr>
-              <a:t>: da 1 a 5 strati la latenza sale del 53 % (P2) e del 73 % (P3).</a:t>
+              <a:t>. P3 è la più flessibile, ed è quella che la profondità rallenta di più.</a:t>
             </a:r>
           </a:p>
         </p:txBody>
@@ -29528,7 +30127,7 @@
                 </a:solidFill>
                 <a:latin typeface="Calibri"/>
               </a:rPr>
-              <a:t>IL PROGRAMMA DA SOLO · CONTARE IL LAVORO GIUSTO</a:t>
+              <a:t>LA RETE NEURALE SOTTO TRAFFICO · A PARITÀ DI PESI</a:t>
             </a:r>
           </a:p>
         </p:txBody>
@@ -29570,7 +30169,7 @@
                 </a:solidFill>
                 <a:latin typeface="Calibri"/>
               </a:rPr>
-              <a:t>Il costo per moltiplicazione è una costante della pipeline</a:t>
+              <a:t>«Meglio larga o profonda?» dipende da chi la esegue</a:t>
             </a:r>
           </a:p>
         </p:txBody>
@@ -29626,6 +30225,890 @@
         <p:spPr>
           <a:xfrm>
             <a:off x="548640" y="6446520"/>
+            <a:ext cx="10424160" cy="274320"/>
+          </a:xfrm>
+          <a:prstGeom prst="rect">
+            <a:avLst/>
+          </a:prstGeom>
+          <a:noFill/>
+        </p:spPr>
+        <p:txBody>
+          <a:bodyPr wrap="square" lIns="0" tIns="0" rIns="0" bIns="0" anchor="t">
+            <a:spAutoFit/>
+          </a:bodyPr>
+          <a:lstStyle/>
+          <a:p>
+            <a:pPr algn="l">
+              <a:lnSpc>
+                <a:spcPct val="110000"/>
+              </a:lnSpc>
+              <a:spcAft>
+                <a:spcPts val="600"/>
+              </a:spcAft>
+            </a:pPr>
+            <a:r>
+              <a:rPr sz="1100" b="0" i="1">
+                <a:solidFill>
+                  <a:srgbClr val="6B7C93"/>
+                </a:solidFill>
+                <a:latin typeface="Calibri"/>
+              </a:rPr>
+              <a:t>Cinque forme con circa 592 pesi: uno strato largo, oppure cinque stretti  ·  tempo di CPU meno la baseline, xdp_gen, nodo saturo, P-core a 3,5 GHz</a:t>
+            </a:r>
+          </a:p>
+        </p:txBody>
+      </p:sp>
+      <p:graphicFrame>
+        <p:nvGraphicFramePr>
+          <p:cNvPr id="7" name="Chart 6"/>
+          <p:cNvGraphicFramePr>
+            <a:graphicFrameLocks noGrp="1"/>
+          </p:cNvGraphicFramePr>
+          <p:nvPr/>
+        </p:nvGraphicFramePr>
+        <p:xfrm>
+          <a:off x="457200" y="1463040"/>
+          <a:ext cx="6766560" cy="3931920"/>
+        </p:xfrm>
+        <a:graphic>
+          <a:graphicData uri="http://schemas.openxmlformats.org/drawingml/2006/chart">
+            <c:chart xmlns:c="http://schemas.openxmlformats.org/drawingml/2006/chart" xmlns:r="http://schemas.openxmlformats.org/officeDocument/2006/relationships" r:id="rId2"/>
+          </a:graphicData>
+        </a:graphic>
+      </p:graphicFrame>
+      <p:sp>
+        <p:nvSpPr>
+          <p:cNvPr id="8" name="Rounded Rectangle 7"/>
+          <p:cNvSpPr/>
+          <p:nvPr/>
+        </p:nvSpPr>
+        <p:spPr>
+          <a:xfrm>
+            <a:off x="7498079" y="1600200"/>
+            <a:ext cx="4206240" cy="1783080"/>
+          </a:xfrm>
+          <a:prstGeom prst="roundRect">
+            <a:avLst>
+              <a:gd name="adj" fmla="val 6000"/>
+            </a:avLst>
+          </a:prstGeom>
+          <a:solidFill>
+            <a:srgbClr val="F3F5F8"/>
+          </a:solidFill>
+          <a:ln>
+            <a:noFill/>
+          </a:ln>
+          <a:effectLst/>
+        </p:spPr>
+        <p:style>
+          <a:lnRef idx="1">
+            <a:schemeClr val="accent1"/>
+          </a:lnRef>
+          <a:fillRef idx="3">
+            <a:schemeClr val="accent1"/>
+          </a:fillRef>
+          <a:effectRef idx="2">
+            <a:schemeClr val="accent1"/>
+          </a:effectRef>
+          <a:fontRef idx="minor">
+            <a:schemeClr val="lt1"/>
+          </a:fontRef>
+        </p:style>
+        <p:txBody>
+          <a:bodyPr rtlCol="0" anchor="ctr"/>
+          <a:lstStyle/>
+          <a:p>
+            <a:endParaRPr/>
+          </a:p>
+        </p:txBody>
+      </p:sp>
+      <p:sp>
+        <p:nvSpPr>
+          <p:cNvPr id="9" name="Rectangle 8"/>
+          <p:cNvSpPr/>
+          <p:nvPr/>
+        </p:nvSpPr>
+        <p:spPr>
+          <a:xfrm>
+            <a:off x="7498079" y="1600200"/>
+            <a:ext cx="82296" cy="1783080"/>
+          </a:xfrm>
+          <a:prstGeom prst="rect">
+            <a:avLst/>
+          </a:prstGeom>
+          <a:solidFill>
+            <a:srgbClr val="2E9C6E"/>
+          </a:solidFill>
+          <a:ln>
+            <a:noFill/>
+          </a:ln>
+          <a:effectLst/>
+        </p:spPr>
+        <p:style>
+          <a:lnRef idx="1">
+            <a:schemeClr val="accent1"/>
+          </a:lnRef>
+          <a:fillRef idx="3">
+            <a:schemeClr val="accent1"/>
+          </a:fillRef>
+          <a:effectRef idx="2">
+            <a:schemeClr val="accent1"/>
+          </a:effectRef>
+          <a:fontRef idx="minor">
+            <a:schemeClr val="lt1"/>
+          </a:fontRef>
+        </p:style>
+        <p:txBody>
+          <a:bodyPr rtlCol="0" anchor="ctr"/>
+          <a:lstStyle/>
+          <a:p>
+            <a:endParaRPr/>
+          </a:p>
+        </p:txBody>
+      </p:sp>
+      <p:sp>
+        <p:nvSpPr>
+          <p:cNvPr id="10" name="TextBox 9"/>
+          <p:cNvSpPr txBox="1"/>
+          <p:nvPr/>
+        </p:nvSpPr>
+        <p:spPr>
+          <a:xfrm>
+            <a:off x="7772399" y="1764792"/>
+            <a:ext cx="3794760" cy="457200"/>
+          </a:xfrm>
+          <a:prstGeom prst="rect">
+            <a:avLst/>
+          </a:prstGeom>
+          <a:noFill/>
+        </p:spPr>
+        <p:txBody>
+          <a:bodyPr wrap="square" lIns="0" tIns="0" rIns="0" bIns="0" anchor="t">
+            <a:spAutoFit/>
+          </a:bodyPr>
+          <a:lstStyle/>
+          <a:p>
+            <a:pPr algn="l">
+              <a:lnSpc>
+                <a:spcPct val="110000"/>
+              </a:lnSpc>
+              <a:spcAft>
+                <a:spcPts val="600"/>
+              </a:spcAft>
+            </a:pPr>
+            <a:r>
+              <a:rPr sz="1700" b="1" i="0">
+                <a:solidFill>
+                  <a:srgbClr val="2E9C6E"/>
+                </a:solidFill>
+                <a:latin typeface="Calibri"/>
+              </a:rPr>
+              <a:t>Generiche: la profondità si paga</a:t>
+            </a:r>
+          </a:p>
+        </p:txBody>
+      </p:sp>
+      <p:sp>
+        <p:nvSpPr>
+          <p:cNvPr id="11" name="TextBox 10"/>
+          <p:cNvSpPr txBox="1"/>
+          <p:nvPr/>
+        </p:nvSpPr>
+        <p:spPr>
+          <a:xfrm>
+            <a:off x="7772399" y="2176272"/>
+            <a:ext cx="3794760" cy="1161288"/>
+          </a:xfrm>
+          <a:prstGeom prst="rect">
+            <a:avLst/>
+          </a:prstGeom>
+          <a:noFill/>
+        </p:spPr>
+        <p:txBody>
+          <a:bodyPr wrap="square" lIns="0" tIns="0" rIns="0" bIns="0" anchor="t">
+            <a:spAutoFit/>
+          </a:bodyPr>
+          <a:lstStyle/>
+          <a:p>
+            <a:pPr algn="l">
+              <a:lnSpc>
+                <a:spcPct val="110000"/>
+              </a:lnSpc>
+              <a:spcAft>
+                <a:spcPts val="600"/>
+              </a:spcAft>
+            </a:pPr>
+            <a:r>
+              <a:rPr sz="1400" b="0" i="0">
+                <a:solidFill>
+                  <a:srgbClr val="222B36"/>
+                </a:solidFill>
+                <a:latin typeface="Calibri"/>
+              </a:rPr>
+              <a:t>Da 1 a 5 strati, a pesi fermi: </a:t>
+            </a:r>
+            <a:r>
+              <a:rPr sz="1400" b="1" i="0">
+                <a:solidFill>
+                  <a:srgbClr val="222B36"/>
+                </a:solidFill>
+                <a:latin typeface="Calibri"/>
+              </a:rPr>
+              <a:t>P2 216 → 304 ns, P3 321 → 537 ns</a:t>
+            </a:r>
+            <a:r>
+              <a:rPr sz="1400" b="0" i="0">
+                <a:solidFill>
+                  <a:srgbClr val="222B36"/>
+                </a:solidFill>
+                <a:latin typeface="Calibri"/>
+              </a:rPr>
+              <a:t>.</a:t>
+            </a:r>
+          </a:p>
+        </p:txBody>
+      </p:sp>
+      <p:sp>
+        <p:nvSpPr>
+          <p:cNvPr id="12" name="Rounded Rectangle 11"/>
+          <p:cNvSpPr/>
+          <p:nvPr/>
+        </p:nvSpPr>
+        <p:spPr>
+          <a:xfrm>
+            <a:off x="7498079" y="3566160"/>
+            <a:ext cx="4206240" cy="1783080"/>
+          </a:xfrm>
+          <a:prstGeom prst="roundRect">
+            <a:avLst>
+              <a:gd name="adj" fmla="val 6000"/>
+            </a:avLst>
+          </a:prstGeom>
+          <a:solidFill>
+            <a:srgbClr val="F3F5F8"/>
+          </a:solidFill>
+          <a:ln>
+            <a:noFill/>
+          </a:ln>
+          <a:effectLst/>
+        </p:spPr>
+        <p:style>
+          <a:lnRef idx="1">
+            <a:schemeClr val="accent1"/>
+          </a:lnRef>
+          <a:fillRef idx="3">
+            <a:schemeClr val="accent1"/>
+          </a:fillRef>
+          <a:effectRef idx="2">
+            <a:schemeClr val="accent1"/>
+          </a:effectRef>
+          <a:fontRef idx="minor">
+            <a:schemeClr val="lt1"/>
+          </a:fontRef>
+        </p:style>
+        <p:txBody>
+          <a:bodyPr rtlCol="0" anchor="ctr"/>
+          <a:lstStyle/>
+          <a:p>
+            <a:endParaRPr/>
+          </a:p>
+        </p:txBody>
+      </p:sp>
+      <p:sp>
+        <p:nvSpPr>
+          <p:cNvPr id="13" name="Rectangle 12"/>
+          <p:cNvSpPr/>
+          <p:nvPr/>
+        </p:nvSpPr>
+        <p:spPr>
+          <a:xfrm>
+            <a:off x="7498079" y="3566160"/>
+            <a:ext cx="82296" cy="1783080"/>
+          </a:xfrm>
+          <a:prstGeom prst="rect">
+            <a:avLst/>
+          </a:prstGeom>
+          <a:solidFill>
+            <a:srgbClr val="E07A2D"/>
+          </a:solidFill>
+          <a:ln>
+            <a:noFill/>
+          </a:ln>
+          <a:effectLst/>
+        </p:spPr>
+        <p:style>
+          <a:lnRef idx="1">
+            <a:schemeClr val="accent1"/>
+          </a:lnRef>
+          <a:fillRef idx="3">
+            <a:schemeClr val="accent1"/>
+          </a:fillRef>
+          <a:effectRef idx="2">
+            <a:schemeClr val="accent1"/>
+          </a:effectRef>
+          <a:fontRef idx="minor">
+            <a:schemeClr val="lt1"/>
+          </a:fontRef>
+        </p:style>
+        <p:txBody>
+          <a:bodyPr rtlCol="0" anchor="ctr"/>
+          <a:lstStyle/>
+          <a:p>
+            <a:endParaRPr/>
+          </a:p>
+        </p:txBody>
+      </p:sp>
+      <p:sp>
+        <p:nvSpPr>
+          <p:cNvPr id="14" name="TextBox 13"/>
+          <p:cNvSpPr txBox="1"/>
+          <p:nvPr/>
+        </p:nvSpPr>
+        <p:spPr>
+          <a:xfrm>
+            <a:off x="7772399" y="3730752"/>
+            <a:ext cx="3794760" cy="457200"/>
+          </a:xfrm>
+          <a:prstGeom prst="rect">
+            <a:avLst/>
+          </a:prstGeom>
+          <a:noFill/>
+        </p:spPr>
+        <p:txBody>
+          <a:bodyPr wrap="square" lIns="0" tIns="0" rIns="0" bIns="0" anchor="t">
+            <a:spAutoFit/>
+          </a:bodyPr>
+          <a:lstStyle/>
+          <a:p>
+            <a:pPr algn="l">
+              <a:lnSpc>
+                <a:spcPct val="110000"/>
+              </a:lnSpc>
+              <a:spcAft>
+                <a:spcPts val="600"/>
+              </a:spcAft>
+            </a:pPr>
+            <a:r>
+              <a:rPr sz="1700" b="1" i="0">
+                <a:solidFill>
+                  <a:srgbClr val="E07A2D"/>
+                </a:solidFill>
+                <a:latin typeface="Calibri"/>
+              </a:rPr>
+              <a:t>Specializzate: quasi indifferenti</a:t>
+            </a:r>
+          </a:p>
+        </p:txBody>
+      </p:sp>
+      <p:sp>
+        <p:nvSpPr>
+          <p:cNvPr id="15" name="TextBox 14"/>
+          <p:cNvSpPr txBox="1"/>
+          <p:nvPr/>
+        </p:nvSpPr>
+        <p:spPr>
+          <a:xfrm>
+            <a:off x="7772399" y="4142232"/>
+            <a:ext cx="3794760" cy="1161288"/>
+          </a:xfrm>
+          <a:prstGeom prst="rect">
+            <a:avLst/>
+          </a:prstGeom>
+          <a:noFill/>
+        </p:spPr>
+        <p:txBody>
+          <a:bodyPr wrap="square" lIns="0" tIns="0" rIns="0" bIns="0" anchor="t">
+            <a:spAutoFit/>
+          </a:bodyPr>
+          <a:lstStyle/>
+          <a:p>
+            <a:pPr algn="l">
+              <a:lnSpc>
+                <a:spcPct val="110000"/>
+              </a:lnSpc>
+              <a:spcAft>
+                <a:spcPts val="600"/>
+              </a:spcAft>
+            </a:pPr>
+            <a:r>
+              <a:rPr sz="1400" b="1" i="0">
+                <a:solidFill>
+                  <a:srgbClr val="222B36"/>
+                </a:solidFill>
+                <a:latin typeface="Calibri"/>
+              </a:rPr>
+              <a:t>59–85 ns</a:t>
+            </a:r>
+            <a:r>
+              <a:rPr sz="1400" b="0" i="0">
+                <a:solidFill>
+                  <a:srgbClr val="222B36"/>
+                </a:solidFill>
+                <a:latin typeface="Calibri"/>
+              </a:rPr>
+              <a:t>: srotolano tutto in una funzione sola, e la forma conta poco.</a:t>
+            </a:r>
+          </a:p>
+        </p:txBody>
+      </p:sp>
+      <p:sp>
+        <p:nvSpPr>
+          <p:cNvPr id="16" name="Rounded Rectangle 15"/>
+          <p:cNvSpPr/>
+          <p:nvPr/>
+        </p:nvSpPr>
+        <p:spPr>
+          <a:xfrm>
+            <a:off x="548640" y="5532120"/>
+            <a:ext cx="11094415" cy="777240"/>
+          </a:xfrm>
+          <a:prstGeom prst="roundRect">
+            <a:avLst>
+              <a:gd name="adj" fmla="val 6000"/>
+            </a:avLst>
+          </a:prstGeom>
+          <a:solidFill>
+            <a:srgbClr val="FFF4DE"/>
+          </a:solidFill>
+          <a:ln>
+            <a:noFill/>
+          </a:ln>
+          <a:effectLst/>
+        </p:spPr>
+        <p:style>
+          <a:lnRef idx="1">
+            <a:schemeClr val="accent1"/>
+          </a:lnRef>
+          <a:fillRef idx="3">
+            <a:schemeClr val="accent1"/>
+          </a:fillRef>
+          <a:effectRef idx="2">
+            <a:schemeClr val="accent1"/>
+          </a:effectRef>
+          <a:fontRef idx="minor">
+            <a:schemeClr val="lt1"/>
+          </a:fontRef>
+        </p:style>
+        <p:txBody>
+          <a:bodyPr rtlCol="0" anchor="ctr"/>
+          <a:lstStyle/>
+          <a:p>
+            <a:endParaRPr/>
+          </a:p>
+        </p:txBody>
+      </p:sp>
+      <p:sp>
+        <p:nvSpPr>
+          <p:cNvPr id="17" name="Rectangle 16"/>
+          <p:cNvSpPr/>
+          <p:nvPr/>
+        </p:nvSpPr>
+        <p:spPr>
+          <a:xfrm>
+            <a:off x="548640" y="5532120"/>
+            <a:ext cx="82296" cy="777240"/>
+          </a:xfrm>
+          <a:prstGeom prst="rect">
+            <a:avLst/>
+          </a:prstGeom>
+          <a:solidFill>
+            <a:srgbClr val="F2B134"/>
+          </a:solidFill>
+          <a:ln>
+            <a:noFill/>
+          </a:ln>
+          <a:effectLst/>
+        </p:spPr>
+        <p:style>
+          <a:lnRef idx="1">
+            <a:schemeClr val="accent1"/>
+          </a:lnRef>
+          <a:fillRef idx="3">
+            <a:schemeClr val="accent1"/>
+          </a:fillRef>
+          <a:effectRef idx="2">
+            <a:schemeClr val="accent1"/>
+          </a:effectRef>
+          <a:fontRef idx="minor">
+            <a:schemeClr val="lt1"/>
+          </a:fontRef>
+        </p:style>
+        <p:txBody>
+          <a:bodyPr rtlCol="0" anchor="ctr"/>
+          <a:lstStyle/>
+          <a:p>
+            <a:endParaRPr/>
+          </a:p>
+        </p:txBody>
+      </p:sp>
+      <p:sp>
+        <p:nvSpPr>
+          <p:cNvPr id="18" name="TextBox 17"/>
+          <p:cNvSpPr txBox="1"/>
+          <p:nvPr/>
+        </p:nvSpPr>
+        <p:spPr>
+          <a:xfrm>
+            <a:off x="822960" y="5605272"/>
+            <a:ext cx="1097280" cy="274320"/>
+          </a:xfrm>
+          <a:prstGeom prst="rect">
+            <a:avLst/>
+          </a:prstGeom>
+          <a:noFill/>
+        </p:spPr>
+        <p:txBody>
+          <a:bodyPr wrap="square" lIns="0" tIns="0" rIns="0" bIns="0" anchor="t">
+            <a:spAutoFit/>
+          </a:bodyPr>
+          <a:lstStyle/>
+          <a:p>
+            <a:pPr algn="l">
+              <a:lnSpc>
+                <a:spcPct val="110000"/>
+              </a:lnSpc>
+              <a:spcAft>
+                <a:spcPts val="600"/>
+              </a:spcAft>
+            </a:pPr>
+            <a:r>
+              <a:rPr sz="1100" b="1" i="0">
+                <a:solidFill>
+                  <a:srgbClr val="B57A00"/>
+                </a:solidFill>
+                <a:latin typeface="Calibri"/>
+              </a:rPr>
+              <a:t>QUINDI</a:t>
+            </a:r>
+          </a:p>
+        </p:txBody>
+      </p:sp>
+      <p:sp>
+        <p:nvSpPr>
+          <p:cNvPr id="19" name="TextBox 18"/>
+          <p:cNvSpPr txBox="1"/>
+          <p:nvPr/>
+        </p:nvSpPr>
+        <p:spPr>
+          <a:xfrm>
+            <a:off x="1783080" y="5532120"/>
+            <a:ext cx="9677095" cy="777240"/>
+          </a:xfrm>
+          <a:prstGeom prst="rect">
+            <a:avLst/>
+          </a:prstGeom>
+          <a:noFill/>
+        </p:spPr>
+        <p:txBody>
+          <a:bodyPr wrap="square" lIns="0" tIns="0" rIns="0" bIns="0" anchor="ctr">
+            <a:spAutoFit/>
+          </a:bodyPr>
+          <a:lstStyle/>
+          <a:p>
+            <a:pPr algn="l">
+              <a:lnSpc>
+                <a:spcPct val="105000"/>
+              </a:lnSpc>
+              <a:spcAft>
+                <a:spcPts val="0"/>
+              </a:spcAft>
+            </a:pPr>
+            <a:r>
+              <a:rPr sz="1500" b="0" i="0">
+                <a:solidFill>
+                  <a:srgbClr val="222B36"/>
+                </a:solidFill>
+                <a:latin typeface="Calibri"/>
+              </a:rPr>
+              <a:t>Con le versioni </a:t>
+            </a:r>
+            <a:r>
+              <a:rPr sz="1500" b="1" i="0">
+                <a:solidFill>
+                  <a:srgbClr val="222B36"/>
+                </a:solidFill>
+                <a:latin typeface="Calibri"/>
+              </a:rPr>
+              <a:t>specializzate</a:t>
+            </a:r>
+            <a:r>
+              <a:rPr sz="1500" b="0" i="0">
+                <a:solidFill>
+                  <a:srgbClr val="222B36"/>
+                </a:solidFill>
+                <a:latin typeface="Calibri"/>
+              </a:rPr>
+              <a:t> la forma della rete si sceglie per l'</a:t>
+            </a:r>
+            <a:r>
+              <a:rPr sz="1500" b="1" i="0">
+                <a:solidFill>
+                  <a:srgbClr val="222B36"/>
+                </a:solidFill>
+                <a:latin typeface="Calibri"/>
+              </a:rPr>
+              <a:t>accuratezza</a:t>
+            </a:r>
+            <a:r>
+              <a:rPr sz="1500" b="0" i="0">
+                <a:solidFill>
+                  <a:srgbClr val="222B36"/>
+                </a:solidFill>
+                <a:latin typeface="Calibri"/>
+              </a:rPr>
+              <a:t>. Con le </a:t>
+            </a:r>
+            <a:r>
+              <a:rPr sz="1500" b="1" i="0">
+                <a:solidFill>
+                  <a:srgbClr val="222B36"/>
+                </a:solidFill>
+                <a:latin typeface="Calibri"/>
+              </a:rPr>
+              <a:t>generiche</a:t>
+            </a:r>
+            <a:r>
+              <a:rPr sz="1500" b="0" i="0">
+                <a:solidFill>
+                  <a:srgbClr val="222B36"/>
+                </a:solidFill>
+                <a:latin typeface="Calibri"/>
+              </a:rPr>
+              <a:t>, a parità di pesi, conviene una rete </a:t>
+            </a:r>
+            <a:r>
+              <a:rPr sz="1500" b="1" i="0">
+                <a:solidFill>
+                  <a:srgbClr val="222B36"/>
+                </a:solidFill>
+                <a:latin typeface="Calibri"/>
+              </a:rPr>
+              <a:t>larga e poco profonda</a:t>
+            </a:r>
+            <a:r>
+              <a:rPr sz="1500" b="0" i="0">
+                <a:solidFill>
+                  <a:srgbClr val="222B36"/>
+                </a:solidFill>
+                <a:latin typeface="Calibri"/>
+              </a:rPr>
+              <a:t>: da 1 a 5 strati il costo sale del 41 % (P2) e del 67 % (P3).</a:t>
+            </a:r>
+          </a:p>
+        </p:txBody>
+      </p:sp>
+    </p:spTree>
+  </p:cSld>
+  <p:clrMapOvr>
+    <a:masterClrMapping/>
+  </p:clrMapOvr>
+</p:sld>
+</file>
+
+<file path=ppt/slides/slide22.xml><?xml version="1.0" encoding="utf-8"?>
+<p:sld xmlns:a="http://schemas.openxmlformats.org/drawingml/2006/main" xmlns:r="http://schemas.openxmlformats.org/officeDocument/2006/relationships" xmlns:p="http://schemas.openxmlformats.org/presentationml/2006/main">
+  <p:cSld>
+    <p:bg>
+      <p:bgPr>
+        <a:solidFill>
+          <a:srgbClr val="FFFFFF"/>
+        </a:solidFill>
+        <a:effectLst/>
+      </p:bgPr>
+    </p:bg>
+    <p:spTree>
+      <p:nvGrpSpPr>
+        <p:cNvPr id="1" name=""/>
+        <p:cNvGrpSpPr/>
+        <p:nvPr/>
+      </p:nvGrpSpPr>
+      <p:grpSpPr>
+        <a:xfrm>
+          <a:off x="0" y="0"/>
+          <a:ext cx="0" cy="0"/>
+          <a:chOff x="0" y="0"/>
+          <a:chExt cx="0" cy="0"/>
+        </a:xfrm>
+      </p:grpSpPr>
+      <p:sp>
+        <p:nvSpPr>
+          <p:cNvPr id="2" name="Rectangle 1"/>
+          <p:cNvSpPr/>
+          <p:nvPr/>
+        </p:nvSpPr>
+        <p:spPr>
+          <a:xfrm>
+            <a:off x="0" y="0"/>
+            <a:ext cx="12191695" cy="109728"/>
+          </a:xfrm>
+          <a:prstGeom prst="rect">
+            <a:avLst/>
+          </a:prstGeom>
+          <a:solidFill>
+            <a:srgbClr val="1F3A5F"/>
+          </a:solidFill>
+          <a:ln>
+            <a:noFill/>
+          </a:ln>
+          <a:effectLst/>
+        </p:spPr>
+        <p:style>
+          <a:lnRef idx="1">
+            <a:schemeClr val="accent1"/>
+          </a:lnRef>
+          <a:fillRef idx="3">
+            <a:schemeClr val="accent1"/>
+          </a:fillRef>
+          <a:effectRef idx="2">
+            <a:schemeClr val="accent1"/>
+          </a:effectRef>
+          <a:fontRef idx="minor">
+            <a:schemeClr val="lt1"/>
+          </a:fontRef>
+        </p:style>
+        <p:txBody>
+          <a:bodyPr rtlCol="0" anchor="ctr"/>
+          <a:lstStyle/>
+          <a:p>
+            <a:endParaRPr/>
+          </a:p>
+        </p:txBody>
+      </p:sp>
+      <p:sp>
+        <p:nvSpPr>
+          <p:cNvPr id="3" name="TextBox 2"/>
+          <p:cNvSpPr txBox="1"/>
+          <p:nvPr/>
+        </p:nvSpPr>
+        <p:spPr>
+          <a:xfrm>
+            <a:off x="548640" y="384048"/>
+            <a:ext cx="10972800" cy="274320"/>
+          </a:xfrm>
+          <a:prstGeom prst="rect">
+            <a:avLst/>
+          </a:prstGeom>
+          <a:noFill/>
+        </p:spPr>
+        <p:txBody>
+          <a:bodyPr wrap="square" lIns="0" tIns="0" rIns="0" bIns="0" anchor="t">
+            <a:spAutoFit/>
+          </a:bodyPr>
+          <a:lstStyle/>
+          <a:p>
+            <a:pPr algn="l">
+              <a:lnSpc>
+                <a:spcPct val="110000"/>
+              </a:lnSpc>
+              <a:spcAft>
+                <a:spcPts val="600"/>
+              </a:spcAft>
+            </a:pPr>
+            <a:r>
+              <a:rPr sz="1200" b="1" i="0">
+                <a:solidFill>
+                  <a:srgbClr val="E07A2D"/>
+                </a:solidFill>
+                <a:latin typeface="Calibri"/>
+              </a:rPr>
+              <a:t>LA RETE NEURALE SOTTO TRAFFICO · CONTARE IL LAVORO GIUSTO</a:t>
+            </a:r>
+          </a:p>
+        </p:txBody>
+      </p:sp>
+      <p:sp>
+        <p:nvSpPr>
+          <p:cNvPr id="4" name="TextBox 3"/>
+          <p:cNvSpPr txBox="1"/>
+          <p:nvPr/>
+        </p:nvSpPr>
+        <p:spPr>
+          <a:xfrm>
+            <a:off x="548640" y="658368"/>
+            <a:ext cx="11064240" cy="822960"/>
+          </a:xfrm>
+          <a:prstGeom prst="rect">
+            <a:avLst/>
+          </a:prstGeom>
+          <a:noFill/>
+        </p:spPr>
+        <p:txBody>
+          <a:bodyPr wrap="square" lIns="0" tIns="0" rIns="0" bIns="0" anchor="t">
+            <a:spAutoFit/>
+          </a:bodyPr>
+          <a:lstStyle/>
+          <a:p>
+            <a:pPr algn="l">
+              <a:lnSpc>
+                <a:spcPct val="100000"/>
+              </a:lnSpc>
+              <a:spcAft>
+                <a:spcPts val="600"/>
+              </a:spcAft>
+            </a:pPr>
+            <a:r>
+              <a:rPr sz="3000" b="1" i="0">
+                <a:solidFill>
+                  <a:srgbClr val="1F3A5F"/>
+                </a:solidFill>
+                <a:latin typeface="Calibri"/>
+              </a:rPr>
+              <a:t>Il costo per MAC è una costante, tranne che per P2</a:t>
+            </a:r>
+          </a:p>
+        </p:txBody>
+      </p:sp>
+      <p:sp>
+        <p:nvSpPr>
+          <p:cNvPr id="5" name="TextBox 4"/>
+          <p:cNvSpPr txBox="1"/>
+          <p:nvPr/>
+        </p:nvSpPr>
+        <p:spPr>
+          <a:xfrm>
+            <a:off x="11292840" y="6446520"/>
+            <a:ext cx="457200" cy="274320"/>
+          </a:xfrm>
+          <a:prstGeom prst="rect">
+            <a:avLst/>
+          </a:prstGeom>
+          <a:noFill/>
+        </p:spPr>
+        <p:txBody>
+          <a:bodyPr wrap="square" lIns="0" tIns="0" rIns="0" bIns="0" anchor="t">
+            <a:spAutoFit/>
+          </a:bodyPr>
+          <a:lstStyle/>
+          <a:p>
+            <a:pPr algn="r">
+              <a:lnSpc>
+                <a:spcPct val="110000"/>
+              </a:lnSpc>
+              <a:spcAft>
+                <a:spcPts val="600"/>
+              </a:spcAft>
+            </a:pPr>
+            <a:r>
+              <a:rPr sz="1100" b="0" i="0">
+                <a:solidFill>
+                  <a:srgbClr val="6B7C93"/>
+                </a:solidFill>
+                <a:latin typeface="Calibri"/>
+              </a:rPr>
+              <a:t>22</a:t>
+            </a:r>
+          </a:p>
+        </p:txBody>
+      </p:sp>
+      <p:sp>
+        <p:nvSpPr>
+          <p:cNvPr id="6" name="TextBox 5"/>
+          <p:cNvSpPr txBox="1"/>
+          <p:nvPr/>
+        </p:nvSpPr>
+        <p:spPr>
+          <a:xfrm>
+            <a:off x="548640" y="6446520"/>
             <a:ext cx="10424160" cy="176908"/>
           </a:xfrm>
           <a:prstGeom prst="rect">
@@ -29654,21 +31137,21 @@
                 </a:solidFill>
                 <a:latin typeface="Calibri"/>
               </a:rPr>
-              <a:t>Contando le moltiplicazioni dalla forma del modello, per P3 la retta spiega il 10 % dei punti; contando quelle eseguite, il 92 %</a:t>
+              <a:t>MAC contate dalla forma: r² ≤ 0,22; MAC eseguite: fino a 0,94  ·  tempo di CPU meno la baseline, xdp_gen, P-core a 3,5 GHz</a:t>
             </a:r>
           </a:p>
         </p:txBody>
       </p:sp>
       <p:pic>
         <p:nvPicPr>
-          <p:cNvPr id="7" name="Picture 6" descr="campaign_macs_eff_latenza.png"/>
+          <p:cNvPr id="14" name="Picture 13" descr="macfit.png"/>
           <p:cNvPicPr>
             <a:picLocks noChangeAspect="1"/>
           </p:cNvPicPr>
           <p:nvPr/>
         </p:nvPicPr>
         <p:blipFill>
-          <a:blip r:embed="rId3"/>
+          <a:blip r:embed="rId2"/>
           <a:stretch>
             <a:fillRect/>
           </a:stretch>
@@ -29807,7 +31290,7 @@
                           </a:solidFill>
                           <a:latin typeface="Calibri"/>
                         </a:rPr>
-                        <a:t>0,29</a:t>
+                        <a:t>0,22</a:t>
                       </a:r>
                     </a:p>
                   </a:txBody>
@@ -29860,7 +31343,7 @@
                           </a:solidFill>
                           <a:latin typeface="Calibri"/>
                         </a:rPr>
-                        <a:t>0,29</a:t>
+                        <a:t>0,18</a:t>
                       </a:r>
                     </a:p>
                   </a:txBody>
@@ -29913,7 +31396,7 @@
                           </a:solidFill>
                           <a:latin typeface="Calibri"/>
                         </a:rPr>
-                        <a:t>0,57</a:t>
+                        <a:t>—</a:t>
                       </a:r>
                     </a:p>
                   </a:txBody>
@@ -29966,7 +31449,7 @@
                           </a:solidFill>
                           <a:latin typeface="Calibri"/>
                         </a:rPr>
-                        <a:t>1,20</a:t>
+                        <a:t>0,69</a:t>
                       </a:r>
                     </a:p>
                   </a:txBody>
@@ -30041,25 +31524,7 @@
                 </a:solidFill>
                 <a:latin typeface="Calibri"/>
               </a:rPr>
-              <a:t>, quattro esperimenti diversi cadono sulla stessa retta (r² 0,92–0,99; P2 0,71). Un ingresso «a una casella accesa» ne attiva </a:t>
-            </a:r>
-            <a:r>
-              <a:rPr sz="1400" b="1" i="0" dirty="0" err="1">
-                <a:solidFill>
-                  <a:srgbClr val="222B36"/>
-                </a:solidFill>
-                <a:latin typeface="Calibri"/>
-              </a:rPr>
-              <a:t>una</a:t>
-            </a:r>
-            <a:r>
-              <a:rPr sz="1400" b="0" i="0" dirty="0" err="1">
-                <a:solidFill>
-                  <a:srgbClr val="222B36"/>
-                </a:solidFill>
-                <a:latin typeface="Calibri"/>
-              </a:rPr>
-              <a:t> colonna sola.</a:t>
+              <a:t>, ingressi densi, one-hot e larghezza cadono su una retta (r² 0,71–0,94). P2 no: il suo costo di partenza cambia con l'ingresso.</a:t>
             </a:r>
           </a:p>
         </p:txBody>
@@ -30260,7 +31725,7 @@
                 </a:solidFill>
                 <a:latin typeface="Calibri"/>
               </a:rPr>
-              <a:t>~0,3 ns</a:t>
+              <a:t>~0,2 ns</a:t>
             </a:r>
             <a:r>
               <a:rPr sz="1400" b="0" i="0">
@@ -30278,7 +31743,7 @@
                 </a:solidFill>
                 <a:latin typeface="Calibri"/>
               </a:rPr>
-              <a:t>~0,6–1,2 ns</a:t>
+              <a:t>~0,7 ns</a:t>
             </a:r>
             <a:r>
               <a:rPr sz="1400" b="0" i="0">
@@ -30287,7 +31752,7 @@
                 </a:solidFill>
                 <a:latin typeface="Calibri"/>
               </a:rPr>
-              <a:t> (pesi da tabella), più il costo fisso della pipeline. Una feature one-hot conta una colonna, qualunque sia la sua larghezza.</a:t>
+              <a:t> (P3), più il costo fisso della pipeline e, con P3, ~58 ns a strato. Una feature one-hot conta una colonna, qualunque sia la sua larghezza.</a:t>
             </a:r>
           </a:p>
         </p:txBody>
@@ -30300,7 +31765,7 @@
 </p:sld>
 </file>
 
-<file path=ppt/slides/slide22.xml><?xml version="1.0" encoding="utf-8"?>
+<file path=ppt/slides/slide23.xml><?xml version="1.0" encoding="utf-8"?>
 <p:sld xmlns:a="http://schemas.openxmlformats.org/drawingml/2006/main" xmlns:r="http://schemas.openxmlformats.org/officeDocument/2006/relationships" xmlns:p="http://schemas.openxmlformats.org/presentationml/2006/main">
   <p:cSld>
     <p:bg>
@@ -30406,7 +31871,7 @@
                 </a:solidFill>
                 <a:latin typeface="Calibri"/>
               </a:rPr>
-              <a:t>IL PROGRAMMA DA SOLO · QUANDO LA SPECIALIZZAZIONE PAGA DAVVERO</a:t>
+              <a:t>LA RETE NEURALE SOTTO TRAFFICO · QUANDO LA SPECIALIZZAZIONE PAGA DAVVERO</a:t>
             </a:r>
           </a:p>
         </p:txBody>
@@ -30490,7 +31955,7 @@
                 </a:solidFill>
                 <a:latin typeface="Calibri"/>
               </a:rPr>
-              <a:t>22</a:t>
+              <a:t>23</a:t>
             </a:r>
           </a:p>
         </p:txBody>
@@ -30532,7 +31997,7 @@
                 </a:solidFill>
                 <a:latin typeface="Calibri"/>
               </a:rPr>
-              <a:t>È l'unico esperimento in cui scendono insieme dimensione e tempo  ·  sotto traffico P1.5 passa da 120 a 106 ns</a:t>
+              <a:t>È l'unico esperimento in cui scendono insieme dimensione e tempo  ·  tempo di CPU meno la baseline, xdp_gen, nodo saturo, P-core a 3,5 GHz</a:t>
             </a:r>
           </a:p>
         </p:txBody>
@@ -30724,7 +32189,7 @@
                 </a:solidFill>
                 <a:latin typeface="Calibri"/>
               </a:rPr>
-              <a:t>1 045 → 337 istruzioni, 45 → 25 ns. Il compilatore vede lo zero e cancella la moltiplicazione.</a:t>
+              <a:t>Programma da 1 045 a 337 istruzioni, 52 → 39 ns per pacchetto. Il compilatore vede lo zero e cancella la moltiplicazione.</a:t>
             </a:r>
           </a:p>
         </p:txBody>
@@ -30898,7 +32363,7 @@
                 </a:solidFill>
                 <a:latin typeface="Calibri"/>
               </a:rPr>
-              <a:t>Dimensione e latenza invariate: zero, letto da una tabella, è un numero come un altro.</a:t>
+              <a:t>Dimensione e costo invariati (entro il 5 %): zero, letto da una tabella, è un numero come un altro.</a:t>
             </a:r>
           </a:p>
         </p:txBody>
@@ -31081,7 +32546,7 @@
                 </a:solidFill>
                 <a:latin typeface="Calibri"/>
               </a:rPr>
-              <a:t> (pesi a zero) rende più veloce solo le versioni specializzate: al 90 % di zeri P1.5 perde il 44 % della latenza e due terzi delle istruzioni. Con P2 e P3 non dà niente.</a:t>
+              <a:t> (pesi a zero) rende più veloci solo le versioni specializzate: al 90 % di zeri P1 perde il 39 % del costo e P1.5 il 25 %. Con P2 e P3 non dà niente.</a:t>
             </a:r>
           </a:p>
         </p:txBody>
@@ -32728,7 +34193,7 @@
                 </a:solidFill>
                 <a:latin typeface="Calibri"/>
               </a:rPr>
-              <a:t>Caricate: BPF_PROG_TEST_RUN, istruzioni del programma  ·  eseguite: contatori hardware del core del nodo sotto traffico, per pacchetto, nodo saturo</a:t>
+              <a:t>Caricate: istruzioni del programma, contate dal kernel al caricamento  ·  eseguite: contatori hardware del core del nodo sotto traffico, per pacchetto, nodo saturo</a:t>
             </a:r>
           </a:p>
         </p:txBody>

--- a/docs/Inferenza di una rete neurale nel kernel Linux con eBPF XDP.pptx
+++ b/docs/Inferenza di una rete neurale nel kernel Linux con eBPF XDP.pptx
@@ -765,19 +765,19 @@
                 <c:formatCode>General</c:formatCode>
                 <c:ptCount val="5"/>
                 <c:pt idx="0">
-                  <c:v>66</c:v>
+                  <c:v>66.6</c:v>
                 </c:pt>
                 <c:pt idx="1">
-                  <c:v>117</c:v>
+                  <c:v>118.5</c:v>
                 </c:pt>
                 <c:pt idx="2">
-                  <c:v>124</c:v>
+                  <c:v>125.5</c:v>
                 </c:pt>
                 <c:pt idx="3">
-                  <c:v>290</c:v>
+                  <c:v>291.0</c:v>
                 </c:pt>
                 <c:pt idx="4">
-                  <c:v>425</c:v>
+                  <c:v>485.8</c:v>
                 </c:pt>
               </c:numCache>
             </c:numRef>
@@ -981,7 +981,7 @@
               <c:strCache>
                 <c:ptCount val="1"/>
                 <c:pt idx="0">
-                  <c:v>da solo (BPF_PROG_TEST_RUN)</c:v>
+                  <c:v>nodo saturo (tempo di CPU)</c:v>
                 </c:pt>
               </c:strCache>
             </c:strRef>
@@ -1010,9 +1010,9 @@
           </c:marker>
           <c:cat>
             <c:strRef>
-              <c:f>Sheet1!$A$2:$A$7</c:f>
+              <c:f>Sheet1!$A$2:$A$6</c:f>
               <c:strCache>
-                <c:ptCount val="6"/>
+                <c:ptCount val="5"/>
                 <c:pt idx="0">
                   <c:v>1</c:v>
                 </c:pt>
@@ -1026,9 +1026,6 @@
                   <c:v>4</c:v>
                 </c:pt>
                 <c:pt idx="4">
-                  <c:v>5</c:v>
-                </c:pt>
-                <c:pt idx="5">
                   <c:v>6</c:v>
                 </c:pt>
               </c:strCache>
@@ -1036,27 +1033,24 @@
           </c:cat>
           <c:val>
             <c:numRef>
-              <c:f>Sheet1!$B$2:$B$7</c:f>
+              <c:f>Sheet1!$B$2:$B$6</c:f>
               <c:numCache>
                 <c:formatCode>General</c:formatCode>
-                <c:ptCount val="6"/>
+                <c:ptCount val="5"/>
                 <c:pt idx="0">
-                  <c:v>246</c:v>
+                  <c:v>299.1</c:v>
                 </c:pt>
                 <c:pt idx="1">
-                  <c:v>303</c:v>
+                  <c:v>362.65</c:v>
                 </c:pt>
                 <c:pt idx="2">
-                  <c:v>356</c:v>
+                  <c:v>415.1</c:v>
                 </c:pt>
                 <c:pt idx="3">
-                  <c:v>408</c:v>
+                  <c:v>475.3</c:v>
                 </c:pt>
                 <c:pt idx="4">
-                  <c:v>453</c:v>
-                </c:pt>
-                <c:pt idx="5">
-                  <c:v>510</c:v>
+                  <c:v>559.4</c:v>
                 </c:pt>
               </c:numCache>
             </c:numRef>
@@ -1077,7 +1071,7 @@
               <c:strCache>
                 <c:ptCount val="1"/>
                 <c:pt idx="0">
-                  <c:v>sotto traffico, minimo</c:v>
+                  <c:v>traffico leggero, minimo</c:v>
                 </c:pt>
               </c:strCache>
             </c:strRef>
@@ -1105,9 +1099,9 @@
           </c:marker>
           <c:cat>
             <c:strRef>
-              <c:f>Sheet1!$A$2:$A$7</c:f>
+              <c:f>Sheet1!$A$2:$A$6</c:f>
               <c:strCache>
-                <c:ptCount val="6"/>
+                <c:ptCount val="5"/>
                 <c:pt idx="0">
                   <c:v>1</c:v>
                 </c:pt>
@@ -1121,9 +1115,6 @@
                   <c:v>4</c:v>
                 </c:pt>
                 <c:pt idx="4">
-                  <c:v>5</c:v>
-                </c:pt>
-                <c:pt idx="5">
                   <c:v>6</c:v>
                 </c:pt>
               </c:strCache>
@@ -1131,27 +1122,24 @@
           </c:cat>
           <c:val>
             <c:numRef>
-              <c:f>Sheet1!$C$2:$C$7</c:f>
+              <c:f>Sheet1!$C$2:$C$6</c:f>
               <c:numCache>
                 <c:formatCode>General</c:formatCode>
-                <c:ptCount val="6"/>
+                <c:ptCount val="5"/>
                 <c:pt idx="0">
-                  <c:v>262</c:v>
+                  <c:v>262.5</c:v>
                 </c:pt>
                 <c:pt idx="1">
-                  <c:v>312</c:v>
+                  <c:v>308.25</c:v>
                 </c:pt>
                 <c:pt idx="2">
-                  <c:v>374</c:v>
+                  <c:v>371.5</c:v>
                 </c:pt>
                 <c:pt idx="3">
-                  <c:v>408</c:v>
+                  <c:v>411.0</c:v>
                 </c:pt>
                 <c:pt idx="4">
-                  <c:v>461</c:v>
-                </c:pt>
-                <c:pt idx="5">
-                  <c:v>508</c:v>
+                  <c:v>489.5</c:v>
                 </c:pt>
               </c:numCache>
             </c:numRef>
@@ -1172,7 +1160,7 @@
               <c:strCache>
                 <c:ptCount val="1"/>
                 <c:pt idx="0">
-                  <c:v>sotto traffico, media</c:v>
+                  <c:v>traffico leggero, media</c:v>
                 </c:pt>
               </c:strCache>
             </c:strRef>
@@ -1200,9 +1188,9 @@
           </c:marker>
           <c:cat>
             <c:strRef>
-              <c:f>Sheet1!$A$2:$A$7</c:f>
+              <c:f>Sheet1!$A$2:$A$6</c:f>
               <c:strCache>
-                <c:ptCount val="6"/>
+                <c:ptCount val="5"/>
                 <c:pt idx="0">
                   <c:v>1</c:v>
                 </c:pt>
@@ -1216,9 +1204,6 @@
                   <c:v>4</c:v>
                 </c:pt>
                 <c:pt idx="4">
-                  <c:v>5</c:v>
-                </c:pt>
-                <c:pt idx="5">
                   <c:v>6</c:v>
                 </c:pt>
               </c:strCache>
@@ -1226,27 +1211,24 @@
           </c:cat>
           <c:val>
             <c:numRef>
-              <c:f>Sheet1!$D$2:$D$7</c:f>
+              <c:f>Sheet1!$D$2:$D$6</c:f>
               <c:numCache>
                 <c:formatCode>General</c:formatCode>
-                <c:ptCount val="6"/>
+                <c:ptCount val="5"/>
                 <c:pt idx="0">
-                  <c:v>322</c:v>
+                  <c:v>297.5</c:v>
                 </c:pt>
                 <c:pt idx="1">
-                  <c:v>348</c:v>
+                  <c:v>357.75</c:v>
                 </c:pt>
                 <c:pt idx="2">
-                  <c:v>436</c:v>
+                  <c:v>429.5</c:v>
                 </c:pt>
                 <c:pt idx="3">
-                  <c:v>509</c:v>
+                  <c:v>496.0</c:v>
                 </c:pt>
                 <c:pt idx="4">
-                  <c:v>560</c:v>
-                </c:pt>
-                <c:pt idx="5">
-                  <c:v>610</c:v>
+                  <c:v>565.5</c:v>
                 </c:pt>
               </c:numCache>
             </c:numRef>
@@ -1291,7 +1273,7 @@
                     </a:solidFill>
                     <a:latin typeface="Calibri"/>
                   </a:rPr>
-                  <a:t>strati nascosti (4 neuroni)</a:t>
+                  <a:t>strati nascosti</a:t>
                 </a:r>
               </a:p>
             </c:rich>
@@ -1508,19 +1490,19 @@
                 <c:formatCode>General</c:formatCode>
                 <c:ptCount val="5"/>
                 <c:pt idx="0">
-                  <c:v>65</c:v>
+                  <c:v>65.7</c:v>
                 </c:pt>
                 <c:pt idx="1">
-                  <c:v>118</c:v>
+                  <c:v>131.8</c:v>
                 </c:pt>
                 <c:pt idx="2">
-                  <c:v>127</c:v>
+                  <c:v>135.2</c:v>
                 </c:pt>
                 <c:pt idx="3">
-                  <c:v>286</c:v>
+                  <c:v>264.25</c:v>
                 </c:pt>
                 <c:pt idx="4">
-                  <c:v>419</c:v>
+                  <c:v>475.95</c:v>
                 </c:pt>
               </c:numCache>
             </c:numRef>
@@ -1596,19 +1578,19 @@
                 <c:formatCode>General</c:formatCode>
                 <c:ptCount val="5"/>
                 <c:pt idx="0">
-                  <c:v>66</c:v>
+                  <c:v>65.6</c:v>
                 </c:pt>
                 <c:pt idx="1">
-                  <c:v>120</c:v>
+                  <c:v>132.75</c:v>
                 </c:pt>
                 <c:pt idx="2">
-                  <c:v>126</c:v>
+                  <c:v>134.8</c:v>
                 </c:pt>
                 <c:pt idx="3">
-                  <c:v>284</c:v>
+                  <c:v>264.2</c:v>
                 </c:pt>
                 <c:pt idx="4">
-                  <c:v>419</c:v>
+                  <c:v>475.6</c:v>
                 </c:pt>
               </c:numCache>
             </c:numRef>
@@ -1684,19 +1666,19 @@
                 <c:formatCode>General</c:formatCode>
                 <c:ptCount val="5"/>
                 <c:pt idx="0">
-                  <c:v>66</c:v>
+                  <c:v>65.6</c:v>
                 </c:pt>
                 <c:pt idx="1">
-                  <c:v>119</c:v>
+                  <c:v>134.0</c:v>
                 </c:pt>
                 <c:pt idx="2">
-                  <c:v>127</c:v>
+                  <c:v>131.9</c:v>
                 </c:pt>
                 <c:pt idx="3">
-                  <c:v>287</c:v>
+                  <c:v>263.5</c:v>
                 </c:pt>
                 <c:pt idx="4">
-                  <c:v>418</c:v>
+                  <c:v>474.2</c:v>
                 </c:pt>
               </c:numCache>
             </c:numRef>
@@ -1905,17 +1887,19 @@
               <c:strCache>
                 <c:ptCount val="1"/>
                 <c:pt idx="0">
-                  <c:v>classe 0</c:v>
+                  <c:v>classi che inoltrano</c:v>
                 </c:pt>
               </c:strCache>
             </c:strRef>
           </c:tx>
           <c:spPr>
             <a:solidFill>
-              <a:srgbClr val="C9D3DF"/>
+              <a:srgbClr val="6C819C"/>
             </a:solidFill>
             <a:ln>
-              <a:noFill/>
+              <a:solidFill>
+                <a:srgbClr val="6C819C"/>
+              </a:solidFill>
             </a:ln>
           </c:spPr>
           <c:invertIfNegative val="1"/>
@@ -1949,19 +1933,19 @@
                 <c:formatCode>General</c:formatCode>
                 <c:ptCount val="5"/>
                 <c:pt idx="0">
-                  <c:v>64</c:v>
+                  <c:v>64.95</c:v>
                 </c:pt>
                 <c:pt idx="1">
-                  <c:v>118</c:v>
+                  <c:v>110.05</c:v>
                 </c:pt>
                 <c:pt idx="2">
-                  <c:v>124</c:v>
+                  <c:v>119.2</c:v>
                 </c:pt>
                 <c:pt idx="3">
-                  <c:v>274</c:v>
+                  <c:v>261.675</c:v>
                 </c:pt>
                 <c:pt idx="4">
-                  <c:v>416</c:v>
+                  <c:v>470.875</c:v>
                 </c:pt>
               </c:numCache>
             </c:numRef>
@@ -1993,17 +1977,19 @@
               <c:strCache>
                 <c:ptCount val="1"/>
                 <c:pt idx="0">
-                  <c:v>classe 1</c:v>
+                  <c:v>scarta</c:v>
                 </c:pt>
               </c:strCache>
             </c:strRef>
           </c:tx>
           <c:spPr>
             <a:solidFill>
-              <a:srgbClr val="AEBBCB"/>
+              <a:srgbClr val="C0443C"/>
             </a:solidFill>
             <a:ln>
-              <a:noFill/>
+              <a:solidFill>
+                <a:srgbClr val="C0443C"/>
+              </a:solidFill>
             </a:ln>
           </c:spPr>
           <c:invertIfNegative val="1"/>
@@ -2037,19 +2023,19 @@
                 <c:formatCode>General</c:formatCode>
                 <c:ptCount val="5"/>
                 <c:pt idx="0">
-                  <c:v>66</c:v>
+                  <c:v>65.9</c:v>
                 </c:pt>
                 <c:pt idx="1">
-                  <c:v>118</c:v>
+                  <c:v>181.1</c:v>
                 </c:pt>
                 <c:pt idx="2">
-                  <c:v>126</c:v>
+                  <c:v>184.4</c:v>
                 </c:pt>
                 <c:pt idx="3">
-                  <c:v>245</c:v>
+                  <c:v>317.0</c:v>
                 </c:pt>
                 <c:pt idx="4">
-                  <c:v>418</c:v>
+                  <c:v>590.9</c:v>
                 </c:pt>
               </c:numCache>
             </c:numRef>
@@ -2069,358 +2055,6 @@
             </c:ext>
             <c:ext xmlns:c16="http://schemas.microsoft.com/office/drawing/2014/chart" uri="{C3380CC4-5D6E-409C-BE32-E72D297353CC}">
               <c16:uniqueId val="{00000001-DCC1-41C3-B47A-44DD6F14CF9B}"/>
-            </c:ext>
-          </c:extLst>
-        </c:ser>
-        <c:ser>
-          <c:idx val="2"/>
-          <c:order val="2"/>
-          <c:tx>
-            <c:strRef>
-              <c:f>Sheet1!$D$1</c:f>
-              <c:strCache>
-                <c:ptCount val="1"/>
-                <c:pt idx="0">
-                  <c:v>classe 2</c:v>
-                </c:pt>
-              </c:strCache>
-            </c:strRef>
-          </c:tx>
-          <c:spPr>
-            <a:solidFill>
-              <a:srgbClr val="8E9FB5"/>
-            </a:solidFill>
-            <a:ln>
-              <a:noFill/>
-            </a:ln>
-          </c:spPr>
-          <c:invertIfNegative val="1"/>
-          <c:cat>
-            <c:strRef>
-              <c:f>Sheet1!$A$2:$A$6</c:f>
-              <c:strCache>
-                <c:ptCount val="5"/>
-                <c:pt idx="0">
-                  <c:v>baseline</c:v>
-                </c:pt>
-                <c:pt idx="1">
-                  <c:v>P1 statica</c:v>
-                </c:pt>
-                <c:pt idx="2">
-                  <c:v>P1.5</c:v>
-                </c:pt>
-                <c:pt idx="3">
-                  <c:v>P2</c:v>
-                </c:pt>
-                <c:pt idx="4">
-                  <c:v>P3</c:v>
-                </c:pt>
-              </c:strCache>
-            </c:strRef>
-          </c:cat>
-          <c:val>
-            <c:numRef>
-              <c:f>Sheet1!$D$2:$D$6</c:f>
-              <c:numCache>
-                <c:formatCode>General</c:formatCode>
-                <c:ptCount val="5"/>
-                <c:pt idx="0">
-                  <c:v>65</c:v>
-                </c:pt>
-                <c:pt idx="1">
-                  <c:v>119</c:v>
-                </c:pt>
-                <c:pt idx="2">
-                  <c:v>127</c:v>
-                </c:pt>
-                <c:pt idx="3">
-                  <c:v>268</c:v>
-                </c:pt>
-                <c:pt idx="4">
-                  <c:v>426</c:v>
-                </c:pt>
-              </c:numCache>
-            </c:numRef>
-          </c:val>
-          <c:extLst>
-            <c:ext xmlns:c14="http://schemas.microsoft.com/office/drawing/2007/8/2/chart" uri="{6F2FDCE9-48DA-4B69-8628-5D25D57E5C99}">
-              <c14:invertSolidFillFmt>
-                <c14:spPr xmlns:c14="http://schemas.microsoft.com/office/drawing/2007/8/2/chart">
-                  <a:solidFill>
-                    <a:srgbClr val="FFFFFF"/>
-                  </a:solidFill>
-                  <a:ln>
-                    <a:noFill/>
-                  </a:ln>
-                </c14:spPr>
-              </c14:invertSolidFillFmt>
-            </c:ext>
-            <c:ext xmlns:c16="http://schemas.microsoft.com/office/drawing/2014/chart" uri="{C3380CC4-5D6E-409C-BE32-E72D297353CC}">
-              <c16:uniqueId val="{00000002-DCC1-41C3-B47A-44DD6F14CF9B}"/>
-            </c:ext>
-          </c:extLst>
-        </c:ser>
-        <c:ser>
-          <c:idx val="3"/>
-          <c:order val="3"/>
-          <c:tx>
-            <c:strRef>
-              <c:f>Sheet1!$E$1</c:f>
-              <c:strCache>
-                <c:ptCount val="1"/>
-                <c:pt idx="0">
-                  <c:v>classe 3</c:v>
-                </c:pt>
-              </c:strCache>
-            </c:strRef>
-          </c:tx>
-          <c:spPr>
-            <a:solidFill>
-              <a:srgbClr val="6C819C"/>
-            </a:solidFill>
-            <a:ln>
-              <a:noFill/>
-            </a:ln>
-          </c:spPr>
-          <c:invertIfNegative val="1"/>
-          <c:cat>
-            <c:strRef>
-              <c:f>Sheet1!$A$2:$A$6</c:f>
-              <c:strCache>
-                <c:ptCount val="5"/>
-                <c:pt idx="0">
-                  <c:v>baseline</c:v>
-                </c:pt>
-                <c:pt idx="1">
-                  <c:v>P1 statica</c:v>
-                </c:pt>
-                <c:pt idx="2">
-                  <c:v>P1.5</c:v>
-                </c:pt>
-                <c:pt idx="3">
-                  <c:v>P2</c:v>
-                </c:pt>
-                <c:pt idx="4">
-                  <c:v>P3</c:v>
-                </c:pt>
-              </c:strCache>
-            </c:strRef>
-          </c:cat>
-          <c:val>
-            <c:numRef>
-              <c:f>Sheet1!$E$2:$E$6</c:f>
-              <c:numCache>
-                <c:formatCode>General</c:formatCode>
-                <c:ptCount val="5"/>
-                <c:pt idx="0">
-                  <c:v>64</c:v>
-                </c:pt>
-                <c:pt idx="1">
-                  <c:v>120</c:v>
-                </c:pt>
-                <c:pt idx="2">
-                  <c:v>126</c:v>
-                </c:pt>
-                <c:pt idx="3">
-                  <c:v>262</c:v>
-                </c:pt>
-                <c:pt idx="4">
-                  <c:v>421</c:v>
-                </c:pt>
-              </c:numCache>
-            </c:numRef>
-          </c:val>
-          <c:extLst>
-            <c:ext xmlns:c14="http://schemas.microsoft.com/office/drawing/2007/8/2/chart" uri="{6F2FDCE9-48DA-4B69-8628-5D25D57E5C99}">
-              <c14:invertSolidFillFmt>
-                <c14:spPr xmlns:c14="http://schemas.microsoft.com/office/drawing/2007/8/2/chart">
-                  <a:solidFill>
-                    <a:srgbClr val="FFFFFF"/>
-                  </a:solidFill>
-                  <a:ln>
-                    <a:noFill/>
-                  </a:ln>
-                </c14:spPr>
-              </c14:invertSolidFillFmt>
-            </c:ext>
-            <c:ext xmlns:c16="http://schemas.microsoft.com/office/drawing/2014/chart" uri="{C3380CC4-5D6E-409C-BE32-E72D297353CC}">
-              <c16:uniqueId val="{00000003-DCC1-41C3-B47A-44DD6F14CF9B}"/>
-            </c:ext>
-          </c:extLst>
-        </c:ser>
-        <c:ser>
-          <c:idx val="4"/>
-          <c:order val="4"/>
-          <c:tx>
-            <c:strRef>
-              <c:f>Sheet1!$F$1</c:f>
-              <c:strCache>
-                <c:ptCount val="1"/>
-                <c:pt idx="0">
-                  <c:v>classe 4</c:v>
-                </c:pt>
-              </c:strCache>
-            </c:strRef>
-          </c:tx>
-          <c:spPr>
-            <a:solidFill>
-              <a:srgbClr val="4A6382"/>
-            </a:solidFill>
-            <a:ln>
-              <a:noFill/>
-            </a:ln>
-          </c:spPr>
-          <c:invertIfNegative val="1"/>
-          <c:cat>
-            <c:strRef>
-              <c:f>Sheet1!$A$2:$A$6</c:f>
-              <c:strCache>
-                <c:ptCount val="5"/>
-                <c:pt idx="0">
-                  <c:v>baseline</c:v>
-                </c:pt>
-                <c:pt idx="1">
-                  <c:v>P1 statica</c:v>
-                </c:pt>
-                <c:pt idx="2">
-                  <c:v>P1.5</c:v>
-                </c:pt>
-                <c:pt idx="3">
-                  <c:v>P2</c:v>
-                </c:pt>
-                <c:pt idx="4">
-                  <c:v>P3</c:v>
-                </c:pt>
-              </c:strCache>
-            </c:strRef>
-          </c:cat>
-          <c:val>
-            <c:numRef>
-              <c:f>Sheet1!$F$2:$F$6</c:f>
-              <c:numCache>
-                <c:formatCode>General</c:formatCode>
-                <c:ptCount val="5"/>
-                <c:pt idx="0">
-                  <c:v>65</c:v>
-                </c:pt>
-                <c:pt idx="1">
-                  <c:v>120</c:v>
-                </c:pt>
-                <c:pt idx="2">
-                  <c:v>126</c:v>
-                </c:pt>
-                <c:pt idx="3">
-                  <c:v>266</c:v>
-                </c:pt>
-                <c:pt idx="4">
-                  <c:v>418</c:v>
-                </c:pt>
-              </c:numCache>
-            </c:numRef>
-          </c:val>
-          <c:extLst>
-            <c:ext xmlns:c14="http://schemas.microsoft.com/office/drawing/2007/8/2/chart" uri="{6F2FDCE9-48DA-4B69-8628-5D25D57E5C99}">
-              <c14:invertSolidFillFmt>
-                <c14:spPr xmlns:c14="http://schemas.microsoft.com/office/drawing/2007/8/2/chart">
-                  <a:solidFill>
-                    <a:srgbClr val="FFFFFF"/>
-                  </a:solidFill>
-                  <a:ln>
-                    <a:noFill/>
-                  </a:ln>
-                </c14:spPr>
-              </c14:invertSolidFillFmt>
-            </c:ext>
-            <c:ext xmlns:c16="http://schemas.microsoft.com/office/drawing/2014/chart" uri="{C3380CC4-5D6E-409C-BE32-E72D297353CC}">
-              <c16:uniqueId val="{00000004-DCC1-41C3-B47A-44DD6F14CF9B}"/>
-            </c:ext>
-          </c:extLst>
-        </c:ser>
-        <c:ser>
-          <c:idx val="5"/>
-          <c:order val="5"/>
-          <c:tx>
-            <c:strRef>
-              <c:f>Sheet1!$G$1</c:f>
-              <c:strCache>
-                <c:ptCount val="1"/>
-                <c:pt idx="0">
-                  <c:v>scarta</c:v>
-                </c:pt>
-              </c:strCache>
-            </c:strRef>
-          </c:tx>
-          <c:spPr>
-            <a:solidFill>
-              <a:srgbClr val="C0443C"/>
-            </a:solidFill>
-            <a:ln>
-              <a:noFill/>
-            </a:ln>
-          </c:spPr>
-          <c:invertIfNegative val="1"/>
-          <c:cat>
-            <c:strRef>
-              <c:f>Sheet1!$A$2:$A$6</c:f>
-              <c:strCache>
-                <c:ptCount val="5"/>
-                <c:pt idx="0">
-                  <c:v>baseline</c:v>
-                </c:pt>
-                <c:pt idx="1">
-                  <c:v>P1 statica</c:v>
-                </c:pt>
-                <c:pt idx="2">
-                  <c:v>P1.5</c:v>
-                </c:pt>
-                <c:pt idx="3">
-                  <c:v>P2</c:v>
-                </c:pt>
-                <c:pt idx="4">
-                  <c:v>P3</c:v>
-                </c:pt>
-              </c:strCache>
-            </c:strRef>
-          </c:cat>
-          <c:val>
-            <c:numRef>
-              <c:f>Sheet1!$G$2:$G$6</c:f>
-              <c:numCache>
-                <c:formatCode>General</c:formatCode>
-                <c:ptCount val="5"/>
-                <c:pt idx="0">
-                  <c:v>66</c:v>
-                </c:pt>
-                <c:pt idx="1">
-                  <c:v>166</c:v>
-                </c:pt>
-                <c:pt idx="2">
-                  <c:v>176</c:v>
-                </c:pt>
-                <c:pt idx="3">
-                  <c:v>304</c:v>
-                </c:pt>
-                <c:pt idx="4">
-                  <c:v>467</c:v>
-                </c:pt>
-              </c:numCache>
-            </c:numRef>
-          </c:val>
-          <c:extLst>
-            <c:ext xmlns:c14="http://schemas.microsoft.com/office/drawing/2007/8/2/chart" uri="{6F2FDCE9-48DA-4B69-8628-5D25D57E5C99}">
-              <c14:invertSolidFillFmt>
-                <c14:spPr xmlns:c14="http://schemas.microsoft.com/office/drawing/2007/8/2/chart">
-                  <a:solidFill>
-                    <a:srgbClr val="FFFFFF"/>
-                  </a:solidFill>
-                  <a:ln>
-                    <a:noFill/>
-                  </a:ln>
-                </c14:spPr>
-              </c14:invertSolidFillFmt>
-            </c:ext>
-            <c:ext xmlns:c16="http://schemas.microsoft.com/office/drawing/2014/chart" uri="{C3380CC4-5D6E-409C-BE32-E72D297353CC}">
-              <c16:uniqueId val="{00000005-DCC1-41C3-B47A-44DD6F14CF9B}"/>
             </c:ext>
           </c:extLst>
         </c:ser>
@@ -2637,113 +2271,65 @@
           </c:marker>
           <c:cat>
             <c:strRef>
-              <c:f>Sheet1!$A$2:$A$17</c:f>
+              <c:f>Sheet1!$A$2:$A$9</c:f>
               <c:strCache>
-                <c:ptCount val="16"/>
+                <c:ptCount val="8"/>
                 <c:pt idx="0">
-                  <c:v>0,5</c:v>
+                  <c:v>0,25×</c:v>
                 </c:pt>
                 <c:pt idx="1">
-                  <c:v>1</c:v>
+                  <c:v>0,50×</c:v>
                 </c:pt>
                 <c:pt idx="2">
-                  <c:v>1,5</c:v>
+                  <c:v>0,75×</c:v>
                 </c:pt>
                 <c:pt idx="3">
-                  <c:v>2</c:v>
+                  <c:v>1,00×</c:v>
                 </c:pt>
                 <c:pt idx="4">
-                  <c:v>2,5</c:v>
+                  <c:v>1,25×</c:v>
                 </c:pt>
                 <c:pt idx="5">
-                  <c:v>3</c:v>
+                  <c:v>1,50×</c:v>
                 </c:pt>
                 <c:pt idx="6">
-                  <c:v>3,5</c:v>
+                  <c:v>1,75×</c:v>
                 </c:pt>
                 <c:pt idx="7">
-                  <c:v>4</c:v>
-                </c:pt>
-                <c:pt idx="8">
-                  <c:v>5</c:v>
-                </c:pt>
-                <c:pt idx="9">
-                  <c:v>6</c:v>
-                </c:pt>
-                <c:pt idx="10">
-                  <c:v>7</c:v>
-                </c:pt>
-                <c:pt idx="11">
-                  <c:v>8</c:v>
-                </c:pt>
-                <c:pt idx="12">
-                  <c:v>9</c:v>
-                </c:pt>
-                <c:pt idx="13">
-                  <c:v>10</c:v>
-                </c:pt>
-                <c:pt idx="14">
-                  <c:v>11</c:v>
-                </c:pt>
-                <c:pt idx="15">
-                  <c:v>12</c:v>
+                  <c:v>2,00×</c:v>
                 </c:pt>
               </c:strCache>
             </c:strRef>
           </c:cat>
           <c:val>
             <c:numRef>
-              <c:f>Sheet1!$B$2:$B$17</c:f>
+              <c:f>Sheet1!$B$2:$B$9</c:f>
               <c:numCache>
                 <c:formatCode>General</c:formatCode>
-                <c:ptCount val="16"/>
+                <c:ptCount val="8"/>
                 <c:pt idx="0">
+                  <c:v>0.25</c:v>
+                </c:pt>
+                <c:pt idx="1">
                   <c:v>0.5</c:v>
                 </c:pt>
-                <c:pt idx="1">
-                  <c:v>1</c:v>
-                </c:pt>
                 <c:pt idx="2">
-                  <c:v>1.5</c:v>
+                  <c:v>0.748</c:v>
                 </c:pt>
                 <c:pt idx="3">
-                  <c:v>2</c:v>
+                  <c:v>0.938</c:v>
                 </c:pt>
                 <c:pt idx="4">
-                  <c:v>2.5</c:v>
+                  <c:v>0.962</c:v>
                 </c:pt>
                 <c:pt idx="5">
-                  <c:v>3</c:v>
+                  <c:v>0.963</c:v>
                 </c:pt>
                 <c:pt idx="6">
-                  <c:v>3.5</c:v>
+                  <c:v>0.937</c:v>
                 </c:pt>
                 <c:pt idx="7">
-                  <c:v>4</c:v>
-                </c:pt>
-                <c:pt idx="8">
-                  <c:v>5</c:v>
-                </c:pt>
-                <c:pt idx="9">
-                  <c:v>5.98</c:v>
-                </c:pt>
-                <c:pt idx="10">
-                  <c:v>6.95</c:v>
-                </c:pt>
-                <c:pt idx="11">
-                  <c:v>7.88</c:v>
-                </c:pt>
-                <c:pt idx="12">
-                  <c:v>8.51</c:v>
-                </c:pt>
-                <c:pt idx="13">
-                  <c:v>8.57</c:v>
-                </c:pt>
-                <c:pt idx="14">
-                  <c:v>8.61</c:v>
-                </c:pt>
-                <c:pt idx="15">
-                  <c:v>8.66</c:v>
+                  <c:v>0.949</c:v>
                 </c:pt>
               </c:numCache>
             </c:numRef>
@@ -2792,113 +2378,65 @@
           </c:marker>
           <c:cat>
             <c:strRef>
-              <c:f>Sheet1!$A$2:$A$17</c:f>
+              <c:f>Sheet1!$A$2:$A$9</c:f>
               <c:strCache>
-                <c:ptCount val="16"/>
+                <c:ptCount val="8"/>
                 <c:pt idx="0">
-                  <c:v>0,5</c:v>
+                  <c:v>0,25×</c:v>
                 </c:pt>
                 <c:pt idx="1">
-                  <c:v>1</c:v>
+                  <c:v>0,50×</c:v>
                 </c:pt>
                 <c:pt idx="2">
-                  <c:v>1,5</c:v>
+                  <c:v>0,75×</c:v>
                 </c:pt>
                 <c:pt idx="3">
-                  <c:v>2</c:v>
+                  <c:v>1,00×</c:v>
                 </c:pt>
                 <c:pt idx="4">
-                  <c:v>2,5</c:v>
+                  <c:v>1,25×</c:v>
                 </c:pt>
                 <c:pt idx="5">
-                  <c:v>3</c:v>
+                  <c:v>1,50×</c:v>
                 </c:pt>
                 <c:pt idx="6">
-                  <c:v>3,5</c:v>
+                  <c:v>1,75×</c:v>
                 </c:pt>
                 <c:pt idx="7">
-                  <c:v>4</c:v>
-                </c:pt>
-                <c:pt idx="8">
-                  <c:v>5</c:v>
-                </c:pt>
-                <c:pt idx="9">
-                  <c:v>6</c:v>
-                </c:pt>
-                <c:pt idx="10">
-                  <c:v>7</c:v>
-                </c:pt>
-                <c:pt idx="11">
-                  <c:v>8</c:v>
-                </c:pt>
-                <c:pt idx="12">
-                  <c:v>9</c:v>
-                </c:pt>
-                <c:pt idx="13">
-                  <c:v>10</c:v>
-                </c:pt>
-                <c:pt idx="14">
-                  <c:v>11</c:v>
-                </c:pt>
-                <c:pt idx="15">
-                  <c:v>12</c:v>
+                  <c:v>2,00×</c:v>
                 </c:pt>
               </c:strCache>
             </c:strRef>
           </c:cat>
           <c:val>
             <c:numRef>
-              <c:f>Sheet1!$C$2:$C$17</c:f>
+              <c:f>Sheet1!$C$2:$C$9</c:f>
               <c:numCache>
                 <c:formatCode>General</c:formatCode>
-                <c:ptCount val="16"/>
+                <c:ptCount val="8"/>
                 <c:pt idx="0">
+                  <c:v>0.25</c:v>
+                </c:pt>
+                <c:pt idx="1">
                   <c:v>0.5</c:v>
                 </c:pt>
-                <c:pt idx="1">
-                  <c:v>1</c:v>
-                </c:pt>
                 <c:pt idx="2">
-                  <c:v>1.5</c:v>
+                  <c:v>0.748</c:v>
                 </c:pt>
                 <c:pt idx="3">
-                  <c:v>2</c:v>
+                  <c:v>0.95</c:v>
                 </c:pt>
                 <c:pt idx="4">
-                  <c:v>2.5</c:v>
+                  <c:v>0.965</c:v>
                 </c:pt>
                 <c:pt idx="5">
-                  <c:v>3</c:v>
+                  <c:v>0.964</c:v>
                 </c:pt>
                 <c:pt idx="6">
-                  <c:v>3.5</c:v>
+                  <c:v>0.943</c:v>
                 </c:pt>
                 <c:pt idx="7">
-                  <c:v>4</c:v>
-                </c:pt>
-                <c:pt idx="8">
-                  <c:v>5</c:v>
-                </c:pt>
-                <c:pt idx="9">
-                  <c:v>5.98</c:v>
-                </c:pt>
-                <c:pt idx="10">
-                  <c:v>6.93</c:v>
-                </c:pt>
-                <c:pt idx="11">
-                  <c:v>7.96</c:v>
-                </c:pt>
-                <c:pt idx="12">
-                  <c:v>8.09</c:v>
-                </c:pt>
-                <c:pt idx="13">
-                  <c:v>8.11</c:v>
-                </c:pt>
-                <c:pt idx="14">
-                  <c:v>8.14</c:v>
-                </c:pt>
-                <c:pt idx="15">
-                  <c:v>8.17</c:v>
+                  <c:v>0.949</c:v>
                 </c:pt>
               </c:numCache>
             </c:numRef>
@@ -2947,113 +2485,65 @@
           </c:marker>
           <c:cat>
             <c:strRef>
-              <c:f>Sheet1!$A$2:$A$17</c:f>
+              <c:f>Sheet1!$A$2:$A$9</c:f>
               <c:strCache>
-                <c:ptCount val="16"/>
+                <c:ptCount val="8"/>
                 <c:pt idx="0">
-                  <c:v>0,5</c:v>
+                  <c:v>0,25×</c:v>
                 </c:pt>
                 <c:pt idx="1">
-                  <c:v>1</c:v>
+                  <c:v>0,50×</c:v>
                 </c:pt>
                 <c:pt idx="2">
-                  <c:v>1,5</c:v>
+                  <c:v>0,75×</c:v>
                 </c:pt>
                 <c:pt idx="3">
-                  <c:v>2</c:v>
+                  <c:v>1,00×</c:v>
                 </c:pt>
                 <c:pt idx="4">
-                  <c:v>2,5</c:v>
+                  <c:v>1,25×</c:v>
                 </c:pt>
                 <c:pt idx="5">
-                  <c:v>3</c:v>
+                  <c:v>1,50×</c:v>
                 </c:pt>
                 <c:pt idx="6">
-                  <c:v>3,5</c:v>
+                  <c:v>1,75×</c:v>
                 </c:pt>
                 <c:pt idx="7">
-                  <c:v>4</c:v>
-                </c:pt>
-                <c:pt idx="8">
-                  <c:v>5</c:v>
-                </c:pt>
-                <c:pt idx="9">
-                  <c:v>6</c:v>
-                </c:pt>
-                <c:pt idx="10">
-                  <c:v>7</c:v>
-                </c:pt>
-                <c:pt idx="11">
-                  <c:v>8</c:v>
-                </c:pt>
-                <c:pt idx="12">
-                  <c:v>9</c:v>
-                </c:pt>
-                <c:pt idx="13">
-                  <c:v>10</c:v>
-                </c:pt>
-                <c:pt idx="14">
-                  <c:v>11</c:v>
-                </c:pt>
-                <c:pt idx="15">
-                  <c:v>12</c:v>
+                  <c:v>2,00×</c:v>
                 </c:pt>
               </c:strCache>
             </c:strRef>
           </c:cat>
           <c:val>
             <c:numRef>
-              <c:f>Sheet1!$D$2:$D$17</c:f>
+              <c:f>Sheet1!$D$2:$D$9</c:f>
               <c:numCache>
                 <c:formatCode>General</c:formatCode>
-                <c:ptCount val="16"/>
+                <c:ptCount val="8"/>
                 <c:pt idx="0">
+                  <c:v>0.25</c:v>
+                </c:pt>
+                <c:pt idx="1">
                   <c:v>0.5</c:v>
                 </c:pt>
-                <c:pt idx="1">
-                  <c:v>1</c:v>
-                </c:pt>
                 <c:pt idx="2">
-                  <c:v>1.5</c:v>
+                  <c:v>0.75</c:v>
                 </c:pt>
                 <c:pt idx="3">
-                  <c:v>2</c:v>
+                  <c:v>0.95</c:v>
                 </c:pt>
                 <c:pt idx="4">
-                  <c:v>2.5</c:v>
+                  <c:v>0.968</c:v>
                 </c:pt>
                 <c:pt idx="5">
-                  <c:v>3</c:v>
+                  <c:v>0.966</c:v>
                 </c:pt>
                 <c:pt idx="6">
-                  <c:v>3.4</c:v>
+                  <c:v>0.963</c:v>
                 </c:pt>
                 <c:pt idx="7">
-                  <c:v>3.45</c:v>
-                </c:pt>
-                <c:pt idx="8">
-                  <c:v>3.4</c:v>
-                </c:pt>
-                <c:pt idx="9">
-                  <c:v>3.41</c:v>
-                </c:pt>
-                <c:pt idx="10">
-                  <c:v>3.41</c:v>
-                </c:pt>
-                <c:pt idx="11">
-                  <c:v>3.45</c:v>
-                </c:pt>
-                <c:pt idx="12">
-                  <c:v>3.42</c:v>
-                </c:pt>
-                <c:pt idx="13">
-                  <c:v>3.43</c:v>
-                </c:pt>
-                <c:pt idx="14">
-                  <c:v>3.42</c:v>
-                </c:pt>
-                <c:pt idx="15">
-                  <c:v>3.41</c:v>
+                  <c:v>0.965</c:v>
                 </c:pt>
               </c:numCache>
             </c:numRef>
@@ -3102,113 +2592,65 @@
           </c:marker>
           <c:cat>
             <c:strRef>
-              <c:f>Sheet1!$A$2:$A$17</c:f>
+              <c:f>Sheet1!$A$2:$A$9</c:f>
               <c:strCache>
-                <c:ptCount val="16"/>
+                <c:ptCount val="8"/>
                 <c:pt idx="0">
-                  <c:v>0,5</c:v>
+                  <c:v>0,25×</c:v>
                 </c:pt>
                 <c:pt idx="1">
-                  <c:v>1</c:v>
+                  <c:v>0,50×</c:v>
                 </c:pt>
                 <c:pt idx="2">
-                  <c:v>1,5</c:v>
+                  <c:v>0,75×</c:v>
                 </c:pt>
                 <c:pt idx="3">
-                  <c:v>2</c:v>
+                  <c:v>1,00×</c:v>
                 </c:pt>
                 <c:pt idx="4">
-                  <c:v>2,5</c:v>
+                  <c:v>1,25×</c:v>
                 </c:pt>
                 <c:pt idx="5">
-                  <c:v>3</c:v>
+                  <c:v>1,50×</c:v>
                 </c:pt>
                 <c:pt idx="6">
-                  <c:v>3,5</c:v>
+                  <c:v>1,75×</c:v>
                 </c:pt>
                 <c:pt idx="7">
-                  <c:v>4</c:v>
-                </c:pt>
-                <c:pt idx="8">
-                  <c:v>5</c:v>
-                </c:pt>
-                <c:pt idx="9">
-                  <c:v>6</c:v>
-                </c:pt>
-                <c:pt idx="10">
-                  <c:v>7</c:v>
-                </c:pt>
-                <c:pt idx="11">
-                  <c:v>8</c:v>
-                </c:pt>
-                <c:pt idx="12">
-                  <c:v>9</c:v>
-                </c:pt>
-                <c:pt idx="13">
-                  <c:v>10</c:v>
-                </c:pt>
-                <c:pt idx="14">
-                  <c:v>11</c:v>
-                </c:pt>
-                <c:pt idx="15">
-                  <c:v>12</c:v>
+                  <c:v>2,00×</c:v>
                 </c:pt>
               </c:strCache>
             </c:strRef>
           </c:cat>
           <c:val>
             <c:numRef>
-              <c:f>Sheet1!$E$2:$E$17</c:f>
+              <c:f>Sheet1!$E$2:$E$9</c:f>
               <c:numCache>
                 <c:formatCode>General</c:formatCode>
-                <c:ptCount val="16"/>
+                <c:ptCount val="8"/>
                 <c:pt idx="0">
+                  <c:v>0.25</c:v>
+                </c:pt>
+                <c:pt idx="1">
                   <c:v>0.5</c:v>
                 </c:pt>
-                <c:pt idx="1">
-                  <c:v>1</c:v>
-                </c:pt>
                 <c:pt idx="2">
-                  <c:v>1.5</c:v>
+                  <c:v>0.749</c:v>
                 </c:pt>
                 <c:pt idx="3">
-                  <c:v>2</c:v>
+                  <c:v>0.946</c:v>
                 </c:pt>
                 <c:pt idx="4">
-                  <c:v>2.36</c:v>
+                  <c:v>0.981</c:v>
                 </c:pt>
                 <c:pt idx="5">
-                  <c:v>2.35</c:v>
+                  <c:v>0.99</c:v>
                 </c:pt>
                 <c:pt idx="6">
-                  <c:v>2.37</c:v>
+                  <c:v>0.981</c:v>
                 </c:pt>
                 <c:pt idx="7">
-                  <c:v>2.34</c:v>
-                </c:pt>
-                <c:pt idx="8">
-                  <c:v>2.34</c:v>
-                </c:pt>
-                <c:pt idx="9">
-                  <c:v>2.34</c:v>
-                </c:pt>
-                <c:pt idx="10">
-                  <c:v>2.33</c:v>
-                </c:pt>
-                <c:pt idx="11">
-                  <c:v>2.35</c:v>
-                </c:pt>
-                <c:pt idx="12">
-                  <c:v>2.35</c:v>
-                </c:pt>
-                <c:pt idx="13">
-                  <c:v>2.34</c:v>
-                </c:pt>
-                <c:pt idx="14">
-                  <c:v>2.36</c:v>
-                </c:pt>
-                <c:pt idx="15">
-                  <c:v>2.33</c:v>
+                  <c:v>0.978</c:v>
                 </c:pt>
               </c:numCache>
             </c:numRef>
@@ -3253,7 +2695,7 @@
                     </a:solidFill>
                     <a:latin typeface="Calibri"/>
                   </a:rPr>
-                  <a:t>M pacchetti/s chiesti</a:t>
+                  <a:t>traffico chiesto / capacità</a:t>
                 </a:r>
               </a:p>
             </c:rich>
@@ -3322,7 +2764,7 @@
                     </a:solidFill>
                     <a:latin typeface="Calibri"/>
                   </a:rPr>
-                  <a:t>M pacchetti/s inoltrati</a:t>
+                  <a:t>inoltrati / capacità</a:t>
                 </a:r>
               </a:p>
             </c:rich>
@@ -3451,113 +2893,65 @@
           </c:marker>
           <c:cat>
             <c:strRef>
-              <c:f>Sheet1!$A$2:$A$17</c:f>
+              <c:f>Sheet1!$A$2:$A$9</c:f>
               <c:strCache>
-                <c:ptCount val="16"/>
+                <c:ptCount val="8"/>
                 <c:pt idx="0">
-                  <c:v>0,5</c:v>
+                  <c:v>0,25×</c:v>
                 </c:pt>
                 <c:pt idx="1">
-                  <c:v>1</c:v>
+                  <c:v>0,50×</c:v>
                 </c:pt>
                 <c:pt idx="2">
-                  <c:v>1,5</c:v>
+                  <c:v>0,75×</c:v>
                 </c:pt>
                 <c:pt idx="3">
-                  <c:v>2</c:v>
+                  <c:v>1,00×</c:v>
                 </c:pt>
                 <c:pt idx="4">
-                  <c:v>2,5</c:v>
+                  <c:v>1,25×</c:v>
                 </c:pt>
                 <c:pt idx="5">
-                  <c:v>3</c:v>
+                  <c:v>1,50×</c:v>
                 </c:pt>
                 <c:pt idx="6">
-                  <c:v>3,5</c:v>
+                  <c:v>1,75×</c:v>
                 </c:pt>
                 <c:pt idx="7">
-                  <c:v>4</c:v>
-                </c:pt>
-                <c:pt idx="8">
-                  <c:v>5</c:v>
-                </c:pt>
-                <c:pt idx="9">
-                  <c:v>6</c:v>
-                </c:pt>
-                <c:pt idx="10">
-                  <c:v>7</c:v>
-                </c:pt>
-                <c:pt idx="11">
-                  <c:v>8</c:v>
-                </c:pt>
-                <c:pt idx="12">
-                  <c:v>9</c:v>
-                </c:pt>
-                <c:pt idx="13">
-                  <c:v>10</c:v>
-                </c:pt>
-                <c:pt idx="14">
-                  <c:v>11</c:v>
-                </c:pt>
-                <c:pt idx="15">
-                  <c:v>12</c:v>
+                  <c:v>2,00×</c:v>
                 </c:pt>
               </c:strCache>
             </c:strRef>
           </c:cat>
           <c:val>
             <c:numRef>
-              <c:f>Sheet1!$B$2:$B$17</c:f>
+              <c:f>Sheet1!$B$2:$B$9</c:f>
               <c:numCache>
                 <c:formatCode>General</c:formatCode>
-                <c:ptCount val="16"/>
+                <c:ptCount val="8"/>
                 <c:pt idx="0">
+                  <c:v>0.25</c:v>
+                </c:pt>
+                <c:pt idx="1">
                   <c:v>0.5</c:v>
                 </c:pt>
-                <c:pt idx="1">
-                  <c:v>1</c:v>
-                </c:pt>
                 <c:pt idx="2">
-                  <c:v>1.5</c:v>
+                  <c:v>0.749</c:v>
                 </c:pt>
                 <c:pt idx="3">
-                  <c:v>2</c:v>
+                  <c:v>0.943</c:v>
                 </c:pt>
                 <c:pt idx="4">
-                  <c:v>2.5</c:v>
+                  <c:v>0.956</c:v>
                 </c:pt>
                 <c:pt idx="5">
-                  <c:v>3</c:v>
+                  <c:v>0.958</c:v>
                 </c:pt>
                 <c:pt idx="6">
-                  <c:v>3.5</c:v>
+                  <c:v>0.975</c:v>
                 </c:pt>
                 <c:pt idx="7">
-                  <c:v>4</c:v>
-                </c:pt>
-                <c:pt idx="8">
-                  <c:v>5</c:v>
-                </c:pt>
-                <c:pt idx="9">
-                  <c:v>5.98</c:v>
-                </c:pt>
-                <c:pt idx="10">
-                  <c:v>6.14</c:v>
-                </c:pt>
-                <c:pt idx="11">
-                  <c:v>6.16</c:v>
-                </c:pt>
-                <c:pt idx="12">
-                  <c:v>6.23</c:v>
-                </c:pt>
-                <c:pt idx="13">
-                  <c:v>6.18</c:v>
-                </c:pt>
-                <c:pt idx="14">
-                  <c:v>6.22</c:v>
-                </c:pt>
-                <c:pt idx="15">
-                  <c:v>6.24</c:v>
+                  <c:v>0.978</c:v>
                 </c:pt>
               </c:numCache>
             </c:numRef>
@@ -3606,113 +3000,65 @@
           </c:marker>
           <c:cat>
             <c:strRef>
-              <c:f>Sheet1!$A$2:$A$17</c:f>
+              <c:f>Sheet1!$A$2:$A$9</c:f>
               <c:strCache>
-                <c:ptCount val="16"/>
+                <c:ptCount val="8"/>
                 <c:pt idx="0">
-                  <c:v>0,5</c:v>
+                  <c:v>0,25×</c:v>
                 </c:pt>
                 <c:pt idx="1">
-                  <c:v>1</c:v>
+                  <c:v>0,50×</c:v>
                 </c:pt>
                 <c:pt idx="2">
-                  <c:v>1,5</c:v>
+                  <c:v>0,75×</c:v>
                 </c:pt>
                 <c:pt idx="3">
-                  <c:v>2</c:v>
+                  <c:v>1,00×</c:v>
                 </c:pt>
                 <c:pt idx="4">
-                  <c:v>2,5</c:v>
+                  <c:v>1,25×</c:v>
                 </c:pt>
                 <c:pt idx="5">
-                  <c:v>3</c:v>
+                  <c:v>1,50×</c:v>
                 </c:pt>
                 <c:pt idx="6">
-                  <c:v>3,5</c:v>
+                  <c:v>1,75×</c:v>
                 </c:pt>
                 <c:pt idx="7">
-                  <c:v>4</c:v>
-                </c:pt>
-                <c:pt idx="8">
-                  <c:v>5</c:v>
-                </c:pt>
-                <c:pt idx="9">
-                  <c:v>6</c:v>
-                </c:pt>
-                <c:pt idx="10">
-                  <c:v>7</c:v>
-                </c:pt>
-                <c:pt idx="11">
-                  <c:v>8</c:v>
-                </c:pt>
-                <c:pt idx="12">
-                  <c:v>9</c:v>
-                </c:pt>
-                <c:pt idx="13">
-                  <c:v>10</c:v>
-                </c:pt>
-                <c:pt idx="14">
-                  <c:v>11</c:v>
-                </c:pt>
-                <c:pt idx="15">
-                  <c:v>12</c:v>
+                  <c:v>2,00×</c:v>
                 </c:pt>
               </c:strCache>
             </c:strRef>
           </c:cat>
           <c:val>
             <c:numRef>
-              <c:f>Sheet1!$C$2:$C$17</c:f>
+              <c:f>Sheet1!$C$2:$C$9</c:f>
               <c:numCache>
                 <c:formatCode>General</c:formatCode>
-                <c:ptCount val="16"/>
+                <c:ptCount val="8"/>
                 <c:pt idx="0">
+                  <c:v>0.25</c:v>
+                </c:pt>
+                <c:pt idx="1">
                   <c:v>0.5</c:v>
                 </c:pt>
-                <c:pt idx="1">
-                  <c:v>1</c:v>
-                </c:pt>
                 <c:pt idx="2">
-                  <c:v>1.5</c:v>
+                  <c:v>0.75</c:v>
                 </c:pt>
                 <c:pt idx="3">
-                  <c:v>2</c:v>
+                  <c:v>0.957</c:v>
                 </c:pt>
                 <c:pt idx="4">
-                  <c:v>2.5</c:v>
+                  <c:v>0.972</c:v>
                 </c:pt>
                 <c:pt idx="5">
-                  <c:v>3</c:v>
+                  <c:v>0.973</c:v>
                 </c:pt>
                 <c:pt idx="6">
-                  <c:v>3.5</c:v>
+                  <c:v>0.977</c:v>
                 </c:pt>
                 <c:pt idx="7">
-                  <c:v>4</c:v>
-                </c:pt>
-                <c:pt idx="8">
-                  <c:v>5</c:v>
-                </c:pt>
-                <c:pt idx="9">
-                  <c:v>5.64</c:v>
-                </c:pt>
-                <c:pt idx="10">
-                  <c:v>5.71</c:v>
-                </c:pt>
-                <c:pt idx="11">
-                  <c:v>5.74</c:v>
-                </c:pt>
-                <c:pt idx="12">
-                  <c:v>5.76</c:v>
-                </c:pt>
-                <c:pt idx="13">
-                  <c:v>5.77</c:v>
-                </c:pt>
-                <c:pt idx="14">
-                  <c:v>5.78</c:v>
-                </c:pt>
-                <c:pt idx="15">
-                  <c:v>5.81</c:v>
+                  <c:v>0.981</c:v>
                 </c:pt>
               </c:numCache>
             </c:numRef>
@@ -3761,113 +3107,65 @@
           </c:marker>
           <c:cat>
             <c:strRef>
-              <c:f>Sheet1!$A$2:$A$17</c:f>
+              <c:f>Sheet1!$A$2:$A$9</c:f>
               <c:strCache>
-                <c:ptCount val="16"/>
+                <c:ptCount val="8"/>
                 <c:pt idx="0">
-                  <c:v>0,5</c:v>
+                  <c:v>0,25×</c:v>
                 </c:pt>
                 <c:pt idx="1">
-                  <c:v>1</c:v>
+                  <c:v>0,50×</c:v>
                 </c:pt>
                 <c:pt idx="2">
-                  <c:v>1,5</c:v>
+                  <c:v>0,75×</c:v>
                 </c:pt>
                 <c:pt idx="3">
-                  <c:v>2</c:v>
+                  <c:v>1,00×</c:v>
                 </c:pt>
                 <c:pt idx="4">
-                  <c:v>2,5</c:v>
+                  <c:v>1,25×</c:v>
                 </c:pt>
                 <c:pt idx="5">
-                  <c:v>3</c:v>
+                  <c:v>1,50×</c:v>
                 </c:pt>
                 <c:pt idx="6">
-                  <c:v>3,5</c:v>
+                  <c:v>1,75×</c:v>
                 </c:pt>
                 <c:pt idx="7">
-                  <c:v>4</c:v>
-                </c:pt>
-                <c:pt idx="8">
-                  <c:v>5</c:v>
-                </c:pt>
-                <c:pt idx="9">
-                  <c:v>6</c:v>
-                </c:pt>
-                <c:pt idx="10">
-                  <c:v>7</c:v>
-                </c:pt>
-                <c:pt idx="11">
-                  <c:v>8</c:v>
-                </c:pt>
-                <c:pt idx="12">
-                  <c:v>9</c:v>
-                </c:pt>
-                <c:pt idx="13">
-                  <c:v>10</c:v>
-                </c:pt>
-                <c:pt idx="14">
-                  <c:v>11</c:v>
-                </c:pt>
-                <c:pt idx="15">
-                  <c:v>12</c:v>
+                  <c:v>2,00×</c:v>
                 </c:pt>
               </c:strCache>
             </c:strRef>
           </c:cat>
           <c:val>
             <c:numRef>
-              <c:f>Sheet1!$D$2:$D$17</c:f>
+              <c:f>Sheet1!$D$2:$D$9</c:f>
               <c:numCache>
                 <c:formatCode>General</c:formatCode>
-                <c:ptCount val="16"/>
+                <c:ptCount val="8"/>
                 <c:pt idx="0">
+                  <c:v>0.25</c:v>
+                </c:pt>
+                <c:pt idx="1">
                   <c:v>0.5</c:v>
                 </c:pt>
-                <c:pt idx="1">
-                  <c:v>1</c:v>
-                </c:pt>
                 <c:pt idx="2">
-                  <c:v>1.5</c:v>
+                  <c:v>0.75</c:v>
                 </c:pt>
                 <c:pt idx="3">
-                  <c:v>2</c:v>
+                  <c:v>0.955</c:v>
                 </c:pt>
                 <c:pt idx="4">
-                  <c:v>2.5</c:v>
+                  <c:v>0.973</c:v>
                 </c:pt>
                 <c:pt idx="5">
-                  <c:v>2.76</c:v>
+                  <c:v>0.973</c:v>
                 </c:pt>
                 <c:pt idx="6">
-                  <c:v>2.76</c:v>
+                  <c:v>0.973</c:v>
                 </c:pt>
                 <c:pt idx="7">
-                  <c:v>2.76</c:v>
-                </c:pt>
-                <c:pt idx="8">
-                  <c:v>2.77</c:v>
-                </c:pt>
-                <c:pt idx="9">
-                  <c:v>2.78</c:v>
-                </c:pt>
-                <c:pt idx="10">
-                  <c:v>2.78</c:v>
-                </c:pt>
-                <c:pt idx="11">
-                  <c:v>2.78</c:v>
-                </c:pt>
-                <c:pt idx="12">
-                  <c:v>2.79</c:v>
-                </c:pt>
-                <c:pt idx="13">
-                  <c:v>2.81</c:v>
-                </c:pt>
-                <c:pt idx="14">
-                  <c:v>2.8</c:v>
-                </c:pt>
-                <c:pt idx="15">
-                  <c:v>2.79</c:v>
+                  <c:v>0.974</c:v>
                 </c:pt>
               </c:numCache>
             </c:numRef>
@@ -3916,113 +3214,65 @@
           </c:marker>
           <c:cat>
             <c:strRef>
-              <c:f>Sheet1!$A$2:$A$17</c:f>
+              <c:f>Sheet1!$A$2:$A$9</c:f>
               <c:strCache>
-                <c:ptCount val="16"/>
+                <c:ptCount val="8"/>
                 <c:pt idx="0">
-                  <c:v>0,5</c:v>
+                  <c:v>0,25×</c:v>
                 </c:pt>
                 <c:pt idx="1">
-                  <c:v>1</c:v>
+                  <c:v>0,50×</c:v>
                 </c:pt>
                 <c:pt idx="2">
-                  <c:v>1,5</c:v>
+                  <c:v>0,75×</c:v>
                 </c:pt>
                 <c:pt idx="3">
-                  <c:v>2</c:v>
+                  <c:v>1,00×</c:v>
                 </c:pt>
                 <c:pt idx="4">
-                  <c:v>2,5</c:v>
+                  <c:v>1,25×</c:v>
                 </c:pt>
                 <c:pt idx="5">
-                  <c:v>3</c:v>
+                  <c:v>1,50×</c:v>
                 </c:pt>
                 <c:pt idx="6">
-                  <c:v>3,5</c:v>
+                  <c:v>1,75×</c:v>
                 </c:pt>
                 <c:pt idx="7">
-                  <c:v>4</c:v>
-                </c:pt>
-                <c:pt idx="8">
-                  <c:v>5</c:v>
-                </c:pt>
-                <c:pt idx="9">
-                  <c:v>6</c:v>
-                </c:pt>
-                <c:pt idx="10">
-                  <c:v>7</c:v>
-                </c:pt>
-                <c:pt idx="11">
-                  <c:v>8</c:v>
-                </c:pt>
-                <c:pt idx="12">
-                  <c:v>9</c:v>
-                </c:pt>
-                <c:pt idx="13">
-                  <c:v>10</c:v>
-                </c:pt>
-                <c:pt idx="14">
-                  <c:v>11</c:v>
-                </c:pt>
-                <c:pt idx="15">
-                  <c:v>12</c:v>
+                  <c:v>2,00×</c:v>
                 </c:pt>
               </c:strCache>
             </c:strRef>
           </c:cat>
           <c:val>
             <c:numRef>
-              <c:f>Sheet1!$E$2:$E$17</c:f>
+              <c:f>Sheet1!$E$2:$E$9</c:f>
               <c:numCache>
                 <c:formatCode>General</c:formatCode>
-                <c:ptCount val="16"/>
+                <c:ptCount val="8"/>
                 <c:pt idx="0">
+                  <c:v>0.25</c:v>
+                </c:pt>
+                <c:pt idx="1">
                   <c:v>0.5</c:v>
                 </c:pt>
-                <c:pt idx="1">
-                  <c:v>1</c:v>
-                </c:pt>
                 <c:pt idx="2">
-                  <c:v>1.5</c:v>
+                  <c:v>0.75</c:v>
                 </c:pt>
                 <c:pt idx="3">
-                  <c:v>1.9</c:v>
+                  <c:v>0.921</c:v>
                 </c:pt>
                 <c:pt idx="4">
-                  <c:v>1.9</c:v>
+                  <c:v>0.973</c:v>
                 </c:pt>
                 <c:pt idx="5">
-                  <c:v>1.91</c:v>
+                  <c:v>0.975</c:v>
                 </c:pt>
                 <c:pt idx="6">
-                  <c:v>1.91</c:v>
+                  <c:v>0.974</c:v>
                 </c:pt>
                 <c:pt idx="7">
-                  <c:v>1.9</c:v>
-                </c:pt>
-                <c:pt idx="8">
-                  <c:v>1.92</c:v>
-                </c:pt>
-                <c:pt idx="9">
-                  <c:v>1.92</c:v>
-                </c:pt>
-                <c:pt idx="10">
-                  <c:v>1.92</c:v>
-                </c:pt>
-                <c:pt idx="11">
-                  <c:v>1.92</c:v>
-                </c:pt>
-                <c:pt idx="12">
-                  <c:v>1.92</c:v>
-                </c:pt>
-                <c:pt idx="13">
-                  <c:v>1.93</c:v>
-                </c:pt>
-                <c:pt idx="14">
-                  <c:v>1.92</c:v>
-                </c:pt>
-                <c:pt idx="15">
-                  <c:v>1.93</c:v>
+                  <c:v>0.976</c:v>
                 </c:pt>
               </c:numCache>
             </c:numRef>
@@ -4067,7 +3317,7 @@
                     </a:solidFill>
                     <a:latin typeface="Calibri"/>
                   </a:rPr>
-                  <a:t>M pacchetti/s chiesti</a:t>
+                  <a:t>traffico chiesto / capacità</a:t>
                 </a:r>
               </a:p>
             </c:rich>
@@ -4136,7 +3386,7 @@
                     </a:solidFill>
                     <a:latin typeface="Calibri"/>
                   </a:rPr>
-                  <a:t>M pacchetti/s inoltrati</a:t>
+                  <a:t>inoltrati / capacità</a:t>
                 </a:r>
               </a:p>
             </c:rich>
@@ -4265,9 +3515,9 @@
           </c:marker>
           <c:cat>
             <c:strRef>
-              <c:f>Sheet1!$A$2:$A$7</c:f>
+              <c:f>Sheet1!$A$2:$A$6</c:f>
               <c:strCache>
-                <c:ptCount val="6"/>
+                <c:ptCount val="5"/>
                 <c:pt idx="0">
                   <c:v>1</c:v>
                 </c:pt>
@@ -4281,9 +3531,6 @@
                   <c:v>4</c:v>
                 </c:pt>
                 <c:pt idx="4">
-                  <c:v>5</c:v>
-                </c:pt>
-                <c:pt idx="5">
                   <c:v>6</c:v>
                 </c:pt>
               </c:strCache>
@@ -4291,27 +3538,24 @@
           </c:cat>
           <c:val>
             <c:numRef>
-              <c:f>Sheet1!$B$2:$B$7</c:f>
+              <c:f>Sheet1!$B$2:$B$6</c:f>
               <c:numCache>
                 <c:formatCode>General</c:formatCode>
-                <c:ptCount val="6"/>
+                <c:ptCount val="5"/>
                 <c:pt idx="0">
-                  <c:v>113</c:v>
+                  <c:v>102.9</c:v>
                 </c:pt>
                 <c:pt idx="1">
-                  <c:v>116</c:v>
+                  <c:v>112.75</c:v>
                 </c:pt>
                 <c:pt idx="2">
-                  <c:v>119</c:v>
+                  <c:v>115.7</c:v>
                 </c:pt>
                 <c:pt idx="3">
-                  <c:v>124</c:v>
+                  <c:v>120.8</c:v>
                 </c:pt>
                 <c:pt idx="4">
-                  <c:v>125</c:v>
-                </c:pt>
-                <c:pt idx="5">
-                  <c:v>132</c:v>
+                  <c:v>132.8</c:v>
                 </c:pt>
               </c:numCache>
             </c:numRef>
@@ -4360,9 +3604,9 @@
           </c:marker>
           <c:cat>
             <c:strRef>
-              <c:f>Sheet1!$A$2:$A$7</c:f>
+              <c:f>Sheet1!$A$2:$A$6</c:f>
               <c:strCache>
-                <c:ptCount val="6"/>
+                <c:ptCount val="5"/>
                 <c:pt idx="0">
                   <c:v>1</c:v>
                 </c:pt>
@@ -4376,9 +3620,6 @@
                   <c:v>4</c:v>
                 </c:pt>
                 <c:pt idx="4">
-                  <c:v>5</c:v>
-                </c:pt>
-                <c:pt idx="5">
                   <c:v>6</c:v>
                 </c:pt>
               </c:strCache>
@@ -4386,27 +3627,24 @@
           </c:cat>
           <c:val>
             <c:numRef>
-              <c:f>Sheet1!$C$2:$C$7</c:f>
+              <c:f>Sheet1!$C$2:$C$6</c:f>
               <c:numCache>
                 <c:formatCode>General</c:formatCode>
-                <c:ptCount val="6"/>
+                <c:ptCount val="5"/>
                 <c:pt idx="0">
-                  <c:v>121</c:v>
+                  <c:v>111.2</c:v>
                 </c:pt>
                 <c:pt idx="1">
-                  <c:v>128</c:v>
+                  <c:v>118.4</c:v>
                 </c:pt>
                 <c:pt idx="2">
-                  <c:v>131</c:v>
+                  <c:v>116.3</c:v>
                 </c:pt>
                 <c:pt idx="3">
-                  <c:v>132</c:v>
+                  <c:v>127.65</c:v>
                 </c:pt>
                 <c:pt idx="4">
-                  <c:v>134</c:v>
-                </c:pt>
-                <c:pt idx="5">
-                  <c:v>138</c:v>
+                  <c:v>133.3</c:v>
                 </c:pt>
               </c:numCache>
             </c:numRef>
@@ -4455,9 +3693,9 @@
           </c:marker>
           <c:cat>
             <c:strRef>
-              <c:f>Sheet1!$A$2:$A$7</c:f>
+              <c:f>Sheet1!$A$2:$A$6</c:f>
               <c:strCache>
-                <c:ptCount val="6"/>
+                <c:ptCount val="5"/>
                 <c:pt idx="0">
                   <c:v>1</c:v>
                 </c:pt>
@@ -4471,9 +3709,6 @@
                   <c:v>4</c:v>
                 </c:pt>
                 <c:pt idx="4">
-                  <c:v>5</c:v>
-                </c:pt>
-                <c:pt idx="5">
                   <c:v>6</c:v>
                 </c:pt>
               </c:strCache>
@@ -4481,27 +3716,24 @@
           </c:cat>
           <c:val>
             <c:numRef>
-              <c:f>Sheet1!$D$2:$D$7</c:f>
+              <c:f>Sheet1!$D$2:$D$6</c:f>
               <c:numCache>
                 <c:formatCode>General</c:formatCode>
-                <c:ptCount val="6"/>
+                <c:ptCount val="5"/>
                 <c:pt idx="0">
-                  <c:v>264</c:v>
+                  <c:v>251.0</c:v>
                 </c:pt>
                 <c:pt idx="1">
-                  <c:v>287</c:v>
+                  <c:v>266.0</c:v>
                 </c:pt>
                 <c:pt idx="2">
-                  <c:v>329</c:v>
+                  <c:v>308.0</c:v>
                 </c:pt>
                 <c:pt idx="3">
-                  <c:v>344</c:v>
+                  <c:v>311.8</c:v>
                 </c:pt>
                 <c:pt idx="4">
-                  <c:v>368</c:v>
-                </c:pt>
-                <c:pt idx="5">
-                  <c:v>396</c:v>
+                  <c:v>349.75</c:v>
                 </c:pt>
               </c:numCache>
             </c:numRef>
@@ -4550,9 +3782,9 @@
           </c:marker>
           <c:cat>
             <c:strRef>
-              <c:f>Sheet1!$A$2:$A$7</c:f>
+              <c:f>Sheet1!$A$2:$A$6</c:f>
               <c:strCache>
-                <c:ptCount val="6"/>
+                <c:ptCount val="5"/>
                 <c:pt idx="0">
                   <c:v>1</c:v>
                 </c:pt>
@@ -4566,9 +3798,6 @@
                   <c:v>4</c:v>
                 </c:pt>
                 <c:pt idx="4">
-                  <c:v>5</c:v>
-                </c:pt>
-                <c:pt idx="5">
                   <c:v>6</c:v>
                 </c:pt>
               </c:strCache>
@@ -4576,27 +3805,24 @@
           </c:cat>
           <c:val>
             <c:numRef>
-              <c:f>Sheet1!$E$2:$E$7</c:f>
+              <c:f>Sheet1!$E$2:$E$6</c:f>
               <c:numCache>
                 <c:formatCode>General</c:formatCode>
-                <c:ptCount val="6"/>
+                <c:ptCount val="5"/>
                 <c:pt idx="0">
-                  <c:v>351</c:v>
+                  <c:v>365.3</c:v>
                 </c:pt>
                 <c:pt idx="1">
-                  <c:v>421</c:v>
+                  <c:v>429.45</c:v>
                 </c:pt>
                 <c:pt idx="2">
-                  <c:v>486</c:v>
+                  <c:v>482.8</c:v>
                 </c:pt>
                 <c:pt idx="3">
-                  <c:v>545</c:v>
+                  <c:v>542.05</c:v>
                 </c:pt>
                 <c:pt idx="4">
-                  <c:v>595</c:v>
-                </c:pt>
-                <c:pt idx="5">
-                  <c:v>652</c:v>
+                  <c:v>626.7</c:v>
                 </c:pt>
               </c:numCache>
             </c:numRef>
@@ -4861,13 +4087,13 @@
                 <c:formatCode>General</c:formatCode>
                 <c:ptCount val="3"/>
                 <c:pt idx="0">
-                  <c:v>113</c:v>
+                  <c:v>1.0</c:v>
                 </c:pt>
                 <c:pt idx="1">
-                  <c:v>104</c:v>
+                  <c:v>0.923</c:v>
                 </c:pt>
                 <c:pt idx="2">
-                  <c:v>95</c:v>
+                  <c:v>0.774</c:v>
                 </c:pt>
               </c:numCache>
             </c:numRef>
@@ -4938,13 +4164,13 @@
                 <c:formatCode>General</c:formatCode>
                 <c:ptCount val="3"/>
                 <c:pt idx="0">
-                  <c:v>120</c:v>
+                  <c:v>1.0</c:v>
                 </c:pt>
                 <c:pt idx="1">
-                  <c:v>112</c:v>
+                  <c:v>0.959</c:v>
                 </c:pt>
                 <c:pt idx="2">
-                  <c:v>106</c:v>
+                  <c:v>0.827</c:v>
                 </c:pt>
               </c:numCache>
             </c:numRef>
@@ -5015,13 +4241,13 @@
                 <c:formatCode>General</c:formatCode>
                 <c:ptCount val="3"/>
                 <c:pt idx="0">
-                  <c:v>295</c:v>
+                  <c:v>1.0</c:v>
                 </c:pt>
                 <c:pt idx="1">
-                  <c:v>298</c:v>
+                  <c:v>1.0</c:v>
                 </c:pt>
                 <c:pt idx="2">
-                  <c:v>298</c:v>
+                  <c:v>1.003</c:v>
                 </c:pt>
               </c:numCache>
             </c:numRef>
@@ -5092,13 +4318,13 @@
                 <c:formatCode>General</c:formatCode>
                 <c:ptCount val="3"/>
                 <c:pt idx="0">
-                  <c:v>420</c:v>
+                  <c:v>1.0</c:v>
                 </c:pt>
                 <c:pt idx="1">
-                  <c:v>424</c:v>
+                  <c:v>1.001</c:v>
                 </c:pt>
                 <c:pt idx="2">
-                  <c:v>423</c:v>
+                  <c:v>0.999</c:v>
                 </c:pt>
               </c:numCache>
             </c:numRef>
@@ -5212,7 +4438,7 @@
                     </a:solidFill>
                     <a:latin typeface="Calibri"/>
                   </a:rPr>
-                  <a:t>ns di CPU per pacchetto</a:t>
+                  <a:t>tempo del nodo / modello denso</a:t>
                 </a:r>
               </a:p>
             </c:rich>
@@ -5358,19 +4584,19 @@
                 <c:formatCode>General</c:formatCode>
                 <c:ptCount val="5"/>
                 <c:pt idx="0">
-                  <c:v>15.27</c:v>
+                  <c:v>14.97</c:v>
                 </c:pt>
                 <c:pt idx="1">
-                  <c:v>8.56</c:v>
+                  <c:v>8.746</c:v>
                 </c:pt>
                 <c:pt idx="2">
-                  <c:v>8.04</c:v>
+                  <c:v>8.318</c:v>
                 </c:pt>
                 <c:pt idx="3">
-                  <c:v>3.45</c:v>
+                  <c:v>3.508</c:v>
                 </c:pt>
                 <c:pt idx="4">
-                  <c:v>2.36</c:v>
+                  <c:v>2.165</c:v>
                 </c:pt>
               </c:numCache>
             </c:numRef>
@@ -5446,19 +4672,19 @@
                 <c:formatCode>General</c:formatCode>
                 <c:ptCount val="5"/>
                 <c:pt idx="0">
-                  <c:v>9.39</c:v>
+                  <c:v>9.429</c:v>
                 </c:pt>
                 <c:pt idx="1">
-                  <c:v>6.35</c:v>
+                  <c:v>6.713</c:v>
                 </c:pt>
                 <c:pt idx="2">
-                  <c:v>5.84</c:v>
+                  <c:v>6.143</c:v>
                 </c:pt>
                 <c:pt idx="3">
-                  <c:v>2.83</c:v>
+                  <c:v>2.875</c:v>
                 </c:pt>
                 <c:pt idx="4">
-                  <c:v>1.94</c:v>
+                  <c:v>1.78</c:v>
                 </c:pt>
               </c:numCache>
             </c:numRef>
@@ -5534,19 +4760,19 @@
                 <c:formatCode>General</c:formatCode>
                 <c:ptCount val="5"/>
                 <c:pt idx="0">
-                  <c:v>3.29</c:v>
+                  <c:v>3.898</c:v>
                 </c:pt>
                 <c:pt idx="1">
-                  <c:v>3.1</c:v>
+                  <c:v>2.998</c:v>
                 </c:pt>
                 <c:pt idx="2">
-                  <c:v>2.91</c:v>
+                  <c:v>2.895</c:v>
                 </c:pt>
                 <c:pt idx="3">
-                  <c:v>1.57</c:v>
+                  <c:v>1.578</c:v>
                 </c:pt>
                 <c:pt idx="4">
-                  <c:v>1.1</c:v>
+                  <c:v>1.025</c:v>
                 </c:pt>
               </c:numCache>
             </c:numRef>
@@ -5812,19 +5038,19 @@
                 <c:formatCode>General</c:formatCode>
                 <c:ptCount val="5"/>
                 <c:pt idx="0">
-                  <c:v>66</c:v>
+                  <c:v>66.85</c:v>
                 </c:pt>
                 <c:pt idx="1">
-                  <c:v>117</c:v>
+                  <c:v>114.4</c:v>
                 </c:pt>
                 <c:pt idx="2">
-                  <c:v>124</c:v>
+                  <c:v>120.35</c:v>
                 </c:pt>
                 <c:pt idx="3">
-                  <c:v>290</c:v>
+                  <c:v>285.15</c:v>
                 </c:pt>
                 <c:pt idx="4">
-                  <c:v>425</c:v>
+                  <c:v>462.0</c:v>
                 </c:pt>
               </c:numCache>
             </c:numRef>
@@ -5900,19 +5126,19 @@
                 <c:formatCode>General</c:formatCode>
                 <c:ptCount val="5"/>
                 <c:pt idx="0">
-                  <c:v>106</c:v>
+                  <c:v>106.05</c:v>
                 </c:pt>
                 <c:pt idx="1">
-                  <c:v>158</c:v>
+                  <c:v>149.0</c:v>
                 </c:pt>
                 <c:pt idx="2">
-                  <c:v>171</c:v>
+                  <c:v>162.8</c:v>
                 </c:pt>
                 <c:pt idx="3">
-                  <c:v>354</c:v>
+                  <c:v>347.8</c:v>
                 </c:pt>
                 <c:pt idx="4">
-                  <c:v>515</c:v>
+                  <c:v>561.85</c:v>
                 </c:pt>
               </c:numCache>
             </c:numRef>
@@ -5988,19 +5214,19 @@
                 <c:formatCode>General</c:formatCode>
                 <c:ptCount val="5"/>
                 <c:pt idx="0">
-                  <c:v>283</c:v>
+                  <c:v>256.6</c:v>
                 </c:pt>
                 <c:pt idx="1">
-                  <c:v>322</c:v>
+                  <c:v>333.6</c:v>
                 </c:pt>
                 <c:pt idx="2">
-                  <c:v>343</c:v>
+                  <c:v>345.45</c:v>
                 </c:pt>
                 <c:pt idx="3">
-                  <c:v>636</c:v>
+                  <c:v>633.8</c:v>
                 </c:pt>
                 <c:pt idx="4">
-                  <c:v>908</c:v>
+                  <c:v>976.0</c:v>
                 </c:pt>
               </c:numCache>
             </c:numRef>
@@ -6656,20 +5882,24 @@
               <c:strCache>
                 <c:ptCount val="4"/>
                 <c:pt idx="0">
-                  <c:v>P2: compila il
-programma (una volta)</c:v>
+                  <c:v>P2: compila
+(una volta)
+1 572 ms</c:v>
                 </c:pt>
                 <c:pt idx="1">
-                  <c:v>P1: genera e
-compila (clang)</c:v>
+                  <c:v>P1: genera
+e compila
+49 ms</c:v>
                 </c:pt>
                 <c:pt idx="2">
                   <c:v>P1: carica
-sul nodo</c:v>
+sul nodo
+0,6 ms</c:v>
                 </c:pt>
                 <c:pt idx="3">
                   <c:v>P2 / P3:
-scrive la tabella</c:v>
+la tabella
+0,3 ms</c:v>
                 </c:pt>
               </c:strCache>
             </c:strRef>
@@ -6681,16 +5911,16 @@
                 <c:formatCode>General</c:formatCode>
                 <c:ptCount val="4"/>
                 <c:pt idx="0">
-                  <c:v>1524</c:v>
+                  <c:v>1571.822</c:v>
                 </c:pt>
                 <c:pt idx="1">
-                  <c:v>78</c:v>
+                  <c:v>49.061</c:v>
                 </c:pt>
                 <c:pt idx="2">
-                  <c:v>1.1</c:v>
+                  <c:v>0.639</c:v>
                 </c:pt>
                 <c:pt idx="3">
-                  <c:v>10</c:v>
+                  <c:v>0.314</c:v>
                 </c:pt>
               </c:numCache>
             </c:numRef>
@@ -6713,29 +5943,6 @@
             </c:ext>
           </c:extLst>
         </c:ser>
-        <c:dLbls>
-          <c:numFmt formatCode="0.#" sourceLinked="0"/>
-          <c:txPr>
-            <a:bodyPr/>
-            <a:lstStyle/>
-            <a:p>
-              <a:pPr>
-                <a:defRPr sz="800">
-                  <a:solidFill>
-                    <a:srgbClr val="4A5568"/>
-                  </a:solidFill>
-                </a:defRPr>
-              </a:pPr>
-            </a:p>
-          </c:txPr>
-          <c:dLblPos val="outEnd"/>
-          <c:showLegendKey val="0"/>
-          <c:showVal val="1"/>
-          <c:showCatName val="0"/>
-          <c:showSerName val="0"/>
-          <c:showPercent val="0"/>
-          <c:showBubbleSize val="0"/>
-        </c:dLbls>
         <c:gapWidth val="55"/>
         <c:overlap val="-5"/>
         <c:axId val="-2068027336"/>
@@ -6786,6 +5993,7 @@
         <c:scaling>
           <c:logBase val="10"/>
           <c:orientation val="minMax"/>
+          <c:min val="0.01"/>
         </c:scaling>
         <c:delete val="0"/>
         <c:axPos val="l"/>
@@ -6818,7 +6026,7 @@
           </c:tx>
           <c:overlay val="0"/>
         </c:title>
-        <c:numFmt formatCode="#,##0" sourceLinked="0"/>
+        <c:numFmt formatCode="General" sourceLinked="0"/>
         <c:majorTickMark val="out"/>
         <c:minorTickMark val="none"/>
         <c:tickLblPos val="nextTo"/>
@@ -6939,19 +6147,19 @@
                 <c:formatCode>General</c:formatCode>
                 <c:ptCount val="5"/>
                 <c:pt idx="0">
-                  <c:v>2.7</c:v>
+                  <c:v>2.6</c:v>
                 </c:pt>
                 <c:pt idx="1">
-                  <c:v>3.0</c:v>
+                  <c:v>2.9</c:v>
                 </c:pt>
                 <c:pt idx="2">
-                  <c:v>3.3</c:v>
+                  <c:v>3.15</c:v>
                 </c:pt>
                 <c:pt idx="3">
-                  <c:v>4.5</c:v>
+                  <c:v>4.45</c:v>
                 </c:pt>
                 <c:pt idx="4">
-                  <c:v>4.4</c:v>
+                  <c:v>4.45</c:v>
                 </c:pt>
               </c:numCache>
             </c:numRef>
@@ -7030,13 +6238,13 @@
                   <c:v>1.7</c:v>
                 </c:pt>
                 <c:pt idx="1">
+                  <c:v>2.2</c:v>
+                </c:pt>
+                <c:pt idx="2">
                   <c:v>2.3</c:v>
                 </c:pt>
-                <c:pt idx="2">
-                  <c:v>2.4</c:v>
-                </c:pt>
                 <c:pt idx="3">
-                  <c:v>3.7</c:v>
+                  <c:v>3.75</c:v>
                 </c:pt>
                 <c:pt idx="4">
                   <c:v>3.7</c:v>
@@ -7115,19 +6323,19 @@
                 <c:formatCode>General</c:formatCode>
                 <c:ptCount val="5"/>
                 <c:pt idx="0">
-                  <c:v>0.8</c:v>
+                  <c:v>1.0</c:v>
                 </c:pt>
                 <c:pt idx="1">
+                  <c:v>1.35</c:v>
+                </c:pt>
+                <c:pt idx="2">
                   <c:v>1.5</c:v>
                 </c:pt>
-                <c:pt idx="2">
-                  <c:v>1.7</c:v>
-                </c:pt>
                 <c:pt idx="3">
-                  <c:v>2.9</c:v>
+                  <c:v>2.8</c:v>
                 </c:pt>
                 <c:pt idx="4">
-                  <c:v>2.9</c:v>
+                  <c:v>3.0</c:v>
                 </c:pt>
               </c:numCache>
             </c:numRef>
@@ -7393,19 +6601,19 @@
                 <c:formatCode>General</c:formatCode>
                 <c:ptCount val="5"/>
                 <c:pt idx="0">
-                  <c:v>135</c:v>
+                  <c:v>135.0</c:v>
                 </c:pt>
                 <c:pt idx="1">
-                  <c:v>606</c:v>
+                  <c:v>624.0</c:v>
                 </c:pt>
                 <c:pt idx="2">
-                  <c:v>1019</c:v>
+                  <c:v>961.0</c:v>
                 </c:pt>
                 <c:pt idx="3">
-                  <c:v>15089</c:v>
+                  <c:v>16813.0</c:v>
                 </c:pt>
                 <c:pt idx="4">
-                  <c:v>12288</c:v>
+                  <c:v>12288.0</c:v>
                 </c:pt>
               </c:numCache>
             </c:numRef>
@@ -7481,19 +6689,19 @@
                 <c:formatCode>General</c:formatCode>
                 <c:ptCount val="5"/>
                 <c:pt idx="0">
-                  <c:v>606</c:v>
+                  <c:v>605.9</c:v>
                 </c:pt>
                 <c:pt idx="1">
-                  <c:v>1220</c:v>
+                  <c:v>1161.7</c:v>
                 </c:pt>
                 <c:pt idx="2">
-                  <c:v>1426</c:v>
+                  <c:v>1345.7</c:v>
                 </c:pt>
                 <c:pt idx="3">
-                  <c:v>4556</c:v>
+                  <c:v>4577.6</c:v>
                 </c:pt>
                 <c:pt idx="4">
-                  <c:v>6573</c:v>
+                  <c:v>7575.2</c:v>
                 </c:pt>
               </c:numCache>
             </c:numRef>
@@ -7759,19 +6967,19 @@
                 <c:formatCode>General</c:formatCode>
                 <c:ptCount val="5"/>
                 <c:pt idx="0">
-                  <c:v>606</c:v>
+                  <c:v>605.9</c:v>
                 </c:pt>
                 <c:pt idx="1">
-                  <c:v>1220</c:v>
+                  <c:v>1103.3</c:v>
                 </c:pt>
                 <c:pt idx="2">
-                  <c:v>1426</c:v>
+                  <c:v>1284.65</c:v>
                 </c:pt>
                 <c:pt idx="3">
-                  <c:v>4556</c:v>
+                  <c:v>4500.85</c:v>
                 </c:pt>
                 <c:pt idx="4">
-                  <c:v>6573</c:v>
+                  <c:v>7210.0</c:v>
                 </c:pt>
               </c:numCache>
             </c:numRef>
@@ -7847,19 +7055,19 @@
                 <c:formatCode>General</c:formatCode>
                 <c:ptCount val="5"/>
                 <c:pt idx="0">
-                  <c:v>607</c:v>
+                  <c:v>607.1</c:v>
                 </c:pt>
                 <c:pt idx="1">
-                  <c:v>1223</c:v>
+                  <c:v>1104.7</c:v>
                 </c:pt>
                 <c:pt idx="2">
-                  <c:v>1430</c:v>
+                  <c:v>1288.25</c:v>
                 </c:pt>
                 <c:pt idx="3">
-                  <c:v>4556</c:v>
+                  <c:v>4501.1</c:v>
                 </c:pt>
                 <c:pt idx="4">
-                  <c:v>6573</c:v>
+                  <c:v>7209.6</c:v>
                 </c:pt>
               </c:numCache>
             </c:numRef>
@@ -7935,19 +7143,19 @@
                 <c:formatCode>General</c:formatCode>
                 <c:ptCount val="5"/>
                 <c:pt idx="0">
-                  <c:v>620</c:v>
+                  <c:v>611.65</c:v>
                 </c:pt>
                 <c:pt idx="1">
-                  <c:v>1225</c:v>
+                  <c:v>1108.95</c:v>
                 </c:pt>
                 <c:pt idx="2">
-                  <c:v>1432</c:v>
+                  <c:v>1291.65</c:v>
                 </c:pt>
                 <c:pt idx="3">
-                  <c:v>4557</c:v>
+                  <c:v>4502.85</c:v>
                 </c:pt>
                 <c:pt idx="4">
-                  <c:v>6576</c:v>
+                  <c:v>7211.8</c:v>
                 </c:pt>
               </c:numCache>
             </c:numRef>
@@ -8213,34 +7421,34 @@
                 <c:formatCode>General</c:formatCode>
                 <c:ptCount val="10"/>
                 <c:pt idx="0">
-                  <c:v>225</c:v>
+                  <c:v>231.2</c:v>
                 </c:pt>
                 <c:pt idx="1">
-                  <c:v>360</c:v>
+                  <c:v>360.0</c:v>
                 </c:pt>
                 <c:pt idx="2">
-                  <c:v>225</c:v>
+                  <c:v>231.2</c:v>
                 </c:pt>
                 <c:pt idx="3">
-                  <c:v>360</c:v>
+                  <c:v>360.0</c:v>
                 </c:pt>
                 <c:pt idx="4">
-                  <c:v>225</c:v>
+                  <c:v>231.2</c:v>
                 </c:pt>
                 <c:pt idx="5">
-                  <c:v>360</c:v>
+                  <c:v>360.0</c:v>
                 </c:pt>
                 <c:pt idx="6">
-                  <c:v>225</c:v>
+                  <c:v>231.2</c:v>
                 </c:pt>
                 <c:pt idx="7">
-                  <c:v>360</c:v>
+                  <c:v>360.0</c:v>
                 </c:pt>
                 <c:pt idx="8">
-                  <c:v>225</c:v>
+                  <c:v>231.2</c:v>
                 </c:pt>
                 <c:pt idx="9">
-                  <c:v>360</c:v>
+                  <c:v>360.0</c:v>
                 </c:pt>
               </c:numCache>
             </c:numRef>
@@ -8337,28 +7545,28 @@
                   <c:v>0</c:v>
                 </c:pt>
                 <c:pt idx="2">
-                  <c:v>177</c:v>
+                  <c:v>183.4</c:v>
                 </c:pt>
                 <c:pt idx="3">
-                  <c:v>180</c:v>
+                  <c:v>172.2</c:v>
                 </c:pt>
                 <c:pt idx="4">
-                  <c:v>207</c:v>
+                  <c:v>206.1</c:v>
                 </c:pt>
                 <c:pt idx="5">
-                  <c:v>227</c:v>
+                  <c:v>207.9</c:v>
                 </c:pt>
                 <c:pt idx="6">
-                  <c:v>788</c:v>
+                  <c:v>785.0</c:v>
                 </c:pt>
                 <c:pt idx="7">
-                  <c:v>864</c:v>
+                  <c:v>857.8</c:v>
                 </c:pt>
                 <c:pt idx="8">
-                  <c:v>1258</c:v>
+                  <c:v>1467.4</c:v>
                 </c:pt>
                 <c:pt idx="9">
-                  <c:v>1425</c:v>
+                  <c:v>1661.6</c:v>
                 </c:pt>
               </c:numCache>
             </c:numRef>
@@ -8800,19 +8008,19 @@
                 <c:formatCode>General</c:formatCode>
                 <c:ptCount val="5"/>
                 <c:pt idx="0">
-                  <c:v>14.0</c:v>
+                  <c:v>13.5</c:v>
                 </c:pt>
                 <c:pt idx="1">
-                  <c:v>18.1</c:v>
+                  <c:v>13.7</c:v>
                 </c:pt>
                 <c:pt idx="2">
-                  <c:v>18.5</c:v>
+                  <c:v>17.45</c:v>
                 </c:pt>
                 <c:pt idx="3">
-                  <c:v>19.3</c:v>
+                  <c:v>16.1</c:v>
                 </c:pt>
                 <c:pt idx="4">
-                  <c:v>16.1</c:v>
+                  <c:v>18.95</c:v>
                 </c:pt>
               </c:numCache>
             </c:numRef>
@@ -9078,19 +8286,19 @@
                 <c:formatCode>General</c:formatCode>
                 <c:ptCount val="5"/>
                 <c:pt idx="0">
-                  <c:v>225</c:v>
+                  <c:v>232.7</c:v>
                 </c:pt>
                 <c:pt idx="1">
-                  <c:v>402</c:v>
+                  <c:v>399.65</c:v>
                 </c:pt>
                 <c:pt idx="2">
-                  <c:v>432</c:v>
+                  <c:v>420.3</c:v>
                 </c:pt>
                 <c:pt idx="3">
-                  <c:v>1013</c:v>
+                  <c:v>995.95</c:v>
                 </c:pt>
                 <c:pt idx="4">
-                  <c:v>1483</c:v>
+                  <c:v>1613.9</c:v>
                 </c:pt>
               </c:numCache>
             </c:numRef>
@@ -9166,19 +8374,19 @@
                 <c:formatCode>General</c:formatCode>
                 <c:ptCount val="5"/>
                 <c:pt idx="0">
-                  <c:v>360</c:v>
+                  <c:v>359.7</c:v>
                 </c:pt>
                 <c:pt idx="1">
-                  <c:v>540</c:v>
+                  <c:v>509.9</c:v>
                 </c:pt>
                 <c:pt idx="2">
-                  <c:v>587</c:v>
+                  <c:v>559.0</c:v>
                 </c:pt>
                 <c:pt idx="3">
-                  <c:v>1224</c:v>
+                  <c:v>1200.95</c:v>
                 </c:pt>
                 <c:pt idx="4">
-                  <c:v>1785</c:v>
+                  <c:v>1944.5</c:v>
                 </c:pt>
               </c:numCache>
             </c:numRef>
@@ -9254,19 +8462,19 @@
                 <c:formatCode>General</c:formatCode>
                 <c:ptCount val="5"/>
                 <c:pt idx="0">
-                  <c:v>733</c:v>
+                  <c:v>640.0</c:v>
                 </c:pt>
                 <c:pt idx="1">
-                  <c:v>804</c:v>
+                  <c:v>832.25</c:v>
                 </c:pt>
                 <c:pt idx="2">
-                  <c:v>857</c:v>
+                  <c:v>861.85</c:v>
                 </c:pt>
                 <c:pt idx="3">
-                  <c:v>1587</c:v>
+                  <c:v>1580.8</c:v>
                 </c:pt>
                 <c:pt idx="4">
-                  <c:v>2266</c:v>
+                  <c:v>2434.65</c:v>
                 </c:pt>
               </c:numCache>
             </c:numRef>
@@ -9532,19 +8740,19 @@
                 <c:formatCode>General</c:formatCode>
                 <c:ptCount val="5"/>
                 <c:pt idx="0">
-                  <c:v>15.27</c:v>
+                  <c:v>14.865</c:v>
                 </c:pt>
                 <c:pt idx="1">
-                  <c:v>8.56</c:v>
+                  <c:v>8.98</c:v>
                 </c:pt>
                 <c:pt idx="2">
-                  <c:v>8.04</c:v>
+                  <c:v>8.213</c:v>
                 </c:pt>
                 <c:pt idx="3">
-                  <c:v>3.45</c:v>
+                  <c:v>3.592</c:v>
                 </c:pt>
                 <c:pt idx="4">
-                  <c:v>2.36</c:v>
+                  <c:v>2.111</c:v>
                 </c:pt>
               </c:numCache>
             </c:numRef>
@@ -9620,19 +8828,19 @@
                 <c:formatCode>General</c:formatCode>
                 <c:ptCount val="5"/>
                 <c:pt idx="0">
-                  <c:v>29.11</c:v>
+                  <c:v>29.323</c:v>
                 </c:pt>
                 <c:pt idx="1">
-                  <c:v>17.46</c:v>
+                  <c:v>17.93</c:v>
                 </c:pt>
                 <c:pt idx="2">
-                  <c:v>16.19</c:v>
+                  <c:v>16.231</c:v>
                 </c:pt>
                 <c:pt idx="3">
-                  <c:v>6.63</c:v>
+                  <c:v>7.118</c:v>
                 </c:pt>
                 <c:pt idx="4">
-                  <c:v>4.6</c:v>
+                  <c:v>4.137</c:v>
                 </c:pt>
               </c:numCache>
             </c:numRef>
@@ -9898,19 +9106,19 @@
                 <c:formatCode>General</c:formatCode>
                 <c:ptCount val="5"/>
                 <c:pt idx="0">
-                  <c:v>9.39</c:v>
+                  <c:v>9.419</c:v>
                 </c:pt>
                 <c:pt idx="1">
-                  <c:v>6.35</c:v>
+                  <c:v>6.63</c:v>
                 </c:pt>
                 <c:pt idx="2">
-                  <c:v>5.84</c:v>
+                  <c:v>6.105</c:v>
                 </c:pt>
                 <c:pt idx="3">
-                  <c:v>2.83</c:v>
+                  <c:v>2.903</c:v>
                 </c:pt>
                 <c:pt idx="4">
-                  <c:v>1.94</c:v>
+                  <c:v>1.755</c:v>
                 </c:pt>
               </c:numCache>
             </c:numRef>
@@ -9986,19 +9194,19 @@
                 <c:formatCode>General</c:formatCode>
                 <c:ptCount val="5"/>
                 <c:pt idx="0">
-                  <c:v>19.09</c:v>
+                  <c:v>18.924</c:v>
                 </c:pt>
                 <c:pt idx="1">
-                  <c:v>12.74</c:v>
+                  <c:v>13.3</c:v>
                 </c:pt>
                 <c:pt idx="2">
-                  <c:v>11.71</c:v>
+                  <c:v>12.205</c:v>
                 </c:pt>
                 <c:pt idx="3">
-                  <c:v>5.6</c:v>
+                  <c:v>5.761</c:v>
                 </c:pt>
                 <c:pt idx="4">
-                  <c:v>3.84</c:v>
+                  <c:v>3.463</c:v>
                 </c:pt>
               </c:numCache>
             </c:numRef>
@@ -10279,34 +9487,34 @@
                 <c:formatCode>General</c:formatCode>
                 <c:ptCount val="10"/>
                 <c:pt idx="0">
-                  <c:v>26</c:v>
+                  <c:v>27.0</c:v>
                 </c:pt>
                 <c:pt idx="1">
-                  <c:v>28</c:v>
+                  <c:v>28.0</c:v>
                 </c:pt>
                 <c:pt idx="2">
-                  <c:v>60</c:v>
+                  <c:v>64.0</c:v>
                 </c:pt>
                 <c:pt idx="3">
-                  <c:v>72</c:v>
+                  <c:v>74.0</c:v>
                 </c:pt>
                 <c:pt idx="4">
-                  <c:v>69</c:v>
+                  <c:v>69.5</c:v>
                 </c:pt>
                 <c:pt idx="5">
-                  <c:v>84</c:v>
+                  <c:v>82.0</c:v>
                 </c:pt>
                 <c:pt idx="6">
-                  <c:v>216</c:v>
+                  <c:v>228.5</c:v>
                 </c:pt>
                 <c:pt idx="7">
-                  <c:v>266</c:v>
+                  <c:v>267.0</c:v>
                 </c:pt>
                 <c:pt idx="8">
-                  <c:v>331</c:v>
+                  <c:v>391.0</c:v>
                 </c:pt>
                 <c:pt idx="9">
-                  <c:v>434</c:v>
+                  <c:v>498.0</c:v>
                 </c:pt>
               </c:numCache>
             </c:numRef>
@@ -10397,34 +9605,34 @@
                 <c:formatCode>General</c:formatCode>
                 <c:ptCount val="10"/>
                 <c:pt idx="0">
-                  <c:v>206</c:v>
+                  <c:v>194.0</c:v>
                 </c:pt>
                 <c:pt idx="1">
-                  <c:v>240</c:v>
+                  <c:v>239.0</c:v>
                 </c:pt>
                 <c:pt idx="2">
-                  <c:v>207</c:v>
+                  <c:v>197.0</c:v>
                 </c:pt>
                 <c:pt idx="3">
-                  <c:v>243</c:v>
+                  <c:v>236.0</c:v>
                 </c:pt>
                 <c:pt idx="4">
-                  <c:v>208</c:v>
+                  <c:v>198.0</c:v>
                 </c:pt>
                 <c:pt idx="5">
-                  <c:v>240</c:v>
+                  <c:v>235.5</c:v>
                 </c:pt>
                 <c:pt idx="6">
-                  <c:v>218</c:v>
+                  <c:v>203.5</c:v>
                 </c:pt>
                 <c:pt idx="7">
-                  <c:v>253</c:v>
+                  <c:v>242.5</c:v>
                 </c:pt>
                 <c:pt idx="8">
-                  <c:v>222</c:v>
+                  <c:v>204.0</c:v>
                 </c:pt>
                 <c:pt idx="9">
-                  <c:v>256</c:v>
+                  <c:v>243.0</c:v>
                 </c:pt>
               </c:numCache>
             </c:numRef>
@@ -10673,9 +9881,9 @@
           </c:marker>
           <c:cat>
             <c:strRef>
-              <c:f>Sheet1!$A$2:$A$7</c:f>
+              <c:f>Sheet1!$A$2:$A$6</c:f>
               <c:strCache>
-                <c:ptCount val="6"/>
+                <c:ptCount val="5"/>
                 <c:pt idx="0">
                   <c:v>1</c:v>
                 </c:pt>
@@ -10689,9 +9897,6 @@
                   <c:v>4</c:v>
                 </c:pt>
                 <c:pt idx="4">
-                  <c:v>5</c:v>
-                </c:pt>
-                <c:pt idx="5">
                   <c:v>6</c:v>
                 </c:pt>
               </c:strCache>
@@ -10699,27 +9904,24 @@
           </c:cat>
           <c:val>
             <c:numRef>
-              <c:f>Sheet1!$B$2:$B$7</c:f>
+              <c:f>Sheet1!$B$2:$B$6</c:f>
               <c:numCache>
                 <c:formatCode>General</c:formatCode>
-                <c:ptCount val="6"/>
+                <c:ptCount val="5"/>
                 <c:pt idx="0">
-                  <c:v>1149</c:v>
+                  <c:v>1047.6</c:v>
                 </c:pt>
                 <c:pt idx="1">
-                  <c:v>1210</c:v>
+                  <c:v>1146.2</c:v>
                 </c:pt>
                 <c:pt idx="2">
-                  <c:v>1264</c:v>
+                  <c:v>1091.6</c:v>
                 </c:pt>
                 <c:pt idx="3">
-                  <c:v>1330</c:v>
+                  <c:v>1262.75</c:v>
                 </c:pt>
                 <c:pt idx="4">
-                  <c:v>1372</c:v>
-                </c:pt>
-                <c:pt idx="5">
-                  <c:v>1439</c:v>
+                  <c:v>1196.5</c:v>
                 </c:pt>
               </c:numCache>
             </c:numRef>
@@ -10768,9 +9970,9 @@
           </c:marker>
           <c:cat>
             <c:strRef>
-              <c:f>Sheet1!$A$2:$A$7</c:f>
+              <c:f>Sheet1!$A$2:$A$6</c:f>
               <c:strCache>
-                <c:ptCount val="6"/>
+                <c:ptCount val="5"/>
                 <c:pt idx="0">
                   <c:v>1</c:v>
                 </c:pt>
@@ -10784,9 +9986,6 @@
                   <c:v>4</c:v>
                 </c:pt>
                 <c:pt idx="4">
-                  <c:v>5</c:v>
-                </c:pt>
-                <c:pt idx="5">
                   <c:v>6</c:v>
                 </c:pt>
               </c:strCache>
@@ -10794,27 +9993,24 @@
           </c:cat>
           <c:val>
             <c:numRef>
-              <c:f>Sheet1!$C$2:$C$7</c:f>
+              <c:f>Sheet1!$C$2:$C$6</c:f>
               <c:numCache>
                 <c:formatCode>General</c:formatCode>
-                <c:ptCount val="6"/>
+                <c:ptCount val="5"/>
                 <c:pt idx="0">
-                  <c:v>1358</c:v>
+                  <c:v>1261.5</c:v>
                 </c:pt>
                 <c:pt idx="1">
-                  <c:v>1416</c:v>
+                  <c:v>1282.6</c:v>
                 </c:pt>
                 <c:pt idx="2">
-                  <c:v>1476</c:v>
+                  <c:v>1302.7</c:v>
                 </c:pt>
                 <c:pt idx="3">
-                  <c:v>1539</c:v>
+                  <c:v>1401.1</c:v>
                 </c:pt>
                 <c:pt idx="4">
-                  <c:v>1575</c:v>
-                </c:pt>
-                <c:pt idx="5">
-                  <c:v>1640</c:v>
+                  <c:v>1347.8</c:v>
                 </c:pt>
               </c:numCache>
             </c:numRef>
@@ -10863,9 +10059,9 @@
           </c:marker>
           <c:cat>
             <c:strRef>
-              <c:f>Sheet1!$A$2:$A$7</c:f>
+              <c:f>Sheet1!$A$2:$A$6</c:f>
               <c:strCache>
-                <c:ptCount val="6"/>
+                <c:ptCount val="5"/>
                 <c:pt idx="0">
                   <c:v>1</c:v>
                 </c:pt>
@@ -10879,9 +10075,6 @@
                   <c:v>4</c:v>
                 </c:pt>
                 <c:pt idx="4">
-                  <c:v>5</c:v>
-                </c:pt>
-                <c:pt idx="5">
                   <c:v>6</c:v>
                 </c:pt>
               </c:strCache>
@@ -10889,27 +10082,24 @@
           </c:cat>
           <c:val>
             <c:numRef>
-              <c:f>Sheet1!$D$2:$D$7</c:f>
+              <c:f>Sheet1!$D$2:$D$6</c:f>
               <c:numCache>
                 <c:formatCode>General</c:formatCode>
-                <c:ptCount val="6"/>
+                <c:ptCount val="5"/>
                 <c:pt idx="0">
-                  <c:v>4092</c:v>
+                  <c:v>3735.6</c:v>
                 </c:pt>
                 <c:pt idx="1">
-                  <c:v>4558</c:v>
+                  <c:v>4028.8</c:v>
                 </c:pt>
                 <c:pt idx="2">
-                  <c:v>5157</c:v>
+                  <c:v>4710.95</c:v>
                 </c:pt>
                 <c:pt idx="3">
-                  <c:v>5450</c:v>
+                  <c:v>4945.1</c:v>
                 </c:pt>
                 <c:pt idx="4">
-                  <c:v>6059</c:v>
-                </c:pt>
-                <c:pt idx="5">
-                  <c:v>6550</c:v>
+                  <c:v>5593.25</c:v>
                 </c:pt>
               </c:numCache>
             </c:numRef>
@@ -10958,9 +10148,9 @@
           </c:marker>
           <c:cat>
             <c:strRef>
-              <c:f>Sheet1!$A$2:$A$7</c:f>
+              <c:f>Sheet1!$A$2:$A$6</c:f>
               <c:strCache>
-                <c:ptCount val="6"/>
+                <c:ptCount val="5"/>
                 <c:pt idx="0">
                   <c:v>1</c:v>
                 </c:pt>
@@ -10974,9 +10164,6 @@
                   <c:v>4</c:v>
                 </c:pt>
                 <c:pt idx="4">
-                  <c:v>5</c:v>
-                </c:pt>
-                <c:pt idx="5">
                   <c:v>6</c:v>
                 </c:pt>
               </c:strCache>
@@ -10984,27 +10171,24 @@
           </c:cat>
           <c:val>
             <c:numRef>
-              <c:f>Sheet1!$E$2:$E$7</c:f>
+              <c:f>Sheet1!$E$2:$E$6</c:f>
               <c:numCache>
                 <c:formatCode>General</c:formatCode>
-                <c:ptCount val="6"/>
+                <c:ptCount val="5"/>
                 <c:pt idx="0">
-                  <c:v>5488</c:v>
+                  <c:v>5494.1</c:v>
                 </c:pt>
                 <c:pt idx="1">
-                  <c:v>6576</c:v>
+                  <c:v>6480.8</c:v>
                 </c:pt>
                 <c:pt idx="2">
-                  <c:v>7663</c:v>
+                  <c:v>7660.3</c:v>
                 </c:pt>
                 <c:pt idx="3">
-                  <c:v>8759</c:v>
+                  <c:v>8663.5</c:v>
                 </c:pt>
                 <c:pt idx="4">
-                  <c:v>9856</c:v>
-                </c:pt>
-                <c:pt idx="5">
-                  <c:v>10952</c:v>
+                  <c:v>10266.3</c:v>
                 </c:pt>
               </c:numCache>
             </c:numRef>
@@ -11247,22 +10431,19 @@
           </c:marker>
           <c:cat>
             <c:strRef>
-              <c:f>Sheet1!$A$2:$A$6</c:f>
+              <c:f>Sheet1!$A$2:$A$5</c:f>
               <c:strCache>
-                <c:ptCount val="5"/>
+                <c:ptCount val="4"/>
                 <c:pt idx="0">
                   <c:v>10</c:v>
                 </c:pt>
                 <c:pt idx="1">
-                  <c:v>25</c:v>
+                  <c:v>24</c:v>
                 </c:pt>
                 <c:pt idx="2">
                   <c:v>52</c:v>
                 </c:pt>
                 <c:pt idx="3">
-                  <c:v>75</c:v>
-                </c:pt>
-                <c:pt idx="4">
                   <c:v>100</c:v>
                 </c:pt>
               </c:strCache>
@@ -11270,24 +10451,21 @@
           </c:cat>
           <c:val>
             <c:numRef>
-              <c:f>Sheet1!$B$2:$B$6</c:f>
+              <c:f>Sheet1!$B$2:$B$5</c:f>
               <c:numCache>
                 <c:formatCode>General</c:formatCode>
-                <c:ptCount val="5"/>
+                <c:ptCount val="4"/>
                 <c:pt idx="0">
-                  <c:v>49</c:v>
+                  <c:v>4.048</c:v>
                 </c:pt>
                 <c:pt idx="1">
-                  <c:v>52</c:v>
+                  <c:v>-2.533</c:v>
                 </c:pt>
                 <c:pt idx="2">
-                  <c:v>49</c:v>
+                  <c:v>3.781</c:v>
                 </c:pt>
                 <c:pt idx="3">
-                  <c:v>48</c:v>
-                </c:pt>
-                <c:pt idx="4">
-                  <c:v>45</c:v>
+                  <c:v>0.937</c:v>
                 </c:pt>
               </c:numCache>
             </c:numRef>
@@ -11336,22 +10514,19 @@
           </c:marker>
           <c:cat>
             <c:strRef>
-              <c:f>Sheet1!$A$2:$A$6</c:f>
+              <c:f>Sheet1!$A$2:$A$5</c:f>
               <c:strCache>
-                <c:ptCount val="5"/>
+                <c:ptCount val="4"/>
                 <c:pt idx="0">
                   <c:v>10</c:v>
                 </c:pt>
                 <c:pt idx="1">
-                  <c:v>25</c:v>
+                  <c:v>24</c:v>
                 </c:pt>
                 <c:pt idx="2">
                   <c:v>52</c:v>
                 </c:pt>
                 <c:pt idx="3">
-                  <c:v>75</c:v>
-                </c:pt>
-                <c:pt idx="4">
                   <c:v>100</c:v>
                 </c:pt>
               </c:strCache>
@@ -11359,24 +10534,21 @@
           </c:cat>
           <c:val>
             <c:numRef>
-              <c:f>Sheet1!$C$2:$C$6</c:f>
+              <c:f>Sheet1!$C$2:$C$5</c:f>
               <c:numCache>
                 <c:formatCode>General</c:formatCode>
-                <c:ptCount val="5"/>
+                <c:ptCount val="4"/>
                 <c:pt idx="0">
-                  <c:v>59</c:v>
+                  <c:v>5.961</c:v>
                 </c:pt>
                 <c:pt idx="1">
-                  <c:v>57</c:v>
+                  <c:v>-1.119</c:v>
                 </c:pt>
                 <c:pt idx="2">
-                  <c:v>58</c:v>
+                  <c:v>8.476</c:v>
                 </c:pt>
                 <c:pt idx="3">
-                  <c:v>55</c:v>
-                </c:pt>
-                <c:pt idx="4">
-                  <c:v>55</c:v>
+                  <c:v>1.694</c:v>
                 </c:pt>
               </c:numCache>
             </c:numRef>
@@ -11425,22 +10597,19 @@
           </c:marker>
           <c:cat>
             <c:strRef>
-              <c:f>Sheet1!$A$2:$A$6</c:f>
+              <c:f>Sheet1!$A$2:$A$5</c:f>
               <c:strCache>
-                <c:ptCount val="5"/>
+                <c:ptCount val="4"/>
                 <c:pt idx="0">
                   <c:v>10</c:v>
                 </c:pt>
                 <c:pt idx="1">
-                  <c:v>25</c:v>
+                  <c:v>24</c:v>
                 </c:pt>
                 <c:pt idx="2">
                   <c:v>52</c:v>
                 </c:pt>
                 <c:pt idx="3">
-                  <c:v>75</c:v>
-                </c:pt>
-                <c:pt idx="4">
                   <c:v>100</c:v>
                 </c:pt>
               </c:strCache>
@@ -11448,24 +10617,21 @@
           </c:cat>
           <c:val>
             <c:numRef>
-              <c:f>Sheet1!$D$2:$D$6</c:f>
+              <c:f>Sheet1!$D$2:$D$5</c:f>
               <c:numCache>
                 <c:formatCode>General</c:formatCode>
-                <c:ptCount val="5"/>
+                <c:ptCount val="4"/>
                 <c:pt idx="0">
-                  <c:v>221</c:v>
+                  <c:v>-0.113</c:v>
                 </c:pt>
                 <c:pt idx="1">
-                  <c:v>237</c:v>
+                  <c:v>4.554</c:v>
                 </c:pt>
                 <c:pt idx="2">
-                  <c:v>235</c:v>
+                  <c:v>12.73</c:v>
                 </c:pt>
                 <c:pt idx="3">
-                  <c:v>230</c:v>
-                </c:pt>
-                <c:pt idx="4">
-                  <c:v>232</c:v>
+                  <c:v>-5.327</c:v>
                 </c:pt>
               </c:numCache>
             </c:numRef>
@@ -11514,22 +10680,19 @@
           </c:marker>
           <c:cat>
             <c:strRef>
-              <c:f>Sheet1!$A$2:$A$6</c:f>
+              <c:f>Sheet1!$A$2:$A$5</c:f>
               <c:strCache>
-                <c:ptCount val="5"/>
+                <c:ptCount val="4"/>
                 <c:pt idx="0">
                   <c:v>10</c:v>
                 </c:pt>
                 <c:pt idx="1">
-                  <c:v>25</c:v>
+                  <c:v>24</c:v>
                 </c:pt>
                 <c:pt idx="2">
                   <c:v>52</c:v>
                 </c:pt>
                 <c:pt idx="3">
-                  <c:v>75</c:v>
-                </c:pt>
-                <c:pt idx="4">
                   <c:v>100</c:v>
                 </c:pt>
               </c:strCache>
@@ -11537,24 +10700,21 @@
           </c:cat>
           <c:val>
             <c:numRef>
-              <c:f>Sheet1!$E$2:$E$6</c:f>
+              <c:f>Sheet1!$E$2:$E$5</c:f>
               <c:numCache>
                 <c:formatCode>General</c:formatCode>
-                <c:ptCount val="5"/>
+                <c:ptCount val="4"/>
                 <c:pt idx="0">
-                  <c:v>351</c:v>
+                  <c:v>-7.836</c:v>
                 </c:pt>
                 <c:pt idx="1">
-                  <c:v>351</c:v>
+                  <c:v>11.875</c:v>
                 </c:pt>
                 <c:pt idx="2">
-                  <c:v>366</c:v>
+                  <c:v>-11.313</c:v>
                 </c:pt>
                 <c:pt idx="3">
-                  <c:v>364</c:v>
-                </c:pt>
-                <c:pt idx="4">
-                  <c:v>362</c:v>
+                  <c:v>-2.276</c:v>
                 </c:pt>
               </c:numCache>
             </c:numRef>
@@ -11609,7 +10769,7 @@
         <c:numFmt formatCode="General" sourceLinked="0"/>
         <c:majorTickMark val="out"/>
         <c:minorTickMark val="none"/>
-        <c:tickLblPos val="nextTo"/>
+        <c:tickLblPos val="low"/>
         <c:spPr>
           <a:ln>
             <a:solidFill>
@@ -11643,7 +10803,8 @@
         <c:axId val="2140495176"/>
         <c:scaling>
           <c:orientation val="minMax"/>
-          <c:min val="0.0"/>
+          <c:max val="40.0"/>
+          <c:min val="-40.0"/>
         </c:scaling>
         <c:delete val="0"/>
         <c:axPos val="l"/>
@@ -11669,7 +10830,7 @@
                     </a:solidFill>
                     <a:latin typeface="Calibri"/>
                   </a:rPr>
-                  <a:t>ns di rete neurale per pacchetto</a:t>
+                  <a:t>ns: misurato − legge</a:t>
                 </a:r>
               </a:p>
             </c:rich>
@@ -11798,9 +10959,9 @@
           </c:marker>
           <c:cat>
             <c:strRef>
-              <c:f>Sheet1!$A$2:$A$7</c:f>
+              <c:f>Sheet1!$A$2:$A$6</c:f>
               <c:strCache>
-                <c:ptCount val="6"/>
+                <c:ptCount val="5"/>
                 <c:pt idx="0">
                   <c:v>1</c:v>
                 </c:pt>
@@ -11814,9 +10975,6 @@
                   <c:v>4</c:v>
                 </c:pt>
                 <c:pt idx="4">
-                  <c:v>5</c:v>
-                </c:pt>
-                <c:pt idx="5">
                   <c:v>6</c:v>
                 </c:pt>
               </c:strCache>
@@ -11824,27 +10982,24 @@
           </c:cat>
           <c:val>
             <c:numRef>
-              <c:f>Sheet1!$B$2:$B$7</c:f>
+              <c:f>Sheet1!$B$2:$B$6</c:f>
               <c:numCache>
                 <c:formatCode>General</c:formatCode>
-                <c:ptCount val="6"/>
+                <c:ptCount val="5"/>
                 <c:pt idx="0">
-                  <c:v>351</c:v>
+                  <c:v>365.3</c:v>
                 </c:pt>
                 <c:pt idx="1">
-                  <c:v>421</c:v>
+                  <c:v>429.45</c:v>
                 </c:pt>
                 <c:pt idx="2">
-                  <c:v>486</c:v>
+                  <c:v>482.8</c:v>
                 </c:pt>
                 <c:pt idx="3">
-                  <c:v>545</c:v>
+                  <c:v>542.05</c:v>
                 </c:pt>
                 <c:pt idx="4">
-                  <c:v>595</c:v>
-                </c:pt>
-                <c:pt idx="5">
-                  <c:v>652</c:v>
+                  <c:v>626.7</c:v>
                 </c:pt>
               </c:numCache>
             </c:numRef>
@@ -11894,9 +11049,9 @@
           </c:marker>
           <c:cat>
             <c:strRef>
-              <c:f>Sheet1!$A$2:$A$7</c:f>
+              <c:f>Sheet1!$A$2:$A$6</c:f>
               <c:strCache>
-                <c:ptCount val="6"/>
+                <c:ptCount val="5"/>
                 <c:pt idx="0">
                   <c:v>1</c:v>
                 </c:pt>
@@ -11910,9 +11065,6 @@
                   <c:v>4</c:v>
                 </c:pt>
                 <c:pt idx="4">
-                  <c:v>5</c:v>
-                </c:pt>
-                <c:pt idx="5">
                   <c:v>6</c:v>
                 </c:pt>
               </c:strCache>
@@ -11920,27 +11072,24 @@
           </c:cat>
           <c:val>
             <c:numRef>
-              <c:f>Sheet1!$C$2:$C$7</c:f>
+              <c:f>Sheet1!$C$2:$C$6</c:f>
               <c:numCache>
                 <c:formatCode>General</c:formatCode>
-                <c:ptCount val="6"/>
+                <c:ptCount val="5"/>
                 <c:pt idx="0">
-                  <c:v>447</c:v>
+                  <c:v>450.1</c:v>
                 </c:pt>
                 <c:pt idx="1">
-                  <c:v>517</c:v>
+                  <c:v>512.4</c:v>
                 </c:pt>
                 <c:pt idx="2">
-                  <c:v>591</c:v>
+                  <c:v>596.3</c:v>
                 </c:pt>
                 <c:pt idx="3">
-                  <c:v>665</c:v>
+                  <c:v>655.2</c:v>
                 </c:pt>
                 <c:pt idx="4">
-                  <c:v>730</c:v>
-                </c:pt>
-                <c:pt idx="5">
-                  <c:v>801</c:v>
+                  <c:v>777.8</c:v>
                 </c:pt>
               </c:numCache>
             </c:numRef>
@@ -11989,9 +11138,9 @@
           </c:marker>
           <c:cat>
             <c:strRef>
-              <c:f>Sheet1!$A$2:$A$7</c:f>
+              <c:f>Sheet1!$A$2:$A$6</c:f>
               <c:strCache>
-                <c:ptCount val="6"/>
+                <c:ptCount val="5"/>
                 <c:pt idx="0">
                   <c:v>1</c:v>
                 </c:pt>
@@ -12005,9 +11154,6 @@
                   <c:v>4</c:v>
                 </c:pt>
                 <c:pt idx="4">
-                  <c:v>5</c:v>
-                </c:pt>
-                <c:pt idx="5">
                   <c:v>6</c:v>
                 </c:pt>
               </c:strCache>
@@ -12015,27 +11161,24 @@
           </c:cat>
           <c:val>
             <c:numRef>
-              <c:f>Sheet1!$D$2:$D$7</c:f>
+              <c:f>Sheet1!$D$2:$D$6</c:f>
               <c:numCache>
                 <c:formatCode>General</c:formatCode>
-                <c:ptCount val="6"/>
+                <c:ptCount val="5"/>
                 <c:pt idx="0">
-                  <c:v>264</c:v>
+                  <c:v>251.0</c:v>
                 </c:pt>
                 <c:pt idx="1">
-                  <c:v>287</c:v>
+                  <c:v>266.0</c:v>
                 </c:pt>
                 <c:pt idx="2">
-                  <c:v>329</c:v>
+                  <c:v>308.0</c:v>
                 </c:pt>
                 <c:pt idx="3">
-                  <c:v>344</c:v>
+                  <c:v>311.8</c:v>
                 </c:pt>
                 <c:pt idx="4">
-                  <c:v>368</c:v>
-                </c:pt>
-                <c:pt idx="5">
-                  <c:v>396</c:v>
+                  <c:v>349.75</c:v>
                 </c:pt>
               </c:numCache>
             </c:numRef>
@@ -12085,9 +11228,9 @@
           </c:marker>
           <c:cat>
             <c:strRef>
-              <c:f>Sheet1!$A$2:$A$7</c:f>
+              <c:f>Sheet1!$A$2:$A$6</c:f>
               <c:strCache>
-                <c:ptCount val="6"/>
+                <c:ptCount val="5"/>
                 <c:pt idx="0">
                   <c:v>1</c:v>
                 </c:pt>
@@ -12101,9 +11244,6 @@
                   <c:v>4</c:v>
                 </c:pt>
                 <c:pt idx="4">
-                  <c:v>5</c:v>
-                </c:pt>
-                <c:pt idx="5">
                   <c:v>6</c:v>
                 </c:pt>
               </c:strCache>
@@ -12111,27 +11251,24 @@
           </c:cat>
           <c:val>
             <c:numRef>
-              <c:f>Sheet1!$E$2:$E$7</c:f>
+              <c:f>Sheet1!$E$2:$E$6</c:f>
               <c:numCache>
                 <c:formatCode>General</c:formatCode>
-                <c:ptCount val="6"/>
+                <c:ptCount val="5"/>
                 <c:pt idx="0">
-                  <c:v>328</c:v>
+                  <c:v>311.9</c:v>
                 </c:pt>
                 <c:pt idx="1">
-                  <c:v>355</c:v>
+                  <c:v>324.65</c:v>
                 </c:pt>
                 <c:pt idx="2">
-                  <c:v>394</c:v>
+                  <c:v>358.0</c:v>
                 </c:pt>
                 <c:pt idx="3">
-                  <c:v>403</c:v>
+                  <c:v>376.3</c:v>
                 </c:pt>
                 <c:pt idx="4">
-                  <c:v>442</c:v>
-                </c:pt>
-                <c:pt idx="5">
-                  <c:v>470</c:v>
+                  <c:v>409.95</c:v>
                 </c:pt>
               </c:numCache>
             </c:numRef>
@@ -12374,9 +11511,9 @@
           </c:marker>
           <c:cat>
             <c:strRef>
-              <c:f>Sheet1!$A$2:$A$5</c:f>
+              <c:f>Sheet1!$A$2:$A$4</c:f>
               <c:strCache>
-                <c:ptCount val="4"/>
+                <c:ptCount val="3"/>
                 <c:pt idx="0">
                   <c:v>2</c:v>
                 </c:pt>
@@ -12384,9 +11521,6 @@
                   <c:v>4</c:v>
                 </c:pt>
                 <c:pt idx="2">
-                  <c:v>6</c:v>
-                </c:pt>
-                <c:pt idx="3">
                   <c:v>8</c:v>
                 </c:pt>
               </c:strCache>
@@ -12394,21 +11528,18 @@
           </c:cat>
           <c:val>
             <c:numRef>
-              <c:f>Sheet1!$B$2:$B$5</c:f>
+              <c:f>Sheet1!$B$2:$B$4</c:f>
               <c:numCache>
                 <c:formatCode>General</c:formatCode>
-                <c:ptCount val="4"/>
+                <c:ptCount val="3"/>
                 <c:pt idx="0">
-                  <c:v>104</c:v>
+                  <c:v>103.4</c:v>
                 </c:pt>
                 <c:pt idx="1">
-                  <c:v>115</c:v>
+                  <c:v>115.7</c:v>
                 </c:pt>
                 <c:pt idx="2">
-                  <c:v>124</c:v>
-                </c:pt>
-                <c:pt idx="3">
-                  <c:v>145</c:v>
+                  <c:v>158.45</c:v>
                 </c:pt>
               </c:numCache>
             </c:numRef>
@@ -12457,9 +11588,9 @@
           </c:marker>
           <c:cat>
             <c:strRef>
-              <c:f>Sheet1!$A$2:$A$5</c:f>
+              <c:f>Sheet1!$A$2:$A$4</c:f>
               <c:strCache>
-                <c:ptCount val="4"/>
+                <c:ptCount val="3"/>
                 <c:pt idx="0">
                   <c:v>2</c:v>
                 </c:pt>
@@ -12467,9 +11598,6 @@
                   <c:v>4</c:v>
                 </c:pt>
                 <c:pt idx="2">
-                  <c:v>6</c:v>
-                </c:pt>
-                <c:pt idx="3">
                   <c:v>8</c:v>
                 </c:pt>
               </c:strCache>
@@ -12477,21 +11605,18 @@
           </c:cat>
           <c:val>
             <c:numRef>
-              <c:f>Sheet1!$C$2:$C$5</c:f>
+              <c:f>Sheet1!$C$2:$C$4</c:f>
               <c:numCache>
                 <c:formatCode>General</c:formatCode>
-                <c:ptCount val="4"/>
+                <c:ptCount val="3"/>
                 <c:pt idx="0">
-                  <c:v>114</c:v>
+                  <c:v>109.1</c:v>
                 </c:pt>
                 <c:pt idx="1">
-                  <c:v>124</c:v>
+                  <c:v>124.3</c:v>
                 </c:pt>
                 <c:pt idx="2">
-                  <c:v>138</c:v>
-                </c:pt>
-                <c:pt idx="3">
-                  <c:v>158</c:v>
+                  <c:v>170.0</c:v>
                 </c:pt>
               </c:numCache>
             </c:numRef>
@@ -12540,9 +11665,9 @@
           </c:marker>
           <c:cat>
             <c:strRef>
-              <c:f>Sheet1!$A$2:$A$5</c:f>
+              <c:f>Sheet1!$A$2:$A$4</c:f>
               <c:strCache>
-                <c:ptCount val="4"/>
+                <c:ptCount val="3"/>
                 <c:pt idx="0">
                   <c:v>2</c:v>
                 </c:pt>
@@ -12550,9 +11675,6 @@
                   <c:v>4</c:v>
                 </c:pt>
                 <c:pt idx="2">
-                  <c:v>6</c:v>
-                </c:pt>
-                <c:pt idx="3">
                   <c:v>8</c:v>
                 </c:pt>
               </c:strCache>
@@ -12560,21 +11682,18 @@
           </c:cat>
           <c:val>
             <c:numRef>
-              <c:f>Sheet1!$D$2:$D$5</c:f>
+              <c:f>Sheet1!$D$2:$D$4</c:f>
               <c:numCache>
                 <c:formatCode>General</c:formatCode>
-                <c:ptCount val="4"/>
+                <c:ptCount val="3"/>
                 <c:pt idx="0">
-                  <c:v>282</c:v>
+                  <c:v>264.5</c:v>
                 </c:pt>
                 <c:pt idx="1">
-                  <c:v>295</c:v>
+                  <c:v>297.0</c:v>
                 </c:pt>
                 <c:pt idx="2">
-                  <c:v>301</c:v>
-                </c:pt>
-                <c:pt idx="3">
-                  <c:v>315</c:v>
+                  <c:v>347.1</c:v>
                 </c:pt>
               </c:numCache>
             </c:numRef>
@@ -12623,9 +11742,9 @@
           </c:marker>
           <c:cat>
             <c:strRef>
-              <c:f>Sheet1!$A$2:$A$5</c:f>
+              <c:f>Sheet1!$A$2:$A$4</c:f>
               <c:strCache>
-                <c:ptCount val="4"/>
+                <c:ptCount val="3"/>
                 <c:pt idx="0">
                   <c:v>2</c:v>
                 </c:pt>
@@ -12633,9 +11752,6 @@
                   <c:v>4</c:v>
                 </c:pt>
                 <c:pt idx="2">
-                  <c:v>6</c:v>
-                </c:pt>
-                <c:pt idx="3">
                   <c:v>8</c:v>
                 </c:pt>
               </c:strCache>
@@ -12643,21 +11759,18 @@
           </c:cat>
           <c:val>
             <c:numRef>
-              <c:f>Sheet1!$E$2:$E$5</c:f>
+              <c:f>Sheet1!$E$2:$E$4</c:f>
               <c:numCache>
                 <c:formatCode>General</c:formatCode>
-                <c:ptCount val="4"/>
+                <c:ptCount val="3"/>
                 <c:pt idx="0">
-                  <c:v>391</c:v>
+                  <c:v>456.8</c:v>
                 </c:pt>
                 <c:pt idx="1">
-                  <c:v>445</c:v>
+                  <c:v>482.8</c:v>
                 </c:pt>
                 <c:pt idx="2">
-                  <c:v>452</c:v>
-                </c:pt>
-                <c:pt idx="3">
-                  <c:v>496</c:v>
+                  <c:v>604.6</c:v>
                 </c:pt>
               </c:numCache>
             </c:numRef>
@@ -12707,9 +11820,9 @@
           </c:marker>
           <c:cat>
             <c:strRef>
-              <c:f>Sheet1!$A$2:$A$5</c:f>
+              <c:f>Sheet1!$A$2:$A$4</c:f>
               <c:strCache>
-                <c:ptCount val="4"/>
+                <c:ptCount val="3"/>
                 <c:pt idx="0">
                   <c:v>2</c:v>
                 </c:pt>
@@ -12717,9 +11830,6 @@
                   <c:v>4</c:v>
                 </c:pt>
                 <c:pt idx="2">
-                  <c:v>6</c:v>
-                </c:pt>
-                <c:pt idx="3">
                   <c:v>8</c:v>
                 </c:pt>
               </c:strCache>
@@ -12727,21 +11837,18 @@
           </c:cat>
           <c:val>
             <c:numRef>
-              <c:f>Sheet1!$F$2:$F$5</c:f>
+              <c:f>Sheet1!$F$2:$F$4</c:f>
               <c:numCache>
                 <c:formatCode>General</c:formatCode>
-                <c:ptCount val="4"/>
+                <c:ptCount val="3"/>
                 <c:pt idx="0">
-                  <c:v>496</c:v>
+                  <c:v>554.3</c:v>
                 </c:pt>
                 <c:pt idx="1">
-                  <c:v>519</c:v>
+                  <c:v>574.9</c:v>
                 </c:pt>
                 <c:pt idx="2">
-                  <c:v>555</c:v>
-                </c:pt>
-                <c:pt idx="3">
-                  <c:v>588</c:v>
+                  <c:v>703.75</c:v>
                 </c:pt>
               </c:numCache>
             </c:numRef>
@@ -13012,19 +12119,19 @@
                 <c:formatCode>General</c:formatCode>
                 <c:ptCount val="5"/>
                 <c:pt idx="0">
-                  <c:v>128</c:v>
+                  <c:v>135.35</c:v>
                 </c:pt>
                 <c:pt idx="1">
-                  <c:v>125</c:v>
+                  <c:v>137.45</c:v>
                 </c:pt>
                 <c:pt idx="2">
-                  <c:v>130</c:v>
+                  <c:v>137.4</c:v>
                 </c:pt>
                 <c:pt idx="3">
-                  <c:v>135</c:v>
+                  <c:v>149.2</c:v>
                 </c:pt>
                 <c:pt idx="4">
-                  <c:v>135</c:v>
+                  <c:v>147.15</c:v>
                 </c:pt>
               </c:numCache>
             </c:numRef>
@@ -13101,19 +12208,19 @@
                 <c:formatCode>General</c:formatCode>
                 <c:ptCount val="5"/>
                 <c:pt idx="0">
-                  <c:v>137</c:v>
+                  <c:v>142.35</c:v>
                 </c:pt>
                 <c:pt idx="1">
-                  <c:v>141</c:v>
+                  <c:v>141.85</c:v>
                 </c:pt>
                 <c:pt idx="2">
-                  <c:v>144</c:v>
+                  <c:v>146.45</c:v>
                 </c:pt>
                 <c:pt idx="3">
-                  <c:v>148</c:v>
+                  <c:v>158.2</c:v>
                 </c:pt>
                 <c:pt idx="4">
-                  <c:v>147</c:v>
+                  <c:v>152.85</c:v>
                 </c:pt>
               </c:numCache>
             </c:numRef>
@@ -13190,19 +12297,19 @@
                 <c:formatCode>General</c:formatCode>
                 <c:ptCount val="5"/>
                 <c:pt idx="0">
-                  <c:v>276</c:v>
+                  <c:v>277.4</c:v>
                 </c:pt>
                 <c:pt idx="1">
-                  <c:v>299</c:v>
+                  <c:v>298.0</c:v>
                 </c:pt>
                 <c:pt idx="2">
-                  <c:v>318</c:v>
+                  <c:v>317.65</c:v>
                 </c:pt>
                 <c:pt idx="3">
-                  <c:v>368</c:v>
+                  <c:v>366.95</c:v>
                 </c:pt>
                 <c:pt idx="4">
-                  <c:v>373</c:v>
+                  <c:v>378.45</c:v>
                 </c:pt>
               </c:numCache>
             </c:numRef>
@@ -13279,19 +12386,19 @@
                 <c:formatCode>General</c:formatCode>
                 <c:ptCount val="5"/>
                 <c:pt idx="0">
-                  <c:v>380</c:v>
+                  <c:v>423.1</c:v>
                 </c:pt>
                 <c:pt idx="1">
-                  <c:v>433</c:v>
+                  <c:v>480.65</c:v>
                 </c:pt>
                 <c:pt idx="2">
-                  <c:v>480</c:v>
+                  <c:v>514.6</c:v>
                 </c:pt>
                 <c:pt idx="3">
-                  <c:v>581</c:v>
+                  <c:v>618.05</c:v>
                 </c:pt>
                 <c:pt idx="4">
-                  <c:v>607</c:v>
+                  <c:v>643.35</c:v>
                 </c:pt>
               </c:numCache>
             </c:numRef>
@@ -13369,19 +12476,19 @@
                 <c:formatCode>General</c:formatCode>
                 <c:ptCount val="5"/>
                 <c:pt idx="0">
-                  <c:v>476</c:v>
+                  <c:v>498.3</c:v>
                 </c:pt>
                 <c:pt idx="1">
-                  <c:v>537</c:v>
+                  <c:v>560.95</c:v>
                 </c:pt>
                 <c:pt idx="2">
-                  <c:v>595</c:v>
+                  <c:v>615.0</c:v>
                 </c:pt>
                 <c:pt idx="3">
-                  <c:v>705</c:v>
+                  <c:v>732.4</c:v>
                 </c:pt>
                 <c:pt idx="4">
-                  <c:v>740</c:v>
+                  <c:v>772.05</c:v>
                 </c:pt>
               </c:numCache>
             </c:numRef>
@@ -13596,7 +12703,7 @@
               <c:strCache>
                 <c:ptCount val="1"/>
                 <c:pt idx="0">
-                  <c:v>da solo (BPF_PROG_TEST_RUN)</c:v>
+                  <c:v>nodo saturo (tempo di CPU)</c:v>
                 </c:pt>
               </c:strCache>
             </c:strRef>
@@ -13625,9 +12732,9 @@
           </c:marker>
           <c:cat>
             <c:strRef>
-              <c:f>Sheet1!$A$2:$A$7</c:f>
+              <c:f>Sheet1!$A$2:$A$6</c:f>
               <c:strCache>
-                <c:ptCount val="6"/>
+                <c:ptCount val="5"/>
                 <c:pt idx="0">
                   <c:v>1</c:v>
                 </c:pt>
@@ -13641,9 +12748,6 @@
                   <c:v>4</c:v>
                 </c:pt>
                 <c:pt idx="4">
-                  <c:v>5</c:v>
-                </c:pt>
-                <c:pt idx="5">
                   <c:v>6</c:v>
                 </c:pt>
               </c:strCache>
@@ -13651,27 +12755,24 @@
           </c:cat>
           <c:val>
             <c:numRef>
-              <c:f>Sheet1!$B$2:$B$7</c:f>
+              <c:f>Sheet1!$B$2:$B$6</c:f>
               <c:numCache>
                 <c:formatCode>General</c:formatCode>
-                <c:ptCount val="6"/>
+                <c:ptCount val="5"/>
                 <c:pt idx="0">
-                  <c:v>157</c:v>
+                  <c:v>183.3</c:v>
                 </c:pt>
                 <c:pt idx="1">
-                  <c:v>179</c:v>
+                  <c:v>198.9</c:v>
                 </c:pt>
                 <c:pt idx="2">
-                  <c:v>206</c:v>
+                  <c:v>240.15</c:v>
                 </c:pt>
                 <c:pt idx="3">
-                  <c:v>227</c:v>
+                  <c:v>245.2</c:v>
                 </c:pt>
                 <c:pt idx="4">
-                  <c:v>256</c:v>
-                </c:pt>
-                <c:pt idx="5">
-                  <c:v>286</c:v>
+                  <c:v>282.25</c:v>
                 </c:pt>
               </c:numCache>
             </c:numRef>
@@ -13692,7 +12793,7 @@
               <c:strCache>
                 <c:ptCount val="1"/>
                 <c:pt idx="0">
-                  <c:v>sotto traffico, minimo</c:v>
+                  <c:v>traffico leggero, minimo</c:v>
                 </c:pt>
               </c:strCache>
             </c:strRef>
@@ -13720,9 +12821,9 @@
           </c:marker>
           <c:cat>
             <c:strRef>
-              <c:f>Sheet1!$A$2:$A$7</c:f>
+              <c:f>Sheet1!$A$2:$A$6</c:f>
               <c:strCache>
-                <c:ptCount val="6"/>
+                <c:ptCount val="5"/>
                 <c:pt idx="0">
                   <c:v>1</c:v>
                 </c:pt>
@@ -13736,9 +12837,6 @@
                   <c:v>4</c:v>
                 </c:pt>
                 <c:pt idx="4">
-                  <c:v>5</c:v>
-                </c:pt>
-                <c:pt idx="5">
                   <c:v>6</c:v>
                 </c:pt>
               </c:strCache>
@@ -13746,27 +12844,24 @@
           </c:cat>
           <c:val>
             <c:numRef>
-              <c:f>Sheet1!$C$2:$C$7</c:f>
+              <c:f>Sheet1!$C$2:$C$6</c:f>
               <c:numCache>
                 <c:formatCode>General</c:formatCode>
-                <c:ptCount val="6"/>
+                <c:ptCount val="5"/>
                 <c:pt idx="0">
-                  <c:v>180</c:v>
+                  <c:v>164.0</c:v>
                 </c:pt>
                 <c:pt idx="1">
-                  <c:v>196</c:v>
+                  <c:v>176.5</c:v>
                 </c:pt>
                 <c:pt idx="2">
-                  <c:v>227</c:v>
+                  <c:v>210.0</c:v>
                 </c:pt>
                 <c:pt idx="3">
-                  <c:v>238</c:v>
+                  <c:v>224.0</c:v>
                 </c:pt>
                 <c:pt idx="4">
-                  <c:v>272</c:v>
-                </c:pt>
-                <c:pt idx="5">
-                  <c:v>292</c:v>
+                  <c:v>255.0</c:v>
                 </c:pt>
               </c:numCache>
             </c:numRef>
@@ -13787,7 +12882,7 @@
               <c:strCache>
                 <c:ptCount val="1"/>
                 <c:pt idx="0">
-                  <c:v>sotto traffico, media</c:v>
+                  <c:v>traffico leggero, media</c:v>
                 </c:pt>
               </c:strCache>
             </c:strRef>
@@ -13815,9 +12910,9 @@
           </c:marker>
           <c:cat>
             <c:strRef>
-              <c:f>Sheet1!$A$2:$A$7</c:f>
+              <c:f>Sheet1!$A$2:$A$6</c:f>
               <c:strCache>
-                <c:ptCount val="6"/>
+                <c:ptCount val="5"/>
                 <c:pt idx="0">
                   <c:v>1</c:v>
                 </c:pt>
@@ -13831,9 +12926,6 @@
                   <c:v>4</c:v>
                 </c:pt>
                 <c:pt idx="4">
-                  <c:v>5</c:v>
-                </c:pt>
-                <c:pt idx="5">
                   <c:v>6</c:v>
                 </c:pt>
               </c:strCache>
@@ -13841,27 +12933,24 @@
           </c:cat>
           <c:val>
             <c:numRef>
-              <c:f>Sheet1!$D$2:$D$7</c:f>
+              <c:f>Sheet1!$D$2:$D$6</c:f>
               <c:numCache>
                 <c:formatCode>General</c:formatCode>
-                <c:ptCount val="6"/>
+                <c:ptCount val="5"/>
                 <c:pt idx="0">
-                  <c:v>214</c:v>
+                  <c:v>189.0</c:v>
                 </c:pt>
                 <c:pt idx="1">
-                  <c:v>252</c:v>
+                  <c:v>203.25</c:v>
                 </c:pt>
                 <c:pt idx="2">
-                  <c:v>264</c:v>
+                  <c:v>235.0</c:v>
                 </c:pt>
                 <c:pt idx="3">
-                  <c:v>267</c:v>
+                  <c:v>254.5</c:v>
                 </c:pt>
                 <c:pt idx="4">
-                  <c:v>324</c:v>
-                </c:pt>
-                <c:pt idx="5">
-                  <c:v>356</c:v>
+                  <c:v>278.25</c:v>
                 </c:pt>
               </c:numCache>
             </c:numRef>
@@ -13906,7 +12995,7 @@
                     </a:solidFill>
                     <a:latin typeface="Calibri"/>
                   </a:rPr>
-                  <a:t>strati nascosti (4 neuroni)</a:t>
+                  <a:t>strati nascosti</a:t>
                 </a:r>
               </a:p>
             </c:rich>
@@ -14106,9 +13195,9 @@
           </c:marker>
           <c:cat>
             <c:strRef>
-              <c:f>Sheet1!$A$2:$A$5</c:f>
+              <c:f>Sheet1!$A$2:$A$4</c:f>
               <c:strCache>
-                <c:ptCount val="4"/>
+                <c:ptCount val="3"/>
                 <c:pt idx="0">
                   <c:v>2</c:v>
                 </c:pt>
@@ -14116,9 +13205,6 @@
                   <c:v>4</c:v>
                 </c:pt>
                 <c:pt idx="2">
-                  <c:v>6</c:v>
-                </c:pt>
-                <c:pt idx="3">
                   <c:v>8</c:v>
                 </c:pt>
               </c:strCache>
@@ -14126,21 +13212,18 @@
           </c:cat>
           <c:val>
             <c:numRef>
-              <c:f>Sheet1!$B$2:$B$5</c:f>
+              <c:f>Sheet1!$B$2:$B$4</c:f>
               <c:numCache>
                 <c:formatCode>General</c:formatCode>
-                <c:ptCount val="4"/>
+                <c:ptCount val="3"/>
                 <c:pt idx="0">
-                  <c:v>37</c:v>
+                  <c:v>36.85</c:v>
                 </c:pt>
                 <c:pt idx="1">
-                  <c:v>50</c:v>
+                  <c:v>48.3</c:v>
                 </c:pt>
                 <c:pt idx="2">
-                  <c:v>58</c:v>
-                </c:pt>
-                <c:pt idx="3">
-                  <c:v>76</c:v>
+                  <c:v>90.5</c:v>
                 </c:pt>
               </c:numCache>
             </c:numRef>
@@ -14189,9 +13272,9 @@
           </c:marker>
           <c:cat>
             <c:strRef>
-              <c:f>Sheet1!$A$2:$A$5</c:f>
+              <c:f>Sheet1!$A$2:$A$4</c:f>
               <c:strCache>
-                <c:ptCount val="4"/>
+                <c:ptCount val="3"/>
                 <c:pt idx="0">
                   <c:v>2</c:v>
                 </c:pt>
@@ -14199,9 +13282,6 @@
                   <c:v>4</c:v>
                 </c:pt>
                 <c:pt idx="2">
-                  <c:v>6</c:v>
-                </c:pt>
-                <c:pt idx="3">
                   <c:v>8</c:v>
                 </c:pt>
               </c:strCache>
@@ -14209,21 +13289,18 @@
           </c:cat>
           <c:val>
             <c:numRef>
-              <c:f>Sheet1!$C$2:$C$5</c:f>
+              <c:f>Sheet1!$C$2:$C$4</c:f>
               <c:numCache>
                 <c:formatCode>General</c:formatCode>
-                <c:ptCount val="4"/>
+                <c:ptCount val="3"/>
                 <c:pt idx="0">
-                  <c:v>45</c:v>
+                  <c:v>42.1</c:v>
                 </c:pt>
                 <c:pt idx="1">
-                  <c:v>57</c:v>
+                  <c:v>57.2</c:v>
                 </c:pt>
                 <c:pt idx="2">
-                  <c:v>72</c:v>
-                </c:pt>
-                <c:pt idx="3">
-                  <c:v>94</c:v>
+                  <c:v>102.05</c:v>
                 </c:pt>
               </c:numCache>
             </c:numRef>
@@ -14272,9 +13349,9 @@
           </c:marker>
           <c:cat>
             <c:strRef>
-              <c:f>Sheet1!$A$2:$A$5</c:f>
+              <c:f>Sheet1!$A$2:$A$4</c:f>
               <c:strCache>
-                <c:ptCount val="4"/>
+                <c:ptCount val="3"/>
                 <c:pt idx="0">
                   <c:v>2</c:v>
                 </c:pt>
@@ -14282,9 +13359,6 @@
                   <c:v>4</c:v>
                 </c:pt>
                 <c:pt idx="2">
-                  <c:v>6</c:v>
-                </c:pt>
-                <c:pt idx="3">
                   <c:v>8</c:v>
                 </c:pt>
               </c:strCache>
@@ -14292,21 +13366,18 @@
           </c:cat>
           <c:val>
             <c:numRef>
-              <c:f>Sheet1!$D$2:$D$5</c:f>
+              <c:f>Sheet1!$D$2:$D$4</c:f>
               <c:numCache>
                 <c:formatCode>General</c:formatCode>
-                <c:ptCount val="4"/>
+                <c:ptCount val="3"/>
                 <c:pt idx="0">
-                  <c:v>215</c:v>
+                  <c:v>197.4</c:v>
                 </c:pt>
                 <c:pt idx="1">
-                  <c:v>236</c:v>
+                  <c:v>230.4</c:v>
                 </c:pt>
                 <c:pt idx="2">
-                  <c:v>246</c:v>
-                </c:pt>
-                <c:pt idx="3">
-                  <c:v>248</c:v>
+                  <c:v>279.1</c:v>
                 </c:pt>
               </c:numCache>
             </c:numRef>
@@ -14355,9 +13426,9 @@
           </c:marker>
           <c:cat>
             <c:strRef>
-              <c:f>Sheet1!$A$2:$A$5</c:f>
+              <c:f>Sheet1!$A$2:$A$4</c:f>
               <c:strCache>
-                <c:ptCount val="4"/>
+                <c:ptCount val="3"/>
                 <c:pt idx="0">
                   <c:v>2</c:v>
                 </c:pt>
@@ -14365,9 +13436,6 @@
                   <c:v>4</c:v>
                 </c:pt>
                 <c:pt idx="2">
-                  <c:v>6</c:v>
-                </c:pt>
-                <c:pt idx="3">
                   <c:v>8</c:v>
                 </c:pt>
               </c:strCache>
@@ -14375,21 +13443,18 @@
           </c:cat>
           <c:val>
             <c:numRef>
-              <c:f>Sheet1!$E$2:$E$5</c:f>
+              <c:f>Sheet1!$E$2:$E$4</c:f>
               <c:numCache>
                 <c:formatCode>General</c:formatCode>
-                <c:ptCount val="4"/>
+                <c:ptCount val="3"/>
                 <c:pt idx="0">
-                  <c:v>334</c:v>
+                  <c:v>389.05</c:v>
                 </c:pt>
                 <c:pt idx="1">
-                  <c:v>370</c:v>
+                  <c:v>415.1</c:v>
                 </c:pt>
                 <c:pt idx="2">
-                  <c:v>390</c:v>
-                </c:pt>
-                <c:pt idx="3">
-                  <c:v>430</c:v>
+                  <c:v>537.15</c:v>
                 </c:pt>
               </c:numCache>
             </c:numRef>
@@ -14622,9 +13687,9 @@
           <c:invertIfNegative val="1"/>
           <c:cat>
             <c:strRef>
-              <c:f>Sheet1!$A$2:$A$7</c:f>
+              <c:f>Sheet1!$A$2:$A$6</c:f>
               <c:strCache>
-                <c:ptCount val="6"/>
+                <c:ptCount val="5"/>
                 <c:pt idx="0">
                   <c:v>1</c:v>
                 </c:pt>
@@ -14638,9 +13703,6 @@
                   <c:v>4</c:v>
                 </c:pt>
                 <c:pt idx="4">
-                  <c:v>5</c:v>
-                </c:pt>
-                <c:pt idx="5">
                   <c:v>6</c:v>
                 </c:pt>
               </c:strCache>
@@ -14648,27 +13710,24 @@
           </c:cat>
           <c:val>
             <c:numRef>
-              <c:f>Sheet1!$B$2:$B$7</c:f>
+              <c:f>Sheet1!$B$2:$B$6</c:f>
               <c:numCache>
                 <c:formatCode>General</c:formatCode>
-                <c:ptCount val="6"/>
+                <c:ptCount val="5"/>
                 <c:pt idx="0">
-                  <c:v>547</c:v>
+                  <c:v>429.0</c:v>
                 </c:pt>
                 <c:pt idx="1">
-                  <c:v>618</c:v>
+                  <c:v>526.0</c:v>
                 </c:pt>
                 <c:pt idx="2">
-                  <c:v>663</c:v>
+                  <c:v>509.0</c:v>
                 </c:pt>
                 <c:pt idx="3">
-                  <c:v>739</c:v>
+                  <c:v>636.5</c:v>
                 </c:pt>
                 <c:pt idx="4">
-                  <c:v>814</c:v>
-                </c:pt>
-                <c:pt idx="5">
-                  <c:v>874</c:v>
+                  <c:v>695.0</c:v>
                 </c:pt>
               </c:numCache>
             </c:numRef>
@@ -14716,9 +13775,9 @@
           <c:invertIfNegative val="1"/>
           <c:cat>
             <c:strRef>
-              <c:f>Sheet1!$A$2:$A$7</c:f>
+              <c:f>Sheet1!$A$2:$A$6</c:f>
               <c:strCache>
-                <c:ptCount val="6"/>
+                <c:ptCount val="5"/>
                 <c:pt idx="0">
                   <c:v>1</c:v>
                 </c:pt>
@@ -14732,9 +13791,6 @@
                   <c:v>4</c:v>
                 </c:pt>
                 <c:pt idx="4">
-                  <c:v>5</c:v>
-                </c:pt>
-                <c:pt idx="5">
                   <c:v>6</c:v>
                 </c:pt>
               </c:strCache>
@@ -14742,27 +13798,24 @@
           </c:cat>
           <c:val>
             <c:numRef>
-              <c:f>Sheet1!$C$2:$C$7</c:f>
+              <c:f>Sheet1!$C$2:$C$6</c:f>
               <c:numCache>
                 <c:formatCode>General</c:formatCode>
-                <c:ptCount val="6"/>
+                <c:ptCount val="5"/>
                 <c:pt idx="0">
-                  <c:v>987</c:v>
+                  <c:v>915.0</c:v>
                 </c:pt>
                 <c:pt idx="1">
-                  <c:v>1045</c:v>
+                  <c:v>730.0</c:v>
                 </c:pt>
                 <c:pt idx="2">
-                  <c:v>1106</c:v>
+                  <c:v>1048.0</c:v>
                 </c:pt>
                 <c:pt idx="3">
-                  <c:v>1182</c:v>
+                  <c:v>819.5</c:v>
                 </c:pt>
                 <c:pt idx="4">
-                  <c:v>1245</c:v>
-                </c:pt>
-                <c:pt idx="5">
-                  <c:v>1313</c:v>
+                  <c:v>1240.0</c:v>
                 </c:pt>
               </c:numCache>
             </c:numRef>
@@ -14810,9 +13863,9 @@
           <c:invertIfNegative val="0"/>
           <c:cat>
             <c:strRef>
-              <c:f>Sheet1!$A$2:$A$7</c:f>
+              <c:f>Sheet1!$A$2:$A$6</c:f>
               <c:strCache>
-                <c:ptCount val="6"/>
+                <c:ptCount val="5"/>
                 <c:pt idx="0">
                   <c:v>1</c:v>
                 </c:pt>
@@ -14826,9 +13879,6 @@
                   <c:v>4</c:v>
                 </c:pt>
                 <c:pt idx="4">
-                  <c:v>5</c:v>
-                </c:pt>
-                <c:pt idx="5">
                   <c:v>6</c:v>
                 </c:pt>
               </c:strCache>
@@ -14836,27 +13886,24 @@
           </c:cat>
           <c:val>
             <c:numRef>
-              <c:f>Sheet1!$D$2:$D$7</c:f>
+              <c:f>Sheet1!$D$2:$D$6</c:f>
               <c:numCache>
                 <c:formatCode>General</c:formatCode>
-                <c:ptCount val="6"/>
+                <c:ptCount val="5"/>
                 <c:pt idx="0">
-                  <c:v>14604</c:v>
+                  <c:v>14604.0</c:v>
                 </c:pt>
                 <c:pt idx="1">
-                  <c:v>15089</c:v>
+                  <c:v>15089.0</c:v>
                 </c:pt>
                 <c:pt idx="2">
-                  <c:v>16813</c:v>
+                  <c:v>16813.0</c:v>
                 </c:pt>
                 <c:pt idx="3">
-                  <c:v>16945</c:v>
+                  <c:v>16945.0</c:v>
                 </c:pt>
                 <c:pt idx="4">
-                  <c:v>17939</c:v>
-                </c:pt>
-                <c:pt idx="5">
-                  <c:v>18937</c:v>
+                  <c:v>18937.0</c:v>
                 </c:pt>
               </c:numCache>
             </c:numRef>
@@ -14892,9 +13939,9 @@
           <c:invertIfNegative val="0"/>
           <c:cat>
             <c:strRef>
-              <c:f>Sheet1!$A$2:$A$7</c:f>
+              <c:f>Sheet1!$A$2:$A$6</c:f>
               <c:strCache>
-                <c:ptCount val="6"/>
+                <c:ptCount val="5"/>
                 <c:pt idx="0">
                   <c:v>1</c:v>
                 </c:pt>
@@ -14908,9 +13955,6 @@
                   <c:v>4</c:v>
                 </c:pt>
                 <c:pt idx="4">
-                  <c:v>5</c:v>
-                </c:pt>
-                <c:pt idx="5">
                   <c:v>6</c:v>
                 </c:pt>
               </c:strCache>
@@ -14918,27 +13962,24 @@
           </c:cat>
           <c:val>
             <c:numRef>
-              <c:f>Sheet1!$E$2:$E$7</c:f>
+              <c:f>Sheet1!$E$2:$E$6</c:f>
               <c:numCache>
                 <c:formatCode>General</c:formatCode>
-                <c:ptCount val="6"/>
+                <c:ptCount val="5"/>
                 <c:pt idx="0">
-                  <c:v>12288</c:v>
+                  <c:v>12288.0</c:v>
                 </c:pt>
                 <c:pt idx="1">
-                  <c:v>12288</c:v>
+                  <c:v>12288.0</c:v>
                 </c:pt>
                 <c:pt idx="2">
-                  <c:v>12288</c:v>
+                  <c:v>12288.0</c:v>
                 </c:pt>
                 <c:pt idx="3">
-                  <c:v>12288</c:v>
+                  <c:v>12288.0</c:v>
                 </c:pt>
                 <c:pt idx="4">
-                  <c:v>12288</c:v>
-                </c:pt>
-                <c:pt idx="5">
-                  <c:v>12288</c:v>
+                  <c:v>12288.0</c:v>
                 </c:pt>
               </c:numCache>
             </c:numRef>
@@ -15183,9 +14224,9 @@
           </c:marker>
           <c:cat>
             <c:strRef>
-              <c:f>Sheet1!$A$2:$A$7</c:f>
+              <c:f>Sheet1!$A$2:$A$6</c:f>
               <c:strCache>
-                <c:ptCount val="6"/>
+                <c:ptCount val="5"/>
                 <c:pt idx="0">
                   <c:v>1</c:v>
                 </c:pt>
@@ -15199,9 +14240,6 @@
                   <c:v>4</c:v>
                 </c:pt>
                 <c:pt idx="4">
-                  <c:v>5</c:v>
-                </c:pt>
-                <c:pt idx="5">
                   <c:v>6</c:v>
                 </c:pt>
               </c:strCache>
@@ -15209,27 +14247,24 @@
           </c:cat>
           <c:val>
             <c:numRef>
-              <c:f>Sheet1!$B$2:$B$7</c:f>
+              <c:f>Sheet1!$B$2:$B$6</c:f>
               <c:numCache>
                 <c:formatCode>General</c:formatCode>
-                <c:ptCount val="6"/>
+                <c:ptCount val="5"/>
                 <c:pt idx="0">
-                  <c:v>42</c:v>
+                  <c:v>38.4</c:v>
                 </c:pt>
                 <c:pt idx="1">
-                  <c:v>51</c:v>
+                  <c:v>45.5</c:v>
                 </c:pt>
                 <c:pt idx="2">
-                  <c:v>52</c:v>
+                  <c:v>47.6</c:v>
                 </c:pt>
                 <c:pt idx="3">
-                  <c:v>56</c:v>
+                  <c:v>53.35</c:v>
                 </c:pt>
                 <c:pt idx="4">
-                  <c:v>60</c:v>
-                </c:pt>
-                <c:pt idx="5">
-                  <c:v>63</c:v>
+                  <c:v>66.1</c:v>
                 </c:pt>
               </c:numCache>
             </c:numRef>
@@ -15278,9 +14313,9 @@
           </c:marker>
           <c:cat>
             <c:strRef>
-              <c:f>Sheet1!$A$2:$A$7</c:f>
+              <c:f>Sheet1!$A$2:$A$6</c:f>
               <c:strCache>
-                <c:ptCount val="6"/>
+                <c:ptCount val="5"/>
                 <c:pt idx="0">
                   <c:v>1</c:v>
                 </c:pt>
@@ -15294,9 +14329,6 @@
                   <c:v>4</c:v>
                 </c:pt>
                 <c:pt idx="4">
-                  <c:v>5</c:v>
-                </c:pt>
-                <c:pt idx="5">
                   <c:v>6</c:v>
                 </c:pt>
               </c:strCache>
@@ -15304,27 +14336,24 @@
           </c:cat>
           <c:val>
             <c:numRef>
-              <c:f>Sheet1!$C$2:$C$7</c:f>
+              <c:f>Sheet1!$C$2:$C$6</c:f>
               <c:numCache>
                 <c:formatCode>General</c:formatCode>
-                <c:ptCount val="6"/>
+                <c:ptCount val="5"/>
                 <c:pt idx="0">
-                  <c:v>49</c:v>
+                  <c:v>45.0</c:v>
                 </c:pt>
                 <c:pt idx="1">
-                  <c:v>58</c:v>
+                  <c:v>51.75</c:v>
                 </c:pt>
                 <c:pt idx="2">
-                  <c:v>60</c:v>
+                  <c:v>48.2</c:v>
                 </c:pt>
                 <c:pt idx="3">
-                  <c:v>65</c:v>
+                  <c:v>61.1</c:v>
                 </c:pt>
                 <c:pt idx="4">
-                  <c:v>67</c:v>
-                </c:pt>
-                <c:pt idx="5">
-                  <c:v>70</c:v>
+                  <c:v>66.6</c:v>
                 </c:pt>
               </c:numCache>
             </c:numRef>
@@ -15373,9 +14402,9 @@
           </c:marker>
           <c:cat>
             <c:strRef>
-              <c:f>Sheet1!$A$2:$A$7</c:f>
+              <c:f>Sheet1!$A$2:$A$6</c:f>
               <c:strCache>
-                <c:ptCount val="6"/>
+                <c:ptCount val="5"/>
                 <c:pt idx="0">
                   <c:v>1</c:v>
                 </c:pt>
@@ -15389,9 +14418,6 @@
                   <c:v>4</c:v>
                 </c:pt>
                 <c:pt idx="4">
-                  <c:v>5</c:v>
-                </c:pt>
-                <c:pt idx="5">
                   <c:v>6</c:v>
                 </c:pt>
               </c:strCache>
@@ -15399,27 +14425,24 @@
           </c:cat>
           <c:val>
             <c:numRef>
-              <c:f>Sheet1!$D$2:$D$7</c:f>
+              <c:f>Sheet1!$D$2:$D$6</c:f>
               <c:numCache>
                 <c:formatCode>General</c:formatCode>
-                <c:ptCount val="6"/>
+                <c:ptCount val="5"/>
                 <c:pt idx="0">
-                  <c:v>204</c:v>
+                  <c:v>183.3</c:v>
                 </c:pt>
                 <c:pt idx="1">
-                  <c:v>235</c:v>
+                  <c:v>198.9</c:v>
                 </c:pt>
                 <c:pt idx="2">
-                  <c:v>266</c:v>
+                  <c:v>240.15</c:v>
                 </c:pt>
                 <c:pt idx="3">
-                  <c:v>274</c:v>
+                  <c:v>245.2</c:v>
                 </c:pt>
                 <c:pt idx="4">
-                  <c:v>304</c:v>
-                </c:pt>
-                <c:pt idx="5">
-                  <c:v>328</c:v>
+                  <c:v>282.25</c:v>
                 </c:pt>
               </c:numCache>
             </c:numRef>
@@ -15468,9 +14491,9 @@
           </c:marker>
           <c:cat>
             <c:strRef>
-              <c:f>Sheet1!$A$2:$A$7</c:f>
+              <c:f>Sheet1!$A$2:$A$6</c:f>
               <c:strCache>
-                <c:ptCount val="6"/>
+                <c:ptCount val="5"/>
                 <c:pt idx="0">
                   <c:v>1</c:v>
                 </c:pt>
@@ -15484,9 +14507,6 @@
                   <c:v>4</c:v>
                 </c:pt>
                 <c:pt idx="4">
-                  <c:v>5</c:v>
-                </c:pt>
-                <c:pt idx="5">
                   <c:v>6</c:v>
                 </c:pt>
               </c:strCache>
@@ -15494,27 +14514,24 @@
           </c:cat>
           <c:val>
             <c:numRef>
-              <c:f>Sheet1!$E$2:$E$7</c:f>
+              <c:f>Sheet1!$E$2:$E$6</c:f>
               <c:numCache>
                 <c:formatCode>General</c:formatCode>
-                <c:ptCount val="6"/>
+                <c:ptCount val="5"/>
                 <c:pt idx="0">
-                  <c:v>292</c:v>
+                  <c:v>299.1</c:v>
                 </c:pt>
                 <c:pt idx="1">
-                  <c:v>369</c:v>
+                  <c:v>362.65</c:v>
                 </c:pt>
                 <c:pt idx="2">
-                  <c:v>424</c:v>
+                  <c:v>415.1</c:v>
                 </c:pt>
                 <c:pt idx="3">
-                  <c:v>470</c:v>
+                  <c:v>475.3</c:v>
                 </c:pt>
                 <c:pt idx="4">
-                  <c:v>530</c:v>
-                </c:pt>
-                <c:pt idx="5">
-                  <c:v>580</c:v>
+                  <c:v>559.4</c:v>
                 </c:pt>
               </c:numCache>
             </c:numRef>
@@ -15786,19 +14803,19 @@
                 <c:formatCode>General</c:formatCode>
                 <c:ptCount val="5"/>
                 <c:pt idx="0">
-                  <c:v>61</c:v>
+                  <c:v>69.1</c:v>
                 </c:pt>
                 <c:pt idx="1">
-                  <c:v>60</c:v>
+                  <c:v>70.7</c:v>
                 </c:pt>
                 <c:pt idx="2">
-                  <c:v>59</c:v>
+                  <c:v>71.2</c:v>
                 </c:pt>
                 <c:pt idx="3">
-                  <c:v>71</c:v>
+                  <c:v>83.25</c:v>
                 </c:pt>
                 <c:pt idx="4">
-                  <c:v>72</c:v>
+                  <c:v>81.25</c:v>
                 </c:pt>
               </c:numCache>
             </c:numRef>
@@ -15875,19 +14892,19 @@
                 <c:formatCode>General</c:formatCode>
                 <c:ptCount val="5"/>
                 <c:pt idx="0">
-                  <c:v>71</c:v>
+                  <c:v>76.1</c:v>
                 </c:pt>
                 <c:pt idx="1">
-                  <c:v>73</c:v>
+                  <c:v>75.1</c:v>
                 </c:pt>
                 <c:pt idx="2">
-                  <c:v>77</c:v>
+                  <c:v>80.25</c:v>
                 </c:pt>
                 <c:pt idx="3">
-                  <c:v>85</c:v>
+                  <c:v>92.25</c:v>
                 </c:pt>
                 <c:pt idx="4">
-                  <c:v>84</c:v>
+                  <c:v>86.95</c:v>
                 </c:pt>
               </c:numCache>
             </c:numRef>
@@ -15964,19 +14981,19 @@
                 <c:formatCode>General</c:formatCode>
                 <c:ptCount val="5"/>
                 <c:pt idx="0">
-                  <c:v>216</c:v>
+                  <c:v>211.15</c:v>
                 </c:pt>
                 <c:pt idx="1">
-                  <c:v>236</c:v>
+                  <c:v>231.25</c:v>
                 </c:pt>
                 <c:pt idx="2">
-                  <c:v>248</c:v>
+                  <c:v>251.45</c:v>
                 </c:pt>
                 <c:pt idx="3">
-                  <c:v>296</c:v>
+                  <c:v>301.0</c:v>
                 </c:pt>
                 <c:pt idx="4">
-                  <c:v>304</c:v>
+                  <c:v>312.55</c:v>
                 </c:pt>
               </c:numCache>
             </c:numRef>
@@ -16053,19 +15070,19 @@
                 <c:formatCode>General</c:formatCode>
                 <c:ptCount val="5"/>
                 <c:pt idx="0">
-                  <c:v>321</c:v>
+                  <c:v>356.85</c:v>
                 </c:pt>
                 <c:pt idx="1">
-                  <c:v>375</c:v>
+                  <c:v>413.9</c:v>
                 </c:pt>
                 <c:pt idx="2">
-                  <c:v>419</c:v>
+                  <c:v>448.4</c:v>
                 </c:pt>
                 <c:pt idx="3">
-                  <c:v>506</c:v>
+                  <c:v>552.1</c:v>
                 </c:pt>
                 <c:pt idx="4">
-                  <c:v>537</c:v>
+                  <c:v>577.45</c:v>
                 </c:pt>
               </c:numCache>
             </c:numRef>
@@ -16331,13 +15348,13 @@
                 <c:formatCode>General</c:formatCode>
                 <c:ptCount val="3"/>
                 <c:pt idx="0">
-                  <c:v>44</c:v>
+                  <c:v>1.016</c:v>
                 </c:pt>
                 <c:pt idx="1">
-                  <c:v>36</c:v>
+                  <c:v>0.795</c:v>
                 </c:pt>
                 <c:pt idx="2">
-                  <c:v>27</c:v>
+                  <c:v>0.441</c:v>
                 </c:pt>
               </c:numCache>
             </c:numRef>
@@ -16408,13 +15425,13 @@
                 <c:formatCode>General</c:formatCode>
                 <c:ptCount val="3"/>
                 <c:pt idx="0">
-                  <c:v>52</c:v>
+                  <c:v>1.012</c:v>
                 </c:pt>
                 <c:pt idx="1">
-                  <c:v>45</c:v>
+                  <c:v>0.93</c:v>
                 </c:pt>
                 <c:pt idx="2">
-                  <c:v>39</c:v>
+                  <c:v>0.623</c:v>
                 </c:pt>
               </c:numCache>
             </c:numRef>
@@ -16485,13 +15502,13 @@
                 <c:formatCode>General</c:formatCode>
                 <c:ptCount val="3"/>
                 <c:pt idx="0">
-                  <c:v>222</c:v>
+                  <c:v>1.005</c:v>
                 </c:pt>
                 <c:pt idx="1">
-                  <c:v>229</c:v>
+                  <c:v>1.028</c:v>
                 </c:pt>
                 <c:pt idx="2">
-                  <c:v>234</c:v>
+                  <c:v>1.023</c:v>
                 </c:pt>
               </c:numCache>
             </c:numRef>
@@ -16562,13 +15579,13 @@
                 <c:formatCode>General</c:formatCode>
                 <c:ptCount val="3"/>
                 <c:pt idx="0">
-                  <c:v>352</c:v>
+                  <c:v>0.997</c:v>
                 </c:pt>
                 <c:pt idx="1">
-                  <c:v>356</c:v>
+                  <c:v>1.012</c:v>
                 </c:pt>
                 <c:pt idx="2">
-                  <c:v>367</c:v>
+                  <c:v>1.014</c:v>
                 </c:pt>
               </c:numCache>
             </c:numRef>
@@ -16683,7 +15700,7 @@
                     </a:solidFill>
                     <a:latin typeface="Calibri"/>
                   </a:rPr>
-                  <a:t>ns di rete neurale per pacchetto</a:t>
+                  <a:t>misurato / previsto dalla legge densa</a:t>
                 </a:r>
               </a:p>
             </c:rich>
@@ -16832,22 +15849,22 @@
                 <c:formatCode>General</c:formatCode>
                 <c:ptCount val="6"/>
                 <c:pt idx="0">
-                  <c:v>41</c:v>
+                  <c:v>40.1</c:v>
                 </c:pt>
                 <c:pt idx="1">
-                  <c:v>41</c:v>
+                  <c:v>40.1</c:v>
                 </c:pt>
                 <c:pt idx="2">
-                  <c:v>41</c:v>
+                  <c:v>40.1</c:v>
                 </c:pt>
                 <c:pt idx="3">
-                  <c:v>41</c:v>
+                  <c:v>40.1</c:v>
                 </c:pt>
                 <c:pt idx="4">
-                  <c:v>41</c:v>
+                  <c:v>40.1</c:v>
                 </c:pt>
                 <c:pt idx="5">
-                  <c:v>41</c:v>
+                  <c:v>40.1</c:v>
                 </c:pt>
               </c:numCache>
             </c:numRef>
@@ -16929,19 +15946,19 @@
                   <c:v>0</c:v>
                 </c:pt>
                 <c:pt idx="1">
-                  <c:v>25</c:v>
+                  <c:v>26.6</c:v>
                 </c:pt>
                 <c:pt idx="2">
-                  <c:v>25</c:v>
+                  <c:v>26.6</c:v>
                 </c:pt>
                 <c:pt idx="3">
-                  <c:v>25</c:v>
+                  <c:v>26.6</c:v>
                 </c:pt>
                 <c:pt idx="4">
-                  <c:v>25</c:v>
+                  <c:v>26.6</c:v>
                 </c:pt>
                 <c:pt idx="5">
-                  <c:v>25</c:v>
+                  <c:v>26.6</c:v>
                 </c:pt>
               </c:numCache>
             </c:numRef>
@@ -17026,16 +16043,16 @@
                   <c:v>0</c:v>
                 </c:pt>
                 <c:pt idx="2">
-                  <c:v>51</c:v>
+                  <c:v>52.4</c:v>
                 </c:pt>
                 <c:pt idx="3">
-                  <c:v>58</c:v>
+                  <c:v>58.9</c:v>
                 </c:pt>
                 <c:pt idx="4">
-                  <c:v>224</c:v>
+                  <c:v>224.6</c:v>
                 </c:pt>
                 <c:pt idx="5">
-                  <c:v>359</c:v>
+                  <c:v>419.8</c:v>
                 </c:pt>
               </c:numCache>
             </c:numRef>
@@ -20826,7 +19843,7 @@
                 </a:solidFill>
                 <a:latin typeface="Calibri"/>
               </a:rPr>
-              <a:t>Quattro versioni della stessa rete neurale, misurate sul traffico vero: quanto costa un pacchetto, quante istruzioni esegue, e che cosa cambia da un P-core a un E-core.</a:t>
+              <a:t>Quattro versioni della stessa rete neurale, misurate sul traffico vero su 91 modelli diversi: quanto costa un pacchetto, quante istruzioni esegue, e che cosa cambia da un P-core a un E-core.</a:t>
             </a:r>
           </a:p>
         </p:txBody>
@@ -21169,7 +20186,7 @@
                 </a:solidFill>
                 <a:latin typeface="Calibri"/>
               </a:rPr>
-              <a:t>Un thread di xdp_gen per coda, una coda e un core d'uscita per core del nodo  ·  P: CPU 6 e 8  ·  E: CPU 12 e 16, uno per modulo</a:t>
+              <a:t>Un thread di xdp_gen, una coda e un core d'uscita per core del nodo  ·  P: CPU 6 e 8  ·  E: CPU 12 e 16  ·  mediane di 8 modelli</a:t>
             </a:r>
           </a:p>
         </p:txBody>
@@ -21256,7 +20273,7 @@
                 </a:solidFill>
                 <a:latin typeface="Calibri"/>
               </a:rPr>
-              <a:t> 95–102% del doppio; il costo per core resta quello di un core entro una decina di ns (P3 425 → 434).</a:t>
+              <a:t> 99 [94–103] % del doppio su 40 coppie modello-pipeline.</a:t>
             </a:r>
           </a:p>
         </p:txBody>
@@ -21307,7 +20324,7 @@
                 </a:solidFill>
                 <a:latin typeface="Calibri"/>
               </a:rPr>
-              <a:t> 99–102% del doppio, con un E-core per modulo: i due moduli non si disturbano.</a:t>
+              <a:t> 99 [98–101] % del doppio, con un E-core per modulo: i due moduli non si disturbano.</a:t>
             </a:r>
           </a:p>
         </p:txBody>
@@ -21737,7 +20754,7 @@
                 </a:solidFill>
                 <a:latin typeface="Calibri"/>
               </a:rPr>
-              <a:t>T1 all'ingresso del programma, T2 prima di bpf_redirect, T3 all'arrivo dall'altra parte  ·  minimi, mediana di tre giri, da 0,5 a 3 Mpps</a:t>
+              <a:t>T1 all'ingresso del programma, T2 prima di bpf_redirect, T3 all'arrivo dall'altra parte  ·  minimi, a 0,25 e 0,5 Mpps  ·  barre: mediana su 91 modelli</a:t>
             </a:r>
           </a:p>
         </p:txBody>
@@ -21929,43 +20946,7 @@
                 </a:solidFill>
                 <a:latin typeface="Calibri"/>
               </a:rPr>
-              <a:t>Da </a:t>
-            </a:r>
-            <a:r>
-              <a:rPr sz="1400" b="1" i="0">
-                <a:solidFill>
-                  <a:srgbClr val="222B36"/>
-                </a:solidFill>
-                <a:latin typeface="Calibri"/>
-              </a:rPr>
-              <a:t>26 ns</a:t>
-            </a:r>
-            <a:r>
-              <a:rPr sz="1400" b="0" i="0">
-                <a:solidFill>
-                  <a:srgbClr val="222B36"/>
-                </a:solidFill>
-                <a:latin typeface="Calibri"/>
-              </a:rPr>
-              <a:t> (baseline) a </a:t>
-            </a:r>
-            <a:r>
-              <a:rPr sz="1400" b="1" i="0">
-                <a:solidFill>
-                  <a:srgbClr val="222B36"/>
-                </a:solidFill>
-                <a:latin typeface="Calibri"/>
-              </a:rPr>
-              <a:t>331 ns</a:t>
-            </a:r>
-            <a:r>
-              <a:rPr sz="1400" b="0" i="0">
-                <a:solidFill>
-                  <a:srgbClr val="222B36"/>
-                </a:solidFill>
-                <a:latin typeface="Calibri"/>
-              </a:rPr>
-              <a:t> (P3) sul P-core; sull'E-core dal 7% al 31% in più (P3 434 ns).</a:t>
+              <a:t>Da 27 ns (baseline) a 391 ns (P3) sul P-core, mediane; P3 va da 237–797 ns secondo il modello.</a:t>
             </a:r>
           </a:p>
         </p:txBody>
@@ -22139,43 +21120,7 @@
                 </a:solidFill>
                 <a:latin typeface="Calibri"/>
               </a:rPr>
-              <a:t>Redirect, veth e ricezione: </a:t>
-            </a:r>
-            <a:r>
-              <a:rPr sz="1400" b="1" i="0">
-                <a:solidFill>
-                  <a:srgbClr val="222B36"/>
-                </a:solidFill>
-                <a:latin typeface="Calibri"/>
-              </a:rPr>
-              <a:t>~210 ns</a:t>
-            </a:r>
-            <a:r>
-              <a:rPr sz="1400" b="0" i="0">
-                <a:solidFill>
-                  <a:srgbClr val="222B36"/>
-                </a:solidFill>
-                <a:latin typeface="Calibri"/>
-              </a:rPr>
-              <a:t> sul P-core, </a:t>
-            </a:r>
-            <a:r>
-              <a:rPr sz="1400" b="1" i="0">
-                <a:solidFill>
-                  <a:srgbClr val="222B36"/>
-                </a:solidFill>
-                <a:latin typeface="Calibri"/>
-              </a:rPr>
-              <a:t>~245</a:t>
-            </a:r>
-            <a:r>
-              <a:rPr sz="1400" b="0" i="0">
-                <a:solidFill>
-                  <a:srgbClr val="222B36"/>
-                </a:solidFill>
-                <a:latin typeface="Calibri"/>
-              </a:rPr>
-              <a:t> sull'E-core, uguale per tutte le pipeline.</a:t>
+              <a:t>Redirect, veth e ricezione: 187–221 ns sul P-core, 226–274 sull'E-core, su ogni modello e pipeline.</a:t>
             </a:r>
           </a:p>
         </p:txBody>
@@ -22349,7 +21294,7 @@
                 </a:solidFill>
                 <a:latin typeface="Calibri"/>
               </a:rPr>
-              <a:t>Il trasporto è un costo comune che non dipende dalla pipeline; il programma pesa di più sull'E-core quanto più è lungo. La latenza minima arrivo → ripartenza va da 221 a 609 ns sul P-core, da 282 a 727 sull'E-core.</a:t>
+              <a:t>Il trasporto è un costo comune che non dipende né dalla pipeline né dal modello; il programma pesa di più sull'E-core quanto più è lungo. La latenza minima arrivo → ripartenza va da 221 a 595 ns sul P-core, da 267 a 741 sull'E-core (mediane).</a:t>
             </a:r>
           </a:p>
         </p:txBody>
@@ -22594,7 +21539,7 @@
                 </a:solidFill>
                 <a:latin typeface="Calibri"/>
               </a:rPr>
-              <a:t>Sei classi: stato dei collegamenti e TTL scelti perché la rete decida proprio quella classe; verificato su ogni pipeline  ·  P-core a 3,5 GHz</a:t>
+              <a:t>Una sessione per classe decisa, verificata su ogni pipeline  ·  P-core a 3,5 GHz  ·  mediane: 6 modelli per le taglie, 8 per le classi, dal più leggero al più pesante</a:t>
             </a:r>
           </a:p>
         </p:txBody>
@@ -22681,7 +21626,7 @@
                 </a:solidFill>
                 <a:latin typeface="Calibri"/>
               </a:rPr>
-              <a:t> (entro l'1 %). Il nodo legge solo l'intestazione, come su una scheda di rete vera.</a:t>
+              <a:t> (1,2 [0,3–3,1] % fra 64 e 1 514 byte, 30 coppie). Il nodo legge solo l'intestazione.</a:t>
             </a:r>
           </a:p>
         </p:txBody>
@@ -22723,7 +21668,7 @@
                 </a:solidFill>
                 <a:latin typeface="Calibri"/>
               </a:rPr>
-              <a:t>Porta d'uscita: nessun effetto.</a:t>
+              <a:t>Porta d'uscita: nessun effetto</a:t>
             </a:r>
             <a:r>
               <a:rPr sz="1400" b="0" i="0">
@@ -22732,25 +21677,7 @@
                 </a:solidFill>
                 <a:latin typeface="Calibri"/>
               </a:rPr>
-              <a:t> </a:t>
-            </a:r>
-            <a:r>
-              <a:rPr sz="1400" b="1" i="0">
-                <a:solidFill>
-                  <a:srgbClr val="222B36"/>
-                </a:solidFill>
-                <a:latin typeface="Calibri"/>
-              </a:rPr>
-              <a:t>Scartare costa ~50 ns in più</a:t>
-            </a:r>
-            <a:r>
-              <a:rPr sz="1400" b="0" i="0">
-                <a:solidFill>
-                  <a:srgbClr val="222B36"/>
-                </a:solidFill>
-                <a:latin typeface="Calibri"/>
-              </a:rPr>
-              <a:t>: la pagina si libera sul core del nodo.</a:t>
+              <a:t> (0 [0–9] % fra le classi che inoltrano). Scartare costa 51 [17–63] ns in più.</a:t>
             </a:r>
           </a:p>
         </p:txBody>
@@ -22924,25 +21851,7 @@
                 </a:solidFill>
                 <a:latin typeface="Calibri"/>
               </a:rPr>
-              <a:t>Basta </a:t>
-            </a:r>
-            <a:r>
-              <a:rPr sz="1400" b="1" i="0">
-                <a:solidFill>
-                  <a:srgbClr val="222B36"/>
-                </a:solidFill>
-                <a:latin typeface="Calibri"/>
-              </a:rPr>
-              <a:t>un numero per pipeline</a:t>
-            </a:r>
-            <a:r>
-              <a:rPr sz="1400" b="0" i="0">
-                <a:solidFill>
-                  <a:srgbClr val="222B36"/>
-                </a:solidFill>
-                <a:latin typeface="Calibri"/>
-              </a:rPr>
-              <a:t> a descrivere il costo del nodo: non dipende da taglia del pacchetto, porta d'uscita o TTL; solo la decisione di scartare costa ~50 ns in più. Il traffico in bit al secondo cresce quindi con la taglia del pacchetto.</a:t>
+              <a:t>Basta un numero per pipeline e modello a descrivere il costo del nodo: non dipende da taglia del pacchetto, porta d'uscita o TTL (TTL diversi a ogni pacchetto: 0 [-6–4] %); solo la decisione di scartare costa ~51 ns in più.</a:t>
             </a:r>
           </a:p>
         </p:txBody>
@@ -23096,7 +22005,7 @@
                 </a:solidFill>
                 <a:latin typeface="Calibri"/>
               </a:rPr>
-              <a:t>Gli stessi andamenti sul nodo vero</a:t>
+              <a:t>Profondità e pesi a zero, sul nodo vero</a:t>
             </a:r>
           </a:p>
         </p:txBody>
@@ -23180,7 +22089,7 @@
                 </a:solidFill>
                 <a:latin typeface="Calibri"/>
               </a:rPr>
-              <a:t>bench_throughput con xdp_gen, tempo di CPU per pacchetto, nodo su P-core  ·  larghezza e pari pesi in docs/testing.md §10.8</a:t>
+              <a:t>Tempo di CPU per pacchetto, xdp_gen, P-core  ·  profondità: famiglia base (53 modelli)  ·  pesi a zero: 4 forme contro il gemello denso</a:t>
             </a:r>
           </a:p>
         </p:txBody>
@@ -23267,25 +22176,7 @@
                 </a:solidFill>
                 <a:latin typeface="Calibri"/>
               </a:rPr>
-              <a:t> (strati da 4 neuroni). P3 paga </a:t>
-            </a:r>
-            <a:r>
-              <a:rPr lang="it-IT" sz="1400" b="1" i="0" dirty="0">
-                <a:solidFill>
-                  <a:srgbClr val="222B36"/>
-                </a:solidFill>
-                <a:latin typeface="Calibri"/>
-              </a:rPr>
-              <a:t>~60 ns per strato</a:t>
-            </a:r>
-            <a:r>
-              <a:rPr lang="it-IT" sz="1400" b="0" i="0" dirty="0">
-                <a:solidFill>
-                  <a:srgbClr val="222B36"/>
-                </a:solidFill>
-                <a:latin typeface="Calibri"/>
-              </a:rPr>
-              <a:t> (351 → 652 ns), P2 264 → 396; P1 e P1.5 quasi ferme.</a:t>
+              <a:t> (mediane per numero di strati, 53 modelli). Per strato in più, a MAC ferme: P3 ~46 ns, P2 ~20, P1 e P1.5 ~1.</a:t>
             </a:r>
           </a:p>
         </p:txBody>
@@ -23327,7 +22218,7 @@
                 </a:solidFill>
                 <a:latin typeface="Calibri"/>
               </a:rPr>
-              <a:t>Pesi a zero.</a:t>
+              <a:t>Pesi a zero</a:t>
             </a:r>
             <a:r>
               <a:rPr sz="1400" b="0" i="0">
@@ -23336,7 +22227,7 @@
                 </a:solidFill>
                 <a:latin typeface="Calibri"/>
               </a:rPr>
-              <a:t> Al 90 % di zeri P1 113 → 95 ns, P1.5 120 → 106; P2 e P3 invariate, con le stesse istruzioni per pacchetto.</a:t>
+              <a:t> (tempo del nodo diviso quello del modello denso con la stessa forma). Al 90 % P1 0,77×, P1.5 0,83×; P2 e P3 ferme.</a:t>
             </a:r>
           </a:p>
         </p:txBody>
@@ -23510,25 +22401,7 @@
                 </a:solidFill>
                 <a:latin typeface="Calibri"/>
               </a:rPr>
-              <a:t>Le conclusioni del programma da solo valgono sul nodo vero, con il </a:t>
-            </a:r>
-            <a:r>
-              <a:rPr sz="1500" b="1" i="0">
-                <a:solidFill>
-                  <a:srgbClr val="222B36"/>
-                </a:solidFill>
-                <a:latin typeface="Calibri"/>
-              </a:rPr>
-              <a:t>costo fisso del nodo</a:t>
-            </a:r>
-            <a:r>
-              <a:rPr sz="1500" b="0" i="0">
-                <a:solidFill>
-                  <a:srgbClr val="222B36"/>
-                </a:solidFill>
-                <a:latin typeface="Calibri"/>
-              </a:rPr>
-              <a:t> (~66 ns) in più. Sugli E-core le stesse curve, più alte del 20–30 %.</a:t>
+              <a:t>Sul nodo vero, su tutta la popolazione: la profondità costa soprattutto a P3 e P2, i pesi a zero aiutano solo P1 e P1.5. Il costo fisso del nodo (~67 ns) resta lo stesso con qualunque modello.</a:t>
             </a:r>
           </a:p>
         </p:txBody>
@@ -23682,7 +22555,7 @@
                 </a:solidFill>
                 <a:latin typeface="Calibri"/>
               </a:rPr>
-              <a:t>Ogni strato di P3 costa esattamente 1 096 istruzioni</a:t>
+              <a:t>Ogni strato di P3 costa ~900 istruzioni</a:t>
             </a:r>
           </a:p>
         </p:txBody>
@@ -23766,7 +22639,7 @@
                 </a:solidFill>
                 <a:latin typeface="Calibri"/>
               </a:rPr>
-              <a:t>Modelli sintetici 65-4×d-7, stesso descrittore del checkpoint  ·  contatori hardware del core del nodo, per pacchetto</a:t>
+              <a:t>Mediane per numero di strati sui 53 modelli della famiglia base  ·  leggi su tutti i modelli densi  ·  contatori hardware del core del nodo, per pacchetto</a:t>
             </a:r>
           </a:p>
         </p:txBody>
@@ -23853,25 +22726,7 @@
                 </a:solidFill>
                 <a:latin typeface="Calibri"/>
               </a:rPr>
-              <a:t> P3: 5 488 → 10 952, </a:t>
-            </a:r>
-            <a:r>
-              <a:rPr lang="it-IT" sz="1400" b="1" i="0" dirty="0">
-                <a:solidFill>
-                  <a:srgbClr val="222B36"/>
-                </a:solidFill>
-                <a:latin typeface="Calibri"/>
-              </a:rPr>
-              <a:t>+1 096 per strato</a:t>
-            </a:r>
-            <a:r>
-              <a:rPr lang="it-IT" sz="1400" b="0" i="0" dirty="0">
-                <a:solidFill>
-                  <a:srgbClr val="222B36"/>
-                </a:solidFill>
-                <a:latin typeface="Calibri"/>
-              </a:rPr>
-              <a:t> a ogni passo, identiche su P-core ed E-core. P2 cresce a passi irregolari: srotola e ricompila.</a:t>
+              <a:t> Legge su 83 modelli: P3 +901 per strato (r² 0,99), identiche su P-core ed E-core; P2 +370 per strato.</a:t>
             </a:r>
           </a:p>
         </p:txBody>
@@ -23922,7 +22777,7 @@
                 </a:solidFill>
                 <a:latin typeface="Calibri"/>
               </a:rPr>
-              <a:t> P3 ~60 ns per strato sul P-core (351 → 652), ~70 sull'E-core (447 → 801). Tratteggio = E-core.</a:t>
+              <a:t> P3 ~46 ns per strato sul P-core, ~62 sull'E-core (legge). Tratteggio = E-core.</a:t>
             </a:r>
           </a:p>
         </p:txBody>
@@ -24096,7 +22951,7 @@
                 </a:solidFill>
                 <a:latin typeface="Calibri"/>
               </a:rPr>
-              <a:t>In P3 ogni strato è un salto più le letture che ricostruiscono il contesto: sempre le stesse 1 096 istruzioni. La profondità si paga a ogni pacchetto, e sull'E-core un po' di più.</a:t>
+              <a:t>In P3 ogni strato è un salto più le letture che ricostruiscono il contesto: lo stesso conto di istruzioni a ogni strato, su ogni modello. La profondità si paga a ogni pacchetto, e sull'E-core un po' di più.</a:t>
             </a:r>
           </a:p>
         </p:txBody>
@@ -24334,7 +23189,7 @@
                 </a:solidFill>
                 <a:latin typeface="Calibri"/>
               </a:rPr>
-              <a:t>Tempo di CPU per pacchetto, nodo su P-core  ·  tratteggio: P3 sull'E-core  ·  modelli sintetici con il descrittore del checkpoint</a:t>
+              <a:t>Tempo di CPU per pacchetto, nodo su P-core  ·  tratteggio: P3 sull'E-core  ·  larghezza: famiglia base (53 modelli); pari pesi: famiglia imbuto (10 modelli, 2 composizioni)</a:t>
             </a:r>
           </a:p>
         </p:txBody>
@@ -24421,7 +23276,7 @@
                 </a:solidFill>
                 <a:latin typeface="Calibri"/>
               </a:rPr>
-              <a:t> Da 2 a 8 neuroni sale su tutte: P1 104 → 145, P3 391 → 496 ns.</a:t>
+              <a:t> Da 2 a 8 neuroni sale su tutte: P1 103 → 158, P3 457 → 605 ns (mediane).</a:t>
             </a:r>
           </a:p>
         </p:txBody>
@@ -24472,7 +23327,7 @@
                 </a:solidFill>
                 <a:latin typeface="Calibri"/>
               </a:rPr>
-              <a:t> Da 1 a 5 strati P2 +35%, P3 +60%; le P1 restano a 125–148 ns.</a:t>
+              <a:t> Da 1 a 5 strati P2 +48 %, P3 +63 %; le P1 +14–17 %.</a:t>
             </a:r>
           </a:p>
         </p:txBody>
@@ -24646,25 +23501,7 @@
                 </a:solidFill>
                 <a:latin typeface="Calibri"/>
               </a:rPr>
-              <a:t>Le scelte del programma da solo valgono sul nodo vero, con il costo fisso del nodo (~66 ns) in più. Sull'E-core le stesse curve, più alte del </a:t>
-            </a:r>
-            <a:r>
-              <a:rPr sz="1500" b="1" i="0">
-                <a:solidFill>
-                  <a:srgbClr val="222B36"/>
-                </a:solidFill>
-                <a:latin typeface="Calibri"/>
-              </a:rPr>
-              <a:t>20–35%</a:t>
-            </a:r>
-            <a:r>
-              <a:rPr sz="1500" b="0" i="0">
-                <a:solidFill>
-                  <a:srgbClr val="222B36"/>
-                </a:solidFill>
-                <a:latin typeface="Calibri"/>
-              </a:rPr>
-              <a:t>: la forma migliore non cambia con il core.</a:t>
+              <a:t>Le stesse scelte valgono sul nodo vero, con il costo fisso del nodo in più. Sull'E-core P3 sta più in alto del 16–21 %, con la stessa forma: la forma migliore non cambia con il core.</a:t>
             </a:r>
           </a:p>
         </p:txBody>
@@ -24810,7 +23647,7 @@
                 </a:solidFill>
                 <a:latin typeface="Calibri"/>
               </a:rPr>
-              <a:t>Sul nodo vero la rete neurale costa un po' di più</a:t>
+              <a:t>Leggero o saturo, la rete di P2 e P3 costa uguale</a:t>
             </a:r>
           </a:p>
         </p:txBody>
@@ -24894,7 +23731,7 @@
                 </a:solidFill>
                 <a:latin typeface="Calibri"/>
               </a:rPr>
-              <a:t>T2−T1, build strumentata (T1 all'ingresso, T2 prima di bpf_redirect), xdp_gen a 0,3 e 0,6 Mpps, baseline sottratta  ·  da solo: minimo su 7 prove  ·  P-core a 3,5 GHz</a:t>
+              <a:t>T2−T1 (build strumentata), xdp_gen a 0,25 e 0,5 Mpps, baseline sottratta  ·  mediane per strati, famiglia base (53 modelli)  ·  P-core</a:t>
             </a:r>
           </a:p>
         </p:txBody>
@@ -24972,7 +23809,7 @@
                 </a:solidFill>
                 <a:latin typeface="Calibri"/>
               </a:rPr>
-              <a:t>P3, da 1 a 6 strati. </a:t>
+              <a:t>P3.</a:t>
             </a:r>
             <a:r>
               <a:rPr lang="it-IT" sz="1400" b="0" i="0" dirty="0">
@@ -24981,7 +23818,7 @@
                 </a:solidFill>
                 <a:latin typeface="Calibri"/>
               </a:rPr>
-              <a:t>Da solo 246 → 510 ns; sotto traffico il minimo coincide (262 → 508), la media sta 45–107 ns sopra (322 → 610).</a:t>
+              <a:t> Media a traffico leggero / nodo saturo 1,02 [0,94–1,11] su 91 modelli; il minimo sta al 86 % della media.</a:t>
             </a:r>
           </a:p>
         </p:txBody>
@@ -25023,7 +23860,7 @@
                 </a:solidFill>
                 <a:latin typeface="Calibri"/>
               </a:rPr>
-              <a:t>P2. </a:t>
+              <a:t>P2.</a:t>
             </a:r>
             <a:r>
               <a:rPr sz="1400" b="0" i="0">
@@ -25032,7 +23869,7 @@
                 </a:solidFill>
                 <a:latin typeface="Calibri"/>
               </a:rPr>
-              <a:t>Da solo 157 → 286 ns, minimo 180 → 292, media 214 → 356 (+40–73 ns). P1 e P1.5: media +12–34 ns.</a:t>
+              <a:t> 1,03 [0,94–1,09]. P1 e P1.5 no: 0,77 e 0,83 (mediane), con una rete da poche decine di ns.</a:t>
             </a:r>
           </a:p>
         </p:txBody>
@@ -25206,25 +24043,7 @@
                 </a:solidFill>
                 <a:latin typeface="Calibri"/>
               </a:rPr>
-              <a:t>Le conclusioni del programma da solo valgono per la rete neurale sul nodo vero: stesse curve, stesso ordine. In servizio ogni pacchetto paga in più cache e predittori non sempre caldi: </a:t>
-            </a:r>
-            <a:r>
-              <a:rPr sz="1500" b="1" i="0">
-                <a:solidFill>
-                  <a:srgbClr val="222B36"/>
-                </a:solidFill>
-                <a:latin typeface="Calibri"/>
-              </a:rPr>
-              <a:t>10–40 ns per P1 e P1.5, 40–110 ns per P2 e P3</a:t>
-            </a:r>
-            <a:r>
-              <a:rPr sz="1500" b="0" i="0">
-                <a:solidFill>
-                  <a:srgbClr val="222B36"/>
-                </a:solidFill>
-                <a:latin typeface="Calibri"/>
-              </a:rPr>
-              <a:t>. Sull'E-core il divario è circa doppio.</a:t>
+              <a:t>Tempo di CPU a nodo saturo e T2−T1 a traffico leggero danno lo stesso costo della rete per P2 e P3, su ogni modello. Il pacchetto più veloce costa ~14 % meno della media: cache e predittori non sempre caldi.</a:t>
             </a:r>
           </a:p>
         </p:txBody>
@@ -25385,7 +24204,7 @@
                 </a:solidFill>
                 <a:latin typeface="Calibri"/>
               </a:rPr>
-              <a:t>La configurabilità si paga per pacchetto: +51 → +359 ns</a:t>
+              <a:t>La configurabilità si paga per pacchetto: +52 → +420 ns</a:t>
             </a:r>
           </a:p>
         </p:txBody>
@@ -25469,7 +24288,7 @@
                 </a:solidFill>
                 <a:latin typeface="Calibri"/>
               </a:rPr>
-              <a:t>Stesso modello, 319 pesi  ·  tempo di CPU per pacchetto, xdp_gen, nodo saturo, P-core a 3,5 GHz  ·  istruzioni, letture e salti: proprietà del programma</a:t>
+              <a:t>Mediane su 91 modelli (P2: 85)  ·  tempo di CPU, xdp_gen, P-core  ·  letture e salti per pacchetto: build strumentata</a:t>
             </a:r>
           </a:p>
         </p:txBody>
@@ -25676,7 +24495,7 @@
                           </a:solidFill>
                           <a:latin typeface="Calibri"/>
                         </a:rPr>
-                        <a:t>606</a:t>
+                        <a:t>624</a:t>
                       </a:r>
                     </a:p>
                   </a:txBody>
@@ -25775,7 +24594,7 @@
                           </a:solidFill>
                           <a:latin typeface="Calibri"/>
                         </a:rPr>
-                        <a:t>1 019</a:t>
+                        <a:t>961</a:t>
                       </a:r>
                     </a:p>
                   </a:txBody>
@@ -25874,7 +24693,7 @@
                           </a:solidFill>
                           <a:latin typeface="Calibri"/>
                         </a:rPr>
-                        <a:t>15 089</a:t>
+                        <a:t>16 813</a:t>
                       </a:r>
                     </a:p>
                   </a:txBody>
@@ -25897,7 +24716,7 @@
                           </a:solidFill>
                           <a:latin typeface="Calibri"/>
                         </a:rPr>
-                        <a:t>11</a:t>
+                        <a:t>12</a:t>
                       </a:r>
                     </a:p>
                   </a:txBody>
@@ -25996,7 +24815,7 @@
                           </a:solidFill>
                           <a:latin typeface="Calibri"/>
                         </a:rPr>
-                        <a:t>29</a:t>
+                        <a:t>23–54</a:t>
                       </a:r>
                     </a:p>
                   </a:txBody>
@@ -26019,7 +24838,7 @@
                           </a:solidFill>
                           <a:latin typeface="Calibri"/>
                         </a:rPr>
-                        <a:t>3</a:t>
+                        <a:t>1/strato</a:t>
                       </a:r>
                     </a:p>
                   </a:txBody>
@@ -26226,7 +25045,7 @@
                 </a:solidFill>
                 <a:latin typeface="Calibri"/>
               </a:rPr>
-              <a:t> (5 → 29) e nei </a:t>
+              <a:t> (5 → 35 per pacchetto) e nei </a:t>
             </a:r>
             <a:r>
               <a:rPr sz="1500" b="1" i="0">
@@ -26235,7 +25054,7 @@
                 </a:solidFill>
                 <a:latin typeface="Calibri"/>
               </a:rPr>
-              <a:t>salti fra programmi</a:t>
+              <a:t>salti</a:t>
             </a:r>
             <a:r>
               <a:rPr sz="1500" b="0" i="0">
@@ -26244,7 +25063,7 @@
                 </a:solidFill>
                 <a:latin typeface="Calibri"/>
               </a:rPr>
-              <a:t> (1 → 3), non nell'aritmetica. Sopra la baseline, rendere configurabile la forma (P2) costa </a:t>
+              <a:t> (P3: uno per strato), non nell'aritmetica. Sopra la baseline, rendere configurabile la forma (P2) costa </a:t>
             </a:r>
             <a:r>
               <a:rPr sz="1500" b="1" i="0">
@@ -26253,7 +25072,7 @@
                 </a:solidFill>
                 <a:latin typeface="Calibri"/>
               </a:rPr>
-              <a:t>~4×</a:t>
+              <a:t>4,3 [2,7–12,8]×</a:t>
             </a:r>
             <a:r>
               <a:rPr sz="1500" b="0" i="0">
@@ -26271,7 +25090,7 @@
                 </a:solidFill>
                 <a:latin typeface="Calibri"/>
               </a:rPr>
-              <a:t>~7×</a:t>
+              <a:t>7,8 [4,9–24,6]×</a:t>
             </a:r>
             <a:r>
               <a:rPr sz="1500" b="0" i="0">
@@ -26280,7 +25099,7 @@
                 </a:solidFill>
                 <a:latin typeface="Calibri"/>
               </a:rPr>
-              <a:t>. Fra P1 e P1.5 quasi niente.</a:t>
+              <a:t>. Fra P1 e P1.5: 1,1 [0,9–1,7]×.</a:t>
             </a:r>
           </a:p>
         </p:txBody>
@@ -26525,133 +25344,7 @@
                 </a:solidFill>
                 <a:latin typeface="Calibri"/>
               </a:rPr>
-              <a:t>Tempo per </a:t>
-            </a:r>
-            <a:r>
-              <a:rPr sz="1100" b="0" i="1" dirty="0" err="1">
-                <a:solidFill>
-                  <a:srgbClr val="6B7C93"/>
-                </a:solidFill>
-                <a:latin typeface="Calibri"/>
-              </a:rPr>
-              <a:t>installare</a:t>
-            </a:r>
-            <a:r>
-              <a:rPr sz="1100" b="0" i="1" dirty="0">
-                <a:solidFill>
-                  <a:srgbClr val="6B7C93"/>
-                </a:solidFill>
-                <a:latin typeface="Calibri"/>
-              </a:rPr>
-              <a:t> un </a:t>
-            </a:r>
-            <a:r>
-              <a:rPr sz="1100" b="0" i="1" dirty="0" err="1">
-                <a:solidFill>
-                  <a:srgbClr val="6B7C93"/>
-                </a:solidFill>
-                <a:latin typeface="Calibri"/>
-              </a:rPr>
-              <a:t>modello</a:t>
-            </a:r>
-            <a:r>
-              <a:rPr sz="1100" b="0" i="1" dirty="0">
-                <a:solidFill>
-                  <a:srgbClr val="6B7C93"/>
-                </a:solidFill>
-                <a:latin typeface="Calibri"/>
-              </a:rPr>
-              <a:t> nuovo </a:t>
-            </a:r>
-            <a:r>
-              <a:rPr sz="1100" b="0" i="1" dirty="0" err="1">
-                <a:solidFill>
-                  <a:srgbClr val="6B7C93"/>
-                </a:solidFill>
-                <a:latin typeface="Calibri"/>
-              </a:rPr>
-              <a:t>su</a:t>
-            </a:r>
-            <a:r>
-              <a:rPr sz="1100" b="0" i="1" dirty="0">
-                <a:solidFill>
-                  <a:srgbClr val="6B7C93"/>
-                </a:solidFill>
-                <a:latin typeface="Calibri"/>
-              </a:rPr>
-              <a:t> un </a:t>
-            </a:r>
-            <a:r>
-              <a:rPr sz="1100" b="0" i="1" dirty="0" err="1">
-                <a:solidFill>
-                  <a:srgbClr val="6B7C93"/>
-                </a:solidFill>
-                <a:latin typeface="Calibri"/>
-              </a:rPr>
-              <a:t>nodo</a:t>
-            </a:r>
-            <a:r>
-              <a:rPr sz="1100" b="0" i="1" dirty="0">
-                <a:solidFill>
-                  <a:srgbClr val="6B7C93"/>
-                </a:solidFill>
-                <a:latin typeface="Calibri"/>
-              </a:rPr>
-              <a:t> </a:t>
-            </a:r>
-            <a:r>
-              <a:rPr sz="1100" b="0" i="1" dirty="0" err="1">
-                <a:solidFill>
-                  <a:srgbClr val="6B7C93"/>
-                </a:solidFill>
-                <a:latin typeface="Calibri"/>
-              </a:rPr>
-              <a:t>già</a:t>
-            </a:r>
-            <a:r>
-              <a:rPr sz="1100" b="0" i="1" dirty="0">
-                <a:solidFill>
-                  <a:srgbClr val="6B7C93"/>
-                </a:solidFill>
-                <a:latin typeface="Calibri"/>
-              </a:rPr>
-              <a:t> in </a:t>
-            </a:r>
-            <a:r>
-              <a:rPr sz="1100" b="0" i="1" dirty="0" err="1">
-                <a:solidFill>
-                  <a:srgbClr val="6B7C93"/>
-                </a:solidFill>
-                <a:latin typeface="Calibri"/>
-              </a:rPr>
-              <a:t>servizio</a:t>
-            </a:r>
-            <a:r>
-              <a:rPr sz="1100" b="0" i="1" dirty="0">
-                <a:solidFill>
-                  <a:srgbClr val="6B7C93"/>
-                </a:solidFill>
-                <a:latin typeface="Calibri"/>
-              </a:rPr>
-              <a:t> (scala </a:t>
-            </a:r>
-            <a:r>
-              <a:rPr sz="1100" b="0" i="1" dirty="0" err="1">
-                <a:solidFill>
-                  <a:srgbClr val="6B7C93"/>
-                </a:solidFill>
-                <a:latin typeface="Calibri"/>
-              </a:rPr>
-              <a:t>logaritmica</a:t>
-            </a:r>
-            <a:r>
-              <a:rPr sz="1100" b="0" i="1" dirty="0">
-                <a:solidFill>
-                  <a:srgbClr val="6B7C93"/>
-                </a:solidFill>
-                <a:latin typeface="Calibri"/>
-              </a:rPr>
-              <a:t>) </a:t>
+              <a:t>Tempo per installare un modello nuovo su un nodo già in servizio (scala logaritmica)  ·  mediane su 89 modelli, bench_solo.py  ·  clang senza cache, fuori dal nodo</a:t>
             </a:r>
           </a:p>
         </p:txBody>
@@ -26843,43 +25536,7 @@
                 </a:solidFill>
                 <a:latin typeface="Calibri"/>
               </a:rPr>
-              <a:t>Il nodo carica un file pronto: </a:t>
-            </a:r>
-            <a:r>
-              <a:rPr sz="1400" b="1" i="0">
-                <a:solidFill>
-                  <a:srgbClr val="222B36"/>
-                </a:solidFill>
-                <a:latin typeface="Calibri"/>
-              </a:rPr>
-              <a:t>~1 ms</a:t>
-            </a:r>
-            <a:r>
-              <a:rPr sz="1400" b="0" i="0">
-                <a:solidFill>
-                  <a:srgbClr val="222B36"/>
-                </a:solidFill>
-                <a:latin typeface="Calibri"/>
-              </a:rPr>
-              <a:t>. Generarlo e compilarlo con clang, fuori dal nodo, costa </a:t>
-            </a:r>
-            <a:r>
-              <a:rPr sz="1400" b="1" i="0">
-                <a:solidFill>
-                  <a:srgbClr val="222B36"/>
-                </a:solidFill>
-                <a:latin typeface="Calibri"/>
-              </a:rPr>
-              <a:t>~80 ms</a:t>
-            </a:r>
-            <a:r>
-              <a:rPr sz="1400" b="0" i="0">
-                <a:solidFill>
-                  <a:srgbClr val="222B36"/>
-                </a:solidFill>
-                <a:latin typeface="Calibri"/>
-              </a:rPr>
-              <a:t>.</a:t>
+              <a:t>Il nodo carica un file pronto: 0,3–1,5 ms (mediana 0,6). Generarlo e compilarlo con clang, fuori dal nodo, costa 34–114 ms secondo il modello (mediana 49).</a:t>
             </a:r>
           </a:p>
         </p:txBody>
@@ -27053,25 +25710,7 @@
                 </a:solidFill>
                 <a:latin typeface="Calibri"/>
               </a:rPr>
-              <a:t>Un modello nuovo si installa </a:t>
-            </a:r>
-            <a:r>
-              <a:rPr sz="1400" b="1" i="0">
-                <a:solidFill>
-                  <a:srgbClr val="222B36"/>
-                </a:solidFill>
-                <a:latin typeface="Calibri"/>
-              </a:rPr>
-              <a:t>scrivendo una tabella</a:t>
-            </a:r>
-            <a:r>
-              <a:rPr sz="1400" b="0" i="0">
-                <a:solidFill>
-                  <a:srgbClr val="222B36"/>
-                </a:solidFill>
-                <a:latin typeface="Calibri"/>
-              </a:rPr>
-              <a:t> (~10 ms): nessun compilatore. Il programma generico si compila una volta sola (1,2–1,5 s). P1 vuole un compilatore per ogni modello nuovo, su qualche macchina.</a:t>
+              <a:t>Un modello nuovo si installa scrivendo le sue tabelle: 0,24–0,51 ms, nessun compilatore. Il programma generico si compila una volta sola all'avvio (P2 1,5–1,7 s, P3 1,2 s).</a:t>
             </a:r>
           </a:p>
         </p:txBody>
@@ -27245,61 +25884,7 @@
                 </a:solidFill>
                 <a:latin typeface="Calibri"/>
               </a:rPr>
-              <a:t>Il tempo per cambiare modello </a:t>
-            </a:r>
-            <a:r>
-              <a:rPr sz="1500" b="1" i="0">
-                <a:solidFill>
-                  <a:srgbClr val="222B36"/>
-                </a:solidFill>
-                <a:latin typeface="Calibri"/>
-              </a:rPr>
-              <a:t>non è un criterio di scelta</a:t>
-            </a:r>
-            <a:r>
-              <a:rPr sz="1500" b="0" i="0">
-                <a:solidFill>
-                  <a:srgbClr val="222B36"/>
-                </a:solidFill>
-                <a:latin typeface="Calibri"/>
-              </a:rPr>
-              <a:t>: millisecondi per tutte. Si sceglie sul </a:t>
-            </a:r>
-            <a:r>
-              <a:rPr sz="1500" b="1" i="0">
-                <a:solidFill>
-                  <a:srgbClr val="222B36"/>
-                </a:solidFill>
-                <a:latin typeface="Calibri"/>
-              </a:rPr>
-              <a:t>costo per pacchetto</a:t>
-            </a:r>
-            <a:r>
-              <a:rPr sz="1500" b="0" i="0">
-                <a:solidFill>
-                  <a:srgbClr val="222B36"/>
-                </a:solidFill>
-                <a:latin typeface="Calibri"/>
-              </a:rPr>
-              <a:t> (~50 ns di rete con i pesi compilati, ~225–360 con quelli da tabella) e su </a:t>
-            </a:r>
-            <a:r>
-              <a:rPr sz="1500" b="1" i="0">
-                <a:solidFill>
-                  <a:srgbClr val="222B36"/>
-                </a:solidFill>
-                <a:latin typeface="Calibri"/>
-              </a:rPr>
-              <a:t>dove serve un compilatore</a:t>
-            </a:r>
-            <a:r>
-              <a:rPr sz="1500" b="0" i="0">
-                <a:solidFill>
-                  <a:srgbClr val="222B36"/>
-                </a:solidFill>
-                <a:latin typeface="Calibri"/>
-              </a:rPr>
-              <a:t>.</a:t>
+              <a:t>Il tempo per cambiare modello non è un criterio di scelta: sul nodo meno di 6 ms per tutte, su ogni modello. Si sceglie sul costo per pacchetto (19–155 ns di rete con i pesi compilati, 129–852 con quelli da tabella) e su dove serve un compilatore.</a:t>
             </a:r>
           </a:p>
         </p:txBody>
@@ -27544,7 +26129,7 @@
                 </a:solidFill>
                 <a:latin typeface="Calibri"/>
               </a:rPr>
-              <a:t>Tempo di CPU meno la baseline, xdp_gen, nodo saturo  ·  a sinistra una rete diversa per ogni punto  ·  P-core a 3,5 GHz</a:t>
+              <a:t>Tempo di CPU meno la baseline, xdp_gen, P-core  ·  a sinistra: misurato meno la legge, mediana per taglia della rete  ·  a destra: famiglia base</a:t>
             </a:r>
           </a:p>
         </p:txBody>
@@ -27622,7 +26207,7 @@
                 </a:solidFill>
                 <a:latin typeface="Calibri"/>
               </a:rPr>
-              <a:t>L'identità del nodo attiva una colonna sola di pesi. </a:t>
+              <a:t>Nodi della rete</a:t>
             </a:r>
             <a:r>
               <a:rPr lang="it-IT" sz="1400" b="0" i="0" dirty="0">
@@ -27631,25 +26216,7 @@
                 </a:solidFill>
                 <a:latin typeface="Calibri"/>
               </a:rPr>
-              <a:t/>
-            </a:r>
-            <a:r>
-              <a:rPr lang="it-IT" sz="1400" b="0" i="0" dirty="0" err="1">
-                <a:solidFill>
-                  <a:srgbClr val="222B36"/>
-                </a:solidFill>
-                <a:latin typeface="Calibri"/>
-              </a:rPr>
-              <a:t/>
-            </a:r>
-            <a:r>
-              <a:rPr lang="it-IT" sz="1400" b="0" i="0" dirty="0">
-                <a:solidFill>
-                  <a:srgbClr val="222B36"/>
-                </a:solidFill>
-                <a:latin typeface="Calibri"/>
-              </a:rPr>
-              <a:t>P1 statica la conosce già alla compilazione e la somma al bias; le altre la leggono da tabella.</a:t>
+              <a:t> (56 modelli, reti da 10 a 100 nodi). Lo scarto dalla legge non cresce: al più 0,03 ns per nodo.</a:t>
             </a:r>
             <a:endParaRPr sz="1400" b="0" i="0" dirty="0">
               <a:solidFill>
@@ -27697,7 +26264,7 @@
                 </a:solidFill>
                 <a:latin typeface="Calibri"/>
               </a:rPr>
-              <a:t>Da 2 a 8 neuroni sale su tutte e quattro</a:t>
+              <a:t>Larghezza del modello.</a:t>
             </a:r>
             <a:r>
               <a:rPr sz="1400" b="0" i="0">
@@ -27706,7 +26273,7 @@
                 </a:solidFill>
                 <a:latin typeface="Calibri"/>
               </a:rPr>
-              <a:t>: P1 37 → 76 ns, P3 334 → 430 ns. Un neurone in più è lavoro vero, a ogni pacchetto.</a:t>
+              <a:t> Da 2 a 8 neuroni sale su tutte e quattro: P1 37 → 90 ns, P3 389 → 537 ns (mediane).</a:t>
             </a:r>
           </a:p>
         </p:txBody>
@@ -28203,7 +26770,7 @@
                 </a:solidFill>
                 <a:latin typeface="Calibri"/>
               </a:rPr>
-              <a:t>Tutte e quattro calcolano la stessa rete e prendono la stessa decisione. Cambia solo </a:t>
+              <a:t>Tutte e quattro calcolano lo stesso modello e prendono la stessa decisione: verificato su 91 modelli (85 per P2, che ha un tetto sui pesi). Cambia solo </a:t>
             </a:r>
             <a:r>
               <a:rPr sz="1800" b="1" i="0">
@@ -29234,22 +27801,13 @@
               </a:spcAft>
             </a:pPr>
             <a:r>
-              <a:rPr sz="1300" b="1" i="0">
+              <a:rPr sz="1300" b="0" i="0">
                 <a:solidFill>
                   <a:srgbClr val="222B36"/>
                 </a:solidFill>
                 <a:latin typeface="Calibri"/>
               </a:rPr>
-              <a:t>*</a:t>
-            </a:r>
-            <a:r>
-              <a:rPr sz="1300" b="0" i="0">
-                <a:solidFill>
-                  <a:srgbClr val="222B36"/>
-                </a:solidFill>
-                <a:latin typeface="Calibri"/>
-              </a:rPr>
-              <a:t> Solo P1 statica può congelare anche </a:t>
+              <a:t>* Solo P1 statica può congelare anche </a:t>
             </a:r>
             <a:r>
               <a:rPr sz="1300" b="1" i="0">
@@ -29267,25 +27825,7 @@
                 </a:solidFill>
                 <a:latin typeface="Calibri"/>
               </a:rPr>
-              <a:t>: le colonne dei collegamenti che non esistono non vengono generate (se un link è su o giù resta letto a runtime). Serve il nodo congelato, perché le porte dipendono da quale nodo si è. Nelle misure è usato solo nell'asse «porte presenti»; altrove P1 statica congela </a:t>
-            </a:r>
-            <a:r>
-              <a:rPr sz="1300" b="1" i="0">
-                <a:solidFill>
-                  <a:srgbClr val="222B36"/>
-                </a:solidFill>
-                <a:latin typeface="Calibri"/>
-              </a:rPr>
-              <a:t>solo il nodo</a:t>
-            </a:r>
-            <a:r>
-              <a:rPr sz="1300" b="0" i="0">
-                <a:solidFill>
-                  <a:srgbClr val="222B36"/>
-                </a:solidFill>
-                <a:latin typeface="Calibri"/>
-              </a:rPr>
-              <a:t>.</a:t>
+              <a:t>: le colonne dei collegamenti che non esistono non vengono generate (se un link è su o giù resta letto a runtime). Serve il nodo congelato, perché le porte dipendono da quale nodo si è. Le misure di queste slide usano tutte le porte.</a:t>
             </a:r>
           </a:p>
         </p:txBody>
@@ -29654,7 +28194,7 @@
                 </a:solidFill>
                 <a:latin typeface="Calibri"/>
               </a:rPr>
-              <a:t>Quattro neuroni per strato  ·  dimensione: istruzioni del programma caricato  ·  tempo: CPU meno baseline, xdp_gen, P-core a 3,5 GHz</a:t>
+              <a:t>Mediane per numero di strati, famiglia base (53 modelli)  ·  dimensione: istruzioni del programma caricato  ·  tempo: CPU meno baseline, xdp_gen, P-core a 3,5 GHz</a:t>
             </a:r>
           </a:p>
         </p:txBody>
@@ -29747,7 +28287,7 @@
                 </a:solidFill>
                 <a:latin typeface="Calibri"/>
               </a:rPr>
-              <a:t> P2 ricompila e srotola: 14 604 → 18 937 istruzioni. P3 non si muove: 12 288 a ogni profondità.</a:t>
+              <a:t> P2 ricompila e srotola: +887 istruzioni per strato (r² 0,96). P3 non si muove: 12 288 su ogni modello.</a:t>
             </a:r>
           </a:p>
         </p:txBody>
@@ -29798,7 +28338,7 @@
                 </a:solidFill>
                 <a:latin typeface="Calibri"/>
               </a:rPr>
-              <a:t> P3 paga: 292 → 580 ns da 1 a 6 strati, ~58 a strato, perché ogni strato è un salto fra programmi (da 2 a 7).</a:t>
+              <a:t> P3 paga ~46 ns per strato, P2 ~20, P1 e P1.5 ~1 (legge, a MAC ferme).</a:t>
             </a:r>
           </a:p>
         </p:txBody>
@@ -29972,43 +28512,7 @@
                 </a:solidFill>
                 <a:latin typeface="Calibri"/>
               </a:rPr>
-              <a:t>Un </a:t>
-            </a:r>
-            <a:r>
-              <a:rPr sz="1500" b="1" i="0">
-                <a:solidFill>
-                  <a:srgbClr val="222B36"/>
-                </a:solidFill>
-                <a:latin typeface="Calibri"/>
-              </a:rPr>
-              <a:t>modello profondo</a:t>
-            </a:r>
-            <a:r>
-              <a:rPr sz="1500" b="0" i="0">
-                <a:solidFill>
-                  <a:srgbClr val="222B36"/>
-                </a:solidFill>
-                <a:latin typeface="Calibri"/>
-              </a:rPr>
-              <a:t> si paga sempre: con P2 in un programma più grande da ricompilare (~870 istruzioni per strato), con P3 in </a:t>
-            </a:r>
-            <a:r>
-              <a:rPr sz="1500" b="1" i="0">
-                <a:solidFill>
-                  <a:srgbClr val="222B36"/>
-                </a:solidFill>
-                <a:latin typeface="Calibri"/>
-              </a:rPr>
-              <a:t>~58 ns per pacchetto a ogni strato</a:t>
-            </a:r>
-            <a:r>
-              <a:rPr sz="1500" b="0" i="0">
-                <a:solidFill>
-                  <a:srgbClr val="222B36"/>
-                </a:solidFill>
-                <a:latin typeface="Calibri"/>
-              </a:rPr>
-              <a:t>. P3 è la più flessibile, ed è quella che la profondità rallenta di più.</a:t>
+              <a:t>Un modello profondo si paga sempre: con P2 in un programma più grande da ricompilare (~890 istruzioni per strato), con P3 in ~46 ns per pacchetto a ogni strato. P3 è la più flessibile, ed è quella che la profondità rallenta di più.</a:t>
             </a:r>
           </a:p>
         </p:txBody>
@@ -30253,7 +28757,7 @@
                 </a:solidFill>
                 <a:latin typeface="Calibri"/>
               </a:rPr>
-              <a:t>Cinque forme con circa 592 pesi: uno strato largo, oppure cinque stretti  ·  tempo di CPU meno la baseline, xdp_gen, nodo saturo, P-core a 3,5 GHz</a:t>
+              <a:t>Cinque forme con circa 592 pesi, da 1 a 5 strati, 2 composizioni dell'ingresso (10 modelli)  ·  mediane  ·  CPU meno baseline, P-core</a:t>
             </a:r>
           </a:p>
         </p:txBody>
@@ -30445,25 +28949,7 @@
                 </a:solidFill>
                 <a:latin typeface="Calibri"/>
               </a:rPr>
-              <a:t>Da 1 a 5 strati, a pesi fermi: </a:t>
-            </a:r>
-            <a:r>
-              <a:rPr sz="1400" b="1" i="0">
-                <a:solidFill>
-                  <a:srgbClr val="222B36"/>
-                </a:solidFill>
-                <a:latin typeface="Calibri"/>
-              </a:rPr>
-              <a:t>P2 216 → 304 ns, P3 321 → 537 ns</a:t>
-            </a:r>
-            <a:r>
-              <a:rPr sz="1400" b="0" i="0">
-                <a:solidFill>
-                  <a:srgbClr val="222B36"/>
-                </a:solidFill>
-                <a:latin typeface="Calibri"/>
-              </a:rPr>
-              <a:t>.</a:t>
+              <a:t>Da 1 a 5 strati, a pesi fermi: P2 +48 [44–53] %, P3 +63 [55–70] %; ~58 ns per strato per P3.</a:t>
             </a:r>
           </a:p>
         </p:txBody>
@@ -30637,7 +29123,7 @@
                 </a:solidFill>
                 <a:latin typeface="Calibri"/>
               </a:rPr>
-              <a:t>59–85 ns</a:t>
+              <a:t>69–92 ns</a:t>
             </a:r>
             <a:r>
               <a:rPr sz="1400" b="0" i="0">
@@ -30646,7 +29132,7 @@
                 </a:solidFill>
                 <a:latin typeface="Calibri"/>
               </a:rPr>
-              <a:t>: srotolano tutto in una funzione sola, e la forma conta poco.</a:t>
+              <a:t> (mediane): srotolano tutto in una funzione sola, e la forma conta poco (~4 ns per strato).</a:t>
             </a:r>
           </a:p>
         </p:txBody>
@@ -30820,79 +29306,7 @@
                 </a:solidFill>
                 <a:latin typeface="Calibri"/>
               </a:rPr>
-              <a:t>Con le versioni </a:t>
-            </a:r>
-            <a:r>
-              <a:rPr sz="1500" b="1" i="0">
-                <a:solidFill>
-                  <a:srgbClr val="222B36"/>
-                </a:solidFill>
-                <a:latin typeface="Calibri"/>
-              </a:rPr>
-              <a:t>specializzate</a:t>
-            </a:r>
-            <a:r>
-              <a:rPr sz="1500" b="0" i="0">
-                <a:solidFill>
-                  <a:srgbClr val="222B36"/>
-                </a:solidFill>
-                <a:latin typeface="Calibri"/>
-              </a:rPr>
-              <a:t> la forma della rete si sceglie per l'</a:t>
-            </a:r>
-            <a:r>
-              <a:rPr sz="1500" b="1" i="0">
-                <a:solidFill>
-                  <a:srgbClr val="222B36"/>
-                </a:solidFill>
-                <a:latin typeface="Calibri"/>
-              </a:rPr>
-              <a:t>accuratezza</a:t>
-            </a:r>
-            <a:r>
-              <a:rPr sz="1500" b="0" i="0">
-                <a:solidFill>
-                  <a:srgbClr val="222B36"/>
-                </a:solidFill>
-                <a:latin typeface="Calibri"/>
-              </a:rPr>
-              <a:t>. Con le </a:t>
-            </a:r>
-            <a:r>
-              <a:rPr sz="1500" b="1" i="0">
-                <a:solidFill>
-                  <a:srgbClr val="222B36"/>
-                </a:solidFill>
-                <a:latin typeface="Calibri"/>
-              </a:rPr>
-              <a:t>generiche</a:t>
-            </a:r>
-            <a:r>
-              <a:rPr sz="1500" b="0" i="0">
-                <a:solidFill>
-                  <a:srgbClr val="222B36"/>
-                </a:solidFill>
-                <a:latin typeface="Calibri"/>
-              </a:rPr>
-              <a:t>, a parità di pesi, conviene una rete </a:t>
-            </a:r>
-            <a:r>
-              <a:rPr sz="1500" b="1" i="0">
-                <a:solidFill>
-                  <a:srgbClr val="222B36"/>
-                </a:solidFill>
-                <a:latin typeface="Calibri"/>
-              </a:rPr>
-              <a:t>larga e poco profonda</a:t>
-            </a:r>
-            <a:r>
-              <a:rPr sz="1500" b="0" i="0">
-                <a:solidFill>
-                  <a:srgbClr val="222B36"/>
-                </a:solidFill>
-                <a:latin typeface="Calibri"/>
-              </a:rPr>
-              <a:t>: da 1 a 5 strati il costo sale del 41 % (P2) e del 67 % (P3).</a:t>
+              <a:t>Con le versioni specializzate la forma della rete si sceglie per l'accuratezza. Con le generiche, a parità di pesi, conviene una rete larga e poco profonda: da 1 a 5 strati il costo sale del 48 % (P2) e del 63 % (P3).</a:t>
             </a:r>
           </a:p>
         </p:txBody>
@@ -31053,7 +29467,7 @@
                 </a:solidFill>
                 <a:latin typeface="Calibri"/>
               </a:rPr>
-              <a:t>Il costo per MAC è una costante, tranne che per P2</a:t>
+              <a:t>Il costo di un modello si prevede: a + b × MAC + c × strati</a:t>
             </a:r>
           </a:p>
         </p:txBody>
@@ -31137,35 +29551,11 @@
                 </a:solidFill>
                 <a:latin typeface="Calibri"/>
               </a:rPr>
-              <a:t>MAC contate dalla forma: r² ≤ 0,22; MAC eseguite: fino a 0,94  ·  tempo di CPU meno la baseline, xdp_gen, P-core a 3,5 GHz</a:t>
+              <a:t>Legge su 83 modelli densi (P2: 77), errore su modelli lasciati fuori  ·  grafico: misurato meno c × strati  ·  tabella: quote mediane dei tre termini  ·  P-core</a:t>
             </a:r>
           </a:p>
         </p:txBody>
       </p:sp>
-      <p:pic>
-        <p:nvPicPr>
-          <p:cNvPr id="14" name="Picture 13" descr="macfit.png"/>
-          <p:cNvPicPr>
-            <a:picLocks noChangeAspect="1"/>
-          </p:cNvPicPr>
-          <p:nvPr/>
-        </p:nvPicPr>
-        <p:blipFill>
-          <a:blip r:embed="rId2"/>
-          <a:stretch>
-            <a:fillRect/>
-          </a:stretch>
-        </p:blipFill>
-        <p:spPr>
-          <a:xfrm>
-            <a:off x="457200" y="1463040"/>
-            <a:ext cx="6217920" cy="3886200"/>
-          </a:xfrm>
-          <a:prstGeom prst="rect">
-            <a:avLst/>
-          </a:prstGeom>
-        </p:spPr>
-      </p:pic>
       <p:graphicFrame>
         <p:nvGraphicFramePr>
           <p:cNvPr id="8" name="Table 7"/>
@@ -31237,7 +29627,7 @@
                           </a:solidFill>
                           <a:latin typeface="Calibri"/>
                         </a:rPr>
-                        <a:t>ns per moltiplicazione</a:t>
+                        <a:t>fisso · MAC · strati</a:t>
                       </a:r>
                     </a:p>
                   </a:txBody>
@@ -31290,7 +29680,7 @@
                           </a:solidFill>
                           <a:latin typeface="Calibri"/>
                         </a:rPr>
-                        <a:t>0,22</a:t>
+                        <a:t>40 % · 50 % · 8 %</a:t>
                       </a:r>
                     </a:p>
                   </a:txBody>
@@ -31343,7 +29733,7 @@
                           </a:solidFill>
                           <a:latin typeface="Calibri"/>
                         </a:rPr>
-                        <a:t>0,18</a:t>
+                        <a:t>48 % · 46 % · 5 %</a:t>
                       </a:r>
                     </a:p>
                   </a:txBody>
@@ -31396,7 +29786,7 @@
                           </a:solidFill>
                           <a:latin typeface="Calibri"/>
                         </a:rPr>
-                        <a:t>—</a:t>
+                        <a:t>47 % · 18 % · 31 %</a:t>
                       </a:r>
                     </a:p>
                   </a:txBody>
@@ -31449,7 +29839,7 @@
                           </a:solidFill>
                           <a:latin typeface="Calibri"/>
                         </a:rPr>
-                        <a:t>0,69</a:t>
+                        <a:t>37 % · 18 % · 39 %</a:t>
                       </a:r>
                     </a:p>
                   </a:txBody>
@@ -31500,22 +29890,13 @@
               </a:spcAft>
             </a:pPr>
             <a:r>
-              <a:rPr sz="1400" b="0" i="0" dirty="0" err="1">
+              <a:rPr sz="1400" b="1" i="0" dirty="0" err="1">
                 <a:solidFill>
                   <a:srgbClr val="222B36"/>
                 </a:solidFill>
                 <a:latin typeface="Calibri"/>
               </a:rPr>
-              <a:t>Contando le moltiplicazioni </a:t>
-            </a:r>
-            <a:r>
-              <a:rPr sz="1400" b="1" i="0" dirty="0" err="1">
-                <a:solidFill>
-                  <a:srgbClr val="222B36"/>
-                </a:solidFill>
-                <a:latin typeface="Calibri"/>
-              </a:rPr>
-              <a:t>davvero eseguite</a:t>
+              <a:t>Dove va il tempo</a:t>
             </a:r>
             <a:r>
               <a:rPr sz="1400" b="0" i="0" dirty="0" err="1">
@@ -31524,7 +29905,7 @@
                 </a:solidFill>
                 <a:latin typeface="Calibri"/>
               </a:rPr>
-              <a:t>, ingressi densi, one-hot e larghezza cadono su una retta (r² 0,71–0,94). P2 no: il suo costo di partenza cambia con l'ingresso.</a:t>
+              <a:t> (quota mediana di ogni termine). P1 e P1.5: circa metà nelle moltiplicazioni. P2 e P3: 82 % nella parte fissa e negli strati, cioè tail call e letture di tabella. La legge regge su tutte (r² 0,93–0,99, errore 3–9 % su modelli non visti).</a:t>
             </a:r>
           </a:p>
         </p:txBody>
@@ -31716,7 +30097,7 @@
                 </a:solidFill>
                 <a:latin typeface="Calibri"/>
               </a:rPr>
-              <a:t>: moltiplicazioni eseguite × </a:t>
+              <a:t>: ~22 ns + </a:t>
             </a:r>
             <a:r>
               <a:rPr sz="1400" b="1" i="0">
@@ -31725,7 +30106,7 @@
                 </a:solidFill>
                 <a:latin typeface="Calibri"/>
               </a:rPr>
-              <a:t>~0,2 ns</a:t>
+              <a:t>0,26 ns</a:t>
             </a:r>
             <a:r>
               <a:rPr sz="1400" b="0" i="0">
@@ -31734,7 +30115,7 @@
                 </a:solidFill>
                 <a:latin typeface="Calibri"/>
               </a:rPr>
-              <a:t> (pesi compilati) o × </a:t>
+              <a:t> per MAC con i pesi compilati (P1), ~154 ns + </a:t>
             </a:r>
             <a:r>
               <a:rPr sz="1400" b="1" i="0">
@@ -31743,7 +30124,7 @@
                 </a:solidFill>
                 <a:latin typeface="Calibri"/>
               </a:rPr>
-              <a:t>~0,7 ns</a:t>
+              <a:t>0,77 ns</a:t>
             </a:r>
             <a:r>
               <a:rPr sz="1400" b="0" i="0">
@@ -31752,11 +30133,53 @@
                 </a:solidFill>
                 <a:latin typeface="Calibri"/>
               </a:rPr>
-              <a:t> (P3), più il costo fisso della pipeline e, con P3, ~58 ns a strato. Una feature one-hot conta una colonna, qualunque sia la sua larghezza.</a:t>
+              <a:t> per MAC + ~46 ns per strato con P3. Per P2 e P3 pesa la </a:t>
+            </a:r>
+            <a:r>
+              <a:rPr sz="1400" b="1" i="0">
+                <a:solidFill>
+                  <a:srgbClr val="222B36"/>
+                </a:solidFill>
+                <a:latin typeface="Calibri"/>
+              </a:rPr>
+              <a:t>struttura</a:t>
+            </a:r>
+            <a:r>
+              <a:rPr sz="1400" b="0" i="0">
+                <a:solidFill>
+                  <a:srgbClr val="222B36"/>
+                </a:solidFill>
+                <a:latin typeface="Calibri"/>
+              </a:rPr>
+              <a:t> (tail call, letture di tabella), non l'aritmetica.</a:t>
             </a:r>
           </a:p>
         </p:txBody>
       </p:sp>
+      <p:pic>
+        <p:nvPicPr>
+          <p:cNvPr id="14" name="Picture 13" descr="legge_costo.png"/>
+          <p:cNvPicPr>
+            <a:picLocks noChangeAspect="1"/>
+          </p:cNvPicPr>
+          <p:nvPr/>
+        </p:nvPicPr>
+        <p:blipFill>
+          <a:blip r:embed="rId4"/>
+          <a:stretch>
+            <a:fillRect/>
+          </a:stretch>
+        </p:blipFill>
+        <p:spPr>
+          <a:xfrm>
+            <a:off x="457200" y="1463040"/>
+            <a:ext cx="6217920" cy="3886200"/>
+          </a:xfrm>
+          <a:prstGeom prst="rect">
+            <a:avLst/>
+          </a:prstGeom>
+        </p:spPr>
+      </p:pic>
     </p:spTree>
   </p:cSld>
   <p:clrMapOvr>
@@ -31997,7 +30420,7 @@
                 </a:solidFill>
                 <a:latin typeface="Calibri"/>
               </a:rPr>
-              <a:t>È l'unico esperimento in cui scendono insieme dimensione e tempo  ·  tempo di CPU meno la baseline, xdp_gen, nodo saturo, P-core a 3,5 GHz</a:t>
+              <a:t>4 forme al 50 e al 90 % di pesi a zero, ciascuna contro la legge stimata sui modelli densi  ·  tempo di CPU meno la baseline, xdp_gen, nodo saturo, P-core a 3,5 GHz</a:t>
             </a:r>
           </a:p>
         </p:txBody>
@@ -32189,7 +30612,7 @@
                 </a:solidFill>
                 <a:latin typeface="Calibri"/>
               </a:rPr>
-              <a:t>Programma da 1 045 a 337 istruzioni, 52 → 39 ns per pacchetto. Il compilatore vede lo zero e cancella la moltiplicazione.</a:t>
+              <a:t>Al 90 % di zeri il programma scende a 0,34–0,35× quello del modello denso, e il costo della rete a 0,62 [0,27–0,83]× del previsto. Il compilatore vede lo zero e cancella la moltiplicazione.</a:t>
             </a:r>
           </a:p>
         </p:txBody>
@@ -32363,7 +30786,7 @@
                 </a:solidFill>
                 <a:latin typeface="Calibri"/>
               </a:rPr>
-              <a:t>Dimensione e costo invariati (entro il 5 %): zero, letto da una tabella, è un numero come un altro.</a:t>
+              <a:t>Dimensione identica al modello denso, costo 1,02 [0,91–1,14]× (P2) e 1,01 [0,91–1,03]× (P3) del previsto: zero, letto da una tabella, è un numero come un altro.</a:t>
             </a:r>
           </a:p>
         </p:txBody>
@@ -32531,13 +30954,22 @@
               </a:spcAft>
             </a:pPr>
             <a:r>
-              <a:rPr sz="1500" b="1" i="0">
+              <a:rPr sz="1500" b="0" i="0">
                 <a:solidFill>
                   <a:srgbClr val="222B36"/>
                 </a:solidFill>
                 <a:latin typeface="Calibri"/>
               </a:rPr>
-              <a:t>Potare il modello</a:t>
+              <a:t>Potare il modello (pesi a zero) rende più veloci </a:t>
+            </a:r>
+            <a:r>
+              <a:rPr sz="1500" b="1" i="0">
+                <a:solidFill>
+                  <a:srgbClr val="222B36"/>
+                </a:solidFill>
+                <a:latin typeface="Calibri"/>
+              </a:rPr>
+              <a:t>solo le versioni specializzate</a:t>
             </a:r>
             <a:r>
               <a:rPr sz="1500" b="0" i="0">
@@ -32546,7 +30978,43 @@
                 </a:solidFill>
                 <a:latin typeface="Calibri"/>
               </a:rPr>
-              <a:t> (pesi a zero) rende più veloci solo le versioni specializzate: al 90 % di zeri P1 perde il 39 % del costo e P1.5 il 25 %. Con P2 e P3 non dà niente.</a:t>
+              <a:t>: al 90 % di zeri P1 costa </a:t>
+            </a:r>
+            <a:r>
+              <a:rPr sz="1500" b="1" i="0">
+                <a:solidFill>
+                  <a:srgbClr val="222B36"/>
+                </a:solidFill>
+                <a:latin typeface="Calibri"/>
+              </a:rPr>
+              <a:t>0,44×</a:t>
+            </a:r>
+            <a:r>
+              <a:rPr sz="1500" b="0" i="0">
+                <a:solidFill>
+                  <a:srgbClr val="222B36"/>
+                </a:solidFill>
+                <a:latin typeface="Calibri"/>
+              </a:rPr>
+              <a:t> e P1.5 </a:t>
+            </a:r>
+            <a:r>
+              <a:rPr sz="1500" b="1" i="0">
+                <a:solidFill>
+                  <a:srgbClr val="222B36"/>
+                </a:solidFill>
+                <a:latin typeface="Calibri"/>
+              </a:rPr>
+              <a:t>0,62×</a:t>
+            </a:r>
+            <a:r>
+              <a:rPr sz="1500" b="0" i="0">
+                <a:solidFill>
+                  <a:srgbClr val="222B36"/>
+                </a:solidFill>
+                <a:latin typeface="Calibri"/>
+              </a:rPr>
+              <a:t> del modello denso previsto. Con P2 e P3 non dà niente.</a:t>
             </a:r>
           </a:p>
         </p:txBody>
@@ -32791,7 +31259,7 @@
                 </a:solidFill>
                 <a:latin typeface="Calibri"/>
               </a:rPr>
-              <a:t>3 giri, 64 byte, nodo su un P-core a 3,5 GHz, controllo di validità superato  ·  stessa sessione per tutte le righe</a:t>
+              <a:t>64 byte, P-core a 3,5 GHz  ·  barre: mediana su 91 modelli (P2: 85)  ·  schede: dal modello più leggero al più pesante</a:t>
             </a:r>
           </a:p>
         </p:txBody>
@@ -32983,7 +31451,7 @@
                 </a:solidFill>
                 <a:latin typeface="Calibri"/>
               </a:rPr>
-              <a:t>66 ns</a:t>
+              <a:t>67 ns</a:t>
             </a:r>
           </a:p>
         </p:txBody>
@@ -33025,7 +31493,7 @@
                 </a:solidFill>
                 <a:latin typeface="Calibri"/>
               </a:rPr>
-              <a:t>15,3 M pacchetti/s</a:t>
+              <a:t>15,0 M pacchetti/s, 91 modelli</a:t>
             </a:r>
           </a:p>
         </p:txBody>
@@ -33199,7 +31667,7 @@
                 </a:solidFill>
                 <a:latin typeface="Calibri"/>
               </a:rPr>
-              <a:t>117–124 ns</a:t>
+              <a:t>85–222 ns</a:t>
             </a:r>
           </a:p>
         </p:txBody>
@@ -33241,7 +31709,7 @@
                 </a:solidFill>
                 <a:latin typeface="Calibri"/>
               </a:rPr>
-              <a:t>8,6 / 8,0 M pacchetti/s</a:t>
+              <a:t>4,5–11,7 M pacchetti/s</a:t>
             </a:r>
           </a:p>
         </p:txBody>
@@ -33415,7 +31883,7 @@
                 </a:solidFill>
                 <a:latin typeface="Calibri"/>
               </a:rPr>
-              <a:t>290 ns</a:t>
+              <a:t>196–512 ns</a:t>
             </a:r>
           </a:p>
         </p:txBody>
@@ -33457,7 +31925,7 @@
                 </a:solidFill>
                 <a:latin typeface="Calibri"/>
               </a:rPr>
-              <a:t>3,45 M pacchetti/s</a:t>
+              <a:t>2,0–5,1 M pacchetti/s</a:t>
             </a:r>
           </a:p>
         </p:txBody>
@@ -33631,7 +32099,7 @@
                 </a:solidFill>
                 <a:latin typeface="Calibri"/>
               </a:rPr>
-              <a:t>425 ns</a:t>
+              <a:t>307–918 ns</a:t>
             </a:r>
           </a:p>
         </p:txBody>
@@ -33673,7 +32141,7 @@
                 </a:solidFill>
                 <a:latin typeface="Calibri"/>
               </a:rPr>
-              <a:t>2,4 M pacchetti/s</a:t>
+              <a:t>1,1–3,3 M pacchetti/s</a:t>
             </a:r>
           </a:p>
         </p:txBody>
@@ -33856,7 +32324,7 @@
                 </a:solidFill>
                 <a:latin typeface="Calibri"/>
               </a:rPr>
-              <a:t>~66 ns</a:t>
+              <a:t>~67 ns</a:t>
             </a:r>
             <a:r>
               <a:rPr sz="1400" b="0" i="0">
@@ -33865,7 +32333,7 @@
                 </a:solidFill>
                 <a:latin typeface="Calibri"/>
               </a:rPr>
-              <a:t>. La rete neurale aggiunge </a:t>
+              <a:t>, con qualunque modello. La rete neurale aggiunge </a:t>
             </a:r>
             <a:r>
               <a:rPr sz="1400" b="1" i="0">
@@ -33874,7 +32342,7 @@
                 </a:solidFill>
                 <a:latin typeface="Calibri"/>
               </a:rPr>
-              <a:t>~50–60 ns</a:t>
+              <a:t>19–155 ns</a:t>
             </a:r>
             <a:r>
               <a:rPr sz="1400" b="0" i="0">
@@ -33883,7 +32351,7 @@
                 </a:solidFill>
                 <a:latin typeface="Calibri"/>
               </a:rPr>
-              <a:t> con i pesi compilati, </a:t>
+              <a:t> con i pesi compilati (mediana 52), </a:t>
             </a:r>
             <a:r>
               <a:rPr sz="1400" b="1" i="0">
@@ -33892,7 +32360,7 @@
                 </a:solidFill>
                 <a:latin typeface="Calibri"/>
               </a:rPr>
-              <a:t>~225 ns</a:t>
+              <a:t>129–446 ns</a:t>
             </a:r>
             <a:r>
               <a:rPr sz="1400" b="0" i="0">
@@ -33901,7 +32369,7 @@
                 </a:solidFill>
                 <a:latin typeface="Calibri"/>
               </a:rPr>
-              <a:t> se la forma è letta da tabella, </a:t>
+              <a:t> se la forma è letta da tabella (P2), </a:t>
             </a:r>
             <a:r>
               <a:rPr sz="1400" b="1" i="0">
@@ -33910,7 +32378,7 @@
                 </a:solidFill>
                 <a:latin typeface="Calibri"/>
               </a:rPr>
-              <a:t>~360 ns</a:t>
+              <a:t>240–852 ns</a:t>
             </a:r>
             <a:r>
               <a:rPr sz="1400" b="0" i="0">
@@ -33919,7 +32387,7 @@
                 </a:solidFill>
                 <a:latin typeface="Calibri"/>
               </a:rPr>
-              <a:t> se anche la profondità: un nodo regge da </a:t>
+              <a:t> se anche la profondità (P3): un core regge da </a:t>
             </a:r>
             <a:r>
               <a:rPr sz="1400" b="1" i="0">
@@ -33928,7 +32396,7 @@
                 </a:solidFill>
                 <a:latin typeface="Calibri"/>
               </a:rPr>
-              <a:t>8,6</a:t>
+              <a:t>11,7</a:t>
             </a:r>
             <a:r>
               <a:rPr sz="1400" b="0" i="0">
@@ -33946,7 +32414,7 @@
                 </a:solidFill>
                 <a:latin typeface="Calibri"/>
               </a:rPr>
-              <a:t>2,4 milioni</a:t>
+              <a:t>1,1 milioni</a:t>
             </a:r>
             <a:r>
               <a:rPr sz="1400" b="0" i="0">
@@ -33955,7 +32423,7 @@
                 </a:solidFill>
                 <a:latin typeface="Calibri"/>
               </a:rPr>
-              <a:t> di pacchetti al secondo per core, e due core il 95–100 % del doppio.</a:t>
+              <a:t> di pacchetti al secondo, secondo modello e pipeline.</a:t>
             </a:r>
           </a:p>
         </p:txBody>
@@ -34193,7 +32661,7 @@
                 </a:solidFill>
                 <a:latin typeface="Calibri"/>
               </a:rPr>
-              <a:t>Caricate: istruzioni del programma, contate dal kernel al caricamento  ·  eseguite: contatori hardware del core del nodo sotto traffico, per pacchetto, nodo saturo</a:t>
+              <a:t>Caricate: contate dal kernel al caricamento  ·  eseguite: contatori hardware, per pacchetto, nodo saturo  ·  a destra i 14 modelli misurati sui tre core</a:t>
             </a:r>
           </a:p>
         </p:txBody>
@@ -34271,7 +32739,7 @@
                 </a:solidFill>
                 <a:latin typeface="Calibri"/>
               </a:rPr>
-              <a:t>Caricate contro eseguite.</a:t>
+              <a:t>Caricate contro eseguite</a:t>
             </a:r>
             <a:r>
               <a:rPr sz="1400" b="0" i="0">
@@ -34280,7 +32748,7 @@
                 </a:solidFill>
                 <a:latin typeface="Calibri"/>
               </a:rPr>
-              <a:t> P2 ne carica 15 089 e ne esegue 4 556; P3 ne carica meno (12 288) e ne esegue di più (6 573).</a:t>
+              <a:t> (mediane). P2 carica più istruzioni di P3 ma ne esegue meno: su 85 modelli su 85.</a:t>
             </a:r>
           </a:p>
         </p:txBody>
@@ -34331,7 +32799,7 @@
                 </a:solidFill>
                 <a:latin typeface="Calibri"/>
               </a:rPr>
-              <a:t> Lo stesso codice: le istruzioni per pacchetto coincidono entro il 2%.</a:t>
+              <a:t> Entro lo 0,3 % fra P-core ed E-core su 91 modelli, entro lo 0,7 % sul LP E-core (14 modelli).</a:t>
             </a:r>
           </a:p>
         </p:txBody>
@@ -34695,7 +33163,7 @@
                 </a:solidFill>
                 <a:latin typeface="Calibri"/>
               </a:rPr>
-              <a:t>Su un E-core il nodo regge dal 61 all'82 % del P-core</a:t>
+              <a:t>Su un E-core il nodo regge dal 61 al 91 % del P-core</a:t>
             </a:r>
           </a:p>
         </p:txBody>
@@ -34779,7 +33247,7 @@
                 </a:solidFill>
                 <a:latin typeface="Calibri"/>
               </a:rPr>
-              <a:t>P-core e E-core a 3,5 GHz, LP E-core a 2,5 GHz; generatore e uscita su P-core  ·  * LP E-core, baseline: nodo non saturo, limite inferiore</a:t>
+              <a:t>P-core e E-core a 3,5 GHz, LP E-core a 2,5 GHz; generatore e uscita su P-core  ·  grafici: mediana dei 14 modelli del sottoinsieme LP, dal più leggero al più pesante</a:t>
             </a:r>
           </a:p>
         </p:txBody>
@@ -34866,7 +33334,7 @@
                 </a:solidFill>
                 <a:latin typeface="Calibri"/>
               </a:rPr>
-              <a:t> Baseline 15,3 → 9,4 → 3,3*; P3 2,4 → 1,9 → 1,1.</a:t>
+              <a:t> Capacità E/P su 91 modelli: baseline 0,61–0,66, P3 0,72–0,89.</a:t>
             </a:r>
           </a:p>
         </p:txBody>
@@ -34917,7 +33385,7 @@
                 </a:solidFill>
                 <a:latin typeface="Calibri"/>
               </a:rPr>
-              <a:t> Baseline +60% sull'E-core, l'inferenza di P3 solo +14%.</a:t>
+              <a:t> Sull'E-core la baseline costa il 56 % in più, la sola rete neurale di P3 il 13 % (mediane).</a:t>
             </a:r>
           </a:p>
         </p:txBody>
@@ -35109,7 +33577,7 @@
                 </a:solidFill>
                 <a:latin typeface="Calibri"/>
               </a:rPr>
-              <a:t>: più la pipeline è pesante, meno pesa la differenza (0,61× la baseline, 0,82× P2 e P3). Il LP E-core (fuori dalla L3, 2,5 GHz) regge il 36–47 %.</a:t>
+              <a:t>: più la pipeline è pesante, meno pesa la differenza (capacità E/P 0,63 per la baseline, 0,77 per P1, 0,82–0,83 per P2 e P3). Il LP E-core (fuori dalla L3, 2,5 GHz) regge dal 32 al 53 % del P-core sulle pipeline.</a:t>
             </a:r>
           </a:p>
         </p:txBody>
@@ -35347,7 +33815,7 @@
                 </a:solidFill>
                 <a:latin typeface="Calibri"/>
               </a:rPr>
-              <a:t>Contatori hardware (perf_event_open) sul core del nodo, nella stessa finestra dei pacchetti  ·  nodo saturo  ·  istruzioni per ciclo nel grafico</a:t>
+              <a:t>Contatori hardware sul core del nodo, nodo saturo  ·  mediane: tabella su 91 modelli, grafico sui 14 misurati sui tre core</a:t>
             </a:r>
           </a:p>
         </p:txBody>
@@ -35554,7 +34022,7 @@
                           </a:solidFill>
                           <a:latin typeface="Calibri"/>
                         </a:rPr>
-                        <a:t>1 220</a:t>
+                        <a:t>1 162</a:t>
                       </a:r>
                     </a:p>
                   </a:txBody>
@@ -35577,7 +34045,7 @@
                           </a:solidFill>
                           <a:latin typeface="Calibri"/>
                         </a:rPr>
-                        <a:t>402</a:t>
+                        <a:t>414</a:t>
                       </a:r>
                     </a:p>
                   </a:txBody>
@@ -35600,7 +34068,7 @@
                           </a:solidFill>
                           <a:latin typeface="Calibri"/>
                         </a:rPr>
-                        <a:t>540</a:t>
+                        <a:t>531</a:t>
                       </a:r>
                     </a:p>
                   </a:txBody>
@@ -35653,7 +34121,7 @@
                           </a:solidFill>
                           <a:latin typeface="Calibri"/>
                         </a:rPr>
-                        <a:t>1 426</a:t>
+                        <a:t>1 346</a:t>
                       </a:r>
                     </a:p>
                   </a:txBody>
@@ -35676,7 +34144,7 @@
                           </a:solidFill>
                           <a:latin typeface="Calibri"/>
                         </a:rPr>
-                        <a:t>432</a:t>
+                        <a:t>438</a:t>
                       </a:r>
                     </a:p>
                   </a:txBody>
@@ -35699,7 +34167,7 @@
                           </a:solidFill>
                           <a:latin typeface="Calibri"/>
                         </a:rPr>
-                        <a:t>587</a:t>
+                        <a:t>569</a:t>
                       </a:r>
                     </a:p>
                   </a:txBody>
@@ -35752,7 +34220,7 @@
                           </a:solidFill>
                           <a:latin typeface="Calibri"/>
                         </a:rPr>
-                        <a:t>4 556</a:t>
+                        <a:t>4 578</a:t>
                       </a:r>
                     </a:p>
                   </a:txBody>
@@ -35775,7 +34243,7 @@
                           </a:solidFill>
                           <a:latin typeface="Calibri"/>
                         </a:rPr>
-                        <a:t>1 013</a:t>
+                        <a:t>1 016</a:t>
                       </a:r>
                     </a:p>
                   </a:txBody>
@@ -35798,7 +34266,7 @@
                           </a:solidFill>
                           <a:latin typeface="Calibri"/>
                         </a:rPr>
-                        <a:t>1 224</a:t>
+                        <a:t>1 218</a:t>
                       </a:r>
                     </a:p>
                   </a:txBody>
@@ -35851,7 +34319,7 @@
                           </a:solidFill>
                           <a:latin typeface="Calibri"/>
                         </a:rPr>
-                        <a:t>6 573</a:t>
+                        <a:t>7 575</a:t>
                       </a:r>
                     </a:p>
                   </a:txBody>
@@ -35874,7 +34342,7 @@
                           </a:solidFill>
                           <a:latin typeface="Calibri"/>
                         </a:rPr>
-                        <a:t>1 483</a:t>
+                        <a:t>1 697</a:t>
                       </a:r>
                     </a:p>
                   </a:txBody>
@@ -35897,7 +34365,7 @@
                           </a:solidFill>
                           <a:latin typeface="Calibri"/>
                         </a:rPr>
-                        <a:t>1 785</a:t>
+                        <a:t>2 021</a:t>
                       </a:r>
                     </a:p>
                   </a:txBody>
@@ -36086,43 +34554,7 @@
                 </a:solidFill>
                 <a:latin typeface="Calibri"/>
               </a:rPr>
-              <a:t>Le </a:t>
-            </a:r>
-            <a:r>
-              <a:rPr sz="1500" b="1" i="0">
-                <a:solidFill>
-                  <a:srgbClr val="222B36"/>
-                </a:solidFill>
-                <a:latin typeface="Calibri"/>
-              </a:rPr>
-              <a:t>istruzioni per pacchetto</a:t>
-            </a:r>
-            <a:r>
-              <a:rPr sz="1500" b="0" i="0">
-                <a:solidFill>
-                  <a:srgbClr val="222B36"/>
-                </a:solidFill>
-                <a:latin typeface="Calibri"/>
-              </a:rPr>
-              <a:t> sono le stesse su ogni core: il codice non cambia. Cambia l'</a:t>
-            </a:r>
-            <a:r>
-              <a:rPr sz="1500" b="1" i="0">
-                <a:solidFill>
-                  <a:srgbClr val="222B36"/>
-                </a:solidFill>
-                <a:latin typeface="Calibri"/>
-              </a:rPr>
-              <a:t>IPC</a:t>
-            </a:r>
-            <a:r>
-              <a:rPr sz="1500" b="0" i="0">
-                <a:solidFill>
-                  <a:srgbClr val="222B36"/>
-                </a:solidFill>
-                <a:latin typeface="Calibri"/>
-              </a:rPr>
-              <a:t>: 2,7 → 1,7 per la baseline (lavoro di rete, salti, memoria), 4,4 → 3,7 per P3 (aritmetica lineare). Il LP E-core ha 14–19 mancate di cache per pacchetto.</a:t>
+              <a:t>Le istruzioni per pacchetto sono le stesse su ogni core: il codice non cambia. Cambia l'IPC: 2,6 → 1,7 per la baseline (lavoro di rete, salti, memoria), 4,4 → 3,7 per P3 (aritmetica lineare). Il LP E-core ha 14–19 mancate di cache per pacchetto.</a:t>
             </a:r>
           </a:p>
         </p:txBody>
@@ -36360,7 +34792,7 @@
                 </a:solidFill>
                 <a:latin typeface="Calibri"/>
               </a:rPr>
-              <a:t>Cicli per pacchetto dai contatori hardware, a 3,5 GHz  ·  parte fissa = cicli della baseline, rete neurale = cicli della pipeline meno la baseline</a:t>
+              <a:t>Cicli per pacchetto dai contatori hardware, 3,5 GHz  ·  parte fissa = baseline, rete = pipeline meno baseline  ·  mediane su 91 modelli</a:t>
             </a:r>
           </a:p>
         </p:txBody>
@@ -36552,7 +34984,7 @@
                 </a:solidFill>
                 <a:latin typeface="Calibri"/>
               </a:rPr>
-              <a:t>+60%</a:t>
+              <a:t>+56%</a:t>
             </a:r>
           </a:p>
         </p:txBody>
@@ -36594,7 +35026,7 @@
                 </a:solidFill>
                 <a:latin typeface="Calibri"/>
               </a:rPr>
-              <a:t>225 → 360 cicli, P → E</a:t>
+              <a:t>231 → 360 cicli, P → E (1,50–1,60×)</a:t>
             </a:r>
           </a:p>
         </p:txBody>
@@ -36768,7 +35200,7 @@
                 </a:solidFill>
                 <a:latin typeface="Calibri"/>
               </a:rPr>
-              <a:t>+2%</a:t>
+              <a:t>−6%</a:t>
             </a:r>
           </a:p>
         </p:txBody>
@@ -36810,7 +35242,7 @@
                 </a:solidFill>
                 <a:latin typeface="Calibri"/>
               </a:rPr>
-              <a:t>177 → 180 cicli</a:t>
+              <a:t>183 → 172 cicli (0,55–1,17×)</a:t>
             </a:r>
           </a:p>
         </p:txBody>
@@ -37026,7 +35458,7 @@
                 </a:solidFill>
                 <a:latin typeface="Calibri"/>
               </a:rPr>
-              <a:t>788 → 864 cicli</a:t>
+              <a:t>785 → 858 cicli (1,02–1,18×)</a:t>
             </a:r>
           </a:p>
         </p:txBody>
@@ -37242,7 +35674,7 @@
                 </a:solidFill>
                 <a:latin typeface="Calibri"/>
               </a:rPr>
-              <a:t>1 258 → 1 425 cicli</a:t>
+              <a:t>1 467 → 1 662 cicli (1,05–1,40×)</a:t>
             </a:r>
           </a:p>
         </p:txBody>
@@ -37416,43 +35848,7 @@
                 </a:solidFill>
                 <a:latin typeface="Calibri"/>
               </a:rPr>
-              <a:t>Ricevere, inoltrare e restituire la pagina è lavoro del kernel con salti e memoria: l'E-core lo esegue a </a:t>
-            </a:r>
-            <a:r>
-              <a:rPr sz="1400" b="1" i="0">
-                <a:solidFill>
-                  <a:srgbClr val="222B36"/>
-                </a:solidFill>
-                <a:latin typeface="Calibri"/>
-              </a:rPr>
-              <a:t>IPC 1,7 invece di 2,7</a:t>
-            </a:r>
-            <a:r>
-              <a:rPr sz="1400" b="0" i="0">
-                <a:solidFill>
-                  <a:srgbClr val="222B36"/>
-                </a:solidFill>
-                <a:latin typeface="Calibri"/>
-              </a:rPr>
-              <a:t>. L'aritmetica della rete è una fila di moltiplicazioni, e l'E-core la esegue </a:t>
-            </a:r>
-            <a:r>
-              <a:rPr sz="1400" b="1" i="0">
-                <a:solidFill>
-                  <a:srgbClr val="222B36"/>
-                </a:solidFill>
-                <a:latin typeface="Calibri"/>
-              </a:rPr>
-              <a:t>quasi altrettanto bene</a:t>
-            </a:r>
-            <a:r>
-              <a:rPr sz="1400" b="0" i="0">
-                <a:solidFill>
-                  <a:srgbClr val="222B36"/>
-                </a:solidFill>
-                <a:latin typeface="Calibri"/>
-              </a:rPr>
-              <a:t>.</a:t>
+              <a:t>Ricevere, inoltrare e restituire la pagina è lavoro del kernel con salti e memoria: l'E-core lo esegue a IPC 1,7 invece di 2,6, su ogni modello. L'aritmetica della rete è una fila di moltiplicazioni, e l'E-core la esegue quasi altrettanto bene.</a:t>
             </a:r>
           </a:p>
         </p:txBody>
@@ -37690,7 +36086,7 @@
                 </a:solidFill>
                 <a:latin typeface="Calibri"/>
               </a:rPr>
-              <a:t>Contatori hardware del core del nodo, per pacchetto, nodo saturo  ·  LP E-core a 2,5 GHz, fuori dalla L3</a:t>
+              <a:t>Contatori hardware del core del nodo, per pacchetto, nodo saturo  ·  LP E-core a 2,5 GHz, fuori dalla L3  ·  mediane dei 14 modelli misurati sui tre core</a:t>
             </a:r>
           </a:p>
         </p:txBody>
@@ -37819,7 +36215,7 @@
                 </a:solidFill>
                 <a:latin typeface="Calibri"/>
               </a:rPr>
-              <a:t>Cicli per pacchetto.</a:t>
+              <a:t>Cicli per pacchetto</a:t>
             </a:r>
             <a:r>
               <a:rPr sz="1400" b="0" i="0">
@@ -37828,7 +36224,7 @@
                 </a:solidFill>
                 <a:latin typeface="Calibri"/>
               </a:rPr>
-              <a:t> P3: 1 483 → 1 785 → 2 266; in tempo 425 → 515 → 908 ns.</a:t>
+              <a:t> (mediane). P3: 1 614 → 1 944 → 2 435; in tempo 462 → 562 → 976 ns.</a:t>
             </a:r>
           </a:p>
         </p:txBody>
@@ -38002,25 +36398,7 @@
                 </a:solidFill>
                 <a:latin typeface="Calibri"/>
               </a:rPr>
-              <a:t>Il LP E-core sta su un'altra parte del chip: i pacchetti scritti dal generatore gli arrivano dalla memoria. Fra memoria, IPC più basso (0,8–2,9) e 2,5 GHz regge il </a:t>
-            </a:r>
-            <a:r>
-              <a:rPr sz="1400" b="1" i="0">
-                <a:solidFill>
-                  <a:srgbClr val="222B36"/>
-                </a:solidFill>
-                <a:latin typeface="Calibri"/>
-              </a:rPr>
-              <a:t>36–47%</a:t>
-            </a:r>
-            <a:r>
-              <a:rPr sz="1400" b="0" i="0">
-                <a:solidFill>
-                  <a:srgbClr val="222B36"/>
-                </a:solidFill>
-                <a:latin typeface="Calibri"/>
-              </a:rPr>
-              <a:t> del P-core sulle pipeline.</a:t>
+              <a:t>Il LP E-core sta su un'altra parte del chip: i pacchetti scritti dal generatore gli arrivano dalla memoria. Fra memoria, IPC più basso (1,0–3,0) e 2,5 GHz regge dal 32 al 53 % del P-core sulle pipeline.</a:t>
             </a:r>
           </a:p>
         </p:txBody>
@@ -38258,7 +36636,7 @@
                 </a:solidFill>
                 <a:latin typeface="Calibri"/>
               </a:rPr>
-              <a:t>bench_bitrate, xdp_gen, 5 giri per punto, 64 byte  ·  a sinistra il nodo su un P-core, a destra su un E-core</a:t>
+              <a:t>bench_bitrate, xdp_gen, 3 giri per punto, 64 byte, 6 modelli dal più leggero al più pesante  ·  asse x e asse y divisi per la capacità del modello  ·  mediana delle curve</a:t>
             </a:r>
           </a:p>
         </p:txBody>
@@ -38345,7 +36723,7 @@
                 </a:solidFill>
                 <a:latin typeface="Calibri"/>
               </a:rPr>
-              <a:t> Ogni pipeline inoltra tutto fino alla sua capacità (P1 8,7, P2 3,4, P3 2,3 M/s), poi resta piatta: il resto è respinto dalla coda d'ingresso.</a:t>
+              <a:t> Fino alla capacità passa tutto, poi la curva è piatta: massimo 0,98 [0,88–1,03] della capacità, 24 curve.</a:t>
             </a:r>
           </a:p>
         </p:txBody>
@@ -38396,7 +36774,7 @@
                 </a:solidFill>
                 <a:latin typeface="Calibri"/>
               </a:rPr>
-              <a:t> Stesso andamento, ginocchio più in basso (P1 6,2, P2 2,8, P3 1,9 M/s). A coda piena la latenza mediana sale da 13–20 µs a 30–150 µs.</a:t>
+              <a:t> Stesso andamento: 0,99 [0,94–1,03], 24 curve. Divise per la capacità, le curve di modelli diversi si sovrappongono.</a:t>
             </a:r>
           </a:p>
         </p:txBody>
@@ -38588,25 +36966,7 @@
                 </a:solidFill>
                 <a:latin typeface="Calibri"/>
               </a:rPr>
-              <a:t>, non dopo il programma: il collo di bottiglia è il </a:t>
-            </a:r>
-            <a:r>
-              <a:rPr sz="1500" b="1" i="0">
-                <a:solidFill>
-                  <a:srgbClr val="222B36"/>
-                </a:solidFill>
-                <a:latin typeface="Calibri"/>
-              </a:rPr>
-              <a:t>programma eBPF</a:t>
-            </a:r>
-            <a:r>
-              <a:rPr sz="1500" b="0" i="0">
-                <a:solidFill>
-                  <a:srgbClr val="222B36"/>
-                </a:solidFill>
-                <a:latin typeface="Calibri"/>
-              </a:rPr>
-              <a:t>, su ogni tipo di core. Il ginocchio coincide con la capacità misurata a massima spinta.</a:t>
+              <a:t>, non dopo il programma: il collo di bottiglia è il programma eBPF, su ogni tipo di core. Fa eccezione P1 sui modelli più leggeri: oltre i 9 milioni di pacchetti al secondo comincia a perdere anche l'uscita.</a:t>
             </a:r>
           </a:p>
         </p:txBody>

--- a/docs/Inferenza di una rete neurale nel kernel Linux con eBPF XDP.pptx
+++ b/docs/Inferenza di una rete neurale nel kernel Linux con eBPF XDP.pptx
@@ -10,6 +10,7 @@
   <p:sldIdLst>
     <p:sldId id="256" r:id="rId2"/>
     <p:sldId id="258" r:id="rId4"/>
+    <p:sldId id="293" r:id="rId20"/>
     <p:sldId id="276" r:id="rId21"/>
     <p:sldId id="285" r:id="rId34"/>
     <p:sldId id="283" r:id="rId32"/>
@@ -741,7 +742,7 @@
               <c:strCache>
                 <c:ptCount val="5"/>
                 <c:pt idx="0">
-                  <c:v>baseline</c:v>
+                  <c:v>senza rete</c:v>
                 </c:pt>
                 <c:pt idx="1">
                   <c:v>P1 statica</c:v>
@@ -898,7 +899,7 @@
                     </a:solidFill>
                     <a:latin typeface="Calibri"/>
                   </a:rPr>
-                  <a:t>ns di CPU per pacchetto</a:t>
+                  <a:t>tempo per pacchetto (ns)</a:t>
                 </a:r>
               </a:p>
             </c:rich>
@@ -981,7 +982,7 @@
               <c:strCache>
                 <c:ptCount val="1"/>
                 <c:pt idx="0">
-                  <c:v>nodo saturo (tempo di CPU)</c:v>
+                  <c:v>nodo pieno</c:v>
                 </c:pt>
               </c:strCache>
             </c:strRef>
@@ -1071,7 +1072,7 @@
               <c:strCache>
                 <c:ptCount val="1"/>
                 <c:pt idx="0">
-                  <c:v>traffico leggero, minimo</c:v>
+                  <c:v>poco traffico, il pacchetto più veloce</c:v>
                 </c:pt>
               </c:strCache>
             </c:strRef>
@@ -1160,7 +1161,7 @@
               <c:strCache>
                 <c:ptCount val="1"/>
                 <c:pt idx="0">
-                  <c:v>traffico leggero, media</c:v>
+                  <c:v>poco traffico, media</c:v>
                 </c:pt>
               </c:strCache>
             </c:strRef>
@@ -1344,7 +1345,7 @@
                     </a:solidFill>
                     <a:latin typeface="Calibri"/>
                   </a:rPr>
-                  <a:t>ns di rete neurale per pacchetto</a:t>
+                  <a:t>tempo della sola rete (ns)</a:t>
                 </a:r>
               </a:p>
             </c:rich>
@@ -1466,7 +1467,7 @@
               <c:strCache>
                 <c:ptCount val="5"/>
                 <c:pt idx="0">
-                  <c:v>baseline</c:v>
+                  <c:v>senza rete</c:v>
                 </c:pt>
                 <c:pt idx="1">
                   <c:v>P1 statica</c:v>
@@ -1554,7 +1555,7 @@
               <c:strCache>
                 <c:ptCount val="5"/>
                 <c:pt idx="0">
-                  <c:v>baseline</c:v>
+                  <c:v>senza rete</c:v>
                 </c:pt>
                 <c:pt idx="1">
                   <c:v>P1 statica</c:v>
@@ -1642,7 +1643,7 @@
               <c:strCache>
                 <c:ptCount val="5"/>
                 <c:pt idx="0">
-                  <c:v>baseline</c:v>
+                  <c:v>senza rete</c:v>
                 </c:pt>
                 <c:pt idx="1">
                   <c:v>P1 statica</c:v>
@@ -1785,7 +1786,7 @@
                     </a:solidFill>
                     <a:latin typeface="Calibri"/>
                   </a:rPr>
-                  <a:t>ns per pacchetto</a:t>
+                  <a:t>tempo per pacchetto (ns)</a:t>
                 </a:r>
               </a:p>
             </c:rich>
@@ -1909,7 +1910,7 @@
               <c:strCache>
                 <c:ptCount val="5"/>
                 <c:pt idx="0">
-                  <c:v>baseline</c:v>
+                  <c:v>senza rete</c:v>
                 </c:pt>
                 <c:pt idx="1">
                   <c:v>P1 statica</c:v>
@@ -1999,7 +2000,7 @@
               <c:strCache>
                 <c:ptCount val="5"/>
                 <c:pt idx="0">
-                  <c:v>baseline</c:v>
+                  <c:v>senza rete</c:v>
                 </c:pt>
                 <c:pt idx="1">
                   <c:v>P1 statica</c:v>
@@ -2142,7 +2143,7 @@
                     </a:solidFill>
                     <a:latin typeface="Calibri"/>
                   </a:rPr>
-                  <a:t>ns per pacchetto</a:t>
+                  <a:t>tempo per pacchetto (ns)</a:t>
                 </a:r>
               </a:p>
             </c:rich>
@@ -2695,7 +2696,7 @@
                     </a:solidFill>
                     <a:latin typeface="Calibri"/>
                   </a:rPr>
-                  <a:t>traffico chiesto / capacità</a:t>
+                  <a:t>traffico offerto ÷ capacità</a:t>
                 </a:r>
               </a:p>
             </c:rich>
@@ -2764,7 +2765,7 @@
                     </a:solidFill>
                     <a:latin typeface="Calibri"/>
                   </a:rPr>
-                  <a:t>inoltrati / capacità</a:t>
+                  <a:t>inoltrati ÷ capacità</a:t>
                 </a:r>
               </a:p>
             </c:rich>
@@ -3317,7 +3318,7 @@
                     </a:solidFill>
                     <a:latin typeface="Calibri"/>
                   </a:rPr>
-                  <a:t>traffico chiesto / capacità</a:t>
+                  <a:t>traffico offerto ÷ capacità</a:t>
                 </a:r>
               </a:p>
             </c:rich>
@@ -3386,7 +3387,7 @@
                     </a:solidFill>
                     <a:latin typeface="Calibri"/>
                   </a:rPr>
-                  <a:t>inoltrati / capacità</a:t>
+                  <a:t>inoltrati ÷ capacità</a:t>
                 </a:r>
               </a:p>
             </c:rich>
@@ -3936,7 +3937,7 @@
                     </a:solidFill>
                     <a:latin typeface="Calibri"/>
                   </a:rPr>
-                  <a:t>ns di CPU per pacchetto</a:t>
+                  <a:t>tempo per pacchetto (ns)</a:t>
                 </a:r>
               </a:p>
             </c:rich>
@@ -4438,7 +4439,7 @@
                     </a:solidFill>
                     <a:latin typeface="Calibri"/>
                   </a:rPr>
-                  <a:t>tempo del nodo / modello denso</a:t>
+                  <a:t>tempo ÷ stesso modello senza zeri</a:t>
                 </a:r>
               </a:p>
             </c:rich>
@@ -4560,7 +4561,7 @@
               <c:strCache>
                 <c:ptCount val="5"/>
                 <c:pt idx="0">
-                  <c:v>baseline</c:v>
+                  <c:v>senza rete</c:v>
                 </c:pt>
                 <c:pt idx="1">
                   <c:v>P1 statica</c:v>
@@ -4648,7 +4649,7 @@
               <c:strCache>
                 <c:ptCount val="5"/>
                 <c:pt idx="0">
-                  <c:v>baseline</c:v>
+                  <c:v>senza rete</c:v>
                 </c:pt>
                 <c:pt idx="1">
                   <c:v>P1 statica</c:v>
@@ -4736,7 +4737,7 @@
               <c:strCache>
                 <c:ptCount val="5"/>
                 <c:pt idx="0">
-                  <c:v>baseline</c:v>
+                  <c:v>senza rete</c:v>
                 </c:pt>
                 <c:pt idx="1">
                   <c:v>P1 statica</c:v>
@@ -4892,7 +4893,7 @@
                     </a:solidFill>
                     <a:latin typeface="Calibri"/>
                   </a:rPr>
-                  <a:t>M pacchetti/s</a:t>
+                  <a:t>milioni di pacchetti al secondo</a:t>
                 </a:r>
               </a:p>
             </c:rich>
@@ -5014,7 +5015,7 @@
               <c:strCache>
                 <c:ptCount val="5"/>
                 <c:pt idx="0">
-                  <c:v>baseline</c:v>
+                  <c:v>senza rete</c:v>
                 </c:pt>
                 <c:pt idx="1">
                   <c:v>P1 statica</c:v>
@@ -5102,7 +5103,7 @@
               <c:strCache>
                 <c:ptCount val="5"/>
                 <c:pt idx="0">
-                  <c:v>baseline</c:v>
+                  <c:v>senza rete</c:v>
                 </c:pt>
                 <c:pt idx="1">
                   <c:v>P1 statica</c:v>
@@ -5190,7 +5191,7 @@
               <c:strCache>
                 <c:ptCount val="5"/>
                 <c:pt idx="0">
-                  <c:v>baseline</c:v>
+                  <c:v>senza rete</c:v>
                 </c:pt>
                 <c:pt idx="1">
                   <c:v>P1 statica</c:v>
@@ -5346,7 +5347,7 @@
                     </a:solidFill>
                     <a:latin typeface="Calibri"/>
                   </a:rPr>
-                  <a:t>ns di CPU per pacchetto</a:t>
+                  <a:t>tempo per pacchetto (ns)</a:t>
                 </a:r>
               </a:p>
             </c:rich>
@@ -6123,7 +6124,7 @@
               <c:strCache>
                 <c:ptCount val="5"/>
                 <c:pt idx="0">
-                  <c:v>baseline</c:v>
+                  <c:v>senza rete</c:v>
                 </c:pt>
                 <c:pt idx="1">
                   <c:v>P1 statica</c:v>
@@ -6211,7 +6212,7 @@
               <c:strCache>
                 <c:ptCount val="5"/>
                 <c:pt idx="0">
-                  <c:v>baseline</c:v>
+                  <c:v>senza rete</c:v>
                 </c:pt>
                 <c:pt idx="1">
                   <c:v>P1 statica</c:v>
@@ -6299,7 +6300,7 @@
               <c:strCache>
                 <c:ptCount val="5"/>
                 <c:pt idx="0">
-                  <c:v>baseline</c:v>
+                  <c:v>senza rete</c:v>
                 </c:pt>
                 <c:pt idx="1">
                   <c:v>P1 statica</c:v>
@@ -6455,7 +6456,7 @@
                     </a:solidFill>
                     <a:latin typeface="Calibri"/>
                   </a:rPr>
-                  <a:t>istruzioni per ciclo</a:t>
+                  <a:t>istruzioni per ciclo di clock</a:t>
                 </a:r>
               </a:p>
             </c:rich>
@@ -6577,7 +6578,7 @@
               <c:strCache>
                 <c:ptCount val="5"/>
                 <c:pt idx="0">
-                  <c:v>baseline</c:v>
+                  <c:v>senza rete</c:v>
                 </c:pt>
                 <c:pt idx="1">
                   <c:v>P1 statica</c:v>
@@ -6665,7 +6666,7 @@
               <c:strCache>
                 <c:ptCount val="5"/>
                 <c:pt idx="0">
-                  <c:v>baseline</c:v>
+                  <c:v>senza rete</c:v>
                 </c:pt>
                 <c:pt idx="1">
                   <c:v>P1 statica</c:v>
@@ -6943,7 +6944,7 @@
               <c:strCache>
                 <c:ptCount val="5"/>
                 <c:pt idx="0">
-                  <c:v>baseline</c:v>
+                  <c:v>senza rete</c:v>
                 </c:pt>
                 <c:pt idx="1">
                   <c:v>P1 statica</c:v>
@@ -7031,7 +7032,7 @@
               <c:strCache>
                 <c:ptCount val="5"/>
                 <c:pt idx="0">
-                  <c:v>baseline</c:v>
+                  <c:v>senza rete</c:v>
                 </c:pt>
                 <c:pt idx="1">
                   <c:v>P1 statica</c:v>
@@ -7119,7 +7120,7 @@
               <c:strCache>
                 <c:ptCount val="5"/>
                 <c:pt idx="0">
-                  <c:v>baseline</c:v>
+                  <c:v>senza rete</c:v>
                 </c:pt>
                 <c:pt idx="1">
                   <c:v>P1 statica</c:v>
@@ -7382,10 +7383,10 @@
               <c:strCache>
                 <c:ptCount val="10"/>
                 <c:pt idx="0">
-                  <c:v>baseline · P</c:v>
+                  <c:v>senza rete · P</c:v>
                 </c:pt>
                 <c:pt idx="1">
-                  <c:v>baseline · E</c:v>
+                  <c:v>senza rete · E</c:v>
                 </c:pt>
                 <c:pt idx="2">
                   <c:v>P1 · P</c:v>
@@ -7500,10 +7501,10 @@
               <c:strCache>
                 <c:ptCount val="10"/>
                 <c:pt idx="0">
-                  <c:v>baseline · P</c:v>
+                  <c:v>senza rete · P</c:v>
                 </c:pt>
                 <c:pt idx="1">
-                  <c:v>baseline · E</c:v>
+                  <c:v>senza rete · E</c:v>
                 </c:pt>
                 <c:pt idx="2">
                   <c:v>P1 · P</c:v>
@@ -7686,7 +7687,7 @@
                     </a:solidFill>
                     <a:latin typeface="Calibri"/>
                   </a:rPr>
-                  <a:t>cicli per pacchetto</a:t>
+                  <a:t>cicli di clock per pacchetto</a:t>
                 </a:r>
               </a:p>
             </c:rich>
@@ -7808,7 +7809,7 @@
               <c:strCache>
                 <c:ptCount val="5"/>
                 <c:pt idx="0">
-                  <c:v>baseline</c:v>
+                  <c:v>senza rete</c:v>
                 </c:pt>
                 <c:pt idx="1">
                   <c:v>P1 statica</c:v>
@@ -7896,7 +7897,7 @@
               <c:strCache>
                 <c:ptCount val="5"/>
                 <c:pt idx="0">
-                  <c:v>baseline</c:v>
+                  <c:v>senza rete</c:v>
                 </c:pt>
                 <c:pt idx="1">
                   <c:v>P1 statica</c:v>
@@ -7984,7 +7985,7 @@
               <c:strCache>
                 <c:ptCount val="5"/>
                 <c:pt idx="0">
-                  <c:v>baseline</c:v>
+                  <c:v>senza rete</c:v>
                 </c:pt>
                 <c:pt idx="1">
                   <c:v>P1 statica</c:v>
@@ -8140,7 +8141,7 @@
                     </a:solidFill>
                     <a:latin typeface="Calibri"/>
                   </a:rPr>
-                  <a:t>mancate dell'ultimo livello di cache per pacchetto</a:t>
+                  <a:t>letture andate in memoria, per pacchetto</a:t>
                 </a:r>
               </a:p>
             </c:rich>
@@ -8262,7 +8263,7 @@
               <c:strCache>
                 <c:ptCount val="5"/>
                 <c:pt idx="0">
-                  <c:v>baseline</c:v>
+                  <c:v>senza rete</c:v>
                 </c:pt>
                 <c:pt idx="1">
                   <c:v>P1 statica</c:v>
@@ -8350,7 +8351,7 @@
               <c:strCache>
                 <c:ptCount val="5"/>
                 <c:pt idx="0">
-                  <c:v>baseline</c:v>
+                  <c:v>senza rete</c:v>
                 </c:pt>
                 <c:pt idx="1">
                   <c:v>P1 statica</c:v>
@@ -8438,7 +8439,7 @@
               <c:strCache>
                 <c:ptCount val="5"/>
                 <c:pt idx="0">
-                  <c:v>baseline</c:v>
+                  <c:v>senza rete</c:v>
                 </c:pt>
                 <c:pt idx="1">
                   <c:v>P1 statica</c:v>
@@ -8594,7 +8595,7 @@
                     </a:solidFill>
                     <a:latin typeface="Calibri"/>
                   </a:rPr>
-                  <a:t>cicli per pacchetto</a:t>
+                  <a:t>cicli di clock per pacchetto</a:t>
                 </a:r>
               </a:p>
             </c:rich>
@@ -8716,7 +8717,7 @@
               <c:strCache>
                 <c:ptCount val="5"/>
                 <c:pt idx="0">
-                  <c:v>baseline</c:v>
+                  <c:v>senza rete</c:v>
                 </c:pt>
                 <c:pt idx="1">
                   <c:v>P1 statica</c:v>
@@ -8804,7 +8805,7 @@
               <c:strCache>
                 <c:ptCount val="5"/>
                 <c:pt idx="0">
-                  <c:v>baseline</c:v>
+                  <c:v>senza rete</c:v>
                 </c:pt>
                 <c:pt idx="1">
                   <c:v>P1 statica</c:v>
@@ -8960,7 +8961,7 @@
                     </a:solidFill>
                     <a:latin typeface="Calibri"/>
                   </a:rPr>
-                  <a:t>M pacchetti/s, P-core</a:t>
+                  <a:t>milioni di pacchetti/s, P-core</a:t>
                 </a:r>
               </a:p>
             </c:rich>
@@ -9082,7 +9083,7 @@
               <c:strCache>
                 <c:ptCount val="5"/>
                 <c:pt idx="0">
-                  <c:v>baseline</c:v>
+                  <c:v>senza rete</c:v>
                 </c:pt>
                 <c:pt idx="1">
                   <c:v>P1 statica</c:v>
@@ -9170,7 +9171,7 @@
               <c:strCache>
                 <c:ptCount val="5"/>
                 <c:pt idx="0">
-                  <c:v>baseline</c:v>
+                  <c:v>senza rete</c:v>
                 </c:pt>
                 <c:pt idx="1">
                   <c:v>P1 statica</c:v>
@@ -9326,7 +9327,7 @@
                     </a:solidFill>
                     <a:latin typeface="Calibri"/>
                   </a:rPr>
-                  <a:t>M pacchetti/s, E-core</a:t>
+                  <a:t>milioni di pacchetti/s, E-core</a:t>
                 </a:r>
               </a:p>
             </c:rich>
@@ -9428,7 +9429,7 @@
               <c:strCache>
                 <c:ptCount val="1"/>
                 <c:pt idx="0">
-                  <c:v>il programma (T2−T1)</c:v>
+                  <c:v>il programma</c:v>
                 </c:pt>
               </c:strCache>
             </c:strRef>
@@ -9448,10 +9449,10 @@
               <c:strCache>
                 <c:ptCount val="10"/>
                 <c:pt idx="0">
-                  <c:v>baseline · P</c:v>
+                  <c:v>senza rete · P</c:v>
                 </c:pt>
                 <c:pt idx="1">
-                  <c:v>baseline · E</c:v>
+                  <c:v>senza rete · E</c:v>
                 </c:pt>
                 <c:pt idx="2">
                   <c:v>P1 · P</c:v>
@@ -9546,7 +9547,7 @@
               <c:strCache>
                 <c:ptCount val="1"/>
                 <c:pt idx="0">
-                  <c:v>il trasporto (T3−T2)</c:v>
+                  <c:v>il trasporto</c:v>
                 </c:pt>
               </c:strCache>
             </c:strRef>
@@ -9566,10 +9567,10 @@
               <c:strCache>
                 <c:ptCount val="10"/>
                 <c:pt idx="0">
-                  <c:v>baseline · P</c:v>
+                  <c:v>senza rete · P</c:v>
                 </c:pt>
                 <c:pt idx="1">
-                  <c:v>baseline · E</c:v>
+                  <c:v>senza rete · E</c:v>
                 </c:pt>
                 <c:pt idx="2">
                   <c:v>P1 · P</c:v>
@@ -9752,7 +9753,7 @@
                     </a:solidFill>
                     <a:latin typeface="Calibri"/>
                   </a:rPr>
-                  <a:t>ns</a:t>
+                  <a:t>tempo (ns)</a:t>
                 </a:r>
               </a:p>
             </c:rich>
@@ -10830,7 +10831,7 @@
                     </a:solidFill>
                     <a:latin typeface="Calibri"/>
                   </a:rPr>
-                  <a:t>ns: misurato − legge</a:t>
+                  <a:t>scarto dalla legge (ns)</a:t>
                 </a:r>
               </a:p>
             </c:rich>
@@ -11382,7 +11383,7 @@
                     </a:solidFill>
                     <a:latin typeface="Calibri"/>
                   </a:rPr>
-                  <a:t>ns di CPU per pacchetto</a:t>
+                  <a:t>tempo per pacchetto (ns)</a:t>
                 </a:r>
               </a:p>
             </c:rich>
@@ -11962,7 +11963,7 @@
                     </a:solidFill>
                     <a:latin typeface="Calibri"/>
                   </a:rPr>
-                  <a:t>ns di CPU per pacchetto</a:t>
+                  <a:t>tempo per pacchetto (ns)</a:t>
                 </a:r>
               </a:p>
             </c:rich>
@@ -12602,7 +12603,7 @@
                     </a:solidFill>
                     <a:latin typeface="Calibri"/>
                   </a:rPr>
-                  <a:t>ns di CPU per pacchetto</a:t>
+                  <a:t>tempo per pacchetto (ns)</a:t>
                 </a:r>
               </a:p>
             </c:rich>
@@ -12703,7 +12704,7 @@
               <c:strCache>
                 <c:ptCount val="1"/>
                 <c:pt idx="0">
-                  <c:v>nodo saturo (tempo di CPU)</c:v>
+                  <c:v>nodo pieno</c:v>
                 </c:pt>
               </c:strCache>
             </c:strRef>
@@ -12793,7 +12794,7 @@
               <c:strCache>
                 <c:ptCount val="1"/>
                 <c:pt idx="0">
-                  <c:v>traffico leggero, minimo</c:v>
+                  <c:v>poco traffico, il pacchetto più veloce</c:v>
                 </c:pt>
               </c:strCache>
             </c:strRef>
@@ -12882,7 +12883,7 @@
               <c:strCache>
                 <c:ptCount val="1"/>
                 <c:pt idx="0">
-                  <c:v>traffico leggero, media</c:v>
+                  <c:v>poco traffico, media</c:v>
                 </c:pt>
               </c:strCache>
             </c:strRef>
@@ -13066,7 +13067,7 @@
                     </a:solidFill>
                     <a:latin typeface="Calibri"/>
                   </a:rPr>
-                  <a:t>ns di rete neurale per pacchetto</a:t>
+                  <a:t>tempo della sola rete (ns)</a:t>
                 </a:r>
               </a:p>
             </c:rich>
@@ -13569,7 +13570,7 @@
                     </a:solidFill>
                     <a:latin typeface="Calibri"/>
                   </a:rPr>
-                  <a:t>ns di rete neurale per pacchetto</a:t>
+                  <a:t>tempo della sola rete (ns)</a:t>
                 </a:r>
               </a:p>
             </c:rich>
@@ -14095,7 +14096,7 @@
                     </a:solidFill>
                     <a:latin typeface="Calibri"/>
                   </a:rPr>
-                  <a:t>istruzioni (scala logaritmica)</a:t>
+                  <a:t>istruzioni del programma (scala log.)</a:t>
                 </a:r>
               </a:p>
             </c:rich>
@@ -14646,7 +14647,7 @@
                     </a:solidFill>
                     <a:latin typeface="Calibri"/>
                   </a:rPr>
-                  <a:t>ns di rete neurale per pacchetto</a:t>
+                  <a:t>tempo della sola rete (ns)</a:t>
                 </a:r>
               </a:p>
             </c:rich>
@@ -15197,7 +15198,7 @@
                     </a:solidFill>
                     <a:latin typeface="Calibri"/>
                   </a:rPr>
-                  <a:t>ns di rete neurale per pacchetto</a:t>
+                  <a:t>tempo della sola rete (ns)</a:t>
                 </a:r>
               </a:p>
             </c:rich>
@@ -15700,7 +15701,7 @@
                     </a:solidFill>
                     <a:latin typeface="Calibri"/>
                   </a:rPr>
-                  <a:t>misurato / previsto dalla legge densa</a:t>
+                  <a:t>misurato ÷ previsto senza zeri</a:t>
                 </a:r>
               </a:p>
             </c:rich>
@@ -15802,7 +15803,7 @@
               <c:strCache>
                 <c:ptCount val="1"/>
                 <c:pt idx="0">
-                  <c:v>ricevere il frame</c:v>
+                  <c:v>ricevere il pacchetto</c:v>
                 </c:pt>
               </c:strCache>
             </c:strRef>
@@ -15825,7 +15826,7 @@
                   <c:v>solo ricezione</c:v>
                 </c:pt>
                 <c:pt idx="1">
-                  <c:v>baseline</c:v>
+                  <c:v>senza rete</c:v>
                 </c:pt>
                 <c:pt idx="2">
                   <c:v>P1 statica</c:v>
@@ -15896,7 +15897,7 @@
               <c:strCache>
                 <c:ptCount val="1"/>
                 <c:pt idx="0">
-                  <c:v>parse, TTL, redirect, accodamento</c:v>
+                  <c:v>leggere l'intestazione e inoltrare</c:v>
                 </c:pt>
               </c:strCache>
             </c:strRef>
@@ -15919,7 +15920,7 @@
                   <c:v>solo ricezione</c:v>
                 </c:pt>
                 <c:pt idx="1">
-                  <c:v>baseline</c:v>
+                  <c:v>senza rete</c:v>
                 </c:pt>
                 <c:pt idx="2">
                   <c:v>P1 statica</c:v>
@@ -16013,7 +16014,7 @@
                   <c:v>solo ricezione</c:v>
                 </c:pt>
                 <c:pt idx="1">
-                  <c:v>baseline</c:v>
+                  <c:v>senza rete</c:v>
                 </c:pt>
                 <c:pt idx="2">
                   <c:v>P1 statica</c:v>
@@ -16172,7 +16173,7 @@
                     </a:solidFill>
                     <a:latin typeface="Calibri"/>
                   </a:rPr>
-                  <a:t>ns per pacchetto</a:t>
+                  <a:t>tempo per pacchetto (ns)</a:t>
                 </a:r>
               </a:p>
             </c:rich>
@@ -19843,7 +19844,7 @@
                 </a:solidFill>
                 <a:latin typeface="Calibri"/>
               </a:rPr>
-              <a:t>Quattro versioni della stessa rete neurale, misurate sul traffico vero su 91 modelli diversi: quanto costa un pacchetto, quante istruzioni esegue, e che cosa cambia da un P-core a un E-core.</a:t>
+              <a:t>Quattro modi di scrivere la stessa rete neurale dentro il kernel Linux, misurati con traffico vero su 91 reti diverse: quanto costa ogni pacchetto, perché, e che cosa cambia su un core più lento.</a:t>
             </a:r>
           </a:p>
         </p:txBody>
@@ -20060,7 +20061,7 @@
                 </a:solidFill>
                 <a:latin typeface="Calibri"/>
               </a:rPr>
-              <a:t>IL NUOVO ASSETTO · DUE CORE</a:t>
+              <a:t>3 · SOTTO CARICO · DUE CORE</a:t>
             </a:r>
           </a:p>
         </p:txBody>
@@ -20144,7 +20145,7 @@
                 </a:solidFill>
                 <a:latin typeface="Calibri"/>
               </a:rPr>
-              <a:t>10</a:t>
+              <a:t>11</a:t>
             </a:r>
           </a:p>
         </p:txBody>
@@ -20186,7 +20187,7 @@
                 </a:solidFill>
                 <a:latin typeface="Calibri"/>
               </a:rPr>
-              <a:t>Un thread di xdp_gen, una coda e un core d'uscita per core del nodo  ·  P: CPU 6 e 8  ·  E: CPU 12 e 16  ·  mediane di 8 modelli</a:t>
+              <a:t>Una coda, un generatore e un core d'uscita per ogni core del nodo  ·  mediane di 8 modelli dal più leggero al più pesante</a:t>
             </a:r>
           </a:p>
         </p:txBody>
@@ -20273,7 +20274,7 @@
                 </a:solidFill>
                 <a:latin typeface="Calibri"/>
               </a:rPr>
-              <a:t> 99 [94–103] % del doppio su 40 coppie modello-pipeline.</a:t>
+              <a:t> Con due core il nodo regge il 99 % del doppio (fra il 94–103 %).</a:t>
             </a:r>
           </a:p>
         </p:txBody>
@@ -20324,7 +20325,7 @@
                 </a:solidFill>
                 <a:latin typeface="Calibri"/>
               </a:rPr>
-              <a:t> 99 [98–101] % del doppio, con un E-core per modulo: i due moduli non si disturbano.</a:t>
+              <a:t> Il 99 % del doppio, con i due core in gruppi diversi del chip.</a:t>
             </a:r>
           </a:p>
         </p:txBody>
@@ -20498,7 +20499,25 @@
                 </a:solidFill>
                 <a:latin typeface="Calibri"/>
               </a:rPr>
-              <a:t>I contatori delle pipeline sono per-core e ogni core ha la sua coda d'uscita: il secondo core non rallenta il primo. Un nodo con N code regge </a:t>
+              <a:t>Ogni core ha i suoi contatori e la sua coda d'uscita: il secondo core non rallenta il primo. Una scheda di rete che divide i pacchetti su </a:t>
+            </a:r>
+            <a:r>
+              <a:rPr sz="1400" b="1" i="0">
+                <a:solidFill>
+                  <a:srgbClr val="222B36"/>
+                </a:solidFill>
+                <a:latin typeface="Calibri"/>
+              </a:rPr>
+              <a:t>N code</a:t>
+            </a:r>
+            <a:r>
+              <a:rPr sz="1400" b="0" i="0">
+                <a:solidFill>
+                  <a:srgbClr val="222B36"/>
+                </a:solidFill>
+                <a:latin typeface="Calibri"/>
+              </a:rPr>
+              <a:t> regge circa </a:t>
             </a:r>
             <a:r>
               <a:rPr sz="1400" b="1" i="0">
@@ -20516,7 +20535,7 @@
                 </a:solidFill>
                 <a:latin typeface="Calibri"/>
               </a:rPr>
-              <a:t> la capacità di un core, di qualunque tipo.</a:t>
+              <a:t> la capacità di un core.</a:t>
             </a:r>
           </a:p>
         </p:txBody>
@@ -20628,7 +20647,7 @@
                 </a:solidFill>
                 <a:latin typeface="Calibri"/>
               </a:rPr>
-              <a:t>DENTRO IL NODO · TRE OROLOGI · P-CORE E E-CORE</a:t>
+              <a:t>3 · SOTTO CARICO · PROGRAMMA E TRASPORTO</a:t>
             </a:r>
           </a:p>
         </p:txBody>
@@ -20712,7 +20731,7 @@
                 </a:solidFill>
                 <a:latin typeface="Calibri"/>
               </a:rPr>
-              <a:t>11</a:t>
+              <a:t>12</a:t>
             </a:r>
           </a:p>
         </p:txBody>
@@ -20754,7 +20773,7 @@
                 </a:solidFill>
                 <a:latin typeface="Calibri"/>
               </a:rPr>
-              <a:t>T1 all'ingresso del programma, T2 prima di bpf_redirect, T3 all'arrivo dall'altra parte  ·  minimi, a 0,25 e 0,5 Mpps  ·  barre: mediana su 91 modelli</a:t>
+              <a:t>Tre orologi letti dal programma: all'ingresso, prima di inoltrare, all'arrivo al nodo successivo  ·  minimi, a traffico leggero  ·  barre: mediana dei 91 modelli</a:t>
             </a:r>
           </a:p>
         </p:txBody>
@@ -20946,7 +20965,7 @@
                 </a:solidFill>
                 <a:latin typeface="Calibri"/>
               </a:rPr>
-              <a:t>Da 27 ns (baseline) a 391 ns (P3) sul P-core, mediane; P3 va da 237–797 ns secondo il modello.</a:t>
+              <a:t>Da 27 ns senza rete a 391 ns con P3 (mediane, P-core). Per P3 da 237–797 ns secondo il modello.</a:t>
             </a:r>
           </a:p>
         </p:txBody>
@@ -21120,7 +21139,7 @@
                 </a:solidFill>
                 <a:latin typeface="Calibri"/>
               </a:rPr>
-              <a:t>Redirect, veth e ricezione: 187–221 ns sul P-core, 226–274 sull'E-core, su ogni modello e pipeline.</a:t>
+              <a:t>Consegnare il pacchetto al nodo successivo: 187–221 ns sul P-core, 226–274 sull'E-core, con ogni modello e versione.</a:t>
             </a:r>
           </a:p>
         </p:txBody>
@@ -21294,7 +21313,7 @@
                 </a:solidFill>
                 <a:latin typeface="Calibri"/>
               </a:rPr>
-              <a:t>Il trasporto è un costo comune che non dipende né dalla pipeline né dal modello; il programma pesa di più sull'E-core quanto più è lungo. La latenza minima arrivo → ripartenza va da 221 a 595 ns sul P-core, da 267 a 741 sull'E-core (mediane).</a:t>
+              <a:t>Il trasporto è un costo comune, che non dipende né dalla versione né dal modello. Dall'arrivo del pacchetto alla sua ripartenza servono almeno 221–595 ns sul P-core e 267–741 sull'E-core (dal nodo senza rete a P3).</a:t>
             </a:r>
           </a:p>
         </p:txBody>
@@ -21413,7 +21432,7 @@
                 </a:solidFill>
                 <a:latin typeface="Calibri"/>
               </a:rPr>
-              <a:t>QUANTO È SOLIDO · P-CORE</a:t>
+              <a:t>3 · SOTTO CARICO · CHE COSA NON CONTA</a:t>
             </a:r>
           </a:p>
         </p:txBody>
@@ -21455,7 +21474,7 @@
                 </a:solidFill>
                 <a:latin typeface="Calibri"/>
               </a:rPr>
-              <a:t>Il costo dipende dalla pipeline, e da niente altro</a:t>
+              <a:t>Il costo dipende solo da versione e modello</a:t>
             </a:r>
           </a:p>
         </p:txBody>
@@ -21497,7 +21516,7 @@
                 </a:solidFill>
                 <a:latin typeface="Calibri"/>
               </a:rPr>
-              <a:t>12</a:t>
+              <a:t>13</a:t>
             </a:r>
           </a:p>
         </p:txBody>
@@ -21539,7 +21558,7 @@
                 </a:solidFill>
                 <a:latin typeface="Calibri"/>
               </a:rPr>
-              <a:t>Una sessione per classe decisa, verificata su ogni pipeline  ·  P-core a 3,5 GHz  ·  mediane: 6 modelli per le taglie, 8 per le classi, dal più leggero al più pesante</a:t>
+              <a:t>Una prova per ogni decisione che il modello sa prendere  ·  P-core a 3,5 GHz  ·  mediane di 6 modelli (taglie) e 8 (decisioni)</a:t>
             </a:r>
           </a:p>
         </p:txBody>
@@ -21626,7 +21645,7 @@
                 </a:solidFill>
                 <a:latin typeface="Calibri"/>
               </a:rPr>
-              <a:t> (1,2 [0,3–3,1] % fra 64 e 1 514 byte, 30 coppie). Il nodo legge solo l'intestazione.</a:t>
+              <a:t> (1,2 % fra 64 e 1 514 byte, in mediana). Il nodo legge solo l'intestazione.</a:t>
             </a:r>
           </a:p>
         </p:txBody>
@@ -21668,7 +21687,7 @@
                 </a:solidFill>
                 <a:latin typeface="Calibri"/>
               </a:rPr>
-              <a:t>Porta d'uscita: nessun effetto</a:t>
+              <a:t>Porta d'uscita: nessun effetto.</a:t>
             </a:r>
             <a:r>
               <a:rPr sz="1400" b="0" i="0">
@@ -21677,7 +21696,7 @@
                 </a:solidFill>
                 <a:latin typeface="Calibri"/>
               </a:rPr>
-              <a:t> (0 [0–9] % fra le classi che inoltrano). Scartare costa 51 [17–63] ns in più.</a:t>
+              <a:t> Scartare il pacchetto costa ~51 ns in più: la sua memoria si libera sul core del nodo.</a:t>
             </a:r>
           </a:p>
         </p:txBody>
@@ -21851,7 +21870,7 @@
                 </a:solidFill>
                 <a:latin typeface="Calibri"/>
               </a:rPr>
-              <a:t>Basta un numero per pipeline e modello a descrivere il costo del nodo: non dipende da taglia del pacchetto, porta d'uscita o TTL (TTL diversi a ogni pacchetto: 0 [-6–4] %); solo la decisione di scartare costa ~51 ns in più.</a:t>
+              <a:t>Basta un numero per versione e modello a descrivere il costo del nodo: non contano la taglia del pacchetto, la porta d'uscita né il TTL. Solo la decisione di scartare costa ~51 ns in più, per come è fatto il banco.</a:t>
             </a:r>
           </a:p>
         </p:txBody>
@@ -21963,7 +21982,7 @@
                 </a:solidFill>
                 <a:latin typeface="Calibri"/>
               </a:rPr>
-              <a:t>GLI ASSI SOTTO TRAFFICO · P-CORE</a:t>
+              <a:t>4 · LA FORMA DEL MODELLO · IL NODO INTERO</a:t>
             </a:r>
           </a:p>
         </p:txBody>
@@ -22047,7 +22066,7 @@
                 </a:solidFill>
                 <a:latin typeface="Calibri"/>
               </a:rPr>
-              <a:t>13</a:t>
+              <a:t>14</a:t>
             </a:r>
           </a:p>
         </p:txBody>
@@ -22089,7 +22108,7 @@
                 </a:solidFill>
                 <a:latin typeface="Calibri"/>
               </a:rPr>
-              <a:t>Tempo di CPU per pacchetto, xdp_gen, P-core  ·  profondità: famiglia base (53 modelli)  ·  pesi a zero: 4 forme contro il gemello denso</a:t>
+              <a:t>Tempo per pacchetto, P-core  ·  profondità: mediane dei 53 modelli del disegno principale  ·  pesi a zero: 4 forme, contro lo stesso modello senza zeri</a:t>
             </a:r>
           </a:p>
         </p:txBody>
@@ -22167,7 +22186,7 @@
                 </a:solidFill>
                 <a:latin typeface="Calibri"/>
               </a:rPr>
-              <a:t>Profondità</a:t>
+              <a:t>Profondità.</a:t>
             </a:r>
             <a:r>
               <a:rPr lang="it-IT" sz="1400" b="0" i="0" dirty="0">
@@ -22176,7 +22195,7 @@
                 </a:solidFill>
                 <a:latin typeface="Calibri"/>
               </a:rPr>
-              <a:t> (mediane per numero di strati, 53 modelli). Per strato in più, a MAC ferme: P3 ~46 ns, P2 ~20, P1 e P1.5 ~1.</a:t>
+              <a:t> Ogni strato nascosto in più costa ~46 ns a P3, ~20 a P2, quasi niente a P1 e P1.5.</a:t>
             </a:r>
           </a:p>
         </p:txBody>
@@ -22218,7 +22237,7 @@
                 </a:solidFill>
                 <a:latin typeface="Calibri"/>
               </a:rPr>
-              <a:t>Pesi a zero</a:t>
+              <a:t>Pesi a zero.</a:t>
             </a:r>
             <a:r>
               <a:rPr sz="1400" b="0" i="0">
@@ -22227,7 +22246,7 @@
                 </a:solidFill>
                 <a:latin typeface="Calibri"/>
               </a:rPr>
-              <a:t> (tempo del nodo diviso quello del modello denso con la stessa forma). Al 90 % P1 0,77×, P1.5 0,83×; P2 e P3 ferme.</a:t>
+              <a:t> Al 90 % di zeri il nodo con P1 scende a 0,77 e con P1.5 a 0,83 volte il tempo dello stesso modello senza zeri; P2 e P3 non cambiano.</a:t>
             </a:r>
           </a:p>
         </p:txBody>
@@ -22401,7 +22420,7 @@
                 </a:solidFill>
                 <a:latin typeface="Calibri"/>
               </a:rPr>
-              <a:t>Sul nodo vero, su tutta la popolazione: la profondità costa soprattutto a P3 e P2, i pesi a zero aiutano solo P1 e P1.5. Il costo fisso del nodo (~67 ns) resta lo stesso con qualunque modello.</a:t>
+              <a:t>Su tutta la popolazione la profondità costa soprattutto a P3 e P2, i pesi a zero aiutano solo P1 e P1.5. Il lavoro fisso del nodo (~67 ns) è lo stesso con qualunque modello.</a:t>
             </a:r>
           </a:p>
         </p:txBody>
@@ -22513,7 +22532,7 @@
                 </a:solidFill>
                 <a:latin typeface="Calibri"/>
               </a:rPr>
-              <a:t>GLI ASSI SOTTO TRAFFICO · LE ISTRUZIONI</a:t>
+              <a:t>4 · LA FORMA DEL MODELLO · LE ISTRUZIONI</a:t>
             </a:r>
           </a:p>
         </p:txBody>
@@ -22597,7 +22616,7 @@
                 </a:solidFill>
                 <a:latin typeface="Calibri"/>
               </a:rPr>
-              <a:t>14</a:t>
+              <a:t>15</a:t>
             </a:r>
           </a:p>
         </p:txBody>
@@ -22639,7 +22658,7 @@
                 </a:solidFill>
                 <a:latin typeface="Calibri"/>
               </a:rPr>
-              <a:t>Mediane per numero di strati sui 53 modelli della famiglia base  ·  leggi su tutti i modelli densi  ·  contatori hardware del core del nodo, per pacchetto</a:t>
+              <a:t>Mediane per numero di strati sui 53 modelli del disegno principale  ·  costo per strato stimato su 83 modelli senza zeri  ·  contatori del processore</a:t>
             </a:r>
           </a:p>
         </p:txBody>
@@ -22717,7 +22736,7 @@
                 </a:solidFill>
                 <a:latin typeface="Calibri"/>
               </a:rPr>
-              <a:t>Istruzioni.</a:t>
+              <a:t>Istruzioni eseguite.</a:t>
             </a:r>
             <a:r>
               <a:rPr lang="it-IT" sz="1400" b="0" i="0" dirty="0">
@@ -22726,7 +22745,7 @@
                 </a:solidFill>
                 <a:latin typeface="Calibri"/>
               </a:rPr>
-              <a:t> Legge su 83 modelli: P3 +901 per strato (r² 0,99), identiche su P-core ed E-core; P2 +370 per strato.</a:t>
+              <a:t> Ogni strato in più ne aggiunge 901 a P3 e 370 a P2, uguali su P-core ed E-core.</a:t>
             </a:r>
           </a:p>
         </p:txBody>
@@ -22777,7 +22796,7 @@
                 </a:solidFill>
                 <a:latin typeface="Calibri"/>
               </a:rPr>
-              <a:t> P3 ~46 ns per strato sul P-core, ~62 sull'E-core (legge). Tratteggio = E-core.</a:t>
+              <a:t> Ogni strato costa a P3 ~46 ns sul P-core e ~62 sull'E-core (tratteggio): stesse istruzioni, eseguite più lentamente.</a:t>
             </a:r>
           </a:p>
         </p:txBody>
@@ -22951,7 +22970,7 @@
                 </a:solidFill>
                 <a:latin typeface="Calibri"/>
               </a:rPr>
-              <a:t>In P3 ogni strato è un salto più le letture che ricostruiscono il contesto: lo stesso conto di istruzioni a ogni strato, su ogni modello. La profondità si paga a ogni pacchetto, e sull'E-core un po' di più.</a:t>
+              <a:t>P3 esegue uno strato alla volta: a ogni strato salta a un altro programma e rilegge dalle tabelle dove si trova. È sempre lo stesso lavoro, per questo ogni strato costa uguale, su ogni modello.</a:t>
             </a:r>
           </a:p>
         </p:txBody>
@@ -23063,7 +23082,7 @@
                 </a:solidFill>
                 <a:latin typeface="Calibri"/>
               </a:rPr>
-              <a:t>GLI ASSI SOTTO TRAFFICO · LARGHEZZA E PARI PESI</a:t>
+              <a:t>4 · LA FORMA DEL MODELLO · LARGHEZZA E PARI PESI</a:t>
             </a:r>
           </a:p>
         </p:txBody>
@@ -23147,7 +23166,7 @@
                 </a:solidFill>
                 <a:latin typeface="Calibri"/>
               </a:rPr>
-              <a:t>15</a:t>
+              <a:t>16</a:t>
             </a:r>
           </a:p>
         </p:txBody>
@@ -23189,7 +23208,7 @@
                 </a:solidFill>
                 <a:latin typeface="Calibri"/>
               </a:rPr>
-              <a:t>Tempo di CPU per pacchetto, nodo su P-core  ·  tratteggio: P3 sull'E-core  ·  larghezza: famiglia base (53 modelli); pari pesi: famiglia imbuto (10 modelli, 2 composizioni)</a:t>
+              <a:t>Tempo per pacchetto, P-core; tratteggio: P3 sull'E-core  ·  larghezza: 53 modelli del disegno principale  ·  pari pesi: 10 modelli</a:t>
             </a:r>
           </a:p>
         </p:txBody>
@@ -23276,7 +23295,7 @@
                 </a:solidFill>
                 <a:latin typeface="Calibri"/>
               </a:rPr>
-              <a:t> Da 2 a 8 neuroni sale su tutte: P1 103 → 158, P3 457 → 605 ns (mediane).</a:t>
+              <a:t> Da 2 a 8 neuroni per strato il tempo sale su tutte: P1 da 103 a 158 ns, P3 da 457 a 605 ns.</a:t>
             </a:r>
           </a:p>
         </p:txBody>
@@ -23327,7 +23346,7 @@
                 </a:solidFill>
                 <a:latin typeface="Calibri"/>
               </a:rPr>
-              <a:t> Da 1 a 5 strati P2 +48 %, P3 +63 %; le P1 +14–17 %.</a:t>
+              <a:t> Gli stessi ~592 pesi su 5 strati invece di 1: P2 +48 %, P3 +63 %, P1 e P1.5 solo +14–17 %.</a:t>
             </a:r>
           </a:p>
         </p:txBody>
@@ -23501,7 +23520,7 @@
                 </a:solidFill>
                 <a:latin typeface="Calibri"/>
               </a:rPr>
-              <a:t>Le stesse scelte valgono sul nodo vero, con il costo fisso del nodo in più. Sull'E-core P3 sta più in alto del 16–21 %, con la stessa forma: la forma migliore non cambia con il core.</a:t>
+              <a:t>Sull'E-core P3 ha la stessa forma, più in alto del 16–21 %: la forma migliore del modello non dipende dal core su cui girerà.</a:t>
             </a:r>
           </a:p>
         </p:txBody>
@@ -23605,7 +23624,7 @@
                 </a:solidFill>
                 <a:latin typeface="Calibri"/>
               </a:rPr>
-              <a:t>GLI ASSI SOTTO TRAFFICO · LA SOLA RETE NEURALE · P-CORE</a:t>
+              <a:t>4 · LA FORMA DEL MODELLO · DUE MODI DI MISURARE</a:t>
             </a:r>
           </a:p>
         </p:txBody>
@@ -23647,7 +23666,7 @@
                 </a:solidFill>
                 <a:latin typeface="Calibri"/>
               </a:rPr>
-              <a:t>Leggero o saturo, la rete di P2 e P3 costa uguale</a:t>
+              <a:t>Poco traffico o nodo pieno: la rete di P2 e P3 costa uguale</a:t>
             </a:r>
           </a:p>
         </p:txBody>
@@ -23689,7 +23708,7 @@
                 </a:solidFill>
                 <a:latin typeface="Calibri"/>
               </a:rPr>
-              <a:t>16</a:t>
+              <a:t>17</a:t>
             </a:r>
           </a:p>
         </p:txBody>
@@ -23731,7 +23750,7 @@
                 </a:solidFill>
                 <a:latin typeface="Calibri"/>
               </a:rPr>
-              <a:t>T2−T1 (build strumentata), xdp_gen a 0,25 e 0,5 Mpps, baseline sottratta  ·  mediane per strati, famiglia base (53 modelli)  ·  P-core</a:t>
+              <a:t>Tempo letto dal programma stesso, con 0,25 e 0,5 milioni di pacchetti al secondo, meno il nodo senza rete  ·  mediane per strati, 53 modelli  ·  P-core</a:t>
             </a:r>
           </a:p>
         </p:txBody>
@@ -23818,7 +23837,7 @@
                 </a:solidFill>
                 <a:latin typeface="Calibri"/>
               </a:rPr>
-              <a:t> Media a traffico leggero / nodo saturo 1,02 [0,94–1,11] su 91 modelli; il minimo sta al 86 % della media.</a:t>
+              <a:t> Con poco traffico la rete costa 1,02 volte quanto a nodo pieno; il pacchetto più veloce il 14 % meno della media.</a:t>
             </a:r>
           </a:p>
         </p:txBody>
@@ -23860,7 +23879,7 @@
                 </a:solidFill>
                 <a:latin typeface="Calibri"/>
               </a:rPr>
-              <a:t>P2.</a:t>
+              <a:t>P2:</a:t>
             </a:r>
             <a:r>
               <a:rPr sz="1400" b="0" i="0">
@@ -23869,7 +23888,7 @@
                 </a:solidFill>
                 <a:latin typeface="Calibri"/>
               </a:rPr>
-              <a:t> 1,03 [0,94–1,09]. P1 e P1.5 no: 0,77 e 0,83 (mediane), con una rete da poche decine di ns.</a:t>
+              <a:t> 1,03 volte. Per P1 e P1.5 no (0,77 e 0,83): la loro rete costa poche decine di ns, e le due misure non la distinguono bene.</a:t>
             </a:r>
           </a:p>
         </p:txBody>
@@ -24043,7 +24062,7 @@
                 </a:solidFill>
                 <a:latin typeface="Calibri"/>
               </a:rPr>
-              <a:t>Tempo di CPU a nodo saturo e T2−T1 a traffico leggero danno lo stesso costo della rete per P2 e P3, su ogni modello. Il pacchetto più veloce costa ~14 % meno della media: cache e predittori non sempre caldi.</a:t>
+              <a:t>Due modi indipendenti di misurare la rete, a nodo pieno e con poco traffico, danno lo stesso costo per P2 e P3 su ogni modello. Il pacchetto più veloce è quello che trova la cache già pronta.</a:t>
             </a:r>
           </a:p>
         </p:txBody>
@@ -24162,7 +24181,7 @@
                 </a:solidFill>
                 <a:latin typeface="Calibri"/>
               </a:rPr>
-              <a:t>LA RETE NEURALE SOTTO TRAFFICO · ISTRUZIONI E LATENZA</a:t>
+              <a:t>5 · LA SOLA RETE NEURALE · IL PREZZO DELLA CONFIGURABILITÀ</a:t>
             </a:r>
           </a:p>
         </p:txBody>
@@ -24204,7 +24223,7 @@
                 </a:solidFill>
                 <a:latin typeface="Calibri"/>
               </a:rPr>
-              <a:t>La configurabilità si paga per pacchetto: +52 → +420 ns</a:t>
+              <a:t>La configurabilità si paga per pacchetto: da +52 a +420 ns</a:t>
             </a:r>
           </a:p>
         </p:txBody>
@@ -24246,7 +24265,7 @@
                 </a:solidFill>
                 <a:latin typeface="Calibri"/>
               </a:rPr>
-              <a:t>17</a:t>
+              <a:t>18</a:t>
             </a:r>
           </a:p>
         </p:txBody>
@@ -24288,7 +24307,7 @@
                 </a:solidFill>
                 <a:latin typeface="Calibri"/>
               </a:rPr>
-              <a:t>Mediane su 91 modelli (P2: 85)  ·  tempo di CPU, xdp_gen, P-core  ·  letture e salti per pacchetto: build strumentata</a:t>
+              <a:t>Mediane su 91 modelli (P2: 85)  ·  tempo per pacchetto, P-core  ·  letture e salti contati da una versione del programma che li conta</a:t>
             </a:r>
           </a:p>
         </p:txBody>
@@ -24838,7 +24857,7 @@
                           </a:solidFill>
                           <a:latin typeface="Calibri"/>
                         </a:rPr>
-                        <a:t>1/strato</a:t>
+                        <a:t>2–7</a:t>
                       </a:r>
                     </a:p>
                   </a:txBody>
@@ -25027,7 +25046,7 @@
                 </a:solidFill>
                 <a:latin typeface="Calibri"/>
               </a:rPr>
-              <a:t>La configurabilità si paga nelle </a:t>
+              <a:t>Il prezzo della configurabilità sta nelle </a:t>
             </a:r>
             <a:r>
               <a:rPr sz="1500" b="1" i="0">
@@ -25045,7 +25064,7 @@
                 </a:solidFill>
                 <a:latin typeface="Calibri"/>
               </a:rPr>
-              <a:t> (5 → 35 per pacchetto) e nei </a:t>
+              <a:t> (da 5 a 35 per pacchetto) e nei </a:t>
             </a:r>
             <a:r>
               <a:rPr sz="1500" b="1" i="0">
@@ -25054,7 +25073,7 @@
                 </a:solidFill>
                 <a:latin typeface="Calibri"/>
               </a:rPr>
-              <a:t>salti</a:t>
+              <a:t>salti fra programmi</a:t>
             </a:r>
             <a:r>
               <a:rPr sz="1500" b="0" i="0">
@@ -25063,7 +25082,7 @@
                 </a:solidFill>
                 <a:latin typeface="Calibri"/>
               </a:rPr>
-              <a:t> (P3: uno per strato), non nell'aritmetica. Sopra la baseline, rendere configurabile la forma (P2) costa </a:t>
+              <a:t> (P3 ne fa uno per strato), non nelle moltiplicazioni. In mediana P2 costa </a:t>
             </a:r>
             <a:r>
               <a:rPr sz="1500" b="1" i="0">
@@ -25072,7 +25091,7 @@
                 </a:solidFill>
                 <a:latin typeface="Calibri"/>
               </a:rPr>
-              <a:t>4,3 [2,7–12,8]×</a:t>
+              <a:t>4,3 volte</a:t>
             </a:r>
             <a:r>
               <a:rPr sz="1500" b="0" i="0">
@@ -25081,7 +25100,7 @@
                 </a:solidFill>
                 <a:latin typeface="Calibri"/>
               </a:rPr>
-              <a:t> P1; anche la profondità (P3) </a:t>
+              <a:t> P1, P3 </a:t>
             </a:r>
             <a:r>
               <a:rPr sz="1500" b="1" i="0">
@@ -25090,7 +25109,7 @@
                 </a:solidFill>
                 <a:latin typeface="Calibri"/>
               </a:rPr>
-              <a:t>7,8 [4,9–24,6]×</a:t>
+              <a:t>7,8 volte</a:t>
             </a:r>
             <a:r>
               <a:rPr sz="1500" b="0" i="0">
@@ -25099,7 +25118,7 @@
                 </a:solidFill>
                 <a:latin typeface="Calibri"/>
               </a:rPr>
-              <a:t>. Fra P1 e P1.5: 1,1 [0,9–1,7]×.</a:t>
+              <a:t>; P1.5 quasi come P1.</a:t>
             </a:r>
           </a:p>
         </p:txBody>
@@ -25218,7 +25237,7 @@
                 </a:solidFill>
                 <a:latin typeface="Calibri"/>
               </a:rPr>
-              <a:t>CAMBIARE MODELLO · IL COMPROMESSO</a:t>
+              <a:t>5 · LA SOLA RETE NEURALE · CAMBIARE MODELLO</a:t>
             </a:r>
           </a:p>
         </p:txBody>
@@ -25260,7 +25279,7 @@
                 </a:solidFill>
                 <a:latin typeface="Calibri"/>
               </a:rPr>
-              <a:t>Cambiare modello costa millisecondi a tutte le pipeline</a:t>
+              <a:t>Cambiare modello costa millisecondi a tutte le versioni</a:t>
             </a:r>
           </a:p>
         </p:txBody>
@@ -25302,7 +25321,7 @@
                 </a:solidFill>
                 <a:latin typeface="Calibri"/>
               </a:rPr>
-              <a:t>18</a:t>
+              <a:t>19</a:t>
             </a:r>
           </a:p>
         </p:txBody>
@@ -25344,7 +25363,7 @@
                 </a:solidFill>
                 <a:latin typeface="Calibri"/>
               </a:rPr>
-              <a:t>Tempo per installare un modello nuovo su un nodo già in servizio (scala logaritmica)  ·  mediane su 89 modelli, bench_solo.py  ·  clang senza cache, fuori dal nodo</a:t>
+              <a:t>Tempo per installare un modello nuovo su un nodo già in servizio, scala logaritmica  ·  mediane su 89 modelli  ·  compilazione da zero, fuori dal nodo</a:t>
             </a:r>
           </a:p>
         </p:txBody>
@@ -25494,7 +25513,7 @@
                 </a:solidFill>
                 <a:latin typeface="Calibri"/>
               </a:rPr>
-              <a:t>Con l'oggetto precompilato (AOT)</a:t>
+              <a:t>P1: si compila prima, fuori dal nodo</a:t>
             </a:r>
           </a:p>
         </p:txBody>
@@ -25536,7 +25555,7 @@
                 </a:solidFill>
                 <a:latin typeface="Calibri"/>
               </a:rPr>
-              <a:t>Il nodo carica un file pronto: 0,3–1,5 ms (mediana 0,6). Generarlo e compilarlo con clang, fuori dal nodo, costa 34–114 ms secondo il modello (mediana 49).</a:t>
+              <a:t>Il nodo carica un programma già compilato in 0,3–1,5 ms. Compilarlo per un modello nuovo, su un'altra macchina, costa 34–114 ms.</a:t>
             </a:r>
           </a:p>
         </p:txBody>
@@ -25710,7 +25729,7 @@
                 </a:solidFill>
                 <a:latin typeface="Calibri"/>
               </a:rPr>
-              <a:t>Un modello nuovo si installa scrivendo le sue tabelle: 0,24–0,51 ms, nessun compilatore. Il programma generico si compila una volta sola all'avvio (P2 1,5–1,7 s, P3 1,2 s).</a:t>
+              <a:t>Un modello nuovo si installa scrivendo le sue tabelle: 0,24–0,51 ms, nessun compilatore sul nodo. Il programma generico si compila una volta sola, all'accensione (1,2–1,7 s).</a:t>
             </a:r>
           </a:p>
         </p:txBody>
@@ -25884,7 +25903,7 @@
                 </a:solidFill>
                 <a:latin typeface="Calibri"/>
               </a:rPr>
-              <a:t>Il tempo per cambiare modello non è un criterio di scelta: sul nodo meno di 6 ms per tutte, su ogni modello. Si sceglie sul costo per pacchetto (19–155 ns di rete con i pesi compilati, 129–852 con quelli da tabella) e su dove serve un compilatore.</a:t>
+              <a:t>Cambiare modello non è un criterio di scelta: sul nodo costa meno di 6 ms a tutte. Si sceglie sul costo per pacchetto e su dove serve un compilatore: P1 ne vuole uno per ogni modello nuovo, P2 e P3 no.</a:t>
             </a:r>
           </a:p>
         </p:txBody>
@@ -26003,7 +26022,7 @@
                 </a:solidFill>
                 <a:latin typeface="Calibri"/>
               </a:rPr>
-              <a:t>LA RETE NEURALE SOTTO TRAFFICO · TAGLIA DELLA RETE, LARGHEZZA DEL MODELLO</a:t>
+              <a:t>5 · LA SOLA RETE NEURALE · TAGLIA DELLA RETE E DEL MODELLO</a:t>
             </a:r>
           </a:p>
         </p:txBody>
@@ -26087,7 +26106,7 @@
                 </a:solidFill>
                 <a:latin typeface="Calibri"/>
               </a:rPr>
-              <a:t>19</a:t>
+              <a:t>20</a:t>
             </a:r>
           </a:p>
         </p:txBody>
@@ -26129,7 +26148,7 @@
                 </a:solidFill>
                 <a:latin typeface="Calibri"/>
               </a:rPr>
-              <a:t>Tempo di CPU meno la baseline, xdp_gen, P-core  ·  a sinistra: misurato meno la legge, mediana per taglia della rete  ·  a destra: famiglia base</a:t>
+              <a:t>Tempo della sola rete, P-core  ·  a sinistra: costo misurato meno quello previsto dalla legge, per taglia della rete  ·  a destra: 53 modelli del disegno principale</a:t>
             </a:r>
           </a:p>
         </p:txBody>
@@ -26207,7 +26226,7 @@
                 </a:solidFill>
                 <a:latin typeface="Calibri"/>
               </a:rPr>
-              <a:t>Nodi della rete</a:t>
+              <a:t>Nodi della rete.</a:t>
             </a:r>
             <a:r>
               <a:rPr lang="it-IT" sz="1400" b="0" i="0" dirty="0">
@@ -26216,7 +26235,7 @@
                 </a:solidFill>
                 <a:latin typeface="Calibri"/>
               </a:rPr>
-              <a:t> (56 modelli, reti da 10 a 100 nodi). Lo scarto dalla legge non cresce: al più 0,03 ns per nodo.</a:t>
+              <a:t> Reti da 10 a 100 nodi (56 modelli): il costo resta quello previsto dalla legge, al più 0,03 ns per nodo in più.</a:t>
             </a:r>
             <a:endParaRPr sz="1400" b="0" i="0" dirty="0">
               <a:solidFill>
@@ -26273,7 +26292,7 @@
                 </a:solidFill>
                 <a:latin typeface="Calibri"/>
               </a:rPr>
-              <a:t> Da 2 a 8 neuroni sale su tutte e quattro: P1 37 → 90 ns, P3 389 → 537 ns (mediane).</a:t>
+              <a:t> Da 2 a 8 neuroni sale su tutte: P1 da 37 a 90 ns, P3 da 389 a 537 ns.</a:t>
             </a:r>
           </a:p>
         </p:txBody>
@@ -26770,7 +26789,7 @@
                 </a:solidFill>
                 <a:latin typeface="Calibri"/>
               </a:rPr>
-              <a:t>Tutte e quattro calcolano lo stesso modello e prendono la stessa decisione: verificato su 91 modelli (85 per P2, che ha un tetto sui pesi). Cambia solo </a:t>
+              <a:t>Tutte e quattro prendono la stessa decisione su ogni pacchetto (verificato su 91 modelli). Cambia solo </a:t>
             </a:r>
             <a:r>
               <a:rPr sz="1800" b="1" i="0">
@@ -27807,7 +27826,7 @@
                 </a:solidFill>
                 <a:latin typeface="Calibri"/>
               </a:rPr>
-              <a:t>* Solo P1 statica può congelare anche </a:t>
+              <a:t>* Solo P1 statica può togliere dal programma anche i </a:t>
             </a:r>
             <a:r>
               <a:rPr sz="1300" b="1" i="0">
@@ -27816,7 +27835,7 @@
                 </a:solidFill>
                 <a:latin typeface="Calibri"/>
               </a:rPr>
-              <a:t>quali interfacce il nodo ha davvero</a:t>
+              <a:t>collegamenti che il suo nodo non ha</a:t>
             </a:r>
             <a:r>
               <a:rPr sz="1300" b="0" i="0">
@@ -27825,7 +27844,7 @@
                 </a:solidFill>
                 <a:latin typeface="Calibri"/>
               </a:rPr>
-              <a:t>: le colonne dei collegamenti che non esistono non vengono generate (se un link è su o giù resta letto a runtime). Serve il nodo congelato, perché le porte dipendono da quale nodo si è. Le misure di queste slide usano tutte le porte.</a:t>
+              <a:t>, perché conosce già il nodo su cui girerà. Le misure di queste slide non lo fanno: tutte le versioni vedono tutte le porte.</a:t>
             </a:r>
           </a:p>
         </p:txBody>
@@ -28068,7 +28087,7 @@
                 </a:solidFill>
                 <a:latin typeface="Calibri"/>
               </a:rPr>
-              <a:t>LA RETE NEURALE SOTTO TRAFFICO · PROFONDITÀ</a:t>
+              <a:t>5 · LA SOLA RETE NEURALE · PROFONDITÀ</a:t>
             </a:r>
           </a:p>
         </p:txBody>
@@ -28152,7 +28171,7 @@
                 </a:solidFill>
                 <a:latin typeface="Calibri"/>
               </a:rPr>
-              <a:t>20</a:t>
+              <a:t>21</a:t>
             </a:r>
           </a:p>
         </p:txBody>
@@ -28194,7 +28213,7 @@
                 </a:solidFill>
                 <a:latin typeface="Calibri"/>
               </a:rPr>
-              <a:t>Mediane per numero di strati, famiglia base (53 modelli)  ·  dimensione: istruzioni del programma caricato  ·  tempo: CPU meno baseline, xdp_gen, P-core a 3,5 GHz</a:t>
+              <a:t>Mediane per numero di strati, 53 modelli del disegno principale  ·  dimensione: istruzioni del programma caricato  ·  tempo: sola rete, P-core</a:t>
             </a:r>
           </a:p>
         </p:txBody>
@@ -28287,7 +28306,7 @@
                 </a:solidFill>
                 <a:latin typeface="Calibri"/>
               </a:rPr>
-              <a:t> P2 ricompila e srotola: +887 istruzioni per strato (r² 0,96). P3 non si muove: 12 288 su ogni modello.</a:t>
+              <a:t> P2 si ricompila per ogni profondità: ~890 istruzioni in più per strato. P3 resta di 12 288 istruzioni con ogni modello.</a:t>
             </a:r>
           </a:p>
         </p:txBody>
@@ -28338,7 +28357,7 @@
                 </a:solidFill>
                 <a:latin typeface="Calibri"/>
               </a:rPr>
-              <a:t> P3 paga ~46 ns per strato, P2 ~20, P1 e P1.5 ~1 (legge, a MAC ferme).</a:t>
+              <a:t> Ogni strato costa a P3 ~46 ns, a P2 ~20, a P1 e P1.5 ~1.</a:t>
             </a:r>
           </a:p>
         </p:txBody>
@@ -28512,7 +28531,7 @@
                 </a:solidFill>
                 <a:latin typeface="Calibri"/>
               </a:rPr>
-              <a:t>Un modello profondo si paga sempre: con P2 in un programma più grande da ricompilare (~890 istruzioni per strato), con P3 in ~46 ns per pacchetto a ogni strato. P3 è la più flessibile, ed è quella che la profondità rallenta di più.</a:t>
+              <a:t>Un modello profondo si paga sempre: P2 con un programma più grande da compilare, P3 con ~46 ns in più a ogni pacchetto per ogni strato. P3 è la versione più flessibile, ed è quella che la profondità rallenta di più.</a:t>
             </a:r>
           </a:p>
         </p:txBody>
@@ -28631,7 +28650,7 @@
                 </a:solidFill>
                 <a:latin typeface="Calibri"/>
               </a:rPr>
-              <a:t>LA RETE NEURALE SOTTO TRAFFICO · A PARITÀ DI PESI</a:t>
+              <a:t>5 · LA SOLA RETE NEURALE · A PARITÀ DI PESI</a:t>
             </a:r>
           </a:p>
         </p:txBody>
@@ -28715,7 +28734,7 @@
                 </a:solidFill>
                 <a:latin typeface="Calibri"/>
               </a:rPr>
-              <a:t>21</a:t>
+              <a:t>22</a:t>
             </a:r>
           </a:p>
         </p:txBody>
@@ -28757,7 +28776,7 @@
                 </a:solidFill>
                 <a:latin typeface="Calibri"/>
               </a:rPr>
-              <a:t>Cinque forme con circa 592 pesi, da 1 a 5 strati, 2 composizioni dell'ingresso (10 modelli)  ·  mediane  ·  CPU meno baseline, P-core</a:t>
+              <a:t>Cinque forme con circa 592 pesi, da 1 a 5 strati, su 2 tipi di ingresso (10 modelli)  ·  mediane  ·  sola rete, P-core</a:t>
             </a:r>
           </a:p>
         </p:txBody>
@@ -28949,7 +28968,7 @@
                 </a:solidFill>
                 <a:latin typeface="Calibri"/>
               </a:rPr>
-              <a:t>Da 1 a 5 strati, a pesi fermi: P2 +48 [44–53] %, P3 +63 [55–70] %; ~58 ns per strato per P3.</a:t>
+              <a:t>Gli stessi ~592 pesi su 5 strati invece di 1: P2 costa il 48 % in più, P3 il 63 % (~58 ns per strato).</a:t>
             </a:r>
           </a:p>
         </p:txBody>
@@ -29132,7 +29151,7 @@
                 </a:solidFill>
                 <a:latin typeface="Calibri"/>
               </a:rPr>
-              <a:t> (mediane): srotolano tutto in una funzione sola, e la forma conta poco (~4 ns per strato).</a:t>
+              <a:t>: P1 e P1.5 scrivono la rete per esteso in una funzione sola, e la forma conta poco (~4 ns per strato).</a:t>
             </a:r>
           </a:p>
         </p:txBody>
@@ -29306,7 +29325,7 @@
                 </a:solidFill>
                 <a:latin typeface="Calibri"/>
               </a:rPr>
-              <a:t>Con le versioni specializzate la forma della rete si sceglie per l'accuratezza. Con le generiche, a parità di pesi, conviene una rete larga e poco profonda: da 1 a 5 strati il costo sale del 48 % (P2) e del 63 % (P3).</a:t>
+              <a:t>Con le versioni che hanno i pesi nel programma la forma della rete si sceglie per l'accuratezza. Con quelle che li leggono da tabella, a parità di pesi conviene una rete larga e poco profonda: da 1 a 5 strati il costo sale del 48 % (P2) e del 63 % (P3).</a:t>
             </a:r>
           </a:p>
         </p:txBody>
@@ -29425,7 +29444,7 @@
                 </a:solidFill>
                 <a:latin typeface="Calibri"/>
               </a:rPr>
-              <a:t>LA RETE NEURALE SOTTO TRAFFICO · CONTARE IL LAVORO GIUSTO</a:t>
+              <a:t>5 · LA SOLA RETE NEURALE · PREVEDERE IL COSTO</a:t>
             </a:r>
           </a:p>
         </p:txBody>
@@ -29467,7 +29486,7 @@
                 </a:solidFill>
                 <a:latin typeface="Calibri"/>
               </a:rPr>
-              <a:t>Il costo di un modello si prevede: a + b × MAC + c × strati</a:t>
+              <a:t>Il costo di un modello si può prevedere prima di misurarlo</a:t>
             </a:r>
           </a:p>
         </p:txBody>
@@ -29509,7 +29528,7 @@
                 </a:solidFill>
                 <a:latin typeface="Calibri"/>
               </a:rPr>
-              <a:t>22</a:t>
+              <a:t>23</a:t>
             </a:r>
           </a:p>
         </p:txBody>
@@ -29551,7 +29570,7 @@
                 </a:solidFill>
                 <a:latin typeface="Calibri"/>
               </a:rPr>
-              <a:t>Legge su 83 modelli densi (P2: 77), errore su modelli lasciati fuori  ·  grafico: misurato meno c × strati  ·  tabella: quote mediane dei tre termini  ·  P-core</a:t>
+              <a:t>Stimata su 83 modelli senza pesi a zero, errore su modelli lasciati fuori  ·  grafico: costo meno la parte per strato  ·  tabella: quanto pesa ogni parte</a:t>
             </a:r>
           </a:p>
         </p:txBody>
@@ -29627,7 +29646,7 @@
                           </a:solidFill>
                           <a:latin typeface="Calibri"/>
                         </a:rPr>
-                        <a:t>fisso · MAC · strati</a:t>
+                        <a:t>fisso · moltipl. · strati</a:t>
                       </a:r>
                     </a:p>
                   </a:txBody>
@@ -29896,7 +29915,7 @@
                 </a:solidFill>
                 <a:latin typeface="Calibri"/>
               </a:rPr>
-              <a:t>Dove va il tempo</a:t>
+              <a:t>Dove va il tempo.</a:t>
             </a:r>
             <a:r>
               <a:rPr sz="1400" b="0" i="0" dirty="0" err="1">
@@ -29905,7 +29924,7 @@
                 </a:solidFill>
                 <a:latin typeface="Calibri"/>
               </a:rPr>
-              <a:t> (quota mediana di ogni termine). P1 e P1.5: circa metà nelle moltiplicazioni. P2 e P3: 82 % nella parte fissa e negli strati, cioè tail call e letture di tabella. La legge regge su tutte (r² 0,93–0,99, errore 3–9 % su modelli non visti).</a:t>
+              <a:t> Con P1 e P1.5 circa metà è moltiplicazioni. Con P2 e P3 circa l'82 % è struttura: il lavoro fisso e quello per strato, cioè salti fra programmi e letture di tabella. Su modelli mai visti la legge sbaglia del 3–9 %.</a:t>
             </a:r>
           </a:p>
         </p:txBody>
@@ -30073,22 +30092,13 @@
               </a:spcAft>
             </a:pPr>
             <a:r>
-              <a:rPr sz="1400" b="0" i="0">
+              <a:rPr sz="1400" b="1" i="0">
                 <a:solidFill>
                   <a:srgbClr val="222B36"/>
                 </a:solidFill>
                 <a:latin typeface="Calibri"/>
               </a:rPr>
-              <a:t>Il costo di un modello si </a:t>
-            </a:r>
-            <a:r>
-              <a:rPr sz="1400" b="1" i="0">
-                <a:solidFill>
-                  <a:srgbClr val="222B36"/>
-                </a:solidFill>
-                <a:latin typeface="Calibri"/>
-              </a:rPr>
-              <a:t>stima prima di misurarlo</a:t>
+              <a:t>Costo della rete ≈ fisso + moltiplicazioni × costo di una + strati × costo di uno.</a:t>
             </a:r>
             <a:r>
               <a:rPr sz="1400" b="0" i="0">
@@ -30097,61 +30107,7 @@
                 </a:solidFill>
                 <a:latin typeface="Calibri"/>
               </a:rPr>
-              <a:t>: ~22 ns + </a:t>
-            </a:r>
-            <a:r>
-              <a:rPr sz="1400" b="1" i="0">
-                <a:solidFill>
-                  <a:srgbClr val="222B36"/>
-                </a:solidFill>
-                <a:latin typeface="Calibri"/>
-              </a:rPr>
-              <a:t>0,26 ns</a:t>
-            </a:r>
-            <a:r>
-              <a:rPr sz="1400" b="0" i="0">
-                <a:solidFill>
-                  <a:srgbClr val="222B36"/>
-                </a:solidFill>
-                <a:latin typeface="Calibri"/>
-              </a:rPr>
-              <a:t> per MAC con i pesi compilati (P1), ~154 ns + </a:t>
-            </a:r>
-            <a:r>
-              <a:rPr sz="1400" b="1" i="0">
-                <a:solidFill>
-                  <a:srgbClr val="222B36"/>
-                </a:solidFill>
-                <a:latin typeface="Calibri"/>
-              </a:rPr>
-              <a:t>0,77 ns</a:t>
-            </a:r>
-            <a:r>
-              <a:rPr sz="1400" b="0" i="0">
-                <a:solidFill>
-                  <a:srgbClr val="222B36"/>
-                </a:solidFill>
-                <a:latin typeface="Calibri"/>
-              </a:rPr>
-              <a:t> per MAC + ~46 ns per strato con P3. Per P2 e P3 pesa la </a:t>
-            </a:r>
-            <a:r>
-              <a:rPr sz="1400" b="1" i="0">
-                <a:solidFill>
-                  <a:srgbClr val="222B36"/>
-                </a:solidFill>
-                <a:latin typeface="Calibri"/>
-              </a:rPr>
-              <a:t>struttura</a:t>
-            </a:r>
-            <a:r>
-              <a:rPr sz="1400" b="0" i="0">
-                <a:solidFill>
-                  <a:srgbClr val="222B36"/>
-                </a:solidFill>
-                <a:latin typeface="Calibri"/>
-              </a:rPr>
-              <a:t> (tail call, letture di tabella), non l'aritmetica.</a:t>
+              <a:t> P1: ~22 ns + 0,26 ns per moltiplicazione. P3: ~154 ns + 0,77 ns per moltiplicazione + ~46 ns per strato.</a:t>
             </a:r>
           </a:p>
         </p:txBody>
@@ -30294,7 +30250,7 @@
                 </a:solidFill>
                 <a:latin typeface="Calibri"/>
               </a:rPr>
-              <a:t>LA RETE NEURALE SOTTO TRAFFICO · QUANDO LA SPECIALIZZAZIONE PAGA DAVVERO</a:t>
+              <a:t>5 · LA SOLA RETE NEURALE · PESI A ZERO</a:t>
             </a:r>
           </a:p>
         </p:txBody>
@@ -30336,7 +30292,7 @@
                 </a:solidFill>
                 <a:latin typeface="Calibri"/>
               </a:rPr>
-              <a:t>Pesi a zero: solo le specializzate dimagriscono</a:t>
+              <a:t>Pesi a zero: accelerano solo P1 e P1.5</a:t>
             </a:r>
           </a:p>
         </p:txBody>
@@ -30378,7 +30334,7 @@
                 </a:solidFill>
                 <a:latin typeface="Calibri"/>
               </a:rPr>
-              <a:t>23</a:t>
+              <a:t>24</a:t>
             </a:r>
           </a:p>
         </p:txBody>
@@ -30420,7 +30376,7 @@
                 </a:solidFill>
                 <a:latin typeface="Calibri"/>
               </a:rPr>
-              <a:t>4 forme al 50 e al 90 % di pesi a zero, ciascuna contro la legge stimata sui modelli densi  ·  tempo di CPU meno la baseline, xdp_gen, nodo saturo, P-core a 3,5 GHz</a:t>
+              <a:t>4 forme con il 50 e il 90 % di pesi a zero, confrontate con la legge stimata sui modelli senza zeri  ·  sola rete, P-core a 3,5 GHz</a:t>
             </a:r>
           </a:p>
         </p:txBody>
@@ -30612,7 +30568,7 @@
                 </a:solidFill>
                 <a:latin typeface="Calibri"/>
               </a:rPr>
-              <a:t>Al 90 % di zeri il programma scende a 0,34–0,35× quello del modello denso, e il costo della rete a 0,62 [0,27–0,83]× del previsto. Il compilatore vede lo zero e cancella la moltiplicazione.</a:t>
+              <a:t>Al 90 % di zeri il programma scende a circa un terzo (0,34–0,35 volte) e la rete costa 0,62 volte quanto previsto per lo stesso modello senza zeri: il compilatore toglie le moltiplicazioni per zero.</a:t>
             </a:r>
           </a:p>
         </p:txBody>
@@ -30786,7 +30742,7 @@
                 </a:solidFill>
                 <a:latin typeface="Calibri"/>
               </a:rPr>
-              <a:t>Dimensione identica al modello denso, costo 1,02 [0,91–1,14]× (P2) e 1,01 [0,91–1,03]× (P3) del previsto: zero, letto da una tabella, è un numero come un altro.</a:t>
+              <a:t>Programma identico e costo come previsto (1,02 volte per P2, 1,01 per P3): uno zero letto da una tabella è un numero come un altro.</a:t>
             </a:r>
           </a:p>
         </p:txBody>
@@ -30960,7 +30916,7 @@
                 </a:solidFill>
                 <a:latin typeface="Calibri"/>
               </a:rPr>
-              <a:t>Potare il modello (pesi a zero) rende più veloci </a:t>
+              <a:t>Mettere pesi a zero rende più veloci </a:t>
             </a:r>
             <a:r>
               <a:rPr sz="1500" b="1" i="0">
@@ -30969,7 +30925,7 @@
                 </a:solidFill>
                 <a:latin typeface="Calibri"/>
               </a:rPr>
-              <a:t>solo le versioni specializzate</a:t>
+              <a:t>solo le versioni con i pesi nel programma</a:t>
             </a:r>
             <a:r>
               <a:rPr sz="1500" b="0" i="0">
@@ -30987,7 +30943,7 @@
                 </a:solidFill>
                 <a:latin typeface="Calibri"/>
               </a:rPr>
-              <a:t>0,44×</a:t>
+              <a:t>0,44</a:t>
             </a:r>
             <a:r>
               <a:rPr sz="1500" b="0" i="0">
@@ -31005,7 +30961,7 @@
                 </a:solidFill>
                 <a:latin typeface="Calibri"/>
               </a:rPr>
-              <a:t>0,62×</a:t>
+              <a:t>0,62</a:t>
             </a:r>
             <a:r>
               <a:rPr sz="1500" b="0" i="0">
@@ -31014,7 +30970,912 @@
                 </a:solidFill>
                 <a:latin typeface="Calibri"/>
               </a:rPr>
-              <a:t> del modello denso previsto. Con P2 e P3 non dà niente.</a:t>
+              <a:t> volte il previsto. Con P2 e P3 non dà niente.</a:t>
+            </a:r>
+          </a:p>
+        </p:txBody>
+      </p:sp>
+    </p:spTree>
+  </p:cSld>
+  <p:clrMapOvr>
+    <a:masterClrMapping/>
+  </p:clrMapOvr>
+</p:sld>
+</file>
+
+<file path=ppt/slides/slide24.xml><?xml version="1.0" encoding="utf-8"?>
+<p:sld xmlns:a="http://schemas.openxmlformats.org/drawingml/2006/main" xmlns:p="http://schemas.openxmlformats.org/presentationml/2006/main" xmlns:r="http://schemas.openxmlformats.org/officeDocument/2006/relationships">
+  <p:cSld>
+    <p:bg>
+      <p:bgPr>
+        <a:solidFill>
+          <a:srgbClr val="FFFFFF"/>
+        </a:solidFill>
+        <a:effectLst/>
+      </p:bgPr>
+    </p:bg>
+    <p:spTree>
+      <p:nvGrpSpPr>
+        <p:cNvPr id="1" name=""/>
+        <p:cNvGrpSpPr/>
+        <p:nvPr/>
+      </p:nvGrpSpPr>
+      <p:grpSpPr/>
+      <p:sp>
+        <p:nvSpPr>
+          <p:cNvPr id="2" name="Rectangle 1"/>
+          <p:cNvSpPr/>
+          <p:nvPr/>
+        </p:nvSpPr>
+        <p:spPr>
+          <a:xfrm>
+            <a:off x="0" y="0"/>
+            <a:ext cx="12191695" cy="109728"/>
+          </a:xfrm>
+          <a:prstGeom prst="rect">
+            <a:avLst/>
+          </a:prstGeom>
+          <a:solidFill>
+            <a:srgbClr val="1F3A5F"/>
+          </a:solidFill>
+          <a:ln>
+            <a:noFill/>
+          </a:ln>
+          <a:effectLst/>
+        </p:spPr>
+        <p:style>
+          <a:lnRef idx="1">
+            <a:schemeClr val="accent1"/>
+          </a:lnRef>
+          <a:fillRef idx="3">
+            <a:schemeClr val="accent1"/>
+          </a:fillRef>
+          <a:effectRef idx="2">
+            <a:schemeClr val="accent1"/>
+          </a:effectRef>
+          <a:fontRef idx="minor">
+            <a:schemeClr val="lt1"/>
+          </a:fontRef>
+        </p:style>
+        <p:txBody>
+          <a:bodyPr rtlCol="0" anchor="ctr"/>
+          <a:lstStyle/>
+          <a:p>
+            <a:endParaRPr/>
+          </a:p>
+        </p:txBody>
+      </p:sp>
+      <p:sp>
+        <p:nvSpPr>
+          <p:cNvPr id="3" name="TextBox 2"/>
+          <p:cNvSpPr txBox="1"/>
+          <p:nvPr/>
+        </p:nvSpPr>
+        <p:spPr>
+          <a:xfrm>
+            <a:off x="548640" y="384048"/>
+            <a:ext cx="10972800" cy="274320"/>
+          </a:xfrm>
+          <a:prstGeom prst="rect">
+            <a:avLst/>
+          </a:prstGeom>
+          <a:noFill/>
+        </p:spPr>
+        <p:txBody>
+          <a:bodyPr wrap="square" lIns="0" tIns="0" rIns="0" bIns="0" anchor="t">
+            <a:spAutoFit/>
+          </a:bodyPr>
+          <a:lstStyle/>
+          <a:p>
+            <a:pPr algn="l">
+              <a:lnSpc>
+                <a:spcPct val="110000"/>
+              </a:lnSpc>
+              <a:spcAft>
+                <a:spcPts val="600"/>
+              </a:spcAft>
+            </a:pPr>
+            <a:r>
+              <a:rPr sz="1200" b="1" i="0">
+                <a:solidFill>
+                  <a:srgbClr val="E07A2D"/>
+                </a:solidFill>
+                <a:latin typeface="Calibri"/>
+              </a:rPr>
+              <a:t>COME LEGGERE I NUMERI</a:t>
+            </a:r>
+          </a:p>
+        </p:txBody>
+      </p:sp>
+      <p:sp>
+        <p:nvSpPr>
+          <p:cNvPr id="4" name="TextBox 3"/>
+          <p:cNvSpPr txBox="1"/>
+          <p:nvPr/>
+        </p:nvSpPr>
+        <p:spPr>
+          <a:xfrm>
+            <a:off x="548640" y="658368"/>
+            <a:ext cx="11064240" cy="822960"/>
+          </a:xfrm>
+          <a:prstGeom prst="rect">
+            <a:avLst/>
+          </a:prstGeom>
+          <a:noFill/>
+        </p:spPr>
+        <p:txBody>
+          <a:bodyPr wrap="square" lIns="0" tIns="0" rIns="0" bIns="0" anchor="t">
+            <a:spAutoFit/>
+          </a:bodyPr>
+          <a:lstStyle/>
+          <a:p>
+            <a:pPr algn="l">
+              <a:lnSpc>
+                <a:spcPct val="100000"/>
+              </a:lnSpc>
+              <a:spcAft>
+                <a:spcPts val="600"/>
+              </a:spcAft>
+            </a:pPr>
+            <a:r>
+              <a:rPr sz="3000" b="1" i="0">
+                <a:solidFill>
+                  <a:srgbClr val="1F3A5F"/>
+                </a:solidFill>
+                <a:latin typeface="Calibri"/>
+              </a:rPr>
+              <a:t>Ogni cifra vale per 91 modelli, non per uno</a:t>
+            </a:r>
+          </a:p>
+        </p:txBody>
+      </p:sp>
+      <p:sp>
+        <p:nvSpPr>
+          <p:cNvPr id="5" name="TextBox 4"/>
+          <p:cNvSpPr txBox="1"/>
+          <p:nvPr/>
+        </p:nvSpPr>
+        <p:spPr>
+          <a:xfrm>
+            <a:off x="11292840" y="6446520"/>
+            <a:ext cx="457200" cy="274320"/>
+          </a:xfrm>
+          <a:prstGeom prst="rect">
+            <a:avLst/>
+          </a:prstGeom>
+          <a:noFill/>
+        </p:spPr>
+        <p:txBody>
+          <a:bodyPr wrap="square" lIns="0" tIns="0" rIns="0" bIns="0" anchor="t">
+            <a:spAutoFit/>
+          </a:bodyPr>
+          <a:lstStyle/>
+          <a:p>
+            <a:pPr algn="r">
+              <a:lnSpc>
+                <a:spcPct val="110000"/>
+              </a:lnSpc>
+              <a:spcAft>
+                <a:spcPts val="600"/>
+              </a:spcAft>
+            </a:pPr>
+            <a:r>
+              <a:rPr sz="1100" b="0" i="0">
+                <a:solidFill>
+                  <a:srgbClr val="6B7C93"/>
+                </a:solidFill>
+                <a:latin typeface="Calibri"/>
+              </a:rPr>
+              <a:t>3</a:t>
+            </a:r>
+          </a:p>
+        </p:txBody>
+      </p:sp>
+      <p:sp>
+        <p:nvSpPr>
+          <p:cNvPr id="6" name="TextBox 5"/>
+          <p:cNvSpPr txBox="1"/>
+          <p:nvPr/>
+        </p:nvSpPr>
+        <p:spPr>
+          <a:xfrm>
+            <a:off x="548640" y="6446520"/>
+            <a:ext cx="10424160" cy="274320"/>
+          </a:xfrm>
+          <a:prstGeom prst="rect">
+            <a:avLst/>
+          </a:prstGeom>
+          <a:noFill/>
+        </p:spPr>
+        <p:txBody>
+          <a:bodyPr wrap="square" lIns="0" tIns="0" rIns="0" bIns="0" anchor="t">
+            <a:spAutoFit/>
+          </a:bodyPr>
+          <a:lstStyle/>
+          <a:p>
+            <a:pPr algn="l">
+              <a:lnSpc>
+                <a:spcPct val="110000"/>
+              </a:lnSpc>
+              <a:spcAft>
+                <a:spcPts val="600"/>
+              </a:spcAft>
+            </a:pPr>
+            <a:r>
+              <a:rPr sz="1100" b="0" i="1">
+                <a:solidFill>
+                  <a:srgbClr val="6B7C93"/>
+                </a:solidFill>
+                <a:latin typeface="Calibri"/>
+              </a:rPr>
+              <a:t>Campagna dell'11–12 ottobre 2026, portatile di laboratorio (Intel Core Ultra 7 155H), core a frequenza fissa</a:t>
+            </a:r>
+          </a:p>
+        </p:txBody>
+      </p:sp>
+      <p:sp>
+        <p:nvSpPr>
+          <p:cNvPr id="7" name="TextBox 6"/>
+          <p:cNvSpPr txBox="1"/>
+          <p:nvPr/>
+        </p:nvSpPr>
+        <p:spPr>
+          <a:xfrm>
+            <a:off x="548640" y="1508760"/>
+            <a:ext cx="10972800" cy="548640"/>
+          </a:xfrm>
+          <a:prstGeom prst="rect">
+            <a:avLst/>
+          </a:prstGeom>
+          <a:noFill/>
+        </p:spPr>
+        <p:txBody>
+          <a:bodyPr wrap="square" lIns="0" tIns="0" rIns="0" bIns="0" anchor="t">
+            <a:spAutoFit/>
+          </a:bodyPr>
+          <a:lstStyle/>
+          <a:p>
+            <a:pPr algn="l">
+              <a:lnSpc>
+                <a:spcPct val="110000"/>
+              </a:lnSpc>
+              <a:spcAft>
+                <a:spcPts val="600"/>
+              </a:spcAft>
+            </a:pPr>
+            <a:r>
+              <a:rPr sz="1800" b="0" i="0">
+                <a:solidFill>
+                  <a:srgbClr val="222B36"/>
+                </a:solidFill>
+                <a:latin typeface="Calibri"/>
+              </a:rPr>
+              <a:t>Ogni misura è ripetuta su </a:t>
+            </a:r>
+            <a:r>
+              <a:rPr sz="1800" b="1" i="0">
+                <a:solidFill>
+                  <a:srgbClr val="222B36"/>
+                </a:solidFill>
+                <a:latin typeface="Calibri"/>
+              </a:rPr>
+              <a:t>91 reti neurali diverse</a:t>
+            </a:r>
+            <a:r>
+              <a:rPr sz="1800" b="0" i="0">
+                <a:solidFill>
+                  <a:srgbClr val="222B36"/>
+                </a:solidFill>
+                <a:latin typeface="Calibri"/>
+              </a:rPr>
+              <a:t>: da 5 a 117 ingressi, da 1 a 6 strati, da 2 a 8 neuroni per strato. Una conclusione vale solo se regge su tutte.</a:t>
+            </a:r>
+          </a:p>
+        </p:txBody>
+      </p:sp>
+      <p:graphicFrame>
+        <p:nvGraphicFramePr>
+          <p:cNvPr id="8" name="Table 7"/>
+          <p:cNvGraphicFramePr>
+            <a:graphicFrameLocks noGrp="1"/>
+          </p:cNvGraphicFramePr>
+          <p:nvPr>
+            <p:extLst>
+              <p:ext uri="{D42A27DB-BD31-4B8C-83A1-F6EECF244321}">
+                <p14:modId xmlns:p14="http://schemas.microsoft.com/office/powerpoint/2010/main" val="2304511093"/>
+              </p:ext>
+            </p:extLst>
+          </p:nvPr>
+        </p:nvGraphicFramePr>
+        <p:xfrm>
+          <a:off x="548640" y="2148840"/>
+          <a:ext cx="11064236" cy="2514600"/>
+        </p:xfrm>
+        <a:graphic>
+          <a:graphicData uri="http://schemas.openxmlformats.org/drawingml/2006/table">
+            <a:tbl>
+              <a:tblPr>
+                <a:tableStyleId>{2D5ABB26-0587-4C30-8999-92F81FD0307C}</a:tableStyleId>
+              </a:tblPr>
+              <a:tblGrid>
+                <a:gridCol w="3319270">
+                  <a:extLst>
+                    <a:ext uri="{9D8B030D-6E8A-4147-A177-3AD203B41FA5}">
+                      <a16:colId xmlns:a16="http://schemas.microsoft.com/office/drawing/2014/main" val="20000"/>
+                    </a:ext>
+                  </a:extLst>
+                </a:gridCol>
+                <a:gridCol w="7744966">
+                  <a:extLst>
+                    <a:ext uri="{9D8B030D-6E8A-4147-A177-3AD203B41FA5}">
+                      <a16:colId xmlns:a16="http://schemas.microsoft.com/office/drawing/2014/main" val="20001"/>
+                    </a:ext>
+                  </a:extLst>
+                </a:gridCol>
+              </a:tblGrid>
+              <a:tr h="502920">
+                <a:tc>
+                  <a:txBody>
+                    <a:bodyPr/>
+                    <a:lstStyle/>
+                    <a:p>
+                      <a:pPr algn="l"/>
+                      <a:r>
+                        <a:rPr lang="it-IT" sz="1500" b="1" i="0">
+                          <a:solidFill>
+                            <a:srgbClr val="FFFFFF"/>
+                          </a:solidFill>
+                          <a:latin typeface="Calibri"/>
+                        </a:rPr>
+                        <a:t>Si legge</a:t>
+                      </a:r>
+                      <a:endParaRPr sz="1500" b="1" i="0">
+                        <a:solidFill>
+                          <a:srgbClr val="FFFFFF"/>
+                        </a:solidFill>
+                        <a:latin typeface="Calibri"/>
+                      </a:endParaRPr>
+                    </a:p>
+                  </a:txBody>
+                  <a:tcPr marT="27432" marB="27432" anchor="ctr">
+                    <a:solidFill>
+                      <a:srgbClr val="1F3A5F"/>
+                    </a:solidFill>
+                  </a:tcPr>
+                </a:tc>
+                <a:tc>
+                  <a:txBody>
+                    <a:bodyPr/>
+                    <a:lstStyle/>
+                    <a:p>
+                      <a:pPr algn="l"/>
+                      <a:r>
+                        <a:rPr lang="it-IT" sz="1500" b="1" i="0">
+                          <a:solidFill>
+                            <a:srgbClr val="FFFFFF"/>
+                          </a:solidFill>
+                          <a:latin typeface="Calibri"/>
+                        </a:rPr>
+                        <a:t>Vuol dire</a:t>
+                      </a:r>
+                      <a:endParaRPr sz="1500" b="1" i="0">
+                        <a:solidFill>
+                          <a:srgbClr val="FFFFFF"/>
+                        </a:solidFill>
+                        <a:latin typeface="Calibri"/>
+                      </a:endParaRPr>
+                    </a:p>
+                  </a:txBody>
+                  <a:tcPr marT="27432" marB="27432" anchor="ctr">
+                    <a:solidFill>
+                      <a:srgbClr val="1F3A5F"/>
+                    </a:solidFill>
+                  </a:tcPr>
+                </a:tc>
+                <a:extLst>
+                  <a:ext uri="{0D108BD9-81ED-4DB2-BD59-A6C34878D82A}">
+                    <a16:rowId xmlns:a16="http://schemas.microsoft.com/office/drawing/2014/main" val="10000"/>
+                  </a:ext>
+                </a:extLst>
+              </a:tr>
+              <a:tr h="502920">
+                <a:tc>
+                  <a:txBody>
+                    <a:bodyPr/>
+                    <a:lstStyle/>
+                    <a:p>
+                      <a:pPr algn="l"/>
+                      <a:r>
+                        <a:rPr lang="it-IT" sz="1500" b="1" i="0">
+                          <a:solidFill>
+                            <a:srgbClr val="222B36"/>
+                          </a:solidFill>
+                          <a:latin typeface="Calibri"/>
+                        </a:rPr>
+                        <a:t>52 [19–155] ns</a:t>
+                      </a:r>
+                      <a:endParaRPr sz="1500" b="1" i="0">
+                        <a:solidFill>
+                          <a:srgbClr val="222B36"/>
+                        </a:solidFill>
+                        <a:latin typeface="Calibri"/>
+                      </a:endParaRPr>
+                    </a:p>
+                  </a:txBody>
+                  <a:tcPr marT="27432" marB="27432" anchor="ctr">
+                    <a:solidFill>
+                      <a:srgbClr val="FFFFFF"/>
+                    </a:solidFill>
+                  </a:tcPr>
+                </a:tc>
+                <a:tc>
+                  <a:txBody>
+                    <a:bodyPr/>
+                    <a:lstStyle/>
+                    <a:p>
+                      <a:pPr algn="l"/>
+                      <a:r>
+                        <a:rPr lang="it-IT" sz="1500" b="0" i="0">
+                          <a:solidFill>
+                            <a:srgbClr val="222B36"/>
+                          </a:solidFill>
+                          <a:latin typeface="Calibri"/>
+                        </a:rPr>
+                        <a:t>la mediana dei modelli e, fra parentesi, il più leggero e il più pesante</a:t>
+                      </a:r>
+                      <a:endParaRPr sz="1500" b="0" i="0">
+                        <a:solidFill>
+                          <a:srgbClr val="FFFFFF"/>
+                        </a:solidFill>
+                        <a:latin typeface="Calibri"/>
+                      </a:endParaRPr>
+                    </a:p>
+                  </a:txBody>
+                  <a:tcPr marT="27432" marB="27432" anchor="ctr">
+                    <a:solidFill>
+                      <a:srgbClr val="FFFFFF"/>
+                    </a:solidFill>
+                  </a:tcPr>
+                </a:tc>
+                <a:extLst>
+                  <a:ext uri="{0D108BD9-81ED-4DB2-BD59-A6C34878D82A}">
+                    <a16:rowId xmlns:a16="http://schemas.microsoft.com/office/drawing/2014/main" val="10001"/>
+                  </a:ext>
+                </a:extLst>
+              </a:tr>
+              <a:tr h="502920">
+                <a:tc>
+                  <a:txBody>
+                    <a:bodyPr/>
+                    <a:lstStyle/>
+                    <a:p>
+                      <a:pPr algn="l"/>
+                      <a:r>
+                        <a:rPr lang="it-IT" sz="1500" b="1" i="0">
+                          <a:solidFill>
+                            <a:srgbClr val="222B36"/>
+                          </a:solidFill>
+                          <a:latin typeface="Calibri"/>
+                        </a:rPr>
+                        <a:t>85/85</a:t>
+                      </a:r>
+                      <a:endParaRPr sz="1500" b="1" i="0">
+                        <a:solidFill>
+                          <a:srgbClr val="222B36"/>
+                        </a:solidFill>
+                        <a:latin typeface="Calibri"/>
+                      </a:endParaRPr>
+                    </a:p>
+                  </a:txBody>
+                  <a:tcPr marT="27432" marB="27432" anchor="ctr">
+                    <a:solidFill>
+                      <a:srgbClr val="F4F6F9"/>
+                    </a:solidFill>
+                  </a:tcPr>
+                </a:tc>
+                <a:tc>
+                  <a:txBody>
+                    <a:bodyPr/>
+                    <a:lstStyle/>
+                    <a:p>
+                      <a:pPr algn="l"/>
+                      <a:r>
+                        <a:rPr lang="it-IT" sz="1500" b="0" i="0">
+                          <a:solidFill>
+                            <a:srgbClr val="222B36"/>
+                          </a:solidFill>
+                          <a:latin typeface="Calibri"/>
+                        </a:rPr>
+                        <a:t>vale su 85 modelli su 85</a:t>
+                      </a:r>
+                      <a:endParaRPr sz="1500" b="0" i="0">
+                        <a:solidFill>
+                          <a:srgbClr val="FFFFFF"/>
+                        </a:solidFill>
+                        <a:latin typeface="Calibri"/>
+                      </a:endParaRPr>
+                    </a:p>
+                  </a:txBody>
+                  <a:tcPr marT="27432" marB="27432" anchor="ctr">
+                    <a:solidFill>
+                      <a:srgbClr val="F4F6F9"/>
+                    </a:solidFill>
+                  </a:tcPr>
+                </a:tc>
+                <a:extLst>
+                  <a:ext uri="{0D108BD9-81ED-4DB2-BD59-A6C34878D82A}">
+                    <a16:rowId xmlns:a16="http://schemas.microsoft.com/office/drawing/2014/main" val="10002"/>
+                  </a:ext>
+                </a:extLst>
+              </a:tr>
+              <a:tr h="502920">
+                <a:tc>
+                  <a:txBody>
+                    <a:bodyPr/>
+                    <a:lstStyle/>
+                    <a:p>
+                      <a:pPr algn="l"/>
+                      <a:r>
+                        <a:rPr lang="it-IT" sz="1500" b="1" i="0">
+                          <a:solidFill>
+                            <a:srgbClr val="222B36"/>
+                          </a:solidFill>
+                          <a:latin typeface="Calibri"/>
+                        </a:rPr>
+                        <a:t>4,3 volte</a:t>
+                      </a:r>
+                      <a:endParaRPr sz="1500" b="1" i="0">
+                        <a:solidFill>
+                          <a:srgbClr val="222B36"/>
+                        </a:solidFill>
+                        <a:latin typeface="Calibri"/>
+                      </a:endParaRPr>
+                    </a:p>
+                  </a:txBody>
+                  <a:tcPr marT="27432" marB="27432" anchor="ctr">
+                    <a:solidFill>
+                      <a:srgbClr val="FFFFFF"/>
+                    </a:solidFill>
+                  </a:tcPr>
+                </a:tc>
+                <a:tc>
+                  <a:txBody>
+                    <a:bodyPr/>
+                    <a:lstStyle/>
+                    <a:p>
+                      <a:pPr algn="l"/>
+                      <a:r>
+                        <a:rPr lang="it-IT" sz="1500" b="0" i="0">
+                          <a:solidFill>
+                            <a:srgbClr val="222B36"/>
+                          </a:solidFill>
+                          <a:latin typeface="Calibri"/>
+                        </a:rPr>
+                        <a:t>un rapporto calcolato modello per modello, poi la mediana</a:t>
+                      </a:r>
+                      <a:endParaRPr sz="1500" b="0" i="0">
+                        <a:solidFill>
+                          <a:srgbClr val="FFFFFF"/>
+                        </a:solidFill>
+                        <a:latin typeface="Calibri"/>
+                      </a:endParaRPr>
+                    </a:p>
+                  </a:txBody>
+                  <a:tcPr marT="27432" marB="27432" anchor="ctr">
+                    <a:solidFill>
+                      <a:srgbClr val="FFFFFF"/>
+                    </a:solidFill>
+                  </a:tcPr>
+                </a:tc>
+                <a:extLst>
+                  <a:ext uri="{0D108BD9-81ED-4DB2-BD59-A6C34878D82A}">
+                    <a16:rowId xmlns:a16="http://schemas.microsoft.com/office/drawing/2014/main" val="10003"/>
+                  </a:ext>
+                </a:extLst>
+              </a:tr>
+              <a:tr h="502920">
+                <a:tc>
+                  <a:txBody>
+                    <a:bodyPr/>
+                    <a:lstStyle/>
+                    <a:p>
+                      <a:pPr algn="l"/>
+                      <a:r>
+                        <a:rPr lang="it-IT" sz="1500" b="1" i="0">
+                          <a:solidFill>
+                            <a:srgbClr val="222B36"/>
+                          </a:solidFill>
+                          <a:latin typeface="Calibri"/>
+                        </a:rPr>
+                        <a:t>senza rete</a:t>
+                      </a:r>
+                      <a:endParaRPr sz="1500" b="1" i="0">
+                        <a:solidFill>
+                          <a:srgbClr val="222B36"/>
+                        </a:solidFill>
+                        <a:latin typeface="Calibri"/>
+                      </a:endParaRPr>
+                    </a:p>
+                  </a:txBody>
+                  <a:tcPr marT="27432" marB="27432" anchor="ctr">
+                    <a:solidFill>
+                      <a:srgbClr val="F4F6F9"/>
+                    </a:solidFill>
+                  </a:tcPr>
+                </a:tc>
+                <a:tc>
+                  <a:txBody>
+                    <a:bodyPr/>
+                    <a:lstStyle/>
+                    <a:p>
+                      <a:pPr algn="l"/>
+                      <a:r>
+                        <a:rPr lang="it-IT" sz="1500" b="0" i="0">
+                          <a:solidFill>
+                            <a:srgbClr val="222B36"/>
+                          </a:solidFill>
+                          <a:latin typeface="Calibri"/>
+                        </a:rPr>
+                        <a:t>il nodo che riceve e inoltra senza rete neurale: il costo fisso</a:t>
+                      </a:r>
+                      <a:endParaRPr sz="1500" b="0" i="0">
+                        <a:solidFill>
+                          <a:srgbClr val="FFFFFF"/>
+                        </a:solidFill>
+                        <a:latin typeface="Calibri"/>
+                      </a:endParaRPr>
+                    </a:p>
+                  </a:txBody>
+                  <a:tcPr marT="27432" marB="27432" anchor="ctr">
+                    <a:solidFill>
+                      <a:srgbClr val="F4F6F9"/>
+                    </a:solidFill>
+                  </a:tcPr>
+                </a:tc>
+                <a:extLst>
+                  <a:ext uri="{0D108BD9-81ED-4DB2-BD59-A6C34878D82A}">
+                    <a16:rowId xmlns:a16="http://schemas.microsoft.com/office/drawing/2014/main" val="10004"/>
+                  </a:ext>
+                </a:extLst>
+              </a:tr>
+            </a:tbl>
+          </a:graphicData>
+        </a:graphic>
+      </p:graphicFrame>
+      <p:sp>
+        <p:nvSpPr>
+          <p:cNvPr id="9" name="TextBox 8"/>
+          <p:cNvSpPr txBox="1"/>
+          <p:nvPr/>
+        </p:nvSpPr>
+        <p:spPr>
+          <a:xfrm>
+            <a:off x="548640" y="4754880"/>
+            <a:ext cx="11064240" cy="685800"/>
+          </a:xfrm>
+          <a:prstGeom prst="rect">
+            <a:avLst/>
+          </a:prstGeom>
+          <a:noFill/>
+        </p:spPr>
+        <p:txBody>
+          <a:bodyPr wrap="square" lIns="0" tIns="0" rIns="0" bIns="0" anchor="t">
+            <a:spAutoFit/>
+          </a:bodyPr>
+          <a:lstStyle/>
+          <a:p>
+            <a:pPr algn="l">
+              <a:lnSpc>
+                <a:spcPct val="110000"/>
+              </a:lnSpc>
+              <a:spcAft>
+                <a:spcPts val="600"/>
+              </a:spcAft>
+            </a:pPr>
+            <a:r>
+              <a:rPr sz="1300" b="0" i="0">
+                <a:solidFill>
+                  <a:srgbClr val="222B36"/>
+                </a:solidFill>
+                <a:latin typeface="Calibri"/>
+              </a:rPr>
+              <a:t>Il </a:t>
+            </a:r>
+            <a:r>
+              <a:rPr sz="1300" b="1" i="0">
+                <a:solidFill>
+                  <a:srgbClr val="222B36"/>
+                </a:solidFill>
+                <a:latin typeface="Calibri"/>
+              </a:rPr>
+              <a:t>nodo</a:t>
+            </a:r>
+            <a:r>
+              <a:rPr sz="1300" b="0" i="0">
+                <a:solidFill>
+                  <a:srgbClr val="222B36"/>
+                </a:solidFill>
+                <a:latin typeface="Calibri"/>
+              </a:rPr>
+              <a:t> è il computer che riceve il pacchetto, esegue la rete neurale per scegliere da quale porta farlo uscire, e lo inoltra. Il processore ha tre tipi di core: </a:t>
+            </a:r>
+            <a:r>
+              <a:rPr sz="1300" b="1" i="0">
+                <a:solidFill>
+                  <a:srgbClr val="222B36"/>
+                </a:solidFill>
+                <a:latin typeface="Calibri"/>
+              </a:rPr>
+              <a:t>P-core</a:t>
+            </a:r>
+            <a:r>
+              <a:rPr sz="1300" b="0" i="0">
+                <a:solidFill>
+                  <a:srgbClr val="222B36"/>
+                </a:solidFill>
+                <a:latin typeface="Calibri"/>
+              </a:rPr>
+              <a:t> veloci, </a:t>
+            </a:r>
+            <a:r>
+              <a:rPr sz="1300" b="1" i="0">
+                <a:solidFill>
+                  <a:srgbClr val="222B36"/>
+                </a:solidFill>
+                <a:latin typeface="Calibri"/>
+              </a:rPr>
+              <a:t>E-core</a:t>
+            </a:r>
+            <a:r>
+              <a:rPr sz="1300" b="0" i="0">
+                <a:solidFill>
+                  <a:srgbClr val="222B36"/>
+                </a:solidFill>
+                <a:latin typeface="Calibri"/>
+              </a:rPr>
+              <a:t> efficienti, </a:t>
+            </a:r>
+            <a:r>
+              <a:rPr sz="1300" b="1" i="0">
+                <a:solidFill>
+                  <a:srgbClr val="222B36"/>
+                </a:solidFill>
+                <a:latin typeface="Calibri"/>
+              </a:rPr>
+              <a:t>LP E-core</a:t>
+            </a:r>
+            <a:r>
+              <a:rPr sz="1300" b="0" i="0">
+                <a:solidFill>
+                  <a:srgbClr val="222B36"/>
+                </a:solidFill>
+                <a:latin typeface="Calibri"/>
+              </a:rPr>
+              <a:t> a basso consumo. Un nanosecondo (ns) è un miliardesimo di secondo.</a:t>
+            </a:r>
+          </a:p>
+        </p:txBody>
+      </p:sp>
+      <p:sp>
+        <p:nvSpPr>
+          <p:cNvPr id="10" name="Rounded Rectangle 9"/>
+          <p:cNvSpPr/>
+          <p:nvPr/>
+        </p:nvSpPr>
+        <p:spPr>
+          <a:xfrm>
+            <a:off x="548640" y="5532120"/>
+            <a:ext cx="11094415" cy="731520"/>
+          </a:xfrm>
+          <a:prstGeom prst="roundRect">
+            <a:avLst>
+              <a:gd name="adj" fmla="val 6000"/>
+            </a:avLst>
+          </a:prstGeom>
+          <a:solidFill>
+            <a:srgbClr val="1F3A5F"/>
+          </a:solidFill>
+          <a:ln>
+            <a:noFill/>
+          </a:ln>
+          <a:effectLst/>
+        </p:spPr>
+        <p:style>
+          <a:lnRef idx="1">
+            <a:schemeClr val="accent1"/>
+          </a:lnRef>
+          <a:fillRef idx="3">
+            <a:schemeClr val="accent1"/>
+          </a:fillRef>
+          <a:effectRef idx="2">
+            <a:schemeClr val="accent1"/>
+          </a:effectRef>
+          <a:fontRef idx="minor">
+            <a:schemeClr val="lt1"/>
+          </a:fontRef>
+        </p:style>
+        <p:txBody>
+          <a:bodyPr rtlCol="0" anchor="ctr"/>
+          <a:lstStyle/>
+          <a:p>
+            <a:endParaRPr/>
+          </a:p>
+        </p:txBody>
+      </p:sp>
+      <p:sp>
+        <p:nvSpPr>
+          <p:cNvPr id="11" name="TextBox 10"/>
+          <p:cNvSpPr txBox="1"/>
+          <p:nvPr/>
+        </p:nvSpPr>
+        <p:spPr>
+          <a:xfrm>
+            <a:off x="822960" y="5532120"/>
+            <a:ext cx="10545775" cy="731520"/>
+          </a:xfrm>
+          <a:prstGeom prst="rect">
+            <a:avLst/>
+          </a:prstGeom>
+          <a:noFill/>
+        </p:spPr>
+        <p:txBody>
+          <a:bodyPr wrap="square" lIns="0" tIns="0" rIns="0" bIns="0" anchor="ctr">
+            <a:spAutoFit/>
+          </a:bodyPr>
+          <a:lstStyle/>
+          <a:p>
+            <a:pPr algn="l">
+              <a:lnSpc>
+                <a:spcPct val="105000"/>
+              </a:lnSpc>
+              <a:spcAft>
+                <a:spcPts val="0"/>
+              </a:spcAft>
+            </a:pPr>
+            <a:r>
+              <a:rPr sz="1700" b="0" i="0">
+                <a:solidFill>
+                  <a:srgbClr val="FFFFFF"/>
+                </a:solidFill>
+                <a:latin typeface="Calibri"/>
+              </a:rPr>
+              <a:t>Il </a:t>
+            </a:r>
+            <a:r>
+              <a:rPr sz="1700" b="1" i="0">
+                <a:solidFill>
+                  <a:srgbClr val="FFFFFF"/>
+                </a:solidFill>
+                <a:latin typeface="Calibri"/>
+              </a:rPr>
+              <a:t>costo</a:t>
+            </a:r>
+            <a:r>
+              <a:rPr sz="1700" b="0" i="0">
+                <a:solidFill>
+                  <a:srgbClr val="FFFFFF"/>
+                </a:solidFill>
+                <a:latin typeface="Calibri"/>
+              </a:rPr>
+              <a:t> di un pacchetto è il tempo di processore che serve per elaborarlo; 1 diviso quel tempo è la </a:t>
+            </a:r>
+            <a:r>
+              <a:rPr sz="1700" b="1" i="0">
+                <a:solidFill>
+                  <a:srgbClr val="FFFFFF"/>
+                </a:solidFill>
+                <a:latin typeface="Calibri"/>
+              </a:rPr>
+              <a:t>capacità</a:t>
+            </a:r>
+            <a:r>
+              <a:rPr sz="1700" b="0" i="0">
+                <a:solidFill>
+                  <a:srgbClr val="FFFFFF"/>
+                </a:solidFill>
+                <a:latin typeface="Calibri"/>
+              </a:rPr>
+              <a:t>, quanti pacchetti al secondo il nodo regge.</a:t>
             </a:r>
           </a:p>
         </p:txBody>
@@ -31133,7 +31994,7 @@
                 </a:solidFill>
                 <a:latin typeface="Calibri"/>
               </a:rPr>
-              <a:t>IL NODO SOTTO TRAFFICO · P-CORE</a:t>
+              <a:t>1 · IL NODO · QUANTO COSTA UN PACCHETTO</a:t>
             </a:r>
           </a:p>
         </p:txBody>
@@ -31217,7 +32078,7 @@
                 </a:solidFill>
                 <a:latin typeface="Calibri"/>
               </a:rPr>
-              <a:t>3</a:t>
+              <a:t>4</a:t>
             </a:r>
           </a:p>
         </p:txBody>
@@ -31259,7 +32120,7 @@
                 </a:solidFill>
                 <a:latin typeface="Calibri"/>
               </a:rPr>
-              <a:t>64 byte, P-core a 3,5 GHz  ·  barre: mediana su 91 modelli (P2: 85)  ·  schede: dal modello più leggero al più pesante</a:t>
+              <a:t>Nodo su un core veloce (P-core) a 3,5 GHz, pacchetti da 64 byte  ·  barre: mediana dei 91 modelli  ·  schede: dal modello più leggero al più pesante</a:t>
             </a:r>
           </a:p>
         </p:txBody>
@@ -31409,7 +32270,7 @@
                 </a:solidFill>
                 <a:latin typeface="Calibri"/>
               </a:rPr>
-              <a:t>baseline</a:t>
+              <a:t>senza rete</a:t>
             </a:r>
           </a:p>
         </p:txBody>
@@ -31493,7 +32354,7 @@
                 </a:solidFill>
                 <a:latin typeface="Calibri"/>
               </a:rPr>
-              <a:t>15,0 M pacchetti/s, 91 modelli</a:t>
+              <a:t>15,0 milioni di pacchetti/s</a:t>
             </a:r>
           </a:p>
         </p:txBody>
@@ -31709,7 +32570,7 @@
                 </a:solidFill>
                 <a:latin typeface="Calibri"/>
               </a:rPr>
-              <a:t>4,5–11,7 M pacchetti/s</a:t>
+              <a:t>4,5–11,7 milioni di pacchetti/s</a:t>
             </a:r>
           </a:p>
         </p:txBody>
@@ -31925,7 +32786,7 @@
                 </a:solidFill>
                 <a:latin typeface="Calibri"/>
               </a:rPr>
-              <a:t>2,0–5,1 M pacchetti/s</a:t>
+              <a:t>2,0–5,1 milioni di pacchetti/s</a:t>
             </a:r>
           </a:p>
         </p:txBody>
@@ -32141,7 +33002,7 @@
                 </a:solidFill>
                 <a:latin typeface="Calibri"/>
               </a:rPr>
-              <a:t>1,1–3,3 M pacchetti/s</a:t>
+              <a:t>1,1–3,3 milioni di pacchetti/s</a:t>
             </a:r>
           </a:p>
         </p:txBody>
@@ -32315,7 +33176,7 @@
                 </a:solidFill>
                 <a:latin typeface="Calibri"/>
               </a:rPr>
-              <a:t>Ricevere e inoltrare costano </a:t>
+              <a:t>Ricevere e inoltrare un pacchetto costa </a:t>
             </a:r>
             <a:r>
               <a:rPr sz="1400" b="1" i="0">
@@ -32351,7 +33212,7 @@
                 </a:solidFill>
                 <a:latin typeface="Calibri"/>
               </a:rPr>
-              <a:t> con i pesi compilati (mediana 52), </a:t>
+              <a:t> con i pesi scritti nel programma (P1), </a:t>
             </a:r>
             <a:r>
               <a:rPr sz="1400" b="1" i="0">
@@ -32369,7 +33230,7 @@
                 </a:solidFill>
                 <a:latin typeface="Calibri"/>
               </a:rPr>
-              <a:t> se la forma è letta da tabella (P2), </a:t>
+              <a:t> se la forma si legge da tabella (P2), </a:t>
             </a:r>
             <a:r>
               <a:rPr sz="1400" b="1" i="0">
@@ -32387,43 +33248,7 @@
                 </a:solidFill>
                 <a:latin typeface="Calibri"/>
               </a:rPr>
-              <a:t> se anche la profondità (P3): un core regge da </a:t>
-            </a:r>
-            <a:r>
-              <a:rPr sz="1400" b="1" i="0">
-                <a:solidFill>
-                  <a:srgbClr val="222B36"/>
-                </a:solidFill>
-                <a:latin typeface="Calibri"/>
-              </a:rPr>
-              <a:t>11,7</a:t>
-            </a:r>
-            <a:r>
-              <a:rPr sz="1400" b="0" i="0">
-                <a:solidFill>
-                  <a:srgbClr val="222B36"/>
-                </a:solidFill>
-                <a:latin typeface="Calibri"/>
-              </a:rPr>
-              <a:t> a </a:t>
-            </a:r>
-            <a:r>
-              <a:rPr sz="1400" b="1" i="0">
-                <a:solidFill>
-                  <a:srgbClr val="222B36"/>
-                </a:solidFill>
-                <a:latin typeface="Calibri"/>
-              </a:rPr>
-              <a:t>1,1 milioni</a:t>
-            </a:r>
-            <a:r>
-              <a:rPr sz="1400" b="0" i="0">
-                <a:solidFill>
-                  <a:srgbClr val="222B36"/>
-                </a:solidFill>
-                <a:latin typeface="Calibri"/>
-              </a:rPr>
-              <a:t> di pacchetti al secondo, secondo modello e pipeline.</a:t>
+              <a:t> se anche il numero di strati (P3). Un core regge da 11,7 a 1,1 milioni di pacchetti al secondo.</a:t>
             </a:r>
           </a:p>
         </p:txBody>
@@ -32535,7 +33360,7 @@
                 </a:solidFill>
                 <a:latin typeface="Calibri"/>
               </a:rPr>
-              <a:t>IL NUOVO ASSETTO · LE ISTRUZIONI</a:t>
+              <a:t>1 · IL NODO · LE ISTRUZIONI</a:t>
             </a:r>
           </a:p>
         </p:txBody>
@@ -32619,7 +33444,7 @@
                 </a:solidFill>
                 <a:latin typeface="Calibri"/>
               </a:rPr>
-              <a:t>4</a:t>
+              <a:t>5</a:t>
             </a:r>
           </a:p>
         </p:txBody>
@@ -32661,7 +33486,7 @@
                 </a:solidFill>
                 <a:latin typeface="Calibri"/>
               </a:rPr>
-              <a:t>Caricate: contate dal kernel al caricamento  ·  eseguite: contatori hardware, per pacchetto, nodo saturo  ·  a destra i 14 modelli misurati sui tre core</a:t>
+              <a:t>Caricate: la dimensione del programma, contata dal kernel  ·  eseguite: contate dal processore per ogni pacchetto  ·  a destra i 14 modelli misurati su tutti e tre i core</a:t>
             </a:r>
           </a:p>
         </p:txBody>
@@ -32739,7 +33564,7 @@
                 </a:solidFill>
                 <a:latin typeface="Calibri"/>
               </a:rPr>
-              <a:t>Caricate contro eseguite</a:t>
+              <a:t>Caricate contro eseguite.</a:t>
             </a:r>
             <a:r>
               <a:rPr sz="1400" b="0" i="0">
@@ -32748,7 +33573,7 @@
                 </a:solidFill>
                 <a:latin typeface="Calibri"/>
               </a:rPr>
-              <a:t> (mediane). P2 carica più istruzioni di P3 ma ne esegue meno: su 85 modelli su 85.</a:t>
+              <a:t> P2 è il più grande ma esegue meno istruzioni di P3 (85 modelli su 85).</a:t>
             </a:r>
           </a:p>
         </p:txBody>
@@ -32790,7 +33615,7 @@
                 </a:solidFill>
                 <a:latin typeface="Calibri"/>
               </a:rPr>
-              <a:t>Stesse istruzioni su ogni core.</a:t>
+              <a:t>Stesse istruzioni su ogni core:</a:t>
             </a:r>
             <a:r>
               <a:rPr sz="1400" b="0" i="0">
@@ -32799,7 +33624,7 @@
                 </a:solidFill>
                 <a:latin typeface="Calibri"/>
               </a:rPr>
-              <a:t> Entro lo 0,3 % fra P-core ed E-core su 91 modelli, entro lo 0,7 % sul LP E-core (14 modelli).</a:t>
+              <a:t> al più 0,3 % di differenza (0,7 % sul LP E-core).</a:t>
             </a:r>
           </a:p>
         </p:txBody>
@@ -32973,7 +33798,7 @@
                 </a:solidFill>
                 <a:latin typeface="Calibri"/>
               </a:rPr>
-              <a:t>La dimensione del programma misura quanto è </a:t>
+              <a:t>La dimensione dice quanto è </a:t>
             </a:r>
             <a:r>
               <a:rPr sz="1400" b="1" i="0">
@@ -32991,7 +33816,7 @@
                 </a:solidFill>
                 <a:latin typeface="Calibri"/>
               </a:rPr>
-              <a:t>, non quanto </a:t>
+              <a:t> il programma, non quanto </a:t>
             </a:r>
             <a:r>
               <a:rPr sz="1400" b="1" i="0">
@@ -33009,7 +33834,7 @@
                 </a:solidFill>
                 <a:latin typeface="Calibri"/>
               </a:rPr>
-              <a:t>: contano le istruzioni eseguite, comprese ricezione e redirect del kernel. Fra un core e l'altro le istruzioni non cambiano: cambia quante ne esegue il core per ciclo.</a:t>
+              <a:t>: conta quante istruzioni il processore esegue davvero per ogni pacchetto. E sono le stesse su ogni tipo di core: cambia solo quante ne esegue a ogni ciclo di clock.</a:t>
             </a:r>
           </a:p>
         </p:txBody>
@@ -33121,7 +33946,7 @@
                 </a:solidFill>
                 <a:latin typeface="Calibri"/>
               </a:rPr>
-              <a:t>IL NUOVO ASSETTO · P-CORE, E-CORE, LP E-CORE</a:t>
+              <a:t>2 · TRE TIPI DI CORE</a:t>
             </a:r>
           </a:p>
         </p:txBody>
@@ -33205,7 +34030,7 @@
                 </a:solidFill>
                 <a:latin typeface="Calibri"/>
               </a:rPr>
-              <a:t>5</a:t>
+              <a:t>6</a:t>
             </a:r>
           </a:p>
         </p:txBody>
@@ -33247,7 +34072,7 @@
                 </a:solidFill>
                 <a:latin typeface="Calibri"/>
               </a:rPr>
-              <a:t>P-core e E-core a 3,5 GHz, LP E-core a 2,5 GHz; generatore e uscita su P-core  ·  grafici: mediana dei 14 modelli del sottoinsieme LP, dal più leggero al più pesante</a:t>
+              <a:t>Core veloce (P-core) ed efficiente (E-core) a 3,5 GHz, a basso consumo (LP E-core) a 2,5 GHz  ·  grafici: mediana dei 14 modelli misurati su tutti e tre i core</a:t>
             </a:r>
           </a:p>
         </p:txBody>
@@ -33334,7 +34159,7 @@
                 </a:solidFill>
                 <a:latin typeface="Calibri"/>
               </a:rPr>
-              <a:t> Capacità E/P su 91 modelli: baseline 0,61–0,66, P3 0,72–0,89.</a:t>
+              <a:t> Rispetto al P-core, l'E-core regge 0,61–0,66 volte senza rete e 0,72–0,89 volte con P3.</a:t>
             </a:r>
           </a:p>
         </p:txBody>
@@ -33376,7 +34201,7 @@
                 </a:solidFill>
                 <a:latin typeface="Calibri"/>
               </a:rPr>
-              <a:t>ns di CPU per pacchetto.</a:t>
+              <a:t>Tempo per pacchetto.</a:t>
             </a:r>
             <a:r>
               <a:rPr sz="1400" b="0" i="0">
@@ -33385,7 +34210,7 @@
                 </a:solidFill>
                 <a:latin typeface="Calibri"/>
               </a:rPr>
-              <a:t> Sull'E-core la baseline costa il 56 % in più, la sola rete neurale di P3 il 13 % (mediane).</a:t>
+              <a:t> Sull'E-core il lavoro fisso del nodo costa il 56 % in più, la rete neurale di P3 solo il 13 %.</a:t>
             </a:r>
           </a:p>
         </p:txBody>
@@ -33559,7 +34384,7 @@
                 </a:solidFill>
                 <a:latin typeface="Calibri"/>
               </a:rPr>
-              <a:t>A parità di frequenza l'E-core è più lento soprattutto nel </a:t>
+              <a:t>A parità di frequenza l'E-core rallenta soprattutto il </a:t>
             </a:r>
             <a:r>
               <a:rPr sz="1400" b="1" i="0">
@@ -33568,7 +34393,7 @@
                 </a:solidFill>
                 <a:latin typeface="Calibri"/>
               </a:rPr>
-              <a:t>lavoro di rete del kernel</a:t>
+              <a:t>lavoro fisso del nodo</a:t>
             </a:r>
             <a:r>
               <a:rPr sz="1400" b="0" i="0">
@@ -33577,7 +34402,7 @@
                 </a:solidFill>
                 <a:latin typeface="Calibri"/>
               </a:rPr>
-              <a:t>: più la pipeline è pesante, meno pesa la differenza (capacità E/P 0,63 per la baseline, 0,77 per P1, 0,82–0,83 per P2 e P3). Il LP E-core (fuori dalla L3, 2,5 GHz) regge dal 32 al 53 % del P-core sulle pipeline.</a:t>
+              <a:t> (ricevere e inoltrare): più la rete pesa sul totale, meno conta il core. Il core a basso consumo (LP E-core, 2,5 GHz) regge dal 32 al 53 % del P-core.</a:t>
             </a:r>
           </a:p>
         </p:txBody>
@@ -33689,7 +34514,7 @@
                 </a:solidFill>
                 <a:latin typeface="Calibri"/>
               </a:rPr>
-              <a:t>IL NUOVO ASSETTO · ISTRUZIONI PER CICLO</a:t>
+              <a:t>2 · TRE TIPI DI CORE · ISTRUZIONI PER CICLO</a:t>
             </a:r>
           </a:p>
         </p:txBody>
@@ -33773,7 +34598,7 @@
                 </a:solidFill>
                 <a:latin typeface="Calibri"/>
               </a:rPr>
-              <a:t>6</a:t>
+              <a:t>7</a:t>
             </a:r>
           </a:p>
         </p:txBody>
@@ -33815,7 +34640,7 @@
                 </a:solidFill>
                 <a:latin typeface="Calibri"/>
               </a:rPr>
-              <a:t>Contatori hardware sul core del nodo, nodo saturo  ·  mediane: tabella su 91 modelli, grafico sui 14 misurati sui tre core</a:t>
+              <a:t>Contatori del processore sul core del nodo  ·  tabella: mediane su 91 modelli  ·  grafico: i 14 modelli misurati sui tre core</a:t>
             </a:r>
           </a:p>
         </p:txBody>
@@ -34554,7 +35379,7 @@
                 </a:solidFill>
                 <a:latin typeface="Calibri"/>
               </a:rPr>
-              <a:t>Le istruzioni per pacchetto sono le stesse su ogni core: il codice non cambia. Cambia l'IPC: 2,6 → 1,7 per la baseline (lavoro di rete, salti, memoria), 4,4 → 3,7 per P3 (aritmetica lineare). Il LP E-core ha 14–19 mancate di cache per pacchetto.</a:t>
+              <a:t>Il codice è lo stesso su ogni core; cambia quante istruzioni il core esegue a ogni ciclo di clock (IPC): 2,6 → 1,7 senza rete, dove il kernel salta e aspetta la memoria; 4,4 → 3,7 con P3, una fila di moltiplicazioni.</a:t>
             </a:r>
           </a:p>
         </p:txBody>
@@ -34666,7 +35491,7 @@
                 </a:solidFill>
                 <a:latin typeface="Calibri"/>
               </a:rPr>
-              <a:t>IL NUOVO ASSETTO · DOVE L'E-CORE PERDE TEMPO</a:t>
+              <a:t>2 · TRE TIPI DI CORE · DOVE L'E-CORE PERDE TEMPO</a:t>
             </a:r>
           </a:p>
         </p:txBody>
@@ -34750,7 +35575,7 @@
                 </a:solidFill>
                 <a:latin typeface="Calibri"/>
               </a:rPr>
-              <a:t>7</a:t>
+              <a:t>8</a:t>
             </a:r>
           </a:p>
         </p:txBody>
@@ -34792,7 +35617,7 @@
                 </a:solidFill>
                 <a:latin typeface="Calibri"/>
               </a:rPr>
-              <a:t>Cicli per pacchetto dai contatori hardware, 3,5 GHz  ·  parte fissa = baseline, rete = pipeline meno baseline  ·  mediane su 91 modelli</a:t>
+              <a:t>Cicli di clock per pacchetto, contati dal processore  ·  parte fissa = il nodo senza rete, rete = il resto  ·  mediane su 91 modelli</a:t>
             </a:r>
           </a:p>
         </p:txBody>
@@ -35848,7 +36673,7 @@
                 </a:solidFill>
                 <a:latin typeface="Calibri"/>
               </a:rPr>
-              <a:t>Ricevere, inoltrare e restituire la pagina è lavoro del kernel con salti e memoria: l'E-core lo esegue a IPC 1,7 invece di 2,6, su ogni modello. L'aritmetica della rete è una fila di moltiplicazioni, e l'E-core la esegue quasi altrettanto bene.</a:t>
+              <a:t>Ricevere, inoltrare e liberare la memoria è lavoro del kernel, pieno di salti e attese: l'E-core ne esegue 1,7 istruzioni per ciclo invece di 2,6. La rete è una fila di moltiplicazioni, che l'E-core esegue quasi come il P-core.</a:t>
             </a:r>
           </a:p>
         </p:txBody>
@@ -35960,7 +36785,7 @@
                 </a:solidFill>
                 <a:latin typeface="Calibri"/>
               </a:rPr>
-              <a:t>IL NUOVO ASSETTO · IL LP E-CORE</a:t>
+              <a:t>2 · TRE TIPI DI CORE · IL CORE A BASSO CONSUMO</a:t>
             </a:r>
           </a:p>
         </p:txBody>
@@ -36044,7 +36869,7 @@
                 </a:solidFill>
                 <a:latin typeface="Calibri"/>
               </a:rPr>
-              <a:t>8</a:t>
+              <a:t>9</a:t>
             </a:r>
           </a:p>
         </p:txBody>
@@ -36086,7 +36911,7 @@
                 </a:solidFill>
                 <a:latin typeface="Calibri"/>
               </a:rPr>
-              <a:t>Contatori hardware del core del nodo, per pacchetto, nodo saturo  ·  LP E-core a 2,5 GHz, fuori dalla L3  ·  mediane dei 14 modelli misurati sui tre core</a:t>
+              <a:t>Contatori del processore, per pacchetto, a nodo pieno  ·  LP E-core a 2,5 GHz  ·  mediane dei 14 modelli misurati sui tre core</a:t>
             </a:r>
           </a:p>
         </p:txBody>
@@ -36164,7 +36989,7 @@
                 </a:solidFill>
                 <a:latin typeface="Calibri"/>
               </a:rPr>
-              <a:t>Mancate di cache.</a:t>
+              <a:t>Letture andate in memoria</a:t>
             </a:r>
             <a:r>
               <a:rPr sz="1400" b="0" i="0">
@@ -36173,7 +36998,7 @@
                 </a:solidFill>
                 <a:latin typeface="Calibri"/>
               </a:rPr>
-              <a:t> Zero sul P-core e sull'E-core; 14–19 per pacchetto sul LP E-core, fuori dalla L3.</a:t>
+              <a:t> (il dato non è in cache): zero su P-core ed E-core, 14–19 per pacchetto sul LP E-core.</a:t>
             </a:r>
           </a:p>
         </p:txBody>
@@ -36215,7 +37040,7 @@
                 </a:solidFill>
                 <a:latin typeface="Calibri"/>
               </a:rPr>
-              <a:t>Cicli per pacchetto</a:t>
+              <a:t>Cicli per pacchetto.</a:t>
             </a:r>
             <a:r>
               <a:rPr sz="1400" b="0" i="0">
@@ -36224,7 +37049,7 @@
                 </a:solidFill>
                 <a:latin typeface="Calibri"/>
               </a:rPr>
-              <a:t> (mediane). P3: 1 614 → 1 944 → 2 435; in tempo 462 → 562 → 976 ns.</a:t>
+              <a:t> Per P3: 1 614 sul P-core, 1 944 sull'E-core, 2 435 sul LP E-core; in tempo 462, 562 e 976 ns.</a:t>
             </a:r>
           </a:p>
         </p:txBody>
@@ -36398,7 +37223,7 @@
                 </a:solidFill>
                 <a:latin typeface="Calibri"/>
               </a:rPr>
-              <a:t>Il LP E-core sta su un'altra parte del chip: i pacchetti scritti dal generatore gli arrivano dalla memoria. Fra memoria, IPC più basso (1,0–3,0) e 2,5 GHz regge dal 32 al 53 % del P-core sulle pipeline.</a:t>
+              <a:t>Il LP E-core sta in un'altra parte del chip, fuori dalla cache che gli altri core condividono: i pacchetti gli arrivano dalla memoria. Fra attese, un core più semplice e 2,5 GHz regge dal 32 al 53 % del P-core.</a:t>
             </a:r>
           </a:p>
         </p:txBody>
@@ -36510,7 +37335,7 @@
                 </a:solidFill>
                 <a:latin typeface="Calibri"/>
               </a:rPr>
-              <a:t>SOTTO TRAFFICO CRESCENTE · P-CORE E E-CORE</a:t>
+              <a:t>3 · SOTTO CARICO · TRAFFICO CRESCENTE</a:t>
             </a:r>
           </a:p>
         </p:txBody>
@@ -36594,7 +37419,7 @@
                 </a:solidFill>
                 <a:latin typeface="Calibri"/>
               </a:rPr>
-              <a:t>9</a:t>
+              <a:t>10</a:t>
             </a:r>
           </a:p>
         </p:txBody>
@@ -36636,7 +37461,7 @@
                 </a:solidFill>
                 <a:latin typeface="Calibri"/>
               </a:rPr>
-              <a:t>bench_bitrate, xdp_gen, 3 giri per punto, 64 byte, 6 modelli dal più leggero al più pesante  ·  asse x e asse y divisi per la capacità del modello  ·  mediana delle curve</a:t>
+              <a:t>Traffico crescente da 0,5 a 12 milioni di pacchetti al secondo, 6 modelli dal più leggero al più pesante  ·  entrambi gli assi divisi per la capacità del modello</a:t>
             </a:r>
           </a:p>
         </p:txBody>
@@ -36723,7 +37548,7 @@
                 </a:solidFill>
                 <a:latin typeface="Calibri"/>
               </a:rPr>
-              <a:t> Fino alla capacità passa tutto, poi la curva è piatta: massimo 0,98 [0,88–1,03] della capacità, 24 curve.</a:t>
+              <a:t> Fino alla capacità passa tutto, poi la curva resta piatta: il massimo inoltrato è 0,98 volte la capacità misurata a parte.</a:t>
             </a:r>
           </a:p>
         </p:txBody>
@@ -36774,7 +37599,7 @@
                 </a:solidFill>
                 <a:latin typeface="Calibri"/>
               </a:rPr>
-              <a:t> Stesso andamento: 0,99 [0,94–1,03], 24 curve. Divise per la capacità, le curve di modelli diversi si sovrappongono.</a:t>
+              <a:t> Stesso andamento (0,99). Divise per la capacità del loro modello, le curve di modelli diversi coincidono.</a:t>
             </a:r>
           </a:p>
         </p:txBody>
@@ -36948,7 +37773,7 @@
                 </a:solidFill>
                 <a:latin typeface="Calibri"/>
               </a:rPr>
-              <a:t>I pacchetti si perdono </a:t>
+              <a:t>Oltre la capacità i pacchetti si perdono </a:t>
             </a:r>
             <a:r>
               <a:rPr sz="1500" b="1" i="0">
@@ -36957,7 +37782,7 @@
                 </a:solidFill>
                 <a:latin typeface="Calibri"/>
               </a:rPr>
-              <a:t>all'ingresso</a:t>
+              <a:t>in coda, prima del programma</a:t>
             </a:r>
             <a:r>
               <a:rPr sz="1500" b="0" i="0">
@@ -36966,7 +37791,7 @@
                 </a:solidFill>
                 <a:latin typeface="Calibri"/>
               </a:rPr>
-              <a:t>, non dopo il programma: il collo di bottiglia è il programma eBPF, su ogni tipo di core. Fa eccezione P1 sui modelli più leggeri: oltre i 9 milioni di pacchetti al secondo comincia a perdere anche l'uscita.</a:t>
+              <a:t>: il collo di bottiglia è il programma, su ogni tipo di core. Fa eccezione P1 sui modelli più leggeri: sopra i 9 milioni di pacchetti al secondo perde anche l'uscita.</a:t>
             </a:r>
           </a:p>
         </p:txBody>

--- a/docs/Inferenza di una rete neurale nel kernel Linux con eBPF XDP.pptx
+++ b/docs/Inferenza di una rete neurale nel kernel Linux con eBPF XDP.pptx
@@ -20187,7 +20187,7 @@
                 </a:solidFill>
                 <a:latin typeface="Calibri"/>
               </a:rPr>
-              <a:t>Una coda, un generatore e un core d'uscita per ogni core del nodo  ·  mediane di 8 modelli dal più leggero al più pesante</a:t>
+              <a:t>Una coda, un generatore e un core d'uscita per core del nodo  ·  barre: mediana di 8 modelli  ·  un core e due core in sessioni diverse: rumore ±5 %</a:t>
             </a:r>
           </a:p>
         </p:txBody>
@@ -20274,7 +20274,7 @@
                 </a:solidFill>
                 <a:latin typeface="Calibri"/>
               </a:rPr>
-              <a:t> Con due core il nodo regge il 99 % del doppio (fra il 94–103 %).</a:t>
+              <a:t> Due core reggono il doppio: 99 % in mediana. Fra modelli e versioni da 94 a 103 %: sopra 100 è rumore.</a:t>
             </a:r>
           </a:p>
         </p:txBody>
@@ -20325,7 +20325,7 @@
                 </a:solidFill>
                 <a:latin typeface="Calibri"/>
               </a:rPr>
-              <a:t> Il 99 % del doppio, con i due core in gruppi diversi del chip.</a:t>
+              <a:t> 99 % in mediana, da 98 a 101 %: il doppio, entro il rumore.</a:t>
             </a:r>
           </a:p>
         </p:txBody>
@@ -20965,7 +20965,7 @@
                 </a:solidFill>
                 <a:latin typeface="Calibri"/>
               </a:rPr>
-              <a:t>Da 27 ns senza rete a 391 ns con P3 (mediane, P-core). Per P3 da 237–797 ns secondo il modello.</a:t>
+              <a:t>Mediane sul P-core: da 27 ns senza rete a 391 ns con P3. Fra i modelli, P3 va da 237 a 797 ns.</a:t>
             </a:r>
           </a:p>
         </p:txBody>
@@ -21139,7 +21139,7 @@
                 </a:solidFill>
                 <a:latin typeface="Calibri"/>
               </a:rPr>
-              <a:t>Consegnare il pacchetto al nodo successivo: 187–221 ns sul P-core, 226–274 sull'E-core, con ogni modello e versione.</a:t>
+              <a:t>Consegnare il pacchetto al nodo successivo: fra tutti i modelli e le versioni da 187 a 221 ns sul P-core, da 226 a 274 sull'E-core.</a:t>
             </a:r>
           </a:p>
         </p:txBody>
@@ -21313,7 +21313,7 @@
                 </a:solidFill>
                 <a:latin typeface="Calibri"/>
               </a:rPr>
-              <a:t>Il trasporto è un costo comune, che non dipende né dalla versione né dal modello. Dall'arrivo del pacchetto alla sua ripartenza servono almeno 221–595 ns sul P-core e 267–741 sull'E-core (dal nodo senza rete a P3).</a:t>
+              <a:t>Il trasporto è un costo comune, che non dipende né dalla versione né dal modello. Il tempo minimo dall'arrivo alla ripartenza, in mediana, va da 221 ns (senza rete) a 595 ns (P3) sul P-core, da 267 a 741 sull'E-core.</a:t>
             </a:r>
           </a:p>
         </p:txBody>
@@ -21636,7 +21636,7 @@
                 </a:solidFill>
                 <a:latin typeface="Calibri"/>
               </a:rPr>
-              <a:t>Taglia del pacchetto: nessun effetto</a:t>
+              <a:t>Taglia: nessun effetto.</a:t>
             </a:r>
             <a:r>
               <a:rPr sz="1400" b="0" i="0">
@@ -21645,7 +21645,7 @@
                 </a:solidFill>
                 <a:latin typeface="Calibri"/>
               </a:rPr>
-              <a:t> (1,2 % fra 64 e 1 514 byte, in mediana). Il nodo legge solo l'intestazione.</a:t>
+              <a:t> Fra 64 e 1 514 byte il costo cambia dell'1,2 % in mediana, meno del rumore.</a:t>
             </a:r>
           </a:p>
         </p:txBody>
@@ -21687,7 +21687,7 @@
                 </a:solidFill>
                 <a:latin typeface="Calibri"/>
               </a:rPr>
-              <a:t>Porta d'uscita: nessun effetto.</a:t>
+              <a:t>Porta d'uscita: nessun effetto,</a:t>
             </a:r>
             <a:r>
               <a:rPr sz="1400" b="0" i="0">
@@ -21696,7 +21696,7 @@
                 </a:solidFill>
                 <a:latin typeface="Calibri"/>
               </a:rPr>
-              <a:t> Scartare il pacchetto costa ~51 ns in più: la sua memoria si libera sul core del nodo.</a:t>
+              <a:t> entro il rumore. Scartare costa ~51 ns in più in mediana: la memoria si libera sul core del nodo.</a:t>
             </a:r>
           </a:p>
         </p:txBody>
@@ -21870,7 +21870,7 @@
                 </a:solidFill>
                 <a:latin typeface="Calibri"/>
               </a:rPr>
-              <a:t>Basta un numero per versione e modello a descrivere il costo del nodo: non contano la taglia del pacchetto, la porta d'uscita né il TTL. Solo la decisione di scartare costa ~51 ns in più, per come è fatto il banco.</a:t>
+              <a:t>Basta un numero per versione e modello a descrivere il costo del nodo: taglia del pacchetto, porta d'uscita e TTL cambiano il costo meno del rumore di misura (±5 %). Solo scartare costa di più, ~51 ns, per come è fatto il banco.</a:t>
             </a:r>
           </a:p>
         </p:txBody>
@@ -22186,7 +22186,7 @@
                 </a:solidFill>
                 <a:latin typeface="Calibri"/>
               </a:rPr>
-              <a:t>Profondità.</a:t>
+              <a:t>Profondità</a:t>
             </a:r>
             <a:r>
               <a:rPr lang="it-IT" sz="1400" b="0" i="0" dirty="0">
@@ -22195,7 +22195,7 @@
                 </a:solidFill>
                 <a:latin typeface="Calibri"/>
               </a:rPr>
-              <a:t> Ogni strato nascosto in più costa ~46 ns a P3, ~20 a P2, quasi niente a P1 e P1.5.</a:t>
+              <a:t> (mediane per numero di strati). Secondo la legge ogni strato costa ~46 ns a P3, ~20 a P2, quasi niente a P1 e P1.5.</a:t>
             </a:r>
           </a:p>
         </p:txBody>
@@ -22237,7 +22237,7 @@
                 </a:solidFill>
                 <a:latin typeface="Calibri"/>
               </a:rPr>
-              <a:t>Pesi a zero.</a:t>
+              <a:t>Pesi a zero</a:t>
             </a:r>
             <a:r>
               <a:rPr sz="1400" b="0" i="0">
@@ -22246,7 +22246,7 @@
                 </a:solidFill>
                 <a:latin typeface="Calibri"/>
               </a:rPr>
-              <a:t> Al 90 % di zeri il nodo con P1 scende a 0,77 e con P1.5 a 0,83 volte il tempo dello stesso modello senza zeri; P2 e P3 non cambiano.</a:t>
+              <a:t> (mediane delle 4 forme). Al 90 % di zeri il nodo con P1 costa 0,77 e con P1.5 0,83 volte lo stesso modello senza zeri; P2 e P3 restano a 1.</a:t>
             </a:r>
           </a:p>
         </p:txBody>
@@ -22736,7 +22736,7 @@
                 </a:solidFill>
                 <a:latin typeface="Calibri"/>
               </a:rPr>
-              <a:t>Istruzioni eseguite.</a:t>
+              <a:t>Istruzioni</a:t>
             </a:r>
             <a:r>
               <a:rPr lang="it-IT" sz="1400" b="0" i="0" dirty="0">
@@ -22745,7 +22745,7 @@
                 </a:solidFill>
                 <a:latin typeface="Calibri"/>
               </a:rPr>
-              <a:t> Ogni strato in più ne aggiunge 901 a P3 e 370 a P2, uguali su P-core ed E-core.</a:t>
+              <a:t> (legge su 83 modelli). Ogni strato in più ne aggiunge 901 a P3 e 370 a P2, uguali su P-core ed E-core.</a:t>
             </a:r>
           </a:p>
         </p:txBody>
@@ -22787,7 +22787,7 @@
                 </a:solidFill>
                 <a:latin typeface="Calibri"/>
               </a:rPr>
-              <a:t>Tempo.</a:t>
+              <a:t>Tempo</a:t>
             </a:r>
             <a:r>
               <a:rPr sz="1400" b="0" i="0">
@@ -22796,7 +22796,7 @@
                 </a:solidFill>
                 <a:latin typeface="Calibri"/>
               </a:rPr>
-              <a:t> Ogni strato costa a P3 ~46 ns sul P-core e ~62 sull'E-core (tratteggio): stesse istruzioni, eseguite più lentamente.</a:t>
+              <a:t> (legge). Ogni strato costa a P3 ~46 ns sul P-core, ~62 sull'E-core (tratteggio).</a:t>
             </a:r>
           </a:p>
         </p:txBody>
@@ -23286,7 +23286,7 @@
                 </a:solidFill>
                 <a:latin typeface="Calibri"/>
               </a:rPr>
-              <a:t>Larghezza.</a:t>
+              <a:t>Larghezza</a:t>
             </a:r>
             <a:r>
               <a:rPr lang="it-IT" sz="1400" b="0" i="0" dirty="0">
@@ -23295,7 +23295,7 @@
                 </a:solidFill>
                 <a:latin typeface="Calibri"/>
               </a:rPr>
-              <a:t> Da 2 a 8 neuroni per strato il tempo sale su tutte: P1 da 103 a 158 ns, P3 da 457 a 605 ns.</a:t>
+              <a:t> (mediane). Con 2 neuroni per strato P1 costa 103 ns, con 8 158; P3 da 457 a 605 ns.</a:t>
             </a:r>
           </a:p>
         </p:txBody>
@@ -23337,7 +23337,7 @@
                 </a:solidFill>
                 <a:latin typeface="Calibri"/>
               </a:rPr>
-              <a:t>A pari pesi.</a:t>
+              <a:t>A pari pesi</a:t>
             </a:r>
             <a:r>
               <a:rPr sz="1400" b="0" i="0">
@@ -23346,7 +23346,7 @@
                 </a:solidFill>
                 <a:latin typeface="Calibri"/>
               </a:rPr>
-              <a:t> Gli stessi ~592 pesi su 5 strati invece di 1: P2 +48 %, P3 +63 %, P1 e P1.5 solo +14–17 %.</a:t>
+              <a:t> (mediane). ~592 pesi su 5 strati invece di 1: P2 +48 %, P3 +63 %, P1 e P1.5 solo +14–17 %.</a:t>
             </a:r>
           </a:p>
         </p:txBody>
@@ -23520,7 +23520,7 @@
                 </a:solidFill>
                 <a:latin typeface="Calibri"/>
               </a:rPr>
-              <a:t>Sull'E-core P3 ha la stessa forma, più in alto del 16–21 %: la forma migliore del modello non dipende dal core su cui girerà.</a:t>
+              <a:t>Sull'E-core P3 ha la stessa forma, più in alto del 16–21 % (mediane): la forma migliore del modello non dipende dal core su cui girerà.</a:t>
             </a:r>
           </a:p>
         </p:txBody>
@@ -23828,7 +23828,7 @@
                 </a:solidFill>
                 <a:latin typeface="Calibri"/>
               </a:rPr>
-              <a:t>P3.</a:t>
+              <a:t>P3</a:t>
             </a:r>
             <a:r>
               <a:rPr lang="it-IT" sz="1400" b="0" i="0" dirty="0">
@@ -23837,7 +23837,7 @@
                 </a:solidFill>
                 <a:latin typeface="Calibri"/>
               </a:rPr>
-              <a:t> Con poco traffico la rete costa 1,02 volte quanto a nodo pieno; il pacchetto più veloce il 14 % meno della media.</a:t>
+              <a:t> (mediane). Con poco traffico la rete costa 1,02 volte quanto a nodo pieno: uguale, entro il rumore. Il pacchetto più veloce costa il 14 % meno della media.</a:t>
             </a:r>
           </a:p>
         </p:txBody>
@@ -23888,7 +23888,7 @@
                 </a:solidFill>
                 <a:latin typeface="Calibri"/>
               </a:rPr>
-              <a:t> 1,03 volte. Per P1 e P1.5 no (0,77 e 0,83): la loro rete costa poche decine di ns, e le due misure non la distinguono bene.</a:t>
+              <a:t> 1,03 volte, uguale entro il rumore. P1 e P1.5 no (0,77 e 0,83): la loro rete è troppo piccola per le due misure.</a:t>
             </a:r>
           </a:p>
         </p:txBody>
@@ -25064,7 +25064,7 @@
                 </a:solidFill>
                 <a:latin typeface="Calibri"/>
               </a:rPr>
-              <a:t> (da 5 a 35 per pacchetto) e nei </a:t>
+              <a:t> (in mediana da 5 con P1 a 35 con P3) e nei </a:t>
             </a:r>
             <a:r>
               <a:rPr sz="1500" b="1" i="0">
@@ -25555,7 +25555,7 @@
                 </a:solidFill>
                 <a:latin typeface="Calibri"/>
               </a:rPr>
-              <a:t>Il nodo carica un programma già compilato in 0,3–1,5 ms. Compilarlo per un modello nuovo, su un'altra macchina, costa 34–114 ms.</a:t>
+              <a:t>Il nodo carica un programma già compilato: fra i modelli da 0,3 a 1,5 ms. Compilarlo per un modello nuovo, su un'altra macchina: da 34 a 114 ms.</a:t>
             </a:r>
           </a:p>
         </p:txBody>
@@ -25729,7 +25729,7 @@
                 </a:solidFill>
                 <a:latin typeface="Calibri"/>
               </a:rPr>
-              <a:t>Un modello nuovo si installa scrivendo le sue tabelle: 0,24–0,51 ms, nessun compilatore sul nodo. Il programma generico si compila una volta sola, all'accensione (1,2–1,7 s).</a:t>
+              <a:t>Un modello nuovo si installa scrivendo le sue tabelle: fra i modelli da 0,24 a 0,51 ms, nessun compilatore sul nodo. Il programma generico si compila una volta sola, all'accensione (1,2–1,7 s).</a:t>
             </a:r>
           </a:p>
         </p:txBody>
@@ -25903,7 +25903,7 @@
                 </a:solidFill>
                 <a:latin typeface="Calibri"/>
               </a:rPr>
-              <a:t>Cambiare modello non è un criterio di scelta: sul nodo costa meno di 6 ms a tutte. Si sceglie sul costo per pacchetto e su dove serve un compilatore: P1 ne vuole uno per ogni modello nuovo, P2 e P3 no.</a:t>
+              <a:t>Cambiare modello non è un criterio di scelta: sul nodo costa al più 6 ms, con ogni modello e ogni versione. Si sceglie sul costo per pacchetto e su dove serve un compilatore: P1 ne vuole uno per ogni modello nuovo, P2 e P3 no.</a:t>
             </a:r>
           </a:p>
         </p:txBody>
@@ -26226,7 +26226,7 @@
                 </a:solidFill>
                 <a:latin typeface="Calibri"/>
               </a:rPr>
-              <a:t>Nodi della rete.</a:t>
+              <a:t>Nodi della rete</a:t>
             </a:r>
             <a:r>
               <a:rPr lang="it-IT" sz="1400" b="0" i="0" dirty="0">
@@ -26235,7 +26235,7 @@
                 </a:solidFill>
                 <a:latin typeface="Calibri"/>
               </a:rPr>
-              <a:t> Reti da 10 a 100 nodi (56 modelli): il costo resta quello previsto dalla legge, al più 0,03 ns per nodo in più.</a:t>
+              <a:t> (mediane per taglia). Da 10 a 100 nodi il costo resta quello previsto dalla legge: al più 0,03 ns per nodo in più.</a:t>
             </a:r>
             <a:endParaRPr sz="1400" b="0" i="0" dirty="0">
               <a:solidFill>
@@ -26283,7 +26283,7 @@
                 </a:solidFill>
                 <a:latin typeface="Calibri"/>
               </a:rPr>
-              <a:t>Larghezza del modello.</a:t>
+              <a:t>Larghezza del modello</a:t>
             </a:r>
             <a:r>
               <a:rPr sz="1400" b="0" i="0">
@@ -26292,7 +26292,7 @@
                 </a:solidFill>
                 <a:latin typeface="Calibri"/>
               </a:rPr>
-              <a:t> Da 2 a 8 neuroni sale su tutte: P1 da 37 a 90 ns, P3 da 389 a 537 ns.</a:t>
+              <a:t> (mediane). Con 2 neuroni P1 costa 37 ns, con 8 90; P3 da 389 a 537 ns.</a:t>
             </a:r>
           </a:p>
         </p:txBody>
@@ -28297,7 +28297,7 @@
                 </a:solidFill>
                 <a:latin typeface="Calibri"/>
               </a:rPr>
-              <a:t>Dimensione.</a:t>
+              <a:t>Dimensione</a:t>
             </a:r>
             <a:r>
               <a:rPr sz="1400" b="0" i="0">
@@ -28306,7 +28306,7 @@
                 </a:solidFill>
                 <a:latin typeface="Calibri"/>
               </a:rPr>
-              <a:t> P2 si ricompila per ogni profondità: ~890 istruzioni in più per strato. P3 resta di 12 288 istruzioni con ogni modello.</a:t>
+              <a:t> (legge). P2: ~890 istruzioni in più per strato. P3: sempre 12 288.</a:t>
             </a:r>
           </a:p>
         </p:txBody>
@@ -28348,7 +28348,7 @@
                 </a:solidFill>
                 <a:latin typeface="Calibri"/>
               </a:rPr>
-              <a:t>Tempo.</a:t>
+              <a:t>Tempo</a:t>
             </a:r>
             <a:r>
               <a:rPr sz="1400" b="0" i="0">
@@ -28357,7 +28357,7 @@
                 </a:solidFill>
                 <a:latin typeface="Calibri"/>
               </a:rPr>
-              <a:t> Ogni strato costa a P3 ~46 ns, a P2 ~20, a P1 e P1.5 ~1.</a:t>
+              <a:t> (legge). Ogni strato costa a P3 ~46 ns, a P2 ~20, a P1 e P1.5 ~1.</a:t>
             </a:r>
           </a:p>
         </p:txBody>
@@ -28926,7 +28926,7 @@
                 </a:solidFill>
                 <a:latin typeface="Calibri"/>
               </a:rPr>
-              <a:t>Generiche: la profondità si paga</a:t>
+              <a:t>P2 e P3: la profondità si paga</a:t>
             </a:r>
           </a:p>
         </p:txBody>
@@ -28968,7 +28968,7 @@
                 </a:solidFill>
                 <a:latin typeface="Calibri"/>
               </a:rPr>
-              <a:t>Gli stessi ~592 pesi su 5 strati invece di 1: P2 costa il 48 % in più, P3 il 63 % (~58 ns per strato).</a:t>
+              <a:t>In mediana, gli stessi ~592 pesi su 5 strati invece di 1: P2 costa il 48 % in più, P3 il 63 % (~58 ns per strato).</a:t>
             </a:r>
           </a:p>
         </p:txBody>
@@ -29100,7 +29100,7 @@
                 </a:solidFill>
                 <a:latin typeface="Calibri"/>
               </a:rPr>
-              <a:t>Specializzate: quasi indifferenti</a:t>
+              <a:t>P1 e P1.5: quasi indifferenti</a:t>
             </a:r>
           </a:p>
         </p:txBody>
@@ -29151,7 +29151,7 @@
                 </a:solidFill>
                 <a:latin typeface="Calibri"/>
               </a:rPr>
-              <a:t>: P1 e P1.5 scrivono la rete per esteso in una funzione sola, e la forma conta poco (~4 ns per strato).</a:t>
+              <a:t>, secondo forma e versione (mediane): P1 e P1.5 scrivono la rete per esteso, e la forma conta poco (~4 ns per strato).</a:t>
             </a:r>
           </a:p>
         </p:txBody>
@@ -30568,7 +30568,7 @@
                 </a:solidFill>
                 <a:latin typeface="Calibri"/>
               </a:rPr>
-              <a:t>Al 90 % di zeri il programma scende a circa un terzo (0,34–0,35 volte) e la rete costa 0,62 volte quanto previsto per lo stesso modello senza zeri: il compilatore toglie le moltiplicazioni per zero.</a:t>
+              <a:t>Al 90 % di zeri il programma scende a circa un terzo (0,34–0,35 volte) e la rete costa, in mediana, 0,62 volte il previsto: il compilatore toglie le moltiplicazioni per zero.</a:t>
             </a:r>
           </a:p>
         </p:txBody>
@@ -30742,7 +30742,7 @@
                 </a:solidFill>
                 <a:latin typeface="Calibri"/>
               </a:rPr>
-              <a:t>Programma identico e costo come previsto (1,02 volte per P2, 1,01 per P3): uno zero letto da una tabella è un numero come un altro.</a:t>
+              <a:t>Programma identico e costo come previsto: 1,02 volte per P2, 1,01 per P3 (mediane), uguale entro il rumore. Uno zero letto da una tabella è un numero come un altro.</a:t>
             </a:r>
           </a:p>
         </p:txBody>
@@ -30970,7 +30970,7 @@
                 </a:solidFill>
                 <a:latin typeface="Calibri"/>
               </a:rPr>
-              <a:t> volte il previsto. Con P2 e P3 non dà niente.</a:t>
+              <a:t> volte il previsto, in mediana. Con P2 e P3 non dà niente.</a:t>
             </a:r>
           </a:p>
         </p:txBody>
@@ -31268,7 +31268,7 @@
                 </a:solidFill>
                 <a:latin typeface="Calibri"/>
               </a:rPr>
-              <a:t>: da 5 a 117 ingressi, da 1 a 6 strati, da 2 a 8 neuroni per strato. Una conclusione vale solo se regge su tutte.</a:t>
+              <a:t>: da 5 a 117 ingressi, da 1 a 6 strati, da 2 a 8 neuroni per strato. Nessuna cifra è di un modello solo.</a:t>
             </a:r>
           </a:p>
         </p:txBody>
@@ -31298,14 +31298,14 @@
                 <a:tableStyleId>{2D5ABB26-0587-4C30-8999-92F81FD0307C}</a:tableStyleId>
               </a:tblPr>
               <a:tblGrid>
-                <a:gridCol w="3319270">
+                <a:gridCol w="4204409">
                   <a:extLst>
                     <a:ext uri="{9D8B030D-6E8A-4147-A177-3AD203B41FA5}">
                       <a16:colId xmlns:a16="http://schemas.microsoft.com/office/drawing/2014/main" val="20000"/>
                     </a:ext>
                   </a:extLst>
                 </a:gridCol>
-                <a:gridCol w="7744966">
+                <a:gridCol w="6859827">
                   <a:extLst>
                     <a:ext uri="{9D8B030D-6E8A-4147-A177-3AD203B41FA5}">
                       <a16:colId xmlns:a16="http://schemas.microsoft.com/office/drawing/2014/main" val="20001"/>
@@ -31392,7 +31392,7 @@
                           </a:solidFill>
                           <a:latin typeface="Calibri"/>
                         </a:rPr>
-                        <a:t>52 [19–155] ns</a:t>
+                        <a:t>52 ns (in mediana)</a:t>
                       </a:r>
                       <a:endParaRPr sz="1500" b="1" i="0">
                         <a:solidFill>
@@ -31421,7 +31421,7 @@
                           </a:solidFill>
                           <a:latin typeface="Calibri"/>
                         </a:rPr>
-                        <a:t>la mediana dei modelli e, fra parentesi, il più leggero e il più pesante</a:t>
+                        <a:t>metà dei modelli costa meno, metà di più</a:t>
                       </a:r>
                       <a:endParaRPr sz="1500" b="0" i="0">
                         <a:solidFill>
@@ -31457,7 +31457,7 @@
                           </a:solidFill>
                           <a:latin typeface="Calibri"/>
                         </a:rPr>
-                        <a:t>85/85</a:t>
+                        <a:t>fra i modelli da 19 a 155 ns</a:t>
                       </a:r>
                       <a:endParaRPr sz="1500" b="1" i="0">
                         <a:solidFill>
@@ -31486,7 +31486,7 @@
                           </a:solidFill>
                           <a:latin typeface="Calibri"/>
                         </a:rPr>
-                        <a:t>vale su 85 modelli su 85</a:t>
+                        <a:t>dal modello più leggero al più pesante: sono modelli diversi, non un errore</a:t>
                       </a:r>
                       <a:endParaRPr sz="1500" b="0" i="0">
                         <a:solidFill>
@@ -31522,7 +31522,7 @@
                           </a:solidFill>
                           <a:latin typeface="Calibri"/>
                         </a:rPr>
-                        <a:t>4,3 volte</a:t>
+                        <a:t>85/85</a:t>
                       </a:r>
                       <a:endParaRPr sz="1500" b="1" i="0">
                         <a:solidFill>
@@ -31551,7 +31551,7 @@
                           </a:solidFill>
                           <a:latin typeface="Calibri"/>
                         </a:rPr>
-                        <a:t>un rapporto calcolato modello per modello, poi la mediana</a:t>
+                        <a:t>vale su 85 modelli su 85</a:t>
                       </a:r>
                       <a:endParaRPr sz="1500" b="0" i="0">
                         <a:solidFill>
@@ -31587,7 +31587,7 @@
                           </a:solidFill>
                           <a:latin typeface="Calibri"/>
                         </a:rPr>
-                        <a:t>senza rete</a:t>
+                        <a:t>rumore ±5 %</a:t>
                       </a:r>
                       <a:endParaRPr sz="1500" b="1" i="0">
                         <a:solidFill>
@@ -31616,7 +31616,7 @@
                           </a:solidFill>
                           <a:latin typeface="Calibri"/>
                         </a:rPr>
-                        <a:t>il nodo che riceve e inoltra senza rete neurale: il costo fisso</a:t>
+                        <a:t>una misura rifatta un altro giorno cambia fino a tanto</a:t>
                       </a:r>
                       <a:endParaRPr sz="1500" b="0" i="0">
                         <a:solidFill>
@@ -31697,7 +31697,25 @@
                 </a:solidFill>
                 <a:latin typeface="Calibri"/>
               </a:rPr>
-              <a:t> è il computer che riceve il pacchetto, esegue la rete neurale per scegliere da quale porta farlo uscire, e lo inoltra. Il processore ha tre tipi di core: </a:t>
+              <a:t> riceve il pacchetto, esegue la rete neurale per scegliere la porta d'uscita e lo inoltra; </a:t>
+            </a:r>
+            <a:r>
+              <a:rPr sz="1300" b="1" i="0">
+                <a:solidFill>
+                  <a:srgbClr val="222B36"/>
+                </a:solidFill>
+                <a:latin typeface="Calibri"/>
+              </a:rPr>
+              <a:t>senza rete</a:t>
+            </a:r>
+            <a:r>
+              <a:rPr sz="1300" b="0" i="0">
+                <a:solidFill>
+                  <a:srgbClr val="222B36"/>
+                </a:solidFill>
+                <a:latin typeface="Calibri"/>
+              </a:rPr>
+              <a:t> è lo stesso nodo senza rete neurale, il costo fisso. Core: </a:t>
             </a:r>
             <a:r>
               <a:rPr sz="1300" b="1" i="0">
@@ -31751,7 +31769,7 @@
                 </a:solidFill>
                 <a:latin typeface="Calibri"/>
               </a:rPr>
-              <a:t> a basso consumo. Un nanosecondo (ns) è un miliardesimo di secondo.</a:t>
+              <a:t> a basso consumo. 1 ns = un miliardesimo di secondo.</a:t>
             </a:r>
           </a:p>
         </p:txBody>
@@ -32354,7 +32372,7 @@
                 </a:solidFill>
                 <a:latin typeface="Calibri"/>
               </a:rPr>
-              <a:t>15,0 milioni di pacchetti/s</a:t>
+              <a:t>mediana · 15,0 milioni di pacchetti/s</a:t>
             </a:r>
           </a:p>
         </p:txBody>
@@ -32570,7 +32588,7 @@
                 </a:solidFill>
                 <a:latin typeface="Calibri"/>
               </a:rPr>
-              <a:t>4,5–11,7 milioni di pacchetti/s</a:t>
+              <a:t>fra i modelli · 4,5–11,7 milioni/s</a:t>
             </a:r>
           </a:p>
         </p:txBody>
@@ -32786,7 +32804,7 @@
                 </a:solidFill>
                 <a:latin typeface="Calibri"/>
               </a:rPr>
-              <a:t>2,0–5,1 milioni di pacchetti/s</a:t>
+              <a:t>fra i modelli · 2,0–5,1 milioni/s</a:t>
             </a:r>
           </a:p>
         </p:txBody>
@@ -33002,7 +33020,7 @@
                 </a:solidFill>
                 <a:latin typeface="Calibri"/>
               </a:rPr>
-              <a:t>1,1–3,3 milioni di pacchetti/s</a:t>
+              <a:t>fra i modelli · 1,1–3,3 milioni/s</a:t>
             </a:r>
           </a:p>
         </p:txBody>
@@ -33194,7 +33212,7 @@
                 </a:solidFill>
                 <a:latin typeface="Calibri"/>
               </a:rPr>
-              <a:t>, con qualunque modello. La rete neurale aggiunge </a:t>
+              <a:t> in mediana, con qualunque modello. La rete neurale aggiunge, dal modello più leggero al più pesante, </a:t>
             </a:r>
             <a:r>
               <a:rPr sz="1400" b="1" i="0">
@@ -33212,7 +33230,7 @@
                 </a:solidFill>
                 <a:latin typeface="Calibri"/>
               </a:rPr>
-              <a:t> con i pesi scritti nel programma (P1), </a:t>
+              <a:t> con P1, </a:t>
             </a:r>
             <a:r>
               <a:rPr sz="1400" b="1" i="0">
@@ -33230,7 +33248,7 @@
                 </a:solidFill>
                 <a:latin typeface="Calibri"/>
               </a:rPr>
-              <a:t> se la forma si legge da tabella (P2), </a:t>
+              <a:t> con P2, </a:t>
             </a:r>
             <a:r>
               <a:rPr sz="1400" b="1" i="0">
@@ -33248,7 +33266,7 @@
                 </a:solidFill>
                 <a:latin typeface="Calibri"/>
               </a:rPr>
-              <a:t> se anche il numero di strati (P3). Un core regge da 11,7 a 1,1 milioni di pacchetti al secondo.</a:t>
+              <a:t> con P3. Un core regge fra 11,7 e 1,1 milioni di pacchetti al secondo.</a:t>
             </a:r>
           </a:p>
         </p:txBody>
@@ -33624,7 +33642,7 @@
                 </a:solidFill>
                 <a:latin typeface="Calibri"/>
               </a:rPr>
-              <a:t> al più 0,3 % di differenza (0,7 % sul LP E-core).</a:t>
+              <a:t> al più 0,3 % di differenza (0,7 % sul LP E-core), meno del rumore.</a:t>
             </a:r>
           </a:p>
         </p:txBody>
@@ -33988,7 +34006,7 @@
                 </a:solidFill>
                 <a:latin typeface="Calibri"/>
               </a:rPr>
-              <a:t>Su un E-core il nodo regge dal 61 al 91 % del P-core</a:t>
+              <a:t>Un E-core regge dal 61 al 91 % di un P-core</a:t>
             </a:r>
           </a:p>
         </p:txBody>
@@ -34150,7 +34168,7 @@
                 </a:solidFill>
                 <a:latin typeface="Calibri"/>
               </a:rPr>
-              <a:t>Milioni di pacchetti al secondo.</a:t>
+              <a:t>Capacità</a:t>
             </a:r>
             <a:r>
               <a:rPr sz="1400" b="0" i="0">
@@ -34159,7 +34177,7 @@
                 </a:solidFill>
                 <a:latin typeface="Calibri"/>
               </a:rPr>
-              <a:t> Rispetto al P-core, l'E-core regge 0,61–0,66 volte senza rete e 0,72–0,89 volte con P3.</a:t>
+              <a:t> (mediane). Fra i modelli, l'E-core regge da 0,61 a 0,66 volte il P-core senza rete, da 0,72 a 0,89 con P3.</a:t>
             </a:r>
           </a:p>
         </p:txBody>
@@ -34201,7 +34219,7 @@
                 </a:solidFill>
                 <a:latin typeface="Calibri"/>
               </a:rPr>
-              <a:t>Tempo per pacchetto.</a:t>
+              <a:t>Tempo per pacchetto</a:t>
             </a:r>
             <a:r>
               <a:rPr sz="1400" b="0" i="0">
@@ -34210,7 +34228,7 @@
                 </a:solidFill>
                 <a:latin typeface="Calibri"/>
               </a:rPr>
-              <a:t> Sull'E-core il lavoro fisso del nodo costa il 56 % in più, la rete neurale di P3 solo il 13 %.</a:t>
+              <a:t> (mediane). Sull'E-core il lavoro fisso costa il 56 % in più, la rete di P3 solo il 13 %.</a:t>
             </a:r>
           </a:p>
         </p:txBody>
@@ -34402,7 +34420,7 @@
                 </a:solidFill>
                 <a:latin typeface="Calibri"/>
               </a:rPr>
-              <a:t> (ricevere e inoltrare): più la rete pesa sul totale, meno conta il core. Il core a basso consumo (LP E-core, 2,5 GHz) regge dal 32 al 53 % del P-core.</a:t>
+              <a:t> (ricevere e inoltrare): più la rete pesa sul totale, meno conta il core. Il LP E-core (2,5 GHz) regge dal 32 al 53 % del P-core, secondo modello e versione.</a:t>
             </a:r>
           </a:p>
         </p:txBody>
@@ -35379,7 +35397,7 @@
                 </a:solidFill>
                 <a:latin typeface="Calibri"/>
               </a:rPr>
-              <a:t>Il codice è lo stesso su ogni core; cambia quante istruzioni il core esegue a ogni ciclo di clock (IPC): 2,6 → 1,7 senza rete, dove il kernel salta e aspetta la memoria; 4,4 → 3,7 con P3, una fila di moltiplicazioni.</a:t>
+              <a:t>Il codice è lo stesso su ogni core; cambia quante istruzioni il core esegue a ogni ciclo di clock (IPC, mediane): 2,6 → 1,7 senza rete, dove il kernel salta e aspetta la memoria; 4,4 → 3,7 con P3, una fila di moltiplicazioni.</a:t>
             </a:r>
           </a:p>
         </p:txBody>
@@ -35617,7 +35635,7 @@
                 </a:solidFill>
                 <a:latin typeface="Calibri"/>
               </a:rPr>
-              <a:t>Cicli di clock per pacchetto, contati dal processore  ·  parte fissa = il nodo senza rete, rete = il resto  ·  mediane su 91 modelli</a:t>
+              <a:t>Cicli di clock per pacchetto, contati dal processore  ·  barre e cifre grandi: mediane su 91 modelli  ·  sotto le cifre: fra i modelli</a:t>
             </a:r>
           </a:p>
         </p:txBody>
@@ -35851,7 +35869,7 @@
                 </a:solidFill>
                 <a:latin typeface="Calibri"/>
               </a:rPr>
-              <a:t>231 → 360 cicli, P → E (1,50–1,60×)</a:t>
+              <a:t>fra i modelli da +50 % a +60 %</a:t>
             </a:r>
           </a:p>
         </p:txBody>
@@ -36025,7 +36043,7 @@
                 </a:solidFill>
                 <a:latin typeface="Calibri"/>
               </a:rPr>
-              <a:t>−6%</a:t>
+              <a:t>≈ uguale</a:t>
             </a:r>
           </a:p>
         </p:txBody>
@@ -36067,7 +36085,7 @@
                 </a:solidFill>
                 <a:latin typeface="Calibri"/>
               </a:rPr>
-              <a:t>183 → 172 cicli (0,55–1,17×)</a:t>
+              <a:t>fra i modelli da −45 % a +17 %</a:t>
             </a:r>
           </a:p>
         </p:txBody>
@@ -36283,7 +36301,7 @@
                 </a:solidFill>
                 <a:latin typeface="Calibri"/>
               </a:rPr>
-              <a:t>785 → 858 cicli (1,02–1,18×)</a:t>
+              <a:t>fra i modelli da +2 % a +18 %</a:t>
             </a:r>
           </a:p>
         </p:txBody>
@@ -36499,7 +36517,7 @@
                 </a:solidFill>
                 <a:latin typeface="Calibri"/>
               </a:rPr>
-              <a:t>1 467 → 1 662 cicli (1,05–1,40×)</a:t>
+              <a:t>fra i modelli da +5 % a +40 %</a:t>
             </a:r>
           </a:p>
         </p:txBody>
@@ -36998,7 +37016,7 @@
                 </a:solidFill>
                 <a:latin typeface="Calibri"/>
               </a:rPr>
-              <a:t> (il dato non è in cache): zero su P-core ed E-core, 14–19 per pacchetto sul LP E-core.</a:t>
+              <a:t> (mediane): zero su P-core ed E-core, 14–19 sul LP E-core.</a:t>
             </a:r>
           </a:p>
         </p:txBody>
@@ -37040,7 +37058,7 @@
                 </a:solidFill>
                 <a:latin typeface="Calibri"/>
               </a:rPr>
-              <a:t>Cicli per pacchetto.</a:t>
+              <a:t>Cicli per pacchetto</a:t>
             </a:r>
             <a:r>
               <a:rPr sz="1400" b="0" i="0">
@@ -37049,7 +37067,7 @@
                 </a:solidFill>
                 <a:latin typeface="Calibri"/>
               </a:rPr>
-              <a:t> Per P3: 1 614 sul P-core, 1 944 sull'E-core, 2 435 sul LP E-core; in tempo 462, 562 e 976 ns.</a:t>
+              <a:t> (mediane). Per P3: 1 614 sul P-core, 1 944 sull'E-core, 2 435 sul LP E-core; in tempo 462, 562 e 976 ns.</a:t>
             </a:r>
           </a:p>
         </p:txBody>
@@ -37223,7 +37241,7 @@
                 </a:solidFill>
                 <a:latin typeface="Calibri"/>
               </a:rPr>
-              <a:t>Il LP E-core sta in un'altra parte del chip, fuori dalla cache che gli altri core condividono: i pacchetti gli arrivano dalla memoria. Fra attese, un core più semplice e 2,5 GHz regge dal 32 al 53 % del P-core.</a:t>
+              <a:t>Il LP E-core sta in un'altra parte del chip, fuori dalla cache che gli altri core condividono: i pacchetti gli arrivano dalla memoria. Fra attese, un core più semplice e 2,5 GHz regge dal 32 al 53 % del P-core, secondo modello e versione.</a:t>
             </a:r>
           </a:p>
         </p:txBody>
@@ -37461,7 +37479,7 @@
                 </a:solidFill>
                 <a:latin typeface="Calibri"/>
               </a:rPr>
-              <a:t>Traffico crescente da 0,5 a 12 milioni di pacchetti al secondo, 6 modelli dal più leggero al più pesante  ·  entrambi gli assi divisi per la capacità del modello</a:t>
+              <a:t>Traffico da 0,5 a 12 milioni di pacchetti al secondo, 6 modelli  ·  assi divisi per la capacità del modello, misurata in un'altra sessione  ·  curve: mediana</a:t>
             </a:r>
           </a:p>
         </p:txBody>
@@ -37548,7 +37566,7 @@
                 </a:solidFill>
                 <a:latin typeface="Calibri"/>
               </a:rPr>
-              <a:t> Fino alla capacità passa tutto, poi la curva resta piatta: il massimo inoltrato è 0,98 volte la capacità misurata a parte.</a:t>
+              <a:t> Fino alla capacità passa tutto, poi la curva è piatta a 0,98 volte la capacità (mediana); poco sopra 1 è rumore.</a:t>
             </a:r>
           </a:p>
         </p:txBody>
@@ -37599,7 +37617,7 @@
                 </a:solidFill>
                 <a:latin typeface="Calibri"/>
               </a:rPr>
-              <a:t> Stesso andamento (0,99). Divise per la capacità del loro modello, le curve di modelli diversi coincidono.</a:t>
+              <a:t> Stesso andamento (0,99 in mediana). Divise per la capacità del loro modello, le curve coincidono.</a:t>
             </a:r>
           </a:p>
         </p:txBody>
